--- a/ground-vehicle/docs/courses/beginner-ps3/l1_introduction.pptx
+++ b/ground-vehicle/docs/courses/beginner-ps3/l1_introduction.pptx
@@ -10234,7 +10234,7 @@
       </p:sp>
       <p:sp>
         <p:nvSpPr>
-          <p:cNvPr id="7" name="Rounded Rectangle 6"/>
+          <p:cNvPr id="7" name="CODE_PANEL"/>
           <p:cNvSpPr/>
           <p:nvPr/>
         </p:nvSpPr>
@@ -13262,7 +13262,7 @@
       </p:sp>
       <p:sp>
         <p:nvSpPr>
-          <p:cNvPr id="7" name="Rounded Rectangle 6"/>
+          <p:cNvPr id="7" name="CODE_PANEL"/>
           <p:cNvSpPr/>
           <p:nvPr/>
         </p:nvSpPr>
@@ -15263,7 +15263,7 @@
       </p:sp>
       <p:sp>
         <p:nvSpPr>
-          <p:cNvPr id="7" name="Rounded Rectangle 6"/>
+          <p:cNvPr id="7" name="CODE_PANEL"/>
           <p:cNvSpPr/>
           <p:nvPr/>
         </p:nvSpPr>
@@ -15433,7 +15433,7 @@
                 </a:solidFill>
                 <a:latin typeface="Consolas"/>
               </a:rPr>
-              <a:t> </a:t>
+              <a:t>const int BRIGHTNESS = 60;    // master brightness, 0 to 255</a:t>
             </a:r>
           </a:p>
           <a:p>
@@ -15455,7 +15455,7 @@
                 </a:solidFill>
                 <a:latin typeface="Consolas"/>
               </a:rPr>
-              <a:t>Adafruit_NeoPixel strip(LED_COUNT, LED_PIN,</a:t>
+              <a:t> </a:t>
             </a:r>
           </a:p>
           <a:p>
@@ -15477,7 +15477,7 @@
                 </a:solidFill>
                 <a:latin typeface="Consolas"/>
               </a:rPr>
-              <a:t>                        NEO_GRB + NEO_KHZ800);</a:t>
+              <a:t>Adafruit_NeoPixel strip(LED_COUNT, LED_PIN, NEO_GRB + NEO_KHZ800);</a:t>
             </a:r>
           </a:p>
           <a:p>
@@ -15565,7 +15565,7 @@
                 </a:solidFill>
                 <a:latin typeface="Consolas"/>
               </a:rPr>
-              <a:t>  strip.setBrightness(60);</a:t>
+              <a:t>  strip.setBrightness(BRIGHTNESS);</a:t>
             </a:r>
           </a:p>
           <a:p>

--- a/ground-vehicle/docs/courses/beginner-ps3/l1_introduction.pptx
+++ b/ground-vehicle/docs/courses/beginner-ps3/l1_introduction.pptx
@@ -654,7 +654,7 @@
               <a:rPr sz="1200">
                 <a:latin typeface="Calibri"/>
               </a:rPr>
-              <a:t>Name each part while holding a vehicle, then put the labelled picture up on the next slide and let them match the two.</a:t>
+              <a:t>Name each part while holding a vehicle, then put the labeled picture up on the next slide and let them match the two.</a:t>
             </a:r>
           </a:p>
           <a:p>
@@ -1787,7 +1787,7 @@
               <a:rPr sz="1200">
                 <a:latin typeface="Calibri"/>
               </a:rPr>
-              <a:t>Get the fast finishers helping their neighbours rather than sitting idle.</a:t>
+              <a:t>Get the fast finishers helping their neighbors rather than sitting idle.</a:t>
             </a:r>
           </a:p>
           <a:p>
@@ -3011,7 +3011,7 @@
               <a:rPr sz="1200">
                 <a:latin typeface="Calibri"/>
               </a:rPr>
-              <a:t>The long leg is the anode and goes towards the pin. Backwards means no light and no damage, so let them find out.</a:t>
+              <a:t>The long leg is the anode and goes toward the pin. Backwards means no light and no damage, so let them find out.</a:t>
             </a:r>
           </a:p>
           <a:p>
@@ -5059,7 +5059,7 @@
               <a:rPr sz="1200">
                 <a:latin typeface="Calibri"/>
               </a:rPr>
-              <a:t>This is the slide to point at when somebody asks why they are doing maths in a robotics class.</a:t>
+              <a:t>This is the slide to point at when somebody asks why they are doing math in a robotics class.</a:t>
             </a:r>
           </a:p>
           <a:p>
@@ -5157,7 +5157,7 @@
               <a:rPr sz="1200">
                 <a:latin typeface="Calibri"/>
               </a:rPr>
-              <a:t>This is the slide to point at when somebody asks why they are doing maths in a robotics class.</a:t>
+              <a:t>This is the slide to point at when somebody asks why they are doing math in a robotics class.</a:t>
             </a:r>
           </a:p>
           <a:p>
@@ -9456,7 +9456,7 @@
       </p:sp>
       <p:pic>
         <p:nvPicPr>
-          <p:cNvPr id="6" name="Picture 5" descr="vehicle-parts-labelled.jpg"/>
+          <p:cNvPr id="6" name="Picture 5" descr="vehicle-parts-labeled.jpg"/>
           <p:cNvPicPr>
             <a:picLocks noChangeAspect="1"/>
           </p:cNvPicPr>
@@ -10056,7 +10056,7 @@
       </p:sp>
       <p:pic>
         <p:nvPicPr>
-          <p:cNvPr id="6" name="Picture 5" descr="vehicle-dev-system-labelled.jpg"/>
+          <p:cNvPr id="6" name="Picture 5" descr="vehicle-dev-system-labeled.jpg"/>
           <p:cNvPicPr>
             <a:picLocks noChangeAspect="1"/>
           </p:cNvPicPr>
@@ -11467,7 +11467,7 @@
                 </a:solidFill>
                 <a:latin typeface="Calibri"/>
               </a:rPr>
-              <a:t>Wheels are at the vehicle's vertical centre, so it runs either way up. Taken from floor level, mid-drive.</a:t>
+              <a:t>Wheels are at the vehicle's vertical center, so it runs either way up. Taken from floor level, mid-drive.</a:t>
             </a:r>
           </a:p>
         </p:txBody>
@@ -15592,7 +15592,7 @@
                 </a:solidFill>
                 <a:latin typeface="Calibri"/>
               </a:rPr>
-              <a:t>7.   Light any one of the 32 LEDs, in any colour</a:t>
+              <a:t>7.   Light any one of the 32 LEDs, in any color</a:t>
             </a:r>
           </a:p>
         </p:txBody>
@@ -16767,7 +16767,7 @@
                 </a:solidFill>
                 <a:latin typeface="Calibri"/>
               </a:rPr>
-              <a:t>If the install will not go through, pair up with a neighbour and carry on - you lose nothing today. Note down the error and we will sort the machine out afterwards.</a:t>
+              <a:t>If the install will not go through, pair up with a neighbor and carry on - you lose nothing today. Note down the error and we will sort the machine out afterwards.</a:t>
             </a:r>
           </a:p>
         </p:txBody>
@@ -24929,7 +24929,7 @@
                 </a:solidFill>
                 <a:latin typeface="Calibri"/>
               </a:rPr>
-              <a:t>Long leg of the LED towards the resistor and GPIO 2. Short leg towards ground. Backwards means no light, no damage - just turn it round.</a:t>
+              <a:t>Long leg of the LED toward the resistor and GPIO 2. Short leg toward ground. Backwards means no light, no damage - just turn it round.</a:t>
             </a:r>
           </a:p>
         </p:txBody>
@@ -31730,7 +31730,7 @@
                 </a:solidFill>
                 <a:latin typeface="Calibri"/>
               </a:rPr>
-              <a:t>5.  Change the two numbers in the maths section. PREDICT the answers before you upload, then check.</a:t>
+              <a:t>5.  Change the two numbers in the math section. PREDICT the answers before you upload, then check.</a:t>
             </a:r>
           </a:p>
           <a:p>
@@ -32528,7 +32528,7 @@
                 </a:solidFill>
                 <a:latin typeface="Calibri"/>
               </a:rPr>
-              <a:t>Send a colour message into the first one and it keeps the first message, then passes everything after it down the chain to the next.</a:t>
+              <a:t>Send a color message into the first one and it keeps the first message, then passes everything after it down the chain to the next.</a:t>
             </a:r>
           </a:p>
           <a:p>
@@ -32619,7 +32619,7 @@
                 </a:solidFill>
                 <a:latin typeface="Calibri"/>
               </a:rPr>
-              <a:t>Each one holds three LEDs: red, green and blue. Every colour you can make is a mixture of those three, each from 0 to 255.</a:t>
+              <a:t>Each one holds three LEDs: red, green and blue. Every color you can make is a mixture of those three, each from 0 to 255.</a:t>
             </a:r>
           </a:p>
         </p:txBody>
@@ -33517,7 +33517,7 @@
                 </a:solidFill>
                 <a:latin typeface="Calibri"/>
               </a:rPr>
-              <a:t>NEO_GRB says these LEDs want their colour data green first. NEO_KHZ800 is the speed it is clocked out at. Both are correct for the WS2812B parts we use.</a:t>
+              <a:t>NEO_GRB says these LEDs want their color data green first. NEO_KHZ800 is the speed it is clocked out at. Both are correct for the WS2812B parts we use.</a:t>
             </a:r>
           </a:p>
           <a:p>
@@ -35747,7 +35747,7 @@
                 </a:solidFill>
                 <a:latin typeface="Calibri"/>
               </a:rPr>
-              <a:t>4.  Invent a colour with strip.Color(r, g, b). What do you get from (255, 255, 0)? From (128, 0, 128)?</a:t>
+              <a:t>4.  Invent a color with strip.Color(r, g, b). What do you get from (255, 255, 0)? From (128, 0, 128)?</a:t>
             </a:r>
           </a:p>
           <a:p>
@@ -37533,7 +37533,7 @@
                 </a:solidFill>
                 <a:latin typeface="Calibri"/>
               </a:rPr>
-              <a:t>Maths and science you will actually use</a:t>
+              <a:t>Math and science you will actually use</a:t>
             </a:r>
           </a:p>
         </p:txBody>
@@ -38113,7 +38113,7 @@
                 <a:spcPct val="100000"/>
               </a:lnSpc>
               <a:spcAft>
-                <a:spcPts val="200"/>
+                <a:spcPts val="600"/>
               </a:spcAft>
               <a:defRPr sz="1800" b="1">
                 <a:solidFill>
@@ -38129,7 +38129,7 @@
                 </a:solidFill>
                 <a:latin typeface="Calibri"/>
               </a:rPr>
-              <a:t>Maths and science you will actually use (cont.)</a:t>
+              <a:t>Math and science you will actually use (cont.)</a:t>
             </a:r>
           </a:p>
         </p:txBody>
@@ -38202,7 +38202,7 @@
                 </a:solidFill>
                 <a:latin typeface="Calibri"/>
               </a:rPr>
-              <a:t>Wavelength and colour perception, for the lighting</a:t>
+              <a:t>Wavelength and color perception, for the lighting</a:t>
             </a:r>
           </a:p>
           <a:p>
@@ -38293,7 +38293,7 @@
                 </a:solidFill>
                 <a:latin typeface="Calibri"/>
               </a:rPr>
-              <a:t>STEM is not four subjects. It is using maths and science to build something that has to actually work.</a:t>
+              <a:t>STEM is not four subjects. It is using math and science to build something that has to actually work.</a:t>
             </a:r>
           </a:p>
         </p:txBody>

--- a/ground-vehicle/docs/courses/beginner-ps3/l1_introduction.pptx
+++ b/ground-vehicle/docs/courses/beginner-ps3/l1_introduction.pptx
@@ -27838,7 +27838,7 @@
         <p:spPr>
           <a:xfrm>
             <a:off x="502920" y="1901952"/>
-            <a:ext cx="5387187" cy="4361688"/>
+            <a:ext cx="6249137" cy="4361688"/>
           </a:xfrm>
           <a:prstGeom prst="rect">
             <a:avLst/>
@@ -27856,17 +27856,17 @@
                 <a:spcPct val="100000"/>
               </a:lnSpc>
               <a:spcAft>
-                <a:spcPts val="400"/>
-              </a:spcAft>
-              <a:defRPr sz="1800" b="0">
-                <a:solidFill>
-                  <a:srgbClr val="222222"/>
-                </a:solidFill>
-                <a:latin typeface="Calibri"/>
-              </a:defRPr>
-            </a:pPr>
-            <a:r>
-              <a:rPr sz="1800" b="0">
+                <a:spcPts val="800"/>
+              </a:spcAft>
+              <a:defRPr sz="1900" b="0">
+                <a:solidFill>
+                  <a:srgbClr val="222222"/>
+                </a:solidFill>
+                <a:latin typeface="Calibri"/>
+              </a:defRPr>
+            </a:pPr>
+            <a:r>
+              <a:rPr sz="1900" b="0">
                 <a:solidFill>
                   <a:srgbClr val="222222"/>
                 </a:solidFill>
@@ -27881,17 +27881,17 @@
                 <a:spcPct val="100000"/>
               </a:lnSpc>
               <a:spcAft>
-                <a:spcPts val="400"/>
-              </a:spcAft>
-              <a:defRPr sz="1800" b="0">
-                <a:solidFill>
-                  <a:srgbClr val="222222"/>
-                </a:solidFill>
-                <a:latin typeface="Calibri"/>
-              </a:defRPr>
-            </a:pPr>
-            <a:r>
-              <a:rPr sz="1800" b="0">
+                <a:spcPts val="800"/>
+              </a:spcAft>
+              <a:defRPr sz="1900" b="0">
+                <a:solidFill>
+                  <a:srgbClr val="222222"/>
+                </a:solidFill>
+                <a:latin typeface="Calibri"/>
+              </a:defRPr>
+            </a:pPr>
+            <a:r>
+              <a:rPr sz="1900" b="0">
                 <a:solidFill>
                   <a:srgbClr val="222222"/>
                 </a:solidFill>
@@ -27906,17 +27906,17 @@
                 <a:spcPct val="100000"/>
               </a:lnSpc>
               <a:spcAft>
-                <a:spcPts val="400"/>
-              </a:spcAft>
-              <a:defRPr sz="1800" b="0">
-                <a:solidFill>
-                  <a:srgbClr val="222222"/>
-                </a:solidFill>
-                <a:latin typeface="Calibri"/>
-              </a:defRPr>
-            </a:pPr>
-            <a:r>
-              <a:rPr sz="1800" b="0">
+                <a:spcPts val="800"/>
+              </a:spcAft>
+              <a:defRPr sz="1900" b="0">
+                <a:solidFill>
+                  <a:srgbClr val="222222"/>
+                </a:solidFill>
+                <a:latin typeface="Calibri"/>
+              </a:defRPr>
+            </a:pPr>
+            <a:r>
+              <a:rPr sz="1900" b="0">
                 <a:solidFill>
                   <a:srgbClr val="222222"/>
                 </a:solidFill>
@@ -27931,17 +27931,17 @@
                 <a:spcPct val="100000"/>
               </a:lnSpc>
               <a:spcAft>
-                <a:spcPts val="400"/>
-              </a:spcAft>
-              <a:defRPr sz="1800" b="0">
-                <a:solidFill>
-                  <a:srgbClr val="222222"/>
-                </a:solidFill>
-                <a:latin typeface="Calibri"/>
-              </a:defRPr>
-            </a:pPr>
-            <a:r>
-              <a:rPr sz="1800" b="0">
+                <a:spcPts val="800"/>
+              </a:spcAft>
+              <a:defRPr sz="1900" b="0">
+                <a:solidFill>
+                  <a:srgbClr val="222222"/>
+                </a:solidFill>
+                <a:latin typeface="Calibri"/>
+              </a:defRPr>
+            </a:pPr>
+            <a:r>
+              <a:rPr sz="1900" b="0">
                 <a:solidFill>
                   <a:srgbClr val="222222"/>
                 </a:solidFill>
@@ -27956,33 +27956,33 @@
                 <a:spcPct val="100000"/>
               </a:lnSpc>
               <a:spcAft>
-                <a:spcPts val="400"/>
-              </a:spcAft>
-              <a:defRPr sz="1800" b="0">
-                <a:solidFill>
-                  <a:srgbClr val="222222"/>
-                </a:solidFill>
-                <a:latin typeface="Calibri"/>
-              </a:defRPr>
-            </a:pPr>
-          </a:p>
-          <a:p>
-            <a:pPr algn="l">
-              <a:lnSpc>
-                <a:spcPct val="100000"/>
-              </a:lnSpc>
-              <a:spcAft>
-                <a:spcPts val="400"/>
-              </a:spcAft>
-              <a:defRPr sz="1800" b="0">
-                <a:solidFill>
-                  <a:srgbClr val="222222"/>
-                </a:solidFill>
-                <a:latin typeface="Calibri"/>
-              </a:defRPr>
-            </a:pPr>
-            <a:r>
-              <a:rPr sz="1800" b="0">
+                <a:spcPts val="800"/>
+              </a:spcAft>
+              <a:defRPr sz="1900" b="0">
+                <a:solidFill>
+                  <a:srgbClr val="222222"/>
+                </a:solidFill>
+                <a:latin typeface="Calibri"/>
+              </a:defRPr>
+            </a:pPr>
+          </a:p>
+          <a:p>
+            <a:pPr algn="l">
+              <a:lnSpc>
+                <a:spcPct val="100000"/>
+              </a:lnSpc>
+              <a:spcAft>
+                <a:spcPts val="800"/>
+              </a:spcAft>
+              <a:defRPr sz="1900" b="0">
+                <a:solidFill>
+                  <a:srgbClr val="222222"/>
+                </a:solidFill>
+                <a:latin typeface="Calibri"/>
+              </a:defRPr>
+            </a:pPr>
+            <a:r>
+              <a:rPr sz="1900" b="0">
                 <a:solidFill>
                   <a:srgbClr val="222222"/>
                 </a:solidFill>
@@ -27997,17 +27997,17 @@
                 <a:spcPct val="100000"/>
               </a:lnSpc>
               <a:spcAft>
-                <a:spcPts val="400"/>
-              </a:spcAft>
-              <a:defRPr sz="1800" b="0">
-                <a:solidFill>
-                  <a:srgbClr val="222222"/>
-                </a:solidFill>
-                <a:latin typeface="Calibri"/>
-              </a:defRPr>
-            </a:pPr>
-            <a:r>
-              <a:rPr sz="1800" b="0">
+                <a:spcPts val="800"/>
+              </a:spcAft>
+              <a:defRPr sz="1900" b="0">
+                <a:solidFill>
+                  <a:srgbClr val="222222"/>
+                </a:solidFill>
+                <a:latin typeface="Calibri"/>
+              </a:defRPr>
+            </a:pPr>
+            <a:r>
+              <a:rPr sz="1900" b="0">
                 <a:solidFill>
                   <a:srgbClr val="222222"/>
                 </a:solidFill>
@@ -28022,17 +28022,17 @@
                 <a:spcPct val="100000"/>
               </a:lnSpc>
               <a:spcAft>
-                <a:spcPts val="400"/>
-              </a:spcAft>
-              <a:defRPr sz="1800" b="0">
-                <a:solidFill>
-                  <a:srgbClr val="222222"/>
-                </a:solidFill>
-                <a:latin typeface="Calibri"/>
-              </a:defRPr>
-            </a:pPr>
-            <a:r>
-              <a:rPr sz="1800" b="0">
+                <a:spcPts val="800"/>
+              </a:spcAft>
+              <a:defRPr sz="1900" b="0">
+                <a:solidFill>
+                  <a:srgbClr val="222222"/>
+                </a:solidFill>
+                <a:latin typeface="Calibri"/>
+              </a:defRPr>
+            </a:pPr>
+            <a:r>
+              <a:rPr sz="1900" b="0">
                 <a:solidFill>
                   <a:srgbClr val="222222"/>
                 </a:solidFill>
@@ -28051,8 +28051,8 @@
         </p:nvSpPr>
         <p:spPr>
           <a:xfrm>
-            <a:off x="6301587" y="1901952"/>
-            <a:ext cx="5387187" cy="365760"/>
+            <a:off x="7163537" y="1901952"/>
+            <a:ext cx="4525238" cy="365760"/>
           </a:xfrm>
           <a:prstGeom prst="rect">
             <a:avLst/>
@@ -28099,8 +28099,8 @@
         </p:nvSpPr>
         <p:spPr>
           <a:xfrm>
-            <a:off x="6301587" y="2304288"/>
-            <a:ext cx="5387187" cy="1778508"/>
+            <a:off x="7163537" y="2304288"/>
+            <a:ext cx="4525238" cy="1280854"/>
           </a:xfrm>
           <a:prstGeom prst="rect">
             <a:avLst/>
@@ -28120,15 +28120,15 @@
               <a:spcAft>
                 <a:spcPts val="300"/>
               </a:spcAft>
-              <a:defRPr sz="2200" b="0">
-                <a:solidFill>
-                  <a:srgbClr val="222222"/>
-                </a:solidFill>
-                <a:latin typeface="Calibri"/>
-              </a:defRPr>
-            </a:pPr>
-            <a:r>
-              <a:rPr sz="2200" b="0">
+              <a:defRPr sz="1800" b="0">
+                <a:solidFill>
+                  <a:srgbClr val="222222"/>
+                </a:solidFill>
+                <a:latin typeface="Calibri"/>
+              </a:defRPr>
+            </a:pPr>
+            <a:r>
+              <a:rPr sz="1800" b="0">
                 <a:solidFill>
                   <a:srgbClr val="222222"/>
                 </a:solidFill>
@@ -28145,15 +28145,15 @@
               <a:spcAft>
                 <a:spcPts val="300"/>
               </a:spcAft>
-              <a:defRPr sz="2200" b="0">
-                <a:solidFill>
-                  <a:srgbClr val="222222"/>
-                </a:solidFill>
-                <a:latin typeface="Calibri"/>
-              </a:defRPr>
-            </a:pPr>
-            <a:r>
-              <a:rPr sz="2200" b="0">
+              <a:defRPr sz="1800" b="0">
+                <a:solidFill>
+                  <a:srgbClr val="222222"/>
+                </a:solidFill>
+                <a:latin typeface="Calibri"/>
+              </a:defRPr>
+            </a:pPr>
+            <a:r>
+              <a:rPr sz="1800" b="0">
                 <a:solidFill>
                   <a:srgbClr val="222222"/>
                 </a:solidFill>
@@ -28172,8 +28172,8 @@
         </p:nvSpPr>
         <p:spPr>
           <a:xfrm>
-            <a:off x="6301587" y="4119372"/>
-            <a:ext cx="5387187" cy="365760"/>
+            <a:off x="7163537" y="3658294"/>
+            <a:ext cx="4525238" cy="365760"/>
           </a:xfrm>
           <a:prstGeom prst="rect">
             <a:avLst/>
@@ -28220,8 +28220,8 @@
         </p:nvSpPr>
         <p:spPr>
           <a:xfrm>
-            <a:off x="6301587" y="4521708"/>
-            <a:ext cx="5387187" cy="1778508"/>
+            <a:off x="7163537" y="4060630"/>
+            <a:ext cx="4525238" cy="2203009"/>
           </a:xfrm>
           <a:prstGeom prst="rect">
             <a:avLst/>
@@ -28239,7 +28239,7 @@
                 <a:spcPct val="100000"/>
               </a:lnSpc>
               <a:spcAft>
-                <a:spcPts val="200"/>
+                <a:spcPts val="300"/>
               </a:spcAft>
               <a:defRPr sz="1800" b="0">
                 <a:solidFill>
@@ -28264,7 +28264,7 @@
                 <a:spcPct val="100000"/>
               </a:lnSpc>
               <a:spcAft>
-                <a:spcPts val="200"/>
+                <a:spcPts val="300"/>
               </a:spcAft>
               <a:defRPr sz="1800" b="0">
                 <a:solidFill>
@@ -28289,7 +28289,7 @@
                 <a:spcPct val="100000"/>
               </a:lnSpc>
               <a:spcAft>
-                <a:spcPts val="200"/>
+                <a:spcPts val="300"/>
               </a:spcAft>
               <a:defRPr sz="1800" b="0">
                 <a:solidFill>
@@ -32219,7 +32219,7 @@
         <p:spPr>
           <a:xfrm>
             <a:off x="502920" y="1901952"/>
-            <a:ext cx="5387187" cy="4361688"/>
+            <a:ext cx="6249137" cy="4361688"/>
           </a:xfrm>
           <a:prstGeom prst="rect">
             <a:avLst/>
@@ -32239,15 +32239,15 @@
               <a:spcAft>
                 <a:spcPts val="800"/>
               </a:spcAft>
-              <a:defRPr sz="1900" b="0">
-                <a:solidFill>
-                  <a:srgbClr val="222222"/>
-                </a:solidFill>
-                <a:latin typeface="Calibri"/>
-              </a:defRPr>
-            </a:pPr>
-            <a:r>
-              <a:rPr sz="1900" b="0">
+              <a:defRPr sz="2000" b="0">
+                <a:solidFill>
+                  <a:srgbClr val="222222"/>
+                </a:solidFill>
+                <a:latin typeface="Calibri"/>
+              </a:defRPr>
+            </a:pPr>
+            <a:r>
+              <a:rPr sz="2000" b="0">
                 <a:solidFill>
                   <a:srgbClr val="222222"/>
                 </a:solidFill>
@@ -32264,15 +32264,15 @@
               <a:spcAft>
                 <a:spcPts val="800"/>
               </a:spcAft>
-              <a:defRPr sz="1900" b="0">
-                <a:solidFill>
-                  <a:srgbClr val="222222"/>
-                </a:solidFill>
-                <a:latin typeface="Calibri"/>
-              </a:defRPr>
-            </a:pPr>
-            <a:r>
-              <a:rPr sz="1900" b="0">
+              <a:defRPr sz="2000" b="0">
+                <a:solidFill>
+                  <a:srgbClr val="222222"/>
+                </a:solidFill>
+                <a:latin typeface="Calibri"/>
+              </a:defRPr>
+            </a:pPr>
+            <a:r>
+              <a:rPr sz="2000" b="0">
                 <a:solidFill>
                   <a:srgbClr val="222222"/>
                 </a:solidFill>
@@ -32289,15 +32289,15 @@
               <a:spcAft>
                 <a:spcPts val="800"/>
               </a:spcAft>
-              <a:defRPr sz="1900" b="0">
-                <a:solidFill>
-                  <a:srgbClr val="222222"/>
-                </a:solidFill>
-                <a:latin typeface="Calibri"/>
-              </a:defRPr>
-            </a:pPr>
-            <a:r>
-              <a:rPr sz="1900" b="0">
+              <a:defRPr sz="2000" b="0">
+                <a:solidFill>
+                  <a:srgbClr val="222222"/>
+                </a:solidFill>
+                <a:latin typeface="Calibri"/>
+              </a:defRPr>
+            </a:pPr>
+            <a:r>
+              <a:rPr sz="2000" b="0">
                 <a:solidFill>
                   <a:srgbClr val="222222"/>
                 </a:solidFill>
@@ -32314,15 +32314,15 @@
               <a:spcAft>
                 <a:spcPts val="800"/>
               </a:spcAft>
-              <a:defRPr sz="1900" b="0">
-                <a:solidFill>
-                  <a:srgbClr val="222222"/>
-                </a:solidFill>
-                <a:latin typeface="Calibri"/>
-              </a:defRPr>
-            </a:pPr>
-            <a:r>
-              <a:rPr sz="1900" b="0">
+              <a:defRPr sz="2000" b="0">
+                <a:solidFill>
+                  <a:srgbClr val="222222"/>
+                </a:solidFill>
+                <a:latin typeface="Calibri"/>
+              </a:defRPr>
+            </a:pPr>
+            <a:r>
+              <a:rPr sz="2000" b="0">
                 <a:solidFill>
                   <a:srgbClr val="222222"/>
                 </a:solidFill>
@@ -32339,15 +32339,15 @@
               <a:spcAft>
                 <a:spcPts val="800"/>
               </a:spcAft>
-              <a:defRPr sz="1900" b="0">
-                <a:solidFill>
-                  <a:srgbClr val="222222"/>
-                </a:solidFill>
-                <a:latin typeface="Calibri"/>
-              </a:defRPr>
-            </a:pPr>
-            <a:r>
-              <a:rPr sz="1900" b="0">
+              <a:defRPr sz="2000" b="0">
+                <a:solidFill>
+                  <a:srgbClr val="222222"/>
+                </a:solidFill>
+                <a:latin typeface="Calibri"/>
+              </a:defRPr>
+            </a:pPr>
+            <a:r>
+              <a:rPr sz="2000" b="0">
                 <a:solidFill>
                   <a:srgbClr val="222222"/>
                 </a:solidFill>
@@ -32364,15 +32364,15 @@
               <a:spcAft>
                 <a:spcPts val="800"/>
               </a:spcAft>
-              <a:defRPr sz="1900" b="0">
-                <a:solidFill>
-                  <a:srgbClr val="222222"/>
-                </a:solidFill>
-                <a:latin typeface="Calibri"/>
-              </a:defRPr>
-            </a:pPr>
-            <a:r>
-              <a:rPr sz="1900" b="0">
+              <a:defRPr sz="2000" b="0">
+                <a:solidFill>
+                  <a:srgbClr val="222222"/>
+                </a:solidFill>
+                <a:latin typeface="Calibri"/>
+              </a:defRPr>
+            </a:pPr>
+            <a:r>
+              <a:rPr sz="2000" b="0">
                 <a:solidFill>
                   <a:srgbClr val="222222"/>
                 </a:solidFill>
@@ -32391,8 +32391,8 @@
         </p:nvSpPr>
         <p:spPr>
           <a:xfrm>
-            <a:off x="6301587" y="1901952"/>
-            <a:ext cx="5387187" cy="365760"/>
+            <a:off x="7163537" y="1901952"/>
+            <a:ext cx="4525238" cy="365760"/>
           </a:xfrm>
           <a:prstGeom prst="rect">
             <a:avLst/>
@@ -32439,8 +32439,8 @@
         </p:nvSpPr>
         <p:spPr>
           <a:xfrm>
-            <a:off x="6301587" y="2304288"/>
-            <a:ext cx="5387187" cy="1778508"/>
+            <a:off x="7163537" y="2304288"/>
+            <a:ext cx="4525238" cy="1161288"/>
           </a:xfrm>
           <a:prstGeom prst="rect">
             <a:avLst/>
@@ -32458,17 +32458,17 @@
                 <a:spcPct val="100000"/>
               </a:lnSpc>
               <a:spcAft>
-                <a:spcPts val="600"/>
-              </a:spcAft>
-              <a:defRPr sz="3000" b="0">
-                <a:solidFill>
-                  <a:srgbClr val="222222"/>
-                </a:solidFill>
-                <a:latin typeface="Calibri"/>
-              </a:defRPr>
-            </a:pPr>
-            <a:r>
-              <a:rPr sz="3000" b="0">
+                <a:spcPts val="300"/>
+              </a:spcAft>
+              <a:defRPr sz="2200" b="0">
+                <a:solidFill>
+                  <a:srgbClr val="222222"/>
+                </a:solidFill>
+                <a:latin typeface="Calibri"/>
+              </a:defRPr>
+            </a:pPr>
+            <a:r>
+              <a:rPr sz="2200" b="0">
                 <a:solidFill>
                   <a:srgbClr val="222222"/>
                 </a:solidFill>
@@ -32487,8 +32487,8 @@
         </p:nvSpPr>
         <p:spPr>
           <a:xfrm>
-            <a:off x="6301587" y="4119372"/>
-            <a:ext cx="5387187" cy="365760"/>
+            <a:off x="7163537" y="3538728"/>
+            <a:ext cx="4525238" cy="365760"/>
           </a:xfrm>
           <a:prstGeom prst="rect">
             <a:avLst/>
@@ -32535,8 +32535,8 @@
         </p:nvSpPr>
         <p:spPr>
           <a:xfrm>
-            <a:off x="6301587" y="4521708"/>
-            <a:ext cx="5387187" cy="1778508"/>
+            <a:off x="7163537" y="3941064"/>
+            <a:ext cx="4525238" cy="2322576"/>
           </a:xfrm>
           <a:prstGeom prst="rect">
             <a:avLst/>
@@ -32556,15 +32556,15 @@
               <a:spcAft>
                 <a:spcPts val="300"/>
               </a:spcAft>
-              <a:defRPr sz="2600" b="0">
-                <a:solidFill>
-                  <a:srgbClr val="222222"/>
-                </a:solidFill>
-                <a:latin typeface="Calibri"/>
-              </a:defRPr>
-            </a:pPr>
-            <a:r>
-              <a:rPr sz="2600" b="0">
+              <a:defRPr sz="2700" b="0">
+                <a:solidFill>
+                  <a:srgbClr val="222222"/>
+                </a:solidFill>
+                <a:latin typeface="Calibri"/>
+              </a:defRPr>
+            </a:pPr>
+            <a:r>
+              <a:rPr sz="2700" b="0">
                 <a:solidFill>
                   <a:srgbClr val="222222"/>
                 </a:solidFill>
@@ -32581,15 +32581,15 @@
               <a:spcAft>
                 <a:spcPts val="300"/>
               </a:spcAft>
-              <a:defRPr sz="2600" b="0">
-                <a:solidFill>
-                  <a:srgbClr val="222222"/>
-                </a:solidFill>
-                <a:latin typeface="Calibri"/>
-              </a:defRPr>
-            </a:pPr>
-            <a:r>
-              <a:rPr sz="2600" b="0">
+              <a:defRPr sz="2700" b="0">
+                <a:solidFill>
+                  <a:srgbClr val="222222"/>
+                </a:solidFill>
+                <a:latin typeface="Calibri"/>
+              </a:defRPr>
+            </a:pPr>
+            <a:r>
+              <a:rPr sz="2700" b="0">
                 <a:solidFill>
                   <a:srgbClr val="222222"/>
                 </a:solidFill>
@@ -35252,7 +35252,7 @@
         <p:spPr>
           <a:xfrm>
             <a:off x="502920" y="1901952"/>
-            <a:ext cx="5387187" cy="4361688"/>
+            <a:ext cx="6249137" cy="4361688"/>
           </a:xfrm>
           <a:prstGeom prst="rect">
             <a:avLst/>
@@ -35399,8 +35399,8 @@
         </p:nvSpPr>
         <p:spPr>
           <a:xfrm>
-            <a:off x="6301587" y="1901952"/>
-            <a:ext cx="5387187" cy="365760"/>
+            <a:off x="7163537" y="1901952"/>
+            <a:ext cx="4525238" cy="365760"/>
           </a:xfrm>
           <a:prstGeom prst="rect">
             <a:avLst/>
@@ -35447,8 +35447,8 @@
         </p:nvSpPr>
         <p:spPr>
           <a:xfrm>
-            <a:off x="6301587" y="2304288"/>
-            <a:ext cx="5387187" cy="1778508"/>
+            <a:off x="7163537" y="2304288"/>
+            <a:ext cx="4525238" cy="1161288"/>
           </a:xfrm>
           <a:prstGeom prst="rect">
             <a:avLst/>
@@ -35495,8 +35495,8 @@
         </p:nvSpPr>
         <p:spPr>
           <a:xfrm>
-            <a:off x="6301587" y="4119372"/>
-            <a:ext cx="5387187" cy="365760"/>
+            <a:off x="7163537" y="3538728"/>
+            <a:ext cx="4525238" cy="365760"/>
           </a:xfrm>
           <a:prstGeom prst="rect">
             <a:avLst/>
@@ -35543,8 +35543,8 @@
         </p:nvSpPr>
         <p:spPr>
           <a:xfrm>
-            <a:off x="6301587" y="4521708"/>
-            <a:ext cx="5387187" cy="1778508"/>
+            <a:off x="7163537" y="3941064"/>
+            <a:ext cx="4525238" cy="2322576"/>
           </a:xfrm>
           <a:prstGeom prst="rect">
             <a:avLst/>
@@ -35562,17 +35562,17 @@
                 <a:spcPct val="100000"/>
               </a:lnSpc>
               <a:spcAft>
-                <a:spcPts val="300"/>
-              </a:spcAft>
-              <a:defRPr sz="2600" b="0">
-                <a:solidFill>
-                  <a:srgbClr val="222222"/>
-                </a:solidFill>
-                <a:latin typeface="Calibri"/>
-              </a:defRPr>
-            </a:pPr>
-            <a:r>
-              <a:rPr sz="2600" b="0">
+                <a:spcPts val="600"/>
+              </a:spcAft>
+              <a:defRPr sz="2900" b="0">
+                <a:solidFill>
+                  <a:srgbClr val="222222"/>
+                </a:solidFill>
+                <a:latin typeface="Calibri"/>
+              </a:defRPr>
+            </a:pPr>
+            <a:r>
+              <a:rPr sz="2900" b="0">
                 <a:solidFill>
                   <a:srgbClr val="222222"/>
                 </a:solidFill>
@@ -35587,17 +35587,17 @@
                 <a:spcPct val="100000"/>
               </a:lnSpc>
               <a:spcAft>
-                <a:spcPts val="300"/>
-              </a:spcAft>
-              <a:defRPr sz="2600" b="0">
-                <a:solidFill>
-                  <a:srgbClr val="222222"/>
-                </a:solidFill>
-                <a:latin typeface="Calibri"/>
-              </a:defRPr>
-            </a:pPr>
-            <a:r>
-              <a:rPr sz="2600" b="0">
+                <a:spcPts val="600"/>
+              </a:spcAft>
+              <a:defRPr sz="2900" b="0">
+                <a:solidFill>
+                  <a:srgbClr val="222222"/>
+                </a:solidFill>
+                <a:latin typeface="Calibri"/>
+              </a:defRPr>
+            </a:pPr>
+            <a:r>
+              <a:rPr sz="2900" b="0">
                 <a:solidFill>
                   <a:srgbClr val="222222"/>
                 </a:solidFill>

--- a/ground-vehicle/docs/courses/beginner-ps3/l1_introduction.pptx
+++ b/ground-vehicle/docs/courses/beginner-ps3/l1_introduction.pptx
@@ -8438,6 +8438,22 @@
               <a:spcAft>
                 <a:spcPts val="100"/>
               </a:spcAft>
+              <a:defRPr sz="600" b="0">
+                <a:solidFill>
+                  <a:srgbClr val="666666"/>
+                </a:solidFill>
+                <a:latin typeface="Calibri"/>
+              </a:defRPr>
+            </a:pPr>
+          </a:p>
+          <a:p>
+            <a:pPr algn="l">
+              <a:lnSpc>
+                <a:spcPct val="100000"/>
+              </a:lnSpc>
+              <a:spcAft>
+                <a:spcPts val="100"/>
+              </a:spcAft>
               <a:defRPr sz="1200" b="0">
                 <a:solidFill>
                   <a:srgbClr val="666666"/>
@@ -8445,6 +8461,15 @@
                 <a:latin typeface="Calibri"/>
               </a:defRPr>
             </a:pPr>
+            <a:r>
+              <a:rPr sz="1200" b="0">
+                <a:solidFill>
+                  <a:srgbClr val="666666"/>
+                </a:solidFill>
+                <a:latin typeface="Calibri"/>
+              </a:rPr>
+              <a:t>Kevin Bowen, President  -  kbowen6@icloud.com</a:t>
+            </a:r>
           </a:p>
           <a:p>
             <a:pPr algn="l">
@@ -8468,7 +8493,7 @@
                 </a:solidFill>
                 <a:latin typeface="Calibri"/>
               </a:rPr>
-              <a:t>Kevin Bowen, President  -  kbowen6@icloud.com</a:t>
+              <a:t>Malcom Graham, VP Education      Louis Parker, VP Technology</a:t>
             </a:r>
           </a:p>
           <a:p>
@@ -8493,7 +8518,7 @@
                 </a:solidFill>
                 <a:latin typeface="Calibri"/>
               </a:rPr>
-              <a:t>Malcom Graham, VP Education      Louis Parker, VP Technology</a:t>
+              <a:t>Valen Farre, System Engineer      Gary Howland, Animation</a:t>
             </a:r>
           </a:p>
           <a:p>
@@ -8518,7 +8543,7 @@
                 </a:solidFill>
                 <a:latin typeface="Calibri"/>
               </a:rPr>
-              <a:t>Valen Farre, System Engineer      Gary Howland, Animation</a:t>
+              <a:t>Eddie Revollo, Artificial Intelligence</a:t>
             </a:r>
           </a:p>
           <a:p>
@@ -8543,7 +8568,7 @@
                 </a:solidFill>
                 <a:latin typeface="Calibri"/>
               </a:rPr>
-              <a:t>Eddie Revollo, Artificial Intelligence</a:t>
+              <a:t>Interns: Oscar Canazales, Krishnansh Vemulapalli, Soham Gangal, Erik Olsen</a:t>
             </a:r>
           </a:p>
           <a:p>
@@ -8554,32 +8579,7 @@
               <a:spcAft>
                 <a:spcPts val="100"/>
               </a:spcAft>
-              <a:defRPr sz="1200" b="0">
-                <a:solidFill>
-                  <a:srgbClr val="666666"/>
-                </a:solidFill>
-                <a:latin typeface="Calibri"/>
-              </a:defRPr>
-            </a:pPr>
-            <a:r>
-              <a:rPr sz="1200" b="0">
-                <a:solidFill>
-                  <a:srgbClr val="666666"/>
-                </a:solidFill>
-                <a:latin typeface="Calibri"/>
-              </a:rPr>
-              <a:t>Interns: Oscar Canazales, Krishnansh Vemulapalli, Soham Gangal, Erik Olsen</a:t>
-            </a:r>
-          </a:p>
-          <a:p>
-            <a:pPr algn="l">
-              <a:lnSpc>
-                <a:spcPct val="100000"/>
-              </a:lnSpc>
-              <a:spcAft>
-                <a:spcPts val="100"/>
-              </a:spcAft>
-              <a:defRPr sz="1200" b="0">
+              <a:defRPr sz="600" b="0">
                 <a:solidFill>
                   <a:srgbClr val="666666"/>
                 </a:solidFill>
@@ -17224,7 +17224,7 @@
               <a:spcAft>
                 <a:spcPts val="600"/>
               </a:spcAft>
-              <a:defRPr sz="2100" b="0">
+              <a:defRPr sz="1050" b="0">
                 <a:solidFill>
                   <a:srgbClr val="222222"/>
                 </a:solidFill>
@@ -18220,15 +18220,15 @@
               <a:spcAft>
                 <a:spcPts val="600"/>
               </a:spcAft>
-              <a:defRPr sz="1900" b="0">
-                <a:solidFill>
-                  <a:srgbClr val="222222"/>
-                </a:solidFill>
-                <a:latin typeface="Calibri"/>
-              </a:defRPr>
-            </a:pPr>
-            <a:r>
-              <a:rPr sz="1900" b="0">
+              <a:defRPr sz="2100" b="0">
+                <a:solidFill>
+                  <a:srgbClr val="222222"/>
+                </a:solidFill>
+                <a:latin typeface="Calibri"/>
+              </a:defRPr>
+            </a:pPr>
+            <a:r>
+              <a:rPr sz="2100" b="0">
                 <a:solidFill>
                   <a:srgbClr val="222222"/>
                 </a:solidFill>
@@ -18245,15 +18245,15 @@
               <a:spcAft>
                 <a:spcPts val="600"/>
               </a:spcAft>
-              <a:defRPr sz="1900" b="0">
-                <a:solidFill>
-                  <a:srgbClr val="222222"/>
-                </a:solidFill>
-                <a:latin typeface="Calibri"/>
-              </a:defRPr>
-            </a:pPr>
-            <a:r>
-              <a:rPr sz="1900" b="0">
+              <a:defRPr sz="2100" b="0">
+                <a:solidFill>
+                  <a:srgbClr val="222222"/>
+                </a:solidFill>
+                <a:latin typeface="Calibri"/>
+              </a:defRPr>
+            </a:pPr>
+            <a:r>
+              <a:rPr sz="2100" b="0">
                 <a:solidFill>
                   <a:srgbClr val="222222"/>
                 </a:solidFill>
@@ -18270,7 +18270,7 @@
               <a:spcAft>
                 <a:spcPts val="600"/>
               </a:spcAft>
-              <a:defRPr sz="1900" b="0">
+              <a:defRPr sz="1050" b="0">
                 <a:solidFill>
                   <a:srgbClr val="222222"/>
                 </a:solidFill>
@@ -18286,15 +18286,15 @@
               <a:spcAft>
                 <a:spcPts val="600"/>
               </a:spcAft>
-              <a:defRPr sz="1900" b="0">
-                <a:solidFill>
-                  <a:srgbClr val="222222"/>
-                </a:solidFill>
-                <a:latin typeface="Calibri"/>
-              </a:defRPr>
-            </a:pPr>
-            <a:r>
-              <a:rPr sz="1900" b="0">
+              <a:defRPr sz="2100" b="0">
+                <a:solidFill>
+                  <a:srgbClr val="222222"/>
+                </a:solidFill>
+                <a:latin typeface="Calibri"/>
+              </a:defRPr>
+            </a:pPr>
+            <a:r>
+              <a:rPr sz="2100" b="0">
                 <a:solidFill>
                   <a:srgbClr val="222222"/>
                 </a:solidFill>
@@ -18311,15 +18311,15 @@
               <a:spcAft>
                 <a:spcPts val="600"/>
               </a:spcAft>
-              <a:defRPr sz="1900" b="0">
-                <a:solidFill>
-                  <a:srgbClr val="222222"/>
-                </a:solidFill>
-                <a:latin typeface="Calibri"/>
-              </a:defRPr>
-            </a:pPr>
-            <a:r>
-              <a:rPr sz="1900" b="0">
+              <a:defRPr sz="2100" b="0">
+                <a:solidFill>
+                  <a:srgbClr val="222222"/>
+                </a:solidFill>
+                <a:latin typeface="Calibri"/>
+              </a:defRPr>
+            </a:pPr>
+            <a:r>
+              <a:rPr sz="2100" b="0">
                 <a:solidFill>
                   <a:srgbClr val="222222"/>
                 </a:solidFill>
@@ -18336,15 +18336,15 @@
               <a:spcAft>
                 <a:spcPts val="600"/>
               </a:spcAft>
-              <a:defRPr sz="1900" b="0">
-                <a:solidFill>
-                  <a:srgbClr val="222222"/>
-                </a:solidFill>
-                <a:latin typeface="Calibri"/>
-              </a:defRPr>
-            </a:pPr>
-            <a:r>
-              <a:rPr sz="1900" b="0">
+              <a:defRPr sz="2100" b="0">
+                <a:solidFill>
+                  <a:srgbClr val="222222"/>
+                </a:solidFill>
+                <a:latin typeface="Calibri"/>
+              </a:defRPr>
+            </a:pPr>
+            <a:r>
+              <a:rPr sz="2100" b="0">
                 <a:solidFill>
                   <a:srgbClr val="222222"/>
                 </a:solidFill>
@@ -18361,7 +18361,7 @@
               <a:spcAft>
                 <a:spcPts val="600"/>
               </a:spcAft>
-              <a:defRPr sz="1900" b="0">
+              <a:defRPr sz="1050" b="0">
                 <a:solidFill>
                   <a:srgbClr val="222222"/>
                 </a:solidFill>
@@ -18377,15 +18377,15 @@
               <a:spcAft>
                 <a:spcPts val="600"/>
               </a:spcAft>
-              <a:defRPr sz="1900" b="0">
-                <a:solidFill>
-                  <a:srgbClr val="222222"/>
-                </a:solidFill>
-                <a:latin typeface="Calibri"/>
-              </a:defRPr>
-            </a:pPr>
-            <a:r>
-              <a:rPr sz="1900" b="0">
+              <a:defRPr sz="2100" b="0">
+                <a:solidFill>
+                  <a:srgbClr val="222222"/>
+                </a:solidFill>
+                <a:latin typeface="Calibri"/>
+              </a:defRPr>
+            </a:pPr>
+            <a:r>
+              <a:rPr sz="2100" b="0">
                 <a:solidFill>
                   <a:srgbClr val="222222"/>
                 </a:solidFill>
@@ -18720,6 +18720,22 @@
               <a:spcAft>
                 <a:spcPts val="600"/>
               </a:spcAft>
+              <a:defRPr sz="1350" b="0">
+                <a:solidFill>
+                  <a:srgbClr val="222222"/>
+                </a:solidFill>
+                <a:latin typeface="Calibri"/>
+              </a:defRPr>
+            </a:pPr>
+          </a:p>
+          <a:p>
+            <a:pPr algn="l">
+              <a:lnSpc>
+                <a:spcPct val="100000"/>
+              </a:lnSpc>
+              <a:spcAft>
+                <a:spcPts val="600"/>
+              </a:spcAft>
               <a:defRPr sz="2700" b="0">
                 <a:solidFill>
                   <a:srgbClr val="222222"/>
@@ -18727,6 +18743,15 @@
                 <a:latin typeface="Calibri"/>
               </a:defRPr>
             </a:pPr>
+            <a:r>
+              <a:rPr sz="2700" b="0">
+                <a:solidFill>
+                  <a:srgbClr val="222222"/>
+                </a:solidFill>
+                <a:latin typeface="Calibri"/>
+              </a:rPr>
+              <a:t>"Adafruit NeoPixel" by Adafruit  -  drives the 32 LEDs.</a:t>
+            </a:r>
           </a:p>
           <a:p>
             <a:pPr algn="l">
@@ -18750,7 +18775,7 @@
                 </a:solidFill>
                 <a:latin typeface="Calibri"/>
               </a:rPr>
-              <a:t>"Adafruit NeoPixel" by Adafruit  -  drives the 32 LEDs.</a:t>
+              <a:t>"PS3 Controller Host" by Jeffrey van Pernis  -  talks to the controller.</a:t>
             </a:r>
           </a:p>
           <a:p>
@@ -18761,32 +18786,7 @@
               <a:spcAft>
                 <a:spcPts val="600"/>
               </a:spcAft>
-              <a:defRPr sz="2700" b="0">
-                <a:solidFill>
-                  <a:srgbClr val="222222"/>
-                </a:solidFill>
-                <a:latin typeface="Calibri"/>
-              </a:defRPr>
-            </a:pPr>
-            <a:r>
-              <a:rPr sz="2700" b="0">
-                <a:solidFill>
-                  <a:srgbClr val="222222"/>
-                </a:solidFill>
-                <a:latin typeface="Calibri"/>
-              </a:rPr>
-              <a:t>"PS3 Controller Host" by Jeffrey van Pernis  -  talks to the controller.</a:t>
-            </a:r>
-          </a:p>
-          <a:p>
-            <a:pPr algn="l">
-              <a:lnSpc>
-                <a:spcPct val="100000"/>
-              </a:lnSpc>
-              <a:spcAft>
-                <a:spcPts val="600"/>
-              </a:spcAft>
-              <a:defRPr sz="2700" b="0">
+              <a:defRPr sz="1350" b="0">
                 <a:solidFill>
                   <a:srgbClr val="222222"/>
                 </a:solidFill>
@@ -20377,7 +20377,7 @@
         <p:spPr>
           <a:xfrm>
             <a:off x="502920" y="1755648"/>
-            <a:ext cx="5364327" cy="3419856"/>
+            <a:ext cx="11185855" cy="3419856"/>
           </a:xfrm>
           <a:prstGeom prst="rect">
             <a:avLst/>
@@ -20395,17 +20395,17 @@
                 <a:spcPct val="100000"/>
               </a:lnSpc>
               <a:spcAft>
-                <a:spcPts val="900"/>
-              </a:spcAft>
-              <a:defRPr sz="2200" b="0">
-                <a:solidFill>
-                  <a:srgbClr val="222222"/>
-                </a:solidFill>
-                <a:latin typeface="Calibri"/>
-              </a:defRPr>
-            </a:pPr>
-            <a:r>
-              <a:rPr sz="2200" b="0">
+                <a:spcPts val="600"/>
+              </a:spcAft>
+              <a:defRPr sz="1900" b="0">
+                <a:solidFill>
+                  <a:srgbClr val="222222"/>
+                </a:solidFill>
+                <a:latin typeface="Calibri"/>
+              </a:defRPr>
+            </a:pPr>
+            <a:r>
+              <a:rPr sz="1900" b="0">
                 <a:solidFill>
                   <a:srgbClr val="222222"/>
                 </a:solidFill>
@@ -20420,33 +20420,33 @@
                 <a:spcPct val="100000"/>
               </a:lnSpc>
               <a:spcAft>
-                <a:spcPts val="900"/>
-              </a:spcAft>
-              <a:defRPr sz="2200" b="0">
-                <a:solidFill>
-                  <a:srgbClr val="222222"/>
-                </a:solidFill>
-                <a:latin typeface="Calibri"/>
-              </a:defRPr>
-            </a:pPr>
-          </a:p>
-          <a:p>
-            <a:pPr algn="l">
-              <a:lnSpc>
-                <a:spcPct val="100000"/>
-              </a:lnSpc>
-              <a:spcAft>
-                <a:spcPts val="900"/>
-              </a:spcAft>
-              <a:defRPr sz="2200" b="0">
-                <a:solidFill>
-                  <a:srgbClr val="222222"/>
-                </a:solidFill>
-                <a:latin typeface="Calibri"/>
-              </a:defRPr>
-            </a:pPr>
-            <a:r>
-              <a:rPr sz="2200" b="0">
+                <a:spcPts val="600"/>
+              </a:spcAft>
+              <a:defRPr sz="950" b="0">
+                <a:solidFill>
+                  <a:srgbClr val="222222"/>
+                </a:solidFill>
+                <a:latin typeface="Calibri"/>
+              </a:defRPr>
+            </a:pPr>
+          </a:p>
+          <a:p>
+            <a:pPr algn="l">
+              <a:lnSpc>
+                <a:spcPct val="100000"/>
+              </a:lnSpc>
+              <a:spcAft>
+                <a:spcPts val="600"/>
+              </a:spcAft>
+              <a:defRPr sz="1900" b="0">
+                <a:solidFill>
+                  <a:srgbClr val="222222"/>
+                </a:solidFill>
+                <a:latin typeface="Calibri"/>
+              </a:defRPr>
+            </a:pPr>
+            <a:r>
+              <a:rPr sz="1900" b="0">
                 <a:solidFill>
                   <a:srgbClr val="222222"/>
                 </a:solidFill>
@@ -20461,17 +20461,17 @@
                 <a:spcPct val="100000"/>
               </a:lnSpc>
               <a:spcAft>
-                <a:spcPts val="900"/>
-              </a:spcAft>
-              <a:defRPr sz="2200" b="0">
-                <a:solidFill>
-                  <a:srgbClr val="222222"/>
-                </a:solidFill>
-                <a:latin typeface="Calibri"/>
-              </a:defRPr>
-            </a:pPr>
-            <a:r>
-              <a:rPr sz="2200" b="0">
+                <a:spcPts val="600"/>
+              </a:spcAft>
+              <a:defRPr sz="1900" b="0">
+                <a:solidFill>
+                  <a:srgbClr val="222222"/>
+                </a:solidFill>
+                <a:latin typeface="Calibri"/>
+              </a:defRPr>
+            </a:pPr>
+            <a:r>
+              <a:rPr sz="1900" b="0">
                 <a:solidFill>
                   <a:srgbClr val="222222"/>
                 </a:solidFill>
@@ -20480,46 +20480,23 @@
               <a:t>Documents\\Arduino\\</a:t>
             </a:r>
           </a:p>
-        </p:txBody>
-      </p:sp>
-      <p:sp>
-        <p:nvSpPr>
-          <p:cNvPr id="8" name="TextBox 7"/>
-          <p:cNvSpPr txBox="1"/>
-          <p:nvPr/>
-        </p:nvSpPr>
-        <p:spPr>
-          <a:xfrm>
-            <a:off x="6324447" y="1755648"/>
-            <a:ext cx="5364327" cy="3419856"/>
-          </a:xfrm>
-          <a:prstGeom prst="rect">
-            <a:avLst/>
-          </a:prstGeom>
-          <a:noFill/>
-        </p:spPr>
-        <p:txBody>
-          <a:bodyPr wrap="square" lIns="0" tIns="0" rIns="0" bIns="0">
-            <a:spAutoFit/>
-          </a:bodyPr>
-          <a:lstStyle/>
-          <a:p>
-            <a:pPr algn="l">
-              <a:lnSpc>
-                <a:spcPct val="100000"/>
-              </a:lnSpc>
-              <a:spcAft>
-                <a:spcPts val="900"/>
-              </a:spcAft>
-              <a:defRPr sz="2200" b="0">
-                <a:solidFill>
-                  <a:srgbClr val="222222"/>
-                </a:solidFill>
-                <a:latin typeface="Calibri"/>
-              </a:defRPr>
-            </a:pPr>
-            <a:r>
-              <a:rPr sz="2200" b="0">
+          <a:p>
+            <a:pPr algn="l">
+              <a:lnSpc>
+                <a:spcPct val="100000"/>
+              </a:lnSpc>
+              <a:spcAft>
+                <a:spcPts val="600"/>
+              </a:spcAft>
+              <a:defRPr sz="1900" b="0">
+                <a:solidFill>
+                  <a:srgbClr val="222222"/>
+                </a:solidFill>
+                <a:latin typeface="Calibri"/>
+              </a:defRPr>
+            </a:pPr>
+            <a:r>
+              <a:rPr sz="1900" b="0">
                 <a:solidFill>
                   <a:srgbClr val="222222"/>
                 </a:solidFill>
@@ -20534,17 +20511,17 @@
                 <a:spcPct val="100000"/>
               </a:lnSpc>
               <a:spcAft>
-                <a:spcPts val="900"/>
-              </a:spcAft>
-              <a:defRPr sz="2200" b="0">
-                <a:solidFill>
-                  <a:srgbClr val="222222"/>
-                </a:solidFill>
-                <a:latin typeface="Calibri"/>
-              </a:defRPr>
-            </a:pPr>
-            <a:r>
-              <a:rPr sz="2200" b="0">
+                <a:spcPts val="600"/>
+              </a:spcAft>
+              <a:defRPr sz="1900" b="0">
+                <a:solidFill>
+                  <a:srgbClr val="222222"/>
+                </a:solidFill>
+                <a:latin typeface="Calibri"/>
+              </a:defRPr>
+            </a:pPr>
+            <a:r>
+              <a:rPr sz="1900" b="0">
                 <a:solidFill>
                   <a:srgbClr val="222222"/>
                 </a:solidFill>
@@ -20559,33 +20536,33 @@
                 <a:spcPct val="100000"/>
               </a:lnSpc>
               <a:spcAft>
-                <a:spcPts val="900"/>
-              </a:spcAft>
-              <a:defRPr sz="2200" b="0">
-                <a:solidFill>
-                  <a:srgbClr val="222222"/>
-                </a:solidFill>
-                <a:latin typeface="Calibri"/>
-              </a:defRPr>
-            </a:pPr>
-          </a:p>
-          <a:p>
-            <a:pPr algn="l">
-              <a:lnSpc>
-                <a:spcPct val="100000"/>
-              </a:lnSpc>
-              <a:spcAft>
-                <a:spcPts val="900"/>
-              </a:spcAft>
-              <a:defRPr sz="2200" b="0">
-                <a:solidFill>
-                  <a:srgbClr val="222222"/>
-                </a:solidFill>
-                <a:latin typeface="Calibri"/>
-              </a:defRPr>
-            </a:pPr>
-            <a:r>
-              <a:rPr sz="2200" b="0">
+                <a:spcPts val="600"/>
+              </a:spcAft>
+              <a:defRPr sz="950" b="0">
+                <a:solidFill>
+                  <a:srgbClr val="222222"/>
+                </a:solidFill>
+                <a:latin typeface="Calibri"/>
+              </a:defRPr>
+            </a:pPr>
+          </a:p>
+          <a:p>
+            <a:pPr algn="l">
+              <a:lnSpc>
+                <a:spcPct val="100000"/>
+              </a:lnSpc>
+              <a:spcAft>
+                <a:spcPts val="600"/>
+              </a:spcAft>
+              <a:defRPr sz="1900" b="0">
+                <a:solidFill>
+                  <a:srgbClr val="222222"/>
+                </a:solidFill>
+                <a:latin typeface="Calibri"/>
+              </a:defRPr>
+            </a:pPr>
+            <a:r>
+              <a:rPr sz="1900" b="0">
                 <a:solidFill>
                   <a:srgbClr val="222222"/>
                 </a:solidFill>
@@ -20600,17 +20577,17 @@
                 <a:spcPct val="100000"/>
               </a:lnSpc>
               <a:spcAft>
-                <a:spcPts val="900"/>
-              </a:spcAft>
-              <a:defRPr sz="2200" b="0">
-                <a:solidFill>
-                  <a:srgbClr val="222222"/>
-                </a:solidFill>
-                <a:latin typeface="Calibri"/>
-              </a:defRPr>
-            </a:pPr>
-            <a:r>
-              <a:rPr sz="2200" b="0">
+                <a:spcPts val="600"/>
+              </a:spcAft>
+              <a:defRPr sz="1900" b="0">
+                <a:solidFill>
+                  <a:srgbClr val="222222"/>
+                </a:solidFill>
+                <a:latin typeface="Calibri"/>
+              </a:defRPr>
+            </a:pPr>
+            <a:r>
+              <a:rPr sz="1900" b="0">
                 <a:solidFill>
                   <a:srgbClr val="222222"/>
                 </a:solidFill>
@@ -20623,7 +20600,7 @@
       </p:sp>
       <p:sp>
         <p:nvSpPr>
-          <p:cNvPr id="9" name="Rounded Rectangle 8"/>
+          <p:cNvPr id="8" name="Rounded Rectangle 7"/>
           <p:cNvSpPr/>
           <p:nvPr/>
         </p:nvSpPr>
@@ -22840,6 +22817,22 @@
               <a:spcAft>
                 <a:spcPts val="600"/>
               </a:spcAft>
+              <a:defRPr sz="1000" b="0">
+                <a:solidFill>
+                  <a:srgbClr val="222222"/>
+                </a:solidFill>
+                <a:latin typeface="Calibri"/>
+              </a:defRPr>
+            </a:pPr>
+          </a:p>
+          <a:p>
+            <a:pPr algn="l">
+              <a:lnSpc>
+                <a:spcPct val="100000"/>
+              </a:lnSpc>
+              <a:spcAft>
+                <a:spcPts val="600"/>
+              </a:spcAft>
               <a:defRPr sz="2000" b="0">
                 <a:solidFill>
                   <a:srgbClr val="222222"/>
@@ -22847,6 +22840,15 @@
                 <a:latin typeface="Calibri"/>
               </a:defRPr>
             </a:pPr>
+            <a:r>
+              <a:rPr sz="2000" b="0">
+                <a:solidFill>
+                  <a:srgbClr val="222222"/>
+                </a:solidFill>
+                <a:latin typeface="Calibri"/>
+              </a:rPr>
+              <a:t>That is a better place to start anyway. Before you can make something blink, you have to make a circuit that works - and a circuit is the thing underneath everything else on this vehicle.</a:t>
+            </a:r>
           </a:p>
           <a:p>
             <a:pPr algn="l">
@@ -22856,32 +22858,7 @@
               <a:spcAft>
                 <a:spcPts val="600"/>
               </a:spcAft>
-              <a:defRPr sz="2000" b="0">
-                <a:solidFill>
-                  <a:srgbClr val="222222"/>
-                </a:solidFill>
-                <a:latin typeface="Calibri"/>
-              </a:defRPr>
-            </a:pPr>
-            <a:r>
-              <a:rPr sz="2000" b="0">
-                <a:solidFill>
-                  <a:srgbClr val="222222"/>
-                </a:solidFill>
-                <a:latin typeface="Calibri"/>
-              </a:rPr>
-              <a:t>That is a better place to start anyway. Before you can make something blink, you have to make a circuit that works - and a circuit is the thing underneath everything else on this vehicle.</a:t>
-            </a:r>
-          </a:p>
-          <a:p>
-            <a:pPr algn="l">
-              <a:lnSpc>
-                <a:spcPct val="100000"/>
-              </a:lnSpc>
-              <a:spcAft>
-                <a:spcPts val="600"/>
-              </a:spcAft>
-              <a:defRPr sz="2000" b="0">
+              <a:defRPr sz="1000" b="0">
                 <a:solidFill>
                   <a:srgbClr val="222222"/>
                 </a:solidFill>
@@ -24839,7 +24816,7 @@
               <a:spcAft>
                 <a:spcPts val="0"/>
               </a:spcAft>
-              <a:defRPr sz="1400" b="0">
+              <a:defRPr sz="700" b="0">
                 <a:solidFill>
                   <a:srgbClr val="222222"/>
                 </a:solidFill>
@@ -24908,7 +24885,7 @@
         <p:spPr>
           <a:xfrm>
             <a:off x="7909560" y="3383280"/>
-            <a:ext cx="3749039" cy="2091944"/>
+            <a:ext cx="3749039" cy="1813052"/>
           </a:xfrm>
           <a:prstGeom prst="rect">
             <a:avLst/>
@@ -24953,6 +24930,22 @@
               <a:spcAft>
                 <a:spcPts val="0"/>
               </a:spcAft>
+              <a:defRPr sz="900" b="0">
+                <a:solidFill>
+                  <a:srgbClr val="222222"/>
+                </a:solidFill>
+                <a:latin typeface="Calibri"/>
+              </a:defRPr>
+            </a:pPr>
+          </a:p>
+          <a:p>
+            <a:pPr algn="l">
+              <a:lnSpc>
+                <a:spcPct val="100000"/>
+              </a:lnSpc>
+              <a:spcAft>
+                <a:spcPts val="0"/>
+              </a:spcAft>
               <a:defRPr sz="1800" b="0">
                 <a:solidFill>
                   <a:srgbClr val="222222"/>
@@ -24960,6 +24953,15 @@
                 <a:latin typeface="Calibri"/>
               </a:defRPr>
             </a:pPr>
+            <a:r>
+              <a:rPr sz="1800" b="0">
+                <a:solidFill>
+                  <a:srgbClr val="222222"/>
+                </a:solidFill>
+                <a:latin typeface="Calibri"/>
+              </a:rPr>
+              <a:t>(3.3 - 2.0) / 220 = about 6 mA</a:t>
+            </a:r>
           </a:p>
           <a:p>
             <a:pPr algn="l">
@@ -24969,32 +24971,7 @@
               <a:spcAft>
                 <a:spcPts val="0"/>
               </a:spcAft>
-              <a:defRPr sz="1800" b="0">
-                <a:solidFill>
-                  <a:srgbClr val="222222"/>
-                </a:solidFill>
-                <a:latin typeface="Calibri"/>
-              </a:defRPr>
-            </a:pPr>
-            <a:r>
-              <a:rPr sz="1800" b="0">
-                <a:solidFill>
-                  <a:srgbClr val="222222"/>
-                </a:solidFill>
-                <a:latin typeface="Calibri"/>
-              </a:rPr>
-              <a:t>(3.3 - 2.0) / 220 = about 6 mA</a:t>
-            </a:r>
-          </a:p>
-          <a:p>
-            <a:pPr algn="l">
-              <a:lnSpc>
-                <a:spcPct val="100000"/>
-              </a:lnSpc>
-              <a:spcAft>
-                <a:spcPts val="0"/>
-              </a:spcAft>
-              <a:defRPr sz="1800" b="0">
+              <a:defRPr sz="900" b="0">
                 <a:solidFill>
                   <a:srgbClr val="222222"/>
                 </a:solidFill>
@@ -25790,15 +25767,15 @@
               <a:spcAft>
                 <a:spcPts val="600"/>
               </a:spcAft>
-              <a:defRPr sz="1900" b="0">
-                <a:solidFill>
-                  <a:srgbClr val="222222"/>
-                </a:solidFill>
-                <a:latin typeface="Calibri"/>
-              </a:defRPr>
-            </a:pPr>
-            <a:r>
-              <a:rPr sz="1900" b="0">
+              <a:defRPr sz="2000" b="0">
+                <a:solidFill>
+                  <a:srgbClr val="222222"/>
+                </a:solidFill>
+                <a:latin typeface="Calibri"/>
+              </a:defRPr>
+            </a:pPr>
+            <a:r>
+              <a:rPr sz="2000" b="0">
                 <a:solidFill>
                   <a:srgbClr val="222222"/>
                 </a:solidFill>
@@ -25815,7 +25792,7 @@
               <a:spcAft>
                 <a:spcPts val="600"/>
               </a:spcAft>
-              <a:defRPr sz="1900" b="0">
+              <a:defRPr sz="1000" b="0">
                 <a:solidFill>
                   <a:srgbClr val="222222"/>
                 </a:solidFill>
@@ -25831,15 +25808,15 @@
               <a:spcAft>
                 <a:spcPts val="600"/>
               </a:spcAft>
-              <a:defRPr sz="1900" b="0">
-                <a:solidFill>
-                  <a:srgbClr val="222222"/>
-                </a:solidFill>
-                <a:latin typeface="Calibri"/>
-              </a:defRPr>
-            </a:pPr>
-            <a:r>
-              <a:rPr sz="1900" b="0">
+              <a:defRPr sz="2000" b="0">
+                <a:solidFill>
+                  <a:srgbClr val="222222"/>
+                </a:solidFill>
+                <a:latin typeface="Calibri"/>
+              </a:defRPr>
+            </a:pPr>
+            <a:r>
+              <a:rPr sz="2000" b="0">
                 <a:solidFill>
                   <a:srgbClr val="222222"/>
                 </a:solidFill>
@@ -25856,15 +25833,15 @@
               <a:spcAft>
                 <a:spcPts val="600"/>
               </a:spcAft>
-              <a:defRPr sz="1900" b="0">
-                <a:solidFill>
-                  <a:srgbClr val="222222"/>
-                </a:solidFill>
-                <a:latin typeface="Calibri"/>
-              </a:defRPr>
-            </a:pPr>
-            <a:r>
-              <a:rPr sz="1900" b="0">
+              <a:defRPr sz="2000" b="0">
+                <a:solidFill>
+                  <a:srgbClr val="222222"/>
+                </a:solidFill>
+                <a:latin typeface="Calibri"/>
+              </a:defRPr>
+            </a:pPr>
+            <a:r>
+              <a:rPr sz="2000" b="0">
                 <a:solidFill>
                   <a:srgbClr val="222222"/>
                 </a:solidFill>
@@ -25881,15 +25858,15 @@
               <a:spcAft>
                 <a:spcPts val="600"/>
               </a:spcAft>
-              <a:defRPr sz="1900" b="0">
-                <a:solidFill>
-                  <a:srgbClr val="222222"/>
-                </a:solidFill>
-                <a:latin typeface="Calibri"/>
-              </a:defRPr>
-            </a:pPr>
-            <a:r>
-              <a:rPr sz="1900" b="0">
+              <a:defRPr sz="2000" b="0">
+                <a:solidFill>
+                  <a:srgbClr val="222222"/>
+                </a:solidFill>
+                <a:latin typeface="Calibri"/>
+              </a:defRPr>
+            </a:pPr>
+            <a:r>
+              <a:rPr sz="2000" b="0">
                 <a:solidFill>
                   <a:srgbClr val="222222"/>
                 </a:solidFill>
@@ -25906,7 +25883,7 @@
               <a:spcAft>
                 <a:spcPts val="600"/>
               </a:spcAft>
-              <a:defRPr sz="1900" b="0">
+              <a:defRPr sz="1000" b="0">
                 <a:solidFill>
                   <a:srgbClr val="222222"/>
                 </a:solidFill>
@@ -25922,15 +25899,15 @@
               <a:spcAft>
                 <a:spcPts val="600"/>
               </a:spcAft>
-              <a:defRPr sz="1900" b="0">
-                <a:solidFill>
-                  <a:srgbClr val="222222"/>
-                </a:solidFill>
-                <a:latin typeface="Calibri"/>
-              </a:defRPr>
-            </a:pPr>
-            <a:r>
-              <a:rPr sz="1900" b="0">
+              <a:defRPr sz="2000" b="0">
+                <a:solidFill>
+                  <a:srgbClr val="222222"/>
+                </a:solidFill>
+                <a:latin typeface="Calibri"/>
+              </a:defRPr>
+            </a:pPr>
+            <a:r>
+              <a:rPr sz="2000" b="0">
                 <a:solidFill>
                   <a:srgbClr val="222222"/>
                 </a:solidFill>
@@ -27958,7 +27935,7 @@
               <a:spcAft>
                 <a:spcPts val="800"/>
               </a:spcAft>
-              <a:defRPr sz="1900" b="0">
+              <a:defRPr sz="950" b="0">
                 <a:solidFill>
                   <a:srgbClr val="222222"/>
                 </a:solidFill>
@@ -29482,7 +29459,7 @@
         <p:spPr>
           <a:xfrm>
             <a:off x="502920" y="1188720"/>
-            <a:ext cx="5364327" cy="3986784"/>
+            <a:ext cx="11185855" cy="3986784"/>
           </a:xfrm>
           <a:prstGeom prst="rect">
             <a:avLst/>
@@ -29500,17 +29477,17 @@
                 <a:spcPct val="100000"/>
               </a:lnSpc>
               <a:spcAft>
-                <a:spcPts val="900"/>
-              </a:spcAft>
-              <a:defRPr sz="2100" b="0">
-                <a:solidFill>
-                  <a:srgbClr val="222222"/>
-                </a:solidFill>
-                <a:latin typeface="Calibri"/>
-              </a:defRPr>
-            </a:pPr>
-            <a:r>
-              <a:rPr sz="2100" b="0">
+                <a:spcPts val="600"/>
+              </a:spcAft>
+              <a:defRPr sz="1800" b="0">
+                <a:solidFill>
+                  <a:srgbClr val="222222"/>
+                </a:solidFill>
+                <a:latin typeface="Calibri"/>
+              </a:defRPr>
+            </a:pPr>
+            <a:r>
+              <a:rPr sz="1800" b="0">
                 <a:solidFill>
                   <a:srgbClr val="222222"/>
                 </a:solidFill>
@@ -29525,17 +29502,17 @@
                 <a:spcPct val="100000"/>
               </a:lnSpc>
               <a:spcAft>
-                <a:spcPts val="900"/>
-              </a:spcAft>
-              <a:defRPr sz="2100" b="0">
-                <a:solidFill>
-                  <a:srgbClr val="222222"/>
-                </a:solidFill>
-                <a:latin typeface="Calibri"/>
-              </a:defRPr>
-            </a:pPr>
-            <a:r>
-              <a:rPr sz="2100" b="0">
+                <a:spcPts val="600"/>
+              </a:spcAft>
+              <a:defRPr sz="1800" b="0">
+                <a:solidFill>
+                  <a:srgbClr val="222222"/>
+                </a:solidFill>
+                <a:latin typeface="Calibri"/>
+              </a:defRPr>
+            </a:pPr>
+            <a:r>
+              <a:rPr sz="1800" b="0">
                 <a:solidFill>
                   <a:srgbClr val="222222"/>
                 </a:solidFill>
@@ -29550,17 +29527,17 @@
                 <a:spcPct val="100000"/>
               </a:lnSpc>
               <a:spcAft>
-                <a:spcPts val="900"/>
-              </a:spcAft>
-              <a:defRPr sz="2100" b="0">
-                <a:solidFill>
-                  <a:srgbClr val="222222"/>
-                </a:solidFill>
-                <a:latin typeface="Calibri"/>
-              </a:defRPr>
-            </a:pPr>
-            <a:r>
-              <a:rPr sz="2100" b="0">
+                <a:spcPts val="600"/>
+              </a:spcAft>
+              <a:defRPr sz="1800" b="0">
+                <a:solidFill>
+                  <a:srgbClr val="222222"/>
+                </a:solidFill>
+                <a:latin typeface="Calibri"/>
+              </a:defRPr>
+            </a:pPr>
+            <a:r>
+              <a:rPr sz="1800" b="0">
                 <a:solidFill>
                   <a:srgbClr val="222222"/>
                 </a:solidFill>
@@ -29575,17 +29552,17 @@
                 <a:spcPct val="100000"/>
               </a:lnSpc>
               <a:spcAft>
-                <a:spcPts val="900"/>
-              </a:spcAft>
-              <a:defRPr sz="2100" b="0">
-                <a:solidFill>
-                  <a:srgbClr val="222222"/>
-                </a:solidFill>
-                <a:latin typeface="Calibri"/>
-              </a:defRPr>
-            </a:pPr>
-            <a:r>
-              <a:rPr sz="2100" b="0">
+                <a:spcPts val="600"/>
+              </a:spcAft>
+              <a:defRPr sz="1800" b="0">
+                <a:solidFill>
+                  <a:srgbClr val="222222"/>
+                </a:solidFill>
+                <a:latin typeface="Calibri"/>
+              </a:defRPr>
+            </a:pPr>
+            <a:r>
+              <a:rPr sz="1800" b="0">
                 <a:solidFill>
                   <a:srgbClr val="222222"/>
                 </a:solidFill>
@@ -29594,46 +29571,39 @@
               <a:t>Serial.println(x);       prints and moves to a new line.</a:t>
             </a:r>
           </a:p>
-        </p:txBody>
-      </p:sp>
-      <p:sp>
-        <p:nvSpPr>
-          <p:cNvPr id="7" name="TextBox 6"/>
-          <p:cNvSpPr txBox="1"/>
-          <p:nvPr/>
-        </p:nvSpPr>
-        <p:spPr>
-          <a:xfrm>
-            <a:off x="6324447" y="1188720"/>
-            <a:ext cx="5364327" cy="3986784"/>
-          </a:xfrm>
-          <a:prstGeom prst="rect">
-            <a:avLst/>
-          </a:prstGeom>
-          <a:noFill/>
-        </p:spPr>
-        <p:txBody>
-          <a:bodyPr wrap="square" lIns="0" tIns="0" rIns="0" bIns="0">
-            <a:spAutoFit/>
-          </a:bodyPr>
-          <a:lstStyle/>
-          <a:p>
-            <a:pPr algn="l">
-              <a:lnSpc>
-                <a:spcPct val="100000"/>
-              </a:lnSpc>
-              <a:spcAft>
-                <a:spcPts val="900"/>
-              </a:spcAft>
-              <a:defRPr sz="2000" b="0">
-                <a:solidFill>
-                  <a:srgbClr val="222222"/>
-                </a:solidFill>
-                <a:latin typeface="Calibri"/>
-              </a:defRPr>
-            </a:pPr>
-            <a:r>
-              <a:rPr sz="2000" b="0">
+          <a:p>
+            <a:pPr algn="l">
+              <a:lnSpc>
+                <a:spcPct val="100000"/>
+              </a:lnSpc>
+              <a:spcAft>
+                <a:spcPts val="600"/>
+              </a:spcAft>
+              <a:defRPr sz="900" b="0">
+                <a:solidFill>
+                  <a:srgbClr val="222222"/>
+                </a:solidFill>
+                <a:latin typeface="Calibri"/>
+              </a:defRPr>
+            </a:pPr>
+          </a:p>
+          <a:p>
+            <a:pPr algn="l">
+              <a:lnSpc>
+                <a:spcPct val="100000"/>
+              </a:lnSpc>
+              <a:spcAft>
+                <a:spcPts val="600"/>
+              </a:spcAft>
+              <a:defRPr sz="1800" b="0">
+                <a:solidFill>
+                  <a:srgbClr val="222222"/>
+                </a:solidFill>
+                <a:latin typeface="Calibri"/>
+              </a:defRPr>
+            </a:pPr>
+            <a:r>
+              <a:rPr sz="1800" b="0">
                 <a:solidFill>
                   <a:srgbClr val="222222"/>
                 </a:solidFill>
@@ -29648,17 +29618,17 @@
                 <a:spcPct val="100000"/>
               </a:lnSpc>
               <a:spcAft>
-                <a:spcPts val="900"/>
-              </a:spcAft>
-              <a:defRPr sz="2000" b="0">
-                <a:solidFill>
-                  <a:srgbClr val="222222"/>
-                </a:solidFill>
-                <a:latin typeface="Calibri"/>
-              </a:defRPr>
-            </a:pPr>
-            <a:r>
-              <a:rPr sz="2000" b="0">
+                <a:spcPts val="600"/>
+              </a:spcAft>
+              <a:defRPr sz="1800" b="0">
+                <a:solidFill>
+                  <a:srgbClr val="222222"/>
+                </a:solidFill>
+                <a:latin typeface="Calibri"/>
+              </a:defRPr>
+            </a:pPr>
+            <a:r>
+              <a:rPr sz="1800" b="0">
                 <a:solidFill>
                   <a:srgbClr val="222222"/>
                 </a:solidFill>
@@ -29673,33 +29643,33 @@
                 <a:spcPct val="100000"/>
               </a:lnSpc>
               <a:spcAft>
-                <a:spcPts val="900"/>
-              </a:spcAft>
-              <a:defRPr sz="2000" b="0">
-                <a:solidFill>
-                  <a:srgbClr val="222222"/>
-                </a:solidFill>
-                <a:latin typeface="Calibri"/>
-              </a:defRPr>
-            </a:pPr>
-          </a:p>
-          <a:p>
-            <a:pPr algn="l">
-              <a:lnSpc>
-                <a:spcPct val="100000"/>
-              </a:lnSpc>
-              <a:spcAft>
-                <a:spcPts val="900"/>
-              </a:spcAft>
-              <a:defRPr sz="2000" b="0">
-                <a:solidFill>
-                  <a:srgbClr val="222222"/>
-                </a:solidFill>
-                <a:latin typeface="Calibri"/>
-              </a:defRPr>
-            </a:pPr>
-            <a:r>
-              <a:rPr sz="2000" b="0">
+                <a:spcPts val="600"/>
+              </a:spcAft>
+              <a:defRPr sz="900" b="0">
+                <a:solidFill>
+                  <a:srgbClr val="222222"/>
+                </a:solidFill>
+                <a:latin typeface="Calibri"/>
+              </a:defRPr>
+            </a:pPr>
+          </a:p>
+          <a:p>
+            <a:pPr algn="l">
+              <a:lnSpc>
+                <a:spcPct val="100000"/>
+              </a:lnSpc>
+              <a:spcAft>
+                <a:spcPts val="600"/>
+              </a:spcAft>
+              <a:defRPr sz="1800" b="0">
+                <a:solidFill>
+                  <a:srgbClr val="222222"/>
+                </a:solidFill>
+                <a:latin typeface="Calibri"/>
+              </a:defRPr>
+            </a:pPr>
+            <a:r>
+              <a:rPr sz="1800" b="0">
                 <a:solidFill>
                   <a:srgbClr val="222222"/>
                 </a:solidFill>
@@ -29712,7 +29682,7 @@
       </p:sp>
       <p:sp>
         <p:nvSpPr>
-          <p:cNvPr id="8" name="Rounded Rectangle 7"/>
+          <p:cNvPr id="7" name="Rounded Rectangle 6"/>
           <p:cNvSpPr/>
           <p:nvPr/>
         </p:nvSpPr>
@@ -33087,15 +33057,15 @@
               <a:spcAft>
                 <a:spcPts val="600"/>
               </a:spcAft>
-              <a:defRPr sz="1900" b="0">
-                <a:solidFill>
-                  <a:srgbClr val="222222"/>
-                </a:solidFill>
-                <a:latin typeface="Calibri"/>
-              </a:defRPr>
-            </a:pPr>
-            <a:r>
-              <a:rPr sz="1900" b="0">
+              <a:defRPr sz="2000" b="0">
+                <a:solidFill>
+                  <a:srgbClr val="222222"/>
+                </a:solidFill>
+                <a:latin typeface="Calibri"/>
+              </a:defRPr>
+            </a:pPr>
+            <a:r>
+              <a:rPr sz="2000" b="0">
                 <a:solidFill>
                   <a:srgbClr val="222222"/>
                 </a:solidFill>
@@ -33112,15 +33082,15 @@
               <a:spcAft>
                 <a:spcPts val="600"/>
               </a:spcAft>
-              <a:defRPr sz="1900" b="0">
-                <a:solidFill>
-                  <a:srgbClr val="222222"/>
-                </a:solidFill>
-                <a:latin typeface="Calibri"/>
-              </a:defRPr>
-            </a:pPr>
-            <a:r>
-              <a:rPr sz="1900" b="0">
+              <a:defRPr sz="2000" b="0">
+                <a:solidFill>
+                  <a:srgbClr val="222222"/>
+                </a:solidFill>
+                <a:latin typeface="Calibri"/>
+              </a:defRPr>
+            </a:pPr>
+            <a:r>
+              <a:rPr sz="2000" b="0">
                 <a:solidFill>
                   <a:srgbClr val="222222"/>
                 </a:solidFill>
@@ -33137,15 +33107,15 @@
               <a:spcAft>
                 <a:spcPts val="600"/>
               </a:spcAft>
-              <a:defRPr sz="1900" b="0">
-                <a:solidFill>
-                  <a:srgbClr val="222222"/>
-                </a:solidFill>
-                <a:latin typeface="Calibri"/>
-              </a:defRPr>
-            </a:pPr>
-            <a:r>
-              <a:rPr sz="1900" b="0">
+              <a:defRPr sz="2000" b="0">
+                <a:solidFill>
+                  <a:srgbClr val="222222"/>
+                </a:solidFill>
+                <a:latin typeface="Calibri"/>
+              </a:defRPr>
+            </a:pPr>
+            <a:r>
+              <a:rPr sz="2000" b="0">
                 <a:solidFill>
                   <a:srgbClr val="222222"/>
                 </a:solidFill>
@@ -33162,15 +33132,15 @@
               <a:spcAft>
                 <a:spcPts val="600"/>
               </a:spcAft>
-              <a:defRPr sz="1900" b="0">
-                <a:solidFill>
-                  <a:srgbClr val="222222"/>
-                </a:solidFill>
-                <a:latin typeface="Calibri"/>
-              </a:defRPr>
-            </a:pPr>
-            <a:r>
-              <a:rPr sz="1900" b="0">
+              <a:defRPr sz="2000" b="0">
+                <a:solidFill>
+                  <a:srgbClr val="222222"/>
+                </a:solidFill>
+                <a:latin typeface="Calibri"/>
+              </a:defRPr>
+            </a:pPr>
+            <a:r>
+              <a:rPr sz="2000" b="0">
                 <a:solidFill>
                   <a:srgbClr val="222222"/>
                 </a:solidFill>
@@ -33187,15 +33157,15 @@
               <a:spcAft>
                 <a:spcPts val="600"/>
               </a:spcAft>
-              <a:defRPr sz="1900" b="0">
-                <a:solidFill>
-                  <a:srgbClr val="222222"/>
-                </a:solidFill>
-                <a:latin typeface="Calibri"/>
-              </a:defRPr>
-            </a:pPr>
-            <a:r>
-              <a:rPr sz="1900" b="0">
+              <a:defRPr sz="2000" b="0">
+                <a:solidFill>
+                  <a:srgbClr val="222222"/>
+                </a:solidFill>
+                <a:latin typeface="Calibri"/>
+              </a:defRPr>
+            </a:pPr>
+            <a:r>
+              <a:rPr sz="2000" b="0">
                 <a:solidFill>
                   <a:srgbClr val="222222"/>
                 </a:solidFill>
@@ -33212,7 +33182,7 @@
               <a:spcAft>
                 <a:spcPts val="600"/>
               </a:spcAft>
-              <a:defRPr sz="1900" b="0">
+              <a:defRPr sz="1000" b="0">
                 <a:solidFill>
                   <a:srgbClr val="222222"/>
                 </a:solidFill>
@@ -33228,15 +33198,15 @@
               <a:spcAft>
                 <a:spcPts val="600"/>
               </a:spcAft>
-              <a:defRPr sz="1900" b="0">
-                <a:solidFill>
-                  <a:srgbClr val="222222"/>
-                </a:solidFill>
-                <a:latin typeface="Calibri"/>
-              </a:defRPr>
-            </a:pPr>
-            <a:r>
-              <a:rPr sz="1900" b="0">
+              <a:defRPr sz="2000" b="0">
+                <a:solidFill>
+                  <a:srgbClr val="222222"/>
+                </a:solidFill>
+                <a:latin typeface="Calibri"/>
+              </a:defRPr>
+            </a:pPr>
+            <a:r>
+              <a:rPr sz="2000" b="0">
                 <a:solidFill>
                   <a:srgbClr val="222222"/>
                 </a:solidFill>

--- a/ground-vehicle/docs/courses/beginner-ps3/l1_introduction.pptx
+++ b/ground-vehicle/docs/courses/beginner-ps3/l1_introduction.pptx
@@ -10266,7 +10266,7 @@
         <p:spPr>
           <a:xfrm>
             <a:off x="502920" y="1188720"/>
-            <a:ext cx="5364327" cy="457200"/>
+            <a:ext cx="4278540" cy="457200"/>
           </a:xfrm>
           <a:prstGeom prst="rect">
             <a:avLst/>
@@ -10284,7 +10284,7 @@
                 <a:spcPct val="100000"/>
               </a:lnSpc>
               <a:spcAft>
-                <a:spcPts val="600"/>
+                <a:spcPts val="300"/>
               </a:spcAft>
               <a:defRPr sz="1900" b="1">
                 <a:solidFill>
@@ -10314,7 +10314,7 @@
         <p:spPr>
           <a:xfrm>
             <a:off x="502920" y="1700784"/>
-            <a:ext cx="5364327" cy="3474720"/>
+            <a:ext cx="4278540" cy="3474720"/>
           </a:xfrm>
           <a:prstGeom prst="rect">
             <a:avLst/>
@@ -10334,15 +10334,15 @@
               <a:spcAft>
                 <a:spcPts val="800"/>
               </a:spcAft>
-              <a:defRPr sz="2000" b="0">
-                <a:solidFill>
-                  <a:srgbClr val="222222"/>
-                </a:solidFill>
-                <a:latin typeface="Calibri"/>
-              </a:defRPr>
-            </a:pPr>
-            <a:r>
-              <a:rPr sz="2000" b="0">
+              <a:defRPr sz="2200" b="0">
+                <a:solidFill>
+                  <a:srgbClr val="222222"/>
+                </a:solidFill>
+                <a:latin typeface="Calibri"/>
+              </a:defRPr>
+            </a:pPr>
+            <a:r>
+              <a:rPr sz="2200" b="0">
                 <a:solidFill>
                   <a:srgbClr val="222222"/>
                 </a:solidFill>
@@ -10359,15 +10359,15 @@
               <a:spcAft>
                 <a:spcPts val="800"/>
               </a:spcAft>
-              <a:defRPr sz="2000" b="0">
-                <a:solidFill>
-                  <a:srgbClr val="222222"/>
-                </a:solidFill>
-                <a:latin typeface="Calibri"/>
-              </a:defRPr>
-            </a:pPr>
-            <a:r>
-              <a:rPr sz="2000" b="0">
+              <a:defRPr sz="2200" b="0">
+                <a:solidFill>
+                  <a:srgbClr val="222222"/>
+                </a:solidFill>
+                <a:latin typeface="Calibri"/>
+              </a:defRPr>
+            </a:pPr>
+            <a:r>
+              <a:rPr sz="2200" b="0">
                 <a:solidFill>
                   <a:srgbClr val="222222"/>
                 </a:solidFill>
@@ -10384,15 +10384,15 @@
               <a:spcAft>
                 <a:spcPts val="800"/>
               </a:spcAft>
-              <a:defRPr sz="2000" b="0">
-                <a:solidFill>
-                  <a:srgbClr val="222222"/>
-                </a:solidFill>
-                <a:latin typeface="Calibri"/>
-              </a:defRPr>
-            </a:pPr>
-            <a:r>
-              <a:rPr sz="2000" b="0">
+              <a:defRPr sz="2200" b="0">
+                <a:solidFill>
+                  <a:srgbClr val="222222"/>
+                </a:solidFill>
+                <a:latin typeface="Calibri"/>
+              </a:defRPr>
+            </a:pPr>
+            <a:r>
+              <a:rPr sz="2200" b="0">
                 <a:solidFill>
                   <a:srgbClr val="222222"/>
                 </a:solidFill>
@@ -10409,15 +10409,15 @@
               <a:spcAft>
                 <a:spcPts val="800"/>
               </a:spcAft>
-              <a:defRPr sz="2000" b="0">
-                <a:solidFill>
-                  <a:srgbClr val="222222"/>
-                </a:solidFill>
-                <a:latin typeface="Calibri"/>
-              </a:defRPr>
-            </a:pPr>
-            <a:r>
-              <a:rPr sz="2000" b="0">
+              <a:defRPr sz="2200" b="0">
+                <a:solidFill>
+                  <a:srgbClr val="222222"/>
+                </a:solidFill>
+                <a:latin typeface="Calibri"/>
+              </a:defRPr>
+            </a:pPr>
+            <a:r>
+              <a:rPr sz="2200" b="0">
                 <a:solidFill>
                   <a:srgbClr val="222222"/>
                 </a:solidFill>
@@ -10436,8 +10436,8 @@
         </p:nvSpPr>
         <p:spPr>
           <a:xfrm>
-            <a:off x="6324447" y="1188720"/>
-            <a:ext cx="5364327" cy="457200"/>
+            <a:off x="5238660" y="1188720"/>
+            <a:ext cx="6450115" cy="457200"/>
           </a:xfrm>
           <a:prstGeom prst="rect">
             <a:avLst/>
@@ -10455,7 +10455,7 @@
                 <a:spcPct val="100000"/>
               </a:lnSpc>
               <a:spcAft>
-                <a:spcPts val="600"/>
+                <a:spcPts val="300"/>
               </a:spcAft>
               <a:defRPr sz="1900" b="1">
                 <a:solidFill>
@@ -10484,8 +10484,8 @@
         </p:nvSpPr>
         <p:spPr>
           <a:xfrm>
-            <a:off x="6324447" y="1700784"/>
-            <a:ext cx="5364327" cy="3474720"/>
+            <a:off x="5238660" y="1700784"/>
+            <a:ext cx="6450115" cy="3474720"/>
           </a:xfrm>
           <a:prstGeom prst="rect">
             <a:avLst/>
@@ -10505,15 +10505,15 @@
               <a:spcAft>
                 <a:spcPts val="800"/>
               </a:spcAft>
-              <a:defRPr sz="1900" b="0">
-                <a:solidFill>
-                  <a:srgbClr val="222222"/>
-                </a:solidFill>
-                <a:latin typeface="Calibri"/>
-              </a:defRPr>
-            </a:pPr>
-            <a:r>
-              <a:rPr sz="1900" b="0">
+              <a:defRPr sz="2200" b="0">
+                <a:solidFill>
+                  <a:srgbClr val="222222"/>
+                </a:solidFill>
+                <a:latin typeface="Calibri"/>
+              </a:defRPr>
+            </a:pPr>
+            <a:r>
+              <a:rPr sz="2200" b="0">
                 <a:solidFill>
                   <a:srgbClr val="222222"/>
                 </a:solidFill>
@@ -10530,15 +10530,15 @@
               <a:spcAft>
                 <a:spcPts val="800"/>
               </a:spcAft>
-              <a:defRPr sz="1900" b="0">
-                <a:solidFill>
-                  <a:srgbClr val="222222"/>
-                </a:solidFill>
-                <a:latin typeface="Calibri"/>
-              </a:defRPr>
-            </a:pPr>
-            <a:r>
-              <a:rPr sz="1900" b="0">
+              <a:defRPr sz="2200" b="0">
+                <a:solidFill>
+                  <a:srgbClr val="222222"/>
+                </a:solidFill>
+                <a:latin typeface="Calibri"/>
+              </a:defRPr>
+            </a:pPr>
+            <a:r>
+              <a:rPr sz="2200" b="0">
                 <a:solidFill>
                   <a:srgbClr val="222222"/>
                 </a:solidFill>
@@ -10555,15 +10555,15 @@
               <a:spcAft>
                 <a:spcPts val="800"/>
               </a:spcAft>
-              <a:defRPr sz="1900" b="0">
-                <a:solidFill>
-                  <a:srgbClr val="222222"/>
-                </a:solidFill>
-                <a:latin typeface="Calibri"/>
-              </a:defRPr>
-            </a:pPr>
-            <a:r>
-              <a:rPr sz="1900" b="0">
+              <a:defRPr sz="2200" b="0">
+                <a:solidFill>
+                  <a:srgbClr val="222222"/>
+                </a:solidFill>
+                <a:latin typeface="Calibri"/>
+              </a:defRPr>
+            </a:pPr>
+            <a:r>
+              <a:rPr sz="2200" b="0">
                 <a:solidFill>
                   <a:srgbClr val="222222"/>
                 </a:solidFill>
@@ -10580,15 +10580,15 @@
               <a:spcAft>
                 <a:spcPts val="800"/>
               </a:spcAft>
-              <a:defRPr sz="1900" b="0">
-                <a:solidFill>
-                  <a:srgbClr val="222222"/>
-                </a:solidFill>
-                <a:latin typeface="Calibri"/>
-              </a:defRPr>
-            </a:pPr>
-            <a:r>
-              <a:rPr sz="1900" b="0">
+              <a:defRPr sz="2200" b="0">
+                <a:solidFill>
+                  <a:srgbClr val="222222"/>
+                </a:solidFill>
+                <a:latin typeface="Calibri"/>
+              </a:defRPr>
+            </a:pPr>
+            <a:r>
+              <a:rPr sz="2200" b="0">
                 <a:solidFill>
                   <a:srgbClr val="222222"/>
                 </a:solidFill>
@@ -11369,7 +11369,7 @@
         <p:spPr>
           <a:xfrm>
             <a:off x="502920" y="1188720"/>
-            <a:ext cx="5364327" cy="457200"/>
+            <a:ext cx="6186894" cy="457200"/>
           </a:xfrm>
           <a:prstGeom prst="rect">
             <a:avLst/>
@@ -11417,7 +11417,7 @@
         <p:spPr>
           <a:xfrm>
             <a:off x="502920" y="1700784"/>
-            <a:ext cx="5364327" cy="3474720"/>
+            <a:ext cx="6186894" cy="3474720"/>
           </a:xfrm>
           <a:prstGeom prst="rect">
             <a:avLst/>
@@ -11435,7 +11435,7 @@
                 <a:spcPct val="100000"/>
               </a:lnSpc>
               <a:spcAft>
-                <a:spcPts val="400"/>
+                <a:spcPts val="800"/>
               </a:spcAft>
               <a:defRPr sz="1800" b="0">
                 <a:solidFill>
@@ -11460,7 +11460,7 @@
                 <a:spcPct val="100000"/>
               </a:lnSpc>
               <a:spcAft>
-                <a:spcPts val="400"/>
+                <a:spcPts val="800"/>
               </a:spcAft>
               <a:defRPr sz="1800" b="0">
                 <a:solidFill>
@@ -11485,7 +11485,7 @@
                 <a:spcPct val="100000"/>
               </a:lnSpc>
               <a:spcAft>
-                <a:spcPts val="400"/>
+                <a:spcPts val="800"/>
               </a:spcAft>
               <a:defRPr sz="1800" b="0">
                 <a:solidFill>
@@ -11510,7 +11510,7 @@
                 <a:spcPct val="100000"/>
               </a:lnSpc>
               <a:spcAft>
-                <a:spcPts val="400"/>
+                <a:spcPts val="800"/>
               </a:spcAft>
               <a:defRPr sz="1800" b="0">
                 <a:solidFill>
@@ -11535,7 +11535,7 @@
                 <a:spcPct val="100000"/>
               </a:lnSpc>
               <a:spcAft>
-                <a:spcPts val="400"/>
+                <a:spcPts val="800"/>
               </a:spcAft>
               <a:defRPr sz="1800" b="0">
                 <a:solidFill>
@@ -11564,8 +11564,8 @@
         </p:nvSpPr>
         <p:spPr>
           <a:xfrm>
-            <a:off x="6324447" y="1188720"/>
-            <a:ext cx="5364327" cy="457200"/>
+            <a:off x="7147014" y="1188720"/>
+            <a:ext cx="4541761" cy="457200"/>
           </a:xfrm>
           <a:prstGeom prst="rect">
             <a:avLst/>
@@ -11612,8 +11612,8 @@
         </p:nvSpPr>
         <p:spPr>
           <a:xfrm>
-            <a:off x="6324447" y="1700784"/>
-            <a:ext cx="5364327" cy="3474720"/>
+            <a:off x="7147014" y="1700784"/>
+            <a:ext cx="4541761" cy="3474720"/>
           </a:xfrm>
           <a:prstGeom prst="rect">
             <a:avLst/>
@@ -11633,15 +11633,15 @@
               <a:spcAft>
                 <a:spcPts val="800"/>
               </a:spcAft>
-              <a:defRPr sz="1800" b="0">
-                <a:solidFill>
-                  <a:srgbClr val="222222"/>
-                </a:solidFill>
-                <a:latin typeface="Calibri"/>
-              </a:defRPr>
-            </a:pPr>
-            <a:r>
-              <a:rPr sz="1800" b="0">
+              <a:defRPr sz="1900" b="0">
+                <a:solidFill>
+                  <a:srgbClr val="222222"/>
+                </a:solidFill>
+                <a:latin typeface="Calibri"/>
+              </a:defRPr>
+            </a:pPr>
+            <a:r>
+              <a:rPr sz="1900" b="0">
                 <a:solidFill>
                   <a:srgbClr val="222222"/>
                 </a:solidFill>
@@ -11658,15 +11658,15 @@
               <a:spcAft>
                 <a:spcPts val="800"/>
               </a:spcAft>
-              <a:defRPr sz="1800" b="0">
-                <a:solidFill>
-                  <a:srgbClr val="222222"/>
-                </a:solidFill>
-                <a:latin typeface="Calibri"/>
-              </a:defRPr>
-            </a:pPr>
-            <a:r>
-              <a:rPr sz="1800" b="0">
+              <a:defRPr sz="1900" b="0">
+                <a:solidFill>
+                  <a:srgbClr val="222222"/>
+                </a:solidFill>
+                <a:latin typeface="Calibri"/>
+              </a:defRPr>
+            </a:pPr>
+            <a:r>
+              <a:rPr sz="1900" b="0">
                 <a:solidFill>
                   <a:srgbClr val="222222"/>
                 </a:solidFill>
@@ -11683,15 +11683,15 @@
               <a:spcAft>
                 <a:spcPts val="800"/>
               </a:spcAft>
-              <a:defRPr sz="1800" b="0">
-                <a:solidFill>
-                  <a:srgbClr val="222222"/>
-                </a:solidFill>
-                <a:latin typeface="Calibri"/>
-              </a:defRPr>
-            </a:pPr>
-            <a:r>
-              <a:rPr sz="1800" b="0">
+              <a:defRPr sz="1900" b="0">
+                <a:solidFill>
+                  <a:srgbClr val="222222"/>
+                </a:solidFill>
+                <a:latin typeface="Calibri"/>
+              </a:defRPr>
+            </a:pPr>
+            <a:r>
+              <a:rPr sz="1900" b="0">
                 <a:solidFill>
                   <a:srgbClr val="222222"/>
                 </a:solidFill>
@@ -11708,15 +11708,15 @@
               <a:spcAft>
                 <a:spcPts val="800"/>
               </a:spcAft>
-              <a:defRPr sz="1800" b="0">
-                <a:solidFill>
-                  <a:srgbClr val="222222"/>
-                </a:solidFill>
-                <a:latin typeface="Calibri"/>
-              </a:defRPr>
-            </a:pPr>
-            <a:r>
-              <a:rPr sz="1800" b="0">
+              <a:defRPr sz="1900" b="0">
+                <a:solidFill>
+                  <a:srgbClr val="222222"/>
+                </a:solidFill>
+                <a:latin typeface="Calibri"/>
+              </a:defRPr>
+            </a:pPr>
+            <a:r>
+              <a:rPr sz="1900" b="0">
                 <a:solidFill>
                   <a:srgbClr val="222222"/>
                 </a:solidFill>
@@ -15817,7 +15817,7 @@
         <p:spPr>
           <a:xfrm>
             <a:off x="502920" y="1188720"/>
-            <a:ext cx="5364327" cy="457200"/>
+            <a:ext cx="5415114" cy="457200"/>
           </a:xfrm>
           <a:prstGeom prst="rect">
             <a:avLst/>
@@ -15865,7 +15865,7 @@
         <p:spPr>
           <a:xfrm>
             <a:off x="502920" y="1700784"/>
-            <a:ext cx="5364327" cy="4562856"/>
+            <a:ext cx="5415114" cy="4562856"/>
           </a:xfrm>
           <a:prstGeom prst="rect">
             <a:avLst/>
@@ -16012,8 +16012,8 @@
         </p:nvSpPr>
         <p:spPr>
           <a:xfrm>
-            <a:off x="6324447" y="1188720"/>
-            <a:ext cx="5364327" cy="457200"/>
+            <a:off x="6375234" y="1188720"/>
+            <a:ext cx="5313541" cy="457200"/>
           </a:xfrm>
           <a:prstGeom prst="rect">
             <a:avLst/>
@@ -16060,8 +16060,8 @@
         </p:nvSpPr>
         <p:spPr>
           <a:xfrm>
-            <a:off x="6324447" y="1700784"/>
-            <a:ext cx="5364327" cy="4562856"/>
+            <a:off x="6375234" y="1700784"/>
+            <a:ext cx="5313541" cy="4562856"/>
           </a:xfrm>
           <a:prstGeom prst="rect">
             <a:avLst/>
@@ -37773,7 +37773,7 @@
         <p:spPr>
           <a:xfrm>
             <a:off x="502920" y="1188720"/>
-            <a:ext cx="5364327" cy="457200"/>
+            <a:ext cx="5776968" cy="457200"/>
           </a:xfrm>
           <a:prstGeom prst="rect">
             <a:avLst/>
@@ -37821,7 +37821,7 @@
         <p:spPr>
           <a:xfrm>
             <a:off x="502920" y="1700784"/>
-            <a:ext cx="5364327" cy="3474720"/>
+            <a:ext cx="5776968" cy="3474720"/>
           </a:xfrm>
           <a:prstGeom prst="rect">
             <a:avLst/>
@@ -37841,15 +37841,15 @@
               <a:spcAft>
                 <a:spcPts val="800"/>
               </a:spcAft>
-              <a:defRPr sz="2100" b="0">
-                <a:solidFill>
-                  <a:srgbClr val="222222"/>
-                </a:solidFill>
-                <a:latin typeface="Calibri"/>
-              </a:defRPr>
-            </a:pPr>
-            <a:r>
-              <a:rPr sz="2100" b="0">
+              <a:defRPr sz="2200" b="0">
+                <a:solidFill>
+                  <a:srgbClr val="222222"/>
+                </a:solidFill>
+                <a:latin typeface="Calibri"/>
+              </a:defRPr>
+            </a:pPr>
+            <a:r>
+              <a:rPr sz="2200" b="0">
                 <a:solidFill>
                   <a:srgbClr val="222222"/>
                 </a:solidFill>
@@ -37866,15 +37866,15 @@
               <a:spcAft>
                 <a:spcPts val="800"/>
               </a:spcAft>
-              <a:defRPr sz="2100" b="0">
-                <a:solidFill>
-                  <a:srgbClr val="222222"/>
-                </a:solidFill>
-                <a:latin typeface="Calibri"/>
-              </a:defRPr>
-            </a:pPr>
-            <a:r>
-              <a:rPr sz="2100" b="0">
+              <a:defRPr sz="2200" b="0">
+                <a:solidFill>
+                  <a:srgbClr val="222222"/>
+                </a:solidFill>
+                <a:latin typeface="Calibri"/>
+              </a:defRPr>
+            </a:pPr>
+            <a:r>
+              <a:rPr sz="2200" b="0">
                 <a:solidFill>
                   <a:srgbClr val="222222"/>
                 </a:solidFill>
@@ -37891,15 +37891,15 @@
               <a:spcAft>
                 <a:spcPts val="800"/>
               </a:spcAft>
-              <a:defRPr sz="2100" b="0">
-                <a:solidFill>
-                  <a:srgbClr val="222222"/>
-                </a:solidFill>
-                <a:latin typeface="Calibri"/>
-              </a:defRPr>
-            </a:pPr>
-            <a:r>
-              <a:rPr sz="2100" b="0">
+              <a:defRPr sz="2200" b="0">
+                <a:solidFill>
+                  <a:srgbClr val="222222"/>
+                </a:solidFill>
+                <a:latin typeface="Calibri"/>
+              </a:defRPr>
+            </a:pPr>
+            <a:r>
+              <a:rPr sz="2200" b="0">
                 <a:solidFill>
                   <a:srgbClr val="222222"/>
                 </a:solidFill>
@@ -37916,15 +37916,15 @@
               <a:spcAft>
                 <a:spcPts val="800"/>
               </a:spcAft>
-              <a:defRPr sz="2100" b="0">
-                <a:solidFill>
-                  <a:srgbClr val="222222"/>
-                </a:solidFill>
-                <a:latin typeface="Calibri"/>
-              </a:defRPr>
-            </a:pPr>
-            <a:r>
-              <a:rPr sz="2100" b="0">
+              <a:defRPr sz="2200" b="0">
+                <a:solidFill>
+                  <a:srgbClr val="222222"/>
+                </a:solidFill>
+                <a:latin typeface="Calibri"/>
+              </a:defRPr>
+            </a:pPr>
+            <a:r>
+              <a:rPr sz="2200" b="0">
                 <a:solidFill>
                   <a:srgbClr val="222222"/>
                 </a:solidFill>
@@ -37941,15 +37941,15 @@
               <a:spcAft>
                 <a:spcPts val="800"/>
               </a:spcAft>
-              <a:defRPr sz="2100" b="0">
-                <a:solidFill>
-                  <a:srgbClr val="222222"/>
-                </a:solidFill>
-                <a:latin typeface="Calibri"/>
-              </a:defRPr>
-            </a:pPr>
-            <a:r>
-              <a:rPr sz="2100" b="0">
+              <a:defRPr sz="2200" b="0">
+                <a:solidFill>
+                  <a:srgbClr val="222222"/>
+                </a:solidFill>
+                <a:latin typeface="Calibri"/>
+              </a:defRPr>
+            </a:pPr>
+            <a:r>
+              <a:rPr sz="2200" b="0">
                 <a:solidFill>
                   <a:srgbClr val="222222"/>
                 </a:solidFill>
@@ -37966,15 +37966,15 @@
               <a:spcAft>
                 <a:spcPts val="800"/>
               </a:spcAft>
-              <a:defRPr sz="2100" b="0">
-                <a:solidFill>
-                  <a:srgbClr val="222222"/>
-                </a:solidFill>
-                <a:latin typeface="Calibri"/>
-              </a:defRPr>
-            </a:pPr>
-            <a:r>
-              <a:rPr sz="2100" b="0">
+              <a:defRPr sz="2200" b="0">
+                <a:solidFill>
+                  <a:srgbClr val="222222"/>
+                </a:solidFill>
+                <a:latin typeface="Calibri"/>
+              </a:defRPr>
+            </a:pPr>
+            <a:r>
+              <a:rPr sz="2200" b="0">
                 <a:solidFill>
                   <a:srgbClr val="222222"/>
                 </a:solidFill>
@@ -37991,15 +37991,15 @@
               <a:spcAft>
                 <a:spcPts val="800"/>
               </a:spcAft>
-              <a:defRPr sz="2100" b="0">
-                <a:solidFill>
-                  <a:srgbClr val="222222"/>
-                </a:solidFill>
-                <a:latin typeface="Calibri"/>
-              </a:defRPr>
-            </a:pPr>
-            <a:r>
-              <a:rPr sz="2100" b="0">
+              <a:defRPr sz="2200" b="0">
+                <a:solidFill>
+                  <a:srgbClr val="222222"/>
+                </a:solidFill>
+                <a:latin typeface="Calibri"/>
+              </a:defRPr>
+            </a:pPr>
+            <a:r>
+              <a:rPr sz="2200" b="0">
                 <a:solidFill>
                   <a:srgbClr val="222222"/>
                 </a:solidFill>
@@ -38018,8 +38018,8 @@
         </p:nvSpPr>
         <p:spPr>
           <a:xfrm>
-            <a:off x="6324447" y="1188720"/>
-            <a:ext cx="5364327" cy="457200"/>
+            <a:off x="6737088" y="1188720"/>
+            <a:ext cx="4951687" cy="457200"/>
           </a:xfrm>
           <a:prstGeom prst="rect">
             <a:avLst/>
@@ -38066,8 +38066,8 @@
         </p:nvSpPr>
         <p:spPr>
           <a:xfrm>
-            <a:off x="6324447" y="1700784"/>
-            <a:ext cx="5364327" cy="3474720"/>
+            <a:off x="6737088" y="1700784"/>
+            <a:ext cx="4951687" cy="3474720"/>
           </a:xfrm>
           <a:prstGeom prst="rect">
             <a:avLst/>

--- a/ground-vehicle/docs/courses/beginner-ps3/l1_introduction.pptx
+++ b/ground-vehicle/docs/courses/beginner-ps3/l1_introduction.pptx
@@ -32731,7 +32731,7 @@
                 </a:solidFill>
                 <a:latin typeface="Calibri"/>
               </a:rPr>
-              <a:t>About 20 minutes</a:t>
+              <a:t>About 15 minutes</a:t>
             </a:r>
           </a:p>
         </p:txBody>

--- a/ground-vehicle/docs/courses/beginner-ps3/l1_introduction.pptx
+++ b/ground-vehicle/docs/courses/beginner-ps3/l1_introduction.pptx
@@ -8663,7 +8663,7 @@
                 </a:solidFill>
                 <a:latin typeface="Calibri"/>
               </a:rPr>
-              <a:t>9</a:t>
+              <a:t>10</a:t>
             </a:r>
           </a:p>
         </p:txBody>
@@ -8939,7 +8939,7 @@
                 </a:solidFill>
                 <a:latin typeface="Calibri"/>
               </a:rPr>
-              <a:t>10</a:t>
+              <a:t>11</a:t>
             </a:r>
           </a:p>
         </p:txBody>
@@ -9263,7 +9263,7 @@
                 </a:solidFill>
                 <a:latin typeface="Calibri"/>
               </a:rPr>
-              <a:t>11</a:t>
+              <a:t>12</a:t>
             </a:r>
           </a:p>
         </p:txBody>
@@ -9539,7 +9539,7 @@
                 </a:solidFill>
                 <a:latin typeface="Calibri"/>
               </a:rPr>
-              <a:t>12</a:t>
+              <a:t>13</a:t>
             </a:r>
           </a:p>
         </p:txBody>
@@ -10030,7 +10030,7 @@
                 </a:solidFill>
                 <a:latin typeface="Calibri"/>
               </a:rPr>
-              <a:t>13</a:t>
+              <a:t>14</a:t>
             </a:r>
           </a:p>
         </p:txBody>
@@ -10642,7 +10642,7 @@
                 </a:solidFill>
                 <a:latin typeface="Calibri"/>
               </a:rPr>
-              <a:t>14</a:t>
+              <a:t>15</a:t>
             </a:r>
           </a:p>
         </p:txBody>
@@ -11133,7 +11133,7 @@
                 </a:solidFill>
                 <a:latin typeface="Calibri"/>
               </a:rPr>
-              <a:t>15</a:t>
+              <a:t>16</a:t>
             </a:r>
           </a:p>
         </p:txBody>
@@ -11770,7 +11770,7 @@
                 </a:solidFill>
                 <a:latin typeface="Calibri"/>
               </a:rPr>
-              <a:t>16</a:t>
+              <a:t>17</a:t>
             </a:r>
           </a:p>
         </p:txBody>
@@ -13008,7 +13008,7 @@
                 </a:solidFill>
                 <a:latin typeface="Calibri"/>
               </a:rPr>
-              <a:t>17</a:t>
+              <a:t>18</a:t>
             </a:r>
           </a:p>
         </p:txBody>
@@ -14760,7 +14760,7 @@
                 </a:solidFill>
                 <a:latin typeface="Calibri"/>
               </a:rPr>
-              <a:t>18</a:t>
+              <a:t>19</a:t>
             </a:r>
           </a:p>
         </p:txBody>
@@ -15131,7 +15131,7 @@
                 </a:solidFill>
                 <a:latin typeface="Calibri"/>
               </a:rPr>
-              <a:t>1</a:t>
+              <a:t>2</a:t>
             </a:r>
           </a:p>
         </p:txBody>
@@ -15581,7 +15581,7 @@
                 </a:solidFill>
                 <a:latin typeface="Calibri"/>
               </a:rPr>
-              <a:t>19</a:t>
+              <a:t>20</a:t>
             </a:r>
           </a:p>
         </p:txBody>
@@ -16152,7 +16152,7 @@
                 </a:solidFill>
                 <a:latin typeface="Calibri"/>
               </a:rPr>
-              <a:t>20</a:t>
+              <a:t>21</a:t>
             </a:r>
           </a:p>
         </p:txBody>
@@ -16524,7 +16524,7 @@
                 </a:solidFill>
                 <a:latin typeface="Calibri"/>
               </a:rPr>
-              <a:t>21</a:t>
+              <a:t>22</a:t>
             </a:r>
           </a:p>
         </p:txBody>
@@ -17314,7 +17314,7 @@
                 </a:solidFill>
                 <a:latin typeface="Calibri"/>
               </a:rPr>
-              <a:t>22</a:t>
+              <a:t>23</a:t>
             </a:r>
           </a:p>
         </p:txBody>
@@ -17773,7 +17773,7 @@
                 </a:solidFill>
                 <a:latin typeface="Calibri"/>
               </a:rPr>
-              <a:t>23</a:t>
+              <a:t>24</a:t>
             </a:r>
           </a:p>
         </p:txBody>
@@ -18410,7 +18410,7 @@
                 </a:solidFill>
                 <a:latin typeface="Calibri"/>
               </a:rPr>
-              <a:t>24</a:t>
+              <a:t>25</a:t>
             </a:r>
           </a:p>
         </p:txBody>
@@ -18885,7 +18885,7 @@
                 </a:solidFill>
                 <a:latin typeface="Calibri"/>
               </a:rPr>
-              <a:t>25</a:t>
+              <a:t>26</a:t>
             </a:r>
           </a:p>
         </p:txBody>
@@ -19310,7 +19310,7 @@
                 </a:solidFill>
                 <a:latin typeface="Calibri"/>
               </a:rPr>
-              <a:t>26</a:t>
+              <a:t>27</a:t>
             </a:r>
           </a:p>
         </p:txBody>
@@ -20539,7 +20539,7 @@
                 </a:solidFill>
                 <a:latin typeface="Calibri"/>
               </a:rPr>
-              <a:t>27</a:t>
+              <a:t>28</a:t>
             </a:r>
           </a:p>
         </p:txBody>
@@ -20997,7 +20997,7 @@
                 </a:solidFill>
                 <a:latin typeface="Calibri"/>
               </a:rPr>
-              <a:t>28</a:t>
+              <a:t>29</a:t>
             </a:r>
           </a:p>
         </p:txBody>
@@ -21835,7 +21835,7 @@
                 </a:solidFill>
                 <a:latin typeface="Calibri"/>
               </a:rPr>
-              <a:t>2</a:t>
+              <a:t>3</a:t>
             </a:r>
           </a:p>
         </p:txBody>
@@ -22253,7 +22253,7 @@
                 </a:solidFill>
                 <a:latin typeface="Calibri"/>
               </a:rPr>
-              <a:t>29</a:t>
+              <a:t>30</a:t>
             </a:r>
           </a:p>
         </p:txBody>
@@ -23428,7 +23428,7 @@
                 </a:solidFill>
                 <a:latin typeface="Calibri"/>
               </a:rPr>
-              <a:t>30</a:t>
+              <a:t>31</a:t>
             </a:r>
           </a:p>
         </p:txBody>
@@ -23910,7 +23910,7 @@
                 </a:solidFill>
                 <a:latin typeface="Calibri"/>
               </a:rPr>
-              <a:t>31</a:t>
+              <a:t>32</a:t>
             </a:r>
           </a:p>
         </p:txBody>
@@ -24372,7 +24372,7 @@
                 </a:solidFill>
                 <a:latin typeface="Calibri"/>
               </a:rPr>
-              <a:t>32</a:t>
+              <a:t>33</a:t>
             </a:r>
           </a:p>
         </p:txBody>
@@ -25989,7 +25989,7 @@
                 </a:solidFill>
                 <a:latin typeface="Calibri"/>
               </a:rPr>
-              <a:t>33</a:t>
+              <a:t>34</a:t>
             </a:r>
           </a:p>
         </p:txBody>
@@ -26451,7 +26451,7 @@
                 </a:solidFill>
                 <a:latin typeface="Calibri"/>
               </a:rPr>
-              <a:t>34</a:t>
+              <a:t>35</a:t>
             </a:r>
           </a:p>
         </p:txBody>
@@ -27068,7 +27068,7 @@
                 </a:solidFill>
                 <a:latin typeface="Calibri"/>
               </a:rPr>
-              <a:t>35</a:t>
+              <a:t>36</a:t>
             </a:r>
           </a:p>
         </p:txBody>
@@ -27796,7 +27796,7 @@
                 </a:solidFill>
                 <a:latin typeface="Calibri"/>
               </a:rPr>
-              <a:t>36</a:t>
+              <a:t>37</a:t>
             </a:r>
           </a:p>
         </p:txBody>
@@ -28464,7 +28464,7 @@
                 </a:solidFill>
                 <a:latin typeface="Calibri"/>
               </a:rPr>
-              <a:t>37</a:t>
+              <a:t>38</a:t>
             </a:r>
           </a:p>
         </p:txBody>
@@ -29350,7 +29350,7 @@
                 </a:solidFill>
                 <a:latin typeface="Calibri"/>
               </a:rPr>
-              <a:t>38</a:t>
+              <a:t>39</a:t>
             </a:r>
           </a:p>
         </p:txBody>
@@ -29850,7 +29850,7 @@
                 </a:solidFill>
                 <a:latin typeface="Calibri"/>
               </a:rPr>
-              <a:t>3</a:t>
+              <a:t>4</a:t>
             </a:r>
           </a:p>
         </p:txBody>
@@ -29865,7 +29865,7 @@
         </p:nvGraphicFramePr>
         <p:xfrm>
           <a:off x="502920" y="1188720"/>
-          <a:ext cx="11185853" cy="3314700"/>
+          <a:ext cx="11185854" cy="3886200"/>
         </p:xfrm>
         <a:graphic>
           <a:graphicData uri="http://schemas.openxmlformats.org/drawingml/2006/table">
@@ -29874,18 +29874,18 @@
                 <a:tableStyleId>{5C22544A-7EE6-4342-B048-85BDC9FD1C3A}</a:tableStyleId>
               </a:tblPr>
               <a:tblGrid>
-                <a:gridCol w="828581"/>
-                <a:gridCol w="4142909"/>
-                <a:gridCol w="6214363"/>
+                <a:gridCol w="1092200"/>
+                <a:gridCol w="4056220"/>
+                <a:gridCol w="6037434"/>
               </a:tblGrid>
-              <a:tr h="552450">
+              <a:tr h="647700">
                 <a:tc>
                   <a:txBody>
                     <a:bodyPr/>
                     <a:lstStyle/>
                     <a:p>
                       <a:r>
-                        <a:rPr sz="2250" b="1">
+                        <a:rPr sz="2400" b="1">
                           <a:solidFill>
                             <a:srgbClr val="FFFFFF"/>
                           </a:solidFill>
@@ -29907,7 +29907,7 @@
                     <a:lstStyle/>
                     <a:p>
                       <a:r>
-                        <a:rPr sz="2250" b="1">
+                        <a:rPr sz="2400" b="1">
                           <a:solidFill>
                             <a:srgbClr val="FFFFFF"/>
                           </a:solidFill>
@@ -29929,7 +29929,7 @@
                     <a:lstStyle/>
                     <a:p>
                       <a:r>
-                        <a:rPr sz="2250" b="1">
+                        <a:rPr sz="2400" b="1">
                           <a:solidFill>
                             <a:srgbClr val="FFFFFF"/>
                           </a:solidFill>
@@ -29946,14 +29946,14 @@
                   </a:tcPr>
                 </a:tc>
               </a:tr>
-              <a:tr h="552450">
+              <a:tr h="647700">
                 <a:tc>
                   <a:txBody>
                     <a:bodyPr/>
                     <a:lstStyle/>
                     <a:p>
                       <a:r>
-                        <a:rPr sz="2250">
+                        <a:rPr sz="2400">
                           <a:solidFill>
                             <a:srgbClr val="222222"/>
                           </a:solidFill>
@@ -29975,7 +29975,7 @@
                     <a:lstStyle/>
                     <a:p>
                       <a:r>
-                        <a:rPr sz="2250">
+                        <a:rPr sz="2400">
                           <a:solidFill>
                             <a:srgbClr val="222222"/>
                           </a:solidFill>
@@ -29997,7 +29997,7 @@
                     <a:lstStyle/>
                     <a:p>
                       <a:r>
-                        <a:rPr sz="2250">
+                        <a:rPr sz="2400">
                           <a:solidFill>
                             <a:srgbClr val="222222"/>
                           </a:solidFill>
@@ -30014,14 +30014,14 @@
                   </a:tcPr>
                 </a:tc>
               </a:tr>
-              <a:tr h="552450">
+              <a:tr h="647700">
                 <a:tc>
                   <a:txBody>
                     <a:bodyPr/>
                     <a:lstStyle/>
                     <a:p>
                       <a:r>
-                        <a:rPr sz="2250">
+                        <a:rPr sz="2400">
                           <a:solidFill>
                             <a:srgbClr val="222222"/>
                           </a:solidFill>
@@ -30043,7 +30043,7 @@
                     <a:lstStyle/>
                     <a:p>
                       <a:r>
-                        <a:rPr sz="2250">
+                        <a:rPr sz="2400">
                           <a:solidFill>
                             <a:srgbClr val="222222"/>
                           </a:solidFill>
@@ -30065,7 +30065,7 @@
                     <a:lstStyle/>
                     <a:p>
                       <a:r>
-                        <a:rPr sz="2250">
+                        <a:rPr sz="2400">
                           <a:solidFill>
                             <a:srgbClr val="222222"/>
                           </a:solidFill>
@@ -30082,14 +30082,14 @@
                   </a:tcPr>
                 </a:tc>
               </a:tr>
-              <a:tr h="552450">
+              <a:tr h="647700">
                 <a:tc>
                   <a:txBody>
                     <a:bodyPr/>
                     <a:lstStyle/>
                     <a:p>
                       <a:r>
-                        <a:rPr sz="2250">
+                        <a:rPr sz="2400">
                           <a:solidFill>
                             <a:srgbClr val="222222"/>
                           </a:solidFill>
@@ -30111,7 +30111,7 @@
                     <a:lstStyle/>
                     <a:p>
                       <a:r>
-                        <a:rPr sz="2250">
+                        <a:rPr sz="2400">
                           <a:solidFill>
                             <a:srgbClr val="222222"/>
                           </a:solidFill>
@@ -30133,7 +30133,7 @@
                     <a:lstStyle/>
                     <a:p>
                       <a:r>
-                        <a:rPr sz="2250">
+                        <a:rPr sz="2400">
                           <a:solidFill>
                             <a:srgbClr val="222222"/>
                           </a:solidFill>
@@ -30150,14 +30150,14 @@
                   </a:tcPr>
                 </a:tc>
               </a:tr>
-              <a:tr h="552450">
+              <a:tr h="647700">
                 <a:tc>
                   <a:txBody>
                     <a:bodyPr/>
                     <a:lstStyle/>
                     <a:p>
                       <a:r>
-                        <a:rPr sz="2250">
+                        <a:rPr sz="2400">
                           <a:solidFill>
                             <a:srgbClr val="222222"/>
                           </a:solidFill>
@@ -30179,7 +30179,7 @@
                     <a:lstStyle/>
                     <a:p>
                       <a:r>
-                        <a:rPr sz="2250">
+                        <a:rPr sz="2400">
                           <a:solidFill>
                             <a:srgbClr val="222222"/>
                           </a:solidFill>
@@ -30201,7 +30201,7 @@
                     <a:lstStyle/>
                     <a:p>
                       <a:r>
-                        <a:rPr sz="2250">
+                        <a:rPr sz="2400">
                           <a:solidFill>
                             <a:srgbClr val="222222"/>
                           </a:solidFill>
@@ -30218,14 +30218,14 @@
                   </a:tcPr>
                 </a:tc>
               </a:tr>
-              <a:tr h="552450">
+              <a:tr h="647700">
                 <a:tc>
                   <a:txBody>
                     <a:bodyPr/>
                     <a:lstStyle/>
                     <a:p>
                       <a:r>
-                        <a:rPr sz="2250">
+                        <a:rPr sz="2400">
                           <a:solidFill>
                             <a:srgbClr val="222222"/>
                           </a:solidFill>
@@ -30247,7 +30247,7 @@
                     <a:lstStyle/>
                     <a:p>
                       <a:r>
-                        <a:rPr sz="2250">
+                        <a:rPr sz="2400">
                           <a:solidFill>
                             <a:srgbClr val="222222"/>
                           </a:solidFill>
@@ -30269,7 +30269,7 @@
                     <a:lstStyle/>
                     <a:p>
                       <a:r>
-                        <a:rPr sz="2250">
+                        <a:rPr sz="2400">
                           <a:solidFill>
                             <a:srgbClr val="222222"/>
                           </a:solidFill>
@@ -30555,7 +30555,7 @@
                 </a:solidFill>
                 <a:latin typeface="Calibri"/>
               </a:rPr>
-              <a:t>39</a:t>
+              <a:t>40</a:t>
             </a:r>
           </a:p>
         </p:txBody>
@@ -31393,7 +31393,7 @@
                 </a:solidFill>
                 <a:latin typeface="Calibri"/>
               </a:rPr>
-              <a:t>40</a:t>
+              <a:t>41</a:t>
             </a:r>
           </a:p>
         </p:txBody>
@@ -32014,7 +32014,7 @@
                 </a:solidFill>
                 <a:latin typeface="Calibri"/>
               </a:rPr>
-              <a:t>41</a:t>
+              <a:t>42</a:t>
             </a:r>
           </a:p>
         </p:txBody>
@@ -32591,7 +32591,7 @@
                 </a:solidFill>
                 <a:latin typeface="Calibri"/>
               </a:rPr>
-              <a:t>42</a:t>
+              <a:t>43</a:t>
             </a:r>
           </a:p>
         </p:txBody>
@@ -33525,7 +33525,7 @@
                 </a:solidFill>
                 <a:latin typeface="Calibri"/>
               </a:rPr>
-              <a:t>43</a:t>
+              <a:t>44</a:t>
             </a:r>
           </a:p>
         </p:txBody>
@@ -33984,7 +33984,7 @@
                 </a:solidFill>
                 <a:latin typeface="Calibri"/>
               </a:rPr>
-              <a:t>44</a:t>
+              <a:t>45</a:t>
             </a:r>
           </a:p>
         </p:txBody>
@@ -34891,7 +34891,7 @@
                 </a:solidFill>
                 <a:latin typeface="Calibri"/>
               </a:rPr>
-              <a:t>45</a:t>
+              <a:t>46</a:t>
             </a:r>
           </a:p>
         </p:txBody>
@@ -35533,7 +35533,7 @@
                 </a:solidFill>
                 <a:latin typeface="Calibri"/>
               </a:rPr>
-              <a:t>46</a:t>
+              <a:t>47</a:t>
             </a:r>
           </a:p>
         </p:txBody>
@@ -36001,7 +36001,7 @@
                 </a:solidFill>
                 <a:latin typeface="Calibri"/>
               </a:rPr>
-              <a:t>47</a:t>
+              <a:t>48</a:t>
             </a:r>
           </a:p>
         </p:txBody>
@@ -36426,7 +36426,7 @@
                 </a:solidFill>
                 <a:latin typeface="Calibri"/>
               </a:rPr>
-              <a:t>4</a:t>
+              <a:t>5</a:t>
             </a:r>
           </a:p>
         </p:txBody>
@@ -37116,7 +37116,7 @@
                 </a:solidFill>
                 <a:latin typeface="Calibri"/>
               </a:rPr>
-              <a:t>5</a:t>
+              <a:t>6</a:t>
             </a:r>
           </a:p>
         </p:txBody>
@@ -37515,7 +37515,7 @@
                 </a:solidFill>
                 <a:latin typeface="Calibri"/>
               </a:rPr>
-              <a:t>6</a:t>
+              <a:t>7</a:t>
             </a:r>
           </a:p>
         </p:txBody>
@@ -38252,7 +38252,7 @@
                 </a:solidFill>
                 <a:latin typeface="Calibri"/>
               </a:rPr>
-              <a:t>7</a:t>
+              <a:t>8</a:t>
             </a:r>
           </a:p>
         </p:txBody>
@@ -38838,7 +38838,7 @@
                 </a:solidFill>
                 <a:latin typeface="Calibri"/>
               </a:rPr>
-              <a:t>8</a:t>
+              <a:t>9</a:t>
             </a:r>
           </a:p>
         </p:txBody>

--- a/ground-vehicle/docs/courses/beginner-ps3/l1_introduction.pptx
+++ b/ground-vehicle/docs/courses/beginner-ps3/l1_introduction.pptx
@@ -2364,6 +2364,14 @@
                 <a:latin typeface="Calibri"/>
               </a:rPr>
               <a:t>This is the reference page. Tell students to photograph it.</a:t>
+            </a:r>
+          </a:p>
+          <a:p>
+            <a:r>
+              <a:rPr sz="1200">
+                <a:latin typeface="Calibri"/>
+              </a:rPr>
+              <a:t>The sketches are grouped by lesson because they need the same things. The one row worth pointing at is l1c_first_pixel: Lesson 1 is the only lesson where the three sketches do not all need the same library.</a:t>
             </a:r>
           </a:p>
           <a:p>
@@ -10432,7 +10440,7 @@
               <a:t>KEY POINT   </a:t>
             </a:r>
             <a:r>
-              <a:rPr sz="1500">
+              <a:rPr sz="1800">
                 <a:solidFill>
                   <a:srgbClr val="222222"/>
                 </a:solidFill>
@@ -11560,7 +11568,7 @@
               <a:t>KEY POINT   </a:t>
             </a:r>
             <a:r>
-              <a:rPr sz="1500">
+              <a:rPr sz="1800">
                 <a:solidFill>
                   <a:srgbClr val="222222"/>
                 </a:solidFill>
@@ -12798,7 +12806,7 @@
               <a:t>KEY POINT   </a:t>
             </a:r>
             <a:r>
-              <a:rPr sz="1500">
+              <a:rPr sz="1800">
                 <a:solidFill>
                   <a:srgbClr val="222222"/>
                 </a:solidFill>
@@ -16404,7 +16412,7 @@
               <a:t>KEY POINT   </a:t>
             </a:r>
             <a:r>
-              <a:rPr sz="1500">
+              <a:rPr sz="1800">
                 <a:solidFill>
                   <a:srgbClr val="222222"/>
                 </a:solidFill>
@@ -17563,7 +17571,7 @@
               <a:t>KEY POINT   </a:t>
             </a:r>
             <a:r>
-              <a:rPr sz="1500">
+              <a:rPr sz="1800">
                 <a:solidFill>
                   <a:srgbClr val="222222"/>
                 </a:solidFill>
@@ -18200,7 +18208,7 @@
               <a:t>WATCH OUT   </a:t>
             </a:r>
             <a:r>
-              <a:rPr sz="1500">
+              <a:rPr sz="1800">
                 <a:solidFill>
                   <a:srgbClr val="222222"/>
                 </a:solidFill>
@@ -18675,7 +18683,7 @@
               <a:t>WATCH OUT   </a:t>
             </a:r>
             <a:r>
-              <a:rPr sz="1500">
+              <a:rPr sz="1800">
                 <a:solidFill>
                   <a:srgbClr val="222222"/>
                 </a:solidFill>
@@ -19100,7 +19108,7 @@
               <a:t>KEY POINT   </a:t>
             </a:r>
             <a:r>
-              <a:rPr sz="1500">
+              <a:rPr sz="1800">
                 <a:solidFill>
                   <a:srgbClr val="222222"/>
                 </a:solidFill>
@@ -19373,7 +19381,7 @@
         </p:nvGraphicFramePr>
         <p:xfrm>
           <a:off x="502920" y="1691640"/>
-          <a:ext cx="11185853" cy="3363912"/>
+          <a:ext cx="11185853" cy="3149600"/>
         </p:xfrm>
         <a:graphic>
           <a:graphicData uri="http://schemas.openxmlformats.org/drawingml/2006/table">
@@ -19386,14 +19394,14 @@
                 <a:gridCol w="4026907"/>
                 <a:gridCol w="6040361"/>
               </a:tblGrid>
-              <a:tr h="258762">
+              <a:tr h="393700">
                 <a:tc>
                   <a:txBody>
                     <a:bodyPr/>
                     <a:lstStyle/>
                     <a:p>
                       <a:r>
-                        <a:rPr sz="1150" b="1">
+                        <a:rPr sz="2000" b="1">
                           <a:solidFill>
                             <a:srgbClr val="FFFFFF"/>
                           </a:solidFill>
@@ -19415,7 +19423,7 @@
                     <a:lstStyle/>
                     <a:p>
                       <a:r>
-                        <a:rPr sz="1150" b="1">
+                        <a:rPr sz="2000" b="1">
                           <a:solidFill>
                             <a:srgbClr val="FFFFFF"/>
                           </a:solidFill>
@@ -19437,7 +19445,7 @@
                     <a:lstStyle/>
                     <a:p>
                       <a:r>
-                        <a:rPr sz="1150" b="1">
+                        <a:rPr sz="2000" b="1">
                           <a:solidFill>
                             <a:srgbClr val="FFFFFF"/>
                           </a:solidFill>
@@ -19454,14 +19462,14 @@
                   </a:tcPr>
                 </a:tc>
               </a:tr>
-              <a:tr h="258762">
+              <a:tr h="393700">
                 <a:tc>
                   <a:txBody>
                     <a:bodyPr/>
                     <a:lstStyle/>
                     <a:p>
                       <a:r>
-                        <a:rPr sz="1150">
+                        <a:rPr sz="2000">
                           <a:solidFill>
                             <a:srgbClr val="222222"/>
                           </a:solidFill>
@@ -19483,13 +19491,13 @@
                     <a:lstStyle/>
                     <a:p>
                       <a:r>
-                        <a:rPr sz="1150">
+                        <a:rPr sz="2000">
                           <a:solidFill>
                             <a:srgbClr val="222222"/>
                           </a:solidFill>
                           <a:latin typeface="Calibri"/>
                         </a:rPr>
-                        <a:t>l1a_blink</a:t>
+                        <a:t>l1a_blink / l1b_serial_monitor</a:t>
                       </a:r>
                     </a:p>
                   </a:txBody>
@@ -19505,7 +19513,7 @@
                     <a:lstStyle/>
                     <a:p>
                       <a:r>
-                        <a:rPr sz="1150">
+                        <a:rPr sz="2000">
                           <a:solidFill>
                             <a:srgbClr val="222222"/>
                           </a:solidFill>
@@ -19522,14 +19530,14 @@
                   </a:tcPr>
                 </a:tc>
               </a:tr>
-              <a:tr h="258762">
+              <a:tr h="393700">
                 <a:tc>
                   <a:txBody>
                     <a:bodyPr/>
                     <a:lstStyle/>
                     <a:p>
                       <a:r>
-                        <a:rPr sz="1150">
+                        <a:rPr sz="2000">
                           <a:solidFill>
                             <a:srgbClr val="222222"/>
                           </a:solidFill>
@@ -19551,13 +19559,13 @@
                     <a:lstStyle/>
                     <a:p>
                       <a:r>
-                        <a:rPr sz="1150">
+                        <a:rPr sz="2000">
                           <a:solidFill>
                             <a:srgbClr val="222222"/>
                           </a:solidFill>
                           <a:latin typeface="Calibri"/>
                         </a:rPr>
-                        <a:t>l1b_serial_monitor</a:t>
+                        <a:t>l1c_first_pixel</a:t>
                       </a:r>
                     </a:p>
                   </a:txBody>
@@ -19573,75 +19581,7 @@
                     <a:lstStyle/>
                     <a:p>
                       <a:r>
-                        <a:rPr sz="1150">
-                          <a:solidFill>
-                            <a:srgbClr val="222222"/>
-                          </a:solidFill>
-                          <a:latin typeface="Calibri"/>
-                        </a:rPr>
-                        <a:t>none</a:t>
-                      </a:r>
-                    </a:p>
-                  </a:txBody>
-                  <a:tcPr marL="73152" marT="18288" marB="18288">
-                    <a:solidFill>
-                      <a:srgbClr val="EEF3F8"/>
-                    </a:solidFill>
-                  </a:tcPr>
-                </a:tc>
-              </a:tr>
-              <a:tr h="258762">
-                <a:tc>
-                  <a:txBody>
-                    <a:bodyPr/>
-                    <a:lstStyle/>
-                    <a:p>
-                      <a:r>
-                        <a:rPr sz="1150">
-                          <a:solidFill>
-                            <a:srgbClr val="222222"/>
-                          </a:solidFill>
-                          <a:latin typeface="Calibri"/>
-                        </a:rPr>
-                        <a:t>1</a:t>
-                      </a:r>
-                    </a:p>
-                  </a:txBody>
-                  <a:tcPr marL="73152" marT="18288" marB="18288">
-                    <a:solidFill>
-                      <a:srgbClr val="FFFFFF"/>
-                    </a:solidFill>
-                  </a:tcPr>
-                </a:tc>
-                <a:tc>
-                  <a:txBody>
-                    <a:bodyPr/>
-                    <a:lstStyle/>
-                    <a:p>
-                      <a:r>
-                        <a:rPr sz="1150">
-                          <a:solidFill>
-                            <a:srgbClr val="222222"/>
-                          </a:solidFill>
-                          <a:latin typeface="Calibri"/>
-                        </a:rPr>
-                        <a:t>l1c_first_pixel</a:t>
-                      </a:r>
-                    </a:p>
-                  </a:txBody>
-                  <a:tcPr marL="73152" marT="18288" marB="18288">
-                    <a:solidFill>
-                      <a:srgbClr val="FFFFFF"/>
-                    </a:solidFill>
-                  </a:tcPr>
-                </a:tc>
-                <a:tc>
-                  <a:txBody>
-                    <a:bodyPr/>
-                    <a:lstStyle/>
-                    <a:p>
-                      <a:r>
-                        <a:rPr sz="1150">
+                        <a:rPr sz="2000">
                           <a:solidFill>
                             <a:srgbClr val="222222"/>
                           </a:solidFill>
@@ -19653,87 +19593,19 @@
                   </a:txBody>
                   <a:tcPr marL="73152" marT="18288" marB="18288">
                     <a:solidFill>
-                      <a:srgbClr val="FFFFFF"/>
+                      <a:srgbClr val="EEF3F8"/>
                     </a:solidFill>
                   </a:tcPr>
                 </a:tc>
               </a:tr>
-              <a:tr h="258762">
+              <a:tr h="393700">
                 <a:tc>
                   <a:txBody>
                     <a:bodyPr/>
                     <a:lstStyle/>
                     <a:p>
                       <a:r>
-                        <a:rPr sz="1150">
-                          <a:solidFill>
-                            <a:srgbClr val="222222"/>
-                          </a:solidFill>
-                          <a:latin typeface="Calibri"/>
-                        </a:rPr>
-                        <a:t>2</a:t>
-                      </a:r>
-                    </a:p>
-                  </a:txBody>
-                  <a:tcPr marL="73152" marT="18288" marB="18288">
-                    <a:solidFill>
-                      <a:srgbClr val="EEF3F8"/>
-                    </a:solidFill>
-                  </a:tcPr>
-                </a:tc>
-                <a:tc>
-                  <a:txBody>
-                    <a:bodyPr/>
-                    <a:lstStyle/>
-                    <a:p>
-                      <a:r>
-                        <a:rPr sz="1150">
-                          <a:solidFill>
-                            <a:srgbClr val="222222"/>
-                          </a:solidFill>
-                          <a:latin typeface="Calibri"/>
-                        </a:rPr>
-                        <a:t>l2a_one_motor</a:t>
-                      </a:r>
-                    </a:p>
-                  </a:txBody>
-                  <a:tcPr marL="73152" marT="18288" marB="18288">
-                    <a:solidFill>
-                      <a:srgbClr val="EEF3F8"/>
-                    </a:solidFill>
-                  </a:tcPr>
-                </a:tc>
-                <a:tc>
-                  <a:txBody>
-                    <a:bodyPr/>
-                    <a:lstStyle/>
-                    <a:p>
-                      <a:r>
-                        <a:rPr sz="1150">
-                          <a:solidFill>
-                            <a:srgbClr val="222222"/>
-                          </a:solidFill>
-                          <a:latin typeface="Calibri"/>
-                        </a:rPr>
-                        <a:t>none</a:t>
-                      </a:r>
-                    </a:p>
-                  </a:txBody>
-                  <a:tcPr marL="73152" marT="18288" marB="18288">
-                    <a:solidFill>
-                      <a:srgbClr val="EEF3F8"/>
-                    </a:solidFill>
-                  </a:tcPr>
-                </a:tc>
-              </a:tr>
-              <a:tr h="258762">
-                <a:tc>
-                  <a:txBody>
-                    <a:bodyPr/>
-                    <a:lstStyle/>
-                    <a:p>
-                      <a:r>
-                        <a:rPr sz="1150">
+                        <a:rPr sz="2000">
                           <a:solidFill>
                             <a:srgbClr val="222222"/>
                           </a:solidFill>
@@ -19755,13 +19627,13 @@
                     <a:lstStyle/>
                     <a:p>
                       <a:r>
-                        <a:rPr sz="1150">
+                        <a:rPr sz="2000">
                           <a:solidFill>
                             <a:srgbClr val="222222"/>
                           </a:solidFill>
                           <a:latin typeface="Calibri"/>
                         </a:rPr>
-                        <a:t>l2b_speed_ramp</a:t>
+                        <a:t>l2a / l2b / l2c</a:t>
                       </a:r>
                     </a:p>
                   </a:txBody>
@@ -19777,7 +19649,7 @@
                     <a:lstStyle/>
                     <a:p>
                       <a:r>
-                        <a:rPr sz="1150">
+                        <a:rPr sz="2000">
                           <a:solidFill>
                             <a:srgbClr val="222222"/>
                           </a:solidFill>
@@ -19794,150 +19666,14 @@
                   </a:tcPr>
                 </a:tc>
               </a:tr>
-              <a:tr h="258762">
+              <a:tr h="393700">
                 <a:tc>
                   <a:txBody>
                     <a:bodyPr/>
                     <a:lstStyle/>
                     <a:p>
                       <a:r>
-                        <a:rPr sz="1150">
-                          <a:solidFill>
-                            <a:srgbClr val="222222"/>
-                          </a:solidFill>
-                          <a:latin typeface="Calibri"/>
-                        </a:rPr>
-                        <a:t>2</a:t>
-                      </a:r>
-                    </a:p>
-                  </a:txBody>
-                  <a:tcPr marL="73152" marT="18288" marB="18288">
-                    <a:solidFill>
-                      <a:srgbClr val="EEF3F8"/>
-                    </a:solidFill>
-                  </a:tcPr>
-                </a:tc>
-                <a:tc>
-                  <a:txBody>
-                    <a:bodyPr/>
-                    <a:lstStyle/>
-                    <a:p>
-                      <a:r>
-                        <a:rPr sz="1150">
-                          <a:solidFill>
-                            <a:srgbClr val="222222"/>
-                          </a:solidFill>
-                          <a:latin typeface="Calibri"/>
-                        </a:rPr>
-                        <a:t>l2c_maneuver_square</a:t>
-                      </a:r>
-                    </a:p>
-                  </a:txBody>
-                  <a:tcPr marL="73152" marT="18288" marB="18288">
-                    <a:solidFill>
-                      <a:srgbClr val="EEF3F8"/>
-                    </a:solidFill>
-                  </a:tcPr>
-                </a:tc>
-                <a:tc>
-                  <a:txBody>
-                    <a:bodyPr/>
-                    <a:lstStyle/>
-                    <a:p>
-                      <a:r>
-                        <a:rPr sz="1150">
-                          <a:solidFill>
-                            <a:srgbClr val="222222"/>
-                          </a:solidFill>
-                          <a:latin typeface="Calibri"/>
-                        </a:rPr>
-                        <a:t>none</a:t>
-                      </a:r>
-                    </a:p>
-                  </a:txBody>
-                  <a:tcPr marL="73152" marT="18288" marB="18288">
-                    <a:solidFill>
-                      <a:srgbClr val="EEF3F8"/>
-                    </a:solidFill>
-                  </a:tcPr>
-                </a:tc>
-              </a:tr>
-              <a:tr h="258762">
-                <a:tc>
-                  <a:txBody>
-                    <a:bodyPr/>
-                    <a:lstStyle/>
-                    <a:p>
-                      <a:r>
-                        <a:rPr sz="1150">
-                          <a:solidFill>
-                            <a:srgbClr val="222222"/>
-                          </a:solidFill>
-                          <a:latin typeface="Calibri"/>
-                        </a:rPr>
-                        <a:t>3</a:t>
-                      </a:r>
-                    </a:p>
-                  </a:txBody>
-                  <a:tcPr marL="73152" marT="18288" marB="18288">
-                    <a:solidFill>
-                      <a:srgbClr val="FFFFFF"/>
-                    </a:solidFill>
-                  </a:tcPr>
-                </a:tc>
-                <a:tc>
-                  <a:txBody>
-                    <a:bodyPr/>
-                    <a:lstStyle/>
-                    <a:p>
-                      <a:r>
-                        <a:rPr sz="1150">
-                          <a:solidFill>
-                            <a:srgbClr val="222222"/>
-                          </a:solidFill>
-                          <a:latin typeface="Calibri"/>
-                        </a:rPr>
-                        <a:t>l3a_controller_check</a:t>
-                      </a:r>
-                    </a:p>
-                  </a:txBody>
-                  <a:tcPr marL="73152" marT="18288" marB="18288">
-                    <a:solidFill>
-                      <a:srgbClr val="FFFFFF"/>
-                    </a:solidFill>
-                  </a:tcPr>
-                </a:tc>
-                <a:tc>
-                  <a:txBody>
-                    <a:bodyPr/>
-                    <a:lstStyle/>
-                    <a:p>
-                      <a:r>
-                        <a:rPr sz="1150">
-                          <a:solidFill>
-                            <a:srgbClr val="222222"/>
-                          </a:solidFill>
-                          <a:latin typeface="Calibri"/>
-                        </a:rPr>
-                        <a:t>PS3 Controller Host</a:t>
-                      </a:r>
-                    </a:p>
-                  </a:txBody>
-                  <a:tcPr marL="73152" marT="18288" marB="18288">
-                    <a:solidFill>
-                      <a:srgbClr val="FFFFFF"/>
-                    </a:solidFill>
-                  </a:tcPr>
-                </a:tc>
-              </a:tr>
-              <a:tr h="258762">
-                <a:tc>
-                  <a:txBody>
-                    <a:bodyPr/>
-                    <a:lstStyle/>
-                    <a:p>
-                      <a:r>
-                        <a:rPr sz="1150">
+                        <a:rPr sz="2000">
                           <a:solidFill>
                             <a:srgbClr val="222222"/>
                           </a:solidFill>
@@ -19959,13 +19695,13 @@
                     <a:lstStyle/>
                     <a:p>
                       <a:r>
-                        <a:rPr sz="1150">
+                        <a:rPr sz="2000">
                           <a:solidFill>
                             <a:srgbClr val="222222"/>
                           </a:solidFill>
                           <a:latin typeface="Calibri"/>
                         </a:rPr>
-                        <a:t>l3b_deadzone_and_map</a:t>
+                        <a:t>l3a / l3b / l3c</a:t>
                       </a:r>
                     </a:p>
                   </a:txBody>
@@ -19981,7 +19717,7 @@
                     <a:lstStyle/>
                     <a:p>
                       <a:r>
-                        <a:rPr sz="1150">
+                        <a:rPr sz="2000">
                           <a:solidFill>
                             <a:srgbClr val="222222"/>
                           </a:solidFill>
@@ -19998,20 +19734,20 @@
                   </a:tcPr>
                 </a:tc>
               </a:tr>
-              <a:tr h="258762">
+              <a:tr h="393700">
                 <a:tc>
                   <a:txBody>
                     <a:bodyPr/>
                     <a:lstStyle/>
                     <a:p>
                       <a:r>
-                        <a:rPr sz="1150">
+                        <a:rPr sz="2000">
                           <a:solidFill>
                             <a:srgbClr val="222222"/>
                           </a:solidFill>
                           <a:latin typeface="Calibri"/>
                         </a:rPr>
-                        <a:t>3</a:t>
+                        <a:t>4</a:t>
                       </a:r>
                     </a:p>
                   </a:txBody>
@@ -20027,13 +19763,13 @@
                     <a:lstStyle/>
                     <a:p>
                       <a:r>
-                        <a:rPr sz="1150">
+                        <a:rPr sz="2000">
                           <a:solidFill>
                             <a:srgbClr val="222222"/>
                           </a:solidFill>
                           <a:latin typeface="Calibri"/>
                         </a:rPr>
-                        <a:t>l3c_tank_drive</a:t>
+                        <a:t>l4a / l4b / l4c</a:t>
                       </a:r>
                     </a:p>
                   </a:txBody>
@@ -20049,13 +19785,13 @@
                     <a:lstStyle/>
                     <a:p>
                       <a:r>
-                        <a:rPr sz="1150">
+                        <a:rPr sz="2000">
                           <a:solidFill>
                             <a:srgbClr val="222222"/>
                           </a:solidFill>
                           <a:latin typeface="Calibri"/>
                         </a:rPr>
-                        <a:t>PS3 Controller Host</a:t>
+                        <a:t>Adafruit NeoPixel</a:t>
                       </a:r>
                     </a:p>
                   </a:txBody>
@@ -20066,20 +19802,20 @@
                   </a:tcPr>
                 </a:tc>
               </a:tr>
-              <a:tr h="258762">
+              <a:tr h="393700">
                 <a:tc>
                   <a:txBody>
                     <a:bodyPr/>
                     <a:lstStyle/>
                     <a:p>
                       <a:r>
-                        <a:rPr sz="1150">
+                        <a:rPr sz="2000">
                           <a:solidFill>
                             <a:srgbClr val="222222"/>
                           </a:solidFill>
                           <a:latin typeface="Calibri"/>
                         </a:rPr>
-                        <a:t>4</a:t>
+                        <a:t>5</a:t>
                       </a:r>
                     </a:p>
                   </a:txBody>
@@ -20095,13 +19831,13 @@
                     <a:lstStyle/>
                     <a:p>
                       <a:r>
-                        <a:rPr sz="1150">
+                        <a:rPr sz="2000">
                           <a:solidFill>
                             <a:srgbClr val="222222"/>
                           </a:solidFill>
                           <a:latin typeface="Calibri"/>
                         </a:rPr>
-                        <a:t>l4a / l4b / l4c</a:t>
+                        <a:t>l5a / l5b / l5c</a:t>
                       </a:r>
                     </a:p>
                   </a:txBody>
@@ -20117,13 +19853,13 @@
                     <a:lstStyle/>
                     <a:p>
                       <a:r>
-                        <a:rPr sz="1150">
+                        <a:rPr sz="2000">
                           <a:solidFill>
                             <a:srgbClr val="222222"/>
                           </a:solidFill>
                           <a:latin typeface="Calibri"/>
                         </a:rPr>
-                        <a:t>Adafruit NeoPixel</a:t>
+                        <a:t>Adafruit NeoPixel + PS3 Controller Host</a:t>
                       </a:r>
                     </a:p>
                   </a:txBody>
@@ -20134,14 +19870,14 @@
                   </a:tcPr>
                 </a:tc>
               </a:tr>
-              <a:tr h="258762">
+              <a:tr h="393700">
                 <a:tc>
                   <a:txBody>
                     <a:bodyPr/>
                     <a:lstStyle/>
                     <a:p>
                       <a:r>
-                        <a:rPr sz="1150">
+                        <a:rPr sz="2000">
                           <a:solidFill>
                             <a:srgbClr val="222222"/>
                           </a:solidFill>
@@ -20163,13 +19899,13 @@
                     <a:lstStyle/>
                     <a:p>
                       <a:r>
-                        <a:rPr sz="1150">
+                        <a:rPr sz="2000">
                           <a:solidFill>
                             <a:srgbClr val="222222"/>
                           </a:solidFill>
                           <a:latin typeface="Calibri"/>
                         </a:rPr>
-                        <a:t>l5a / l5b / l5c</a:t>
+                        <a:t>pathfinder_ps3</a:t>
                       </a:r>
                     </a:p>
                   </a:txBody>
@@ -20185,7 +19921,7 @@
                     <a:lstStyle/>
                     <a:p>
                       <a:r>
-                        <a:rPr sz="1150">
+                        <a:rPr sz="2000">
                           <a:solidFill>
                             <a:srgbClr val="222222"/>
                           </a:solidFill>
@@ -20202,74 +19938,6 @@
                   </a:tcPr>
                 </a:tc>
               </a:tr>
-              <a:tr h="258768">
-                <a:tc>
-                  <a:txBody>
-                    <a:bodyPr/>
-                    <a:lstStyle/>
-                    <a:p>
-                      <a:r>
-                        <a:rPr sz="1150">
-                          <a:solidFill>
-                            <a:srgbClr val="222222"/>
-                          </a:solidFill>
-                          <a:latin typeface="Calibri"/>
-                        </a:rPr>
-                        <a:t>5</a:t>
-                      </a:r>
-                    </a:p>
-                  </a:txBody>
-                  <a:tcPr marL="73152" marT="18288" marB="18288">
-                    <a:solidFill>
-                      <a:srgbClr val="EEF3F8"/>
-                    </a:solidFill>
-                  </a:tcPr>
-                </a:tc>
-                <a:tc>
-                  <a:txBody>
-                    <a:bodyPr/>
-                    <a:lstStyle/>
-                    <a:p>
-                      <a:r>
-                        <a:rPr sz="1150">
-                          <a:solidFill>
-                            <a:srgbClr val="222222"/>
-                          </a:solidFill>
-                          <a:latin typeface="Calibri"/>
-                        </a:rPr>
-                        <a:t>pathfinder_ps3</a:t>
-                      </a:r>
-                    </a:p>
-                  </a:txBody>
-                  <a:tcPr marL="73152" marT="18288" marB="18288">
-                    <a:solidFill>
-                      <a:srgbClr val="EEF3F8"/>
-                    </a:solidFill>
-                  </a:tcPr>
-                </a:tc>
-                <a:tc>
-                  <a:txBody>
-                    <a:bodyPr/>
-                    <a:lstStyle/>
-                    <a:p>
-                      <a:r>
-                        <a:rPr sz="1150">
-                          <a:solidFill>
-                            <a:srgbClr val="222222"/>
-                          </a:solidFill>
-                          <a:latin typeface="Calibri"/>
-                        </a:rPr>
-                        <a:t>Adafruit NeoPixel + PS3 Controller Host</a:t>
-                      </a:r>
-                    </a:p>
-                  </a:txBody>
-                  <a:tcPr marL="73152" marT="18288" marB="18288">
-                    <a:solidFill>
-                      <a:srgbClr val="EEF3F8"/>
-                    </a:solidFill>
-                  </a:tcPr>
-                </a:tc>
-              </a:tr>
             </a:tbl>
           </a:graphicData>
         </a:graphic>
@@ -20329,7 +19997,7 @@
               <a:t>KEY POINT   </a:t>
             </a:r>
             <a:r>
-              <a:rPr sz="1500">
+              <a:rPr sz="1800">
                 <a:solidFill>
                   <a:srgbClr val="222222"/>
                 </a:solidFill>
@@ -20877,7 +20545,7 @@
               <a:t>WATCH OUT   </a:t>
             </a:r>
             <a:r>
-              <a:rPr sz="1500">
+              <a:rPr sz="1800">
                 <a:solidFill>
                   <a:srgbClr val="222222"/>
                 </a:solidFill>
@@ -22043,7 +21711,7 @@
               <a:t>KEY POINT   </a:t>
             </a:r>
             <a:r>
-              <a:rPr sz="1500">
+              <a:rPr sz="1800">
                 <a:solidFill>
                   <a:srgbClr val="222222"/>
                 </a:solidFill>
@@ -23218,7 +22886,7 @@
               <a:t>KEY POINT   </a:t>
             </a:r>
             <a:r>
-              <a:rPr sz="1500">
+              <a:rPr sz="1800">
                 <a:solidFill>
                   <a:srgbClr val="222222"/>
                 </a:solidFill>
@@ -24162,7 +23830,7 @@
               <a:t>KEY POINT   </a:t>
             </a:r>
             <a:r>
-              <a:rPr sz="1500">
+              <a:rPr sz="1800">
                 <a:solidFill>
                   <a:srgbClr val="222222"/>
                 </a:solidFill>
@@ -25779,7 +25447,7 @@
               <a:t>WATCH OUT   </a:t>
             </a:r>
             <a:r>
-              <a:rPr sz="1500">
+              <a:rPr sz="1800">
                 <a:solidFill>
                   <a:srgbClr val="222222"/>
                 </a:solidFill>
@@ -26241,7 +25909,7 @@
               <a:t>WATCH OUT   </a:t>
             </a:r>
             <a:r>
-              <a:rPr sz="1500">
+              <a:rPr sz="1800">
                 <a:solidFill>
                   <a:srgbClr val="222222"/>
                 </a:solidFill>
@@ -26858,7 +26526,7 @@
               <a:t>KEY POINT   </a:t>
             </a:r>
             <a:r>
-              <a:rPr sz="1500">
+              <a:rPr sz="1800">
                 <a:solidFill>
                   <a:srgbClr val="222222"/>
                 </a:solidFill>
@@ -29640,7 +29308,7 @@
               <a:t>KEY POINT   </a:t>
             </a:r>
             <a:r>
-              <a:rPr sz="1500">
+              <a:rPr sz="1800">
                 <a:solidFill>
                   <a:srgbClr val="222222"/>
                 </a:solidFill>
@@ -30345,7 +30013,7 @@
               <a:t>KEY POINT   </a:t>
             </a:r>
             <a:r>
-              <a:rPr sz="1500">
+              <a:rPr sz="1800">
                 <a:solidFill>
                   <a:srgbClr val="222222"/>
                 </a:solidFill>
@@ -31183,7 +30851,7 @@
               <a:t>KEY POINT   </a:t>
             </a:r>
             <a:r>
-              <a:rPr sz="1500">
+              <a:rPr sz="1800">
                 <a:solidFill>
                   <a:srgbClr val="222222"/>
                 </a:solidFill>
@@ -33774,7 +33442,7 @@
               <a:t>WATCH OUT   </a:t>
             </a:r>
             <a:r>
-              <a:rPr sz="1500">
+              <a:rPr sz="1800">
                 <a:solidFill>
                   <a:srgbClr val="222222"/>
                 </a:solidFill>
@@ -35791,7 +35459,7 @@
               <a:t>SAFETY   </a:t>
             </a:r>
             <a:r>
-              <a:rPr sz="1500">
+              <a:rPr sz="1800">
                 <a:solidFill>
                   <a:srgbClr val="222222"/>
                 </a:solidFill>
@@ -38042,7 +37710,7 @@
               <a:t>KEY POINT   </a:t>
             </a:r>
             <a:r>
-              <a:rPr sz="1500">
+              <a:rPr sz="1800">
                 <a:solidFill>
                   <a:srgbClr val="222222"/>
                 </a:solidFill>
@@ -39071,7 +38739,7 @@
               <a:t>KEY POINT   </a:t>
             </a:r>
             <a:r>
-              <a:rPr sz="1500">
+              <a:rPr sz="1800">
                 <a:solidFill>
                   <a:srgbClr val="222222"/>
                 </a:solidFill>

--- a/ground-vehicle/docs/courses/beginner-ps3/l1_introduction.pptx
+++ b/ground-vehicle/docs/courses/beginner-ps3/l1_introduction.pptx
@@ -4838,7 +4838,7 @@
               <a:rPr sz="1200">
                 <a:latin typeface="Calibri"/>
               </a:rPr>
-              <a:t>Point out that each indicator lights the front bar and the rear bar on that side, the way a car does. It is one side of the vehicle, seen front and back, not one end of it.</a:t>
+              <a:t>Both photographs are taken from the front, so you can only see the front bar. Say what the camera cannot show: the rear bar is indicating on the same side at the same time, the way a car does. It is one SIDE of the vehicle lighting up, not one end.</a:t>
             </a:r>
           </a:p>
           <a:p>
@@ -37973,128 +37973,57 @@
           </a:p>
         </p:txBody>
       </p:sp>
-      <p:sp>
-        <p:nvSpPr>
-          <p:cNvPr id="7" name="Rectangle 6"/>
-          <p:cNvSpPr/>
-          <p:nvPr/>
-        </p:nvSpPr>
-        <p:spPr>
-          <a:xfrm>
-            <a:off x="502920" y="1810512"/>
-            <a:ext cx="5410047" cy="3675888"/>
+      <p:pic>
+        <p:nvPicPr>
+          <p:cNvPr id="7" name="Picture 6" descr="vehicle-turn-signal-left.jpg"/>
+          <p:cNvPicPr>
+            <a:picLocks noChangeAspect="1"/>
+          </p:cNvPicPr>
+          <p:nvPr/>
+        </p:nvPicPr>
+        <p:blipFill>
+          <a:blip r:embed="rId2"/>
+          <a:stretch>
+            <a:fillRect/>
+          </a:stretch>
+        </p:blipFill>
+        <p:spPr>
+          <a:xfrm>
+            <a:off x="757351" y="1810512"/>
+            <a:ext cx="4901184" cy="3675888"/>
           </a:xfrm>
           <a:prstGeom prst="rect">
             <a:avLst/>
           </a:prstGeom>
-          <a:solidFill>
-            <a:srgbClr val="EEF3F8"/>
-          </a:solidFill>
-          <a:ln w="19050">
-            <a:solidFill>
-              <a:srgbClr val="0E7C86"/>
-            </a:solidFill>
-            <a:prstDash val="dash"/>
-          </a:ln>
-          <a:effectLst/>
-        </p:spPr>
-        <p:style>
-          <a:lnRef idx="1">
-            <a:schemeClr val="accent1"/>
-          </a:lnRef>
-          <a:fillRef idx="3">
-            <a:schemeClr val="accent1"/>
-          </a:fillRef>
-          <a:effectRef idx="2">
-            <a:schemeClr val="accent1"/>
-          </a:effectRef>
-          <a:fontRef idx="minor">
-            <a:schemeClr val="lt1"/>
-          </a:fontRef>
-        </p:style>
-        <p:txBody>
-          <a:bodyPr rtlCol="0" anchor="ctr" wrap="square" lIns="164592" rIns="164592" tIns="109728" bIns="109728"/>
-          <a:lstStyle/>
-          <a:p>
-            <a:pPr algn="ctr">
-              <a:lnSpc>
-                <a:spcPct val="100000"/>
-              </a:lnSpc>
-              <a:spcAft>
-                <a:spcPts val="700"/>
-              </a:spcAft>
-              <a:defRPr sz="1600" b="0">
-                <a:solidFill>
-                  <a:srgbClr val="0E7C86"/>
-                </a:solidFill>
-                <a:latin typeface="Calibri"/>
-              </a:defRPr>
-            </a:pPr>
-            <a:r>
-              <a:rPr sz="1600" b="1">
-                <a:solidFill>
-                  <a:srgbClr val="666666"/>
-                </a:solidFill>
-                <a:latin typeface="Calibri"/>
-              </a:rPr>
-              <a:t>PLACEHOLDER</a:t>
-            </a:r>
-          </a:p>
-          <a:p>
-            <a:pPr algn="ctr">
-              <a:lnSpc>
-                <a:spcPct val="100000"/>
-              </a:lnSpc>
-              <a:spcAft>
-                <a:spcPts val="700"/>
-              </a:spcAft>
-              <a:defRPr sz="1600" b="0">
-                <a:solidFill>
-                  <a:srgbClr val="0E7C86"/>
-                </a:solidFill>
-                <a:latin typeface="Calibri"/>
-              </a:defRPr>
-            </a:pPr>
-            <a:r>
-              <a:rPr sz="1600" b="0">
-                <a:solidFill>
-                  <a:srgbClr val="0E7C86"/>
-                </a:solidFill>
-                <a:latin typeface="Calibri"/>
-              </a:rPr>
-              <a:t>PHOTO: left turn signal, front and back</a:t>
-            </a:r>
-          </a:p>
-          <a:p>
-            <a:pPr algn="ctr">
-              <a:lnSpc>
-                <a:spcPct val="100000"/>
-              </a:lnSpc>
-              <a:spcAft>
-                <a:spcPts val="700"/>
-              </a:spcAft>
-              <a:defRPr sz="1600" b="0">
-                <a:solidFill>
-                  <a:srgbClr val="0E7C86"/>
-                </a:solidFill>
-                <a:latin typeface="Calibri"/>
-              </a:defRPr>
-            </a:pPr>
-            <a:r>
-              <a:rPr sz="1600" b="0">
-                <a:solidFill>
-                  <a:srgbClr val="0E7C86"/>
-                </a:solidFill>
-                <a:latin typeface="Calibri"/>
-              </a:rPr>
-              <a:t>Three-quarter view with the LEFT indicator running, taken so that BOTH the front bar and the rear bar are visible at once.</a:t>
-            </a:r>
-          </a:p>
-        </p:txBody>
-      </p:sp>
-      <p:sp>
-        <p:nvSpPr>
-          <p:cNvPr id="8" name="TextBox 7"/>
+        </p:spPr>
+      </p:pic>
+      <p:pic>
+        <p:nvPicPr>
+          <p:cNvPr id="8" name="Picture 7" descr="vehicle-turn-signal-right.jpg"/>
+          <p:cNvPicPr>
+            <a:picLocks noChangeAspect="1"/>
+          </p:cNvPicPr>
+          <p:nvPr/>
+        </p:nvPicPr>
+        <p:blipFill>
+          <a:blip r:embed="rId3"/>
+          <a:stretch>
+            <a:fillRect/>
+          </a:stretch>
+        </p:blipFill>
+        <p:spPr>
+          <a:xfrm>
+            <a:off x="6533158" y="1810512"/>
+            <a:ext cx="4901184" cy="3675888"/>
+          </a:xfrm>
+          <a:prstGeom prst="rect">
+            <a:avLst/>
+          </a:prstGeom>
+        </p:spPr>
+      </p:pic>
+      <p:sp>
+        <p:nvSpPr>
+          <p:cNvPr id="9" name="TextBox 8"/>
           <p:cNvSpPr txBox="1"/>
           <p:nvPr/>
         </p:nvSpPr>
@@ -38135,126 +38064,7 @@
                 </a:solidFill>
                 <a:latin typeface="Calibri"/>
               </a:rPr>
-              <a:t>Left turn signal - front bar and rear bar, both on that side</a:t>
-            </a:r>
-          </a:p>
-        </p:txBody>
-      </p:sp>
-      <p:sp>
-        <p:nvSpPr>
-          <p:cNvPr id="9" name="Rectangle 8"/>
-          <p:cNvSpPr/>
-          <p:nvPr/>
-        </p:nvSpPr>
-        <p:spPr>
-          <a:xfrm>
-            <a:off x="6278727" y="1810512"/>
-            <a:ext cx="5410047" cy="3675888"/>
-          </a:xfrm>
-          <a:prstGeom prst="rect">
-            <a:avLst/>
-          </a:prstGeom>
-          <a:solidFill>
-            <a:srgbClr val="EEF3F8"/>
-          </a:solidFill>
-          <a:ln w="19050">
-            <a:solidFill>
-              <a:srgbClr val="0E7C86"/>
-            </a:solidFill>
-            <a:prstDash val="dash"/>
-          </a:ln>
-          <a:effectLst/>
-        </p:spPr>
-        <p:style>
-          <a:lnRef idx="1">
-            <a:schemeClr val="accent1"/>
-          </a:lnRef>
-          <a:fillRef idx="3">
-            <a:schemeClr val="accent1"/>
-          </a:fillRef>
-          <a:effectRef idx="2">
-            <a:schemeClr val="accent1"/>
-          </a:effectRef>
-          <a:fontRef idx="minor">
-            <a:schemeClr val="lt1"/>
-          </a:fontRef>
-        </p:style>
-        <p:txBody>
-          <a:bodyPr rtlCol="0" anchor="ctr" wrap="square" lIns="164592" rIns="164592" tIns="109728" bIns="109728"/>
-          <a:lstStyle/>
-          <a:p>
-            <a:pPr algn="ctr">
-              <a:lnSpc>
-                <a:spcPct val="100000"/>
-              </a:lnSpc>
-              <a:spcAft>
-                <a:spcPts val="700"/>
-              </a:spcAft>
-              <a:defRPr sz="1600" b="0">
-                <a:solidFill>
-                  <a:srgbClr val="0E7C86"/>
-                </a:solidFill>
-                <a:latin typeface="Calibri"/>
-              </a:defRPr>
-            </a:pPr>
-            <a:r>
-              <a:rPr sz="1600" b="1">
-                <a:solidFill>
-                  <a:srgbClr val="666666"/>
-                </a:solidFill>
-                <a:latin typeface="Calibri"/>
-              </a:rPr>
-              <a:t>PLACEHOLDER</a:t>
-            </a:r>
-          </a:p>
-          <a:p>
-            <a:pPr algn="ctr">
-              <a:lnSpc>
-                <a:spcPct val="100000"/>
-              </a:lnSpc>
-              <a:spcAft>
-                <a:spcPts val="700"/>
-              </a:spcAft>
-              <a:defRPr sz="1600" b="0">
-                <a:solidFill>
-                  <a:srgbClr val="0E7C86"/>
-                </a:solidFill>
-                <a:latin typeface="Calibri"/>
-              </a:defRPr>
-            </a:pPr>
-            <a:r>
-              <a:rPr sz="1600" b="0">
-                <a:solidFill>
-                  <a:srgbClr val="0E7C86"/>
-                </a:solidFill>
-                <a:latin typeface="Calibri"/>
-              </a:rPr>
-              <a:t>PHOTO: right turn signal, front and back</a:t>
-            </a:r>
-          </a:p>
-          <a:p>
-            <a:pPr algn="ctr">
-              <a:lnSpc>
-                <a:spcPct val="100000"/>
-              </a:lnSpc>
-              <a:spcAft>
-                <a:spcPts val="700"/>
-              </a:spcAft>
-              <a:defRPr sz="1600" b="0">
-                <a:solidFill>
-                  <a:srgbClr val="0E7C86"/>
-                </a:solidFill>
-                <a:latin typeface="Calibri"/>
-              </a:defRPr>
-            </a:pPr>
-            <a:r>
-              <a:rPr sz="1600" b="0">
-                <a:solidFill>
-                  <a:srgbClr val="0E7C86"/>
-                </a:solidFill>
-                <a:latin typeface="Calibri"/>
-              </a:rPr>
-              <a:t>The same shot from the other side, with the RIGHT indicator running. Front and rear bars both visible.</a:t>
+              <a:t>LEFT turn signal, from the front. The rear bar is lit on the same side at the same time.</a:t>
             </a:r>
           </a:p>
         </p:txBody>
@@ -38302,7 +38112,7 @@
                 </a:solidFill>
                 <a:latin typeface="Calibri"/>
               </a:rPr>
-              <a:t>Right turn signal - the same program, and the same 32 LEDs</a:t>
+              <a:t>RIGHT turn signal. Same vehicle, same program, same 32 LEDs - the D-pad just went the other way.</a:t>
             </a:r>
           </a:p>
         </p:txBody>

--- a/ground-vehicle/docs/courses/beginner-ps3/l1_introduction.pptx
+++ b/ground-vehicle/docs/courses/beginner-ps3/l1_introduction.pptx
@@ -2065,6 +2065,14 @@
                 <a:latin typeface="Calibri"/>
               </a:rPr>
               <a:t>The URL is the part everybody mistypes. Have it ready to paste into the chat, or written on the board, rather than reading it out.</a:t>
+            </a:r>
+          </a:p>
+          <a:p>
+            <a:r>
+              <a:rPr sz="1200">
+                <a:latin typeface="Calibri"/>
+              </a:rPr>
+              <a:t>The screenshot is the real dialog. Point at the bottom row - the box is easy to miss, and it is the one field on the page that matters today.</a:t>
             </a:r>
           </a:p>
           <a:p>
@@ -18034,128 +18042,81 @@
           </a:p>
         </p:txBody>
       </p:sp>
-      <p:sp>
-        <p:nvSpPr>
-          <p:cNvPr id="7" name="Rectangle 6"/>
-          <p:cNvSpPr/>
-          <p:nvPr/>
-        </p:nvSpPr>
-        <p:spPr>
-          <a:xfrm>
-            <a:off x="8556736" y="1188720"/>
-            <a:ext cx="3132039" cy="3840480"/>
+      <p:pic>
+        <p:nvPicPr>
+          <p:cNvPr id="7" name="Picture 6" descr="ide-preferences-boards-url.png"/>
+          <p:cNvPicPr>
+            <a:picLocks noChangeAspect="1"/>
+          </p:cNvPicPr>
+          <p:nvPr/>
+        </p:nvPicPr>
+        <p:blipFill>
+          <a:blip r:embed="rId2"/>
+          <a:stretch>
+            <a:fillRect/>
+          </a:stretch>
+        </p:blipFill>
+        <p:spPr>
+          <a:xfrm>
+            <a:off x="8556736" y="1865199"/>
+            <a:ext cx="3132039" cy="1938881"/>
           </a:xfrm>
           <a:prstGeom prst="rect">
             <a:avLst/>
           </a:prstGeom>
-          <a:solidFill>
-            <a:srgbClr val="EEF3F8"/>
-          </a:solidFill>
-          <a:ln w="19050">
-            <a:solidFill>
-              <a:srgbClr val="0E7C86"/>
-            </a:solidFill>
-            <a:prstDash val="dash"/>
-          </a:ln>
-          <a:effectLst/>
-        </p:spPr>
-        <p:style>
-          <a:lnRef idx="1">
-            <a:schemeClr val="accent1"/>
-          </a:lnRef>
-          <a:fillRef idx="3">
-            <a:schemeClr val="accent1"/>
-          </a:fillRef>
-          <a:effectRef idx="2">
-            <a:schemeClr val="accent1"/>
-          </a:effectRef>
-          <a:fontRef idx="minor">
-            <a:schemeClr val="lt1"/>
-          </a:fontRef>
-        </p:style>
-        <p:txBody>
-          <a:bodyPr rtlCol="0" anchor="ctr" wrap="square" lIns="164592" rIns="164592" tIns="109728" bIns="109728"/>
-          <a:lstStyle/>
-          <a:p>
-            <a:pPr algn="ctr">
-              <a:lnSpc>
-                <a:spcPct val="100000"/>
-              </a:lnSpc>
-              <a:spcAft>
-                <a:spcPts val="700"/>
-              </a:spcAft>
-              <a:defRPr sz="1600" b="0">
-                <a:solidFill>
-                  <a:srgbClr val="0E7C86"/>
-                </a:solidFill>
-                <a:latin typeface="Calibri"/>
-              </a:defRPr>
-            </a:pPr>
-            <a:r>
-              <a:rPr sz="1600" b="1">
+        </p:spPr>
+      </p:pic>
+      <p:sp>
+        <p:nvSpPr>
+          <p:cNvPr id="8" name="TextBox 7"/>
+          <p:cNvSpPr txBox="1"/>
+          <p:nvPr/>
+        </p:nvSpPr>
+        <p:spPr>
+          <a:xfrm>
+            <a:off x="8556736" y="3858944"/>
+            <a:ext cx="3132039" cy="566928"/>
+          </a:xfrm>
+          <a:prstGeom prst="rect">
+            <a:avLst/>
+          </a:prstGeom>
+          <a:noFill/>
+        </p:spPr>
+        <p:txBody>
+          <a:bodyPr wrap="square" lIns="0" tIns="0" rIns="0" bIns="0">
+            <a:spAutoFit/>
+          </a:bodyPr>
+          <a:lstStyle/>
+          <a:p>
+            <a:pPr algn="l">
+              <a:lnSpc>
+                <a:spcPct val="100000"/>
+              </a:lnSpc>
+              <a:spcAft>
+                <a:spcPts val="600"/>
+              </a:spcAft>
+              <a:defRPr sz="1800" b="0">
                 <a:solidFill>
                   <a:srgbClr val="666666"/>
                 </a:solidFill>
                 <a:latin typeface="Calibri"/>
-              </a:rPr>
-              <a:t>PLACEHOLDER</a:t>
-            </a:r>
-          </a:p>
-          <a:p>
-            <a:pPr algn="ctr">
-              <a:lnSpc>
-                <a:spcPct val="100000"/>
-              </a:lnSpc>
-              <a:spcAft>
-                <a:spcPts val="700"/>
-              </a:spcAft>
-              <a:defRPr sz="1600" b="0">
-                <a:solidFill>
-                  <a:srgbClr val="0E7C86"/>
-                </a:solidFill>
-                <a:latin typeface="Calibri"/>
-              </a:defRPr>
-            </a:pPr>
-            <a:r>
-              <a:rPr sz="1600" b="0">
-                <a:solidFill>
-                  <a:srgbClr val="0E7C86"/>
-                </a:solidFill>
-                <a:latin typeface="Calibri"/>
-              </a:rPr>
-              <a:t>SCREENSHOT: Arduino IDE Preferences</a:t>
-            </a:r>
-          </a:p>
-          <a:p>
-            <a:pPr algn="ctr">
-              <a:lnSpc>
-                <a:spcPct val="100000"/>
-              </a:lnSpc>
-              <a:spcAft>
-                <a:spcPts val="700"/>
-              </a:spcAft>
-              <a:defRPr sz="1600" b="0">
-                <a:solidFill>
-                  <a:srgbClr val="0E7C86"/>
-                </a:solidFill>
-                <a:latin typeface="Calibri"/>
-              </a:defRPr>
-            </a:pPr>
-            <a:r>
-              <a:rPr sz="1600" b="0">
-                <a:solidFill>
-                  <a:srgbClr val="0E7C86"/>
-                </a:solidFill>
-                <a:latin typeface="Calibri"/>
-              </a:rPr>
-              <a:t>File &gt; Preferences with the URL above pasted into the "Additional boards manager URLs" box, so students can see exactly which field it goes in.</a:t>
-            </a:r>
-          </a:p>
-        </p:txBody>
-      </p:sp>
-      <p:sp>
-        <p:nvSpPr>
-          <p:cNvPr id="8" name="Rounded Rectangle 7"/>
+              </a:defRPr>
+            </a:pPr>
+            <a:r>
+              <a:rPr sz="1800" b="0">
+                <a:solidFill>
+                  <a:srgbClr val="666666"/>
+                </a:solidFill>
+                <a:latin typeface="Calibri"/>
+              </a:rPr>
+              <a:t>It is the bottom row</a:t>
+            </a:r>
+          </a:p>
+        </p:txBody>
+      </p:sp>
+      <p:sp>
+        <p:nvSpPr>
+          <p:cNvPr id="9" name="Rounded Rectangle 8"/>
           <p:cNvSpPr/>
           <p:nvPr/>
         </p:nvSpPr>

--- a/ground-vehicle/docs/courses/beginner-ps3/l1_introduction.pptx
+++ b/ground-vehicle/docs/courses/beginner-ps3/l1_introduction.pptx
@@ -4,57 +4,60 @@
   <p:sldMasterIdLst>
     <p:sldMasterId id="2147483648" r:id="rId1"/>
   </p:sldMasterIdLst>
+  <p:notesMasterIdLst>
+    <p:notesMasterId r:id="rId50"/>
+  </p:notesMasterIdLst>
   <p:sldIdLst>
-    <p:sldId id="256" r:id="rId7"/>
-    <p:sldId id="257" r:id="rId9"/>
-    <p:sldId id="258" r:id="rId10"/>
-    <p:sldId id="259" r:id="rId11"/>
-    <p:sldId id="260" r:id="rId12"/>
-    <p:sldId id="261" r:id="rId13"/>
-    <p:sldId id="262" r:id="rId14"/>
-    <p:sldId id="263" r:id="rId15"/>
-    <p:sldId id="264" r:id="rId16"/>
-    <p:sldId id="265" r:id="rId17"/>
-    <p:sldId id="266" r:id="rId18"/>
-    <p:sldId id="267" r:id="rId19"/>
-    <p:sldId id="268" r:id="rId20"/>
-    <p:sldId id="269" r:id="rId21"/>
-    <p:sldId id="270" r:id="rId22"/>
-    <p:sldId id="271" r:id="rId23"/>
-    <p:sldId id="272" r:id="rId24"/>
-    <p:sldId id="273" r:id="rId25"/>
-    <p:sldId id="274" r:id="rId26"/>
-    <p:sldId id="275" r:id="rId27"/>
-    <p:sldId id="276" r:id="rId28"/>
-    <p:sldId id="277" r:id="rId29"/>
-    <p:sldId id="278" r:id="rId30"/>
-    <p:sldId id="279" r:id="rId31"/>
-    <p:sldId id="280" r:id="rId32"/>
-    <p:sldId id="281" r:id="rId33"/>
-    <p:sldId id="282" r:id="rId34"/>
-    <p:sldId id="283" r:id="rId35"/>
-    <p:sldId id="284" r:id="rId36"/>
-    <p:sldId id="285" r:id="rId37"/>
-    <p:sldId id="286" r:id="rId38"/>
-    <p:sldId id="287" r:id="rId39"/>
-    <p:sldId id="288" r:id="rId40"/>
-    <p:sldId id="289" r:id="rId41"/>
-    <p:sldId id="290" r:id="rId42"/>
-    <p:sldId id="291" r:id="rId43"/>
-    <p:sldId id="292" r:id="rId44"/>
-    <p:sldId id="293" r:id="rId45"/>
-    <p:sldId id="294" r:id="rId46"/>
-    <p:sldId id="295" r:id="rId47"/>
-    <p:sldId id="296" r:id="rId48"/>
-    <p:sldId id="297" r:id="rId49"/>
-    <p:sldId id="298" r:id="rId50"/>
-    <p:sldId id="299" r:id="rId51"/>
-    <p:sldId id="300" r:id="rId52"/>
-    <p:sldId id="301" r:id="rId53"/>
-    <p:sldId id="302" r:id="rId54"/>
-    <p:sldId id="303" r:id="rId55"/>
+    <p:sldId id="256" r:id="rId2"/>
+    <p:sldId id="257" r:id="rId3"/>
+    <p:sldId id="258" r:id="rId4"/>
+    <p:sldId id="259" r:id="rId5"/>
+    <p:sldId id="260" r:id="rId6"/>
+    <p:sldId id="261" r:id="rId7"/>
+    <p:sldId id="262" r:id="rId8"/>
+    <p:sldId id="263" r:id="rId9"/>
+    <p:sldId id="264" r:id="rId10"/>
+    <p:sldId id="265" r:id="rId11"/>
+    <p:sldId id="266" r:id="rId12"/>
+    <p:sldId id="267" r:id="rId13"/>
+    <p:sldId id="268" r:id="rId14"/>
+    <p:sldId id="269" r:id="rId15"/>
+    <p:sldId id="270" r:id="rId16"/>
+    <p:sldId id="271" r:id="rId17"/>
+    <p:sldId id="272" r:id="rId18"/>
+    <p:sldId id="273" r:id="rId19"/>
+    <p:sldId id="274" r:id="rId20"/>
+    <p:sldId id="275" r:id="rId21"/>
+    <p:sldId id="276" r:id="rId22"/>
+    <p:sldId id="277" r:id="rId23"/>
+    <p:sldId id="278" r:id="rId24"/>
+    <p:sldId id="279" r:id="rId25"/>
+    <p:sldId id="280" r:id="rId26"/>
+    <p:sldId id="281" r:id="rId27"/>
+    <p:sldId id="282" r:id="rId28"/>
+    <p:sldId id="283" r:id="rId29"/>
+    <p:sldId id="284" r:id="rId30"/>
+    <p:sldId id="285" r:id="rId31"/>
+    <p:sldId id="286" r:id="rId32"/>
+    <p:sldId id="287" r:id="rId33"/>
+    <p:sldId id="288" r:id="rId34"/>
+    <p:sldId id="289" r:id="rId35"/>
+    <p:sldId id="290" r:id="rId36"/>
+    <p:sldId id="291" r:id="rId37"/>
+    <p:sldId id="292" r:id="rId38"/>
+    <p:sldId id="293" r:id="rId39"/>
+    <p:sldId id="294" r:id="rId40"/>
+    <p:sldId id="295" r:id="rId41"/>
+    <p:sldId id="296" r:id="rId42"/>
+    <p:sldId id="297" r:id="rId43"/>
+    <p:sldId id="298" r:id="rId44"/>
+    <p:sldId id="299" r:id="rId45"/>
+    <p:sldId id="300" r:id="rId46"/>
+    <p:sldId id="301" r:id="rId47"/>
+    <p:sldId id="302" r:id="rId48"/>
+    <p:sldId id="303" r:id="rId49"/>
   </p:sldIdLst>
-  <p:sldSz cx="12191695" cy="6858000" type="screen4x3"/>
+  <p:sldSz cx="12192000" cy="6858000"/>
   <p:notesSz cx="6858000" cy="9144000"/>
   <p:defaultTextStyle>
     <a:defPPr>
@@ -151,11 +154,92 @@
       </a:defRPr>
     </a:lvl9pPr>
   </p:defaultTextStyle>
+  <p:extLst>
+    <p:ext uri="{EFAFB233-063F-42B5-8137-9DF3F51BA10A}">
+      <p15:sldGuideLst xmlns:p15="http://schemas.microsoft.com/office/powerpoint/2012/main">
+        <p15:guide id="1" orient="horz" pos="2160">
+          <p15:clr>
+            <a:srgbClr val="A4A3A4"/>
+          </p15:clr>
+        </p15:guide>
+        <p15:guide id="2" pos="2880">
+          <p15:clr>
+            <a:srgbClr val="A4A3A4"/>
+          </p15:clr>
+        </p15:guide>
+      </p15:sldGuideLst>
+    </p:ext>
+  </p:extLst>
 </p:presentation>
 </file>
 
+<file path=ppt/changesInfos/changesInfo1.xml><?xml version="1.0" encoding="utf-8"?>
+<pc:chgInfo xmlns:a="http://schemas.openxmlformats.org/drawingml/2006/main" xmlns:r="http://schemas.openxmlformats.org/officeDocument/2006/relationships" xmlns:ac="http://schemas.microsoft.com/office/drawing/2013/main/command" xmlns:pc="http://schemas.microsoft.com/office/powerpoint/2013/main/command">
+  <pc:docChgLst>
+    <pc:chgData name="Kevin Bowen" userId="ee6702fae12807e4" providerId="LiveId" clId="{5CB6C98B-5151-4E5D-BF39-3ED613ABF9A3}"/>
+    <pc:docChg chg="custSel modSld">
+      <pc:chgData name="Kevin Bowen" userId="ee6702fae12807e4" providerId="LiveId" clId="{5CB6C98B-5151-4E5D-BF39-3ED613ABF9A3}" dt="2026-09-07T16:18:55.759" v="232" actId="20577"/>
+      <pc:docMkLst>
+        <pc:docMk/>
+      </pc:docMkLst>
+      <pc:sldChg chg="modNotesTx">
+        <pc:chgData name="Kevin Bowen" userId="ee6702fae12807e4" providerId="LiveId" clId="{5CB6C98B-5151-4E5D-BF39-3ED613ABF9A3}" dt="2026-09-07T16:09:59.599" v="114" actId="20577"/>
+        <pc:sldMkLst>
+          <pc:docMk/>
+          <pc:sldMk cId="0" sldId="257"/>
+        </pc:sldMkLst>
+      </pc:sldChg>
+      <pc:sldChg chg="modNotesTx">
+        <pc:chgData name="Kevin Bowen" userId="ee6702fae12807e4" providerId="LiveId" clId="{5CB6C98B-5151-4E5D-BF39-3ED613ABF9A3}" dt="2026-09-07T16:10:30.046" v="121" actId="20577"/>
+        <pc:sldMkLst>
+          <pc:docMk/>
+          <pc:sldMk cId="0" sldId="258"/>
+        </pc:sldMkLst>
+      </pc:sldChg>
+      <pc:sldChg chg="modNotesTx">
+        <pc:chgData name="Kevin Bowen" userId="ee6702fae12807e4" providerId="LiveId" clId="{5CB6C98B-5151-4E5D-BF39-3ED613ABF9A3}" dt="2026-09-07T16:11:19.355" v="184" actId="20577"/>
+        <pc:sldMkLst>
+          <pc:docMk/>
+          <pc:sldMk cId="0" sldId="260"/>
+        </pc:sldMkLst>
+      </pc:sldChg>
+      <pc:sldChg chg="modNotesTx">
+        <pc:chgData name="Kevin Bowen" userId="ee6702fae12807e4" providerId="LiveId" clId="{5CB6C98B-5151-4E5D-BF39-3ED613ABF9A3}" dt="2026-09-07T16:15:26.753" v="185" actId="20577"/>
+        <pc:sldMkLst>
+          <pc:docMk/>
+          <pc:sldMk cId="0" sldId="273"/>
+        </pc:sldMkLst>
+      </pc:sldChg>
+      <pc:sldChg chg="modSp mod">
+        <pc:chgData name="Kevin Bowen" userId="ee6702fae12807e4" providerId="LiveId" clId="{5CB6C98B-5151-4E5D-BF39-3ED613ABF9A3}" dt="2026-09-07T16:18:55.759" v="232" actId="20577"/>
+        <pc:sldMkLst>
+          <pc:docMk/>
+          <pc:sldMk cId="0" sldId="279"/>
+        </pc:sldMkLst>
+        <pc:spChg chg="mod">
+          <ac:chgData name="Kevin Bowen" userId="ee6702fae12807e4" providerId="LiveId" clId="{5CB6C98B-5151-4E5D-BF39-3ED613ABF9A3}" dt="2026-09-07T16:18:55.759" v="232" actId="20577"/>
+          <ac:spMkLst>
+            <pc:docMk/>
+            <pc:sldMk cId="0" sldId="279"/>
+            <ac:spMk id="8" creationId="{00000000-0000-0000-0000-000000000000}"/>
+          </ac:spMkLst>
+        </pc:spChg>
+        <pc:picChg chg="mod">
+          <ac:chgData name="Kevin Bowen" userId="ee6702fae12807e4" providerId="LiveId" clId="{5CB6C98B-5151-4E5D-BF39-3ED613ABF9A3}" dt="2026-09-07T16:18:19.029" v="196" actId="1076"/>
+          <ac:picMkLst>
+            <pc:docMk/>
+            <pc:sldMk cId="0" sldId="279"/>
+            <ac:picMk id="7" creationId="{00000000-0000-0000-0000-000000000000}"/>
+          </ac:picMkLst>
+        </pc:picChg>
+      </pc:sldChg>
+    </pc:docChg>
+  </pc:docChgLst>
+</pc:chgInfo>
+</file>
+
 <file path=ppt/notesMasters/notesMaster1.xml><?xml version="1.0" encoding="utf-8"?>
-<p:notesMaster xmlns:a="http://schemas.openxmlformats.org/drawingml/2006/main" xmlns:p="http://schemas.openxmlformats.org/presentationml/2006/main" xmlns:r="http://schemas.openxmlformats.org/officeDocument/2006/relationships">
+<p:notesMaster xmlns:a="http://schemas.openxmlformats.org/drawingml/2006/main" xmlns:r="http://schemas.openxmlformats.org/officeDocument/2006/relationships" xmlns:p="http://schemas.openxmlformats.org/presentationml/2006/main">
   <p:cSld>
     <p:bg>
       <p:bgRef idx="1001">
@@ -176,241 +260,16 @@
           <a:chExt cx="0" cy="0"/>
         </a:xfrm>
       </p:grpSpPr>
-      <p:sp>
-        <p:nvSpPr>
-          <p:cNvPr id="2" name="Header Placeholder 1"/>
-          <p:cNvSpPr>
-            <a:spLocks noGrp="1"/>
-          </p:cNvSpPr>
-          <p:nvPr>
-            <p:ph type="hdr" sz="quarter"/>
-          </p:nvPr>
-        </p:nvSpPr>
-        <p:spPr>
-          <a:xfrm>
-            <a:off x="0" y="0"/>
-            <a:ext cx="2971800" cy="457200"/>
-          </a:xfrm>
-          <a:prstGeom prst="rect">
-            <a:avLst/>
-          </a:prstGeom>
-        </p:spPr>
-        <p:txBody>
-          <a:bodyPr vert="horz" lIns="91440" tIns="45720" rIns="91440" bIns="45720" rtlCol="0"/>
-          <a:lstStyle>
-            <a:lvl1pPr algn="l">
-              <a:defRPr sz="1200"/>
-            </a:lvl1pPr>
-          </a:lstStyle>
-          <a:p>
-            <a:endParaRPr lang="en-US"/>
-          </a:p>
-        </p:txBody>
-      </p:sp>
-      <p:sp>
-        <p:nvSpPr>
-          <p:cNvPr id="3" name="Date Placeholder 2"/>
-          <p:cNvSpPr>
-            <a:spLocks noGrp="1"/>
-          </p:cNvSpPr>
-          <p:nvPr>
-            <p:ph type="dt" idx="1"/>
-          </p:nvPr>
-        </p:nvSpPr>
-        <p:spPr>
-          <a:xfrm>
-            <a:off x="3884613" y="0"/>
-            <a:ext cx="2971800" cy="457200"/>
-          </a:xfrm>
-          <a:prstGeom prst="rect">
-            <a:avLst/>
-          </a:prstGeom>
-        </p:spPr>
-        <p:txBody>
-          <a:bodyPr vert="horz" lIns="91440" tIns="45720" rIns="91440" bIns="45720" rtlCol="0"/>
-          <a:lstStyle>
-            <a:lvl1pPr algn="r">
-              <a:defRPr sz="1200"/>
-            </a:lvl1pPr>
-          </a:lstStyle>
-          <a:p>
-            <a:fld id="{0F89C1C7-3DCD-1040-A9CF-14679D8B5DDD}" type="datetimeFigureOut">
-              <a:rPr lang="en-US" smtClean="0"/>
-              <a:t>10/17/16</a:t>
-            </a:fld>
-            <a:endParaRPr lang="en-US"/>
-          </a:p>
-        </p:txBody>
-      </p:sp>
-      <p:sp>
-        <p:nvSpPr>
-          <p:cNvPr id="4" name="Slide Image Placeholder 3"/>
-          <p:cNvSpPr>
-            <a:spLocks noGrp="1" noRot="1" noChangeAspect="1"/>
-          </p:cNvSpPr>
-          <p:nvPr>
-            <p:ph type="sldImg" idx="2"/>
-          </p:nvPr>
-        </p:nvSpPr>
-        <p:spPr>
-          <a:xfrm>
-            <a:off x="1143000" y="685800"/>
-            <a:ext cx="4572000" cy="3429000"/>
-          </a:xfrm>
-          <a:prstGeom prst="rect">
-            <a:avLst/>
-          </a:prstGeom>
-          <a:noFill/>
-          <a:ln w="12700">
-            <a:solidFill>
-              <a:prstClr val="black"/>
-            </a:solidFill>
-          </a:ln>
-        </p:spPr>
-        <p:txBody>
-          <a:bodyPr vert="horz" lIns="91440" tIns="45720" rIns="91440" bIns="45720" rtlCol="0" anchor="ctr"/>
-          <a:lstStyle/>
-          <a:p>
-            <a:endParaRPr lang="en-US"/>
-          </a:p>
-        </p:txBody>
-      </p:sp>
-      <p:sp>
-        <p:nvSpPr>
-          <p:cNvPr id="5" name="Notes Placeholder 4"/>
-          <p:cNvSpPr>
-            <a:spLocks noGrp="1"/>
-          </p:cNvSpPr>
-          <p:nvPr>
-            <p:ph type="body" sz="quarter" idx="3"/>
-          </p:nvPr>
-        </p:nvSpPr>
-        <p:spPr>
-          <a:xfrm>
-            <a:off x="685800" y="4343400"/>
-            <a:ext cx="5486400" cy="4114800"/>
-          </a:xfrm>
-          <a:prstGeom prst="rect">
-            <a:avLst/>
-          </a:prstGeom>
-        </p:spPr>
-        <p:txBody>
-          <a:bodyPr vert="horz" lIns="91440" tIns="45720" rIns="91440" bIns="45720" rtlCol="0"/>
-          <a:lstStyle/>
-          <a:p>
-            <a:pPr lvl="0"/>
-            <a:r>
-              <a:rPr lang="en-US" smtClean="0"/>
-              <a:t>Click to edit Master text styles</a:t>
-            </a:r>
-          </a:p>
-          <a:p>
-            <a:pPr lvl="1"/>
-            <a:r>
-              <a:rPr lang="en-US" smtClean="0"/>
-              <a:t>Second level</a:t>
-            </a:r>
-          </a:p>
-          <a:p>
-            <a:pPr lvl="2"/>
-            <a:r>
-              <a:rPr lang="en-US" smtClean="0"/>
-              <a:t>Third level</a:t>
-            </a:r>
-          </a:p>
-          <a:p>
-            <a:pPr lvl="3"/>
-            <a:r>
-              <a:rPr lang="en-US" smtClean="0"/>
-              <a:t>Fourth level</a:t>
-            </a:r>
-          </a:p>
-          <a:p>
-            <a:pPr lvl="4"/>
-            <a:r>
-              <a:rPr lang="en-US" smtClean="0"/>
-              <a:t>Fifth level</a:t>
-            </a:r>
-            <a:endParaRPr lang="en-US"/>
-          </a:p>
-        </p:txBody>
-      </p:sp>
-      <p:sp>
-        <p:nvSpPr>
-          <p:cNvPr id="6" name="Footer Placeholder 5"/>
-          <p:cNvSpPr>
-            <a:spLocks noGrp="1"/>
-          </p:cNvSpPr>
-          <p:nvPr>
-            <p:ph type="ftr" sz="quarter" idx="4"/>
-          </p:nvPr>
-        </p:nvSpPr>
-        <p:spPr>
-          <a:xfrm>
-            <a:off x="0" y="8685213"/>
-            <a:ext cx="2971800" cy="457200"/>
-          </a:xfrm>
-          <a:prstGeom prst="rect">
-            <a:avLst/>
-          </a:prstGeom>
-        </p:spPr>
-        <p:txBody>
-          <a:bodyPr vert="horz" lIns="91440" tIns="45720" rIns="91440" bIns="45720" rtlCol="0" anchor="b"/>
-          <a:lstStyle>
-            <a:lvl1pPr algn="l">
-              <a:defRPr sz="1200"/>
-            </a:lvl1pPr>
-          </a:lstStyle>
-          <a:p>
-            <a:endParaRPr lang="en-US"/>
-          </a:p>
-        </p:txBody>
-      </p:sp>
-      <p:sp>
-        <p:nvSpPr>
-          <p:cNvPr id="7" name="Slide Number Placeholder 6"/>
-          <p:cNvSpPr>
-            <a:spLocks noGrp="1"/>
-          </p:cNvSpPr>
-          <p:nvPr>
-            <p:ph type="sldNum" sz="quarter" idx="5"/>
-          </p:nvPr>
-        </p:nvSpPr>
-        <p:spPr>
-          <a:xfrm>
-            <a:off x="3884613" y="8685213"/>
-            <a:ext cx="2971800" cy="457200"/>
-          </a:xfrm>
-          <a:prstGeom prst="rect">
-            <a:avLst/>
-          </a:prstGeom>
-        </p:spPr>
-        <p:txBody>
-          <a:bodyPr vert="horz" lIns="91440" tIns="45720" rIns="91440" bIns="45720" rtlCol="0" anchor="b"/>
-          <a:lstStyle>
-            <a:lvl1pPr algn="r">
-              <a:defRPr sz="1200"/>
-            </a:lvl1pPr>
-          </a:lstStyle>
-          <a:p>
-            <a:fld id="{BB5E49A5-4136-284D-997B-48E1D791AD67}" type="slidenum">
-              <a:rPr lang="en-US" smtClean="0"/>
-              <a:t>‹#›</a:t>
-            </a:fld>
-            <a:endParaRPr lang="en-US"/>
-          </a:p>
-        </p:txBody>
-      </p:sp>
     </p:spTree>
     <p:extLst>
       <p:ext uri="{BB962C8B-B14F-4D97-AF65-F5344CB8AC3E}">
-        <p14:creationId xmlns:p14="http://schemas.microsoft.com/office/powerpoint/2010/main" val="2623252185"/>
+        <p14:creationId xmlns:p14="http://schemas.microsoft.com/office/powerpoint/2010/main" val="169600481"/>
       </p:ext>
     </p:extLst>
   </p:cSld>
   <p:clrMap bg1="lt1" tx1="dk1" bg2="lt2" tx2="dk2" accent1="accent1" accent2="accent2" accent3="accent3" accent4="accent4" accent5="accent5" accent6="accent6" hlink="hlink" folHlink="folHlink"/>
   <p:notesStyle>
-    <a:lvl1pPr marL="0" algn="l" defTabSz="457200" rtl="0" eaLnBrk="1" latinLnBrk="0" hangingPunct="1">
+    <a:lvl1pPr marL="0" algn="l" defTabSz="914400" rtl="0" eaLnBrk="1" latinLnBrk="0" hangingPunct="1">
       <a:defRPr sz="1200" kern="1200">
         <a:solidFill>
           <a:schemeClr val="tx1"/>
@@ -420,7 +279,7 @@
         <a:cs typeface="+mn-cs"/>
       </a:defRPr>
     </a:lvl1pPr>
-    <a:lvl2pPr marL="457200" algn="l" defTabSz="457200" rtl="0" eaLnBrk="1" latinLnBrk="0" hangingPunct="1">
+    <a:lvl2pPr marL="457200" algn="l" defTabSz="914400" rtl="0" eaLnBrk="1" latinLnBrk="0" hangingPunct="1">
       <a:defRPr sz="1200" kern="1200">
         <a:solidFill>
           <a:schemeClr val="tx1"/>
@@ -430,7 +289,7 @@
         <a:cs typeface="+mn-cs"/>
       </a:defRPr>
     </a:lvl2pPr>
-    <a:lvl3pPr marL="914400" algn="l" defTabSz="457200" rtl="0" eaLnBrk="1" latinLnBrk="0" hangingPunct="1">
+    <a:lvl3pPr marL="914400" algn="l" defTabSz="914400" rtl="0" eaLnBrk="1" latinLnBrk="0" hangingPunct="1">
       <a:defRPr sz="1200" kern="1200">
         <a:solidFill>
           <a:schemeClr val="tx1"/>
@@ -440,7 +299,7 @@
         <a:cs typeface="+mn-cs"/>
       </a:defRPr>
     </a:lvl3pPr>
-    <a:lvl4pPr marL="1371600" algn="l" defTabSz="457200" rtl="0" eaLnBrk="1" latinLnBrk="0" hangingPunct="1">
+    <a:lvl4pPr marL="1371600" algn="l" defTabSz="914400" rtl="0" eaLnBrk="1" latinLnBrk="0" hangingPunct="1">
       <a:defRPr sz="1200" kern="1200">
         <a:solidFill>
           <a:schemeClr val="tx1"/>
@@ -450,7 +309,7 @@
         <a:cs typeface="+mn-cs"/>
       </a:defRPr>
     </a:lvl4pPr>
-    <a:lvl5pPr marL="1828800" algn="l" defTabSz="457200" rtl="0" eaLnBrk="1" latinLnBrk="0" hangingPunct="1">
+    <a:lvl5pPr marL="1828800" algn="l" defTabSz="914400" rtl="0" eaLnBrk="1" latinLnBrk="0" hangingPunct="1">
       <a:defRPr sz="1200" kern="1200">
         <a:solidFill>
           <a:schemeClr val="tx1"/>
@@ -460,7 +319,7 @@
         <a:cs typeface="+mn-cs"/>
       </a:defRPr>
     </a:lvl5pPr>
-    <a:lvl6pPr marL="2286000" algn="l" defTabSz="457200" rtl="0" eaLnBrk="1" latinLnBrk="0" hangingPunct="1">
+    <a:lvl6pPr marL="2286000" algn="l" defTabSz="914400" rtl="0" eaLnBrk="1" latinLnBrk="0" hangingPunct="1">
       <a:defRPr sz="1200" kern="1200">
         <a:solidFill>
           <a:schemeClr val="tx1"/>
@@ -470,7 +329,7 @@
         <a:cs typeface="+mn-cs"/>
       </a:defRPr>
     </a:lvl6pPr>
-    <a:lvl7pPr marL="2743200" algn="l" defTabSz="457200" rtl="0" eaLnBrk="1" latinLnBrk="0" hangingPunct="1">
+    <a:lvl7pPr marL="2743200" algn="l" defTabSz="914400" rtl="0" eaLnBrk="1" latinLnBrk="0" hangingPunct="1">
       <a:defRPr sz="1200" kern="1200">
         <a:solidFill>
           <a:schemeClr val="tx1"/>
@@ -480,7 +339,7 @@
         <a:cs typeface="+mn-cs"/>
       </a:defRPr>
     </a:lvl7pPr>
-    <a:lvl8pPr marL="3200400" algn="l" defTabSz="457200" rtl="0" eaLnBrk="1" latinLnBrk="0" hangingPunct="1">
+    <a:lvl8pPr marL="3200400" algn="l" defTabSz="914400" rtl="0" eaLnBrk="1" latinLnBrk="0" hangingPunct="1">
       <a:defRPr sz="1200" kern="1200">
         <a:solidFill>
           <a:schemeClr val="tx1"/>
@@ -490,7 +349,7 @@
         <a:cs typeface="+mn-cs"/>
       </a:defRPr>
     </a:lvl8pPr>
-    <a:lvl9pPr marL="3657600" algn="l" defTabSz="457200" rtl="0" eaLnBrk="1" latinLnBrk="0" hangingPunct="1">
+    <a:lvl9pPr marL="3657600" algn="l" defTabSz="914400" rtl="0" eaLnBrk="1" latinLnBrk="0" hangingPunct="1">
       <a:defRPr sz="1200" kern="1200">
         <a:solidFill>
           <a:schemeClr val="tx1"/>
@@ -505,7 +364,7 @@
 </file>
 
 <file path=ppt/notesSlides/notesSlide1.xml><?xml version="1.0" encoding="utf-8"?>
-<p:notes xmlns:a="http://schemas.openxmlformats.org/drawingml/2006/main" xmlns:p="http://schemas.openxmlformats.org/presentationml/2006/main" xmlns:r="http://schemas.openxmlformats.org/officeDocument/2006/relationships">
+<p:notes xmlns:a="http://schemas.openxmlformats.org/drawingml/2006/main" xmlns:r="http://schemas.openxmlformats.org/officeDocument/2006/relationships" xmlns:p="http://schemas.openxmlformats.org/presentationml/2006/main">
   <p:cSld>
     <p:spTree>
       <p:nvGrpSpPr>
@@ -525,7 +384,7 @@
         <p:nvSpPr>
           <p:cNvPr id="2" name="Slide Image Placeholder 1"/>
           <p:cNvSpPr>
-            <a:spLocks noGrp="1"/>
+            <a:spLocks noGrp="1" noRot="1" noChangeAspect="1"/>
           </p:cNvSpPr>
           <p:nvPr>
             <p:ph type="sldImg" idx="2"/>
@@ -540,7 +399,7 @@
             <a:spLocks noGrp="1"/>
           </p:cNvSpPr>
           <p:nvPr>
-            <p:ph type="body" idx="3" sz="quarter"/>
+            <p:ph type="body" sz="quarter" idx="3"/>
           </p:nvPr>
         </p:nvSpPr>
         <p:spPr/>
@@ -588,7 +447,7 @@
             <a:spLocks noGrp="1"/>
           </p:cNvSpPr>
           <p:nvPr>
-            <p:ph type="sldNum" idx="5" sz="quarter"/>
+            <p:ph type="sldNum" sz="quarter" idx="5"/>
           </p:nvPr>
         </p:nvSpPr>
         <p:spPr/>
@@ -602,7 +461,7 @@
 </file>
 
 <file path=ppt/notesSlides/notesSlide10.xml><?xml version="1.0" encoding="utf-8"?>
-<p:notes xmlns:a="http://schemas.openxmlformats.org/drawingml/2006/main" xmlns:p="http://schemas.openxmlformats.org/presentationml/2006/main" xmlns:r="http://schemas.openxmlformats.org/officeDocument/2006/relationships">
+<p:notes xmlns:a="http://schemas.openxmlformats.org/drawingml/2006/main" xmlns:r="http://schemas.openxmlformats.org/officeDocument/2006/relationships" xmlns:p="http://schemas.openxmlformats.org/presentationml/2006/main">
   <p:cSld>
     <p:spTree>
       <p:nvGrpSpPr>
@@ -622,7 +481,7 @@
         <p:nvSpPr>
           <p:cNvPr id="2" name="Slide Image Placeholder 1"/>
           <p:cNvSpPr>
-            <a:spLocks noGrp="1"/>
+            <a:spLocks noGrp="1" noRot="1" noChangeAspect="1"/>
           </p:cNvSpPr>
           <p:nvPr>
             <p:ph type="sldImg" idx="2"/>
@@ -637,7 +496,7 @@
             <a:spLocks noGrp="1"/>
           </p:cNvSpPr>
           <p:nvPr>
-            <p:ph type="body" idx="3" sz="quarter"/>
+            <p:ph type="body" sz="quarter" idx="3"/>
           </p:nvPr>
         </p:nvSpPr>
         <p:spPr/>
@@ -669,7 +528,7 @@
             <a:spLocks noGrp="1"/>
           </p:cNvSpPr>
           <p:nvPr>
-            <p:ph type="sldNum" idx="5" sz="quarter"/>
+            <p:ph type="sldNum" sz="quarter" idx="5"/>
           </p:nvPr>
         </p:nvSpPr>
         <p:spPr/>
@@ -683,7 +542,7 @@
 </file>
 
 <file path=ppt/notesSlides/notesSlide11.xml><?xml version="1.0" encoding="utf-8"?>
-<p:notes xmlns:a="http://schemas.openxmlformats.org/drawingml/2006/main" xmlns:p="http://schemas.openxmlformats.org/presentationml/2006/main" xmlns:r="http://schemas.openxmlformats.org/officeDocument/2006/relationships">
+<p:notes xmlns:a="http://schemas.openxmlformats.org/drawingml/2006/main" xmlns:r="http://schemas.openxmlformats.org/officeDocument/2006/relationships" xmlns:p="http://schemas.openxmlformats.org/presentationml/2006/main">
   <p:cSld>
     <p:spTree>
       <p:nvGrpSpPr>
@@ -703,7 +562,7 @@
         <p:nvSpPr>
           <p:cNvPr id="2" name="Slide Image Placeholder 1"/>
           <p:cNvSpPr>
-            <a:spLocks noGrp="1"/>
+            <a:spLocks noGrp="1" noRot="1" noChangeAspect="1"/>
           </p:cNvSpPr>
           <p:nvPr>
             <p:ph type="sldImg" idx="2"/>
@@ -718,7 +577,7 @@
             <a:spLocks noGrp="1"/>
           </p:cNvSpPr>
           <p:nvPr>
-            <p:ph type="body" idx="3" sz="quarter"/>
+            <p:ph type="body" sz="quarter" idx="3"/>
           </p:nvPr>
         </p:nvSpPr>
         <p:spPr/>
@@ -766,7 +625,7 @@
             <a:spLocks noGrp="1"/>
           </p:cNvSpPr>
           <p:nvPr>
-            <p:ph type="sldNum" idx="5" sz="quarter"/>
+            <p:ph type="sldNum" sz="quarter" idx="5"/>
           </p:nvPr>
         </p:nvSpPr>
         <p:spPr/>
@@ -780,7 +639,7 @@
 </file>
 
 <file path=ppt/notesSlides/notesSlide12.xml><?xml version="1.0" encoding="utf-8"?>
-<p:notes xmlns:a="http://schemas.openxmlformats.org/drawingml/2006/main" xmlns:p="http://schemas.openxmlformats.org/presentationml/2006/main" xmlns:r="http://schemas.openxmlformats.org/officeDocument/2006/relationships">
+<p:notes xmlns:a="http://schemas.openxmlformats.org/drawingml/2006/main" xmlns:r="http://schemas.openxmlformats.org/officeDocument/2006/relationships" xmlns:p="http://schemas.openxmlformats.org/presentationml/2006/main">
   <p:cSld>
     <p:spTree>
       <p:nvGrpSpPr>
@@ -800,7 +659,7 @@
         <p:nvSpPr>
           <p:cNvPr id="2" name="Slide Image Placeholder 1"/>
           <p:cNvSpPr>
-            <a:spLocks noGrp="1"/>
+            <a:spLocks noGrp="1" noRot="1" noChangeAspect="1"/>
           </p:cNvSpPr>
           <p:nvPr>
             <p:ph type="sldImg" idx="2"/>
@@ -815,7 +674,7 @@
             <a:spLocks noGrp="1"/>
           </p:cNvSpPr>
           <p:nvPr>
-            <p:ph type="body" idx="3" sz="quarter"/>
+            <p:ph type="body" sz="quarter" idx="3"/>
           </p:nvPr>
         </p:nvSpPr>
         <p:spPr/>
@@ -855,7 +714,7 @@
             <a:spLocks noGrp="1"/>
           </p:cNvSpPr>
           <p:nvPr>
-            <p:ph type="sldNum" idx="5" sz="quarter"/>
+            <p:ph type="sldNum" sz="quarter" idx="5"/>
           </p:nvPr>
         </p:nvSpPr>
         <p:spPr/>
@@ -869,7 +728,7 @@
 </file>
 
 <file path=ppt/notesSlides/notesSlide13.xml><?xml version="1.0" encoding="utf-8"?>
-<p:notes xmlns:a="http://schemas.openxmlformats.org/drawingml/2006/main" xmlns:p="http://schemas.openxmlformats.org/presentationml/2006/main" xmlns:r="http://schemas.openxmlformats.org/officeDocument/2006/relationships">
+<p:notes xmlns:a="http://schemas.openxmlformats.org/drawingml/2006/main" xmlns:r="http://schemas.openxmlformats.org/officeDocument/2006/relationships" xmlns:p="http://schemas.openxmlformats.org/presentationml/2006/main">
   <p:cSld>
     <p:spTree>
       <p:nvGrpSpPr>
@@ -889,7 +748,7 @@
         <p:nvSpPr>
           <p:cNvPr id="2" name="Slide Image Placeholder 1"/>
           <p:cNvSpPr>
-            <a:spLocks noGrp="1"/>
+            <a:spLocks noGrp="1" noRot="1" noChangeAspect="1"/>
           </p:cNvSpPr>
           <p:nvPr>
             <p:ph type="sldImg" idx="2"/>
@@ -904,7 +763,7 @@
             <a:spLocks noGrp="1"/>
           </p:cNvSpPr>
           <p:nvPr>
-            <p:ph type="body" idx="3" sz="quarter"/>
+            <p:ph type="body" sz="quarter" idx="3"/>
           </p:nvPr>
         </p:nvSpPr>
         <p:spPr/>
@@ -944,7 +803,7 @@
             <a:spLocks noGrp="1"/>
           </p:cNvSpPr>
           <p:nvPr>
-            <p:ph type="sldNum" idx="5" sz="quarter"/>
+            <p:ph type="sldNum" sz="quarter" idx="5"/>
           </p:nvPr>
         </p:nvSpPr>
         <p:spPr/>
@@ -958,7 +817,7 @@
 </file>
 
 <file path=ppt/notesSlides/notesSlide14.xml><?xml version="1.0" encoding="utf-8"?>
-<p:notes xmlns:a="http://schemas.openxmlformats.org/drawingml/2006/main" xmlns:p="http://schemas.openxmlformats.org/presentationml/2006/main" xmlns:r="http://schemas.openxmlformats.org/officeDocument/2006/relationships">
+<p:notes xmlns:a="http://schemas.openxmlformats.org/drawingml/2006/main" xmlns:r="http://schemas.openxmlformats.org/officeDocument/2006/relationships" xmlns:p="http://schemas.openxmlformats.org/presentationml/2006/main">
   <p:cSld>
     <p:spTree>
       <p:nvGrpSpPr>
@@ -978,7 +837,7 @@
         <p:nvSpPr>
           <p:cNvPr id="2" name="Slide Image Placeholder 1"/>
           <p:cNvSpPr>
-            <a:spLocks noGrp="1"/>
+            <a:spLocks noGrp="1" noRot="1" noChangeAspect="1"/>
           </p:cNvSpPr>
           <p:nvPr>
             <p:ph type="sldImg" idx="2"/>
@@ -993,7 +852,7 @@
             <a:spLocks noGrp="1"/>
           </p:cNvSpPr>
           <p:nvPr>
-            <p:ph type="body" idx="3" sz="quarter"/>
+            <p:ph type="body" sz="quarter" idx="3"/>
           </p:nvPr>
         </p:nvSpPr>
         <p:spPr/>
@@ -1041,7 +900,7 @@
             <a:spLocks noGrp="1"/>
           </p:cNvSpPr>
           <p:nvPr>
-            <p:ph type="sldNum" idx="5" sz="quarter"/>
+            <p:ph type="sldNum" sz="quarter" idx="5"/>
           </p:nvPr>
         </p:nvSpPr>
         <p:spPr/>
@@ -1055,7 +914,7 @@
 </file>
 
 <file path=ppt/notesSlides/notesSlide15.xml><?xml version="1.0" encoding="utf-8"?>
-<p:notes xmlns:a="http://schemas.openxmlformats.org/drawingml/2006/main" xmlns:p="http://schemas.openxmlformats.org/presentationml/2006/main" xmlns:r="http://schemas.openxmlformats.org/officeDocument/2006/relationships">
+<p:notes xmlns:a="http://schemas.openxmlformats.org/drawingml/2006/main" xmlns:r="http://schemas.openxmlformats.org/officeDocument/2006/relationships" xmlns:p="http://schemas.openxmlformats.org/presentationml/2006/main">
   <p:cSld>
     <p:spTree>
       <p:nvGrpSpPr>
@@ -1075,7 +934,7 @@
         <p:nvSpPr>
           <p:cNvPr id="2" name="Slide Image Placeholder 1"/>
           <p:cNvSpPr>
-            <a:spLocks noGrp="1"/>
+            <a:spLocks noGrp="1" noRot="1" noChangeAspect="1"/>
           </p:cNvSpPr>
           <p:nvPr>
             <p:ph type="sldImg" idx="2"/>
@@ -1090,7 +949,7 @@
             <a:spLocks noGrp="1"/>
           </p:cNvSpPr>
           <p:nvPr>
-            <p:ph type="body" idx="3" sz="quarter"/>
+            <p:ph type="body" sz="quarter" idx="3"/>
           </p:nvPr>
         </p:nvSpPr>
         <p:spPr/>
@@ -1130,7 +989,7 @@
             <a:spLocks noGrp="1"/>
           </p:cNvSpPr>
           <p:nvPr>
-            <p:ph type="sldNum" idx="5" sz="quarter"/>
+            <p:ph type="sldNum" sz="quarter" idx="5"/>
           </p:nvPr>
         </p:nvSpPr>
         <p:spPr/>
@@ -1144,7 +1003,7 @@
 </file>
 
 <file path=ppt/notesSlides/notesSlide16.xml><?xml version="1.0" encoding="utf-8"?>
-<p:notes xmlns:a="http://schemas.openxmlformats.org/drawingml/2006/main" xmlns:p="http://schemas.openxmlformats.org/presentationml/2006/main" xmlns:r="http://schemas.openxmlformats.org/officeDocument/2006/relationships">
+<p:notes xmlns:a="http://schemas.openxmlformats.org/drawingml/2006/main" xmlns:r="http://schemas.openxmlformats.org/officeDocument/2006/relationships" xmlns:p="http://schemas.openxmlformats.org/presentationml/2006/main">
   <p:cSld>
     <p:spTree>
       <p:nvGrpSpPr>
@@ -1164,7 +1023,7 @@
         <p:nvSpPr>
           <p:cNvPr id="2" name="Slide Image Placeholder 1"/>
           <p:cNvSpPr>
-            <a:spLocks noGrp="1"/>
+            <a:spLocks noGrp="1" noRot="1" noChangeAspect="1"/>
           </p:cNvSpPr>
           <p:nvPr>
             <p:ph type="sldImg" idx="2"/>
@@ -1179,7 +1038,7 @@
             <a:spLocks noGrp="1"/>
           </p:cNvSpPr>
           <p:nvPr>
-            <p:ph type="body" idx="3" sz="quarter"/>
+            <p:ph type="body" sz="quarter" idx="3"/>
           </p:nvPr>
         </p:nvSpPr>
         <p:spPr/>
@@ -1235,7 +1094,7 @@
             <a:spLocks noGrp="1"/>
           </p:cNvSpPr>
           <p:nvPr>
-            <p:ph type="sldNum" idx="5" sz="quarter"/>
+            <p:ph type="sldNum" sz="quarter" idx="5"/>
           </p:nvPr>
         </p:nvSpPr>
         <p:spPr/>
@@ -1249,7 +1108,7 @@
 </file>
 
 <file path=ppt/notesSlides/notesSlide17.xml><?xml version="1.0" encoding="utf-8"?>
-<p:notes xmlns:a="http://schemas.openxmlformats.org/drawingml/2006/main" xmlns:p="http://schemas.openxmlformats.org/presentationml/2006/main" xmlns:r="http://schemas.openxmlformats.org/officeDocument/2006/relationships">
+<p:notes xmlns:a="http://schemas.openxmlformats.org/drawingml/2006/main" xmlns:r="http://schemas.openxmlformats.org/officeDocument/2006/relationships" xmlns:p="http://schemas.openxmlformats.org/presentationml/2006/main">
   <p:cSld>
     <p:spTree>
       <p:nvGrpSpPr>
@@ -1269,7 +1128,7 @@
         <p:nvSpPr>
           <p:cNvPr id="2" name="Slide Image Placeholder 1"/>
           <p:cNvSpPr>
-            <a:spLocks noGrp="1"/>
+            <a:spLocks noGrp="1" noRot="1" noChangeAspect="1"/>
           </p:cNvSpPr>
           <p:nvPr>
             <p:ph type="sldImg" idx="2"/>
@@ -1284,7 +1143,7 @@
             <a:spLocks noGrp="1"/>
           </p:cNvSpPr>
           <p:nvPr>
-            <p:ph type="body" idx="3" sz="quarter"/>
+            <p:ph type="body" sz="quarter" idx="3"/>
           </p:nvPr>
         </p:nvSpPr>
         <p:spPr/>
@@ -1332,7 +1191,7 @@
             <a:spLocks noGrp="1"/>
           </p:cNvSpPr>
           <p:nvPr>
-            <p:ph type="sldNum" idx="5" sz="quarter"/>
+            <p:ph type="sldNum" sz="quarter" idx="5"/>
           </p:nvPr>
         </p:nvSpPr>
         <p:spPr/>
@@ -1346,7 +1205,7 @@
 </file>
 
 <file path=ppt/notesSlides/notesSlide18.xml><?xml version="1.0" encoding="utf-8"?>
-<p:notes xmlns:a="http://schemas.openxmlformats.org/drawingml/2006/main" xmlns:p="http://schemas.openxmlformats.org/presentationml/2006/main" xmlns:r="http://schemas.openxmlformats.org/officeDocument/2006/relationships">
+<p:notes xmlns:a="http://schemas.openxmlformats.org/drawingml/2006/main" xmlns:r="http://schemas.openxmlformats.org/officeDocument/2006/relationships" xmlns:p="http://schemas.openxmlformats.org/presentationml/2006/main">
   <p:cSld>
     <p:spTree>
       <p:nvGrpSpPr>
@@ -1366,7 +1225,7 @@
         <p:nvSpPr>
           <p:cNvPr id="2" name="Slide Image Placeholder 1"/>
           <p:cNvSpPr>
-            <a:spLocks noGrp="1"/>
+            <a:spLocks noGrp="1" noRot="1" noChangeAspect="1"/>
           </p:cNvSpPr>
           <p:nvPr>
             <p:ph type="sldImg" idx="2"/>
@@ -1381,7 +1240,7 @@
             <a:spLocks noGrp="1"/>
           </p:cNvSpPr>
           <p:nvPr>
-            <p:ph type="body" idx="3" sz="quarter"/>
+            <p:ph type="body" sz="quarter" idx="3"/>
           </p:nvPr>
         </p:nvSpPr>
         <p:spPr/>
@@ -1390,7 +1249,7 @@
           <a:lstStyle/>
           <a:p>
             <a:r>
-              <a:rPr sz="1200">
+              <a:rPr sz="1200" dirty="0">
                 <a:latin typeface="Calibri"/>
               </a:rPr>
               <a:t>This is a reference page, not a teaching slide. Point at it and tell them where to find it again.</a:t>
@@ -1398,7 +1257,7 @@
           </a:p>
           <a:p>
             <a:r>
-              <a:rPr sz="1200">
+              <a:rPr sz="1200" dirty="0">
                 <a:latin typeface="Calibri"/>
               </a:rPr>
               <a:t>The full ESP32 has 38 pins. These are the ones wired to something on this board, which is the only list they need.</a:t>
@@ -1406,7 +1265,7 @@
           </a:p>
           <a:p>
             <a:r>
-              <a:rPr sz="1200">
+              <a:rPr sz="1200" dirty="0">
                 <a:latin typeface="Calibri"/>
               </a:rPr>
               <a:t>The motor pin numbers come straight out of the sketch, so the slide cannot disagree with the file.</a:t>
@@ -1414,18 +1273,10 @@
           </a:p>
           <a:p>
             <a:r>
-              <a:rPr sz="1200">
+              <a:rPr sz="1200" dirty="0">
                 <a:latin typeface="Calibri"/>
               </a:rPr>
               <a:t>The two facts worth saying out loud: GPIO 34 to 39 are INPUT ONLY and have no internal pull-up, and GPIO 0 is the BOOT button, so holding it down at reset does something special.</a:t>
-            </a:r>
-          </a:p>
-          <a:p>
-            <a:r>
-              <a:rPr sz="1200">
-                <a:latin typeface="Calibri"/>
-              </a:rPr>
-              <a:t>Worth printing and taping inside the lid of the parts box.</a:t>
             </a:r>
           </a:p>
         </p:txBody>
@@ -1437,7 +1288,7 @@
             <a:spLocks noGrp="1"/>
           </p:cNvSpPr>
           <p:nvPr>
-            <p:ph type="sldNum" idx="5" sz="quarter"/>
+            <p:ph type="sldNum" sz="quarter" idx="5"/>
           </p:nvPr>
         </p:nvSpPr>
         <p:spPr/>
@@ -1451,7 +1302,7 @@
 </file>
 
 <file path=ppt/notesSlides/notesSlide19.xml><?xml version="1.0" encoding="utf-8"?>
-<p:notes xmlns:a="http://schemas.openxmlformats.org/drawingml/2006/main" xmlns:p="http://schemas.openxmlformats.org/presentationml/2006/main" xmlns:r="http://schemas.openxmlformats.org/officeDocument/2006/relationships">
+<p:notes xmlns:a="http://schemas.openxmlformats.org/drawingml/2006/main" xmlns:r="http://schemas.openxmlformats.org/officeDocument/2006/relationships" xmlns:p="http://schemas.openxmlformats.org/presentationml/2006/main">
   <p:cSld>
     <p:spTree>
       <p:nvGrpSpPr>
@@ -1471,7 +1322,7 @@
         <p:nvSpPr>
           <p:cNvPr id="2" name="Slide Image Placeholder 1"/>
           <p:cNvSpPr>
-            <a:spLocks noGrp="1"/>
+            <a:spLocks noGrp="1" noRot="1" noChangeAspect="1"/>
           </p:cNvSpPr>
           <p:nvPr>
             <p:ph type="sldImg" idx="2"/>
@@ -1486,7 +1337,7 @@
             <a:spLocks noGrp="1"/>
           </p:cNvSpPr>
           <p:nvPr>
-            <p:ph type="body" idx="3" sz="quarter"/>
+            <p:ph type="body" sz="quarter" idx="3"/>
           </p:nvPr>
         </p:nvSpPr>
         <p:spPr/>
@@ -1534,7 +1385,7 @@
             <a:spLocks noGrp="1"/>
           </p:cNvSpPr>
           <p:nvPr>
-            <p:ph type="sldNum" idx="5" sz="quarter"/>
+            <p:ph type="sldNum" sz="quarter" idx="5"/>
           </p:nvPr>
         </p:nvSpPr>
         <p:spPr/>
@@ -1548,7 +1399,7 @@
 </file>
 
 <file path=ppt/notesSlides/notesSlide2.xml><?xml version="1.0" encoding="utf-8"?>
-<p:notes xmlns:a="http://schemas.openxmlformats.org/drawingml/2006/main" xmlns:p="http://schemas.openxmlformats.org/presentationml/2006/main" xmlns:r="http://schemas.openxmlformats.org/officeDocument/2006/relationships">
+<p:notes xmlns:a="http://schemas.openxmlformats.org/drawingml/2006/main" xmlns:r="http://schemas.openxmlformats.org/officeDocument/2006/relationships" xmlns:p="http://schemas.openxmlformats.org/presentationml/2006/main">
   <p:cSld>
     <p:spTree>
       <p:nvGrpSpPr>
@@ -1568,7 +1419,7 @@
         <p:nvSpPr>
           <p:cNvPr id="2" name="Slide Image Placeholder 1"/>
           <p:cNvSpPr>
-            <a:spLocks noGrp="1"/>
+            <a:spLocks noGrp="1" noRot="1" noChangeAspect="1"/>
           </p:cNvSpPr>
           <p:nvPr>
             <p:ph type="sldImg" idx="2"/>
@@ -1583,7 +1434,7 @@
             <a:spLocks noGrp="1"/>
           </p:cNvSpPr>
           <p:nvPr>
-            <p:ph type="body" idx="3" sz="quarter"/>
+            <p:ph type="body" sz="quarter" idx="3"/>
           </p:nvPr>
         </p:nvSpPr>
         <p:spPr/>
@@ -1592,7 +1443,7 @@
           <a:lstStyle/>
           <a:p>
             <a:r>
-              <a:rPr sz="1200">
+              <a:rPr sz="1200" dirty="0">
                 <a:latin typeface="Calibri"/>
               </a:rPr>
               <a:t>Read these out. It takes forty seconds and it tells the room what success looks like.</a:t>
@@ -1600,7 +1451,7 @@
           </a:p>
           <a:p>
             <a:r>
-              <a:rPr sz="1200">
+              <a:rPr sz="1200" dirty="0">
                 <a:latin typeface="Calibri"/>
               </a:rPr>
               <a:t>Come back to this slide in the last five minutes and ask them to score themselves against it. Anything nobody can do is what you open with next lesson.</a:t>
@@ -1608,11 +1459,20 @@
           </a:p>
           <a:p>
             <a:r>
-              <a:rPr sz="1200">
+              <a:rPr sz="1200" dirty="0">
                 <a:latin typeface="Calibri"/>
               </a:rPr>
               <a:t>Objective four - saying why the resistor is there - is the one that separates following instructions from understanding. Watch for it.</a:t>
             </a:r>
+            <a:r>
+              <a:rPr lang="en-US" sz="1200" dirty="0">
+                <a:latin typeface="Calibri"/>
+              </a:rPr>
+              <a:t> Please raise your hand if you have experience with Arduino, ESP-32, C++ programming, Ohm’s Law.</a:t>
+            </a:r>
+            <a:endParaRPr sz="1200" dirty="0">
+              <a:latin typeface="Calibri"/>
+            </a:endParaRPr>
           </a:p>
         </p:txBody>
       </p:sp>
@@ -1623,7 +1483,7 @@
             <a:spLocks noGrp="1"/>
           </p:cNvSpPr>
           <p:nvPr>
-            <p:ph type="sldNum" idx="5" sz="quarter"/>
+            <p:ph type="sldNum" sz="quarter" idx="5"/>
           </p:nvPr>
         </p:nvSpPr>
         <p:spPr/>
@@ -1637,7 +1497,7 @@
 </file>
 
 <file path=ppt/notesSlides/notesSlide20.xml><?xml version="1.0" encoding="utf-8"?>
-<p:notes xmlns:a="http://schemas.openxmlformats.org/drawingml/2006/main" xmlns:p="http://schemas.openxmlformats.org/presentationml/2006/main" xmlns:r="http://schemas.openxmlformats.org/officeDocument/2006/relationships">
+<p:notes xmlns:a="http://schemas.openxmlformats.org/drawingml/2006/main" xmlns:r="http://schemas.openxmlformats.org/officeDocument/2006/relationships" xmlns:p="http://schemas.openxmlformats.org/presentationml/2006/main">
   <p:cSld>
     <p:spTree>
       <p:nvGrpSpPr>
@@ -1657,7 +1517,7 @@
         <p:nvSpPr>
           <p:cNvPr id="2" name="Slide Image Placeholder 1"/>
           <p:cNvSpPr>
-            <a:spLocks noGrp="1"/>
+            <a:spLocks noGrp="1" noRot="1" noChangeAspect="1"/>
           </p:cNvSpPr>
           <p:nvPr>
             <p:ph type="sldImg" idx="2"/>
@@ -1672,7 +1532,7 @@
             <a:spLocks noGrp="1"/>
           </p:cNvSpPr>
           <p:nvPr>
-            <p:ph type="body" idx="3" sz="quarter"/>
+            <p:ph type="body" sz="quarter" idx="3"/>
           </p:nvPr>
         </p:nvSpPr>
         <p:spPr/>
@@ -1720,7 +1580,7 @@
             <a:spLocks noGrp="1"/>
           </p:cNvSpPr>
           <p:nvPr>
-            <p:ph type="sldNum" idx="5" sz="quarter"/>
+            <p:ph type="sldNum" sz="quarter" idx="5"/>
           </p:nvPr>
         </p:nvSpPr>
         <p:spPr/>
@@ -1734,7 +1594,7 @@
 </file>
 
 <file path=ppt/notesSlides/notesSlide21.xml><?xml version="1.0" encoding="utf-8"?>
-<p:notes xmlns:a="http://schemas.openxmlformats.org/drawingml/2006/main" xmlns:p="http://schemas.openxmlformats.org/presentationml/2006/main" xmlns:r="http://schemas.openxmlformats.org/officeDocument/2006/relationships">
+<p:notes xmlns:a="http://schemas.openxmlformats.org/drawingml/2006/main" xmlns:r="http://schemas.openxmlformats.org/officeDocument/2006/relationships" xmlns:p="http://schemas.openxmlformats.org/presentationml/2006/main">
   <p:cSld>
     <p:spTree>
       <p:nvGrpSpPr>
@@ -1754,7 +1614,7 @@
         <p:nvSpPr>
           <p:cNvPr id="2" name="Slide Image Placeholder 1"/>
           <p:cNvSpPr>
-            <a:spLocks noGrp="1"/>
+            <a:spLocks noGrp="1" noRot="1" noChangeAspect="1"/>
           </p:cNvSpPr>
           <p:nvPr>
             <p:ph type="sldImg" idx="2"/>
@@ -1769,7 +1629,7 @@
             <a:spLocks noGrp="1"/>
           </p:cNvSpPr>
           <p:nvPr>
-            <p:ph type="body" idx="3" sz="quarter"/>
+            <p:ph type="body" sz="quarter" idx="3"/>
           </p:nvPr>
         </p:nvSpPr>
         <p:spPr/>
@@ -1817,7 +1677,7 @@
             <a:spLocks noGrp="1"/>
           </p:cNvSpPr>
           <p:nvPr>
-            <p:ph type="sldNum" idx="5" sz="quarter"/>
+            <p:ph type="sldNum" sz="quarter" idx="5"/>
           </p:nvPr>
         </p:nvSpPr>
         <p:spPr/>
@@ -1831,7 +1691,7 @@
 </file>
 
 <file path=ppt/notesSlides/notesSlide22.xml><?xml version="1.0" encoding="utf-8"?>
-<p:notes xmlns:a="http://schemas.openxmlformats.org/drawingml/2006/main" xmlns:p="http://schemas.openxmlformats.org/presentationml/2006/main" xmlns:r="http://schemas.openxmlformats.org/officeDocument/2006/relationships">
+<p:notes xmlns:a="http://schemas.openxmlformats.org/drawingml/2006/main" xmlns:r="http://schemas.openxmlformats.org/officeDocument/2006/relationships" xmlns:p="http://schemas.openxmlformats.org/presentationml/2006/main">
   <p:cSld>
     <p:spTree>
       <p:nvGrpSpPr>
@@ -1851,7 +1711,7 @@
         <p:nvSpPr>
           <p:cNvPr id="2" name="Slide Image Placeholder 1"/>
           <p:cNvSpPr>
-            <a:spLocks noGrp="1"/>
+            <a:spLocks noGrp="1" noRot="1" noChangeAspect="1"/>
           </p:cNvSpPr>
           <p:nvPr>
             <p:ph type="sldImg" idx="2"/>
@@ -1866,7 +1726,7 @@
             <a:spLocks noGrp="1"/>
           </p:cNvSpPr>
           <p:nvPr>
-            <p:ph type="body" idx="3" sz="quarter"/>
+            <p:ph type="body" sz="quarter" idx="3"/>
           </p:nvPr>
         </p:nvSpPr>
         <p:spPr/>
@@ -1906,7 +1766,7 @@
             <a:spLocks noGrp="1"/>
           </p:cNvSpPr>
           <p:nvPr>
-            <p:ph type="sldNum" idx="5" sz="quarter"/>
+            <p:ph type="sldNum" sz="quarter" idx="5"/>
           </p:nvPr>
         </p:nvSpPr>
         <p:spPr/>
@@ -1920,7 +1780,7 @@
 </file>
 
 <file path=ppt/notesSlides/notesSlide23.xml><?xml version="1.0" encoding="utf-8"?>
-<p:notes xmlns:a="http://schemas.openxmlformats.org/drawingml/2006/main" xmlns:p="http://schemas.openxmlformats.org/presentationml/2006/main" xmlns:r="http://schemas.openxmlformats.org/officeDocument/2006/relationships">
+<p:notes xmlns:a="http://schemas.openxmlformats.org/drawingml/2006/main" xmlns:r="http://schemas.openxmlformats.org/officeDocument/2006/relationships" xmlns:p="http://schemas.openxmlformats.org/presentationml/2006/main">
   <p:cSld>
     <p:spTree>
       <p:nvGrpSpPr>
@@ -1940,7 +1800,7 @@
         <p:nvSpPr>
           <p:cNvPr id="2" name="Slide Image Placeholder 1"/>
           <p:cNvSpPr>
-            <a:spLocks noGrp="1"/>
+            <a:spLocks noGrp="1" noRot="1" noChangeAspect="1"/>
           </p:cNvSpPr>
           <p:nvPr>
             <p:ph type="sldImg" idx="2"/>
@@ -1955,7 +1815,7 @@
             <a:spLocks noGrp="1"/>
           </p:cNvSpPr>
           <p:nvPr>
-            <p:ph type="body" idx="3" sz="quarter"/>
+            <p:ph type="body" sz="quarter" idx="3"/>
           </p:nvPr>
         </p:nvSpPr>
         <p:spPr/>
@@ -1995,7 +1855,7 @@
             <a:spLocks noGrp="1"/>
           </p:cNvSpPr>
           <p:nvPr>
-            <p:ph type="sldNum" idx="5" sz="quarter"/>
+            <p:ph type="sldNum" sz="quarter" idx="5"/>
           </p:nvPr>
         </p:nvSpPr>
         <p:spPr/>
@@ -2009,7 +1869,7 @@
 </file>
 
 <file path=ppt/notesSlides/notesSlide24.xml><?xml version="1.0" encoding="utf-8"?>
-<p:notes xmlns:a="http://schemas.openxmlformats.org/drawingml/2006/main" xmlns:p="http://schemas.openxmlformats.org/presentationml/2006/main" xmlns:r="http://schemas.openxmlformats.org/officeDocument/2006/relationships">
+<p:notes xmlns:a="http://schemas.openxmlformats.org/drawingml/2006/main" xmlns:r="http://schemas.openxmlformats.org/officeDocument/2006/relationships" xmlns:p="http://schemas.openxmlformats.org/presentationml/2006/main">
   <p:cSld>
     <p:spTree>
       <p:nvGrpSpPr>
@@ -2029,7 +1889,7 @@
         <p:nvSpPr>
           <p:cNvPr id="2" name="Slide Image Placeholder 1"/>
           <p:cNvSpPr>
-            <a:spLocks noGrp="1"/>
+            <a:spLocks noGrp="1" noRot="1" noChangeAspect="1"/>
           </p:cNvSpPr>
           <p:nvPr>
             <p:ph type="sldImg" idx="2"/>
@@ -2044,7 +1904,7 @@
             <a:spLocks noGrp="1"/>
           </p:cNvSpPr>
           <p:nvPr>
-            <p:ph type="body" idx="3" sz="quarter"/>
+            <p:ph type="body" sz="quarter" idx="3"/>
           </p:nvPr>
         </p:nvSpPr>
         <p:spPr/>
@@ -2124,7 +1984,7 @@
             <a:spLocks noGrp="1"/>
           </p:cNvSpPr>
           <p:nvPr>
-            <p:ph type="sldNum" idx="5" sz="quarter"/>
+            <p:ph type="sldNum" sz="quarter" idx="5"/>
           </p:nvPr>
         </p:nvSpPr>
         <p:spPr/>
@@ -2138,7 +1998,7 @@
 </file>
 
 <file path=ppt/notesSlides/notesSlide25.xml><?xml version="1.0" encoding="utf-8"?>
-<p:notes xmlns:a="http://schemas.openxmlformats.org/drawingml/2006/main" xmlns:p="http://schemas.openxmlformats.org/presentationml/2006/main" xmlns:r="http://schemas.openxmlformats.org/officeDocument/2006/relationships">
+<p:notes xmlns:a="http://schemas.openxmlformats.org/drawingml/2006/main" xmlns:r="http://schemas.openxmlformats.org/officeDocument/2006/relationships" xmlns:p="http://schemas.openxmlformats.org/presentationml/2006/main">
   <p:cSld>
     <p:spTree>
       <p:nvGrpSpPr>
@@ -2158,7 +2018,7 @@
         <p:nvSpPr>
           <p:cNvPr id="2" name="Slide Image Placeholder 1"/>
           <p:cNvSpPr>
-            <a:spLocks noGrp="1"/>
+            <a:spLocks noGrp="1" noRot="1" noChangeAspect="1"/>
           </p:cNvSpPr>
           <p:nvPr>
             <p:ph type="sldImg" idx="2"/>
@@ -2173,7 +2033,7 @@
             <a:spLocks noGrp="1"/>
           </p:cNvSpPr>
           <p:nvPr>
-            <p:ph type="body" idx="3" sz="quarter"/>
+            <p:ph type="body" sz="quarter" idx="3"/>
           </p:nvPr>
         </p:nvSpPr>
         <p:spPr/>
@@ -2221,7 +2081,7 @@
             <a:spLocks noGrp="1"/>
           </p:cNvSpPr>
           <p:nvPr>
-            <p:ph type="sldNum" idx="5" sz="quarter"/>
+            <p:ph type="sldNum" sz="quarter" idx="5"/>
           </p:nvPr>
         </p:nvSpPr>
         <p:spPr/>
@@ -2235,7 +2095,7 @@
 </file>
 
 <file path=ppt/notesSlides/notesSlide26.xml><?xml version="1.0" encoding="utf-8"?>
-<p:notes xmlns:a="http://schemas.openxmlformats.org/drawingml/2006/main" xmlns:p="http://schemas.openxmlformats.org/presentationml/2006/main" xmlns:r="http://schemas.openxmlformats.org/officeDocument/2006/relationships">
+<p:notes xmlns:a="http://schemas.openxmlformats.org/drawingml/2006/main" xmlns:r="http://schemas.openxmlformats.org/officeDocument/2006/relationships" xmlns:p="http://schemas.openxmlformats.org/presentationml/2006/main">
   <p:cSld>
     <p:spTree>
       <p:nvGrpSpPr>
@@ -2255,7 +2115,7 @@
         <p:nvSpPr>
           <p:cNvPr id="2" name="Slide Image Placeholder 1"/>
           <p:cNvSpPr>
-            <a:spLocks noGrp="1"/>
+            <a:spLocks noGrp="1" noRot="1" noChangeAspect="1"/>
           </p:cNvSpPr>
           <p:nvPr>
             <p:ph type="sldImg" idx="2"/>
@@ -2270,7 +2130,7 @@
             <a:spLocks noGrp="1"/>
           </p:cNvSpPr>
           <p:nvPr>
-            <p:ph type="body" idx="3" sz="quarter"/>
+            <p:ph type="body" sz="quarter" idx="3"/>
           </p:nvPr>
         </p:nvSpPr>
         <p:spPr/>
@@ -2310,7 +2170,7 @@
             <a:spLocks noGrp="1"/>
           </p:cNvSpPr>
           <p:nvPr>
-            <p:ph type="sldNum" idx="5" sz="quarter"/>
+            <p:ph type="sldNum" sz="quarter" idx="5"/>
           </p:nvPr>
         </p:nvSpPr>
         <p:spPr/>
@@ -2324,7 +2184,7 @@
 </file>
 
 <file path=ppt/notesSlides/notesSlide27.xml><?xml version="1.0" encoding="utf-8"?>
-<p:notes xmlns:a="http://schemas.openxmlformats.org/drawingml/2006/main" xmlns:p="http://schemas.openxmlformats.org/presentationml/2006/main" xmlns:r="http://schemas.openxmlformats.org/officeDocument/2006/relationships">
+<p:notes xmlns:a="http://schemas.openxmlformats.org/drawingml/2006/main" xmlns:r="http://schemas.openxmlformats.org/officeDocument/2006/relationships" xmlns:p="http://schemas.openxmlformats.org/presentationml/2006/main">
   <p:cSld>
     <p:spTree>
       <p:nvGrpSpPr>
@@ -2344,7 +2204,7 @@
         <p:nvSpPr>
           <p:cNvPr id="2" name="Slide Image Placeholder 1"/>
           <p:cNvSpPr>
-            <a:spLocks noGrp="1"/>
+            <a:spLocks noGrp="1" noRot="1" noChangeAspect="1"/>
           </p:cNvSpPr>
           <p:nvPr>
             <p:ph type="sldImg" idx="2"/>
@@ -2359,7 +2219,7 @@
             <a:spLocks noGrp="1"/>
           </p:cNvSpPr>
           <p:nvPr>
-            <p:ph type="body" idx="3" sz="quarter"/>
+            <p:ph type="body" sz="quarter" idx="3"/>
           </p:nvPr>
         </p:nvSpPr>
         <p:spPr/>
@@ -2399,7 +2259,7 @@
             <a:spLocks noGrp="1"/>
           </p:cNvSpPr>
           <p:nvPr>
-            <p:ph type="sldNum" idx="5" sz="quarter"/>
+            <p:ph type="sldNum" sz="quarter" idx="5"/>
           </p:nvPr>
         </p:nvSpPr>
         <p:spPr/>
@@ -2413,7 +2273,7 @@
 </file>
 
 <file path=ppt/notesSlides/notesSlide28.xml><?xml version="1.0" encoding="utf-8"?>
-<p:notes xmlns:a="http://schemas.openxmlformats.org/drawingml/2006/main" xmlns:p="http://schemas.openxmlformats.org/presentationml/2006/main" xmlns:r="http://schemas.openxmlformats.org/officeDocument/2006/relationships">
+<p:notes xmlns:a="http://schemas.openxmlformats.org/drawingml/2006/main" xmlns:r="http://schemas.openxmlformats.org/officeDocument/2006/relationships" xmlns:p="http://schemas.openxmlformats.org/presentationml/2006/main">
   <p:cSld>
     <p:spTree>
       <p:nvGrpSpPr>
@@ -2433,7 +2293,7 @@
         <p:nvSpPr>
           <p:cNvPr id="2" name="Slide Image Placeholder 1"/>
           <p:cNvSpPr>
-            <a:spLocks noGrp="1"/>
+            <a:spLocks noGrp="1" noRot="1" noChangeAspect="1"/>
           </p:cNvSpPr>
           <p:nvPr>
             <p:ph type="sldImg" idx="2"/>
@@ -2448,7 +2308,7 @@
             <a:spLocks noGrp="1"/>
           </p:cNvSpPr>
           <p:nvPr>
-            <p:ph type="body" idx="3" sz="quarter"/>
+            <p:ph type="body" sz="quarter" idx="3"/>
           </p:nvPr>
         </p:nvSpPr>
         <p:spPr/>
@@ -2488,7 +2348,7 @@
             <a:spLocks noGrp="1"/>
           </p:cNvSpPr>
           <p:nvPr>
-            <p:ph type="sldNum" idx="5" sz="quarter"/>
+            <p:ph type="sldNum" sz="quarter" idx="5"/>
           </p:nvPr>
         </p:nvSpPr>
         <p:spPr/>
@@ -2502,7 +2362,7 @@
 </file>
 
 <file path=ppt/notesSlides/notesSlide29.xml><?xml version="1.0" encoding="utf-8"?>
-<p:notes xmlns:a="http://schemas.openxmlformats.org/drawingml/2006/main" xmlns:p="http://schemas.openxmlformats.org/presentationml/2006/main" xmlns:r="http://schemas.openxmlformats.org/officeDocument/2006/relationships">
+<p:notes xmlns:a="http://schemas.openxmlformats.org/drawingml/2006/main" xmlns:r="http://schemas.openxmlformats.org/officeDocument/2006/relationships" xmlns:p="http://schemas.openxmlformats.org/presentationml/2006/main">
   <p:cSld>
     <p:spTree>
       <p:nvGrpSpPr>
@@ -2522,7 +2382,7 @@
         <p:nvSpPr>
           <p:cNvPr id="2" name="Slide Image Placeholder 1"/>
           <p:cNvSpPr>
-            <a:spLocks noGrp="1"/>
+            <a:spLocks noGrp="1" noRot="1" noChangeAspect="1"/>
           </p:cNvSpPr>
           <p:nvPr>
             <p:ph type="sldImg" idx="2"/>
@@ -2537,7 +2397,7 @@
             <a:spLocks noGrp="1"/>
           </p:cNvSpPr>
           <p:nvPr>
-            <p:ph type="body" idx="3" sz="quarter"/>
+            <p:ph type="body" sz="quarter" idx="3"/>
           </p:nvPr>
         </p:nvSpPr>
         <p:spPr/>
@@ -2569,7 +2429,7 @@
             <a:spLocks noGrp="1"/>
           </p:cNvSpPr>
           <p:nvPr>
-            <p:ph type="sldNum" idx="5" sz="quarter"/>
+            <p:ph type="sldNum" sz="quarter" idx="5"/>
           </p:nvPr>
         </p:nvSpPr>
         <p:spPr/>
@@ -2583,7 +2443,7 @@
 </file>
 
 <file path=ppt/notesSlides/notesSlide3.xml><?xml version="1.0" encoding="utf-8"?>
-<p:notes xmlns:a="http://schemas.openxmlformats.org/drawingml/2006/main" xmlns:p="http://schemas.openxmlformats.org/presentationml/2006/main" xmlns:r="http://schemas.openxmlformats.org/officeDocument/2006/relationships">
+<p:notes xmlns:a="http://schemas.openxmlformats.org/drawingml/2006/main" xmlns:r="http://schemas.openxmlformats.org/officeDocument/2006/relationships" xmlns:p="http://schemas.openxmlformats.org/presentationml/2006/main">
   <p:cSld>
     <p:spTree>
       <p:nvGrpSpPr>
@@ -2603,7 +2463,7 @@
         <p:nvSpPr>
           <p:cNvPr id="2" name="Slide Image Placeholder 1"/>
           <p:cNvSpPr>
-            <a:spLocks noGrp="1"/>
+            <a:spLocks noGrp="1" noRot="1" noChangeAspect="1"/>
           </p:cNvSpPr>
           <p:nvPr>
             <p:ph type="sldImg" idx="2"/>
@@ -2618,7 +2478,7 @@
             <a:spLocks noGrp="1"/>
           </p:cNvSpPr>
           <p:nvPr>
-            <p:ph type="body" idx="3" sz="quarter"/>
+            <p:ph type="body" sz="quarter" idx="3"/>
           </p:nvPr>
         </p:nvSpPr>
         <p:spPr/>
@@ -2627,7 +2487,7 @@
           <a:lstStyle/>
           <a:p>
             <a:r>
-              <a:rPr sz="1200">
+              <a:rPr sz="1200" dirty="0">
                 <a:latin typeface="Calibri"/>
               </a:rPr>
               <a:t>The tone of the whole course is set in the next two minutes. Interruptions are wanted, not tolerated.</a:t>
@@ -2635,7 +2495,7 @@
           </a:p>
           <a:p>
             <a:r>
-              <a:rPr sz="1200">
+              <a:rPr sz="1200" dirty="0">
                 <a:latin typeface="Calibri"/>
               </a:rPr>
               <a:t>Groups of three: one driving the laptop, one reading the slide out, one on the vehicle. Tell them to swap roles every activity, and mean it.</a:t>
@@ -2643,11 +2503,19 @@
           </a:p>
           <a:p>
             <a:r>
-              <a:rPr sz="1200">
+              <a:rPr sz="1200" dirty="0">
                 <a:latin typeface="Calibri"/>
               </a:rPr>
               <a:t>The last bullet is the important one. Say it slowly. Students who think a misbehaving vehicle means they are bad at this will give up in Lesson 2.</a:t>
             </a:r>
+            <a:endParaRPr lang="en-US" sz="1200" dirty="0">
+              <a:latin typeface="Calibri"/>
+            </a:endParaRPr>
+          </a:p>
+          <a:p>
+            <a:endParaRPr sz="1200" dirty="0">
+              <a:latin typeface="Calibri"/>
+            </a:endParaRPr>
           </a:p>
         </p:txBody>
       </p:sp>
@@ -2658,7 +2526,7 @@
             <a:spLocks noGrp="1"/>
           </p:cNvSpPr>
           <p:nvPr>
-            <p:ph type="sldNum" idx="5" sz="quarter"/>
+            <p:ph type="sldNum" sz="quarter" idx="5"/>
           </p:nvPr>
         </p:nvSpPr>
         <p:spPr/>
@@ -2672,7 +2540,7 @@
 </file>
 
 <file path=ppt/notesSlides/notesSlide30.xml><?xml version="1.0" encoding="utf-8"?>
-<p:notes xmlns:a="http://schemas.openxmlformats.org/drawingml/2006/main" xmlns:p="http://schemas.openxmlformats.org/presentationml/2006/main" xmlns:r="http://schemas.openxmlformats.org/officeDocument/2006/relationships">
+<p:notes xmlns:a="http://schemas.openxmlformats.org/drawingml/2006/main" xmlns:r="http://schemas.openxmlformats.org/officeDocument/2006/relationships" xmlns:p="http://schemas.openxmlformats.org/presentationml/2006/main">
   <p:cSld>
     <p:spTree>
       <p:nvGrpSpPr>
@@ -2692,7 +2560,7 @@
         <p:nvSpPr>
           <p:cNvPr id="2" name="Slide Image Placeholder 1"/>
           <p:cNvSpPr>
-            <a:spLocks noGrp="1"/>
+            <a:spLocks noGrp="1" noRot="1" noChangeAspect="1"/>
           </p:cNvSpPr>
           <p:nvPr>
             <p:ph type="sldImg" idx="2"/>
@@ -2707,7 +2575,7 @@
             <a:spLocks noGrp="1"/>
           </p:cNvSpPr>
           <p:nvPr>
-            <p:ph type="body" idx="3" sz="quarter"/>
+            <p:ph type="body" sz="quarter" idx="3"/>
           </p:nvPr>
         </p:nvSpPr>
         <p:spPr/>
@@ -2755,7 +2623,7 @@
             <a:spLocks noGrp="1"/>
           </p:cNvSpPr>
           <p:nvPr>
-            <p:ph type="sldNum" idx="5" sz="quarter"/>
+            <p:ph type="sldNum" sz="quarter" idx="5"/>
           </p:nvPr>
         </p:nvSpPr>
         <p:spPr/>
@@ -2769,7 +2637,7 @@
 </file>
 
 <file path=ppt/notesSlides/notesSlide31.xml><?xml version="1.0" encoding="utf-8"?>
-<p:notes xmlns:a="http://schemas.openxmlformats.org/drawingml/2006/main" xmlns:p="http://schemas.openxmlformats.org/presentationml/2006/main" xmlns:r="http://schemas.openxmlformats.org/officeDocument/2006/relationships">
+<p:notes xmlns:a="http://schemas.openxmlformats.org/drawingml/2006/main" xmlns:r="http://schemas.openxmlformats.org/officeDocument/2006/relationships" xmlns:p="http://schemas.openxmlformats.org/presentationml/2006/main">
   <p:cSld>
     <p:spTree>
       <p:nvGrpSpPr>
@@ -2789,7 +2657,7 @@
         <p:nvSpPr>
           <p:cNvPr id="2" name="Slide Image Placeholder 1"/>
           <p:cNvSpPr>
-            <a:spLocks noGrp="1"/>
+            <a:spLocks noGrp="1" noRot="1" noChangeAspect="1"/>
           </p:cNvSpPr>
           <p:nvPr>
             <p:ph type="sldImg" idx="2"/>
@@ -2804,7 +2672,7 @@
             <a:spLocks noGrp="1"/>
           </p:cNvSpPr>
           <p:nvPr>
-            <p:ph type="body" idx="3" sz="quarter"/>
+            <p:ph type="body" sz="quarter" idx="3"/>
           </p:nvPr>
         </p:nvSpPr>
         <p:spPr/>
@@ -2836,7 +2704,7 @@
             <a:spLocks noGrp="1"/>
           </p:cNvSpPr>
           <p:nvPr>
-            <p:ph type="sldNum" idx="5" sz="quarter"/>
+            <p:ph type="sldNum" sz="quarter" idx="5"/>
           </p:nvPr>
         </p:nvSpPr>
         <p:spPr/>
@@ -2850,7 +2718,7 @@
 </file>
 
 <file path=ppt/notesSlides/notesSlide32.xml><?xml version="1.0" encoding="utf-8"?>
-<p:notes xmlns:a="http://schemas.openxmlformats.org/drawingml/2006/main" xmlns:p="http://schemas.openxmlformats.org/presentationml/2006/main" xmlns:r="http://schemas.openxmlformats.org/officeDocument/2006/relationships">
+<p:notes xmlns:a="http://schemas.openxmlformats.org/drawingml/2006/main" xmlns:r="http://schemas.openxmlformats.org/officeDocument/2006/relationships" xmlns:p="http://schemas.openxmlformats.org/presentationml/2006/main">
   <p:cSld>
     <p:spTree>
       <p:nvGrpSpPr>
@@ -2870,7 +2738,7 @@
         <p:nvSpPr>
           <p:cNvPr id="2" name="Slide Image Placeholder 1"/>
           <p:cNvSpPr>
-            <a:spLocks noGrp="1"/>
+            <a:spLocks noGrp="1" noRot="1" noChangeAspect="1"/>
           </p:cNvSpPr>
           <p:nvPr>
             <p:ph type="sldImg" idx="2"/>
@@ -2885,7 +2753,7 @@
             <a:spLocks noGrp="1"/>
           </p:cNvSpPr>
           <p:nvPr>
-            <p:ph type="body" idx="3" sz="quarter"/>
+            <p:ph type="body" sz="quarter" idx="3"/>
           </p:nvPr>
         </p:nvSpPr>
         <p:spPr/>
@@ -2917,7 +2785,7 @@
             <a:spLocks noGrp="1"/>
           </p:cNvSpPr>
           <p:nvPr>
-            <p:ph type="sldNum" idx="5" sz="quarter"/>
+            <p:ph type="sldNum" sz="quarter" idx="5"/>
           </p:nvPr>
         </p:nvSpPr>
         <p:spPr/>
@@ -2931,7 +2799,7 @@
 </file>
 
 <file path=ppt/notesSlides/notesSlide33.xml><?xml version="1.0" encoding="utf-8"?>
-<p:notes xmlns:a="http://schemas.openxmlformats.org/drawingml/2006/main" xmlns:p="http://schemas.openxmlformats.org/presentationml/2006/main" xmlns:r="http://schemas.openxmlformats.org/officeDocument/2006/relationships">
+<p:notes xmlns:a="http://schemas.openxmlformats.org/drawingml/2006/main" xmlns:r="http://schemas.openxmlformats.org/officeDocument/2006/relationships" xmlns:p="http://schemas.openxmlformats.org/presentationml/2006/main">
   <p:cSld>
     <p:spTree>
       <p:nvGrpSpPr>
@@ -2951,7 +2819,7 @@
         <p:nvSpPr>
           <p:cNvPr id="2" name="Slide Image Placeholder 1"/>
           <p:cNvSpPr>
-            <a:spLocks noGrp="1"/>
+            <a:spLocks noGrp="1" noRot="1" noChangeAspect="1"/>
           </p:cNvSpPr>
           <p:nvPr>
             <p:ph type="sldImg" idx="2"/>
@@ -2966,7 +2834,7 @@
             <a:spLocks noGrp="1"/>
           </p:cNvSpPr>
           <p:nvPr>
-            <p:ph type="body" idx="3" sz="quarter"/>
+            <p:ph type="body" sz="quarter" idx="3"/>
           </p:nvPr>
         </p:nvSpPr>
         <p:spPr/>
@@ -3030,7 +2898,7 @@
             <a:spLocks noGrp="1"/>
           </p:cNvSpPr>
           <p:nvPr>
-            <p:ph type="sldNum" idx="5" sz="quarter"/>
+            <p:ph type="sldNum" sz="quarter" idx="5"/>
           </p:nvPr>
         </p:nvSpPr>
         <p:spPr/>
@@ -3044,7 +2912,7 @@
 </file>
 
 <file path=ppt/notesSlides/notesSlide34.xml><?xml version="1.0" encoding="utf-8"?>
-<p:notes xmlns:a="http://schemas.openxmlformats.org/drawingml/2006/main" xmlns:p="http://schemas.openxmlformats.org/presentationml/2006/main" xmlns:r="http://schemas.openxmlformats.org/officeDocument/2006/relationships">
+<p:notes xmlns:a="http://schemas.openxmlformats.org/drawingml/2006/main" xmlns:r="http://schemas.openxmlformats.org/officeDocument/2006/relationships" xmlns:p="http://schemas.openxmlformats.org/presentationml/2006/main">
   <p:cSld>
     <p:spTree>
       <p:nvGrpSpPr>
@@ -3064,7 +2932,7 @@
         <p:nvSpPr>
           <p:cNvPr id="2" name="Slide Image Placeholder 1"/>
           <p:cNvSpPr>
-            <a:spLocks noGrp="1"/>
+            <a:spLocks noGrp="1" noRot="1" noChangeAspect="1"/>
           </p:cNvSpPr>
           <p:nvPr>
             <p:ph type="sldImg" idx="2"/>
@@ -3079,7 +2947,7 @@
             <a:spLocks noGrp="1"/>
           </p:cNvSpPr>
           <p:nvPr>
-            <p:ph type="body" idx="3" sz="quarter"/>
+            <p:ph type="body" sz="quarter" idx="3"/>
           </p:nvPr>
         </p:nvSpPr>
         <p:spPr/>
@@ -3111,7 +2979,7 @@
             <a:spLocks noGrp="1"/>
           </p:cNvSpPr>
           <p:nvPr>
-            <p:ph type="sldNum" idx="5" sz="quarter"/>
+            <p:ph type="sldNum" sz="quarter" idx="5"/>
           </p:nvPr>
         </p:nvSpPr>
         <p:spPr/>
@@ -3125,7 +2993,7 @@
 </file>
 
 <file path=ppt/notesSlides/notesSlide35.xml><?xml version="1.0" encoding="utf-8"?>
-<p:notes xmlns:a="http://schemas.openxmlformats.org/drawingml/2006/main" xmlns:p="http://schemas.openxmlformats.org/presentationml/2006/main" xmlns:r="http://schemas.openxmlformats.org/officeDocument/2006/relationships">
+<p:notes xmlns:a="http://schemas.openxmlformats.org/drawingml/2006/main" xmlns:r="http://schemas.openxmlformats.org/officeDocument/2006/relationships" xmlns:p="http://schemas.openxmlformats.org/presentationml/2006/main">
   <p:cSld>
     <p:spTree>
       <p:nvGrpSpPr>
@@ -3145,7 +3013,7 @@
         <p:nvSpPr>
           <p:cNvPr id="2" name="Slide Image Placeholder 1"/>
           <p:cNvSpPr>
-            <a:spLocks noGrp="1"/>
+            <a:spLocks noGrp="1" noRot="1" noChangeAspect="1"/>
           </p:cNvSpPr>
           <p:nvPr>
             <p:ph type="sldImg" idx="2"/>
@@ -3160,7 +3028,7 @@
             <a:spLocks noGrp="1"/>
           </p:cNvSpPr>
           <p:nvPr>
-            <p:ph type="body" idx="3" sz="quarter"/>
+            <p:ph type="body" sz="quarter" idx="3"/>
           </p:nvPr>
         </p:nvSpPr>
         <p:spPr/>
@@ -3208,7 +3076,7 @@
             <a:spLocks noGrp="1"/>
           </p:cNvSpPr>
           <p:nvPr>
-            <p:ph type="sldNum" idx="5" sz="quarter"/>
+            <p:ph type="sldNum" sz="quarter" idx="5"/>
           </p:nvPr>
         </p:nvSpPr>
         <p:spPr/>
@@ -3222,7 +3090,7 @@
 </file>
 
 <file path=ppt/notesSlides/notesSlide36.xml><?xml version="1.0" encoding="utf-8"?>
-<p:notes xmlns:a="http://schemas.openxmlformats.org/drawingml/2006/main" xmlns:p="http://schemas.openxmlformats.org/presentationml/2006/main" xmlns:r="http://schemas.openxmlformats.org/officeDocument/2006/relationships">
+<p:notes xmlns:a="http://schemas.openxmlformats.org/drawingml/2006/main" xmlns:r="http://schemas.openxmlformats.org/officeDocument/2006/relationships" xmlns:p="http://schemas.openxmlformats.org/presentationml/2006/main">
   <p:cSld>
     <p:spTree>
       <p:nvGrpSpPr>
@@ -3242,7 +3110,7 @@
         <p:nvSpPr>
           <p:cNvPr id="2" name="Slide Image Placeholder 1"/>
           <p:cNvSpPr>
-            <a:spLocks noGrp="1"/>
+            <a:spLocks noGrp="1" noRot="1" noChangeAspect="1"/>
           </p:cNvSpPr>
           <p:nvPr>
             <p:ph type="sldImg" idx="2"/>
@@ -3257,7 +3125,7 @@
             <a:spLocks noGrp="1"/>
           </p:cNvSpPr>
           <p:nvPr>
-            <p:ph type="body" idx="3" sz="quarter"/>
+            <p:ph type="body" sz="quarter" idx="3"/>
           </p:nvPr>
         </p:nvSpPr>
         <p:spPr/>
@@ -3305,7 +3173,7 @@
             <a:spLocks noGrp="1"/>
           </p:cNvSpPr>
           <p:nvPr>
-            <p:ph type="sldNum" idx="5" sz="quarter"/>
+            <p:ph type="sldNum" sz="quarter" idx="5"/>
           </p:nvPr>
         </p:nvSpPr>
         <p:spPr/>
@@ -3319,7 +3187,7 @@
 </file>
 
 <file path=ppt/notesSlides/notesSlide37.xml><?xml version="1.0" encoding="utf-8"?>
-<p:notes xmlns:a="http://schemas.openxmlformats.org/drawingml/2006/main" xmlns:p="http://schemas.openxmlformats.org/presentationml/2006/main" xmlns:r="http://schemas.openxmlformats.org/officeDocument/2006/relationships">
+<p:notes xmlns:a="http://schemas.openxmlformats.org/drawingml/2006/main" xmlns:r="http://schemas.openxmlformats.org/officeDocument/2006/relationships" xmlns:p="http://schemas.openxmlformats.org/presentationml/2006/main">
   <p:cSld>
     <p:spTree>
       <p:nvGrpSpPr>
@@ -3339,7 +3207,7 @@
         <p:nvSpPr>
           <p:cNvPr id="2" name="Slide Image Placeholder 1"/>
           <p:cNvSpPr>
-            <a:spLocks noGrp="1"/>
+            <a:spLocks noGrp="1" noRot="1" noChangeAspect="1"/>
           </p:cNvSpPr>
           <p:nvPr>
             <p:ph type="sldImg" idx="2"/>
@@ -3354,7 +3222,7 @@
             <a:spLocks noGrp="1"/>
           </p:cNvSpPr>
           <p:nvPr>
-            <p:ph type="body" idx="3" sz="quarter"/>
+            <p:ph type="body" sz="quarter" idx="3"/>
           </p:nvPr>
         </p:nvSpPr>
         <p:spPr/>
@@ -3402,7 +3270,7 @@
             <a:spLocks noGrp="1"/>
           </p:cNvSpPr>
           <p:nvPr>
-            <p:ph type="sldNum" idx="5" sz="quarter"/>
+            <p:ph type="sldNum" sz="quarter" idx="5"/>
           </p:nvPr>
         </p:nvSpPr>
         <p:spPr/>
@@ -3416,7 +3284,7 @@
 </file>
 
 <file path=ppt/notesSlides/notesSlide38.xml><?xml version="1.0" encoding="utf-8"?>
-<p:notes xmlns:a="http://schemas.openxmlformats.org/drawingml/2006/main" xmlns:p="http://schemas.openxmlformats.org/presentationml/2006/main" xmlns:r="http://schemas.openxmlformats.org/officeDocument/2006/relationships">
+<p:notes xmlns:a="http://schemas.openxmlformats.org/drawingml/2006/main" xmlns:r="http://schemas.openxmlformats.org/officeDocument/2006/relationships" xmlns:p="http://schemas.openxmlformats.org/presentationml/2006/main">
   <p:cSld>
     <p:spTree>
       <p:nvGrpSpPr>
@@ -3436,7 +3304,7 @@
         <p:nvSpPr>
           <p:cNvPr id="2" name="Slide Image Placeholder 1"/>
           <p:cNvSpPr>
-            <a:spLocks noGrp="1"/>
+            <a:spLocks noGrp="1" noRot="1" noChangeAspect="1"/>
           </p:cNvSpPr>
           <p:nvPr>
             <p:ph type="sldImg" idx="2"/>
@@ -3451,7 +3319,7 @@
             <a:spLocks noGrp="1"/>
           </p:cNvSpPr>
           <p:nvPr>
-            <p:ph type="body" idx="3" sz="quarter"/>
+            <p:ph type="body" sz="quarter" idx="3"/>
           </p:nvPr>
         </p:nvSpPr>
         <p:spPr/>
@@ -3483,7 +3351,7 @@
             <a:spLocks noGrp="1"/>
           </p:cNvSpPr>
           <p:nvPr>
-            <p:ph type="sldNum" idx="5" sz="quarter"/>
+            <p:ph type="sldNum" sz="quarter" idx="5"/>
           </p:nvPr>
         </p:nvSpPr>
         <p:spPr/>
@@ -3497,7 +3365,7 @@
 </file>
 
 <file path=ppt/notesSlides/notesSlide39.xml><?xml version="1.0" encoding="utf-8"?>
-<p:notes xmlns:a="http://schemas.openxmlformats.org/drawingml/2006/main" xmlns:p="http://schemas.openxmlformats.org/presentationml/2006/main" xmlns:r="http://schemas.openxmlformats.org/officeDocument/2006/relationships">
+<p:notes xmlns:a="http://schemas.openxmlformats.org/drawingml/2006/main" xmlns:r="http://schemas.openxmlformats.org/officeDocument/2006/relationships" xmlns:p="http://schemas.openxmlformats.org/presentationml/2006/main">
   <p:cSld>
     <p:spTree>
       <p:nvGrpSpPr>
@@ -3517,7 +3385,7 @@
         <p:nvSpPr>
           <p:cNvPr id="2" name="Slide Image Placeholder 1"/>
           <p:cNvSpPr>
-            <a:spLocks noGrp="1"/>
+            <a:spLocks noGrp="1" noRot="1" noChangeAspect="1"/>
           </p:cNvSpPr>
           <p:nvPr>
             <p:ph type="sldImg" idx="2"/>
@@ -3532,7 +3400,7 @@
             <a:spLocks noGrp="1"/>
           </p:cNvSpPr>
           <p:nvPr>
-            <p:ph type="body" idx="3" sz="quarter"/>
+            <p:ph type="body" sz="quarter" idx="3"/>
           </p:nvPr>
         </p:nvSpPr>
         <p:spPr/>
@@ -3572,7 +3440,7 @@
             <a:spLocks noGrp="1"/>
           </p:cNvSpPr>
           <p:nvPr>
-            <p:ph type="sldNum" idx="5" sz="quarter"/>
+            <p:ph type="sldNum" sz="quarter" idx="5"/>
           </p:nvPr>
         </p:nvSpPr>
         <p:spPr/>
@@ -3586,7 +3454,7 @@
 </file>
 
 <file path=ppt/notesSlides/notesSlide4.xml><?xml version="1.0" encoding="utf-8"?>
-<p:notes xmlns:a="http://schemas.openxmlformats.org/drawingml/2006/main" xmlns:p="http://schemas.openxmlformats.org/presentationml/2006/main" xmlns:r="http://schemas.openxmlformats.org/officeDocument/2006/relationships">
+<p:notes xmlns:a="http://schemas.openxmlformats.org/drawingml/2006/main" xmlns:r="http://schemas.openxmlformats.org/officeDocument/2006/relationships" xmlns:p="http://schemas.openxmlformats.org/presentationml/2006/main">
   <p:cSld>
     <p:spTree>
       <p:nvGrpSpPr>
@@ -3606,7 +3474,7 @@
         <p:nvSpPr>
           <p:cNvPr id="2" name="Slide Image Placeholder 1"/>
           <p:cNvSpPr>
-            <a:spLocks noGrp="1"/>
+            <a:spLocks noGrp="1" noRot="1" noChangeAspect="1"/>
           </p:cNvSpPr>
           <p:nvPr>
             <p:ph type="sldImg" idx="2"/>
@@ -3621,7 +3489,7 @@
             <a:spLocks noGrp="1"/>
           </p:cNvSpPr>
           <p:nvPr>
-            <p:ph type="body" idx="3" sz="quarter"/>
+            <p:ph type="body" sz="quarter" idx="3"/>
           </p:nvPr>
         </p:nvSpPr>
         <p:spPr/>
@@ -3661,7 +3529,7 @@
             <a:spLocks noGrp="1"/>
           </p:cNvSpPr>
           <p:nvPr>
-            <p:ph type="sldNum" idx="5" sz="quarter"/>
+            <p:ph type="sldNum" sz="quarter" idx="5"/>
           </p:nvPr>
         </p:nvSpPr>
         <p:spPr/>
@@ -3675,7 +3543,7 @@
 </file>
 
 <file path=ppt/notesSlides/notesSlide40.xml><?xml version="1.0" encoding="utf-8"?>
-<p:notes xmlns:a="http://schemas.openxmlformats.org/drawingml/2006/main" xmlns:p="http://schemas.openxmlformats.org/presentationml/2006/main" xmlns:r="http://schemas.openxmlformats.org/officeDocument/2006/relationships">
+<p:notes xmlns:a="http://schemas.openxmlformats.org/drawingml/2006/main" xmlns:r="http://schemas.openxmlformats.org/officeDocument/2006/relationships" xmlns:p="http://schemas.openxmlformats.org/presentationml/2006/main">
   <p:cSld>
     <p:spTree>
       <p:nvGrpSpPr>
@@ -3695,7 +3563,7 @@
         <p:nvSpPr>
           <p:cNvPr id="2" name="Slide Image Placeholder 1"/>
           <p:cNvSpPr>
-            <a:spLocks noGrp="1"/>
+            <a:spLocks noGrp="1" noRot="1" noChangeAspect="1"/>
           </p:cNvSpPr>
           <p:nvPr>
             <p:ph type="sldImg" idx="2"/>
@@ -3710,7 +3578,7 @@
             <a:spLocks noGrp="1"/>
           </p:cNvSpPr>
           <p:nvPr>
-            <p:ph type="body" idx="3" sz="quarter"/>
+            <p:ph type="body" sz="quarter" idx="3"/>
           </p:nvPr>
         </p:nvSpPr>
         <p:spPr/>
@@ -3750,7 +3618,7 @@
             <a:spLocks noGrp="1"/>
           </p:cNvSpPr>
           <p:nvPr>
-            <p:ph type="sldNum" idx="5" sz="quarter"/>
+            <p:ph type="sldNum" sz="quarter" idx="5"/>
           </p:nvPr>
         </p:nvSpPr>
         <p:spPr/>
@@ -3764,7 +3632,7 @@
 </file>
 
 <file path=ppt/notesSlides/notesSlide41.xml><?xml version="1.0" encoding="utf-8"?>
-<p:notes xmlns:a="http://schemas.openxmlformats.org/drawingml/2006/main" xmlns:p="http://schemas.openxmlformats.org/presentationml/2006/main" xmlns:r="http://schemas.openxmlformats.org/officeDocument/2006/relationships">
+<p:notes xmlns:a="http://schemas.openxmlformats.org/drawingml/2006/main" xmlns:r="http://schemas.openxmlformats.org/officeDocument/2006/relationships" xmlns:p="http://schemas.openxmlformats.org/presentationml/2006/main">
   <p:cSld>
     <p:spTree>
       <p:nvGrpSpPr>
@@ -3784,7 +3652,7 @@
         <p:nvSpPr>
           <p:cNvPr id="2" name="Slide Image Placeholder 1"/>
           <p:cNvSpPr>
-            <a:spLocks noGrp="1"/>
+            <a:spLocks noGrp="1" noRot="1" noChangeAspect="1"/>
           </p:cNvSpPr>
           <p:nvPr>
             <p:ph type="sldImg" idx="2"/>
@@ -3799,7 +3667,7 @@
             <a:spLocks noGrp="1"/>
           </p:cNvSpPr>
           <p:nvPr>
-            <p:ph type="body" idx="3" sz="quarter"/>
+            <p:ph type="body" sz="quarter" idx="3"/>
           </p:nvPr>
         </p:nvSpPr>
         <p:spPr/>
@@ -3847,7 +3715,7 @@
             <a:spLocks noGrp="1"/>
           </p:cNvSpPr>
           <p:nvPr>
-            <p:ph type="sldNum" idx="5" sz="quarter"/>
+            <p:ph type="sldNum" sz="quarter" idx="5"/>
           </p:nvPr>
         </p:nvSpPr>
         <p:spPr/>
@@ -3861,7 +3729,7 @@
 </file>
 
 <file path=ppt/notesSlides/notesSlide42.xml><?xml version="1.0" encoding="utf-8"?>
-<p:notes xmlns:a="http://schemas.openxmlformats.org/drawingml/2006/main" xmlns:p="http://schemas.openxmlformats.org/presentationml/2006/main" xmlns:r="http://schemas.openxmlformats.org/officeDocument/2006/relationships">
+<p:notes xmlns:a="http://schemas.openxmlformats.org/drawingml/2006/main" xmlns:r="http://schemas.openxmlformats.org/officeDocument/2006/relationships" xmlns:p="http://schemas.openxmlformats.org/presentationml/2006/main">
   <p:cSld>
     <p:spTree>
       <p:nvGrpSpPr>
@@ -3881,7 +3749,7 @@
         <p:nvSpPr>
           <p:cNvPr id="2" name="Slide Image Placeholder 1"/>
           <p:cNvSpPr>
-            <a:spLocks noGrp="1"/>
+            <a:spLocks noGrp="1" noRot="1" noChangeAspect="1"/>
           </p:cNvSpPr>
           <p:nvPr>
             <p:ph type="sldImg" idx="2"/>
@@ -3896,7 +3764,7 @@
             <a:spLocks noGrp="1"/>
           </p:cNvSpPr>
           <p:nvPr>
-            <p:ph type="body" idx="3" sz="quarter"/>
+            <p:ph type="body" sz="quarter" idx="3"/>
           </p:nvPr>
         </p:nvSpPr>
         <p:spPr/>
@@ -3936,7 +3804,7 @@
             <a:spLocks noGrp="1"/>
           </p:cNvSpPr>
           <p:nvPr>
-            <p:ph type="sldNum" idx="5" sz="quarter"/>
+            <p:ph type="sldNum" sz="quarter" idx="5"/>
           </p:nvPr>
         </p:nvSpPr>
         <p:spPr/>
@@ -3950,7 +3818,7 @@
 </file>
 
 <file path=ppt/notesSlides/notesSlide43.xml><?xml version="1.0" encoding="utf-8"?>
-<p:notes xmlns:a="http://schemas.openxmlformats.org/drawingml/2006/main" xmlns:p="http://schemas.openxmlformats.org/presentationml/2006/main" xmlns:r="http://schemas.openxmlformats.org/officeDocument/2006/relationships">
+<p:notes xmlns:a="http://schemas.openxmlformats.org/drawingml/2006/main" xmlns:r="http://schemas.openxmlformats.org/officeDocument/2006/relationships" xmlns:p="http://schemas.openxmlformats.org/presentationml/2006/main">
   <p:cSld>
     <p:spTree>
       <p:nvGrpSpPr>
@@ -3970,7 +3838,7 @@
         <p:nvSpPr>
           <p:cNvPr id="2" name="Slide Image Placeholder 1"/>
           <p:cNvSpPr>
-            <a:spLocks noGrp="1"/>
+            <a:spLocks noGrp="1" noRot="1" noChangeAspect="1"/>
           </p:cNvSpPr>
           <p:nvPr>
             <p:ph type="sldImg" idx="2"/>
@@ -3985,7 +3853,7 @@
             <a:spLocks noGrp="1"/>
           </p:cNvSpPr>
           <p:nvPr>
-            <p:ph type="body" idx="3" sz="quarter"/>
+            <p:ph type="body" sz="quarter" idx="3"/>
           </p:nvPr>
         </p:nvSpPr>
         <p:spPr/>
@@ -4017,7 +3885,7 @@
             <a:spLocks noGrp="1"/>
           </p:cNvSpPr>
           <p:nvPr>
-            <p:ph type="sldNum" idx="5" sz="quarter"/>
+            <p:ph type="sldNum" sz="quarter" idx="5"/>
           </p:nvPr>
         </p:nvSpPr>
         <p:spPr/>
@@ -4031,7 +3899,7 @@
 </file>
 
 <file path=ppt/notesSlides/notesSlide44.xml><?xml version="1.0" encoding="utf-8"?>
-<p:notes xmlns:a="http://schemas.openxmlformats.org/drawingml/2006/main" xmlns:p="http://schemas.openxmlformats.org/presentationml/2006/main" xmlns:r="http://schemas.openxmlformats.org/officeDocument/2006/relationships">
+<p:notes xmlns:a="http://schemas.openxmlformats.org/drawingml/2006/main" xmlns:r="http://schemas.openxmlformats.org/officeDocument/2006/relationships" xmlns:p="http://schemas.openxmlformats.org/presentationml/2006/main">
   <p:cSld>
     <p:spTree>
       <p:nvGrpSpPr>
@@ -4051,7 +3919,7 @@
         <p:nvSpPr>
           <p:cNvPr id="2" name="Slide Image Placeholder 1"/>
           <p:cNvSpPr>
-            <a:spLocks noGrp="1"/>
+            <a:spLocks noGrp="1" noRot="1" noChangeAspect="1"/>
           </p:cNvSpPr>
           <p:nvPr>
             <p:ph type="sldImg" idx="2"/>
@@ -4066,7 +3934,7 @@
             <a:spLocks noGrp="1"/>
           </p:cNvSpPr>
           <p:nvPr>
-            <p:ph type="body" idx="3" sz="quarter"/>
+            <p:ph type="body" sz="quarter" idx="3"/>
           </p:nvPr>
         </p:nvSpPr>
         <p:spPr/>
@@ -4106,7 +3974,7 @@
             <a:spLocks noGrp="1"/>
           </p:cNvSpPr>
           <p:nvPr>
-            <p:ph type="sldNum" idx="5" sz="quarter"/>
+            <p:ph type="sldNum" sz="quarter" idx="5"/>
           </p:nvPr>
         </p:nvSpPr>
         <p:spPr/>
@@ -4120,7 +3988,7 @@
 </file>
 
 <file path=ppt/notesSlides/notesSlide45.xml><?xml version="1.0" encoding="utf-8"?>
-<p:notes xmlns:a="http://schemas.openxmlformats.org/drawingml/2006/main" xmlns:p="http://schemas.openxmlformats.org/presentationml/2006/main" xmlns:r="http://schemas.openxmlformats.org/officeDocument/2006/relationships">
+<p:notes xmlns:a="http://schemas.openxmlformats.org/drawingml/2006/main" xmlns:r="http://schemas.openxmlformats.org/officeDocument/2006/relationships" xmlns:p="http://schemas.openxmlformats.org/presentationml/2006/main">
   <p:cSld>
     <p:spTree>
       <p:nvGrpSpPr>
@@ -4140,7 +4008,7 @@
         <p:nvSpPr>
           <p:cNvPr id="2" name="Slide Image Placeholder 1"/>
           <p:cNvSpPr>
-            <a:spLocks noGrp="1"/>
+            <a:spLocks noGrp="1" noRot="1" noChangeAspect="1"/>
           </p:cNvSpPr>
           <p:nvPr>
             <p:ph type="sldImg" idx="2"/>
@@ -4155,7 +4023,7 @@
             <a:spLocks noGrp="1"/>
           </p:cNvSpPr>
           <p:nvPr>
-            <p:ph type="body" idx="3" sz="quarter"/>
+            <p:ph type="body" sz="quarter" idx="3"/>
           </p:nvPr>
         </p:nvSpPr>
         <p:spPr/>
@@ -4203,7 +4071,7 @@
             <a:spLocks noGrp="1"/>
           </p:cNvSpPr>
           <p:nvPr>
-            <p:ph type="sldNum" idx="5" sz="quarter"/>
+            <p:ph type="sldNum" sz="quarter" idx="5"/>
           </p:nvPr>
         </p:nvSpPr>
         <p:spPr/>
@@ -4217,7 +4085,7 @@
 </file>
 
 <file path=ppt/notesSlides/notesSlide46.xml><?xml version="1.0" encoding="utf-8"?>
-<p:notes xmlns:a="http://schemas.openxmlformats.org/drawingml/2006/main" xmlns:p="http://schemas.openxmlformats.org/presentationml/2006/main" xmlns:r="http://schemas.openxmlformats.org/officeDocument/2006/relationships">
+<p:notes xmlns:a="http://schemas.openxmlformats.org/drawingml/2006/main" xmlns:r="http://schemas.openxmlformats.org/officeDocument/2006/relationships" xmlns:p="http://schemas.openxmlformats.org/presentationml/2006/main">
   <p:cSld>
     <p:spTree>
       <p:nvGrpSpPr>
@@ -4237,7 +4105,7 @@
         <p:nvSpPr>
           <p:cNvPr id="2" name="Slide Image Placeholder 1"/>
           <p:cNvSpPr>
-            <a:spLocks noGrp="1"/>
+            <a:spLocks noGrp="1" noRot="1" noChangeAspect="1"/>
           </p:cNvSpPr>
           <p:nvPr>
             <p:ph type="sldImg" idx="2"/>
@@ -4252,7 +4120,7 @@
             <a:spLocks noGrp="1"/>
           </p:cNvSpPr>
           <p:nvPr>
-            <p:ph type="body" idx="3" sz="quarter"/>
+            <p:ph type="body" sz="quarter" idx="3"/>
           </p:nvPr>
         </p:nvSpPr>
         <p:spPr/>
@@ -4300,7 +4168,7 @@
             <a:spLocks noGrp="1"/>
           </p:cNvSpPr>
           <p:nvPr>
-            <p:ph type="sldNum" idx="5" sz="quarter"/>
+            <p:ph type="sldNum" sz="quarter" idx="5"/>
           </p:nvPr>
         </p:nvSpPr>
         <p:spPr/>
@@ -4314,7 +4182,7 @@
 </file>
 
 <file path=ppt/notesSlides/notesSlide47.xml><?xml version="1.0" encoding="utf-8"?>
-<p:notes xmlns:a="http://schemas.openxmlformats.org/drawingml/2006/main" xmlns:p="http://schemas.openxmlformats.org/presentationml/2006/main" xmlns:r="http://schemas.openxmlformats.org/officeDocument/2006/relationships">
+<p:notes xmlns:a="http://schemas.openxmlformats.org/drawingml/2006/main" xmlns:r="http://schemas.openxmlformats.org/officeDocument/2006/relationships" xmlns:p="http://schemas.openxmlformats.org/presentationml/2006/main">
   <p:cSld>
     <p:spTree>
       <p:nvGrpSpPr>
@@ -4334,7 +4202,7 @@
         <p:nvSpPr>
           <p:cNvPr id="2" name="Slide Image Placeholder 1"/>
           <p:cNvSpPr>
-            <a:spLocks noGrp="1"/>
+            <a:spLocks noGrp="1" noRot="1" noChangeAspect="1"/>
           </p:cNvSpPr>
           <p:nvPr>
             <p:ph type="sldImg" idx="2"/>
@@ -4349,7 +4217,7 @@
             <a:spLocks noGrp="1"/>
           </p:cNvSpPr>
           <p:nvPr>
-            <p:ph type="body" idx="3" sz="quarter"/>
+            <p:ph type="body" sz="quarter" idx="3"/>
           </p:nvPr>
         </p:nvSpPr>
         <p:spPr/>
@@ -4397,7 +4265,7 @@
             <a:spLocks noGrp="1"/>
           </p:cNvSpPr>
           <p:nvPr>
-            <p:ph type="sldNum" idx="5" sz="quarter"/>
+            <p:ph type="sldNum" sz="quarter" idx="5"/>
           </p:nvPr>
         </p:nvSpPr>
         <p:spPr/>
@@ -4411,7 +4279,7 @@
 </file>
 
 <file path=ppt/notesSlides/notesSlide48.xml><?xml version="1.0" encoding="utf-8"?>
-<p:notes xmlns:a="http://schemas.openxmlformats.org/drawingml/2006/main" xmlns:p="http://schemas.openxmlformats.org/presentationml/2006/main" xmlns:r="http://schemas.openxmlformats.org/officeDocument/2006/relationships">
+<p:notes xmlns:a="http://schemas.openxmlformats.org/drawingml/2006/main" xmlns:r="http://schemas.openxmlformats.org/officeDocument/2006/relationships" xmlns:p="http://schemas.openxmlformats.org/presentationml/2006/main">
   <p:cSld>
     <p:spTree>
       <p:nvGrpSpPr>
@@ -4431,7 +4299,7 @@
         <p:nvSpPr>
           <p:cNvPr id="2" name="Slide Image Placeholder 1"/>
           <p:cNvSpPr>
-            <a:spLocks noGrp="1"/>
+            <a:spLocks noGrp="1" noRot="1" noChangeAspect="1"/>
           </p:cNvSpPr>
           <p:nvPr>
             <p:ph type="sldImg" idx="2"/>
@@ -4446,7 +4314,7 @@
             <a:spLocks noGrp="1"/>
           </p:cNvSpPr>
           <p:nvPr>
-            <p:ph type="body" idx="3" sz="quarter"/>
+            <p:ph type="body" sz="quarter" idx="3"/>
           </p:nvPr>
         </p:nvSpPr>
         <p:spPr/>
@@ -4486,7 +4354,7 @@
             <a:spLocks noGrp="1"/>
           </p:cNvSpPr>
           <p:nvPr>
-            <p:ph type="sldNum" idx="5" sz="quarter"/>
+            <p:ph type="sldNum" sz="quarter" idx="5"/>
           </p:nvPr>
         </p:nvSpPr>
         <p:spPr/>
@@ -4500,7 +4368,7 @@
 </file>
 
 <file path=ppt/notesSlides/notesSlide5.xml><?xml version="1.0" encoding="utf-8"?>
-<p:notes xmlns:a="http://schemas.openxmlformats.org/drawingml/2006/main" xmlns:p="http://schemas.openxmlformats.org/presentationml/2006/main" xmlns:r="http://schemas.openxmlformats.org/officeDocument/2006/relationships">
+<p:notes xmlns:a="http://schemas.openxmlformats.org/drawingml/2006/main" xmlns:r="http://schemas.openxmlformats.org/officeDocument/2006/relationships" xmlns:p="http://schemas.openxmlformats.org/presentationml/2006/main">
   <p:cSld>
     <p:spTree>
       <p:nvGrpSpPr>
@@ -4520,7 +4388,7 @@
         <p:nvSpPr>
           <p:cNvPr id="2" name="Slide Image Placeholder 1"/>
           <p:cNvSpPr>
-            <a:spLocks noGrp="1"/>
+            <a:spLocks noGrp="1" noRot="1" noChangeAspect="1"/>
           </p:cNvSpPr>
           <p:nvPr>
             <p:ph type="sldImg" idx="2"/>
@@ -4535,7 +4403,7 @@
             <a:spLocks noGrp="1"/>
           </p:cNvSpPr>
           <p:nvPr>
-            <p:ph type="body" idx="3" sz="quarter"/>
+            <p:ph type="body" sz="quarter" idx="3"/>
           </p:nvPr>
         </p:nvSpPr>
         <p:spPr/>
@@ -4544,7 +4412,7 @@
           <a:lstStyle/>
           <a:p>
             <a:r>
-              <a:rPr sz="1200">
+              <a:rPr sz="1200" dirty="0">
                 <a:latin typeface="Calibri"/>
               </a:rPr>
               <a:t>Put the two break times on the whiteboard as well. People relax when they know when the next one is.</a:t>
@@ -4552,7 +4420,7 @@
           </a:p>
           <a:p>
             <a:r>
-              <a:rPr sz="1200">
+              <a:rPr sz="1200" dirty="0">
                 <a:latin typeface="Calibri"/>
               </a:rPr>
               <a:t>The timings are a guide. The IDE install is the one that runs over; if it does, take it out of the Serial Monitor section, not out of the blink activity.</a:t>
@@ -4560,11 +4428,25 @@
           </a:p>
           <a:p>
             <a:r>
-              <a:rPr sz="1200">
+              <a:rPr sz="1200" dirty="0">
                 <a:latin typeface="Calibri"/>
               </a:rPr>
               <a:t>If the whole room is installed and ready early, go straight to the breadboards. Never fill time.</a:t>
             </a:r>
+            <a:endParaRPr lang="en-US" sz="1200" dirty="0">
+              <a:latin typeface="Calibri"/>
+            </a:endParaRPr>
+          </a:p>
+          <a:p>
+            <a:r>
+              <a:rPr lang="en-US" sz="1200" dirty="0">
+                <a:latin typeface="Calibri"/>
+              </a:rPr>
+              <a:t>We take breaks approximately every hour or when appropriate.</a:t>
+            </a:r>
+            <a:endParaRPr sz="1200" dirty="0">
+              <a:latin typeface="Calibri"/>
+            </a:endParaRPr>
           </a:p>
         </p:txBody>
       </p:sp>
@@ -4575,7 +4457,7 @@
             <a:spLocks noGrp="1"/>
           </p:cNvSpPr>
           <p:nvPr>
-            <p:ph type="sldNum" idx="5" sz="quarter"/>
+            <p:ph type="sldNum" sz="quarter" idx="5"/>
           </p:nvPr>
         </p:nvSpPr>
         <p:spPr/>
@@ -4589,7 +4471,7 @@
 </file>
 
 <file path=ppt/notesSlides/notesSlide6.xml><?xml version="1.0" encoding="utf-8"?>
-<p:notes xmlns:a="http://schemas.openxmlformats.org/drawingml/2006/main" xmlns:p="http://schemas.openxmlformats.org/presentationml/2006/main" xmlns:r="http://schemas.openxmlformats.org/officeDocument/2006/relationships">
+<p:notes xmlns:a="http://schemas.openxmlformats.org/drawingml/2006/main" xmlns:r="http://schemas.openxmlformats.org/officeDocument/2006/relationships" xmlns:p="http://schemas.openxmlformats.org/presentationml/2006/main">
   <p:cSld>
     <p:spTree>
       <p:nvGrpSpPr>
@@ -4609,7 +4491,7 @@
         <p:nvSpPr>
           <p:cNvPr id="2" name="Slide Image Placeholder 1"/>
           <p:cNvSpPr>
-            <a:spLocks noGrp="1"/>
+            <a:spLocks noGrp="1" noRot="1" noChangeAspect="1"/>
           </p:cNvSpPr>
           <p:nvPr>
             <p:ph type="sldImg" idx="2"/>
@@ -4624,7 +4506,7 @@
             <a:spLocks noGrp="1"/>
           </p:cNvSpPr>
           <p:nvPr>
-            <p:ph type="body" idx="3" sz="quarter"/>
+            <p:ph type="body" sz="quarter" idx="3"/>
           </p:nvPr>
         </p:nvSpPr>
         <p:spPr/>
@@ -4633,7 +4515,7 @@
           <a:lstStyle/>
           <a:p>
             <a:r>
-              <a:rPr sz="1200">
+              <a:rPr sz="1200" dirty="0">
                 <a:latin typeface="Calibri"/>
               </a:rPr>
               <a:t>Get the word MECHATRONICS said out loud by somebody other than you.</a:t>
@@ -4641,7 +4523,7 @@
           </a:p>
           <a:p>
             <a:r>
-              <a:rPr sz="1200">
+              <a:rPr sz="1200" dirty="0">
                 <a:latin typeface="Calibri"/>
               </a:rPr>
               <a:t>The figure narrows from all of engineering down to what is on the desk. Walk it inwards with a finger.</a:t>
@@ -4649,7 +4531,7 @@
           </a:p>
           <a:p>
             <a:r>
-              <a:rPr sz="1200">
+              <a:rPr sz="1200" dirty="0">
                 <a:latin typeface="Calibri"/>
               </a:rPr>
               <a:t>Ask for three mechatronic things in the room. Printer, car, washing machine, lift, and the vehicle in front of them all count.</a:t>
@@ -4657,7 +4539,7 @@
           </a:p>
           <a:p>
             <a:r>
-              <a:rPr sz="1200">
+              <a:rPr sz="1200" dirty="0">
                 <a:latin typeface="Calibri"/>
               </a:rPr>
               <a:t>Do not get drawn into a definitions argument. The point is that the three disciplines are one job, not three.</a:t>
@@ -4672,7 +4554,7 @@
             <a:spLocks noGrp="1"/>
           </p:cNvSpPr>
           <p:nvPr>
-            <p:ph type="sldNum" idx="5" sz="quarter"/>
+            <p:ph type="sldNum" sz="quarter" idx="5"/>
           </p:nvPr>
         </p:nvSpPr>
         <p:spPr/>
@@ -4686,7 +4568,7 @@
 </file>
 
 <file path=ppt/notesSlides/notesSlide7.xml><?xml version="1.0" encoding="utf-8"?>
-<p:notes xmlns:a="http://schemas.openxmlformats.org/drawingml/2006/main" xmlns:p="http://schemas.openxmlformats.org/presentationml/2006/main" xmlns:r="http://schemas.openxmlformats.org/officeDocument/2006/relationships">
+<p:notes xmlns:a="http://schemas.openxmlformats.org/drawingml/2006/main" xmlns:r="http://schemas.openxmlformats.org/officeDocument/2006/relationships" xmlns:p="http://schemas.openxmlformats.org/presentationml/2006/main">
   <p:cSld>
     <p:spTree>
       <p:nvGrpSpPr>
@@ -4706,7 +4588,7 @@
         <p:nvSpPr>
           <p:cNvPr id="2" name="Slide Image Placeholder 1"/>
           <p:cNvSpPr>
-            <a:spLocks noGrp="1"/>
+            <a:spLocks noGrp="1" noRot="1" noChangeAspect="1"/>
           </p:cNvSpPr>
           <p:nvPr>
             <p:ph type="sldImg" idx="2"/>
@@ -4721,7 +4603,7 @@
             <a:spLocks noGrp="1"/>
           </p:cNvSpPr>
           <p:nvPr>
-            <p:ph type="body" idx="3" sz="quarter"/>
+            <p:ph type="body" sz="quarter" idx="3"/>
           </p:nvPr>
         </p:nvSpPr>
         <p:spPr/>
@@ -4769,7 +4651,7 @@
             <a:spLocks noGrp="1"/>
           </p:cNvSpPr>
           <p:nvPr>
-            <p:ph type="sldNum" idx="5" sz="quarter"/>
+            <p:ph type="sldNum" sz="quarter" idx="5"/>
           </p:nvPr>
         </p:nvSpPr>
         <p:spPr/>
@@ -4783,7 +4665,7 @@
 </file>
 
 <file path=ppt/notesSlides/notesSlide8.xml><?xml version="1.0" encoding="utf-8"?>
-<p:notes xmlns:a="http://schemas.openxmlformats.org/drawingml/2006/main" xmlns:p="http://schemas.openxmlformats.org/presentationml/2006/main" xmlns:r="http://schemas.openxmlformats.org/officeDocument/2006/relationships">
+<p:notes xmlns:a="http://schemas.openxmlformats.org/drawingml/2006/main" xmlns:r="http://schemas.openxmlformats.org/officeDocument/2006/relationships" xmlns:p="http://schemas.openxmlformats.org/presentationml/2006/main">
   <p:cSld>
     <p:spTree>
       <p:nvGrpSpPr>
@@ -4803,7 +4685,7 @@
         <p:nvSpPr>
           <p:cNvPr id="2" name="Slide Image Placeholder 1"/>
           <p:cNvSpPr>
-            <a:spLocks noGrp="1"/>
+            <a:spLocks noGrp="1" noRot="1" noChangeAspect="1"/>
           </p:cNvSpPr>
           <p:nvPr>
             <p:ph type="sldImg" idx="2"/>
@@ -4818,7 +4700,7 @@
             <a:spLocks noGrp="1"/>
           </p:cNvSpPr>
           <p:nvPr>
-            <p:ph type="body" idx="3" sz="quarter"/>
+            <p:ph type="body" sz="quarter" idx="3"/>
           </p:nvPr>
         </p:nvSpPr>
         <p:spPr/>
@@ -4866,7 +4748,7 @@
             <a:spLocks noGrp="1"/>
           </p:cNvSpPr>
           <p:nvPr>
-            <p:ph type="sldNum" idx="5" sz="quarter"/>
+            <p:ph type="sldNum" sz="quarter" idx="5"/>
           </p:nvPr>
         </p:nvSpPr>
         <p:spPr/>
@@ -4880,7 +4762,7 @@
 </file>
 
 <file path=ppt/notesSlides/notesSlide9.xml><?xml version="1.0" encoding="utf-8"?>
-<p:notes xmlns:a="http://schemas.openxmlformats.org/drawingml/2006/main" xmlns:p="http://schemas.openxmlformats.org/presentationml/2006/main" xmlns:r="http://schemas.openxmlformats.org/officeDocument/2006/relationships">
+<p:notes xmlns:a="http://schemas.openxmlformats.org/drawingml/2006/main" xmlns:r="http://schemas.openxmlformats.org/officeDocument/2006/relationships" xmlns:p="http://schemas.openxmlformats.org/presentationml/2006/main">
   <p:cSld>
     <p:spTree>
       <p:nvGrpSpPr>
@@ -4900,7 +4782,7 @@
         <p:nvSpPr>
           <p:cNvPr id="2" name="Slide Image Placeholder 1"/>
           <p:cNvSpPr>
-            <a:spLocks noGrp="1"/>
+            <a:spLocks noGrp="1" noRot="1" noChangeAspect="1"/>
           </p:cNvSpPr>
           <p:nvPr>
             <p:ph type="sldImg" idx="2"/>
@@ -4915,7 +4797,7 @@
             <a:spLocks noGrp="1"/>
           </p:cNvSpPr>
           <p:nvPr>
-            <p:ph type="body" idx="3" sz="quarter"/>
+            <p:ph type="body" sz="quarter" idx="3"/>
           </p:nvPr>
         </p:nvSpPr>
         <p:spPr/>
@@ -4947,7 +4829,7 @@
             <a:spLocks noGrp="1"/>
           </p:cNvSpPr>
           <p:nvPr>
-            <p:ph type="sldNum" idx="5" sz="quarter"/>
+            <p:ph type="sldNum" sz="quarter" idx="5"/>
           </p:nvPr>
         </p:nvSpPr>
         <p:spPr/>
@@ -4998,10 +4880,9 @@
           <a:lstStyle/>
           <a:p>
             <a:r>
-              <a:rPr lang="en-US" smtClean="0"/>
+              <a:rPr lang="en-US"/>
               <a:t>Click to edit Master title style</a:t>
             </a:r>
-            <a:endParaRPr lang="en-US"/>
           </a:p>
         </p:txBody>
       </p:sp>
@@ -5117,10 +4998,9 @@
           </a:lstStyle>
           <a:p>
             <a:r>
-              <a:rPr lang="en-US" smtClean="0"/>
+              <a:rPr lang="en-US"/>
               <a:t>Click to edit Master subtitle style</a:t>
             </a:r>
-            <a:endParaRPr lang="en-US"/>
           </a:p>
         </p:txBody>
       </p:sp>
@@ -5141,7 +5021,7 @@
           <a:p>
             <a:fld id="{5BCAD085-E8A6-8845-BD4E-CB4CCA059FC4}" type="datetimeFigureOut">
               <a:rPr lang="en-US" smtClean="0"/>
-              <a:t>1/27/13</a:t>
+              <a:t>9/7/2026</a:t>
             </a:fld>
             <a:endParaRPr lang="en-US"/>
           </a:p>
@@ -5235,10 +5115,9 @@
           <a:lstStyle/>
           <a:p>
             <a:r>
-              <a:rPr lang="en-US" smtClean="0"/>
+              <a:rPr lang="en-US"/>
               <a:t>Click to edit Master title style</a:t>
             </a:r>
-            <a:endParaRPr lang="en-US"/>
           </a:p>
         </p:txBody>
       </p:sp>
@@ -5259,38 +5138,37 @@
           <a:p>
             <a:pPr lvl="0"/>
             <a:r>
-              <a:rPr lang="en-US" smtClean="0"/>
+              <a:rPr lang="en-US"/>
               <a:t>Click to edit Master text styles</a:t>
             </a:r>
           </a:p>
           <a:p>
             <a:pPr lvl="1"/>
             <a:r>
-              <a:rPr lang="en-US" smtClean="0"/>
+              <a:rPr lang="en-US"/>
               <a:t>Second level</a:t>
             </a:r>
           </a:p>
           <a:p>
             <a:pPr lvl="2"/>
             <a:r>
-              <a:rPr lang="en-US" smtClean="0"/>
+              <a:rPr lang="en-US"/>
               <a:t>Third level</a:t>
             </a:r>
           </a:p>
           <a:p>
             <a:pPr lvl="3"/>
             <a:r>
-              <a:rPr lang="en-US" smtClean="0"/>
+              <a:rPr lang="en-US"/>
               <a:t>Fourth level</a:t>
             </a:r>
           </a:p>
           <a:p>
             <a:pPr lvl="4"/>
             <a:r>
-              <a:rPr lang="en-US" smtClean="0"/>
+              <a:rPr lang="en-US"/>
               <a:t>Fifth level</a:t>
             </a:r>
-            <a:endParaRPr lang="en-US"/>
           </a:p>
         </p:txBody>
       </p:sp>
@@ -5311,7 +5189,7 @@
           <a:p>
             <a:fld id="{5BCAD085-E8A6-8845-BD4E-CB4CCA059FC4}" type="datetimeFigureOut">
               <a:rPr lang="en-US" smtClean="0"/>
-              <a:t>1/27/13</a:t>
+              <a:t>9/7/2026</a:t>
             </a:fld>
             <a:endParaRPr lang="en-US"/>
           </a:p>
@@ -5410,10 +5288,9 @@
           <a:lstStyle/>
           <a:p>
             <a:r>
-              <a:rPr lang="en-US" smtClean="0"/>
+              <a:rPr lang="en-US"/>
               <a:t>Click to edit Master title style</a:t>
             </a:r>
-            <a:endParaRPr lang="en-US"/>
           </a:p>
         </p:txBody>
       </p:sp>
@@ -5439,38 +5316,37 @@
           <a:p>
             <a:pPr lvl="0"/>
             <a:r>
-              <a:rPr lang="en-US" smtClean="0"/>
+              <a:rPr lang="en-US"/>
               <a:t>Click to edit Master text styles</a:t>
             </a:r>
           </a:p>
           <a:p>
             <a:pPr lvl="1"/>
             <a:r>
-              <a:rPr lang="en-US" smtClean="0"/>
+              <a:rPr lang="en-US"/>
               <a:t>Second level</a:t>
             </a:r>
           </a:p>
           <a:p>
             <a:pPr lvl="2"/>
             <a:r>
-              <a:rPr lang="en-US" smtClean="0"/>
+              <a:rPr lang="en-US"/>
               <a:t>Third level</a:t>
             </a:r>
           </a:p>
           <a:p>
             <a:pPr lvl="3"/>
             <a:r>
-              <a:rPr lang="en-US" smtClean="0"/>
+              <a:rPr lang="en-US"/>
               <a:t>Fourth level</a:t>
             </a:r>
           </a:p>
           <a:p>
             <a:pPr lvl="4"/>
             <a:r>
-              <a:rPr lang="en-US" smtClean="0"/>
+              <a:rPr lang="en-US"/>
               <a:t>Fifth level</a:t>
             </a:r>
-            <a:endParaRPr lang="en-US"/>
           </a:p>
         </p:txBody>
       </p:sp>
@@ -5491,7 +5367,7 @@
           <a:p>
             <a:fld id="{5BCAD085-E8A6-8845-BD4E-CB4CCA059FC4}" type="datetimeFigureOut">
               <a:rPr lang="en-US" smtClean="0"/>
-              <a:t>1/27/13</a:t>
+              <a:t>9/7/2026</a:t>
             </a:fld>
             <a:endParaRPr lang="en-US"/>
           </a:p>
@@ -5585,10 +5461,9 @@
           <a:lstStyle/>
           <a:p>
             <a:r>
-              <a:rPr lang="en-US" smtClean="0"/>
+              <a:rPr lang="en-US"/>
               <a:t>Click to edit Master title style</a:t>
             </a:r>
-            <a:endParaRPr lang="en-US"/>
           </a:p>
         </p:txBody>
       </p:sp>
@@ -5609,38 +5484,37 @@
           <a:p>
             <a:pPr lvl="0"/>
             <a:r>
-              <a:rPr lang="en-US" smtClean="0"/>
+              <a:rPr lang="en-US"/>
               <a:t>Click to edit Master text styles</a:t>
             </a:r>
           </a:p>
           <a:p>
             <a:pPr lvl="1"/>
             <a:r>
-              <a:rPr lang="en-US" smtClean="0"/>
+              <a:rPr lang="en-US"/>
               <a:t>Second level</a:t>
             </a:r>
           </a:p>
           <a:p>
             <a:pPr lvl="2"/>
             <a:r>
-              <a:rPr lang="en-US" smtClean="0"/>
+              <a:rPr lang="en-US"/>
               <a:t>Third level</a:t>
             </a:r>
           </a:p>
           <a:p>
             <a:pPr lvl="3"/>
             <a:r>
-              <a:rPr lang="en-US" smtClean="0"/>
+              <a:rPr lang="en-US"/>
               <a:t>Fourth level</a:t>
             </a:r>
           </a:p>
           <a:p>
             <a:pPr lvl="4"/>
             <a:r>
-              <a:rPr lang="en-US" smtClean="0"/>
+              <a:rPr lang="en-US"/>
               <a:t>Fifth level</a:t>
             </a:r>
-            <a:endParaRPr lang="en-US"/>
           </a:p>
         </p:txBody>
       </p:sp>
@@ -5661,7 +5535,7 @@
           <a:p>
             <a:fld id="{5BCAD085-E8A6-8845-BD4E-CB4CCA059FC4}" type="datetimeFigureOut">
               <a:rPr lang="en-US" smtClean="0"/>
-              <a:t>1/27/13</a:t>
+              <a:t>9/7/2026</a:t>
             </a:fld>
             <a:endParaRPr lang="en-US"/>
           </a:p>
@@ -5764,10 +5638,9 @@
           </a:lstStyle>
           <a:p>
             <a:r>
-              <a:rPr lang="en-US" smtClean="0"/>
+              <a:rPr lang="en-US"/>
               <a:t>Click to edit Master title style</a:t>
             </a:r>
-            <a:endParaRPr lang="en-US"/>
           </a:p>
         </p:txBody>
       </p:sp>
@@ -5884,7 +5757,7 @@
           <a:p>
             <a:pPr lvl="0"/>
             <a:r>
-              <a:rPr lang="en-US" smtClean="0"/>
+              <a:rPr lang="en-US"/>
               <a:t>Click to edit Master text styles</a:t>
             </a:r>
           </a:p>
@@ -5907,7 +5780,7 @@
           <a:p>
             <a:fld id="{5BCAD085-E8A6-8845-BD4E-CB4CCA059FC4}" type="datetimeFigureOut">
               <a:rPr lang="en-US" smtClean="0"/>
-              <a:t>1/27/13</a:t>
+              <a:t>9/7/2026</a:t>
             </a:fld>
             <a:endParaRPr lang="en-US"/>
           </a:p>
@@ -6001,10 +5874,9 @@
           <a:lstStyle/>
           <a:p>
             <a:r>
-              <a:rPr lang="en-US" smtClean="0"/>
+              <a:rPr lang="en-US"/>
               <a:t>Click to edit Master title style</a:t>
             </a:r>
-            <a:endParaRPr lang="en-US"/>
           </a:p>
         </p:txBody>
       </p:sp>
@@ -6058,38 +5930,37 @@
           <a:p>
             <a:pPr lvl="0"/>
             <a:r>
-              <a:rPr lang="en-US" smtClean="0"/>
+              <a:rPr lang="en-US"/>
               <a:t>Click to edit Master text styles</a:t>
             </a:r>
           </a:p>
           <a:p>
             <a:pPr lvl="1"/>
             <a:r>
-              <a:rPr lang="en-US" smtClean="0"/>
+              <a:rPr lang="en-US"/>
               <a:t>Second level</a:t>
             </a:r>
           </a:p>
           <a:p>
             <a:pPr lvl="2"/>
             <a:r>
-              <a:rPr lang="en-US" smtClean="0"/>
+              <a:rPr lang="en-US"/>
               <a:t>Third level</a:t>
             </a:r>
           </a:p>
           <a:p>
             <a:pPr lvl="3"/>
             <a:r>
-              <a:rPr lang="en-US" smtClean="0"/>
+              <a:rPr lang="en-US"/>
               <a:t>Fourth level</a:t>
             </a:r>
           </a:p>
           <a:p>
             <a:pPr lvl="4"/>
             <a:r>
-              <a:rPr lang="en-US" smtClean="0"/>
+              <a:rPr lang="en-US"/>
               <a:t>Fifth level</a:t>
             </a:r>
-            <a:endParaRPr lang="en-US"/>
           </a:p>
         </p:txBody>
       </p:sp>
@@ -6143,38 +6014,37 @@
           <a:p>
             <a:pPr lvl="0"/>
             <a:r>
-              <a:rPr lang="en-US" smtClean="0"/>
+              <a:rPr lang="en-US"/>
               <a:t>Click to edit Master text styles</a:t>
             </a:r>
           </a:p>
           <a:p>
             <a:pPr lvl="1"/>
             <a:r>
-              <a:rPr lang="en-US" smtClean="0"/>
+              <a:rPr lang="en-US"/>
               <a:t>Second level</a:t>
             </a:r>
           </a:p>
           <a:p>
             <a:pPr lvl="2"/>
             <a:r>
-              <a:rPr lang="en-US" smtClean="0"/>
+              <a:rPr lang="en-US"/>
               <a:t>Third level</a:t>
             </a:r>
           </a:p>
           <a:p>
             <a:pPr lvl="3"/>
             <a:r>
-              <a:rPr lang="en-US" smtClean="0"/>
+              <a:rPr lang="en-US"/>
               <a:t>Fourth level</a:t>
             </a:r>
           </a:p>
           <a:p>
             <a:pPr lvl="4"/>
             <a:r>
-              <a:rPr lang="en-US" smtClean="0"/>
+              <a:rPr lang="en-US"/>
               <a:t>Fifth level</a:t>
             </a:r>
-            <a:endParaRPr lang="en-US"/>
           </a:p>
         </p:txBody>
       </p:sp>
@@ -6195,7 +6065,7 @@
           <a:p>
             <a:fld id="{5BCAD085-E8A6-8845-BD4E-CB4CCA059FC4}" type="datetimeFigureOut">
               <a:rPr lang="en-US" smtClean="0"/>
-              <a:t>1/27/13</a:t>
+              <a:t>9/7/2026</a:t>
             </a:fld>
             <a:endParaRPr lang="en-US"/>
           </a:p>
@@ -6293,10 +6163,9 @@
           </a:lstStyle>
           <a:p>
             <a:r>
-              <a:rPr lang="en-US" smtClean="0"/>
+              <a:rPr lang="en-US"/>
               <a:t>Click to edit Master title style</a:t>
             </a:r>
-            <a:endParaRPr lang="en-US"/>
           </a:p>
         </p:txBody>
       </p:sp>
@@ -6359,7 +6228,7 @@
           <a:p>
             <a:pPr lvl="0"/>
             <a:r>
-              <a:rPr lang="en-US" smtClean="0"/>
+              <a:rPr lang="en-US"/>
               <a:t>Click to edit Master text styles</a:t>
             </a:r>
           </a:p>
@@ -6415,38 +6284,37 @@
           <a:p>
             <a:pPr lvl="0"/>
             <a:r>
-              <a:rPr lang="en-US" smtClean="0"/>
+              <a:rPr lang="en-US"/>
               <a:t>Click to edit Master text styles</a:t>
             </a:r>
           </a:p>
           <a:p>
             <a:pPr lvl="1"/>
             <a:r>
-              <a:rPr lang="en-US" smtClean="0"/>
+              <a:rPr lang="en-US"/>
               <a:t>Second level</a:t>
             </a:r>
           </a:p>
           <a:p>
             <a:pPr lvl="2"/>
             <a:r>
-              <a:rPr lang="en-US" smtClean="0"/>
+              <a:rPr lang="en-US"/>
               <a:t>Third level</a:t>
             </a:r>
           </a:p>
           <a:p>
             <a:pPr lvl="3"/>
             <a:r>
-              <a:rPr lang="en-US" smtClean="0"/>
+              <a:rPr lang="en-US"/>
               <a:t>Fourth level</a:t>
             </a:r>
           </a:p>
           <a:p>
             <a:pPr lvl="4"/>
             <a:r>
-              <a:rPr lang="en-US" smtClean="0"/>
+              <a:rPr lang="en-US"/>
               <a:t>Fifth level</a:t>
             </a:r>
-            <a:endParaRPr lang="en-US"/>
           </a:p>
         </p:txBody>
       </p:sp>
@@ -6509,7 +6377,7 @@
           <a:p>
             <a:pPr lvl="0"/>
             <a:r>
-              <a:rPr lang="en-US" smtClean="0"/>
+              <a:rPr lang="en-US"/>
               <a:t>Click to edit Master text styles</a:t>
             </a:r>
           </a:p>
@@ -6565,38 +6433,37 @@
           <a:p>
             <a:pPr lvl="0"/>
             <a:r>
-              <a:rPr lang="en-US" smtClean="0"/>
+              <a:rPr lang="en-US"/>
               <a:t>Click to edit Master text styles</a:t>
             </a:r>
           </a:p>
           <a:p>
             <a:pPr lvl="1"/>
             <a:r>
-              <a:rPr lang="en-US" smtClean="0"/>
+              <a:rPr lang="en-US"/>
               <a:t>Second level</a:t>
             </a:r>
           </a:p>
           <a:p>
             <a:pPr lvl="2"/>
             <a:r>
-              <a:rPr lang="en-US" smtClean="0"/>
+              <a:rPr lang="en-US"/>
               <a:t>Third level</a:t>
             </a:r>
           </a:p>
           <a:p>
             <a:pPr lvl="3"/>
             <a:r>
-              <a:rPr lang="en-US" smtClean="0"/>
+              <a:rPr lang="en-US"/>
               <a:t>Fourth level</a:t>
             </a:r>
           </a:p>
           <a:p>
             <a:pPr lvl="4"/>
             <a:r>
-              <a:rPr lang="en-US" smtClean="0"/>
+              <a:rPr lang="en-US"/>
               <a:t>Fifth level</a:t>
             </a:r>
-            <a:endParaRPr lang="en-US"/>
           </a:p>
         </p:txBody>
       </p:sp>
@@ -6617,7 +6484,7 @@
           <a:p>
             <a:fld id="{5BCAD085-E8A6-8845-BD4E-CB4CCA059FC4}" type="datetimeFigureOut">
               <a:rPr lang="en-US" smtClean="0"/>
-              <a:t>1/27/13</a:t>
+              <a:t>9/7/2026</a:t>
             </a:fld>
             <a:endParaRPr lang="en-US"/>
           </a:p>
@@ -6711,10 +6578,9 @@
           <a:lstStyle/>
           <a:p>
             <a:r>
-              <a:rPr lang="en-US" smtClean="0"/>
+              <a:rPr lang="en-US"/>
               <a:t>Click to edit Master title style</a:t>
             </a:r>
-            <a:endParaRPr lang="en-US"/>
           </a:p>
         </p:txBody>
       </p:sp>
@@ -6735,7 +6601,7 @@
           <a:p>
             <a:fld id="{5BCAD085-E8A6-8845-BD4E-CB4CCA059FC4}" type="datetimeFigureOut">
               <a:rPr lang="en-US" smtClean="0"/>
-              <a:t>1/27/13</a:t>
+              <a:t>9/7/2026</a:t>
             </a:fld>
             <a:endParaRPr lang="en-US"/>
           </a:p>
@@ -6830,7 +6696,7 @@
           <a:p>
             <a:fld id="{5BCAD085-E8A6-8845-BD4E-CB4CCA059FC4}" type="datetimeFigureOut">
               <a:rPr lang="en-US" smtClean="0"/>
-              <a:t>1/27/13</a:t>
+              <a:t>9/7/2026</a:t>
             </a:fld>
             <a:endParaRPr lang="en-US"/>
           </a:p>
@@ -6933,10 +6799,9 @@
           </a:lstStyle>
           <a:p>
             <a:r>
-              <a:rPr lang="en-US" smtClean="0"/>
+              <a:rPr lang="en-US"/>
               <a:t>Click to edit Master title style</a:t>
             </a:r>
-            <a:endParaRPr lang="en-US"/>
           </a:p>
         </p:txBody>
       </p:sp>
@@ -6990,38 +6855,37 @@
           <a:p>
             <a:pPr lvl="0"/>
             <a:r>
-              <a:rPr lang="en-US" smtClean="0"/>
+              <a:rPr lang="en-US"/>
               <a:t>Click to edit Master text styles</a:t>
             </a:r>
           </a:p>
           <a:p>
             <a:pPr lvl="1"/>
             <a:r>
-              <a:rPr lang="en-US" smtClean="0"/>
+              <a:rPr lang="en-US"/>
               <a:t>Second level</a:t>
             </a:r>
           </a:p>
           <a:p>
             <a:pPr lvl="2"/>
             <a:r>
-              <a:rPr lang="en-US" smtClean="0"/>
+              <a:rPr lang="en-US"/>
               <a:t>Third level</a:t>
             </a:r>
           </a:p>
           <a:p>
             <a:pPr lvl="3"/>
             <a:r>
-              <a:rPr lang="en-US" smtClean="0"/>
+              <a:rPr lang="en-US"/>
               <a:t>Fourth level</a:t>
             </a:r>
           </a:p>
           <a:p>
             <a:pPr lvl="4"/>
             <a:r>
-              <a:rPr lang="en-US" smtClean="0"/>
+              <a:rPr lang="en-US"/>
               <a:t>Fifth level</a:t>
             </a:r>
-            <a:endParaRPr lang="en-US"/>
           </a:p>
         </p:txBody>
       </p:sp>
@@ -7084,7 +6948,7 @@
           <a:p>
             <a:pPr lvl="0"/>
             <a:r>
-              <a:rPr lang="en-US" smtClean="0"/>
+              <a:rPr lang="en-US"/>
               <a:t>Click to edit Master text styles</a:t>
             </a:r>
           </a:p>
@@ -7107,7 +6971,7 @@
           <a:p>
             <a:fld id="{5BCAD085-E8A6-8845-BD4E-CB4CCA059FC4}" type="datetimeFigureOut">
               <a:rPr lang="en-US" smtClean="0"/>
-              <a:t>1/27/13</a:t>
+              <a:t>9/7/2026</a:t>
             </a:fld>
             <a:endParaRPr lang="en-US"/>
           </a:p>
@@ -7210,10 +7074,9 @@
           </a:lstStyle>
           <a:p>
             <a:r>
-              <a:rPr lang="en-US" smtClean="0"/>
+              <a:rPr lang="en-US"/>
               <a:t>Click to edit Master title style</a:t>
             </a:r>
-            <a:endParaRPr lang="en-US"/>
           </a:p>
         </p:txBody>
       </p:sp>
@@ -7337,7 +7200,7 @@
           <a:p>
             <a:pPr lvl="0"/>
             <a:r>
-              <a:rPr lang="en-US" smtClean="0"/>
+              <a:rPr lang="en-US"/>
               <a:t>Click to edit Master text styles</a:t>
             </a:r>
           </a:p>
@@ -7360,7 +7223,7 @@
           <a:p>
             <a:fld id="{5BCAD085-E8A6-8845-BD4E-CB4CCA059FC4}" type="datetimeFigureOut">
               <a:rPr lang="en-US" smtClean="0"/>
-              <a:t>1/27/13</a:t>
+              <a:t>9/7/2026</a:t>
             </a:fld>
             <a:endParaRPr lang="en-US"/>
           </a:p>
@@ -7469,10 +7332,9 @@
           <a:lstStyle/>
           <a:p>
             <a:r>
-              <a:rPr lang="en-US" smtClean="0"/>
+              <a:rPr lang="en-US"/>
               <a:t>Click to edit Master title style</a:t>
             </a:r>
-            <a:endParaRPr lang="en-US"/>
           </a:p>
         </p:txBody>
       </p:sp>
@@ -7503,38 +7365,37 @@
           <a:p>
             <a:pPr lvl="0"/>
             <a:r>
-              <a:rPr lang="en-US" smtClean="0"/>
+              <a:rPr lang="en-US"/>
               <a:t>Click to edit Master text styles</a:t>
             </a:r>
           </a:p>
           <a:p>
             <a:pPr lvl="1"/>
             <a:r>
-              <a:rPr lang="en-US" smtClean="0"/>
+              <a:rPr lang="en-US"/>
               <a:t>Second level</a:t>
             </a:r>
           </a:p>
           <a:p>
             <a:pPr lvl="2"/>
             <a:r>
-              <a:rPr lang="en-US" smtClean="0"/>
+              <a:rPr lang="en-US"/>
               <a:t>Third level</a:t>
             </a:r>
           </a:p>
           <a:p>
             <a:pPr lvl="3"/>
             <a:r>
-              <a:rPr lang="en-US" smtClean="0"/>
+              <a:rPr lang="en-US"/>
               <a:t>Fourth level</a:t>
             </a:r>
           </a:p>
           <a:p>
             <a:pPr lvl="4"/>
             <a:r>
-              <a:rPr lang="en-US" smtClean="0"/>
+              <a:rPr lang="en-US"/>
               <a:t>Fifth level</a:t>
             </a:r>
-            <a:endParaRPr lang="en-US"/>
           </a:p>
         </p:txBody>
       </p:sp>
@@ -7573,7 +7434,7 @@
           <a:p>
             <a:fld id="{5BCAD085-E8A6-8845-BD4E-CB4CCA059FC4}" type="datetimeFigureOut">
               <a:rPr lang="en-US" smtClean="0"/>
-              <a:t>1/27/13</a:t>
+              <a:t>9/7/2026</a:t>
             </a:fld>
             <a:endParaRPr lang="en-US"/>
           </a:p>
@@ -7932,7 +7793,7 @@
 </file>
 
 <file path=ppt/slides/slide1.xml><?xml version="1.0" encoding="utf-8"?>
-<p:sld xmlns:a="http://schemas.openxmlformats.org/drawingml/2006/main" xmlns:p="http://schemas.openxmlformats.org/presentationml/2006/main" xmlns:r="http://schemas.openxmlformats.org/officeDocument/2006/relationships">
+<p:sld xmlns:a="http://schemas.openxmlformats.org/drawingml/2006/main" xmlns:r="http://schemas.openxmlformats.org/officeDocument/2006/relationships" xmlns:p="http://schemas.openxmlformats.org/presentationml/2006/main">
   <p:cSld>
     <p:spTree>
       <p:nvGrpSpPr>
@@ -7940,7 +7801,14 @@
         <p:cNvGrpSpPr/>
         <p:nvPr/>
       </p:nvGrpSpPr>
-      <p:grpSpPr/>
+      <p:grpSpPr>
+        <a:xfrm>
+          <a:off x="0" y="0"/>
+          <a:ext cx="0" cy="0"/>
+          <a:chOff x="0" y="0"/>
+          <a:chExt cx="0" cy="0"/>
+        </a:xfrm>
+      </p:grpSpPr>
       <p:sp>
         <p:nvSpPr>
           <p:cNvPr id="2" name="Rectangle 1"/>
@@ -7982,6 +7850,7 @@
           <a:lstStyle/>
           <a:p>
             <a:pPr algn="ctr"/>
+            <a:endParaRPr/>
           </a:p>
         </p:txBody>
       </p:sp>
@@ -7994,7 +7863,7 @@
           <p:nvPr/>
         </p:nvPicPr>
         <p:blipFill>
-          <a:blip r:embed="rId2"/>
+          <a:blip r:embed="rId3"/>
           <a:stretch>
             <a:fillRect/>
           </a:stretch>
@@ -8239,6 +8108,12 @@
                 <a:latin typeface="Calibri"/>
               </a:defRPr>
             </a:pPr>
+            <a:endParaRPr sz="1200" b="0">
+              <a:solidFill>
+                <a:srgbClr val="666666"/>
+              </a:solidFill>
+              <a:latin typeface="Calibri"/>
+            </a:endParaRPr>
           </a:p>
           <a:p>
             <a:pPr algn="l">
@@ -8380,6 +8255,12 @@
                 <a:latin typeface="Calibri"/>
               </a:defRPr>
             </a:pPr>
+            <a:endParaRPr sz="1200" b="0">
+              <a:solidFill>
+                <a:srgbClr val="666666"/>
+              </a:solidFill>
+              <a:latin typeface="Calibri"/>
+            </a:endParaRPr>
           </a:p>
           <a:p>
             <a:pPr algn="l">
@@ -8417,7 +8298,7 @@
           <p:nvPr/>
         </p:nvPicPr>
         <p:blipFill>
-          <a:blip r:embed="rId3"/>
+          <a:blip r:embed="rId4"/>
           <a:stretch>
             <a:fillRect/>
           </a:stretch>
@@ -8489,7 +8370,7 @@
 </file>
 
 <file path=ppt/slides/slide10.xml><?xml version="1.0" encoding="utf-8"?>
-<p:sld xmlns:a="http://schemas.openxmlformats.org/drawingml/2006/main" xmlns:p="http://schemas.openxmlformats.org/presentationml/2006/main" xmlns:r="http://schemas.openxmlformats.org/officeDocument/2006/relationships">
+<p:sld xmlns:a="http://schemas.openxmlformats.org/drawingml/2006/main" xmlns:r="http://schemas.openxmlformats.org/officeDocument/2006/relationships" xmlns:p="http://schemas.openxmlformats.org/presentationml/2006/main">
   <p:cSld>
     <p:spTree>
       <p:nvGrpSpPr>
@@ -8497,7 +8378,14 @@
         <p:cNvGrpSpPr/>
         <p:nvPr/>
       </p:nvGrpSpPr>
-      <p:grpSpPr/>
+      <p:grpSpPr>
+        <a:xfrm>
+          <a:off x="0" y="0"/>
+          <a:ext cx="0" cy="0"/>
+          <a:chOff x="0" y="0"/>
+          <a:chExt cx="0" cy="0"/>
+        </a:xfrm>
+      </p:grpSpPr>
       <p:sp>
         <p:nvSpPr>
           <p:cNvPr id="2" name="Title 1"/>
@@ -8585,6 +8473,7 @@
           <a:lstStyle/>
           <a:p>
             <a:pPr algn="ctr"/>
+            <a:endParaRPr/>
           </a:p>
         </p:txBody>
       </p:sp>
@@ -8693,7 +8582,7 @@
           <p:nvPr/>
         </p:nvPicPr>
         <p:blipFill>
-          <a:blip r:embed="rId2"/>
+          <a:blip r:embed="rId3"/>
           <a:stretch>
             <a:fillRect/>
           </a:stretch>
@@ -8765,7 +8654,7 @@
 </file>
 
 <file path=ppt/slides/slide11.xml><?xml version="1.0" encoding="utf-8"?>
-<p:sld xmlns:a="http://schemas.openxmlformats.org/drawingml/2006/main" xmlns:p="http://schemas.openxmlformats.org/presentationml/2006/main" xmlns:r="http://schemas.openxmlformats.org/officeDocument/2006/relationships">
+<p:sld xmlns:a="http://schemas.openxmlformats.org/drawingml/2006/main" xmlns:r="http://schemas.openxmlformats.org/officeDocument/2006/relationships" xmlns:p="http://schemas.openxmlformats.org/presentationml/2006/main">
   <p:cSld>
     <p:spTree>
       <p:nvGrpSpPr>
@@ -8773,7 +8662,14 @@
         <p:cNvGrpSpPr/>
         <p:nvPr/>
       </p:nvGrpSpPr>
-      <p:grpSpPr/>
+      <p:grpSpPr>
+        <a:xfrm>
+          <a:off x="0" y="0"/>
+          <a:ext cx="0" cy="0"/>
+          <a:chOff x="0" y="0"/>
+          <a:chExt cx="0" cy="0"/>
+        </a:xfrm>
+      </p:grpSpPr>
       <p:sp>
         <p:nvSpPr>
           <p:cNvPr id="2" name="Title 1"/>
@@ -8861,6 +8757,7 @@
           <a:lstStyle/>
           <a:p>
             <a:pPr algn="ctr"/>
+            <a:endParaRPr/>
           </a:p>
         </p:txBody>
       </p:sp>
@@ -9017,7 +8914,7 @@
           <p:nvPr/>
         </p:nvPicPr>
         <p:blipFill>
-          <a:blip r:embed="rId2"/>
+          <a:blip r:embed="rId3"/>
           <a:stretch>
             <a:fillRect/>
           </a:stretch>
@@ -9089,7 +8986,7 @@
 </file>
 
 <file path=ppt/slides/slide12.xml><?xml version="1.0" encoding="utf-8"?>
-<p:sld xmlns:a="http://schemas.openxmlformats.org/drawingml/2006/main" xmlns:p="http://schemas.openxmlformats.org/presentationml/2006/main" xmlns:r="http://schemas.openxmlformats.org/officeDocument/2006/relationships">
+<p:sld xmlns:a="http://schemas.openxmlformats.org/drawingml/2006/main" xmlns:r="http://schemas.openxmlformats.org/officeDocument/2006/relationships" xmlns:p="http://schemas.openxmlformats.org/presentationml/2006/main">
   <p:cSld>
     <p:spTree>
       <p:nvGrpSpPr>
@@ -9097,7 +8994,14 @@
         <p:cNvGrpSpPr/>
         <p:nvPr/>
       </p:nvGrpSpPr>
-      <p:grpSpPr/>
+      <p:grpSpPr>
+        <a:xfrm>
+          <a:off x="0" y="0"/>
+          <a:ext cx="0" cy="0"/>
+          <a:chOff x="0" y="0"/>
+          <a:chExt cx="0" cy="0"/>
+        </a:xfrm>
+      </p:grpSpPr>
       <p:sp>
         <p:nvSpPr>
           <p:cNvPr id="2" name="Title 1"/>
@@ -9185,6 +9089,7 @@
           <a:lstStyle/>
           <a:p>
             <a:pPr algn="ctr"/>
+            <a:endParaRPr/>
           </a:p>
         </p:txBody>
       </p:sp>
@@ -9293,7 +9198,7 @@
           <p:nvPr/>
         </p:nvPicPr>
         <p:blipFill>
-          <a:blip r:embed="rId2"/>
+          <a:blip r:embed="rId3"/>
           <a:stretch>
             <a:fillRect/>
           </a:stretch>
@@ -9365,7 +9270,7 @@
 </file>
 
 <file path=ppt/slides/slide13.xml><?xml version="1.0" encoding="utf-8"?>
-<p:sld xmlns:a="http://schemas.openxmlformats.org/drawingml/2006/main" xmlns:p="http://schemas.openxmlformats.org/presentationml/2006/main" xmlns:r="http://schemas.openxmlformats.org/officeDocument/2006/relationships">
+<p:sld xmlns:a="http://schemas.openxmlformats.org/drawingml/2006/main" xmlns:r="http://schemas.openxmlformats.org/officeDocument/2006/relationships" xmlns:p="http://schemas.openxmlformats.org/presentationml/2006/main">
   <p:cSld>
     <p:spTree>
       <p:nvGrpSpPr>
@@ -9373,7 +9278,14 @@
         <p:cNvGrpSpPr/>
         <p:nvPr/>
       </p:nvGrpSpPr>
-      <p:grpSpPr/>
+      <p:grpSpPr>
+        <a:xfrm>
+          <a:off x="0" y="0"/>
+          <a:ext cx="0" cy="0"/>
+          <a:chOff x="0" y="0"/>
+          <a:chExt cx="0" cy="0"/>
+        </a:xfrm>
+      </p:grpSpPr>
       <p:sp>
         <p:nvSpPr>
           <p:cNvPr id="2" name="Title 1"/>
@@ -9461,6 +9373,7 @@
           <a:lstStyle/>
           <a:p>
             <a:pPr algn="ctr"/>
+            <a:endParaRPr/>
           </a:p>
         </p:txBody>
       </p:sp>
@@ -9617,7 +9530,7 @@
           <p:nvPr/>
         </p:nvPicPr>
         <p:blipFill>
-          <a:blip r:embed="rId2"/>
+          <a:blip r:embed="rId3"/>
           <a:stretch>
             <a:fillRect/>
           </a:stretch>
@@ -9672,7 +9585,7 @@
           </a:fontRef>
         </p:style>
         <p:txBody>
-          <a:bodyPr rtlCol="0" anchor="ctr" wrap="square" lIns="164592" rIns="164592" tIns="109728" bIns="109728"/>
+          <a:bodyPr wrap="square" lIns="164592" tIns="109728" rIns="164592" bIns="109728" rtlCol="0" anchor="ctr"/>
           <a:lstStyle/>
           <a:p>
             <a:pPr algn="ctr">
@@ -9856,7 +9769,7 @@
 </file>
 
 <file path=ppt/slides/slide14.xml><?xml version="1.0" encoding="utf-8"?>
-<p:sld xmlns:a="http://schemas.openxmlformats.org/drawingml/2006/main" xmlns:p="http://schemas.openxmlformats.org/presentationml/2006/main" xmlns:r="http://schemas.openxmlformats.org/officeDocument/2006/relationships">
+<p:sld xmlns:a="http://schemas.openxmlformats.org/drawingml/2006/main" xmlns:r="http://schemas.openxmlformats.org/officeDocument/2006/relationships" xmlns:p="http://schemas.openxmlformats.org/presentationml/2006/main">
   <p:cSld>
     <p:spTree>
       <p:nvGrpSpPr>
@@ -9864,7 +9777,14 @@
         <p:cNvGrpSpPr/>
         <p:nvPr/>
       </p:nvGrpSpPr>
-      <p:grpSpPr/>
+      <p:grpSpPr>
+        <a:xfrm>
+          <a:off x="0" y="0"/>
+          <a:ext cx="0" cy="0"/>
+          <a:chOff x="0" y="0"/>
+          <a:chExt cx="0" cy="0"/>
+        </a:xfrm>
+      </p:grpSpPr>
       <p:sp>
         <p:nvSpPr>
           <p:cNvPr id="2" name="Title 1"/>
@@ -9952,6 +9872,7 @@
           <a:lstStyle/>
           <a:p>
             <a:pPr algn="ctr"/>
+            <a:endParaRPr/>
           </a:p>
         </p:txBody>
       </p:sp>
@@ -10434,7 +10355,7 @@
           </a:fontRef>
         </p:style>
         <p:txBody>
-          <a:bodyPr rtlCol="0" anchor="ctr" wrap="square" lIns="164592" rIns="164592" tIns="73152" bIns="73152"/>
+          <a:bodyPr wrap="square" lIns="164592" tIns="73152" rIns="164592" bIns="73152" rtlCol="0" anchor="ctr"/>
           <a:lstStyle/>
           <a:p>
             <a:pPr algn="l"/>
@@ -10468,7 +10389,7 @@
 </file>
 
 <file path=ppt/slides/slide15.xml><?xml version="1.0" encoding="utf-8"?>
-<p:sld xmlns:a="http://schemas.openxmlformats.org/drawingml/2006/main" xmlns:p="http://schemas.openxmlformats.org/presentationml/2006/main" xmlns:r="http://schemas.openxmlformats.org/officeDocument/2006/relationships">
+<p:sld xmlns:a="http://schemas.openxmlformats.org/drawingml/2006/main" xmlns:r="http://schemas.openxmlformats.org/officeDocument/2006/relationships" xmlns:p="http://schemas.openxmlformats.org/presentationml/2006/main">
   <p:cSld>
     <p:spTree>
       <p:nvGrpSpPr>
@@ -10476,7 +10397,14 @@
         <p:cNvGrpSpPr/>
         <p:nvPr/>
       </p:nvGrpSpPr>
-      <p:grpSpPr/>
+      <p:grpSpPr>
+        <a:xfrm>
+          <a:off x="0" y="0"/>
+          <a:ext cx="0" cy="0"/>
+          <a:chOff x="0" y="0"/>
+          <a:chExt cx="0" cy="0"/>
+        </a:xfrm>
+      </p:grpSpPr>
       <p:sp>
         <p:nvSpPr>
           <p:cNvPr id="2" name="Title 1"/>
@@ -10564,6 +10492,7 @@
           <a:lstStyle/>
           <a:p>
             <a:pPr algn="ctr"/>
+            <a:endParaRPr/>
           </a:p>
         </p:txBody>
       </p:sp>
@@ -10720,7 +10649,7 @@
           <p:nvPr/>
         </p:nvPicPr>
         <p:blipFill>
-          <a:blip r:embed="rId2"/>
+          <a:blip r:embed="rId3"/>
           <a:stretch>
             <a:fillRect/>
           </a:stretch>
@@ -10823,7 +10752,7 @@
           </a:fontRef>
         </p:style>
         <p:txBody>
-          <a:bodyPr rtlCol="0" anchor="ctr" wrap="square" lIns="164592" rIns="164592" tIns="109728" bIns="109728"/>
+          <a:bodyPr wrap="square" lIns="164592" tIns="109728" rIns="164592" bIns="109728" rtlCol="0" anchor="ctr"/>
           <a:lstStyle/>
           <a:p>
             <a:pPr algn="ctr">
@@ -10959,7 +10888,7 @@
 </file>
 
 <file path=ppt/slides/slide16.xml><?xml version="1.0" encoding="utf-8"?>
-<p:sld xmlns:a="http://schemas.openxmlformats.org/drawingml/2006/main" xmlns:p="http://schemas.openxmlformats.org/presentationml/2006/main" xmlns:r="http://schemas.openxmlformats.org/officeDocument/2006/relationships">
+<p:sld xmlns:a="http://schemas.openxmlformats.org/drawingml/2006/main" xmlns:r="http://schemas.openxmlformats.org/officeDocument/2006/relationships" xmlns:p="http://schemas.openxmlformats.org/presentationml/2006/main">
   <p:cSld>
     <p:spTree>
       <p:nvGrpSpPr>
@@ -10967,7 +10896,14 @@
         <p:cNvGrpSpPr/>
         <p:nvPr/>
       </p:nvGrpSpPr>
-      <p:grpSpPr/>
+      <p:grpSpPr>
+        <a:xfrm>
+          <a:off x="0" y="0"/>
+          <a:ext cx="0" cy="0"/>
+          <a:chOff x="0" y="0"/>
+          <a:chExt cx="0" cy="0"/>
+        </a:xfrm>
+      </p:grpSpPr>
       <p:sp>
         <p:nvSpPr>
           <p:cNvPr id="2" name="Title 1"/>
@@ -11055,6 +10991,7 @@
           <a:lstStyle/>
           <a:p>
             <a:pPr algn="ctr"/>
+            <a:endParaRPr/>
           </a:p>
         </p:txBody>
       </p:sp>
@@ -11562,7 +11499,7 @@
           </a:fontRef>
         </p:style>
         <p:txBody>
-          <a:bodyPr rtlCol="0" anchor="ctr" wrap="square" lIns="164592" rIns="164592" tIns="73152" bIns="73152"/>
+          <a:bodyPr wrap="square" lIns="164592" tIns="73152" rIns="164592" bIns="73152" rtlCol="0" anchor="ctr"/>
           <a:lstStyle/>
           <a:p>
             <a:pPr algn="l"/>
@@ -11596,7 +11533,7 @@
 </file>
 
 <file path=ppt/slides/slide17.xml><?xml version="1.0" encoding="utf-8"?>
-<p:sld xmlns:a="http://schemas.openxmlformats.org/drawingml/2006/main" xmlns:p="http://schemas.openxmlformats.org/presentationml/2006/main" xmlns:r="http://schemas.openxmlformats.org/officeDocument/2006/relationships">
+<p:sld xmlns:a="http://schemas.openxmlformats.org/drawingml/2006/main" xmlns:r="http://schemas.openxmlformats.org/officeDocument/2006/relationships" xmlns:p="http://schemas.openxmlformats.org/presentationml/2006/main">
   <p:cSld>
     <p:spTree>
       <p:nvGrpSpPr>
@@ -11604,7 +11541,14 @@
         <p:cNvGrpSpPr/>
         <p:nvPr/>
       </p:nvGrpSpPr>
-      <p:grpSpPr/>
+      <p:grpSpPr>
+        <a:xfrm>
+          <a:off x="0" y="0"/>
+          <a:ext cx="0" cy="0"/>
+          <a:chOff x="0" y="0"/>
+          <a:chExt cx="0" cy="0"/>
+        </a:xfrm>
+      </p:grpSpPr>
       <p:sp>
         <p:nvSpPr>
           <p:cNvPr id="2" name="Title 1"/>
@@ -11692,6 +11636,7 @@
           <a:lstStyle/>
           <a:p>
             <a:pPr algn="ctr"/>
+            <a:endParaRPr/>
           </a:p>
         </p:txBody>
       </p:sp>
@@ -11832,7 +11777,7 @@
           </a:fontRef>
         </p:style>
         <p:txBody>
-          <a:bodyPr rtlCol="0" anchor="ctr" wrap="square" lIns="45720" rIns="45720" tIns="18288" bIns="18288"/>
+          <a:bodyPr wrap="square" lIns="45720" tIns="18288" rIns="45720" bIns="18288" rtlCol="0" anchor="ctr"/>
           <a:lstStyle/>
           <a:p>
             <a:pPr algn="ctr">
@@ -11950,7 +11895,7 @@
           </a:fontRef>
         </p:style>
         <p:txBody>
-          <a:bodyPr rtlCol="0" anchor="ctr" wrap="square" lIns="45720" rIns="45720" tIns="18288" bIns="18288"/>
+          <a:bodyPr wrap="square" lIns="45720" tIns="18288" rIns="45720" bIns="18288" rtlCol="0" anchor="ctr"/>
           <a:lstStyle/>
           <a:p>
             <a:pPr algn="ctr">
@@ -12068,7 +12013,7 @@
           </a:fontRef>
         </p:style>
         <p:txBody>
-          <a:bodyPr rtlCol="0" anchor="ctr" wrap="square" lIns="45720" rIns="45720" tIns="18288" bIns="18288"/>
+          <a:bodyPr wrap="square" lIns="45720" tIns="18288" rIns="45720" bIns="18288" rtlCol="0" anchor="ctr"/>
           <a:lstStyle/>
           <a:p>
             <a:pPr algn="ctr">
@@ -12260,7 +12205,7 @@
           </a:fontRef>
         </p:style>
         <p:txBody>
-          <a:bodyPr rtlCol="0" anchor="ctr" wrap="square" lIns="45720" rIns="45720" tIns="18288" bIns="18288"/>
+          <a:bodyPr wrap="square" lIns="45720" tIns="18288" rIns="45720" bIns="18288" rtlCol="0" anchor="ctr"/>
           <a:lstStyle/>
           <a:p>
             <a:pPr algn="ctr">
@@ -12440,7 +12385,7 @@
           </a:fontRef>
         </p:style>
         <p:txBody>
-          <a:bodyPr rtlCol="0" anchor="ctr" wrap="square" lIns="45720" rIns="45720" tIns="18288" bIns="18288"/>
+          <a:bodyPr wrap="square" lIns="45720" tIns="18288" rIns="45720" bIns="18288" rtlCol="0" anchor="ctr"/>
           <a:lstStyle/>
           <a:p>
             <a:pPr algn="ctr">
@@ -12620,7 +12565,7 @@
           </a:fontRef>
         </p:style>
         <p:txBody>
-          <a:bodyPr rtlCol="0" anchor="ctr" wrap="square" lIns="45720" rIns="45720" tIns="18288" bIns="18288"/>
+          <a:bodyPr wrap="square" lIns="45720" tIns="18288" rIns="45720" bIns="18288" rtlCol="0" anchor="ctr"/>
           <a:lstStyle/>
           <a:p>
             <a:pPr algn="ctr">
@@ -12800,7 +12745,7 @@
           </a:fontRef>
         </p:style>
         <p:txBody>
-          <a:bodyPr rtlCol="0" anchor="ctr" wrap="square" lIns="164592" rIns="164592" tIns="73152" bIns="73152"/>
+          <a:bodyPr wrap="square" lIns="164592" tIns="73152" rIns="164592" bIns="73152" rtlCol="0" anchor="ctr"/>
           <a:lstStyle/>
           <a:p>
             <a:pPr algn="l"/>
@@ -12834,7 +12779,7 @@
 </file>
 
 <file path=ppt/slides/slide18.xml><?xml version="1.0" encoding="utf-8"?>
-<p:sld xmlns:a="http://schemas.openxmlformats.org/drawingml/2006/main" xmlns:p="http://schemas.openxmlformats.org/presentationml/2006/main" xmlns:r="http://schemas.openxmlformats.org/officeDocument/2006/relationships">
+<p:sld xmlns:a="http://schemas.openxmlformats.org/drawingml/2006/main" xmlns:r="http://schemas.openxmlformats.org/officeDocument/2006/relationships" xmlns:p="http://schemas.openxmlformats.org/presentationml/2006/main">
   <p:cSld>
     <p:spTree>
       <p:nvGrpSpPr>
@@ -12842,7 +12787,14 @@
         <p:cNvGrpSpPr/>
         <p:nvPr/>
       </p:nvGrpSpPr>
-      <p:grpSpPr/>
+      <p:grpSpPr>
+        <a:xfrm>
+          <a:off x="0" y="0"/>
+          <a:ext cx="0" cy="0"/>
+          <a:chOff x="0" y="0"/>
+          <a:chExt cx="0" cy="0"/>
+        </a:xfrm>
+      </p:grpSpPr>
       <p:sp>
         <p:nvSpPr>
           <p:cNvPr id="2" name="Title 1"/>
@@ -12930,6 +12882,7 @@
           <a:lstStyle/>
           <a:p>
             <a:pPr algn="ctr"/>
+            <a:endParaRPr/>
           </a:p>
         </p:txBody>
       </p:sp>
@@ -13068,7 +13021,7 @@
           </a:fontRef>
         </p:style>
         <p:txBody>
-          <a:bodyPr rtlCol="0" anchor="ctr" wrap="square" lIns="45720" rIns="45720" tIns="18288" bIns="18288"/>
+          <a:bodyPr wrap="square" lIns="45720" tIns="18288" rIns="45720" bIns="18288" rtlCol="0" anchor="ctr"/>
           <a:lstStyle/>
           <a:p>
             <a:pPr algn="ctr">
@@ -13616,7 +13569,7 @@
           </a:fontRef>
         </p:style>
         <p:txBody>
-          <a:bodyPr rtlCol="0" anchor="ctr" wrap="square" lIns="45720" rIns="45720" tIns="18288" bIns="18288"/>
+          <a:bodyPr wrap="square" lIns="45720" tIns="18288" rIns="45720" bIns="18288" rtlCol="0" anchor="ctr"/>
           <a:lstStyle/>
           <a:p>
             <a:pPr algn="ctr">
@@ -14068,7 +14021,7 @@
           </a:fontRef>
         </p:style>
         <p:txBody>
-          <a:bodyPr rtlCol="0" anchor="ctr" wrap="square" lIns="45720" rIns="45720" tIns="18288" bIns="18288"/>
+          <a:bodyPr wrap="square" lIns="45720" tIns="18288" rIns="45720" bIns="18288" rtlCol="0" anchor="ctr"/>
           <a:lstStyle/>
           <a:p>
             <a:pPr algn="ctr">
@@ -14586,7 +14539,7 @@
 </file>
 
 <file path=ppt/slides/slide19.xml><?xml version="1.0" encoding="utf-8"?>
-<p:sld xmlns:a="http://schemas.openxmlformats.org/drawingml/2006/main" xmlns:p="http://schemas.openxmlformats.org/presentationml/2006/main" xmlns:r="http://schemas.openxmlformats.org/officeDocument/2006/relationships">
+<p:sld xmlns:a="http://schemas.openxmlformats.org/drawingml/2006/main" xmlns:r="http://schemas.openxmlformats.org/officeDocument/2006/relationships" xmlns:p="http://schemas.openxmlformats.org/presentationml/2006/main">
   <p:cSld>
     <p:spTree>
       <p:nvGrpSpPr>
@@ -14594,7 +14547,14 @@
         <p:cNvGrpSpPr/>
         <p:nvPr/>
       </p:nvGrpSpPr>
-      <p:grpSpPr/>
+      <p:grpSpPr>
+        <a:xfrm>
+          <a:off x="0" y="0"/>
+          <a:ext cx="0" cy="0"/>
+          <a:chOff x="0" y="0"/>
+          <a:chExt cx="0" cy="0"/>
+        </a:xfrm>
+      </p:grpSpPr>
       <p:sp>
         <p:nvSpPr>
           <p:cNvPr id="2" name="Title 1"/>
@@ -14682,6 +14642,7 @@
           <a:lstStyle/>
           <a:p>
             <a:pPr algn="ctr"/>
+            <a:endParaRPr/>
           </a:p>
         </p:txBody>
       </p:sp>
@@ -14821,7 +14782,7 @@
           </a:fontRef>
         </p:style>
         <p:txBody>
-          <a:bodyPr rtlCol="0" anchor="ctr" wrap="square" lIns="164592" rIns="164592" tIns="109728" bIns="109728"/>
+          <a:bodyPr wrap="square" lIns="164592" tIns="109728" rIns="164592" bIns="109728" rtlCol="0" anchor="ctr"/>
           <a:lstStyle/>
           <a:p>
             <a:pPr algn="ctr">
@@ -14957,7 +14918,7 @@
 </file>
 
 <file path=ppt/slides/slide2.xml><?xml version="1.0" encoding="utf-8"?>
-<p:sld xmlns:a="http://schemas.openxmlformats.org/drawingml/2006/main" xmlns:p="http://schemas.openxmlformats.org/presentationml/2006/main" xmlns:r="http://schemas.openxmlformats.org/officeDocument/2006/relationships">
+<p:sld xmlns:a="http://schemas.openxmlformats.org/drawingml/2006/main" xmlns:r="http://schemas.openxmlformats.org/officeDocument/2006/relationships" xmlns:p="http://schemas.openxmlformats.org/presentationml/2006/main">
   <p:cSld>
     <p:spTree>
       <p:nvGrpSpPr>
@@ -14965,7 +14926,14 @@
         <p:cNvGrpSpPr/>
         <p:nvPr/>
       </p:nvGrpSpPr>
-      <p:grpSpPr/>
+      <p:grpSpPr>
+        <a:xfrm>
+          <a:off x="0" y="0"/>
+          <a:ext cx="0" cy="0"/>
+          <a:chOff x="0" y="0"/>
+          <a:chExt cx="0" cy="0"/>
+        </a:xfrm>
+      </p:grpSpPr>
       <p:sp>
         <p:nvSpPr>
           <p:cNvPr id="2" name="Title 1"/>
@@ -15053,6 +15021,7 @@
           <a:lstStyle/>
           <a:p>
             <a:pPr algn="ctr"/>
+            <a:endParaRPr/>
           </a:p>
         </p:txBody>
       </p:sp>
@@ -15407,7 +15376,7 @@
 </file>
 
 <file path=ppt/slides/slide20.xml><?xml version="1.0" encoding="utf-8"?>
-<p:sld xmlns:a="http://schemas.openxmlformats.org/drawingml/2006/main" xmlns:p="http://schemas.openxmlformats.org/presentationml/2006/main" xmlns:r="http://schemas.openxmlformats.org/officeDocument/2006/relationships">
+<p:sld xmlns:a="http://schemas.openxmlformats.org/drawingml/2006/main" xmlns:r="http://schemas.openxmlformats.org/officeDocument/2006/relationships" xmlns:p="http://schemas.openxmlformats.org/presentationml/2006/main">
   <p:cSld>
     <p:spTree>
       <p:nvGrpSpPr>
@@ -15415,7 +15384,14 @@
         <p:cNvGrpSpPr/>
         <p:nvPr/>
       </p:nvGrpSpPr>
-      <p:grpSpPr/>
+      <p:grpSpPr>
+        <a:xfrm>
+          <a:off x="0" y="0"/>
+          <a:ext cx="0" cy="0"/>
+          <a:chOff x="0" y="0"/>
+          <a:chExt cx="0" cy="0"/>
+        </a:xfrm>
+      </p:grpSpPr>
       <p:sp>
         <p:nvSpPr>
           <p:cNvPr id="2" name="Title 1"/>
@@ -15503,6 +15479,7 @@
           <a:lstStyle/>
           <a:p>
             <a:pPr algn="ctr"/>
+            <a:endParaRPr/>
           </a:p>
         </p:txBody>
       </p:sp>
@@ -15978,7 +15955,7 @@
 </file>
 
 <file path=ppt/slides/slide21.xml><?xml version="1.0" encoding="utf-8"?>
-<p:sld xmlns:a="http://schemas.openxmlformats.org/drawingml/2006/main" xmlns:p="http://schemas.openxmlformats.org/presentationml/2006/main" xmlns:r="http://schemas.openxmlformats.org/officeDocument/2006/relationships">
+<p:sld xmlns:a="http://schemas.openxmlformats.org/drawingml/2006/main" xmlns:r="http://schemas.openxmlformats.org/officeDocument/2006/relationships" xmlns:p="http://schemas.openxmlformats.org/presentationml/2006/main">
   <p:cSld>
     <p:spTree>
       <p:nvGrpSpPr>
@@ -15986,7 +15963,14 @@
         <p:cNvGrpSpPr/>
         <p:nvPr/>
       </p:nvGrpSpPr>
-      <p:grpSpPr/>
+      <p:grpSpPr>
+        <a:xfrm>
+          <a:off x="0" y="0"/>
+          <a:ext cx="0" cy="0"/>
+          <a:chOff x="0" y="0"/>
+          <a:chExt cx="0" cy="0"/>
+        </a:xfrm>
+      </p:grpSpPr>
       <p:sp>
         <p:nvSpPr>
           <p:cNvPr id="2" name="Title 1"/>
@@ -16074,6 +16058,7 @@
           <a:lstStyle/>
           <a:p>
             <a:pPr algn="ctr"/>
+            <a:endParaRPr/>
           </a:p>
         </p:txBody>
       </p:sp>
@@ -16230,7 +16215,7 @@
           <p:nvPr/>
         </p:nvPicPr>
         <p:blipFill>
-          <a:blip r:embed="rId2"/>
+          <a:blip r:embed="rId3"/>
           <a:stretch>
             <a:fillRect/>
           </a:stretch>
@@ -16254,7 +16239,7 @@
           <p:nvPr/>
         </p:nvPicPr>
         <p:blipFill>
-          <a:blip r:embed="rId3"/>
+          <a:blip r:embed="rId4"/>
           <a:stretch>
             <a:fillRect/>
           </a:stretch>
@@ -16406,7 +16391,7 @@
           </a:fontRef>
         </p:style>
         <p:txBody>
-          <a:bodyPr rtlCol="0" anchor="ctr" wrap="square" lIns="164592" rIns="164592" tIns="73152" bIns="73152"/>
+          <a:bodyPr wrap="square" lIns="164592" tIns="73152" rIns="164592" bIns="73152" rtlCol="0" anchor="ctr"/>
           <a:lstStyle/>
           <a:p>
             <a:pPr algn="l"/>
@@ -16440,7 +16425,7 @@
 </file>
 
 <file path=ppt/slides/slide22.xml><?xml version="1.0" encoding="utf-8"?>
-<p:sld xmlns:a="http://schemas.openxmlformats.org/drawingml/2006/main" xmlns:p="http://schemas.openxmlformats.org/presentationml/2006/main" xmlns:r="http://schemas.openxmlformats.org/officeDocument/2006/relationships">
+<p:sld xmlns:a="http://schemas.openxmlformats.org/drawingml/2006/main" xmlns:r="http://schemas.openxmlformats.org/officeDocument/2006/relationships" xmlns:p="http://schemas.openxmlformats.org/presentationml/2006/main">
   <p:cSld>
     <p:spTree>
       <p:nvGrpSpPr>
@@ -16448,7 +16433,14 @@
         <p:cNvGrpSpPr/>
         <p:nvPr/>
       </p:nvGrpSpPr>
-      <p:grpSpPr/>
+      <p:grpSpPr>
+        <a:xfrm>
+          <a:off x="0" y="0"/>
+          <a:ext cx="0" cy="0"/>
+          <a:chOff x="0" y="0"/>
+          <a:chExt cx="0" cy="0"/>
+        </a:xfrm>
+      </p:grpSpPr>
       <p:sp>
         <p:nvSpPr>
           <p:cNvPr id="2" name="TextBox 1"/>
@@ -16586,6 +16578,7 @@
           <a:lstStyle/>
           <a:p>
             <a:pPr algn="ctr"/>
+            <a:endParaRPr/>
           </a:p>
         </p:txBody>
       </p:sp>
@@ -16726,7 +16719,7 @@
           </a:fontRef>
         </p:style>
         <p:txBody>
-          <a:bodyPr rtlCol="0" anchor="ctr" wrap="square" lIns="73152" rIns="73152"/>
+          <a:bodyPr wrap="square" lIns="73152" rIns="73152" rtlCol="0" anchor="ctr"/>
           <a:lstStyle/>
           <a:p>
             <a:pPr algn="ctr">
@@ -16844,7 +16837,7 @@
           </a:fontRef>
         </p:style>
         <p:txBody>
-          <a:bodyPr rtlCol="0" anchor="ctr" wrap="square" lIns="73152" rIns="73152"/>
+          <a:bodyPr wrap="square" lIns="73152" rIns="73152" rtlCol="0" anchor="ctr"/>
           <a:lstStyle/>
           <a:p>
             <a:pPr algn="ctr">
@@ -16962,7 +16955,7 @@
           </a:fontRef>
         </p:style>
         <p:txBody>
-          <a:bodyPr rtlCol="0" anchor="ctr" wrap="square" lIns="73152" rIns="73152"/>
+          <a:bodyPr wrap="square" lIns="73152" rIns="73152" rtlCol="0" anchor="ctr"/>
           <a:lstStyle/>
           <a:p>
             <a:pPr algn="ctr">
@@ -17032,7 +17025,7 @@
           </a:fontRef>
         </p:style>
         <p:txBody>
-          <a:bodyPr rtlCol="0" anchor="ctr" wrap="square" lIns="73152" rIns="73152"/>
+          <a:bodyPr wrap="square" lIns="73152" rIns="73152" rtlCol="0" anchor="ctr"/>
           <a:lstStyle/>
           <a:p>
             <a:pPr algn="ctr">
@@ -17102,7 +17095,7 @@
           </a:fontRef>
         </p:style>
         <p:txBody>
-          <a:bodyPr rtlCol="0" anchor="ctr" wrap="square" lIns="73152" rIns="73152"/>
+          <a:bodyPr wrap="square" lIns="73152" rIns="73152" rtlCol="0" anchor="ctr"/>
           <a:lstStyle/>
           <a:p>
             <a:pPr algn="ctr">
@@ -17140,7 +17133,7 @@
 </file>
 
 <file path=ppt/slides/slide23.xml><?xml version="1.0" encoding="utf-8"?>
-<p:sld xmlns:a="http://schemas.openxmlformats.org/drawingml/2006/main" xmlns:p="http://schemas.openxmlformats.org/presentationml/2006/main" xmlns:r="http://schemas.openxmlformats.org/officeDocument/2006/relationships">
+<p:sld xmlns:a="http://schemas.openxmlformats.org/drawingml/2006/main" xmlns:r="http://schemas.openxmlformats.org/officeDocument/2006/relationships" xmlns:p="http://schemas.openxmlformats.org/presentationml/2006/main">
   <p:cSld>
     <p:spTree>
       <p:nvGrpSpPr>
@@ -17148,7 +17141,14 @@
         <p:cNvGrpSpPr/>
         <p:nvPr/>
       </p:nvGrpSpPr>
-      <p:grpSpPr/>
+      <p:grpSpPr>
+        <a:xfrm>
+          <a:off x="0" y="0"/>
+          <a:ext cx="0" cy="0"/>
+          <a:chOff x="0" y="0"/>
+          <a:chExt cx="0" cy="0"/>
+        </a:xfrm>
+      </p:grpSpPr>
       <p:sp>
         <p:nvSpPr>
           <p:cNvPr id="2" name="Title 1"/>
@@ -17236,6 +17236,7 @@
           <a:lstStyle/>
           <a:p>
             <a:pPr algn="ctr"/>
+            <a:endParaRPr/>
           </a:p>
         </p:txBody>
       </p:sp>
@@ -17471,6 +17472,12 @@
                 <a:latin typeface="Calibri"/>
               </a:defRPr>
             </a:pPr>
+            <a:endParaRPr sz="2100" b="0">
+              <a:solidFill>
+                <a:srgbClr val="222222"/>
+              </a:solidFill>
+              <a:latin typeface="Calibri"/>
+            </a:endParaRPr>
           </a:p>
           <a:p>
             <a:pPr algn="l">
@@ -17565,7 +17572,7 @@
           </a:fontRef>
         </p:style>
         <p:txBody>
-          <a:bodyPr rtlCol="0" anchor="ctr" wrap="square" lIns="164592" rIns="164592" tIns="73152" bIns="73152"/>
+          <a:bodyPr wrap="square" lIns="164592" tIns="73152" rIns="164592" bIns="73152" rtlCol="0" anchor="ctr"/>
           <a:lstStyle/>
           <a:p>
             <a:pPr algn="l"/>
@@ -17599,7 +17606,7 @@
 </file>
 
 <file path=ppt/slides/slide24.xml><?xml version="1.0" encoding="utf-8"?>
-<p:sld xmlns:a="http://schemas.openxmlformats.org/drawingml/2006/main" xmlns:p="http://schemas.openxmlformats.org/presentationml/2006/main" xmlns:r="http://schemas.openxmlformats.org/officeDocument/2006/relationships">
+<p:sld xmlns:a="http://schemas.openxmlformats.org/drawingml/2006/main" xmlns:r="http://schemas.openxmlformats.org/officeDocument/2006/relationships" xmlns:p="http://schemas.openxmlformats.org/presentationml/2006/main">
   <p:cSld>
     <p:spTree>
       <p:nvGrpSpPr>
@@ -17607,7 +17614,14 @@
         <p:cNvGrpSpPr/>
         <p:nvPr/>
       </p:nvGrpSpPr>
-      <p:grpSpPr/>
+      <p:grpSpPr>
+        <a:xfrm>
+          <a:off x="0" y="0"/>
+          <a:ext cx="0" cy="0"/>
+          <a:chOff x="0" y="0"/>
+          <a:chExt cx="0" cy="0"/>
+        </a:xfrm>
+      </p:grpSpPr>
       <p:sp>
         <p:nvSpPr>
           <p:cNvPr id="2" name="Title 1"/>
@@ -17643,7 +17657,7 @@
               </a:defRPr>
             </a:pPr>
             <a:r>
-              <a:rPr sz="2800" b="1">
+              <a:rPr sz="2800" b="1" dirty="0">
                 <a:solidFill>
                   <a:srgbClr val="1F3A5F"/>
                 </a:solidFill>
@@ -17695,6 +17709,7 @@
           <a:lstStyle/>
           <a:p>
             <a:pPr algn="ctr"/>
+            <a:endParaRPr/>
           </a:p>
         </p:txBody>
       </p:sp>
@@ -18051,15 +18066,15 @@
           <p:nvPr/>
         </p:nvPicPr>
         <p:blipFill>
-          <a:blip r:embed="rId2"/>
+          <a:blip r:embed="rId3"/>
           <a:stretch>
             <a:fillRect/>
           </a:stretch>
         </p:blipFill>
         <p:spPr>
           <a:xfrm>
-            <a:off x="8556736" y="1865199"/>
-            <a:ext cx="3132039" cy="1938881"/>
+            <a:off x="7497355" y="1415740"/>
+            <a:ext cx="4571827" cy="2830179"/>
           </a:xfrm>
           <a:prstGeom prst="rect">
             <a:avLst/>
@@ -18074,8 +18089,8 @@
         </p:nvSpPr>
         <p:spPr>
           <a:xfrm>
-            <a:off x="8556736" y="3858944"/>
-            <a:ext cx="3132039" cy="566928"/>
+            <a:off x="8475027" y="4364791"/>
+            <a:ext cx="3132039" cy="553998"/>
           </a:xfrm>
           <a:prstGeom prst="rect">
             <a:avLst/>
@@ -18103,13 +18118,31 @@
               </a:defRPr>
             </a:pPr>
             <a:r>
+              <a:rPr lang="en-US" sz="1800" b="0">
+                <a:solidFill>
+                  <a:srgbClr val="666666"/>
+                </a:solidFill>
+                <a:latin typeface="Calibri"/>
+              </a:rPr>
+              <a:t>Additional board manager URLs</a:t>
+            </a:r>
+            <a:r>
               <a:rPr sz="1800" b="0">
                 <a:solidFill>
                   <a:srgbClr val="666666"/>
                 </a:solidFill>
                 <a:latin typeface="Calibri"/>
               </a:rPr>
-              <a:t>It is the bottom row</a:t>
+              <a:t> </a:t>
+            </a:r>
+            <a:r>
+              <a:rPr sz="1800" b="0" dirty="0">
+                <a:solidFill>
+                  <a:srgbClr val="666666"/>
+                </a:solidFill>
+                <a:latin typeface="Calibri"/>
+              </a:rPr>
+              <a:t>is the bottom row</a:t>
             </a:r>
           </a:p>
         </p:txBody>
@@ -18155,7 +18188,7 @@
           </a:fontRef>
         </p:style>
         <p:txBody>
-          <a:bodyPr rtlCol="0" anchor="ctr" wrap="square" lIns="164592" rIns="164592" tIns="73152" bIns="73152"/>
+          <a:bodyPr wrap="square" lIns="164592" tIns="73152" rIns="164592" bIns="73152" rtlCol="0" anchor="ctr"/>
           <a:lstStyle/>
           <a:p>
             <a:pPr algn="l"/>
@@ -18189,7 +18222,7 @@
 </file>
 
 <file path=ppt/slides/slide25.xml><?xml version="1.0" encoding="utf-8"?>
-<p:sld xmlns:a="http://schemas.openxmlformats.org/drawingml/2006/main" xmlns:p="http://schemas.openxmlformats.org/presentationml/2006/main" xmlns:r="http://schemas.openxmlformats.org/officeDocument/2006/relationships">
+<p:sld xmlns:a="http://schemas.openxmlformats.org/drawingml/2006/main" xmlns:r="http://schemas.openxmlformats.org/officeDocument/2006/relationships" xmlns:p="http://schemas.openxmlformats.org/presentationml/2006/main">
   <p:cSld>
     <p:spTree>
       <p:nvGrpSpPr>
@@ -18197,7 +18230,14 @@
         <p:cNvGrpSpPr/>
         <p:nvPr/>
       </p:nvGrpSpPr>
-      <p:grpSpPr/>
+      <p:grpSpPr>
+        <a:xfrm>
+          <a:off x="0" y="0"/>
+          <a:ext cx="0" cy="0"/>
+          <a:chOff x="0" y="0"/>
+          <a:chExt cx="0" cy="0"/>
+        </a:xfrm>
+      </p:grpSpPr>
       <p:sp>
         <p:nvSpPr>
           <p:cNvPr id="2" name="Title 1"/>
@@ -18285,6 +18325,7 @@
           <a:lstStyle/>
           <a:p>
             <a:pPr algn="ctr"/>
+            <a:endParaRPr/>
           </a:p>
         </p:txBody>
       </p:sp>
@@ -18470,6 +18511,12 @@
                 <a:latin typeface="Calibri"/>
               </a:defRPr>
             </a:pPr>
+            <a:endParaRPr sz="2100" b="0">
+              <a:solidFill>
+                <a:srgbClr val="222222"/>
+              </a:solidFill>
+              <a:latin typeface="Calibri"/>
+            </a:endParaRPr>
           </a:p>
           <a:p>
             <a:pPr algn="l">
@@ -18561,6 +18608,12 @@
                 <a:latin typeface="Calibri"/>
               </a:defRPr>
             </a:pPr>
+            <a:endParaRPr sz="2100" b="0">
+              <a:solidFill>
+                <a:srgbClr val="222222"/>
+              </a:solidFill>
+              <a:latin typeface="Calibri"/>
+            </a:endParaRPr>
           </a:p>
           <a:p>
             <a:pPr algn="l">
@@ -18630,7 +18683,7 @@
           </a:fontRef>
         </p:style>
         <p:txBody>
-          <a:bodyPr rtlCol="0" anchor="ctr" wrap="square" lIns="164592" rIns="164592" tIns="73152" bIns="73152"/>
+          <a:bodyPr wrap="square" lIns="164592" tIns="73152" rIns="164592" bIns="73152" rtlCol="0" anchor="ctr"/>
           <a:lstStyle/>
           <a:p>
             <a:pPr algn="l"/>
@@ -18664,7 +18717,7 @@
 </file>
 
 <file path=ppt/slides/slide26.xml><?xml version="1.0" encoding="utf-8"?>
-<p:sld xmlns:a="http://schemas.openxmlformats.org/drawingml/2006/main" xmlns:p="http://schemas.openxmlformats.org/presentationml/2006/main" xmlns:r="http://schemas.openxmlformats.org/officeDocument/2006/relationships">
+<p:sld xmlns:a="http://schemas.openxmlformats.org/drawingml/2006/main" xmlns:r="http://schemas.openxmlformats.org/officeDocument/2006/relationships" xmlns:p="http://schemas.openxmlformats.org/presentationml/2006/main">
   <p:cSld>
     <p:spTree>
       <p:nvGrpSpPr>
@@ -18672,7 +18725,14 @@
         <p:cNvGrpSpPr/>
         <p:nvPr/>
       </p:nvGrpSpPr>
-      <p:grpSpPr/>
+      <p:grpSpPr>
+        <a:xfrm>
+          <a:off x="0" y="0"/>
+          <a:ext cx="0" cy="0"/>
+          <a:chOff x="0" y="0"/>
+          <a:chExt cx="0" cy="0"/>
+        </a:xfrm>
+      </p:grpSpPr>
       <p:sp>
         <p:nvSpPr>
           <p:cNvPr id="2" name="Title 1"/>
@@ -18760,6 +18820,7 @@
           <a:lstStyle/>
           <a:p>
             <a:pPr algn="ctr"/>
+            <a:endParaRPr/>
           </a:p>
         </p:txBody>
       </p:sp>
@@ -18920,6 +18981,12 @@
                 <a:latin typeface="Calibri"/>
               </a:defRPr>
             </a:pPr>
+            <a:endParaRPr sz="2700" b="0">
+              <a:solidFill>
+                <a:srgbClr val="222222"/>
+              </a:solidFill>
+              <a:latin typeface="Calibri"/>
+            </a:endParaRPr>
           </a:p>
           <a:p>
             <a:pPr algn="l">
@@ -18986,6 +19053,12 @@
                 <a:latin typeface="Calibri"/>
               </a:defRPr>
             </a:pPr>
+            <a:endParaRPr sz="2700" b="0">
+              <a:solidFill>
+                <a:srgbClr val="222222"/>
+              </a:solidFill>
+              <a:latin typeface="Calibri"/>
+            </a:endParaRPr>
           </a:p>
           <a:p>
             <a:pPr algn="l">
@@ -19055,7 +19128,7 @@
           </a:fontRef>
         </p:style>
         <p:txBody>
-          <a:bodyPr rtlCol="0" anchor="ctr" wrap="square" lIns="164592" rIns="164592" tIns="73152" bIns="73152"/>
+          <a:bodyPr wrap="square" lIns="164592" tIns="73152" rIns="164592" bIns="73152" rtlCol="0" anchor="ctr"/>
           <a:lstStyle/>
           <a:p>
             <a:pPr algn="l"/>
@@ -19089,7 +19162,7 @@
 </file>
 
 <file path=ppt/slides/slide27.xml><?xml version="1.0" encoding="utf-8"?>
-<p:sld xmlns:a="http://schemas.openxmlformats.org/drawingml/2006/main" xmlns:p="http://schemas.openxmlformats.org/presentationml/2006/main" xmlns:r="http://schemas.openxmlformats.org/officeDocument/2006/relationships">
+<p:sld xmlns:a="http://schemas.openxmlformats.org/drawingml/2006/main" xmlns:r="http://schemas.openxmlformats.org/officeDocument/2006/relationships" xmlns:p="http://schemas.openxmlformats.org/presentationml/2006/main">
   <p:cSld>
     <p:spTree>
       <p:nvGrpSpPr>
@@ -19097,7 +19170,14 @@
         <p:cNvGrpSpPr/>
         <p:nvPr/>
       </p:nvGrpSpPr>
-      <p:grpSpPr/>
+      <p:grpSpPr>
+        <a:xfrm>
+          <a:off x="0" y="0"/>
+          <a:ext cx="0" cy="0"/>
+          <a:chOff x="0" y="0"/>
+          <a:chExt cx="0" cy="0"/>
+        </a:xfrm>
+      </p:grpSpPr>
       <p:sp>
         <p:nvSpPr>
           <p:cNvPr id="2" name="Title 1"/>
@@ -19185,6 +19265,7 @@
           <a:lstStyle/>
           <a:p>
             <a:pPr algn="ctr"/>
+            <a:endParaRPr/>
           </a:p>
         </p:txBody>
       </p:sp>
@@ -19351,9 +19432,27 @@
                 <a:tableStyleId>{5C22544A-7EE6-4342-B048-85BDC9FD1C3A}</a:tableStyleId>
               </a:tblPr>
               <a:tblGrid>
-                <a:gridCol w="1118585"/>
-                <a:gridCol w="4026907"/>
-                <a:gridCol w="6040361"/>
+                <a:gridCol w="1118585">
+                  <a:extLst>
+                    <a:ext uri="{9D8B030D-6E8A-4147-A177-3AD203B41FA5}">
+                      <a16:colId xmlns:a16="http://schemas.microsoft.com/office/drawing/2014/main" val="20000"/>
+                    </a:ext>
+                  </a:extLst>
+                </a:gridCol>
+                <a:gridCol w="4026907">
+                  <a:extLst>
+                    <a:ext uri="{9D8B030D-6E8A-4147-A177-3AD203B41FA5}">
+                      <a16:colId xmlns:a16="http://schemas.microsoft.com/office/drawing/2014/main" val="20001"/>
+                    </a:ext>
+                  </a:extLst>
+                </a:gridCol>
+                <a:gridCol w="6040361">
+                  <a:extLst>
+                    <a:ext uri="{9D8B030D-6E8A-4147-A177-3AD203B41FA5}">
+                      <a16:colId xmlns:a16="http://schemas.microsoft.com/office/drawing/2014/main" val="20002"/>
+                    </a:ext>
+                  </a:extLst>
+                </a:gridCol>
               </a:tblGrid>
               <a:tr h="393700">
                 <a:tc>
@@ -19422,6 +19521,11 @@
                     </a:solidFill>
                   </a:tcPr>
                 </a:tc>
+                <a:extLst>
+                  <a:ext uri="{0D108BD9-81ED-4DB2-BD59-A6C34878D82A}">
+                    <a16:rowId xmlns:a16="http://schemas.microsoft.com/office/drawing/2014/main" val="10000"/>
+                  </a:ext>
+                </a:extLst>
               </a:tr>
               <a:tr h="393700">
                 <a:tc>
@@ -19490,6 +19594,11 @@
                     </a:solidFill>
                   </a:tcPr>
                 </a:tc>
+                <a:extLst>
+                  <a:ext uri="{0D108BD9-81ED-4DB2-BD59-A6C34878D82A}">
+                    <a16:rowId xmlns:a16="http://schemas.microsoft.com/office/drawing/2014/main" val="10001"/>
+                  </a:ext>
+                </a:extLst>
               </a:tr>
               <a:tr h="393700">
                 <a:tc>
@@ -19558,6 +19667,11 @@
                     </a:solidFill>
                   </a:tcPr>
                 </a:tc>
+                <a:extLst>
+                  <a:ext uri="{0D108BD9-81ED-4DB2-BD59-A6C34878D82A}">
+                    <a16:rowId xmlns:a16="http://schemas.microsoft.com/office/drawing/2014/main" val="10002"/>
+                  </a:ext>
+                </a:extLst>
               </a:tr>
               <a:tr h="393700">
                 <a:tc>
@@ -19626,6 +19740,11 @@
                     </a:solidFill>
                   </a:tcPr>
                 </a:tc>
+                <a:extLst>
+                  <a:ext uri="{0D108BD9-81ED-4DB2-BD59-A6C34878D82A}">
+                    <a16:rowId xmlns:a16="http://schemas.microsoft.com/office/drawing/2014/main" val="10003"/>
+                  </a:ext>
+                </a:extLst>
               </a:tr>
               <a:tr h="393700">
                 <a:tc>
@@ -19694,6 +19813,11 @@
                     </a:solidFill>
                   </a:tcPr>
                 </a:tc>
+                <a:extLst>
+                  <a:ext uri="{0D108BD9-81ED-4DB2-BD59-A6C34878D82A}">
+                    <a16:rowId xmlns:a16="http://schemas.microsoft.com/office/drawing/2014/main" val="10004"/>
+                  </a:ext>
+                </a:extLst>
               </a:tr>
               <a:tr h="393700">
                 <a:tc>
@@ -19762,6 +19886,11 @@
                     </a:solidFill>
                   </a:tcPr>
                 </a:tc>
+                <a:extLst>
+                  <a:ext uri="{0D108BD9-81ED-4DB2-BD59-A6C34878D82A}">
+                    <a16:rowId xmlns:a16="http://schemas.microsoft.com/office/drawing/2014/main" val="10005"/>
+                  </a:ext>
+                </a:extLst>
               </a:tr>
               <a:tr h="393700">
                 <a:tc>
@@ -19830,6 +19959,11 @@
                     </a:solidFill>
                   </a:tcPr>
                 </a:tc>
+                <a:extLst>
+                  <a:ext uri="{0D108BD9-81ED-4DB2-BD59-A6C34878D82A}">
+                    <a16:rowId xmlns:a16="http://schemas.microsoft.com/office/drawing/2014/main" val="10006"/>
+                  </a:ext>
+                </a:extLst>
               </a:tr>
               <a:tr h="393700">
                 <a:tc>
@@ -19898,6 +20032,11 @@
                     </a:solidFill>
                   </a:tcPr>
                 </a:tc>
+                <a:extLst>
+                  <a:ext uri="{0D108BD9-81ED-4DB2-BD59-A6C34878D82A}">
+                    <a16:rowId xmlns:a16="http://schemas.microsoft.com/office/drawing/2014/main" val="10007"/>
+                  </a:ext>
+                </a:extLst>
               </a:tr>
             </a:tbl>
           </a:graphicData>
@@ -19944,7 +20083,7 @@
           </a:fontRef>
         </p:style>
         <p:txBody>
-          <a:bodyPr rtlCol="0" anchor="ctr" wrap="square" lIns="164592" rIns="164592" tIns="73152" bIns="73152"/>
+          <a:bodyPr wrap="square" lIns="164592" tIns="73152" rIns="164592" bIns="73152" rtlCol="0" anchor="ctr"/>
           <a:lstStyle/>
           <a:p>
             <a:pPr algn="l"/>
@@ -19978,7 +20117,7 @@
 </file>
 
 <file path=ppt/slides/slide28.xml><?xml version="1.0" encoding="utf-8"?>
-<p:sld xmlns:a="http://schemas.openxmlformats.org/drawingml/2006/main" xmlns:p="http://schemas.openxmlformats.org/presentationml/2006/main" xmlns:r="http://schemas.openxmlformats.org/officeDocument/2006/relationships">
+<p:sld xmlns:a="http://schemas.openxmlformats.org/drawingml/2006/main" xmlns:r="http://schemas.openxmlformats.org/officeDocument/2006/relationships" xmlns:p="http://schemas.openxmlformats.org/presentationml/2006/main">
   <p:cSld>
     <p:spTree>
       <p:nvGrpSpPr>
@@ -19986,7 +20125,14 @@
         <p:cNvGrpSpPr/>
         <p:nvPr/>
       </p:nvGrpSpPr>
-      <p:grpSpPr/>
+      <p:grpSpPr>
+        <a:xfrm>
+          <a:off x="0" y="0"/>
+          <a:ext cx="0" cy="0"/>
+          <a:chOff x="0" y="0"/>
+          <a:chExt cx="0" cy="0"/>
+        </a:xfrm>
+      </p:grpSpPr>
       <p:sp>
         <p:nvSpPr>
           <p:cNvPr id="2" name="Title 1"/>
@@ -20074,6 +20220,7 @@
           <a:lstStyle/>
           <a:p>
             <a:pPr algn="ctr"/>
+            <a:endParaRPr/>
           </a:p>
         </p:txBody>
       </p:sp>
@@ -20282,6 +20429,12 @@
                 <a:latin typeface="Calibri"/>
               </a:defRPr>
             </a:pPr>
+            <a:endParaRPr sz="1900" b="0">
+              <a:solidFill>
+                <a:srgbClr val="222222"/>
+              </a:solidFill>
+              <a:latin typeface="Calibri"/>
+            </a:endParaRPr>
           </a:p>
           <a:p>
             <a:pPr algn="l">
@@ -20398,6 +20551,12 @@
                 <a:latin typeface="Calibri"/>
               </a:defRPr>
             </a:pPr>
+            <a:endParaRPr sz="1900" b="0">
+              <a:solidFill>
+                <a:srgbClr val="222222"/>
+              </a:solidFill>
+              <a:latin typeface="Calibri"/>
+            </a:endParaRPr>
           </a:p>
           <a:p>
             <a:pPr algn="l">
@@ -20492,7 +20651,7 @@
           </a:fontRef>
         </p:style>
         <p:txBody>
-          <a:bodyPr rtlCol="0" anchor="ctr" wrap="square" lIns="164592" rIns="164592" tIns="73152" bIns="73152"/>
+          <a:bodyPr wrap="square" lIns="164592" tIns="73152" rIns="164592" bIns="73152" rtlCol="0" anchor="ctr"/>
           <a:lstStyle/>
           <a:p>
             <a:pPr algn="l"/>
@@ -20526,7 +20685,7 @@
 </file>
 
 <file path=ppt/slides/slide29.xml><?xml version="1.0" encoding="utf-8"?>
-<p:sld xmlns:a="http://schemas.openxmlformats.org/drawingml/2006/main" xmlns:p="http://schemas.openxmlformats.org/presentationml/2006/main" xmlns:r="http://schemas.openxmlformats.org/officeDocument/2006/relationships">
+<p:sld xmlns:a="http://schemas.openxmlformats.org/drawingml/2006/main" xmlns:r="http://schemas.openxmlformats.org/officeDocument/2006/relationships" xmlns:p="http://schemas.openxmlformats.org/presentationml/2006/main">
   <p:cSld>
     <p:spTree>
       <p:nvGrpSpPr>
@@ -20534,7 +20693,14 @@
         <p:cNvGrpSpPr/>
         <p:nvPr/>
       </p:nvGrpSpPr>
-      <p:grpSpPr/>
+      <p:grpSpPr>
+        <a:xfrm>
+          <a:off x="0" y="0"/>
+          <a:ext cx="0" cy="0"/>
+          <a:chOff x="0" y="0"/>
+          <a:chExt cx="0" cy="0"/>
+        </a:xfrm>
+      </p:grpSpPr>
       <p:sp>
         <p:nvSpPr>
           <p:cNvPr id="2" name="TextBox 1"/>
@@ -20672,6 +20838,7 @@
           <a:lstStyle/>
           <a:p>
             <a:pPr algn="ctr"/>
+            <a:endParaRPr/>
           </a:p>
         </p:txBody>
       </p:sp>
@@ -20812,7 +20979,7 @@
           </a:fontRef>
         </p:style>
         <p:txBody>
-          <a:bodyPr rtlCol="0" anchor="ctr" wrap="square" lIns="73152" rIns="73152"/>
+          <a:bodyPr wrap="square" lIns="73152" rIns="73152" rtlCol="0" anchor="ctr"/>
           <a:lstStyle/>
           <a:p>
             <a:pPr algn="ctr">
@@ -20930,7 +21097,7 @@
           </a:fontRef>
         </p:style>
         <p:txBody>
-          <a:bodyPr rtlCol="0" anchor="ctr" wrap="square" lIns="73152" rIns="73152"/>
+          <a:bodyPr wrap="square" lIns="73152" rIns="73152" rtlCol="0" anchor="ctr"/>
           <a:lstStyle/>
           <a:p>
             <a:pPr algn="ctr">
@@ -21048,7 +21215,7 @@
           </a:fontRef>
         </p:style>
         <p:txBody>
-          <a:bodyPr rtlCol="0" anchor="ctr" wrap="square" lIns="73152" rIns="73152"/>
+          <a:bodyPr wrap="square" lIns="73152" rIns="73152" rtlCol="0" anchor="ctr"/>
           <a:lstStyle/>
           <a:p>
             <a:pPr algn="ctr">
@@ -21166,7 +21333,7 @@
           </a:fontRef>
         </p:style>
         <p:txBody>
-          <a:bodyPr rtlCol="0" anchor="ctr" wrap="square" lIns="73152" rIns="73152"/>
+          <a:bodyPr wrap="square" lIns="73152" rIns="73152" rtlCol="0" anchor="ctr"/>
           <a:lstStyle/>
           <a:p>
             <a:pPr algn="ctr">
@@ -21236,7 +21403,7 @@
           </a:fontRef>
         </p:style>
         <p:txBody>
-          <a:bodyPr rtlCol="0" anchor="ctr" wrap="square" lIns="73152" rIns="73152"/>
+          <a:bodyPr wrap="square" lIns="73152" rIns="73152" rtlCol="0" anchor="ctr"/>
           <a:lstStyle/>
           <a:p>
             <a:pPr algn="ctr">
@@ -21274,7 +21441,7 @@
 </file>
 
 <file path=ppt/slides/slide3.xml><?xml version="1.0" encoding="utf-8"?>
-<p:sld xmlns:a="http://schemas.openxmlformats.org/drawingml/2006/main" xmlns:p="http://schemas.openxmlformats.org/presentationml/2006/main" xmlns:r="http://schemas.openxmlformats.org/officeDocument/2006/relationships">
+<p:sld xmlns:a="http://schemas.openxmlformats.org/drawingml/2006/main" xmlns:r="http://schemas.openxmlformats.org/officeDocument/2006/relationships" xmlns:p="http://schemas.openxmlformats.org/presentationml/2006/main">
   <p:cSld>
     <p:spTree>
       <p:nvGrpSpPr>
@@ -21282,7 +21449,14 @@
         <p:cNvGrpSpPr/>
         <p:nvPr/>
       </p:nvGrpSpPr>
-      <p:grpSpPr/>
+      <p:grpSpPr>
+        <a:xfrm>
+          <a:off x="0" y="0"/>
+          <a:ext cx="0" cy="0"/>
+          <a:chOff x="0" y="0"/>
+          <a:chExt cx="0" cy="0"/>
+        </a:xfrm>
+      </p:grpSpPr>
       <p:sp>
         <p:nvSpPr>
           <p:cNvPr id="2" name="Title 1"/>
@@ -21370,6 +21544,7 @@
           <a:lstStyle/>
           <a:p>
             <a:pPr algn="ctr"/>
+            <a:endParaRPr/>
           </a:p>
         </p:txBody>
       </p:sp>
@@ -21658,7 +21833,7 @@
           </a:fontRef>
         </p:style>
         <p:txBody>
-          <a:bodyPr rtlCol="0" anchor="ctr" wrap="square" lIns="164592" rIns="164592" tIns="73152" bIns="73152"/>
+          <a:bodyPr wrap="square" lIns="164592" tIns="73152" rIns="164592" bIns="73152" rtlCol="0" anchor="ctr"/>
           <a:lstStyle/>
           <a:p>
             <a:pPr algn="l"/>
@@ -21692,7 +21867,7 @@
 </file>
 
 <file path=ppt/slides/slide30.xml><?xml version="1.0" encoding="utf-8"?>
-<p:sld xmlns:a="http://schemas.openxmlformats.org/drawingml/2006/main" xmlns:p="http://schemas.openxmlformats.org/presentationml/2006/main" xmlns:r="http://schemas.openxmlformats.org/officeDocument/2006/relationships">
+<p:sld xmlns:a="http://schemas.openxmlformats.org/drawingml/2006/main" xmlns:r="http://schemas.openxmlformats.org/officeDocument/2006/relationships" xmlns:p="http://schemas.openxmlformats.org/presentationml/2006/main">
   <p:cSld>
     <p:spTree>
       <p:nvGrpSpPr>
@@ -21700,7 +21875,14 @@
         <p:cNvGrpSpPr/>
         <p:nvPr/>
       </p:nvGrpSpPr>
-      <p:grpSpPr/>
+      <p:grpSpPr>
+        <a:xfrm>
+          <a:off x="0" y="0"/>
+          <a:ext cx="0" cy="0"/>
+          <a:chOff x="0" y="0"/>
+          <a:chExt cx="0" cy="0"/>
+        </a:xfrm>
+      </p:grpSpPr>
       <p:sp>
         <p:nvSpPr>
           <p:cNvPr id="2" name="Title 1"/>
@@ -21788,6 +21970,7 @@
           <a:lstStyle/>
           <a:p>
             <a:pPr algn="ctr"/>
+            <a:endParaRPr/>
           </a:p>
         </p:txBody>
       </p:sp>
@@ -21928,7 +22111,7 @@
           </a:fontRef>
         </p:style>
         <p:txBody>
-          <a:bodyPr rtlCol="0" anchor="ctr" wrap="square" lIns="45720" rIns="45720" tIns="18288" bIns="18288"/>
+          <a:bodyPr wrap="square" lIns="45720" tIns="18288" rIns="45720" bIns="18288" rtlCol="0" anchor="ctr"/>
           <a:lstStyle/>
           <a:p>
             <a:pPr algn="ctr">
@@ -22069,7 +22252,7 @@
           </a:fontRef>
         </p:style>
         <p:txBody>
-          <a:bodyPr rtlCol="0" anchor="t" wrap="square" lIns="45720" rIns="45720" tIns="18288" bIns="18288"/>
+          <a:bodyPr wrap="square" lIns="45720" tIns="18288" rIns="45720" bIns="18288" rtlCol="0" anchor="t"/>
           <a:lstStyle/>
           <a:p>
             <a:pPr algn="l">
@@ -22201,7 +22384,7 @@
           </a:fontRef>
         </p:style>
         <p:txBody>
-          <a:bodyPr rtlCol="0" anchor="ctr" wrap="square" lIns="45720" rIns="45720" tIns="18288" bIns="18288"/>
+          <a:bodyPr wrap="square" lIns="45720" tIns="18288" rIns="45720" bIns="18288" rtlCol="0" anchor="ctr"/>
           <a:lstStyle/>
           <a:p>
             <a:pPr algn="ctr">
@@ -22342,7 +22525,7 @@
           </a:fontRef>
         </p:style>
         <p:txBody>
-          <a:bodyPr rtlCol="0" anchor="t" wrap="square" lIns="45720" rIns="45720" tIns="18288" bIns="18288"/>
+          <a:bodyPr wrap="square" lIns="45720" tIns="18288" rIns="45720" bIns="18288" rtlCol="0" anchor="t"/>
           <a:lstStyle/>
           <a:p>
             <a:pPr algn="l">
@@ -22499,7 +22682,7 @@
           </a:fontRef>
         </p:style>
         <p:txBody>
-          <a:bodyPr rtlCol="0" anchor="ctr" wrap="square" lIns="45720" rIns="45720" tIns="18288" bIns="18288"/>
+          <a:bodyPr wrap="square" lIns="45720" tIns="18288" rIns="45720" bIns="18288" rtlCol="0" anchor="ctr"/>
           <a:lstStyle/>
           <a:p>
             <a:pPr algn="ctr">
@@ -22640,7 +22823,7 @@
           </a:fontRef>
         </p:style>
         <p:txBody>
-          <a:bodyPr rtlCol="0" anchor="t" wrap="square" lIns="45720" rIns="45720" tIns="18288" bIns="18288"/>
+          <a:bodyPr wrap="square" lIns="45720" tIns="18288" rIns="45720" bIns="18288" rtlCol="0" anchor="t"/>
           <a:lstStyle/>
           <a:p>
             <a:pPr algn="l">
@@ -22833,7 +23016,7 @@
           </a:fontRef>
         </p:style>
         <p:txBody>
-          <a:bodyPr rtlCol="0" anchor="ctr" wrap="square" lIns="164592" rIns="164592" tIns="73152" bIns="73152"/>
+          <a:bodyPr wrap="square" lIns="164592" tIns="73152" rIns="164592" bIns="73152" rtlCol="0" anchor="ctr"/>
           <a:lstStyle/>
           <a:p>
             <a:pPr algn="l"/>
@@ -22867,7 +23050,7 @@
 </file>
 
 <file path=ppt/slides/slide31.xml><?xml version="1.0" encoding="utf-8"?>
-<p:sld xmlns:a="http://schemas.openxmlformats.org/drawingml/2006/main" xmlns:p="http://schemas.openxmlformats.org/presentationml/2006/main" xmlns:r="http://schemas.openxmlformats.org/officeDocument/2006/relationships">
+<p:sld xmlns:a="http://schemas.openxmlformats.org/drawingml/2006/main" xmlns:r="http://schemas.openxmlformats.org/officeDocument/2006/relationships" xmlns:p="http://schemas.openxmlformats.org/presentationml/2006/main">
   <p:cSld>
     <p:spTree>
       <p:nvGrpSpPr>
@@ -22875,7 +23058,14 @@
         <p:cNvGrpSpPr/>
         <p:nvPr/>
       </p:nvGrpSpPr>
-      <p:grpSpPr/>
+      <p:grpSpPr>
+        <a:xfrm>
+          <a:off x="0" y="0"/>
+          <a:ext cx="0" cy="0"/>
+          <a:chOff x="0" y="0"/>
+          <a:chExt cx="0" cy="0"/>
+        </a:xfrm>
+      </p:grpSpPr>
       <p:sp>
         <p:nvSpPr>
           <p:cNvPr id="2" name="Title 1"/>
@@ -22963,6 +23153,7 @@
           <a:lstStyle/>
           <a:p>
             <a:pPr algn="ctr"/>
+            <a:endParaRPr/>
           </a:p>
         </p:txBody>
       </p:sp>
@@ -23171,6 +23362,12 @@
                 <a:latin typeface="Calibri"/>
               </a:defRPr>
             </a:pPr>
+            <a:endParaRPr sz="2000" b="0">
+              <a:solidFill>
+                <a:srgbClr val="222222"/>
+              </a:solidFill>
+              <a:latin typeface="Calibri"/>
+            </a:endParaRPr>
           </a:p>
           <a:p>
             <a:pPr algn="l">
@@ -23212,6 +23409,12 @@
                 <a:latin typeface="Calibri"/>
               </a:defRPr>
             </a:pPr>
+            <a:endParaRPr sz="2000" b="0">
+              <a:solidFill>
+                <a:srgbClr val="222222"/>
+              </a:solidFill>
+              <a:latin typeface="Calibri"/>
+            </a:endParaRPr>
           </a:p>
           <a:p>
             <a:pPr algn="l">
@@ -23349,7 +23552,7 @@
 </file>
 
 <file path=ppt/slides/slide32.xml><?xml version="1.0" encoding="utf-8"?>
-<p:sld xmlns:a="http://schemas.openxmlformats.org/drawingml/2006/main" xmlns:p="http://schemas.openxmlformats.org/presentationml/2006/main" xmlns:r="http://schemas.openxmlformats.org/officeDocument/2006/relationships">
+<p:sld xmlns:a="http://schemas.openxmlformats.org/drawingml/2006/main" xmlns:r="http://schemas.openxmlformats.org/officeDocument/2006/relationships" xmlns:p="http://schemas.openxmlformats.org/presentationml/2006/main">
   <p:cSld>
     <p:spTree>
       <p:nvGrpSpPr>
@@ -23357,7 +23560,14 @@
         <p:cNvGrpSpPr/>
         <p:nvPr/>
       </p:nvGrpSpPr>
-      <p:grpSpPr/>
+      <p:grpSpPr>
+        <a:xfrm>
+          <a:off x="0" y="0"/>
+          <a:ext cx="0" cy="0"/>
+          <a:chOff x="0" y="0"/>
+          <a:chExt cx="0" cy="0"/>
+        </a:xfrm>
+      </p:grpSpPr>
       <p:sp>
         <p:nvSpPr>
           <p:cNvPr id="2" name="Title 1"/>
@@ -23445,6 +23655,7 @@
           <a:lstStyle/>
           <a:p>
             <a:pPr algn="ctr"/>
+            <a:endParaRPr/>
           </a:p>
         </p:txBody>
       </p:sp>
@@ -23601,7 +23812,7 @@
           <p:nvPr/>
         </p:nvPicPr>
         <p:blipFill>
-          <a:blip r:embed="rId2"/>
+          <a:blip r:embed="rId3"/>
           <a:stretch>
             <a:fillRect/>
           </a:stretch>
@@ -23625,7 +23836,7 @@
           <p:nvPr/>
         </p:nvPicPr>
         <p:blipFill>
-          <a:blip r:embed="rId3"/>
+          <a:blip r:embed="rId4"/>
           <a:stretch>
             <a:fillRect/>
           </a:stretch>
@@ -23777,7 +23988,7 @@
           </a:fontRef>
         </p:style>
         <p:txBody>
-          <a:bodyPr rtlCol="0" anchor="ctr" wrap="square" lIns="164592" rIns="164592" tIns="73152" bIns="73152"/>
+          <a:bodyPr wrap="square" lIns="164592" tIns="73152" rIns="164592" bIns="73152" rtlCol="0" anchor="ctr"/>
           <a:lstStyle/>
           <a:p>
             <a:pPr algn="l"/>
@@ -23811,7 +24022,7 @@
 </file>
 
 <file path=ppt/slides/slide33.xml><?xml version="1.0" encoding="utf-8"?>
-<p:sld xmlns:a="http://schemas.openxmlformats.org/drawingml/2006/main" xmlns:p="http://schemas.openxmlformats.org/presentationml/2006/main" xmlns:r="http://schemas.openxmlformats.org/officeDocument/2006/relationships">
+<p:sld xmlns:a="http://schemas.openxmlformats.org/drawingml/2006/main" xmlns:r="http://schemas.openxmlformats.org/officeDocument/2006/relationships" xmlns:p="http://schemas.openxmlformats.org/presentationml/2006/main">
   <p:cSld>
     <p:spTree>
       <p:nvGrpSpPr>
@@ -23819,7 +24030,14 @@
         <p:cNvGrpSpPr/>
         <p:nvPr/>
       </p:nvGrpSpPr>
-      <p:grpSpPr/>
+      <p:grpSpPr>
+        <a:xfrm>
+          <a:off x="0" y="0"/>
+          <a:ext cx="0" cy="0"/>
+          <a:chOff x="0" y="0"/>
+          <a:chExt cx="0" cy="0"/>
+        </a:xfrm>
+      </p:grpSpPr>
       <p:sp>
         <p:nvSpPr>
           <p:cNvPr id="2" name="Title 1"/>
@@ -23907,6 +24125,7 @@
           <a:lstStyle/>
           <a:p>
             <a:pPr algn="ctr"/>
+            <a:endParaRPr/>
           </a:p>
         </p:txBody>
       </p:sp>
@@ -24431,7 +24650,9 @@
         <p:txBody>
           <a:bodyPr rtlCol="0" anchor="ctr"/>
           <a:lstStyle/>
-          <a:p/>
+          <a:p>
+            <a:endParaRPr/>
+          </a:p>
         </p:txBody>
       </p:sp>
       <p:cxnSp>
@@ -25128,7 +25349,7 @@
           </a:fontRef>
         </p:style>
         <p:txBody>
-          <a:bodyPr rtlCol="0" anchor="ctr" wrap="square" lIns="45720" rIns="45720" tIns="18288" bIns="18288"/>
+          <a:bodyPr wrap="square" lIns="45720" tIns="18288" rIns="45720" bIns="18288" rtlCol="0" anchor="ctr"/>
           <a:lstStyle/>
           <a:p>
             <a:pPr algn="l">
@@ -25170,6 +25391,12 @@
                 <a:latin typeface="Consolas"/>
               </a:defRPr>
             </a:pPr>
+            <a:endParaRPr sz="1400" b="0">
+              <a:solidFill>
+                <a:srgbClr val="222222"/>
+              </a:solidFill>
+              <a:latin typeface="Consolas"/>
+            </a:endParaRPr>
           </a:p>
           <a:p>
             <a:pPr algn="l">
@@ -25284,6 +25511,12 @@
                 <a:latin typeface="Calibri"/>
               </a:defRPr>
             </a:pPr>
+            <a:endParaRPr sz="1800" b="0">
+              <a:solidFill>
+                <a:srgbClr val="222222"/>
+              </a:solidFill>
+              <a:latin typeface="Calibri"/>
+            </a:endParaRPr>
           </a:p>
           <a:p>
             <a:pPr algn="l">
@@ -25325,6 +25558,12 @@
                 <a:latin typeface="Calibri"/>
               </a:defRPr>
             </a:pPr>
+            <a:endParaRPr sz="1800" b="0">
+              <a:solidFill>
+                <a:srgbClr val="222222"/>
+              </a:solidFill>
+              <a:latin typeface="Calibri"/>
+            </a:endParaRPr>
           </a:p>
           <a:p>
             <a:pPr algn="l">
@@ -25394,7 +25633,7 @@
           </a:fontRef>
         </p:style>
         <p:txBody>
-          <a:bodyPr rtlCol="0" anchor="ctr" wrap="square" lIns="164592" rIns="164592" tIns="73152" bIns="73152"/>
+          <a:bodyPr wrap="square" lIns="164592" tIns="73152" rIns="164592" bIns="73152" rtlCol="0" anchor="ctr"/>
           <a:lstStyle/>
           <a:p>
             <a:pPr algn="l"/>
@@ -25428,7 +25667,7 @@
 </file>
 
 <file path=ppt/slides/slide34.xml><?xml version="1.0" encoding="utf-8"?>
-<p:sld xmlns:a="http://schemas.openxmlformats.org/drawingml/2006/main" xmlns:p="http://schemas.openxmlformats.org/presentationml/2006/main" xmlns:r="http://schemas.openxmlformats.org/officeDocument/2006/relationships">
+<p:sld xmlns:a="http://schemas.openxmlformats.org/drawingml/2006/main" xmlns:r="http://schemas.openxmlformats.org/officeDocument/2006/relationships" xmlns:p="http://schemas.openxmlformats.org/presentationml/2006/main">
   <p:cSld>
     <p:spTree>
       <p:nvGrpSpPr>
@@ -25436,7 +25675,14 @@
         <p:cNvGrpSpPr/>
         <p:nvPr/>
       </p:nvGrpSpPr>
-      <p:grpSpPr/>
+      <p:grpSpPr>
+        <a:xfrm>
+          <a:off x="0" y="0"/>
+          <a:ext cx="0" cy="0"/>
+          <a:chOff x="0" y="0"/>
+          <a:chExt cx="0" cy="0"/>
+        </a:xfrm>
+      </p:grpSpPr>
       <p:sp>
         <p:nvSpPr>
           <p:cNvPr id="2" name="Title 1"/>
@@ -25524,6 +25770,7 @@
           <a:lstStyle/>
           <a:p>
             <a:pPr algn="ctr"/>
+            <a:endParaRPr/>
           </a:p>
         </p:txBody>
       </p:sp>
@@ -25680,7 +25927,7 @@
           <p:nvPr/>
         </p:nvPicPr>
         <p:blipFill>
-          <a:blip r:embed="rId2"/>
+          <a:blip r:embed="rId3"/>
           <a:stretch>
             <a:fillRect/>
           </a:stretch>
@@ -25704,7 +25951,7 @@
           <p:nvPr/>
         </p:nvPicPr>
         <p:blipFill>
-          <a:blip r:embed="rId3"/>
+          <a:blip r:embed="rId4"/>
           <a:stretch>
             <a:fillRect/>
           </a:stretch>
@@ -25856,7 +26103,7 @@
           </a:fontRef>
         </p:style>
         <p:txBody>
-          <a:bodyPr rtlCol="0" anchor="ctr" wrap="square" lIns="164592" rIns="164592" tIns="73152" bIns="73152"/>
+          <a:bodyPr wrap="square" lIns="164592" tIns="73152" rIns="164592" bIns="73152" rtlCol="0" anchor="ctr"/>
           <a:lstStyle/>
           <a:p>
             <a:pPr algn="l"/>
@@ -25890,7 +26137,7 @@
 </file>
 
 <file path=ppt/slides/slide35.xml><?xml version="1.0" encoding="utf-8"?>
-<p:sld xmlns:a="http://schemas.openxmlformats.org/drawingml/2006/main" xmlns:p="http://schemas.openxmlformats.org/presentationml/2006/main" xmlns:r="http://schemas.openxmlformats.org/officeDocument/2006/relationships">
+<p:sld xmlns:a="http://schemas.openxmlformats.org/drawingml/2006/main" xmlns:r="http://schemas.openxmlformats.org/officeDocument/2006/relationships" xmlns:p="http://schemas.openxmlformats.org/presentationml/2006/main">
   <p:cSld>
     <p:spTree>
       <p:nvGrpSpPr>
@@ -25898,7 +26145,14 @@
         <p:cNvGrpSpPr/>
         <p:nvPr/>
       </p:nvGrpSpPr>
-      <p:grpSpPr/>
+      <p:grpSpPr>
+        <a:xfrm>
+          <a:off x="0" y="0"/>
+          <a:ext cx="0" cy="0"/>
+          <a:chOff x="0" y="0"/>
+          <a:chExt cx="0" cy="0"/>
+        </a:xfrm>
+      </p:grpSpPr>
       <p:sp>
         <p:nvSpPr>
           <p:cNvPr id="2" name="Title 1"/>
@@ -25986,6 +26240,7 @@
           <a:lstStyle/>
           <a:p>
             <a:pPr algn="ctr"/>
+            <a:endParaRPr/>
           </a:p>
         </p:txBody>
       </p:sp>
@@ -26146,6 +26401,12 @@
                 <a:latin typeface="Calibri"/>
               </a:defRPr>
             </a:pPr>
+            <a:endParaRPr sz="2000" b="0">
+              <a:solidFill>
+                <a:srgbClr val="222222"/>
+              </a:solidFill>
+              <a:latin typeface="Calibri"/>
+            </a:endParaRPr>
           </a:p>
           <a:p>
             <a:pPr algn="l">
@@ -26237,6 +26498,12 @@
                 <a:latin typeface="Calibri"/>
               </a:defRPr>
             </a:pPr>
+            <a:endParaRPr sz="2000" b="0">
+              <a:solidFill>
+                <a:srgbClr val="222222"/>
+              </a:solidFill>
+              <a:latin typeface="Calibri"/>
+            </a:endParaRPr>
           </a:p>
           <a:p>
             <a:pPr algn="l">
@@ -26305,7 +26572,7 @@
           </a:fontRef>
         </p:style>
         <p:txBody>
-          <a:bodyPr rtlCol="0" anchor="ctr" wrap="square" lIns="164592" rIns="164592" tIns="109728" bIns="109728"/>
+          <a:bodyPr wrap="square" lIns="164592" tIns="109728" rIns="164592" bIns="109728" rtlCol="0" anchor="ctr"/>
           <a:lstStyle/>
           <a:p>
             <a:pPr algn="ctr">
@@ -26473,7 +26740,7 @@
           </a:fontRef>
         </p:style>
         <p:txBody>
-          <a:bodyPr rtlCol="0" anchor="ctr" wrap="square" lIns="164592" rIns="164592" tIns="73152" bIns="73152"/>
+          <a:bodyPr wrap="square" lIns="164592" tIns="73152" rIns="164592" bIns="73152" rtlCol="0" anchor="ctr"/>
           <a:lstStyle/>
           <a:p>
             <a:pPr algn="l"/>
@@ -26507,7 +26774,7 @@
 </file>
 
 <file path=ppt/slides/slide36.xml><?xml version="1.0" encoding="utf-8"?>
-<p:sld xmlns:a="http://schemas.openxmlformats.org/drawingml/2006/main" xmlns:p="http://schemas.openxmlformats.org/presentationml/2006/main" xmlns:r="http://schemas.openxmlformats.org/officeDocument/2006/relationships">
+<p:sld xmlns:a="http://schemas.openxmlformats.org/drawingml/2006/main" xmlns:r="http://schemas.openxmlformats.org/officeDocument/2006/relationships" xmlns:p="http://schemas.openxmlformats.org/presentationml/2006/main">
   <p:cSld>
     <p:spTree>
       <p:nvGrpSpPr>
@@ -26515,7 +26782,14 @@
         <p:cNvGrpSpPr/>
         <p:nvPr/>
       </p:nvGrpSpPr>
-      <p:grpSpPr/>
+      <p:grpSpPr>
+        <a:xfrm>
+          <a:off x="0" y="0"/>
+          <a:ext cx="0" cy="0"/>
+          <a:chOff x="0" y="0"/>
+          <a:chExt cx="0" cy="0"/>
+        </a:xfrm>
+      </p:grpSpPr>
       <p:sp>
         <p:nvSpPr>
           <p:cNvPr id="2" name="Title 1"/>
@@ -26603,6 +26877,7 @@
           <a:lstStyle/>
           <a:p>
             <a:pPr algn="ctr"/>
+            <a:endParaRPr/>
           </a:p>
         </p:txBody>
       </p:sp>
@@ -26791,7 +27066,7 @@
           </a:fontRef>
         </p:style>
         <p:txBody>
-          <a:bodyPr rtlCol="0" anchor="t" wrap="square" lIns="146304" tIns="91440" bIns="73152"/>
+          <a:bodyPr wrap="square" lIns="146304" tIns="91440" bIns="73152" rtlCol="0" anchor="t"/>
           <a:lstStyle/>
           <a:p>
             <a:pPr algn="l">
@@ -27235,7 +27510,7 @@
 </file>
 
 <file path=ppt/slides/slide37.xml><?xml version="1.0" encoding="utf-8"?>
-<p:sld xmlns:a="http://schemas.openxmlformats.org/drawingml/2006/main" xmlns:p="http://schemas.openxmlformats.org/presentationml/2006/main" xmlns:r="http://schemas.openxmlformats.org/officeDocument/2006/relationships">
+<p:sld xmlns:a="http://schemas.openxmlformats.org/drawingml/2006/main" xmlns:r="http://schemas.openxmlformats.org/officeDocument/2006/relationships" xmlns:p="http://schemas.openxmlformats.org/presentationml/2006/main">
   <p:cSld>
     <p:spTree>
       <p:nvGrpSpPr>
@@ -27243,7 +27518,14 @@
         <p:cNvGrpSpPr/>
         <p:nvPr/>
       </p:nvGrpSpPr>
-      <p:grpSpPr/>
+      <p:grpSpPr>
+        <a:xfrm>
+          <a:off x="0" y="0"/>
+          <a:ext cx="0" cy="0"/>
+          <a:chOff x="0" y="0"/>
+          <a:chExt cx="0" cy="0"/>
+        </a:xfrm>
+      </p:grpSpPr>
       <p:sp>
         <p:nvSpPr>
           <p:cNvPr id="2" name="Title 1"/>
@@ -27331,6 +27613,7 @@
           <a:lstStyle/>
           <a:p>
             <a:pPr algn="ctr"/>
+            <a:endParaRPr/>
           </a:p>
         </p:txBody>
       </p:sp>
@@ -27469,7 +27752,7 @@
           </a:fontRef>
         </p:style>
         <p:txBody>
-          <a:bodyPr rtlCol="0" anchor="ctr" wrap="square" lIns="182880"/>
+          <a:bodyPr wrap="square" lIns="182880" rtlCol="0" anchor="ctr"/>
           <a:lstStyle/>
           <a:p>
             <a:pPr algn="l"/>
@@ -27639,6 +27922,12 @@
                 <a:latin typeface="Calibri"/>
               </a:defRPr>
             </a:pPr>
+            <a:endParaRPr sz="1900" b="0">
+              <a:solidFill>
+                <a:srgbClr val="222222"/>
+              </a:solidFill>
+              <a:latin typeface="Calibri"/>
+            </a:endParaRPr>
           </a:p>
           <a:p>
             <a:pPr algn="l">
@@ -27993,7 +28282,7 @@
 </file>
 
 <file path=ppt/slides/slide38.xml><?xml version="1.0" encoding="utf-8"?>
-<p:sld xmlns:a="http://schemas.openxmlformats.org/drawingml/2006/main" xmlns:p="http://schemas.openxmlformats.org/presentationml/2006/main" xmlns:r="http://schemas.openxmlformats.org/officeDocument/2006/relationships">
+<p:sld xmlns:a="http://schemas.openxmlformats.org/drawingml/2006/main" xmlns:r="http://schemas.openxmlformats.org/officeDocument/2006/relationships" xmlns:p="http://schemas.openxmlformats.org/presentationml/2006/main">
   <p:cSld>
     <p:spTree>
       <p:nvGrpSpPr>
@@ -28001,7 +28290,14 @@
         <p:cNvGrpSpPr/>
         <p:nvPr/>
       </p:nvGrpSpPr>
-      <p:grpSpPr/>
+      <p:grpSpPr>
+        <a:xfrm>
+          <a:off x="0" y="0"/>
+          <a:ext cx="0" cy="0"/>
+          <a:chOff x="0" y="0"/>
+          <a:chExt cx="0" cy="0"/>
+        </a:xfrm>
+      </p:grpSpPr>
       <p:sp>
         <p:nvSpPr>
           <p:cNvPr id="2" name="TextBox 1"/>
@@ -28139,6 +28435,7 @@
           <a:lstStyle/>
           <a:p>
             <a:pPr algn="ctr"/>
+            <a:endParaRPr/>
           </a:p>
         </p:txBody>
       </p:sp>
@@ -28279,7 +28576,7 @@
           </a:fontRef>
         </p:style>
         <p:txBody>
-          <a:bodyPr rtlCol="0" anchor="ctr" wrap="square" lIns="73152" rIns="73152"/>
+          <a:bodyPr wrap="square" lIns="73152" rIns="73152" rtlCol="0" anchor="ctr"/>
           <a:lstStyle/>
           <a:p>
             <a:pPr algn="ctr">
@@ -28397,7 +28694,7 @@
           </a:fontRef>
         </p:style>
         <p:txBody>
-          <a:bodyPr rtlCol="0" anchor="ctr" wrap="square" lIns="73152" rIns="73152"/>
+          <a:bodyPr wrap="square" lIns="73152" rIns="73152" rtlCol="0" anchor="ctr"/>
           <a:lstStyle/>
           <a:p>
             <a:pPr algn="ctr">
@@ -28515,7 +28812,7 @@
           </a:fontRef>
         </p:style>
         <p:txBody>
-          <a:bodyPr rtlCol="0" anchor="ctr" wrap="square" lIns="73152" rIns="73152"/>
+          <a:bodyPr wrap="square" lIns="73152" rIns="73152" rtlCol="0" anchor="ctr"/>
           <a:lstStyle/>
           <a:p>
             <a:pPr algn="ctr">
@@ -28633,7 +28930,7 @@
           </a:fontRef>
         </p:style>
         <p:txBody>
-          <a:bodyPr rtlCol="0" anchor="ctr" wrap="square" lIns="73152" rIns="73152"/>
+          <a:bodyPr wrap="square" lIns="73152" rIns="73152" rtlCol="0" anchor="ctr"/>
           <a:lstStyle/>
           <a:p>
             <a:pPr algn="ctr">
@@ -28751,7 +29048,7 @@
           </a:fontRef>
         </p:style>
         <p:txBody>
-          <a:bodyPr rtlCol="0" anchor="ctr" wrap="square" lIns="73152" rIns="73152"/>
+          <a:bodyPr wrap="square" lIns="73152" rIns="73152" rtlCol="0" anchor="ctr"/>
           <a:lstStyle/>
           <a:p>
             <a:pPr algn="ctr">
@@ -28789,7 +29086,7 @@
 </file>
 
 <file path=ppt/slides/slide39.xml><?xml version="1.0" encoding="utf-8"?>
-<p:sld xmlns:a="http://schemas.openxmlformats.org/drawingml/2006/main" xmlns:p="http://schemas.openxmlformats.org/presentationml/2006/main" xmlns:r="http://schemas.openxmlformats.org/officeDocument/2006/relationships">
+<p:sld xmlns:a="http://schemas.openxmlformats.org/drawingml/2006/main" xmlns:r="http://schemas.openxmlformats.org/officeDocument/2006/relationships" xmlns:p="http://schemas.openxmlformats.org/presentationml/2006/main">
   <p:cSld>
     <p:spTree>
       <p:nvGrpSpPr>
@@ -28797,7 +29094,14 @@
         <p:cNvGrpSpPr/>
         <p:nvPr/>
       </p:nvGrpSpPr>
-      <p:grpSpPr/>
+      <p:grpSpPr>
+        <a:xfrm>
+          <a:off x="0" y="0"/>
+          <a:ext cx="0" cy="0"/>
+          <a:chOff x="0" y="0"/>
+          <a:chExt cx="0" cy="0"/>
+        </a:xfrm>
+      </p:grpSpPr>
       <p:sp>
         <p:nvSpPr>
           <p:cNvPr id="2" name="Title 1"/>
@@ -28885,6 +29189,7 @@
           <a:lstStyle/>
           <a:p>
             <a:pPr algn="ctr"/>
+            <a:endParaRPr/>
           </a:p>
         </p:txBody>
       </p:sp>
@@ -29120,6 +29425,12 @@
                 <a:latin typeface="Calibri"/>
               </a:defRPr>
             </a:pPr>
+            <a:endParaRPr sz="1800" b="0">
+              <a:solidFill>
+                <a:srgbClr val="222222"/>
+              </a:solidFill>
+              <a:latin typeface="Calibri"/>
+            </a:endParaRPr>
           </a:p>
           <a:p>
             <a:pPr algn="l">
@@ -29186,6 +29497,12 @@
                 <a:latin typeface="Calibri"/>
               </a:defRPr>
             </a:pPr>
+            <a:endParaRPr sz="1800" b="0">
+              <a:solidFill>
+                <a:srgbClr val="222222"/>
+              </a:solidFill>
+              <a:latin typeface="Calibri"/>
+            </a:endParaRPr>
           </a:p>
           <a:p>
             <a:pPr algn="l">
@@ -29255,7 +29572,7 @@
           </a:fontRef>
         </p:style>
         <p:txBody>
-          <a:bodyPr rtlCol="0" anchor="ctr" wrap="square" lIns="164592" rIns="164592" tIns="73152" bIns="73152"/>
+          <a:bodyPr wrap="square" lIns="164592" tIns="73152" rIns="164592" bIns="73152" rtlCol="0" anchor="ctr"/>
           <a:lstStyle/>
           <a:p>
             <a:pPr algn="l"/>
@@ -29289,7 +29606,7 @@
 </file>
 
 <file path=ppt/slides/slide4.xml><?xml version="1.0" encoding="utf-8"?>
-<p:sld xmlns:a="http://schemas.openxmlformats.org/drawingml/2006/main" xmlns:p="http://schemas.openxmlformats.org/presentationml/2006/main" xmlns:r="http://schemas.openxmlformats.org/officeDocument/2006/relationships">
+<p:sld xmlns:a="http://schemas.openxmlformats.org/drawingml/2006/main" xmlns:r="http://schemas.openxmlformats.org/officeDocument/2006/relationships" xmlns:p="http://schemas.openxmlformats.org/presentationml/2006/main">
   <p:cSld>
     <p:spTree>
       <p:nvGrpSpPr>
@@ -29297,7 +29614,14 @@
         <p:cNvGrpSpPr/>
         <p:nvPr/>
       </p:nvGrpSpPr>
-      <p:grpSpPr/>
+      <p:grpSpPr>
+        <a:xfrm>
+          <a:off x="0" y="0"/>
+          <a:ext cx="0" cy="0"/>
+          <a:chOff x="0" y="0"/>
+          <a:chExt cx="0" cy="0"/>
+        </a:xfrm>
+      </p:grpSpPr>
       <p:sp>
         <p:nvSpPr>
           <p:cNvPr id="2" name="Title 1"/>
@@ -29385,6 +29709,7 @@
           <a:lstStyle/>
           <a:p>
             <a:pPr algn="ctr"/>
+            <a:endParaRPr/>
           </a:p>
         </p:txBody>
       </p:sp>
@@ -29503,9 +29828,27 @@
                 <a:tableStyleId>{5C22544A-7EE6-4342-B048-85BDC9FD1C3A}</a:tableStyleId>
               </a:tblPr>
               <a:tblGrid>
-                <a:gridCol w="1092200"/>
-                <a:gridCol w="4056220"/>
-                <a:gridCol w="6037434"/>
+                <a:gridCol w="1092200">
+                  <a:extLst>
+                    <a:ext uri="{9D8B030D-6E8A-4147-A177-3AD203B41FA5}">
+                      <a16:colId xmlns:a16="http://schemas.microsoft.com/office/drawing/2014/main" val="20000"/>
+                    </a:ext>
+                  </a:extLst>
+                </a:gridCol>
+                <a:gridCol w="4056220">
+                  <a:extLst>
+                    <a:ext uri="{9D8B030D-6E8A-4147-A177-3AD203B41FA5}">
+                      <a16:colId xmlns:a16="http://schemas.microsoft.com/office/drawing/2014/main" val="20001"/>
+                    </a:ext>
+                  </a:extLst>
+                </a:gridCol>
+                <a:gridCol w="6037434">
+                  <a:extLst>
+                    <a:ext uri="{9D8B030D-6E8A-4147-A177-3AD203B41FA5}">
+                      <a16:colId xmlns:a16="http://schemas.microsoft.com/office/drawing/2014/main" val="20002"/>
+                    </a:ext>
+                  </a:extLst>
+                </a:gridCol>
               </a:tblGrid>
               <a:tr h="647700">
                 <a:tc>
@@ -29574,6 +29917,11 @@
                     </a:solidFill>
                   </a:tcPr>
                 </a:tc>
+                <a:extLst>
+                  <a:ext uri="{0D108BD9-81ED-4DB2-BD59-A6C34878D82A}">
+                    <a16:rowId xmlns:a16="http://schemas.microsoft.com/office/drawing/2014/main" val="10000"/>
+                  </a:ext>
+                </a:extLst>
               </a:tr>
               <a:tr h="647700">
                 <a:tc>
@@ -29642,6 +29990,11 @@
                     </a:solidFill>
                   </a:tcPr>
                 </a:tc>
+                <a:extLst>
+                  <a:ext uri="{0D108BD9-81ED-4DB2-BD59-A6C34878D82A}">
+                    <a16:rowId xmlns:a16="http://schemas.microsoft.com/office/drawing/2014/main" val="10001"/>
+                  </a:ext>
+                </a:extLst>
               </a:tr>
               <a:tr h="647700">
                 <a:tc>
@@ -29710,6 +30063,11 @@
                     </a:solidFill>
                   </a:tcPr>
                 </a:tc>
+                <a:extLst>
+                  <a:ext uri="{0D108BD9-81ED-4DB2-BD59-A6C34878D82A}">
+                    <a16:rowId xmlns:a16="http://schemas.microsoft.com/office/drawing/2014/main" val="10002"/>
+                  </a:ext>
+                </a:extLst>
               </a:tr>
               <a:tr h="647700">
                 <a:tc>
@@ -29778,6 +30136,11 @@
                     </a:solidFill>
                   </a:tcPr>
                 </a:tc>
+                <a:extLst>
+                  <a:ext uri="{0D108BD9-81ED-4DB2-BD59-A6C34878D82A}">
+                    <a16:rowId xmlns:a16="http://schemas.microsoft.com/office/drawing/2014/main" val="10003"/>
+                  </a:ext>
+                </a:extLst>
               </a:tr>
               <a:tr h="647700">
                 <a:tc>
@@ -29846,6 +30209,11 @@
                     </a:solidFill>
                   </a:tcPr>
                 </a:tc>
+                <a:extLst>
+                  <a:ext uri="{0D108BD9-81ED-4DB2-BD59-A6C34878D82A}">
+                    <a16:rowId xmlns:a16="http://schemas.microsoft.com/office/drawing/2014/main" val="10004"/>
+                  </a:ext>
+                </a:extLst>
               </a:tr>
               <a:tr h="647700">
                 <a:tc>
@@ -29914,6 +30282,11 @@
                     </a:solidFill>
                   </a:tcPr>
                 </a:tc>
+                <a:extLst>
+                  <a:ext uri="{0D108BD9-81ED-4DB2-BD59-A6C34878D82A}">
+                    <a16:rowId xmlns:a16="http://schemas.microsoft.com/office/drawing/2014/main" val="10005"/>
+                  </a:ext>
+                </a:extLst>
               </a:tr>
             </a:tbl>
           </a:graphicData>
@@ -29960,7 +30333,7 @@
           </a:fontRef>
         </p:style>
         <p:txBody>
-          <a:bodyPr rtlCol="0" anchor="ctr" wrap="square" lIns="164592" rIns="164592" tIns="73152" bIns="73152"/>
+          <a:bodyPr wrap="square" lIns="164592" tIns="73152" rIns="164592" bIns="73152" rtlCol="0" anchor="ctr"/>
           <a:lstStyle/>
           <a:p>
             <a:pPr algn="l"/>
@@ -29994,7 +30367,7 @@
 </file>
 
 <file path=ppt/slides/slide40.xml><?xml version="1.0" encoding="utf-8"?>
-<p:sld xmlns:a="http://schemas.openxmlformats.org/drawingml/2006/main" xmlns:p="http://schemas.openxmlformats.org/presentationml/2006/main" xmlns:r="http://schemas.openxmlformats.org/officeDocument/2006/relationships">
+<p:sld xmlns:a="http://schemas.openxmlformats.org/drawingml/2006/main" xmlns:r="http://schemas.openxmlformats.org/officeDocument/2006/relationships" xmlns:p="http://schemas.openxmlformats.org/presentationml/2006/main">
   <p:cSld>
     <p:spTree>
       <p:nvGrpSpPr>
@@ -30002,7 +30375,14 @@
         <p:cNvGrpSpPr/>
         <p:nvPr/>
       </p:nvGrpSpPr>
-      <p:grpSpPr/>
+      <p:grpSpPr>
+        <a:xfrm>
+          <a:off x="0" y="0"/>
+          <a:ext cx="0" cy="0"/>
+          <a:chOff x="0" y="0"/>
+          <a:chExt cx="0" cy="0"/>
+        </a:xfrm>
+      </p:grpSpPr>
       <p:sp>
         <p:nvSpPr>
           <p:cNvPr id="2" name="Title 1"/>
@@ -30090,6 +30470,7 @@
           <a:lstStyle/>
           <a:p>
             <a:pPr algn="ctr"/>
+            <a:endParaRPr/>
           </a:p>
         </p:txBody>
       </p:sp>
@@ -30208,10 +30589,34 @@
                 <a:tableStyleId>{5C22544A-7EE6-4342-B048-85BDC9FD1C3A}</a:tableStyleId>
               </a:tblPr>
               <a:tblGrid>
-                <a:gridCol w="1864309"/>
-                <a:gridCol w="3107181"/>
-                <a:gridCol w="3107181"/>
-                <a:gridCol w="3107181"/>
+                <a:gridCol w="1864309">
+                  <a:extLst>
+                    <a:ext uri="{9D8B030D-6E8A-4147-A177-3AD203B41FA5}">
+                      <a16:colId xmlns:a16="http://schemas.microsoft.com/office/drawing/2014/main" val="20000"/>
+                    </a:ext>
+                  </a:extLst>
+                </a:gridCol>
+                <a:gridCol w="3107181">
+                  <a:extLst>
+                    <a:ext uri="{9D8B030D-6E8A-4147-A177-3AD203B41FA5}">
+                      <a16:colId xmlns:a16="http://schemas.microsoft.com/office/drawing/2014/main" val="20001"/>
+                    </a:ext>
+                  </a:extLst>
+                </a:gridCol>
+                <a:gridCol w="3107181">
+                  <a:extLst>
+                    <a:ext uri="{9D8B030D-6E8A-4147-A177-3AD203B41FA5}">
+                      <a16:colId xmlns:a16="http://schemas.microsoft.com/office/drawing/2014/main" val="20002"/>
+                    </a:ext>
+                  </a:extLst>
+                </a:gridCol>
+                <a:gridCol w="3107181">
+                  <a:extLst>
+                    <a:ext uri="{9D8B030D-6E8A-4147-A177-3AD203B41FA5}">
+                      <a16:colId xmlns:a16="http://schemas.microsoft.com/office/drawing/2014/main" val="20003"/>
+                    </a:ext>
+                  </a:extLst>
+                </a:gridCol>
               </a:tblGrid>
               <a:tr h="645054">
                 <a:tc>
@@ -30302,6 +30707,11 @@
                     </a:solidFill>
                   </a:tcPr>
                 </a:tc>
+                <a:extLst>
+                  <a:ext uri="{0D108BD9-81ED-4DB2-BD59-A6C34878D82A}">
+                    <a16:rowId xmlns:a16="http://schemas.microsoft.com/office/drawing/2014/main" val="10000"/>
+                  </a:ext>
+                </a:extLst>
               </a:tr>
               <a:tr h="645054">
                 <a:tc>
@@ -30392,6 +30802,11 @@
                     </a:solidFill>
                   </a:tcPr>
                 </a:tc>
+                <a:extLst>
+                  <a:ext uri="{0D108BD9-81ED-4DB2-BD59-A6C34878D82A}">
+                    <a16:rowId xmlns:a16="http://schemas.microsoft.com/office/drawing/2014/main" val="10001"/>
+                  </a:ext>
+                </a:extLst>
               </a:tr>
               <a:tr h="645054">
                 <a:tc>
@@ -30482,6 +30897,11 @@
                     </a:solidFill>
                   </a:tcPr>
                 </a:tc>
+                <a:extLst>
+                  <a:ext uri="{0D108BD9-81ED-4DB2-BD59-A6C34878D82A}">
+                    <a16:rowId xmlns:a16="http://schemas.microsoft.com/office/drawing/2014/main" val="10002"/>
+                  </a:ext>
+                </a:extLst>
               </a:tr>
               <a:tr h="645054">
                 <a:tc>
@@ -30572,6 +30992,11 @@
                     </a:solidFill>
                   </a:tcPr>
                 </a:tc>
+                <a:extLst>
+                  <a:ext uri="{0D108BD9-81ED-4DB2-BD59-A6C34878D82A}">
+                    <a16:rowId xmlns:a16="http://schemas.microsoft.com/office/drawing/2014/main" val="10003"/>
+                  </a:ext>
+                </a:extLst>
               </a:tr>
               <a:tr h="645054">
                 <a:tc>
@@ -30662,6 +31087,11 @@
                     </a:solidFill>
                   </a:tcPr>
                 </a:tc>
+                <a:extLst>
+                  <a:ext uri="{0D108BD9-81ED-4DB2-BD59-A6C34878D82A}">
+                    <a16:rowId xmlns:a16="http://schemas.microsoft.com/office/drawing/2014/main" val="10004"/>
+                  </a:ext>
+                </a:extLst>
               </a:tr>
               <a:tr h="645055">
                 <a:tc>
@@ -30752,6 +31182,11 @@
                     </a:solidFill>
                   </a:tcPr>
                 </a:tc>
+                <a:extLst>
+                  <a:ext uri="{0D108BD9-81ED-4DB2-BD59-A6C34878D82A}">
+                    <a16:rowId xmlns:a16="http://schemas.microsoft.com/office/drawing/2014/main" val="10005"/>
+                  </a:ext>
+                </a:extLst>
               </a:tr>
             </a:tbl>
           </a:graphicData>
@@ -30798,7 +31233,7 @@
           </a:fontRef>
         </p:style>
         <p:txBody>
-          <a:bodyPr rtlCol="0" anchor="ctr" wrap="square" lIns="164592" rIns="164592" tIns="73152" bIns="73152"/>
+          <a:bodyPr wrap="square" lIns="164592" tIns="73152" rIns="164592" bIns="73152" rtlCol="0" anchor="ctr"/>
           <a:lstStyle/>
           <a:p>
             <a:pPr algn="l"/>
@@ -30832,7 +31267,7 @@
 </file>
 
 <file path=ppt/slides/slide41.xml><?xml version="1.0" encoding="utf-8"?>
-<p:sld xmlns:a="http://schemas.openxmlformats.org/drawingml/2006/main" xmlns:p="http://schemas.openxmlformats.org/presentationml/2006/main" xmlns:r="http://schemas.openxmlformats.org/officeDocument/2006/relationships">
+<p:sld xmlns:a="http://schemas.openxmlformats.org/drawingml/2006/main" xmlns:r="http://schemas.openxmlformats.org/officeDocument/2006/relationships" xmlns:p="http://schemas.openxmlformats.org/presentationml/2006/main">
   <p:cSld>
     <p:spTree>
       <p:nvGrpSpPr>
@@ -30840,7 +31275,14 @@
         <p:cNvGrpSpPr/>
         <p:nvPr/>
       </p:nvGrpSpPr>
-      <p:grpSpPr/>
+      <p:grpSpPr>
+        <a:xfrm>
+          <a:off x="0" y="0"/>
+          <a:ext cx="0" cy="0"/>
+          <a:chOff x="0" y="0"/>
+          <a:chExt cx="0" cy="0"/>
+        </a:xfrm>
+      </p:grpSpPr>
       <p:sp>
         <p:nvSpPr>
           <p:cNvPr id="2" name="Title 1"/>
@@ -30928,6 +31370,7 @@
           <a:lstStyle/>
           <a:p>
             <a:pPr algn="ctr"/>
+            <a:endParaRPr/>
           </a:p>
         </p:txBody>
       </p:sp>
@@ -31116,7 +31559,7 @@
           </a:fontRef>
         </p:style>
         <p:txBody>
-          <a:bodyPr rtlCol="0" anchor="t" wrap="square" lIns="146304" tIns="91440" bIns="73152"/>
+          <a:bodyPr wrap="square" lIns="146304" tIns="91440" bIns="73152" rtlCol="0" anchor="t"/>
           <a:lstStyle/>
           <a:p>
             <a:pPr algn="l">
@@ -31453,7 +31896,7 @@
 </file>
 
 <file path=ppt/slides/slide42.xml><?xml version="1.0" encoding="utf-8"?>
-<p:sld xmlns:a="http://schemas.openxmlformats.org/drawingml/2006/main" xmlns:p="http://schemas.openxmlformats.org/presentationml/2006/main" xmlns:r="http://schemas.openxmlformats.org/officeDocument/2006/relationships">
+<p:sld xmlns:a="http://schemas.openxmlformats.org/drawingml/2006/main" xmlns:r="http://schemas.openxmlformats.org/officeDocument/2006/relationships" xmlns:p="http://schemas.openxmlformats.org/presentationml/2006/main">
   <p:cSld>
     <p:spTree>
       <p:nvGrpSpPr>
@@ -31461,7 +31904,14 @@
         <p:cNvGrpSpPr/>
         <p:nvPr/>
       </p:nvGrpSpPr>
-      <p:grpSpPr/>
+      <p:grpSpPr>
+        <a:xfrm>
+          <a:off x="0" y="0"/>
+          <a:ext cx="0" cy="0"/>
+          <a:chOff x="0" y="0"/>
+          <a:chExt cx="0" cy="0"/>
+        </a:xfrm>
+      </p:grpSpPr>
       <p:sp>
         <p:nvSpPr>
           <p:cNvPr id="2" name="Title 1"/>
@@ -31549,6 +31999,7 @@
           <a:lstStyle/>
           <a:p>
             <a:pPr algn="ctr"/>
+            <a:endParaRPr/>
           </a:p>
         </p:txBody>
       </p:sp>
@@ -31687,7 +32138,7 @@
           </a:fontRef>
         </p:style>
         <p:txBody>
-          <a:bodyPr rtlCol="0" anchor="ctr" wrap="square" lIns="182880"/>
+          <a:bodyPr wrap="square" lIns="182880" rtlCol="0" anchor="ctr"/>
           <a:lstStyle/>
           <a:p>
             <a:pPr algn="l"/>
@@ -32120,7 +32571,7 @@
 </file>
 
 <file path=ppt/slides/slide43.xml><?xml version="1.0" encoding="utf-8"?>
-<p:sld xmlns:a="http://schemas.openxmlformats.org/drawingml/2006/main" xmlns:p="http://schemas.openxmlformats.org/presentationml/2006/main" xmlns:r="http://schemas.openxmlformats.org/officeDocument/2006/relationships">
+<p:sld xmlns:a="http://schemas.openxmlformats.org/drawingml/2006/main" xmlns:r="http://schemas.openxmlformats.org/officeDocument/2006/relationships" xmlns:p="http://schemas.openxmlformats.org/presentationml/2006/main">
   <p:cSld>
     <p:spTree>
       <p:nvGrpSpPr>
@@ -32128,7 +32579,14 @@
         <p:cNvGrpSpPr/>
         <p:nvPr/>
       </p:nvGrpSpPr>
-      <p:grpSpPr/>
+      <p:grpSpPr>
+        <a:xfrm>
+          <a:off x="0" y="0"/>
+          <a:ext cx="0" cy="0"/>
+          <a:chOff x="0" y="0"/>
+          <a:chExt cx="0" cy="0"/>
+        </a:xfrm>
+      </p:grpSpPr>
       <p:sp>
         <p:nvSpPr>
           <p:cNvPr id="2" name="TextBox 1"/>
@@ -32266,6 +32724,7 @@
           <a:lstStyle/>
           <a:p>
             <a:pPr algn="ctr"/>
+            <a:endParaRPr/>
           </a:p>
         </p:txBody>
       </p:sp>
@@ -32406,7 +32865,7 @@
           </a:fontRef>
         </p:style>
         <p:txBody>
-          <a:bodyPr rtlCol="0" anchor="ctr" wrap="square" lIns="73152" rIns="73152"/>
+          <a:bodyPr wrap="square" lIns="73152" rIns="73152" rtlCol="0" anchor="ctr"/>
           <a:lstStyle/>
           <a:p>
             <a:pPr algn="ctr">
@@ -32524,7 +32983,7 @@
           </a:fontRef>
         </p:style>
         <p:txBody>
-          <a:bodyPr rtlCol="0" anchor="ctr" wrap="square" lIns="73152" rIns="73152"/>
+          <a:bodyPr wrap="square" lIns="73152" rIns="73152" rtlCol="0" anchor="ctr"/>
           <a:lstStyle/>
           <a:p>
             <a:pPr algn="ctr">
@@ -32642,7 +33101,7 @@
           </a:fontRef>
         </p:style>
         <p:txBody>
-          <a:bodyPr rtlCol="0" anchor="ctr" wrap="square" lIns="73152" rIns="73152"/>
+          <a:bodyPr wrap="square" lIns="73152" rIns="73152" rtlCol="0" anchor="ctr"/>
           <a:lstStyle/>
           <a:p>
             <a:pPr algn="ctr">
@@ -32760,7 +33219,7 @@
           </a:fontRef>
         </p:style>
         <p:txBody>
-          <a:bodyPr rtlCol="0" anchor="ctr" wrap="square" lIns="73152" rIns="73152"/>
+          <a:bodyPr wrap="square" lIns="73152" rIns="73152" rtlCol="0" anchor="ctr"/>
           <a:lstStyle/>
           <a:p>
             <a:pPr algn="ctr">
@@ -32878,7 +33337,7 @@
           </a:fontRef>
         </p:style>
         <p:txBody>
-          <a:bodyPr rtlCol="0" anchor="ctr" wrap="square" lIns="73152" rIns="73152"/>
+          <a:bodyPr wrap="square" lIns="73152" rIns="73152" rtlCol="0" anchor="ctr"/>
           <a:lstStyle/>
           <a:p>
             <a:pPr algn="ctr">
@@ -32964,7 +33423,7 @@
 </file>
 
 <file path=ppt/slides/slide44.xml><?xml version="1.0" encoding="utf-8"?>
-<p:sld xmlns:a="http://schemas.openxmlformats.org/drawingml/2006/main" xmlns:p="http://schemas.openxmlformats.org/presentationml/2006/main" xmlns:r="http://schemas.openxmlformats.org/officeDocument/2006/relationships">
+<p:sld xmlns:a="http://schemas.openxmlformats.org/drawingml/2006/main" xmlns:r="http://schemas.openxmlformats.org/officeDocument/2006/relationships" xmlns:p="http://schemas.openxmlformats.org/presentationml/2006/main">
   <p:cSld>
     <p:spTree>
       <p:nvGrpSpPr>
@@ -32972,7 +33431,14 @@
         <p:cNvGrpSpPr/>
         <p:nvPr/>
       </p:nvGrpSpPr>
-      <p:grpSpPr/>
+      <p:grpSpPr>
+        <a:xfrm>
+          <a:off x="0" y="0"/>
+          <a:ext cx="0" cy="0"/>
+          <a:chOff x="0" y="0"/>
+          <a:chExt cx="0" cy="0"/>
+        </a:xfrm>
+      </p:grpSpPr>
       <p:sp>
         <p:nvSpPr>
           <p:cNvPr id="2" name="Title 1"/>
@@ -33060,6 +33526,7 @@
           <a:lstStyle/>
           <a:p>
             <a:pPr algn="ctr"/>
+            <a:endParaRPr/>
           </a:p>
         </p:txBody>
       </p:sp>
@@ -33320,6 +33787,12 @@
                 <a:latin typeface="Calibri"/>
               </a:defRPr>
             </a:pPr>
+            <a:endParaRPr sz="2000" b="0">
+              <a:solidFill>
+                <a:srgbClr val="222222"/>
+              </a:solidFill>
+              <a:latin typeface="Calibri"/>
+            </a:endParaRPr>
           </a:p>
           <a:p>
             <a:pPr algn="l">
@@ -33389,7 +33862,7 @@
           </a:fontRef>
         </p:style>
         <p:txBody>
-          <a:bodyPr rtlCol="0" anchor="ctr" wrap="square" lIns="164592" rIns="164592" tIns="73152" bIns="73152"/>
+          <a:bodyPr wrap="square" lIns="164592" tIns="73152" rIns="164592" bIns="73152" rtlCol="0" anchor="ctr"/>
           <a:lstStyle/>
           <a:p>
             <a:pPr algn="l"/>
@@ -33423,7 +33896,7 @@
 </file>
 
 <file path=ppt/slides/slide45.xml><?xml version="1.0" encoding="utf-8"?>
-<p:sld xmlns:a="http://schemas.openxmlformats.org/drawingml/2006/main" xmlns:p="http://schemas.openxmlformats.org/presentationml/2006/main" xmlns:r="http://schemas.openxmlformats.org/officeDocument/2006/relationships">
+<p:sld xmlns:a="http://schemas.openxmlformats.org/drawingml/2006/main" xmlns:r="http://schemas.openxmlformats.org/officeDocument/2006/relationships" xmlns:p="http://schemas.openxmlformats.org/presentationml/2006/main">
   <p:cSld>
     <p:spTree>
       <p:nvGrpSpPr>
@@ -33431,7 +33904,14 @@
         <p:cNvGrpSpPr/>
         <p:nvPr/>
       </p:nvGrpSpPr>
-      <p:grpSpPr/>
+      <p:grpSpPr>
+        <a:xfrm>
+          <a:off x="0" y="0"/>
+          <a:ext cx="0" cy="0"/>
+          <a:chOff x="0" y="0"/>
+          <a:chExt cx="0" cy="0"/>
+        </a:xfrm>
+      </p:grpSpPr>
       <p:sp>
         <p:nvSpPr>
           <p:cNvPr id="2" name="Title 1"/>
@@ -33519,6 +33999,7 @@
           <a:lstStyle/>
           <a:p>
             <a:pPr algn="ctr"/>
+            <a:endParaRPr/>
           </a:p>
         </p:txBody>
       </p:sp>
@@ -33707,7 +34188,7 @@
           </a:fontRef>
         </p:style>
         <p:txBody>
-          <a:bodyPr rtlCol="0" anchor="t" wrap="square" lIns="146304" tIns="91440" bIns="73152"/>
+          <a:bodyPr wrap="square" lIns="146304" tIns="91440" bIns="73152" rtlCol="0" anchor="t"/>
           <a:lstStyle/>
           <a:p>
             <a:pPr algn="l">
@@ -34330,7 +34811,7 @@
 </file>
 
 <file path=ppt/slides/slide46.xml><?xml version="1.0" encoding="utf-8"?>
-<p:sld xmlns:a="http://schemas.openxmlformats.org/drawingml/2006/main" xmlns:p="http://schemas.openxmlformats.org/presentationml/2006/main" xmlns:r="http://schemas.openxmlformats.org/officeDocument/2006/relationships">
+<p:sld xmlns:a="http://schemas.openxmlformats.org/drawingml/2006/main" xmlns:r="http://schemas.openxmlformats.org/officeDocument/2006/relationships" xmlns:p="http://schemas.openxmlformats.org/presentationml/2006/main">
   <p:cSld>
     <p:spTree>
       <p:nvGrpSpPr>
@@ -34338,7 +34819,14 @@
         <p:cNvGrpSpPr/>
         <p:nvPr/>
       </p:nvGrpSpPr>
-      <p:grpSpPr/>
+      <p:grpSpPr>
+        <a:xfrm>
+          <a:off x="0" y="0"/>
+          <a:ext cx="0" cy="0"/>
+          <a:chOff x="0" y="0"/>
+          <a:chExt cx="0" cy="0"/>
+        </a:xfrm>
+      </p:grpSpPr>
       <p:sp>
         <p:nvSpPr>
           <p:cNvPr id="2" name="Title 1"/>
@@ -34426,6 +34914,7 @@
           <a:lstStyle/>
           <a:p>
             <a:pPr algn="ctr"/>
+            <a:endParaRPr/>
           </a:p>
         </p:txBody>
       </p:sp>
@@ -34564,7 +35053,7 @@
           </a:fontRef>
         </p:style>
         <p:txBody>
-          <a:bodyPr rtlCol="0" anchor="ctr" wrap="square" lIns="182880"/>
+          <a:bodyPr wrap="square" lIns="182880" rtlCol="0" anchor="ctr"/>
           <a:lstStyle/>
           <a:p>
             <a:pPr algn="l"/>
@@ -34972,7 +35461,7 @@
 </file>
 
 <file path=ppt/slides/slide47.xml><?xml version="1.0" encoding="utf-8"?>
-<p:sld xmlns:a="http://schemas.openxmlformats.org/drawingml/2006/main" xmlns:p="http://schemas.openxmlformats.org/presentationml/2006/main" xmlns:r="http://schemas.openxmlformats.org/officeDocument/2006/relationships">
+<p:sld xmlns:a="http://schemas.openxmlformats.org/drawingml/2006/main" xmlns:r="http://schemas.openxmlformats.org/officeDocument/2006/relationships" xmlns:p="http://schemas.openxmlformats.org/presentationml/2006/main">
   <p:cSld>
     <p:spTree>
       <p:nvGrpSpPr>
@@ -34980,7 +35469,14 @@
         <p:cNvGrpSpPr/>
         <p:nvPr/>
       </p:nvGrpSpPr>
-      <p:grpSpPr/>
+      <p:grpSpPr>
+        <a:xfrm>
+          <a:off x="0" y="0"/>
+          <a:ext cx="0" cy="0"/>
+          <a:chOff x="0" y="0"/>
+          <a:chExt cx="0" cy="0"/>
+        </a:xfrm>
+      </p:grpSpPr>
       <p:sp>
         <p:nvSpPr>
           <p:cNvPr id="2" name="Title 1"/>
@@ -35068,6 +35564,7 @@
           <a:lstStyle/>
           <a:p>
             <a:pPr algn="ctr"/>
+            <a:endParaRPr/>
           </a:p>
         </p:txBody>
       </p:sp>
@@ -35406,7 +35903,7 @@
           </a:fontRef>
         </p:style>
         <p:txBody>
-          <a:bodyPr rtlCol="0" anchor="ctr" wrap="square" lIns="164592" rIns="164592" tIns="73152" bIns="73152"/>
+          <a:bodyPr wrap="square" lIns="164592" tIns="73152" rIns="164592" bIns="73152" rtlCol="0" anchor="ctr"/>
           <a:lstStyle/>
           <a:p>
             <a:pPr algn="l"/>
@@ -35440,7 +35937,7 @@
 </file>
 
 <file path=ppt/slides/slide48.xml><?xml version="1.0" encoding="utf-8"?>
-<p:sld xmlns:a="http://schemas.openxmlformats.org/drawingml/2006/main" xmlns:p="http://schemas.openxmlformats.org/presentationml/2006/main" xmlns:r="http://schemas.openxmlformats.org/officeDocument/2006/relationships">
+<p:sld xmlns:a="http://schemas.openxmlformats.org/drawingml/2006/main" xmlns:r="http://schemas.openxmlformats.org/officeDocument/2006/relationships" xmlns:p="http://schemas.openxmlformats.org/presentationml/2006/main">
   <p:cSld>
     <p:spTree>
       <p:nvGrpSpPr>
@@ -35448,7 +35945,14 @@
         <p:cNvGrpSpPr/>
         <p:nvPr/>
       </p:nvGrpSpPr>
-      <p:grpSpPr/>
+      <p:grpSpPr>
+        <a:xfrm>
+          <a:off x="0" y="0"/>
+          <a:ext cx="0" cy="0"/>
+          <a:chOff x="0" y="0"/>
+          <a:chExt cx="0" cy="0"/>
+        </a:xfrm>
+      </p:grpSpPr>
       <p:sp>
         <p:nvSpPr>
           <p:cNvPr id="2" name="Title 1"/>
@@ -35536,6 +36040,7 @@
           <a:lstStyle/>
           <a:p>
             <a:pPr algn="ctr"/>
+            <a:endParaRPr/>
           </a:p>
         </p:txBody>
       </p:sp>
@@ -35865,7 +36370,7 @@
 </file>
 
 <file path=ppt/slides/slide5.xml><?xml version="1.0" encoding="utf-8"?>
-<p:sld xmlns:a="http://schemas.openxmlformats.org/drawingml/2006/main" xmlns:p="http://schemas.openxmlformats.org/presentationml/2006/main" xmlns:r="http://schemas.openxmlformats.org/officeDocument/2006/relationships">
+<p:sld xmlns:a="http://schemas.openxmlformats.org/drawingml/2006/main" xmlns:r="http://schemas.openxmlformats.org/officeDocument/2006/relationships" xmlns:p="http://schemas.openxmlformats.org/presentationml/2006/main">
   <p:cSld>
     <p:spTree>
       <p:nvGrpSpPr>
@@ -35873,7 +36378,14 @@
         <p:cNvGrpSpPr/>
         <p:nvPr/>
       </p:nvGrpSpPr>
-      <p:grpSpPr/>
+      <p:grpSpPr>
+        <a:xfrm>
+          <a:off x="0" y="0"/>
+          <a:ext cx="0" cy="0"/>
+          <a:chOff x="0" y="0"/>
+          <a:chExt cx="0" cy="0"/>
+        </a:xfrm>
+      </p:grpSpPr>
       <p:sp>
         <p:nvSpPr>
           <p:cNvPr id="2" name="Title 1"/>
@@ -35961,6 +36473,7 @@
           <a:lstStyle/>
           <a:p>
             <a:pPr algn="ctr"/>
+            <a:endParaRPr/>
           </a:p>
         </p:txBody>
       </p:sp>
@@ -36079,8 +36592,20 @@
                 <a:tableStyleId>{5C22544A-7EE6-4342-B048-85BDC9FD1C3A}</a:tableStyleId>
               </a:tblPr>
               <a:tblGrid>
-                <a:gridCol w="1118585"/>
-                <a:gridCol w="10067269"/>
+                <a:gridCol w="1118585">
+                  <a:extLst>
+                    <a:ext uri="{9D8B030D-6E8A-4147-A177-3AD203B41FA5}">
+                      <a16:colId xmlns:a16="http://schemas.microsoft.com/office/drawing/2014/main" val="20000"/>
+                    </a:ext>
+                  </a:extLst>
+                </a:gridCol>
+                <a:gridCol w="10067269">
+                  <a:extLst>
+                    <a:ext uri="{9D8B030D-6E8A-4147-A177-3AD203B41FA5}">
+                      <a16:colId xmlns:a16="http://schemas.microsoft.com/office/drawing/2014/main" val="20001"/>
+                    </a:ext>
+                  </a:extLst>
+                </a:gridCol>
               </a:tblGrid>
               <a:tr h="488950">
                 <a:tc>
@@ -36127,6 +36652,11 @@
                     </a:solidFill>
                   </a:tcPr>
                 </a:tc>
+                <a:extLst>
+                  <a:ext uri="{0D108BD9-81ED-4DB2-BD59-A6C34878D82A}">
+                    <a16:rowId xmlns:a16="http://schemas.microsoft.com/office/drawing/2014/main" val="10000"/>
+                  </a:ext>
+                </a:extLst>
               </a:tr>
               <a:tr h="488950">
                 <a:tc>
@@ -36173,6 +36703,11 @@
                     </a:solidFill>
                   </a:tcPr>
                 </a:tc>
+                <a:extLst>
+                  <a:ext uri="{0D108BD9-81ED-4DB2-BD59-A6C34878D82A}">
+                    <a16:rowId xmlns:a16="http://schemas.microsoft.com/office/drawing/2014/main" val="10001"/>
+                  </a:ext>
+                </a:extLst>
               </a:tr>
               <a:tr h="488950">
                 <a:tc>
@@ -36219,6 +36754,11 @@
                     </a:solidFill>
                   </a:tcPr>
                 </a:tc>
+                <a:extLst>
+                  <a:ext uri="{0D108BD9-81ED-4DB2-BD59-A6C34878D82A}">
+                    <a16:rowId xmlns:a16="http://schemas.microsoft.com/office/drawing/2014/main" val="10002"/>
+                  </a:ext>
+                </a:extLst>
               </a:tr>
               <a:tr h="488950">
                 <a:tc>
@@ -36265,6 +36805,11 @@
                     </a:solidFill>
                   </a:tcPr>
                 </a:tc>
+                <a:extLst>
+                  <a:ext uri="{0D108BD9-81ED-4DB2-BD59-A6C34878D82A}">
+                    <a16:rowId xmlns:a16="http://schemas.microsoft.com/office/drawing/2014/main" val="10003"/>
+                  </a:ext>
+                </a:extLst>
               </a:tr>
               <a:tr h="488950">
                 <a:tc>
@@ -36311,6 +36856,11 @@
                     </a:solidFill>
                   </a:tcPr>
                 </a:tc>
+                <a:extLst>
+                  <a:ext uri="{0D108BD9-81ED-4DB2-BD59-A6C34878D82A}">
+                    <a16:rowId xmlns:a16="http://schemas.microsoft.com/office/drawing/2014/main" val="10004"/>
+                  </a:ext>
+                </a:extLst>
               </a:tr>
               <a:tr h="488950">
                 <a:tc>
@@ -36357,6 +36907,11 @@
                     </a:solidFill>
                   </a:tcPr>
                 </a:tc>
+                <a:extLst>
+                  <a:ext uri="{0D108BD9-81ED-4DB2-BD59-A6C34878D82A}">
+                    <a16:rowId xmlns:a16="http://schemas.microsoft.com/office/drawing/2014/main" val="10005"/>
+                  </a:ext>
+                </a:extLst>
               </a:tr>
               <a:tr h="488950">
                 <a:tc>
@@ -36403,6 +36958,11 @@
                     </a:solidFill>
                   </a:tcPr>
                 </a:tc>
+                <a:extLst>
+                  <a:ext uri="{0D108BD9-81ED-4DB2-BD59-A6C34878D82A}">
+                    <a16:rowId xmlns:a16="http://schemas.microsoft.com/office/drawing/2014/main" val="10006"/>
+                  </a:ext>
+                </a:extLst>
               </a:tr>
               <a:tr h="488950">
                 <a:tc>
@@ -36449,6 +37009,11 @@
                     </a:solidFill>
                   </a:tcPr>
                 </a:tc>
+                <a:extLst>
+                  <a:ext uri="{0D108BD9-81ED-4DB2-BD59-A6C34878D82A}">
+                    <a16:rowId xmlns:a16="http://schemas.microsoft.com/office/drawing/2014/main" val="10007"/>
+                  </a:ext>
+                </a:extLst>
               </a:tr>
               <a:tr h="488950">
                 <a:tc>
@@ -36495,6 +37060,11 @@
                     </a:solidFill>
                   </a:tcPr>
                 </a:tc>
+                <a:extLst>
+                  <a:ext uri="{0D108BD9-81ED-4DB2-BD59-A6C34878D82A}">
+                    <a16:rowId xmlns:a16="http://schemas.microsoft.com/office/drawing/2014/main" val="10008"/>
+                  </a:ext>
+                </a:extLst>
               </a:tr>
               <a:tr h="488950">
                 <a:tc>
@@ -36541,6 +37111,11 @@
                     </a:solidFill>
                   </a:tcPr>
                 </a:tc>
+                <a:extLst>
+                  <a:ext uri="{0D108BD9-81ED-4DB2-BD59-A6C34878D82A}">
+                    <a16:rowId xmlns:a16="http://schemas.microsoft.com/office/drawing/2014/main" val="10009"/>
+                  </a:ext>
+                </a:extLst>
               </a:tr>
             </a:tbl>
           </a:graphicData>
@@ -36555,7 +37130,7 @@
 </file>
 
 <file path=ppt/slides/slide6.xml><?xml version="1.0" encoding="utf-8"?>
-<p:sld xmlns:a="http://schemas.openxmlformats.org/drawingml/2006/main" xmlns:p="http://schemas.openxmlformats.org/presentationml/2006/main" xmlns:r="http://schemas.openxmlformats.org/officeDocument/2006/relationships">
+<p:sld xmlns:a="http://schemas.openxmlformats.org/drawingml/2006/main" xmlns:r="http://schemas.openxmlformats.org/officeDocument/2006/relationships" xmlns:p="http://schemas.openxmlformats.org/presentationml/2006/main">
   <p:cSld>
     <p:spTree>
       <p:nvGrpSpPr>
@@ -36563,7 +37138,14 @@
         <p:cNvGrpSpPr/>
         <p:nvPr/>
       </p:nvGrpSpPr>
-      <p:grpSpPr/>
+      <p:grpSpPr>
+        <a:xfrm>
+          <a:off x="0" y="0"/>
+          <a:ext cx="0" cy="0"/>
+          <a:chOff x="0" y="0"/>
+          <a:chExt cx="0" cy="0"/>
+        </a:xfrm>
+      </p:grpSpPr>
       <p:sp>
         <p:nvSpPr>
           <p:cNvPr id="2" name="Title 1"/>
@@ -36651,6 +37233,7 @@
           <a:lstStyle/>
           <a:p>
             <a:pPr algn="ctr"/>
+            <a:endParaRPr/>
           </a:p>
         </p:txBody>
       </p:sp>
@@ -36882,7 +37465,7 @@
           <p:nvPr/>
         </p:nvPicPr>
         <p:blipFill>
-          <a:blip r:embed="rId2"/>
+          <a:blip r:embed="rId3"/>
           <a:stretch>
             <a:fillRect/>
           </a:stretch>
@@ -36954,7 +37537,7 @@
 </file>
 
 <file path=ppt/slides/slide7.xml><?xml version="1.0" encoding="utf-8"?>
-<p:sld xmlns:a="http://schemas.openxmlformats.org/drawingml/2006/main" xmlns:p="http://schemas.openxmlformats.org/presentationml/2006/main" xmlns:r="http://schemas.openxmlformats.org/officeDocument/2006/relationships">
+<p:sld xmlns:a="http://schemas.openxmlformats.org/drawingml/2006/main" xmlns:r="http://schemas.openxmlformats.org/officeDocument/2006/relationships" xmlns:p="http://schemas.openxmlformats.org/presentationml/2006/main">
   <p:cSld>
     <p:spTree>
       <p:nvGrpSpPr>
@@ -36962,7 +37545,14 @@
         <p:cNvGrpSpPr/>
         <p:nvPr/>
       </p:nvGrpSpPr>
-      <p:grpSpPr/>
+      <p:grpSpPr>
+        <a:xfrm>
+          <a:off x="0" y="0"/>
+          <a:ext cx="0" cy="0"/>
+          <a:chOff x="0" y="0"/>
+          <a:chExt cx="0" cy="0"/>
+        </a:xfrm>
+      </p:grpSpPr>
       <p:sp>
         <p:nvSpPr>
           <p:cNvPr id="2" name="Title 1"/>
@@ -37050,6 +37640,7 @@
           <a:lstStyle/>
           <a:p>
             <a:pPr algn="ctr"/>
+            <a:endParaRPr/>
           </a:p>
         </p:txBody>
       </p:sp>
@@ -37657,7 +38248,7 @@
           </a:fontRef>
         </p:style>
         <p:txBody>
-          <a:bodyPr rtlCol="0" anchor="ctr" wrap="square" lIns="164592" rIns="164592" tIns="73152" bIns="73152"/>
+          <a:bodyPr wrap="square" lIns="164592" tIns="73152" rIns="164592" bIns="73152" rtlCol="0" anchor="ctr"/>
           <a:lstStyle/>
           <a:p>
             <a:pPr algn="l"/>
@@ -37691,7 +38282,7 @@
 </file>
 
 <file path=ppt/slides/slide8.xml><?xml version="1.0" encoding="utf-8"?>
-<p:sld xmlns:a="http://schemas.openxmlformats.org/drawingml/2006/main" xmlns:p="http://schemas.openxmlformats.org/presentationml/2006/main" xmlns:r="http://schemas.openxmlformats.org/officeDocument/2006/relationships">
+<p:sld xmlns:a="http://schemas.openxmlformats.org/drawingml/2006/main" xmlns:r="http://schemas.openxmlformats.org/officeDocument/2006/relationships" xmlns:p="http://schemas.openxmlformats.org/presentationml/2006/main">
   <p:cSld>
     <p:spTree>
       <p:nvGrpSpPr>
@@ -37699,7 +38290,14 @@
         <p:cNvGrpSpPr/>
         <p:nvPr/>
       </p:nvGrpSpPr>
-      <p:grpSpPr/>
+      <p:grpSpPr>
+        <a:xfrm>
+          <a:off x="0" y="0"/>
+          <a:ext cx="0" cy="0"/>
+          <a:chOff x="0" y="0"/>
+          <a:chExt cx="0" cy="0"/>
+        </a:xfrm>
+      </p:grpSpPr>
       <p:sp>
         <p:nvSpPr>
           <p:cNvPr id="2" name="Title 1"/>
@@ -37787,6 +38385,7 @@
           <a:lstStyle/>
           <a:p>
             <a:pPr algn="ctr"/>
+            <a:endParaRPr/>
           </a:p>
         </p:txBody>
       </p:sp>
@@ -37943,7 +38542,7 @@
           <p:nvPr/>
         </p:nvPicPr>
         <p:blipFill>
-          <a:blip r:embed="rId2"/>
+          <a:blip r:embed="rId3"/>
           <a:stretch>
             <a:fillRect/>
           </a:stretch>
@@ -37967,7 +38566,7 @@
           <p:nvPr/>
         </p:nvPicPr>
         <p:blipFill>
-          <a:blip r:embed="rId3"/>
+          <a:blip r:embed="rId4"/>
           <a:stretch>
             <a:fillRect/>
           </a:stretch>
@@ -38087,7 +38686,7 @@
 </file>
 
 <file path=ppt/slides/slide9.xml><?xml version="1.0" encoding="utf-8"?>
-<p:sld xmlns:a="http://schemas.openxmlformats.org/drawingml/2006/main" xmlns:p="http://schemas.openxmlformats.org/presentationml/2006/main" xmlns:r="http://schemas.openxmlformats.org/officeDocument/2006/relationships">
+<p:sld xmlns:a="http://schemas.openxmlformats.org/drawingml/2006/main" xmlns:r="http://schemas.openxmlformats.org/officeDocument/2006/relationships" xmlns:p="http://schemas.openxmlformats.org/presentationml/2006/main">
   <p:cSld>
     <p:spTree>
       <p:nvGrpSpPr>
@@ -38095,7 +38694,14 @@
         <p:cNvGrpSpPr/>
         <p:nvPr/>
       </p:nvGrpSpPr>
-      <p:grpSpPr/>
+      <p:grpSpPr>
+        <a:xfrm>
+          <a:off x="0" y="0"/>
+          <a:ext cx="0" cy="0"/>
+          <a:chOff x="0" y="0"/>
+          <a:chExt cx="0" cy="0"/>
+        </a:xfrm>
+      </p:grpSpPr>
       <p:sp>
         <p:nvSpPr>
           <p:cNvPr id="2" name="Title 1"/>
@@ -38183,6 +38789,7 @@
           <a:lstStyle/>
           <a:p>
             <a:pPr algn="ctr"/>
+            <a:endParaRPr/>
           </a:p>
         </p:txBody>
       </p:sp>
@@ -38496,7 +39103,7 @@
           </a:fontRef>
         </p:style>
         <p:txBody>
-          <a:bodyPr rtlCol="0" anchor="ctr" wrap="square" lIns="164592" rIns="164592" tIns="73152" bIns="73152"/>
+          <a:bodyPr wrap="square" lIns="164592" tIns="73152" rIns="164592" bIns="73152" rtlCol="0" anchor="ctr"/>
           <a:lstStyle/>
           <a:p>
             <a:pPr algn="l"/>
@@ -38860,44 +39467,44 @@
         <a:sysClr val="window" lastClr="FFFFFF"/>
       </a:lt1>
       <a:dk2>
-        <a:srgbClr val="1F497D"/>
+        <a:srgbClr val="0E2841"/>
       </a:dk2>
       <a:lt2>
-        <a:srgbClr val="EEECE1"/>
+        <a:srgbClr val="E8E8E8"/>
       </a:lt2>
       <a:accent1>
-        <a:srgbClr val="4F81BD"/>
+        <a:srgbClr val="156082"/>
       </a:accent1>
       <a:accent2>
-        <a:srgbClr val="C0504D"/>
+        <a:srgbClr val="E97132"/>
       </a:accent2>
       <a:accent3>
-        <a:srgbClr val="9BBB59"/>
+        <a:srgbClr val="196B24"/>
       </a:accent3>
       <a:accent4>
-        <a:srgbClr val="8064A2"/>
+        <a:srgbClr val="0F9ED5"/>
       </a:accent4>
       <a:accent5>
-        <a:srgbClr val="4BACC6"/>
+        <a:srgbClr val="A02B93"/>
       </a:accent5>
       <a:accent6>
-        <a:srgbClr val="F79646"/>
+        <a:srgbClr val="4EA72E"/>
       </a:accent6>
       <a:hlink>
-        <a:srgbClr val="0000FF"/>
+        <a:srgbClr val="467886"/>
       </a:hlink>
       <a:folHlink>
-        <a:srgbClr val="800080"/>
+        <a:srgbClr val="96607D"/>
       </a:folHlink>
     </a:clrScheme>
     <a:fontScheme name="Office">
       <a:majorFont>
-        <a:latin typeface="Calibri"/>
+        <a:latin typeface="Aptos Display" panose="02110004020202020204"/>
         <a:ea typeface=""/>
         <a:cs typeface=""/>
-        <a:font script="Jpan" typeface="ＭＳ Ｐゴシック"/>
+        <a:font script="Jpan" typeface="游ゴシック Light"/>
         <a:font script="Hang" typeface="맑은 고딕"/>
-        <a:font script="Hans" typeface="宋体"/>
+        <a:font script="Hans" typeface="等线 Light"/>
         <a:font script="Hant" typeface="新細明體"/>
         <a:font script="Arab" typeface="Times New Roman"/>
         <a:font script="Hebr" typeface="Times New Roman"/>
@@ -38925,14 +39532,31 @@
         <a:font script="Viet" typeface="Times New Roman"/>
         <a:font script="Uigh" typeface="Microsoft Uighur"/>
         <a:font script="Geor" typeface="Sylfaen"/>
+        <a:font script="Armn" typeface="Arial"/>
+        <a:font script="Bugi" typeface="Leelawadee UI"/>
+        <a:font script="Bopo" typeface="Microsoft JhengHei"/>
+        <a:font script="Java" typeface="Javanese Text"/>
+        <a:font script="Lisu" typeface="Segoe UI"/>
+        <a:font script="Mymr" typeface="Myanmar Text"/>
+        <a:font script="Nkoo" typeface="Ebrima"/>
+        <a:font script="Olck" typeface="Nirmala UI"/>
+        <a:font script="Osma" typeface="Ebrima"/>
+        <a:font script="Phag" typeface="Phagspa"/>
+        <a:font script="Syrn" typeface="Estrangelo Edessa"/>
+        <a:font script="Syrj" typeface="Estrangelo Edessa"/>
+        <a:font script="Syre" typeface="Estrangelo Edessa"/>
+        <a:font script="Sora" typeface="Nirmala UI"/>
+        <a:font script="Tale" typeface="Microsoft Tai Le"/>
+        <a:font script="Talu" typeface="Microsoft New Tai Lue"/>
+        <a:font script="Tfng" typeface="Ebrima"/>
       </a:majorFont>
       <a:minorFont>
-        <a:latin typeface="Calibri"/>
+        <a:latin typeface="Aptos" panose="02110004020202020204"/>
         <a:ea typeface=""/>
         <a:cs typeface=""/>
-        <a:font script="Jpan" typeface="ＭＳ Ｐゴシック"/>
+        <a:font script="Jpan" typeface="游ゴシック"/>
         <a:font script="Hang" typeface="맑은 고딕"/>
-        <a:font script="Hans" typeface="宋体"/>
+        <a:font script="Hans" typeface="等线"/>
         <a:font script="Hant" typeface="新細明體"/>
         <a:font script="Arab" typeface="Arial"/>
         <a:font script="Hebr" typeface="Arial"/>
@@ -38960,6 +39584,23 @@
         <a:font script="Viet" typeface="Arial"/>
         <a:font script="Uigh" typeface="Microsoft Uighur"/>
         <a:font script="Geor" typeface="Sylfaen"/>
+        <a:font script="Armn" typeface="Arial"/>
+        <a:font script="Bugi" typeface="Leelawadee UI"/>
+        <a:font script="Bopo" typeface="Microsoft JhengHei"/>
+        <a:font script="Java" typeface="Javanese Text"/>
+        <a:font script="Lisu" typeface="Segoe UI"/>
+        <a:font script="Mymr" typeface="Myanmar Text"/>
+        <a:font script="Nkoo" typeface="Ebrima"/>
+        <a:font script="Olck" typeface="Nirmala UI"/>
+        <a:font script="Osma" typeface="Ebrima"/>
+        <a:font script="Phag" typeface="Phagspa"/>
+        <a:font script="Syrn" typeface="Estrangelo Edessa"/>
+        <a:font script="Syrj" typeface="Estrangelo Edessa"/>
+        <a:font script="Syre" typeface="Estrangelo Edessa"/>
+        <a:font script="Sora" typeface="Nirmala UI"/>
+        <a:font script="Tale" typeface="Microsoft Tai Le"/>
+        <a:font script="Talu" typeface="Microsoft New Tai Lue"/>
+        <a:font script="Tfng" typeface="Ebrima"/>
       </a:minorFont>
     </a:fontScheme>
     <a:fmtScheme name="Office">
@@ -38971,180 +39612,136 @@
           <a:gsLst>
             <a:gs pos="0">
               <a:schemeClr val="phClr">
-                <a:tint val="50000"/>
-                <a:satMod val="300000"/>
+                <a:lumMod val="110000"/>
+                <a:satMod val="105000"/>
+                <a:tint val="67000"/>
               </a:schemeClr>
             </a:gs>
-            <a:gs pos="35000">
+            <a:gs pos="50000">
               <a:schemeClr val="phClr">
-                <a:tint val="37000"/>
-                <a:satMod val="300000"/>
+                <a:lumMod val="105000"/>
+                <a:satMod val="103000"/>
+                <a:tint val="73000"/>
               </a:schemeClr>
             </a:gs>
             <a:gs pos="100000">
               <a:schemeClr val="phClr">
-                <a:tint val="15000"/>
-                <a:satMod val="350000"/>
+                <a:lumMod val="105000"/>
+                <a:satMod val="109000"/>
+                <a:tint val="81000"/>
               </a:schemeClr>
             </a:gs>
           </a:gsLst>
-          <a:lin ang="16200000" scaled="1"/>
+          <a:lin ang="5400000" scaled="0"/>
         </a:gradFill>
         <a:gradFill rotWithShape="1">
           <a:gsLst>
             <a:gs pos="0">
               <a:schemeClr val="phClr">
-                <a:tint val="100000"/>
+                <a:satMod val="103000"/>
+                <a:lumMod val="102000"/>
+                <a:tint val="94000"/>
+              </a:schemeClr>
+            </a:gs>
+            <a:gs pos="50000">
+              <a:schemeClr val="phClr">
+                <a:satMod val="110000"/>
+                <a:lumMod val="100000"/>
                 <a:shade val="100000"/>
-                <a:satMod val="130000"/>
               </a:schemeClr>
             </a:gs>
             <a:gs pos="100000">
               <a:schemeClr val="phClr">
-                <a:tint val="50000"/>
-                <a:shade val="100000"/>
-                <a:satMod val="350000"/>
+                <a:lumMod val="99000"/>
+                <a:satMod val="120000"/>
+                <a:shade val="78000"/>
               </a:schemeClr>
             </a:gs>
           </a:gsLst>
-          <a:lin ang="16200000" scaled="0"/>
+          <a:lin ang="5400000" scaled="0"/>
         </a:gradFill>
       </a:fillStyleLst>
       <a:lnStyleLst>
-        <a:ln w="9525" cap="flat" cmpd="sng" algn="ctr">
+        <a:ln w="12700" cap="flat" cmpd="sng" algn="ctr">
           <a:solidFill>
-            <a:schemeClr val="phClr">
-              <a:shade val="95000"/>
-              <a:satMod val="105000"/>
-            </a:schemeClr>
+            <a:schemeClr val="phClr"/>
           </a:solidFill>
           <a:prstDash val="solid"/>
+          <a:miter lim="800000"/>
+        </a:ln>
+        <a:ln w="19050" cap="flat" cmpd="sng" algn="ctr">
+          <a:solidFill>
+            <a:schemeClr val="phClr"/>
+          </a:solidFill>
+          <a:prstDash val="solid"/>
+          <a:miter lim="800000"/>
         </a:ln>
         <a:ln w="25400" cap="flat" cmpd="sng" algn="ctr">
           <a:solidFill>
             <a:schemeClr val="phClr"/>
           </a:solidFill>
           <a:prstDash val="solid"/>
-        </a:ln>
-        <a:ln w="38100" cap="flat" cmpd="sng" algn="ctr">
-          <a:solidFill>
-            <a:schemeClr val="phClr"/>
-          </a:solidFill>
-          <a:prstDash val="solid"/>
+          <a:miter lim="800000"/>
         </a:ln>
       </a:lnStyleLst>
       <a:effectStyleLst>
         <a:effectStyle>
+          <a:effectLst/>
+        </a:effectStyle>
+        <a:effectStyle>
+          <a:effectLst/>
+        </a:effectStyle>
+        <a:effectStyle>
           <a:effectLst>
-            <a:outerShdw blurRad="40000" dist="20000" dir="5400000" rotWithShape="0">
+            <a:outerShdw blurRad="57150" dist="19050" dir="5400000" algn="ctr" rotWithShape="0">
               <a:srgbClr val="000000">
-                <a:alpha val="38000"/>
+                <a:alpha val="63000"/>
               </a:srgbClr>
             </a:outerShdw>
           </a:effectLst>
-        </a:effectStyle>
-        <a:effectStyle>
-          <a:effectLst>
-            <a:outerShdw blurRad="40000" dist="23000" dir="5400000" rotWithShape="0">
-              <a:srgbClr val="000000">
-                <a:alpha val="35000"/>
-              </a:srgbClr>
-            </a:outerShdw>
-          </a:effectLst>
-        </a:effectStyle>
-        <a:effectStyle>
-          <a:effectLst>
-            <a:outerShdw blurRad="40000" dist="23000" dir="5400000" rotWithShape="0">
-              <a:srgbClr val="000000">
-                <a:alpha val="35000"/>
-              </a:srgbClr>
-            </a:outerShdw>
-          </a:effectLst>
-          <a:scene3d>
-            <a:camera prst="orthographicFront">
-              <a:rot lat="0" lon="0" rev="0"/>
-            </a:camera>
-            <a:lightRig rig="threePt" dir="t">
-              <a:rot lat="0" lon="0" rev="1200000"/>
-            </a:lightRig>
-          </a:scene3d>
-          <a:sp3d>
-            <a:bevelT w="63500" h="25400"/>
-          </a:sp3d>
         </a:effectStyle>
       </a:effectStyleLst>
       <a:bgFillStyleLst>
         <a:solidFill>
           <a:schemeClr val="phClr"/>
         </a:solidFill>
+        <a:solidFill>
+          <a:schemeClr val="phClr">
+            <a:tint val="95000"/>
+            <a:satMod val="170000"/>
+          </a:schemeClr>
+        </a:solidFill>
         <a:gradFill rotWithShape="1">
           <a:gsLst>
             <a:gs pos="0">
               <a:schemeClr val="phClr">
-                <a:tint val="40000"/>
-                <a:satMod val="350000"/>
+                <a:tint val="93000"/>
+                <a:satMod val="150000"/>
+                <a:shade val="98000"/>
+                <a:lumMod val="102000"/>
               </a:schemeClr>
             </a:gs>
-            <a:gs pos="40000">
+            <a:gs pos="50000">
               <a:schemeClr val="phClr">
-                <a:tint val="45000"/>
-                <a:shade val="99000"/>
-                <a:satMod val="350000"/>
+                <a:tint val="98000"/>
+                <a:satMod val="130000"/>
+                <a:shade val="90000"/>
+                <a:lumMod val="103000"/>
               </a:schemeClr>
             </a:gs>
             <a:gs pos="100000">
               <a:schemeClr val="phClr">
-                <a:shade val="20000"/>
-                <a:satMod val="255000"/>
+                <a:shade val="63000"/>
+                <a:satMod val="120000"/>
               </a:schemeClr>
             </a:gs>
           </a:gsLst>
-          <a:path path="circle">
-            <a:fillToRect l="50000" t="-80000" r="50000" b="180000"/>
-          </a:path>
-        </a:gradFill>
-        <a:gradFill rotWithShape="1">
-          <a:gsLst>
-            <a:gs pos="0">
-              <a:schemeClr val="phClr">
-                <a:tint val="80000"/>
-                <a:satMod val="300000"/>
-              </a:schemeClr>
-            </a:gs>
-            <a:gs pos="100000">
-              <a:schemeClr val="phClr">
-                <a:shade val="30000"/>
-                <a:satMod val="200000"/>
-              </a:schemeClr>
-            </a:gs>
-          </a:gsLst>
-          <a:path path="circle">
-            <a:fillToRect l="50000" t="50000" r="50000" b="50000"/>
-          </a:path>
+          <a:lin ang="5400000" scaled="0"/>
         </a:gradFill>
       </a:bgFillStyleLst>
     </a:fmtScheme>
   </a:themeElements>
   <a:objectDefaults>
-    <a:spDef>
-      <a:spPr/>
-      <a:bodyPr/>
-      <a:lstStyle/>
-      <a:style>
-        <a:lnRef idx="1">
-          <a:schemeClr val="accent1"/>
-        </a:lnRef>
-        <a:fillRef idx="3">
-          <a:schemeClr val="accent1"/>
-        </a:fillRef>
-        <a:effectRef idx="2">
-          <a:schemeClr val="accent1"/>
-        </a:effectRef>
-        <a:fontRef idx="minor">
-          <a:schemeClr val="lt1"/>
-        </a:fontRef>
-      </a:style>
-    </a:spDef>
     <a:lnDef>
       <a:spPr/>
       <a:bodyPr/>
@@ -39166,5 +39763,10 @@
     </a:lnDef>
   </a:objectDefaults>
   <a:extraClrSchemeLst/>
+  <a:extLst>
+    <a:ext uri="{05A4C25C-085E-4340-85A3-A5531E510DB2}">
+      <thm15:themeFamily xmlns:thm15="http://schemas.microsoft.com/office/thememl/2012/main" name="Office Theme" id="{2E142A2C-CD16-42D6-873A-C26D2A0506FA}" vid="{1BDDFF52-6CD6-40A5-AB3C-68EB2F1E4D0A}"/>
+    </a:ext>
+  </a:extLst>
 </a:theme>
 </file>
--- a/ground-vehicle/docs/courses/beginner-ps3/l1_introduction.pptx
+++ b/ground-vehicle/docs/courses/beginner-ps3/l1_introduction.pptx
@@ -4,60 +4,57 @@
   <p:sldMasterIdLst>
     <p:sldMasterId id="2147483648" r:id="rId1"/>
   </p:sldMasterIdLst>
-  <p:notesMasterIdLst>
-    <p:notesMasterId r:id="rId50"/>
-  </p:notesMasterIdLst>
   <p:sldIdLst>
-    <p:sldId id="256" r:id="rId2"/>
-    <p:sldId id="257" r:id="rId3"/>
-    <p:sldId id="258" r:id="rId4"/>
-    <p:sldId id="259" r:id="rId5"/>
-    <p:sldId id="260" r:id="rId6"/>
-    <p:sldId id="261" r:id="rId7"/>
-    <p:sldId id="262" r:id="rId8"/>
-    <p:sldId id="263" r:id="rId9"/>
-    <p:sldId id="264" r:id="rId10"/>
-    <p:sldId id="265" r:id="rId11"/>
-    <p:sldId id="266" r:id="rId12"/>
-    <p:sldId id="267" r:id="rId13"/>
-    <p:sldId id="268" r:id="rId14"/>
-    <p:sldId id="269" r:id="rId15"/>
-    <p:sldId id="270" r:id="rId16"/>
-    <p:sldId id="271" r:id="rId17"/>
-    <p:sldId id="272" r:id="rId18"/>
-    <p:sldId id="273" r:id="rId19"/>
-    <p:sldId id="274" r:id="rId20"/>
-    <p:sldId id="275" r:id="rId21"/>
-    <p:sldId id="276" r:id="rId22"/>
-    <p:sldId id="277" r:id="rId23"/>
-    <p:sldId id="278" r:id="rId24"/>
-    <p:sldId id="279" r:id="rId25"/>
-    <p:sldId id="280" r:id="rId26"/>
-    <p:sldId id="281" r:id="rId27"/>
-    <p:sldId id="282" r:id="rId28"/>
-    <p:sldId id="283" r:id="rId29"/>
-    <p:sldId id="284" r:id="rId30"/>
-    <p:sldId id="285" r:id="rId31"/>
-    <p:sldId id="286" r:id="rId32"/>
-    <p:sldId id="287" r:id="rId33"/>
-    <p:sldId id="288" r:id="rId34"/>
-    <p:sldId id="289" r:id="rId35"/>
-    <p:sldId id="290" r:id="rId36"/>
-    <p:sldId id="291" r:id="rId37"/>
-    <p:sldId id="292" r:id="rId38"/>
-    <p:sldId id="293" r:id="rId39"/>
-    <p:sldId id="294" r:id="rId40"/>
-    <p:sldId id="295" r:id="rId41"/>
-    <p:sldId id="296" r:id="rId42"/>
-    <p:sldId id="297" r:id="rId43"/>
-    <p:sldId id="298" r:id="rId44"/>
-    <p:sldId id="299" r:id="rId45"/>
-    <p:sldId id="300" r:id="rId46"/>
-    <p:sldId id="301" r:id="rId47"/>
-    <p:sldId id="302" r:id="rId48"/>
-    <p:sldId id="303" r:id="rId49"/>
+    <p:sldId id="256" r:id="rId7"/>
+    <p:sldId id="257" r:id="rId9"/>
+    <p:sldId id="258" r:id="rId10"/>
+    <p:sldId id="259" r:id="rId11"/>
+    <p:sldId id="260" r:id="rId12"/>
+    <p:sldId id="261" r:id="rId13"/>
+    <p:sldId id="262" r:id="rId14"/>
+    <p:sldId id="263" r:id="rId15"/>
+    <p:sldId id="264" r:id="rId16"/>
+    <p:sldId id="265" r:id="rId17"/>
+    <p:sldId id="266" r:id="rId18"/>
+    <p:sldId id="267" r:id="rId19"/>
+    <p:sldId id="268" r:id="rId20"/>
+    <p:sldId id="269" r:id="rId21"/>
+    <p:sldId id="270" r:id="rId22"/>
+    <p:sldId id="271" r:id="rId23"/>
+    <p:sldId id="272" r:id="rId24"/>
+    <p:sldId id="273" r:id="rId25"/>
+    <p:sldId id="274" r:id="rId26"/>
+    <p:sldId id="275" r:id="rId27"/>
+    <p:sldId id="276" r:id="rId28"/>
+    <p:sldId id="277" r:id="rId29"/>
+    <p:sldId id="278" r:id="rId30"/>
+    <p:sldId id="279" r:id="rId31"/>
+    <p:sldId id="280" r:id="rId32"/>
+    <p:sldId id="281" r:id="rId33"/>
+    <p:sldId id="282" r:id="rId34"/>
+    <p:sldId id="283" r:id="rId35"/>
+    <p:sldId id="284" r:id="rId36"/>
+    <p:sldId id="285" r:id="rId37"/>
+    <p:sldId id="286" r:id="rId38"/>
+    <p:sldId id="287" r:id="rId39"/>
+    <p:sldId id="288" r:id="rId40"/>
+    <p:sldId id="289" r:id="rId41"/>
+    <p:sldId id="290" r:id="rId42"/>
+    <p:sldId id="291" r:id="rId43"/>
+    <p:sldId id="292" r:id="rId44"/>
+    <p:sldId id="293" r:id="rId45"/>
+    <p:sldId id="294" r:id="rId46"/>
+    <p:sldId id="295" r:id="rId47"/>
+    <p:sldId id="296" r:id="rId48"/>
+    <p:sldId id="297" r:id="rId49"/>
+    <p:sldId id="298" r:id="rId50"/>
+    <p:sldId id="299" r:id="rId51"/>
+    <p:sldId id="300" r:id="rId52"/>
+    <p:sldId id="301" r:id="rId53"/>
+    <p:sldId id="302" r:id="rId54"/>
+    <p:sldId id="303" r:id="rId55"/>
   </p:sldIdLst>
-  <p:sldSz cx="12192000" cy="6858000"/>
+  <p:sldSz cx="12191695" cy="6858000" type="screen4x3"/>
   <p:notesSz cx="6858000" cy="9144000"/>
   <p:defaultTextStyle>
     <a:defPPr>
@@ -154,92 +151,11 @@
       </a:defRPr>
     </a:lvl9pPr>
   </p:defaultTextStyle>
-  <p:extLst>
-    <p:ext uri="{EFAFB233-063F-42B5-8137-9DF3F51BA10A}">
-      <p15:sldGuideLst xmlns:p15="http://schemas.microsoft.com/office/powerpoint/2012/main">
-        <p15:guide id="1" orient="horz" pos="2160">
-          <p15:clr>
-            <a:srgbClr val="A4A3A4"/>
-          </p15:clr>
-        </p15:guide>
-        <p15:guide id="2" pos="2880">
-          <p15:clr>
-            <a:srgbClr val="A4A3A4"/>
-          </p15:clr>
-        </p15:guide>
-      </p15:sldGuideLst>
-    </p:ext>
-  </p:extLst>
 </p:presentation>
 </file>
 
-<file path=ppt/changesInfos/changesInfo1.xml><?xml version="1.0" encoding="utf-8"?>
-<pc:chgInfo xmlns:a="http://schemas.openxmlformats.org/drawingml/2006/main" xmlns:r="http://schemas.openxmlformats.org/officeDocument/2006/relationships" xmlns:ac="http://schemas.microsoft.com/office/drawing/2013/main/command" xmlns:pc="http://schemas.microsoft.com/office/powerpoint/2013/main/command">
-  <pc:docChgLst>
-    <pc:chgData name="Kevin Bowen" userId="ee6702fae12807e4" providerId="LiveId" clId="{5CB6C98B-5151-4E5D-BF39-3ED613ABF9A3}"/>
-    <pc:docChg chg="custSel modSld">
-      <pc:chgData name="Kevin Bowen" userId="ee6702fae12807e4" providerId="LiveId" clId="{5CB6C98B-5151-4E5D-BF39-3ED613ABF9A3}" dt="2026-09-07T16:18:55.759" v="232" actId="20577"/>
-      <pc:docMkLst>
-        <pc:docMk/>
-      </pc:docMkLst>
-      <pc:sldChg chg="modNotesTx">
-        <pc:chgData name="Kevin Bowen" userId="ee6702fae12807e4" providerId="LiveId" clId="{5CB6C98B-5151-4E5D-BF39-3ED613ABF9A3}" dt="2026-09-07T16:09:59.599" v="114" actId="20577"/>
-        <pc:sldMkLst>
-          <pc:docMk/>
-          <pc:sldMk cId="0" sldId="257"/>
-        </pc:sldMkLst>
-      </pc:sldChg>
-      <pc:sldChg chg="modNotesTx">
-        <pc:chgData name="Kevin Bowen" userId="ee6702fae12807e4" providerId="LiveId" clId="{5CB6C98B-5151-4E5D-BF39-3ED613ABF9A3}" dt="2026-09-07T16:10:30.046" v="121" actId="20577"/>
-        <pc:sldMkLst>
-          <pc:docMk/>
-          <pc:sldMk cId="0" sldId="258"/>
-        </pc:sldMkLst>
-      </pc:sldChg>
-      <pc:sldChg chg="modNotesTx">
-        <pc:chgData name="Kevin Bowen" userId="ee6702fae12807e4" providerId="LiveId" clId="{5CB6C98B-5151-4E5D-BF39-3ED613ABF9A3}" dt="2026-09-07T16:11:19.355" v="184" actId="20577"/>
-        <pc:sldMkLst>
-          <pc:docMk/>
-          <pc:sldMk cId="0" sldId="260"/>
-        </pc:sldMkLst>
-      </pc:sldChg>
-      <pc:sldChg chg="modNotesTx">
-        <pc:chgData name="Kevin Bowen" userId="ee6702fae12807e4" providerId="LiveId" clId="{5CB6C98B-5151-4E5D-BF39-3ED613ABF9A3}" dt="2026-09-07T16:15:26.753" v="185" actId="20577"/>
-        <pc:sldMkLst>
-          <pc:docMk/>
-          <pc:sldMk cId="0" sldId="273"/>
-        </pc:sldMkLst>
-      </pc:sldChg>
-      <pc:sldChg chg="modSp mod">
-        <pc:chgData name="Kevin Bowen" userId="ee6702fae12807e4" providerId="LiveId" clId="{5CB6C98B-5151-4E5D-BF39-3ED613ABF9A3}" dt="2026-09-07T16:18:55.759" v="232" actId="20577"/>
-        <pc:sldMkLst>
-          <pc:docMk/>
-          <pc:sldMk cId="0" sldId="279"/>
-        </pc:sldMkLst>
-        <pc:spChg chg="mod">
-          <ac:chgData name="Kevin Bowen" userId="ee6702fae12807e4" providerId="LiveId" clId="{5CB6C98B-5151-4E5D-BF39-3ED613ABF9A3}" dt="2026-09-07T16:18:55.759" v="232" actId="20577"/>
-          <ac:spMkLst>
-            <pc:docMk/>
-            <pc:sldMk cId="0" sldId="279"/>
-            <ac:spMk id="8" creationId="{00000000-0000-0000-0000-000000000000}"/>
-          </ac:spMkLst>
-        </pc:spChg>
-        <pc:picChg chg="mod">
-          <ac:chgData name="Kevin Bowen" userId="ee6702fae12807e4" providerId="LiveId" clId="{5CB6C98B-5151-4E5D-BF39-3ED613ABF9A3}" dt="2026-09-07T16:18:19.029" v="196" actId="1076"/>
-          <ac:picMkLst>
-            <pc:docMk/>
-            <pc:sldMk cId="0" sldId="279"/>
-            <ac:picMk id="7" creationId="{00000000-0000-0000-0000-000000000000}"/>
-          </ac:picMkLst>
-        </pc:picChg>
-      </pc:sldChg>
-    </pc:docChg>
-  </pc:docChgLst>
-</pc:chgInfo>
-</file>
-
 <file path=ppt/notesMasters/notesMaster1.xml><?xml version="1.0" encoding="utf-8"?>
-<p:notesMaster xmlns:a="http://schemas.openxmlformats.org/drawingml/2006/main" xmlns:r="http://schemas.openxmlformats.org/officeDocument/2006/relationships" xmlns:p="http://schemas.openxmlformats.org/presentationml/2006/main">
+<p:notesMaster xmlns:a="http://schemas.openxmlformats.org/drawingml/2006/main" xmlns:p="http://schemas.openxmlformats.org/presentationml/2006/main" xmlns:r="http://schemas.openxmlformats.org/officeDocument/2006/relationships">
   <p:cSld>
     <p:bg>
       <p:bgRef idx="1001">
@@ -260,16 +176,241 @@
           <a:chExt cx="0" cy="0"/>
         </a:xfrm>
       </p:grpSpPr>
+      <p:sp>
+        <p:nvSpPr>
+          <p:cNvPr id="2" name="Header Placeholder 1"/>
+          <p:cNvSpPr>
+            <a:spLocks noGrp="1"/>
+          </p:cNvSpPr>
+          <p:nvPr>
+            <p:ph type="hdr" sz="quarter"/>
+          </p:nvPr>
+        </p:nvSpPr>
+        <p:spPr>
+          <a:xfrm>
+            <a:off x="0" y="0"/>
+            <a:ext cx="2971800" cy="457200"/>
+          </a:xfrm>
+          <a:prstGeom prst="rect">
+            <a:avLst/>
+          </a:prstGeom>
+        </p:spPr>
+        <p:txBody>
+          <a:bodyPr vert="horz" lIns="91440" tIns="45720" rIns="91440" bIns="45720" rtlCol="0"/>
+          <a:lstStyle>
+            <a:lvl1pPr algn="l">
+              <a:defRPr sz="1200"/>
+            </a:lvl1pPr>
+          </a:lstStyle>
+          <a:p>
+            <a:endParaRPr lang="en-US"/>
+          </a:p>
+        </p:txBody>
+      </p:sp>
+      <p:sp>
+        <p:nvSpPr>
+          <p:cNvPr id="3" name="Date Placeholder 2"/>
+          <p:cNvSpPr>
+            <a:spLocks noGrp="1"/>
+          </p:cNvSpPr>
+          <p:nvPr>
+            <p:ph type="dt" idx="1"/>
+          </p:nvPr>
+        </p:nvSpPr>
+        <p:spPr>
+          <a:xfrm>
+            <a:off x="3884613" y="0"/>
+            <a:ext cx="2971800" cy="457200"/>
+          </a:xfrm>
+          <a:prstGeom prst="rect">
+            <a:avLst/>
+          </a:prstGeom>
+        </p:spPr>
+        <p:txBody>
+          <a:bodyPr vert="horz" lIns="91440" tIns="45720" rIns="91440" bIns="45720" rtlCol="0"/>
+          <a:lstStyle>
+            <a:lvl1pPr algn="r">
+              <a:defRPr sz="1200"/>
+            </a:lvl1pPr>
+          </a:lstStyle>
+          <a:p>
+            <a:fld id="{0F89C1C7-3DCD-1040-A9CF-14679D8B5DDD}" type="datetimeFigureOut">
+              <a:rPr lang="en-US" smtClean="0"/>
+              <a:t>10/17/16</a:t>
+            </a:fld>
+            <a:endParaRPr lang="en-US"/>
+          </a:p>
+        </p:txBody>
+      </p:sp>
+      <p:sp>
+        <p:nvSpPr>
+          <p:cNvPr id="4" name="Slide Image Placeholder 3"/>
+          <p:cNvSpPr>
+            <a:spLocks noGrp="1" noRot="1" noChangeAspect="1"/>
+          </p:cNvSpPr>
+          <p:nvPr>
+            <p:ph type="sldImg" idx="2"/>
+          </p:nvPr>
+        </p:nvSpPr>
+        <p:spPr>
+          <a:xfrm>
+            <a:off x="1143000" y="685800"/>
+            <a:ext cx="4572000" cy="3429000"/>
+          </a:xfrm>
+          <a:prstGeom prst="rect">
+            <a:avLst/>
+          </a:prstGeom>
+          <a:noFill/>
+          <a:ln w="12700">
+            <a:solidFill>
+              <a:prstClr val="black"/>
+            </a:solidFill>
+          </a:ln>
+        </p:spPr>
+        <p:txBody>
+          <a:bodyPr vert="horz" lIns="91440" tIns="45720" rIns="91440" bIns="45720" rtlCol="0" anchor="ctr"/>
+          <a:lstStyle/>
+          <a:p>
+            <a:endParaRPr lang="en-US"/>
+          </a:p>
+        </p:txBody>
+      </p:sp>
+      <p:sp>
+        <p:nvSpPr>
+          <p:cNvPr id="5" name="Notes Placeholder 4"/>
+          <p:cNvSpPr>
+            <a:spLocks noGrp="1"/>
+          </p:cNvSpPr>
+          <p:nvPr>
+            <p:ph type="body" sz="quarter" idx="3"/>
+          </p:nvPr>
+        </p:nvSpPr>
+        <p:spPr>
+          <a:xfrm>
+            <a:off x="685800" y="4343400"/>
+            <a:ext cx="5486400" cy="4114800"/>
+          </a:xfrm>
+          <a:prstGeom prst="rect">
+            <a:avLst/>
+          </a:prstGeom>
+        </p:spPr>
+        <p:txBody>
+          <a:bodyPr vert="horz" lIns="91440" tIns="45720" rIns="91440" bIns="45720" rtlCol="0"/>
+          <a:lstStyle/>
+          <a:p>
+            <a:pPr lvl="0"/>
+            <a:r>
+              <a:rPr lang="en-US" smtClean="0"/>
+              <a:t>Click to edit Master text styles</a:t>
+            </a:r>
+          </a:p>
+          <a:p>
+            <a:pPr lvl="1"/>
+            <a:r>
+              <a:rPr lang="en-US" smtClean="0"/>
+              <a:t>Second level</a:t>
+            </a:r>
+          </a:p>
+          <a:p>
+            <a:pPr lvl="2"/>
+            <a:r>
+              <a:rPr lang="en-US" smtClean="0"/>
+              <a:t>Third level</a:t>
+            </a:r>
+          </a:p>
+          <a:p>
+            <a:pPr lvl="3"/>
+            <a:r>
+              <a:rPr lang="en-US" smtClean="0"/>
+              <a:t>Fourth level</a:t>
+            </a:r>
+          </a:p>
+          <a:p>
+            <a:pPr lvl="4"/>
+            <a:r>
+              <a:rPr lang="en-US" smtClean="0"/>
+              <a:t>Fifth level</a:t>
+            </a:r>
+            <a:endParaRPr lang="en-US"/>
+          </a:p>
+        </p:txBody>
+      </p:sp>
+      <p:sp>
+        <p:nvSpPr>
+          <p:cNvPr id="6" name="Footer Placeholder 5"/>
+          <p:cNvSpPr>
+            <a:spLocks noGrp="1"/>
+          </p:cNvSpPr>
+          <p:nvPr>
+            <p:ph type="ftr" sz="quarter" idx="4"/>
+          </p:nvPr>
+        </p:nvSpPr>
+        <p:spPr>
+          <a:xfrm>
+            <a:off x="0" y="8685213"/>
+            <a:ext cx="2971800" cy="457200"/>
+          </a:xfrm>
+          <a:prstGeom prst="rect">
+            <a:avLst/>
+          </a:prstGeom>
+        </p:spPr>
+        <p:txBody>
+          <a:bodyPr vert="horz" lIns="91440" tIns="45720" rIns="91440" bIns="45720" rtlCol="0" anchor="b"/>
+          <a:lstStyle>
+            <a:lvl1pPr algn="l">
+              <a:defRPr sz="1200"/>
+            </a:lvl1pPr>
+          </a:lstStyle>
+          <a:p>
+            <a:endParaRPr lang="en-US"/>
+          </a:p>
+        </p:txBody>
+      </p:sp>
+      <p:sp>
+        <p:nvSpPr>
+          <p:cNvPr id="7" name="Slide Number Placeholder 6"/>
+          <p:cNvSpPr>
+            <a:spLocks noGrp="1"/>
+          </p:cNvSpPr>
+          <p:nvPr>
+            <p:ph type="sldNum" sz="quarter" idx="5"/>
+          </p:nvPr>
+        </p:nvSpPr>
+        <p:spPr>
+          <a:xfrm>
+            <a:off x="3884613" y="8685213"/>
+            <a:ext cx="2971800" cy="457200"/>
+          </a:xfrm>
+          <a:prstGeom prst="rect">
+            <a:avLst/>
+          </a:prstGeom>
+        </p:spPr>
+        <p:txBody>
+          <a:bodyPr vert="horz" lIns="91440" tIns="45720" rIns="91440" bIns="45720" rtlCol="0" anchor="b"/>
+          <a:lstStyle>
+            <a:lvl1pPr algn="r">
+              <a:defRPr sz="1200"/>
+            </a:lvl1pPr>
+          </a:lstStyle>
+          <a:p>
+            <a:fld id="{BB5E49A5-4136-284D-997B-48E1D791AD67}" type="slidenum">
+              <a:rPr lang="en-US" smtClean="0"/>
+              <a:t>‹#›</a:t>
+            </a:fld>
+            <a:endParaRPr lang="en-US"/>
+          </a:p>
+        </p:txBody>
+      </p:sp>
     </p:spTree>
     <p:extLst>
       <p:ext uri="{BB962C8B-B14F-4D97-AF65-F5344CB8AC3E}">
-        <p14:creationId xmlns:p14="http://schemas.microsoft.com/office/powerpoint/2010/main" val="169600481"/>
+        <p14:creationId xmlns:p14="http://schemas.microsoft.com/office/powerpoint/2010/main" val="2623252185"/>
       </p:ext>
     </p:extLst>
   </p:cSld>
   <p:clrMap bg1="lt1" tx1="dk1" bg2="lt2" tx2="dk2" accent1="accent1" accent2="accent2" accent3="accent3" accent4="accent4" accent5="accent5" accent6="accent6" hlink="hlink" folHlink="folHlink"/>
   <p:notesStyle>
-    <a:lvl1pPr marL="0" algn="l" defTabSz="914400" rtl="0" eaLnBrk="1" latinLnBrk="0" hangingPunct="1">
+    <a:lvl1pPr marL="0" algn="l" defTabSz="457200" rtl="0" eaLnBrk="1" latinLnBrk="0" hangingPunct="1">
       <a:defRPr sz="1200" kern="1200">
         <a:solidFill>
           <a:schemeClr val="tx1"/>
@@ -279,7 +420,7 @@
         <a:cs typeface="+mn-cs"/>
       </a:defRPr>
     </a:lvl1pPr>
-    <a:lvl2pPr marL="457200" algn="l" defTabSz="914400" rtl="0" eaLnBrk="1" latinLnBrk="0" hangingPunct="1">
+    <a:lvl2pPr marL="457200" algn="l" defTabSz="457200" rtl="0" eaLnBrk="1" latinLnBrk="0" hangingPunct="1">
       <a:defRPr sz="1200" kern="1200">
         <a:solidFill>
           <a:schemeClr val="tx1"/>
@@ -289,7 +430,7 @@
         <a:cs typeface="+mn-cs"/>
       </a:defRPr>
     </a:lvl2pPr>
-    <a:lvl3pPr marL="914400" algn="l" defTabSz="914400" rtl="0" eaLnBrk="1" latinLnBrk="0" hangingPunct="1">
+    <a:lvl3pPr marL="914400" algn="l" defTabSz="457200" rtl="0" eaLnBrk="1" latinLnBrk="0" hangingPunct="1">
       <a:defRPr sz="1200" kern="1200">
         <a:solidFill>
           <a:schemeClr val="tx1"/>
@@ -299,7 +440,7 @@
         <a:cs typeface="+mn-cs"/>
       </a:defRPr>
     </a:lvl3pPr>
-    <a:lvl4pPr marL="1371600" algn="l" defTabSz="914400" rtl="0" eaLnBrk="1" latinLnBrk="0" hangingPunct="1">
+    <a:lvl4pPr marL="1371600" algn="l" defTabSz="457200" rtl="0" eaLnBrk="1" latinLnBrk="0" hangingPunct="1">
       <a:defRPr sz="1200" kern="1200">
         <a:solidFill>
           <a:schemeClr val="tx1"/>
@@ -309,7 +450,7 @@
         <a:cs typeface="+mn-cs"/>
       </a:defRPr>
     </a:lvl4pPr>
-    <a:lvl5pPr marL="1828800" algn="l" defTabSz="914400" rtl="0" eaLnBrk="1" latinLnBrk="0" hangingPunct="1">
+    <a:lvl5pPr marL="1828800" algn="l" defTabSz="457200" rtl="0" eaLnBrk="1" latinLnBrk="0" hangingPunct="1">
       <a:defRPr sz="1200" kern="1200">
         <a:solidFill>
           <a:schemeClr val="tx1"/>
@@ -319,7 +460,7 @@
         <a:cs typeface="+mn-cs"/>
       </a:defRPr>
     </a:lvl5pPr>
-    <a:lvl6pPr marL="2286000" algn="l" defTabSz="914400" rtl="0" eaLnBrk="1" latinLnBrk="0" hangingPunct="1">
+    <a:lvl6pPr marL="2286000" algn="l" defTabSz="457200" rtl="0" eaLnBrk="1" latinLnBrk="0" hangingPunct="1">
       <a:defRPr sz="1200" kern="1200">
         <a:solidFill>
           <a:schemeClr val="tx1"/>
@@ -329,7 +470,7 @@
         <a:cs typeface="+mn-cs"/>
       </a:defRPr>
     </a:lvl6pPr>
-    <a:lvl7pPr marL="2743200" algn="l" defTabSz="914400" rtl="0" eaLnBrk="1" latinLnBrk="0" hangingPunct="1">
+    <a:lvl7pPr marL="2743200" algn="l" defTabSz="457200" rtl="0" eaLnBrk="1" latinLnBrk="0" hangingPunct="1">
       <a:defRPr sz="1200" kern="1200">
         <a:solidFill>
           <a:schemeClr val="tx1"/>
@@ -339,7 +480,7 @@
         <a:cs typeface="+mn-cs"/>
       </a:defRPr>
     </a:lvl7pPr>
-    <a:lvl8pPr marL="3200400" algn="l" defTabSz="914400" rtl="0" eaLnBrk="1" latinLnBrk="0" hangingPunct="1">
+    <a:lvl8pPr marL="3200400" algn="l" defTabSz="457200" rtl="0" eaLnBrk="1" latinLnBrk="0" hangingPunct="1">
       <a:defRPr sz="1200" kern="1200">
         <a:solidFill>
           <a:schemeClr val="tx1"/>
@@ -349,7 +490,7 @@
         <a:cs typeface="+mn-cs"/>
       </a:defRPr>
     </a:lvl8pPr>
-    <a:lvl9pPr marL="3657600" algn="l" defTabSz="914400" rtl="0" eaLnBrk="1" latinLnBrk="0" hangingPunct="1">
+    <a:lvl9pPr marL="3657600" algn="l" defTabSz="457200" rtl="0" eaLnBrk="1" latinLnBrk="0" hangingPunct="1">
       <a:defRPr sz="1200" kern="1200">
         <a:solidFill>
           <a:schemeClr val="tx1"/>
@@ -364,7 +505,7 @@
 </file>
 
 <file path=ppt/notesSlides/notesSlide1.xml><?xml version="1.0" encoding="utf-8"?>
-<p:notes xmlns:a="http://schemas.openxmlformats.org/drawingml/2006/main" xmlns:r="http://schemas.openxmlformats.org/officeDocument/2006/relationships" xmlns:p="http://schemas.openxmlformats.org/presentationml/2006/main">
+<p:notes xmlns:a="http://schemas.openxmlformats.org/drawingml/2006/main" xmlns:p="http://schemas.openxmlformats.org/presentationml/2006/main" xmlns:r="http://schemas.openxmlformats.org/officeDocument/2006/relationships">
   <p:cSld>
     <p:spTree>
       <p:nvGrpSpPr>
@@ -384,7 +525,7 @@
         <p:nvSpPr>
           <p:cNvPr id="2" name="Slide Image Placeholder 1"/>
           <p:cNvSpPr>
-            <a:spLocks noGrp="1" noRot="1" noChangeAspect="1"/>
+            <a:spLocks noGrp="1"/>
           </p:cNvSpPr>
           <p:nvPr>
             <p:ph type="sldImg" idx="2"/>
@@ -399,7 +540,7 @@
             <a:spLocks noGrp="1"/>
           </p:cNvSpPr>
           <p:nvPr>
-            <p:ph type="body" sz="quarter" idx="3"/>
+            <p:ph type="body" idx="3" sz="quarter"/>
           </p:nvPr>
         </p:nvSpPr>
         <p:spPr/>
@@ -447,7 +588,7 @@
             <a:spLocks noGrp="1"/>
           </p:cNvSpPr>
           <p:nvPr>
-            <p:ph type="sldNum" sz="quarter" idx="5"/>
+            <p:ph type="sldNum" idx="5" sz="quarter"/>
           </p:nvPr>
         </p:nvSpPr>
         <p:spPr/>
@@ -461,7 +602,7 @@
 </file>
 
 <file path=ppt/notesSlides/notesSlide10.xml><?xml version="1.0" encoding="utf-8"?>
-<p:notes xmlns:a="http://schemas.openxmlformats.org/drawingml/2006/main" xmlns:r="http://schemas.openxmlformats.org/officeDocument/2006/relationships" xmlns:p="http://schemas.openxmlformats.org/presentationml/2006/main">
+<p:notes xmlns:a="http://schemas.openxmlformats.org/drawingml/2006/main" xmlns:p="http://schemas.openxmlformats.org/presentationml/2006/main" xmlns:r="http://schemas.openxmlformats.org/officeDocument/2006/relationships">
   <p:cSld>
     <p:spTree>
       <p:nvGrpSpPr>
@@ -481,7 +622,7 @@
         <p:nvSpPr>
           <p:cNvPr id="2" name="Slide Image Placeholder 1"/>
           <p:cNvSpPr>
-            <a:spLocks noGrp="1" noRot="1" noChangeAspect="1"/>
+            <a:spLocks noGrp="1"/>
           </p:cNvSpPr>
           <p:nvPr>
             <p:ph type="sldImg" idx="2"/>
@@ -496,7 +637,7 @@
             <a:spLocks noGrp="1"/>
           </p:cNvSpPr>
           <p:nvPr>
-            <p:ph type="body" sz="quarter" idx="3"/>
+            <p:ph type="body" idx="3" sz="quarter"/>
           </p:nvPr>
         </p:nvSpPr>
         <p:spPr/>
@@ -528,7 +669,7 @@
             <a:spLocks noGrp="1"/>
           </p:cNvSpPr>
           <p:nvPr>
-            <p:ph type="sldNum" sz="quarter" idx="5"/>
+            <p:ph type="sldNum" idx="5" sz="quarter"/>
           </p:nvPr>
         </p:nvSpPr>
         <p:spPr/>
@@ -542,7 +683,7 @@
 </file>
 
 <file path=ppt/notesSlides/notesSlide11.xml><?xml version="1.0" encoding="utf-8"?>
-<p:notes xmlns:a="http://schemas.openxmlformats.org/drawingml/2006/main" xmlns:r="http://schemas.openxmlformats.org/officeDocument/2006/relationships" xmlns:p="http://schemas.openxmlformats.org/presentationml/2006/main">
+<p:notes xmlns:a="http://schemas.openxmlformats.org/drawingml/2006/main" xmlns:p="http://schemas.openxmlformats.org/presentationml/2006/main" xmlns:r="http://schemas.openxmlformats.org/officeDocument/2006/relationships">
   <p:cSld>
     <p:spTree>
       <p:nvGrpSpPr>
@@ -562,7 +703,7 @@
         <p:nvSpPr>
           <p:cNvPr id="2" name="Slide Image Placeholder 1"/>
           <p:cNvSpPr>
-            <a:spLocks noGrp="1" noRot="1" noChangeAspect="1"/>
+            <a:spLocks noGrp="1"/>
           </p:cNvSpPr>
           <p:nvPr>
             <p:ph type="sldImg" idx="2"/>
@@ -577,7 +718,7 @@
             <a:spLocks noGrp="1"/>
           </p:cNvSpPr>
           <p:nvPr>
-            <p:ph type="body" sz="quarter" idx="3"/>
+            <p:ph type="body" idx="3" sz="quarter"/>
           </p:nvPr>
         </p:nvSpPr>
         <p:spPr/>
@@ -625,7 +766,7 @@
             <a:spLocks noGrp="1"/>
           </p:cNvSpPr>
           <p:nvPr>
-            <p:ph type="sldNum" sz="quarter" idx="5"/>
+            <p:ph type="sldNum" idx="5" sz="quarter"/>
           </p:nvPr>
         </p:nvSpPr>
         <p:spPr/>
@@ -639,7 +780,7 @@
 </file>
 
 <file path=ppt/notesSlides/notesSlide12.xml><?xml version="1.0" encoding="utf-8"?>
-<p:notes xmlns:a="http://schemas.openxmlformats.org/drawingml/2006/main" xmlns:r="http://schemas.openxmlformats.org/officeDocument/2006/relationships" xmlns:p="http://schemas.openxmlformats.org/presentationml/2006/main">
+<p:notes xmlns:a="http://schemas.openxmlformats.org/drawingml/2006/main" xmlns:p="http://schemas.openxmlformats.org/presentationml/2006/main" xmlns:r="http://schemas.openxmlformats.org/officeDocument/2006/relationships">
   <p:cSld>
     <p:spTree>
       <p:nvGrpSpPr>
@@ -659,7 +800,7 @@
         <p:nvSpPr>
           <p:cNvPr id="2" name="Slide Image Placeholder 1"/>
           <p:cNvSpPr>
-            <a:spLocks noGrp="1" noRot="1" noChangeAspect="1"/>
+            <a:spLocks noGrp="1"/>
           </p:cNvSpPr>
           <p:nvPr>
             <p:ph type="sldImg" idx="2"/>
@@ -674,7 +815,7 @@
             <a:spLocks noGrp="1"/>
           </p:cNvSpPr>
           <p:nvPr>
-            <p:ph type="body" sz="quarter" idx="3"/>
+            <p:ph type="body" idx="3" sz="quarter"/>
           </p:nvPr>
         </p:nvSpPr>
         <p:spPr/>
@@ -714,7 +855,7 @@
             <a:spLocks noGrp="1"/>
           </p:cNvSpPr>
           <p:nvPr>
-            <p:ph type="sldNum" sz="quarter" idx="5"/>
+            <p:ph type="sldNum" idx="5" sz="quarter"/>
           </p:nvPr>
         </p:nvSpPr>
         <p:spPr/>
@@ -728,7 +869,7 @@
 </file>
 
 <file path=ppt/notesSlides/notesSlide13.xml><?xml version="1.0" encoding="utf-8"?>
-<p:notes xmlns:a="http://schemas.openxmlformats.org/drawingml/2006/main" xmlns:r="http://schemas.openxmlformats.org/officeDocument/2006/relationships" xmlns:p="http://schemas.openxmlformats.org/presentationml/2006/main">
+<p:notes xmlns:a="http://schemas.openxmlformats.org/drawingml/2006/main" xmlns:p="http://schemas.openxmlformats.org/presentationml/2006/main" xmlns:r="http://schemas.openxmlformats.org/officeDocument/2006/relationships">
   <p:cSld>
     <p:spTree>
       <p:nvGrpSpPr>
@@ -748,7 +889,7 @@
         <p:nvSpPr>
           <p:cNvPr id="2" name="Slide Image Placeholder 1"/>
           <p:cNvSpPr>
-            <a:spLocks noGrp="1" noRot="1" noChangeAspect="1"/>
+            <a:spLocks noGrp="1"/>
           </p:cNvSpPr>
           <p:nvPr>
             <p:ph type="sldImg" idx="2"/>
@@ -763,7 +904,7 @@
             <a:spLocks noGrp="1"/>
           </p:cNvSpPr>
           <p:nvPr>
-            <p:ph type="body" sz="quarter" idx="3"/>
+            <p:ph type="body" idx="3" sz="quarter"/>
           </p:nvPr>
         </p:nvSpPr>
         <p:spPr/>
@@ -803,7 +944,7 @@
             <a:spLocks noGrp="1"/>
           </p:cNvSpPr>
           <p:nvPr>
-            <p:ph type="sldNum" sz="quarter" idx="5"/>
+            <p:ph type="sldNum" idx="5" sz="quarter"/>
           </p:nvPr>
         </p:nvSpPr>
         <p:spPr/>
@@ -817,7 +958,7 @@
 </file>
 
 <file path=ppt/notesSlides/notesSlide14.xml><?xml version="1.0" encoding="utf-8"?>
-<p:notes xmlns:a="http://schemas.openxmlformats.org/drawingml/2006/main" xmlns:r="http://schemas.openxmlformats.org/officeDocument/2006/relationships" xmlns:p="http://schemas.openxmlformats.org/presentationml/2006/main">
+<p:notes xmlns:a="http://schemas.openxmlformats.org/drawingml/2006/main" xmlns:p="http://schemas.openxmlformats.org/presentationml/2006/main" xmlns:r="http://schemas.openxmlformats.org/officeDocument/2006/relationships">
   <p:cSld>
     <p:spTree>
       <p:nvGrpSpPr>
@@ -837,7 +978,7 @@
         <p:nvSpPr>
           <p:cNvPr id="2" name="Slide Image Placeholder 1"/>
           <p:cNvSpPr>
-            <a:spLocks noGrp="1" noRot="1" noChangeAspect="1"/>
+            <a:spLocks noGrp="1"/>
           </p:cNvSpPr>
           <p:nvPr>
             <p:ph type="sldImg" idx="2"/>
@@ -852,7 +993,7 @@
             <a:spLocks noGrp="1"/>
           </p:cNvSpPr>
           <p:nvPr>
-            <p:ph type="body" sz="quarter" idx="3"/>
+            <p:ph type="body" idx="3" sz="quarter"/>
           </p:nvPr>
         </p:nvSpPr>
         <p:spPr/>
@@ -900,7 +1041,7 @@
             <a:spLocks noGrp="1"/>
           </p:cNvSpPr>
           <p:nvPr>
-            <p:ph type="sldNum" sz="quarter" idx="5"/>
+            <p:ph type="sldNum" idx="5" sz="quarter"/>
           </p:nvPr>
         </p:nvSpPr>
         <p:spPr/>
@@ -914,7 +1055,7 @@
 </file>
 
 <file path=ppt/notesSlides/notesSlide15.xml><?xml version="1.0" encoding="utf-8"?>
-<p:notes xmlns:a="http://schemas.openxmlformats.org/drawingml/2006/main" xmlns:r="http://schemas.openxmlformats.org/officeDocument/2006/relationships" xmlns:p="http://schemas.openxmlformats.org/presentationml/2006/main">
+<p:notes xmlns:a="http://schemas.openxmlformats.org/drawingml/2006/main" xmlns:p="http://schemas.openxmlformats.org/presentationml/2006/main" xmlns:r="http://schemas.openxmlformats.org/officeDocument/2006/relationships">
   <p:cSld>
     <p:spTree>
       <p:nvGrpSpPr>
@@ -934,7 +1075,7 @@
         <p:nvSpPr>
           <p:cNvPr id="2" name="Slide Image Placeholder 1"/>
           <p:cNvSpPr>
-            <a:spLocks noGrp="1" noRot="1" noChangeAspect="1"/>
+            <a:spLocks noGrp="1"/>
           </p:cNvSpPr>
           <p:nvPr>
             <p:ph type="sldImg" idx="2"/>
@@ -949,7 +1090,7 @@
             <a:spLocks noGrp="1"/>
           </p:cNvSpPr>
           <p:nvPr>
-            <p:ph type="body" sz="quarter" idx="3"/>
+            <p:ph type="body" idx="3" sz="quarter"/>
           </p:nvPr>
         </p:nvSpPr>
         <p:spPr/>
@@ -989,7 +1130,7 @@
             <a:spLocks noGrp="1"/>
           </p:cNvSpPr>
           <p:nvPr>
-            <p:ph type="sldNum" sz="quarter" idx="5"/>
+            <p:ph type="sldNum" idx="5" sz="quarter"/>
           </p:nvPr>
         </p:nvSpPr>
         <p:spPr/>
@@ -1003,7 +1144,7 @@
 </file>
 
 <file path=ppt/notesSlides/notesSlide16.xml><?xml version="1.0" encoding="utf-8"?>
-<p:notes xmlns:a="http://schemas.openxmlformats.org/drawingml/2006/main" xmlns:r="http://schemas.openxmlformats.org/officeDocument/2006/relationships" xmlns:p="http://schemas.openxmlformats.org/presentationml/2006/main">
+<p:notes xmlns:a="http://schemas.openxmlformats.org/drawingml/2006/main" xmlns:p="http://schemas.openxmlformats.org/presentationml/2006/main" xmlns:r="http://schemas.openxmlformats.org/officeDocument/2006/relationships">
   <p:cSld>
     <p:spTree>
       <p:nvGrpSpPr>
@@ -1023,7 +1164,7 @@
         <p:nvSpPr>
           <p:cNvPr id="2" name="Slide Image Placeholder 1"/>
           <p:cNvSpPr>
-            <a:spLocks noGrp="1" noRot="1" noChangeAspect="1"/>
+            <a:spLocks noGrp="1"/>
           </p:cNvSpPr>
           <p:nvPr>
             <p:ph type="sldImg" idx="2"/>
@@ -1038,7 +1179,7 @@
             <a:spLocks noGrp="1"/>
           </p:cNvSpPr>
           <p:nvPr>
-            <p:ph type="body" sz="quarter" idx="3"/>
+            <p:ph type="body" idx="3" sz="quarter"/>
           </p:nvPr>
         </p:nvSpPr>
         <p:spPr/>
@@ -1094,7 +1235,7 @@
             <a:spLocks noGrp="1"/>
           </p:cNvSpPr>
           <p:nvPr>
-            <p:ph type="sldNum" sz="quarter" idx="5"/>
+            <p:ph type="sldNum" idx="5" sz="quarter"/>
           </p:nvPr>
         </p:nvSpPr>
         <p:spPr/>
@@ -1108,7 +1249,7 @@
 </file>
 
 <file path=ppt/notesSlides/notesSlide17.xml><?xml version="1.0" encoding="utf-8"?>
-<p:notes xmlns:a="http://schemas.openxmlformats.org/drawingml/2006/main" xmlns:r="http://schemas.openxmlformats.org/officeDocument/2006/relationships" xmlns:p="http://schemas.openxmlformats.org/presentationml/2006/main">
+<p:notes xmlns:a="http://schemas.openxmlformats.org/drawingml/2006/main" xmlns:p="http://schemas.openxmlformats.org/presentationml/2006/main" xmlns:r="http://schemas.openxmlformats.org/officeDocument/2006/relationships">
   <p:cSld>
     <p:spTree>
       <p:nvGrpSpPr>
@@ -1128,7 +1269,7 @@
         <p:nvSpPr>
           <p:cNvPr id="2" name="Slide Image Placeholder 1"/>
           <p:cNvSpPr>
-            <a:spLocks noGrp="1" noRot="1" noChangeAspect="1"/>
+            <a:spLocks noGrp="1"/>
           </p:cNvSpPr>
           <p:nvPr>
             <p:ph type="sldImg" idx="2"/>
@@ -1143,7 +1284,7 @@
             <a:spLocks noGrp="1"/>
           </p:cNvSpPr>
           <p:nvPr>
-            <p:ph type="body" sz="quarter" idx="3"/>
+            <p:ph type="body" idx="3" sz="quarter"/>
           </p:nvPr>
         </p:nvSpPr>
         <p:spPr/>
@@ -1191,7 +1332,7 @@
             <a:spLocks noGrp="1"/>
           </p:cNvSpPr>
           <p:nvPr>
-            <p:ph type="sldNum" sz="quarter" idx="5"/>
+            <p:ph type="sldNum" idx="5" sz="quarter"/>
           </p:nvPr>
         </p:nvSpPr>
         <p:spPr/>
@@ -1205,7 +1346,7 @@
 </file>
 
 <file path=ppt/notesSlides/notesSlide18.xml><?xml version="1.0" encoding="utf-8"?>
-<p:notes xmlns:a="http://schemas.openxmlformats.org/drawingml/2006/main" xmlns:r="http://schemas.openxmlformats.org/officeDocument/2006/relationships" xmlns:p="http://schemas.openxmlformats.org/presentationml/2006/main">
+<p:notes xmlns:a="http://schemas.openxmlformats.org/drawingml/2006/main" xmlns:p="http://schemas.openxmlformats.org/presentationml/2006/main" xmlns:r="http://schemas.openxmlformats.org/officeDocument/2006/relationships">
   <p:cSld>
     <p:spTree>
       <p:nvGrpSpPr>
@@ -1225,7 +1366,7 @@
         <p:nvSpPr>
           <p:cNvPr id="2" name="Slide Image Placeholder 1"/>
           <p:cNvSpPr>
-            <a:spLocks noGrp="1" noRot="1" noChangeAspect="1"/>
+            <a:spLocks noGrp="1"/>
           </p:cNvSpPr>
           <p:nvPr>
             <p:ph type="sldImg" idx="2"/>
@@ -1240,7 +1381,7 @@
             <a:spLocks noGrp="1"/>
           </p:cNvSpPr>
           <p:nvPr>
-            <p:ph type="body" sz="quarter" idx="3"/>
+            <p:ph type="body" idx="3" sz="quarter"/>
           </p:nvPr>
         </p:nvSpPr>
         <p:spPr/>
@@ -1249,7 +1390,7 @@
           <a:lstStyle/>
           <a:p>
             <a:r>
-              <a:rPr sz="1200" dirty="0">
+              <a:rPr sz="1200">
                 <a:latin typeface="Calibri"/>
               </a:rPr>
               <a:t>This is a reference page, not a teaching slide. Point at it and tell them where to find it again.</a:t>
@@ -1257,7 +1398,7 @@
           </a:p>
           <a:p>
             <a:r>
-              <a:rPr sz="1200" dirty="0">
+              <a:rPr sz="1200">
                 <a:latin typeface="Calibri"/>
               </a:rPr>
               <a:t>The full ESP32 has 38 pins. These are the ones wired to something on this board, which is the only list they need.</a:t>
@@ -1265,7 +1406,7 @@
           </a:p>
           <a:p>
             <a:r>
-              <a:rPr sz="1200" dirty="0">
+              <a:rPr sz="1200">
                 <a:latin typeface="Calibri"/>
               </a:rPr>
               <a:t>The motor pin numbers come straight out of the sketch, so the slide cannot disagree with the file.</a:t>
@@ -1273,7 +1414,7 @@
           </a:p>
           <a:p>
             <a:r>
-              <a:rPr sz="1200" dirty="0">
+              <a:rPr sz="1200">
                 <a:latin typeface="Calibri"/>
               </a:rPr>
               <a:t>The two facts worth saying out loud: GPIO 34 to 39 are INPUT ONLY and have no internal pull-up, and GPIO 0 is the BOOT button, so holding it down at reset does something special.</a:t>
@@ -1288,7 +1429,7 @@
             <a:spLocks noGrp="1"/>
           </p:cNvSpPr>
           <p:nvPr>
-            <p:ph type="sldNum" sz="quarter" idx="5"/>
+            <p:ph type="sldNum" idx="5" sz="quarter"/>
           </p:nvPr>
         </p:nvSpPr>
         <p:spPr/>
@@ -1302,7 +1443,7 @@
 </file>
 
 <file path=ppt/notesSlides/notesSlide19.xml><?xml version="1.0" encoding="utf-8"?>
-<p:notes xmlns:a="http://schemas.openxmlformats.org/drawingml/2006/main" xmlns:r="http://schemas.openxmlformats.org/officeDocument/2006/relationships" xmlns:p="http://schemas.openxmlformats.org/presentationml/2006/main">
+<p:notes xmlns:a="http://schemas.openxmlformats.org/drawingml/2006/main" xmlns:p="http://schemas.openxmlformats.org/presentationml/2006/main" xmlns:r="http://schemas.openxmlformats.org/officeDocument/2006/relationships">
   <p:cSld>
     <p:spTree>
       <p:nvGrpSpPr>
@@ -1322,7 +1463,7 @@
         <p:nvSpPr>
           <p:cNvPr id="2" name="Slide Image Placeholder 1"/>
           <p:cNvSpPr>
-            <a:spLocks noGrp="1" noRot="1" noChangeAspect="1"/>
+            <a:spLocks noGrp="1"/>
           </p:cNvSpPr>
           <p:nvPr>
             <p:ph type="sldImg" idx="2"/>
@@ -1337,7 +1478,7 @@
             <a:spLocks noGrp="1"/>
           </p:cNvSpPr>
           <p:nvPr>
-            <p:ph type="body" sz="quarter" idx="3"/>
+            <p:ph type="body" idx="3" sz="quarter"/>
           </p:nvPr>
         </p:nvSpPr>
         <p:spPr/>
@@ -1385,7 +1526,7 @@
             <a:spLocks noGrp="1"/>
           </p:cNvSpPr>
           <p:nvPr>
-            <p:ph type="sldNum" sz="quarter" idx="5"/>
+            <p:ph type="sldNum" idx="5" sz="quarter"/>
           </p:nvPr>
         </p:nvSpPr>
         <p:spPr/>
@@ -1399,7 +1540,7 @@
 </file>
 
 <file path=ppt/notesSlides/notesSlide2.xml><?xml version="1.0" encoding="utf-8"?>
-<p:notes xmlns:a="http://schemas.openxmlformats.org/drawingml/2006/main" xmlns:r="http://schemas.openxmlformats.org/officeDocument/2006/relationships" xmlns:p="http://schemas.openxmlformats.org/presentationml/2006/main">
+<p:notes xmlns:a="http://schemas.openxmlformats.org/drawingml/2006/main" xmlns:p="http://schemas.openxmlformats.org/presentationml/2006/main" xmlns:r="http://schemas.openxmlformats.org/officeDocument/2006/relationships">
   <p:cSld>
     <p:spTree>
       <p:nvGrpSpPr>
@@ -1419,7 +1560,7 @@
         <p:nvSpPr>
           <p:cNvPr id="2" name="Slide Image Placeholder 1"/>
           <p:cNvSpPr>
-            <a:spLocks noGrp="1" noRot="1" noChangeAspect="1"/>
+            <a:spLocks noGrp="1"/>
           </p:cNvSpPr>
           <p:nvPr>
             <p:ph type="sldImg" idx="2"/>
@@ -1434,7 +1575,7 @@
             <a:spLocks noGrp="1"/>
           </p:cNvSpPr>
           <p:nvPr>
-            <p:ph type="body" sz="quarter" idx="3"/>
+            <p:ph type="body" idx="3" sz="quarter"/>
           </p:nvPr>
         </p:nvSpPr>
         <p:spPr/>
@@ -1443,7 +1584,7 @@
           <a:lstStyle/>
           <a:p>
             <a:r>
-              <a:rPr sz="1200" dirty="0">
+              <a:rPr sz="1200">
                 <a:latin typeface="Calibri"/>
               </a:rPr>
               <a:t>Read these out. It takes forty seconds and it tells the room what success looks like.</a:t>
@@ -1451,7 +1592,7 @@
           </a:p>
           <a:p>
             <a:r>
-              <a:rPr sz="1200" dirty="0">
+              <a:rPr sz="1200">
                 <a:latin typeface="Calibri"/>
               </a:rPr>
               <a:t>Come back to this slide in the last five minutes and ask them to score themselves against it. Anything nobody can do is what you open with next lesson.</a:t>
@@ -1459,20 +1600,19 @@
           </a:p>
           <a:p>
             <a:r>
-              <a:rPr sz="1200" dirty="0">
+              <a:rPr sz="1200">
+                <a:latin typeface="Calibri"/>
+              </a:rPr>
+              <a:t>Ask first, before any of this: hands up for anybody who has met Arduino, the ESP-32, C++ or Ohm's law before. It changes who you pair with whom, and it tells you which of the four objectives is going to be the slow one.</a:t>
+            </a:r>
+          </a:p>
+          <a:p>
+            <a:r>
+              <a:rPr sz="1200">
                 <a:latin typeface="Calibri"/>
               </a:rPr>
               <a:t>Objective four - saying why the resistor is there - is the one that separates following instructions from understanding. Watch for it.</a:t>
             </a:r>
-            <a:r>
-              <a:rPr lang="en-US" sz="1200" dirty="0">
-                <a:latin typeface="Calibri"/>
-              </a:rPr>
-              <a:t> Please raise your hand if you have experience with Arduino, ESP-32, C++ programming, Ohm’s Law.</a:t>
-            </a:r>
-            <a:endParaRPr sz="1200" dirty="0">
-              <a:latin typeface="Calibri"/>
-            </a:endParaRPr>
           </a:p>
         </p:txBody>
       </p:sp>
@@ -1483,7 +1623,7 @@
             <a:spLocks noGrp="1"/>
           </p:cNvSpPr>
           <p:nvPr>
-            <p:ph type="sldNum" sz="quarter" idx="5"/>
+            <p:ph type="sldNum" idx="5" sz="quarter"/>
           </p:nvPr>
         </p:nvSpPr>
         <p:spPr/>
@@ -1497,7 +1637,7 @@
 </file>
 
 <file path=ppt/notesSlides/notesSlide20.xml><?xml version="1.0" encoding="utf-8"?>
-<p:notes xmlns:a="http://schemas.openxmlformats.org/drawingml/2006/main" xmlns:r="http://schemas.openxmlformats.org/officeDocument/2006/relationships" xmlns:p="http://schemas.openxmlformats.org/presentationml/2006/main">
+<p:notes xmlns:a="http://schemas.openxmlformats.org/drawingml/2006/main" xmlns:p="http://schemas.openxmlformats.org/presentationml/2006/main" xmlns:r="http://schemas.openxmlformats.org/officeDocument/2006/relationships">
   <p:cSld>
     <p:spTree>
       <p:nvGrpSpPr>
@@ -1517,7 +1657,7 @@
         <p:nvSpPr>
           <p:cNvPr id="2" name="Slide Image Placeholder 1"/>
           <p:cNvSpPr>
-            <a:spLocks noGrp="1" noRot="1" noChangeAspect="1"/>
+            <a:spLocks noGrp="1"/>
           </p:cNvSpPr>
           <p:nvPr>
             <p:ph type="sldImg" idx="2"/>
@@ -1532,7 +1672,7 @@
             <a:spLocks noGrp="1"/>
           </p:cNvSpPr>
           <p:nvPr>
-            <p:ph type="body" sz="quarter" idx="3"/>
+            <p:ph type="body" idx="3" sz="quarter"/>
           </p:nvPr>
         </p:nvSpPr>
         <p:spPr/>
@@ -1580,7 +1720,7 @@
             <a:spLocks noGrp="1"/>
           </p:cNvSpPr>
           <p:nvPr>
-            <p:ph type="sldNum" sz="quarter" idx="5"/>
+            <p:ph type="sldNum" idx="5" sz="quarter"/>
           </p:nvPr>
         </p:nvSpPr>
         <p:spPr/>
@@ -1594,7 +1734,7 @@
 </file>
 
 <file path=ppt/notesSlides/notesSlide21.xml><?xml version="1.0" encoding="utf-8"?>
-<p:notes xmlns:a="http://schemas.openxmlformats.org/drawingml/2006/main" xmlns:r="http://schemas.openxmlformats.org/officeDocument/2006/relationships" xmlns:p="http://schemas.openxmlformats.org/presentationml/2006/main">
+<p:notes xmlns:a="http://schemas.openxmlformats.org/drawingml/2006/main" xmlns:p="http://schemas.openxmlformats.org/presentationml/2006/main" xmlns:r="http://schemas.openxmlformats.org/officeDocument/2006/relationships">
   <p:cSld>
     <p:spTree>
       <p:nvGrpSpPr>
@@ -1614,7 +1754,7 @@
         <p:nvSpPr>
           <p:cNvPr id="2" name="Slide Image Placeholder 1"/>
           <p:cNvSpPr>
-            <a:spLocks noGrp="1" noRot="1" noChangeAspect="1"/>
+            <a:spLocks noGrp="1"/>
           </p:cNvSpPr>
           <p:nvPr>
             <p:ph type="sldImg" idx="2"/>
@@ -1629,7 +1769,7 @@
             <a:spLocks noGrp="1"/>
           </p:cNvSpPr>
           <p:nvPr>
-            <p:ph type="body" sz="quarter" idx="3"/>
+            <p:ph type="body" idx="3" sz="quarter"/>
           </p:nvPr>
         </p:nvSpPr>
         <p:spPr/>
@@ -1677,7 +1817,7 @@
             <a:spLocks noGrp="1"/>
           </p:cNvSpPr>
           <p:nvPr>
-            <p:ph type="sldNum" sz="quarter" idx="5"/>
+            <p:ph type="sldNum" idx="5" sz="quarter"/>
           </p:nvPr>
         </p:nvSpPr>
         <p:spPr/>
@@ -1691,7 +1831,7 @@
 </file>
 
 <file path=ppt/notesSlides/notesSlide22.xml><?xml version="1.0" encoding="utf-8"?>
-<p:notes xmlns:a="http://schemas.openxmlformats.org/drawingml/2006/main" xmlns:r="http://schemas.openxmlformats.org/officeDocument/2006/relationships" xmlns:p="http://schemas.openxmlformats.org/presentationml/2006/main">
+<p:notes xmlns:a="http://schemas.openxmlformats.org/drawingml/2006/main" xmlns:p="http://schemas.openxmlformats.org/presentationml/2006/main" xmlns:r="http://schemas.openxmlformats.org/officeDocument/2006/relationships">
   <p:cSld>
     <p:spTree>
       <p:nvGrpSpPr>
@@ -1711,7 +1851,7 @@
         <p:nvSpPr>
           <p:cNvPr id="2" name="Slide Image Placeholder 1"/>
           <p:cNvSpPr>
-            <a:spLocks noGrp="1" noRot="1" noChangeAspect="1"/>
+            <a:spLocks noGrp="1"/>
           </p:cNvSpPr>
           <p:nvPr>
             <p:ph type="sldImg" idx="2"/>
@@ -1726,7 +1866,7 @@
             <a:spLocks noGrp="1"/>
           </p:cNvSpPr>
           <p:nvPr>
-            <p:ph type="body" sz="quarter" idx="3"/>
+            <p:ph type="body" idx="3" sz="quarter"/>
           </p:nvPr>
         </p:nvSpPr>
         <p:spPr/>
@@ -1766,7 +1906,7 @@
             <a:spLocks noGrp="1"/>
           </p:cNvSpPr>
           <p:nvPr>
-            <p:ph type="sldNum" sz="quarter" idx="5"/>
+            <p:ph type="sldNum" idx="5" sz="quarter"/>
           </p:nvPr>
         </p:nvSpPr>
         <p:spPr/>
@@ -1780,7 +1920,7 @@
 </file>
 
 <file path=ppt/notesSlides/notesSlide23.xml><?xml version="1.0" encoding="utf-8"?>
-<p:notes xmlns:a="http://schemas.openxmlformats.org/drawingml/2006/main" xmlns:r="http://schemas.openxmlformats.org/officeDocument/2006/relationships" xmlns:p="http://schemas.openxmlformats.org/presentationml/2006/main">
+<p:notes xmlns:a="http://schemas.openxmlformats.org/drawingml/2006/main" xmlns:p="http://schemas.openxmlformats.org/presentationml/2006/main" xmlns:r="http://schemas.openxmlformats.org/officeDocument/2006/relationships">
   <p:cSld>
     <p:spTree>
       <p:nvGrpSpPr>
@@ -1800,7 +1940,7 @@
         <p:nvSpPr>
           <p:cNvPr id="2" name="Slide Image Placeholder 1"/>
           <p:cNvSpPr>
-            <a:spLocks noGrp="1" noRot="1" noChangeAspect="1"/>
+            <a:spLocks noGrp="1"/>
           </p:cNvSpPr>
           <p:nvPr>
             <p:ph type="sldImg" idx="2"/>
@@ -1815,7 +1955,7 @@
             <a:spLocks noGrp="1"/>
           </p:cNvSpPr>
           <p:nvPr>
-            <p:ph type="body" sz="quarter" idx="3"/>
+            <p:ph type="body" idx="3" sz="quarter"/>
           </p:nvPr>
         </p:nvSpPr>
         <p:spPr/>
@@ -1855,7 +1995,7 @@
             <a:spLocks noGrp="1"/>
           </p:cNvSpPr>
           <p:nvPr>
-            <p:ph type="sldNum" sz="quarter" idx="5"/>
+            <p:ph type="sldNum" idx="5" sz="quarter"/>
           </p:nvPr>
         </p:nvSpPr>
         <p:spPr/>
@@ -1869,7 +2009,7 @@
 </file>
 
 <file path=ppt/notesSlides/notesSlide24.xml><?xml version="1.0" encoding="utf-8"?>
-<p:notes xmlns:a="http://schemas.openxmlformats.org/drawingml/2006/main" xmlns:r="http://schemas.openxmlformats.org/officeDocument/2006/relationships" xmlns:p="http://schemas.openxmlformats.org/presentationml/2006/main">
+<p:notes xmlns:a="http://schemas.openxmlformats.org/drawingml/2006/main" xmlns:p="http://schemas.openxmlformats.org/presentationml/2006/main" xmlns:r="http://schemas.openxmlformats.org/officeDocument/2006/relationships">
   <p:cSld>
     <p:spTree>
       <p:nvGrpSpPr>
@@ -1889,7 +2029,7 @@
         <p:nvSpPr>
           <p:cNvPr id="2" name="Slide Image Placeholder 1"/>
           <p:cNvSpPr>
-            <a:spLocks noGrp="1" noRot="1" noChangeAspect="1"/>
+            <a:spLocks noGrp="1"/>
           </p:cNvSpPr>
           <p:nvPr>
             <p:ph type="sldImg" idx="2"/>
@@ -1904,7 +2044,7 @@
             <a:spLocks noGrp="1"/>
           </p:cNvSpPr>
           <p:nvPr>
-            <p:ph type="body" sz="quarter" idx="3"/>
+            <p:ph type="body" idx="3" sz="quarter"/>
           </p:nvPr>
         </p:nvSpPr>
         <p:spPr/>
@@ -1984,7 +2124,7 @@
             <a:spLocks noGrp="1"/>
           </p:cNvSpPr>
           <p:nvPr>
-            <p:ph type="sldNum" sz="quarter" idx="5"/>
+            <p:ph type="sldNum" idx="5" sz="quarter"/>
           </p:nvPr>
         </p:nvSpPr>
         <p:spPr/>
@@ -1998,7 +2138,7 @@
 </file>
 
 <file path=ppt/notesSlides/notesSlide25.xml><?xml version="1.0" encoding="utf-8"?>
-<p:notes xmlns:a="http://schemas.openxmlformats.org/drawingml/2006/main" xmlns:r="http://schemas.openxmlformats.org/officeDocument/2006/relationships" xmlns:p="http://schemas.openxmlformats.org/presentationml/2006/main">
+<p:notes xmlns:a="http://schemas.openxmlformats.org/drawingml/2006/main" xmlns:p="http://schemas.openxmlformats.org/presentationml/2006/main" xmlns:r="http://schemas.openxmlformats.org/officeDocument/2006/relationships">
   <p:cSld>
     <p:spTree>
       <p:nvGrpSpPr>
@@ -2018,7 +2158,7 @@
         <p:nvSpPr>
           <p:cNvPr id="2" name="Slide Image Placeholder 1"/>
           <p:cNvSpPr>
-            <a:spLocks noGrp="1" noRot="1" noChangeAspect="1"/>
+            <a:spLocks noGrp="1"/>
           </p:cNvSpPr>
           <p:nvPr>
             <p:ph type="sldImg" idx="2"/>
@@ -2033,7 +2173,7 @@
             <a:spLocks noGrp="1"/>
           </p:cNvSpPr>
           <p:nvPr>
-            <p:ph type="body" sz="quarter" idx="3"/>
+            <p:ph type="body" idx="3" sz="quarter"/>
           </p:nvPr>
         </p:nvSpPr>
         <p:spPr/>
@@ -2081,7 +2221,7 @@
             <a:spLocks noGrp="1"/>
           </p:cNvSpPr>
           <p:nvPr>
-            <p:ph type="sldNum" sz="quarter" idx="5"/>
+            <p:ph type="sldNum" idx="5" sz="quarter"/>
           </p:nvPr>
         </p:nvSpPr>
         <p:spPr/>
@@ -2095,7 +2235,7 @@
 </file>
 
 <file path=ppt/notesSlides/notesSlide26.xml><?xml version="1.0" encoding="utf-8"?>
-<p:notes xmlns:a="http://schemas.openxmlformats.org/drawingml/2006/main" xmlns:r="http://schemas.openxmlformats.org/officeDocument/2006/relationships" xmlns:p="http://schemas.openxmlformats.org/presentationml/2006/main">
+<p:notes xmlns:a="http://schemas.openxmlformats.org/drawingml/2006/main" xmlns:p="http://schemas.openxmlformats.org/presentationml/2006/main" xmlns:r="http://schemas.openxmlformats.org/officeDocument/2006/relationships">
   <p:cSld>
     <p:spTree>
       <p:nvGrpSpPr>
@@ -2115,7 +2255,7 @@
         <p:nvSpPr>
           <p:cNvPr id="2" name="Slide Image Placeholder 1"/>
           <p:cNvSpPr>
-            <a:spLocks noGrp="1" noRot="1" noChangeAspect="1"/>
+            <a:spLocks noGrp="1"/>
           </p:cNvSpPr>
           <p:nvPr>
             <p:ph type="sldImg" idx="2"/>
@@ -2130,7 +2270,7 @@
             <a:spLocks noGrp="1"/>
           </p:cNvSpPr>
           <p:nvPr>
-            <p:ph type="body" sz="quarter" idx="3"/>
+            <p:ph type="body" idx="3" sz="quarter"/>
           </p:nvPr>
         </p:nvSpPr>
         <p:spPr/>
@@ -2170,7 +2310,7 @@
             <a:spLocks noGrp="1"/>
           </p:cNvSpPr>
           <p:nvPr>
-            <p:ph type="sldNum" sz="quarter" idx="5"/>
+            <p:ph type="sldNum" idx="5" sz="quarter"/>
           </p:nvPr>
         </p:nvSpPr>
         <p:spPr/>
@@ -2184,7 +2324,7 @@
 </file>
 
 <file path=ppt/notesSlides/notesSlide27.xml><?xml version="1.0" encoding="utf-8"?>
-<p:notes xmlns:a="http://schemas.openxmlformats.org/drawingml/2006/main" xmlns:r="http://schemas.openxmlformats.org/officeDocument/2006/relationships" xmlns:p="http://schemas.openxmlformats.org/presentationml/2006/main">
+<p:notes xmlns:a="http://schemas.openxmlformats.org/drawingml/2006/main" xmlns:p="http://schemas.openxmlformats.org/presentationml/2006/main" xmlns:r="http://schemas.openxmlformats.org/officeDocument/2006/relationships">
   <p:cSld>
     <p:spTree>
       <p:nvGrpSpPr>
@@ -2204,7 +2344,7 @@
         <p:nvSpPr>
           <p:cNvPr id="2" name="Slide Image Placeholder 1"/>
           <p:cNvSpPr>
-            <a:spLocks noGrp="1" noRot="1" noChangeAspect="1"/>
+            <a:spLocks noGrp="1"/>
           </p:cNvSpPr>
           <p:nvPr>
             <p:ph type="sldImg" idx="2"/>
@@ -2219,7 +2359,7 @@
             <a:spLocks noGrp="1"/>
           </p:cNvSpPr>
           <p:nvPr>
-            <p:ph type="body" sz="quarter" idx="3"/>
+            <p:ph type="body" idx="3" sz="quarter"/>
           </p:nvPr>
         </p:nvSpPr>
         <p:spPr/>
@@ -2259,7 +2399,7 @@
             <a:spLocks noGrp="1"/>
           </p:cNvSpPr>
           <p:nvPr>
-            <p:ph type="sldNum" sz="quarter" idx="5"/>
+            <p:ph type="sldNum" idx="5" sz="quarter"/>
           </p:nvPr>
         </p:nvSpPr>
         <p:spPr/>
@@ -2273,7 +2413,7 @@
 </file>
 
 <file path=ppt/notesSlides/notesSlide28.xml><?xml version="1.0" encoding="utf-8"?>
-<p:notes xmlns:a="http://schemas.openxmlformats.org/drawingml/2006/main" xmlns:r="http://schemas.openxmlformats.org/officeDocument/2006/relationships" xmlns:p="http://schemas.openxmlformats.org/presentationml/2006/main">
+<p:notes xmlns:a="http://schemas.openxmlformats.org/drawingml/2006/main" xmlns:p="http://schemas.openxmlformats.org/presentationml/2006/main" xmlns:r="http://schemas.openxmlformats.org/officeDocument/2006/relationships">
   <p:cSld>
     <p:spTree>
       <p:nvGrpSpPr>
@@ -2293,7 +2433,7 @@
         <p:nvSpPr>
           <p:cNvPr id="2" name="Slide Image Placeholder 1"/>
           <p:cNvSpPr>
-            <a:spLocks noGrp="1" noRot="1" noChangeAspect="1"/>
+            <a:spLocks noGrp="1"/>
           </p:cNvSpPr>
           <p:nvPr>
             <p:ph type="sldImg" idx="2"/>
@@ -2308,7 +2448,7 @@
             <a:spLocks noGrp="1"/>
           </p:cNvSpPr>
           <p:nvPr>
-            <p:ph type="body" sz="quarter" idx="3"/>
+            <p:ph type="body" idx="3" sz="quarter"/>
           </p:nvPr>
         </p:nvSpPr>
         <p:spPr/>
@@ -2348,7 +2488,7 @@
             <a:spLocks noGrp="1"/>
           </p:cNvSpPr>
           <p:nvPr>
-            <p:ph type="sldNum" sz="quarter" idx="5"/>
+            <p:ph type="sldNum" idx="5" sz="quarter"/>
           </p:nvPr>
         </p:nvSpPr>
         <p:spPr/>
@@ -2362,7 +2502,7 @@
 </file>
 
 <file path=ppt/notesSlides/notesSlide29.xml><?xml version="1.0" encoding="utf-8"?>
-<p:notes xmlns:a="http://schemas.openxmlformats.org/drawingml/2006/main" xmlns:r="http://schemas.openxmlformats.org/officeDocument/2006/relationships" xmlns:p="http://schemas.openxmlformats.org/presentationml/2006/main">
+<p:notes xmlns:a="http://schemas.openxmlformats.org/drawingml/2006/main" xmlns:p="http://schemas.openxmlformats.org/presentationml/2006/main" xmlns:r="http://schemas.openxmlformats.org/officeDocument/2006/relationships">
   <p:cSld>
     <p:spTree>
       <p:nvGrpSpPr>
@@ -2382,7 +2522,7 @@
         <p:nvSpPr>
           <p:cNvPr id="2" name="Slide Image Placeholder 1"/>
           <p:cNvSpPr>
-            <a:spLocks noGrp="1" noRot="1" noChangeAspect="1"/>
+            <a:spLocks noGrp="1"/>
           </p:cNvSpPr>
           <p:nvPr>
             <p:ph type="sldImg" idx="2"/>
@@ -2397,7 +2537,7 @@
             <a:spLocks noGrp="1"/>
           </p:cNvSpPr>
           <p:nvPr>
-            <p:ph type="body" sz="quarter" idx="3"/>
+            <p:ph type="body" idx="3" sz="quarter"/>
           </p:nvPr>
         </p:nvSpPr>
         <p:spPr/>
@@ -2429,7 +2569,7 @@
             <a:spLocks noGrp="1"/>
           </p:cNvSpPr>
           <p:nvPr>
-            <p:ph type="sldNum" sz="quarter" idx="5"/>
+            <p:ph type="sldNum" idx="5" sz="quarter"/>
           </p:nvPr>
         </p:nvSpPr>
         <p:spPr/>
@@ -2443,7 +2583,7 @@
 </file>
 
 <file path=ppt/notesSlides/notesSlide3.xml><?xml version="1.0" encoding="utf-8"?>
-<p:notes xmlns:a="http://schemas.openxmlformats.org/drawingml/2006/main" xmlns:r="http://schemas.openxmlformats.org/officeDocument/2006/relationships" xmlns:p="http://schemas.openxmlformats.org/presentationml/2006/main">
+<p:notes xmlns:a="http://schemas.openxmlformats.org/drawingml/2006/main" xmlns:p="http://schemas.openxmlformats.org/presentationml/2006/main" xmlns:r="http://schemas.openxmlformats.org/officeDocument/2006/relationships">
   <p:cSld>
     <p:spTree>
       <p:nvGrpSpPr>
@@ -2463,7 +2603,7 @@
         <p:nvSpPr>
           <p:cNvPr id="2" name="Slide Image Placeholder 1"/>
           <p:cNvSpPr>
-            <a:spLocks noGrp="1" noRot="1" noChangeAspect="1"/>
+            <a:spLocks noGrp="1"/>
           </p:cNvSpPr>
           <p:nvPr>
             <p:ph type="sldImg" idx="2"/>
@@ -2478,7 +2618,7 @@
             <a:spLocks noGrp="1"/>
           </p:cNvSpPr>
           <p:nvPr>
-            <p:ph type="body" sz="quarter" idx="3"/>
+            <p:ph type="body" idx="3" sz="quarter"/>
           </p:nvPr>
         </p:nvSpPr>
         <p:spPr/>
@@ -2487,7 +2627,7 @@
           <a:lstStyle/>
           <a:p>
             <a:r>
-              <a:rPr sz="1200" dirty="0">
+              <a:rPr sz="1200">
                 <a:latin typeface="Calibri"/>
               </a:rPr>
               <a:t>The tone of the whole course is set in the next two minutes. Interruptions are wanted, not tolerated.</a:t>
@@ -2495,7 +2635,7 @@
           </a:p>
           <a:p>
             <a:r>
-              <a:rPr sz="1200" dirty="0">
+              <a:rPr sz="1200">
                 <a:latin typeface="Calibri"/>
               </a:rPr>
               <a:t>Groups of three: one driving the laptop, one reading the slide out, one on the vehicle. Tell them to swap roles every activity, and mean it.</a:t>
@@ -2503,19 +2643,11 @@
           </a:p>
           <a:p>
             <a:r>
-              <a:rPr sz="1200" dirty="0">
+              <a:rPr sz="1200">
                 <a:latin typeface="Calibri"/>
               </a:rPr>
               <a:t>The last bullet is the important one. Say it slowly. Students who think a misbehaving vehicle means they are bad at this will give up in Lesson 2.</a:t>
             </a:r>
-            <a:endParaRPr lang="en-US" sz="1200" dirty="0">
-              <a:latin typeface="Calibri"/>
-            </a:endParaRPr>
-          </a:p>
-          <a:p>
-            <a:endParaRPr sz="1200" dirty="0">
-              <a:latin typeface="Calibri"/>
-            </a:endParaRPr>
           </a:p>
         </p:txBody>
       </p:sp>
@@ -2526,7 +2658,7 @@
             <a:spLocks noGrp="1"/>
           </p:cNvSpPr>
           <p:nvPr>
-            <p:ph type="sldNum" sz="quarter" idx="5"/>
+            <p:ph type="sldNum" idx="5" sz="quarter"/>
           </p:nvPr>
         </p:nvSpPr>
         <p:spPr/>
@@ -2540,7 +2672,7 @@
 </file>
 
 <file path=ppt/notesSlides/notesSlide30.xml><?xml version="1.0" encoding="utf-8"?>
-<p:notes xmlns:a="http://schemas.openxmlformats.org/drawingml/2006/main" xmlns:r="http://schemas.openxmlformats.org/officeDocument/2006/relationships" xmlns:p="http://schemas.openxmlformats.org/presentationml/2006/main">
+<p:notes xmlns:a="http://schemas.openxmlformats.org/drawingml/2006/main" xmlns:p="http://schemas.openxmlformats.org/presentationml/2006/main" xmlns:r="http://schemas.openxmlformats.org/officeDocument/2006/relationships">
   <p:cSld>
     <p:spTree>
       <p:nvGrpSpPr>
@@ -2560,7 +2692,7 @@
         <p:nvSpPr>
           <p:cNvPr id="2" name="Slide Image Placeholder 1"/>
           <p:cNvSpPr>
-            <a:spLocks noGrp="1" noRot="1" noChangeAspect="1"/>
+            <a:spLocks noGrp="1"/>
           </p:cNvSpPr>
           <p:nvPr>
             <p:ph type="sldImg" idx="2"/>
@@ -2575,7 +2707,7 @@
             <a:spLocks noGrp="1"/>
           </p:cNvSpPr>
           <p:nvPr>
-            <p:ph type="body" sz="quarter" idx="3"/>
+            <p:ph type="body" idx="3" sz="quarter"/>
           </p:nvPr>
         </p:nvSpPr>
         <p:spPr/>
@@ -2623,7 +2755,7 @@
             <a:spLocks noGrp="1"/>
           </p:cNvSpPr>
           <p:nvPr>
-            <p:ph type="sldNum" sz="quarter" idx="5"/>
+            <p:ph type="sldNum" idx="5" sz="quarter"/>
           </p:nvPr>
         </p:nvSpPr>
         <p:spPr/>
@@ -2637,7 +2769,7 @@
 </file>
 
 <file path=ppt/notesSlides/notesSlide31.xml><?xml version="1.0" encoding="utf-8"?>
-<p:notes xmlns:a="http://schemas.openxmlformats.org/drawingml/2006/main" xmlns:r="http://schemas.openxmlformats.org/officeDocument/2006/relationships" xmlns:p="http://schemas.openxmlformats.org/presentationml/2006/main">
+<p:notes xmlns:a="http://schemas.openxmlformats.org/drawingml/2006/main" xmlns:p="http://schemas.openxmlformats.org/presentationml/2006/main" xmlns:r="http://schemas.openxmlformats.org/officeDocument/2006/relationships">
   <p:cSld>
     <p:spTree>
       <p:nvGrpSpPr>
@@ -2657,7 +2789,7 @@
         <p:nvSpPr>
           <p:cNvPr id="2" name="Slide Image Placeholder 1"/>
           <p:cNvSpPr>
-            <a:spLocks noGrp="1" noRot="1" noChangeAspect="1"/>
+            <a:spLocks noGrp="1"/>
           </p:cNvSpPr>
           <p:nvPr>
             <p:ph type="sldImg" idx="2"/>
@@ -2672,7 +2804,7 @@
             <a:spLocks noGrp="1"/>
           </p:cNvSpPr>
           <p:nvPr>
-            <p:ph type="body" sz="quarter" idx="3"/>
+            <p:ph type="body" idx="3" sz="quarter"/>
           </p:nvPr>
         </p:nvSpPr>
         <p:spPr/>
@@ -2704,7 +2836,7 @@
             <a:spLocks noGrp="1"/>
           </p:cNvSpPr>
           <p:nvPr>
-            <p:ph type="sldNum" sz="quarter" idx="5"/>
+            <p:ph type="sldNum" idx="5" sz="quarter"/>
           </p:nvPr>
         </p:nvSpPr>
         <p:spPr/>
@@ -2718,7 +2850,7 @@
 </file>
 
 <file path=ppt/notesSlides/notesSlide32.xml><?xml version="1.0" encoding="utf-8"?>
-<p:notes xmlns:a="http://schemas.openxmlformats.org/drawingml/2006/main" xmlns:r="http://schemas.openxmlformats.org/officeDocument/2006/relationships" xmlns:p="http://schemas.openxmlformats.org/presentationml/2006/main">
+<p:notes xmlns:a="http://schemas.openxmlformats.org/drawingml/2006/main" xmlns:p="http://schemas.openxmlformats.org/presentationml/2006/main" xmlns:r="http://schemas.openxmlformats.org/officeDocument/2006/relationships">
   <p:cSld>
     <p:spTree>
       <p:nvGrpSpPr>
@@ -2738,7 +2870,7 @@
         <p:nvSpPr>
           <p:cNvPr id="2" name="Slide Image Placeholder 1"/>
           <p:cNvSpPr>
-            <a:spLocks noGrp="1" noRot="1" noChangeAspect="1"/>
+            <a:spLocks noGrp="1"/>
           </p:cNvSpPr>
           <p:nvPr>
             <p:ph type="sldImg" idx="2"/>
@@ -2753,7 +2885,7 @@
             <a:spLocks noGrp="1"/>
           </p:cNvSpPr>
           <p:nvPr>
-            <p:ph type="body" sz="quarter" idx="3"/>
+            <p:ph type="body" idx="3" sz="quarter"/>
           </p:nvPr>
         </p:nvSpPr>
         <p:spPr/>
@@ -2785,7 +2917,7 @@
             <a:spLocks noGrp="1"/>
           </p:cNvSpPr>
           <p:nvPr>
-            <p:ph type="sldNum" sz="quarter" idx="5"/>
+            <p:ph type="sldNum" idx="5" sz="quarter"/>
           </p:nvPr>
         </p:nvSpPr>
         <p:spPr/>
@@ -2799,7 +2931,7 @@
 </file>
 
 <file path=ppt/notesSlides/notesSlide33.xml><?xml version="1.0" encoding="utf-8"?>
-<p:notes xmlns:a="http://schemas.openxmlformats.org/drawingml/2006/main" xmlns:r="http://schemas.openxmlformats.org/officeDocument/2006/relationships" xmlns:p="http://schemas.openxmlformats.org/presentationml/2006/main">
+<p:notes xmlns:a="http://schemas.openxmlformats.org/drawingml/2006/main" xmlns:p="http://schemas.openxmlformats.org/presentationml/2006/main" xmlns:r="http://schemas.openxmlformats.org/officeDocument/2006/relationships">
   <p:cSld>
     <p:spTree>
       <p:nvGrpSpPr>
@@ -2819,7 +2951,7 @@
         <p:nvSpPr>
           <p:cNvPr id="2" name="Slide Image Placeholder 1"/>
           <p:cNvSpPr>
-            <a:spLocks noGrp="1" noRot="1" noChangeAspect="1"/>
+            <a:spLocks noGrp="1"/>
           </p:cNvSpPr>
           <p:nvPr>
             <p:ph type="sldImg" idx="2"/>
@@ -2834,7 +2966,7 @@
             <a:spLocks noGrp="1"/>
           </p:cNvSpPr>
           <p:nvPr>
-            <p:ph type="body" sz="quarter" idx="3"/>
+            <p:ph type="body" idx="3" sz="quarter"/>
           </p:nvPr>
         </p:nvSpPr>
         <p:spPr/>
@@ -2898,7 +3030,7 @@
             <a:spLocks noGrp="1"/>
           </p:cNvSpPr>
           <p:nvPr>
-            <p:ph type="sldNum" sz="quarter" idx="5"/>
+            <p:ph type="sldNum" idx="5" sz="quarter"/>
           </p:nvPr>
         </p:nvSpPr>
         <p:spPr/>
@@ -2912,7 +3044,7 @@
 </file>
 
 <file path=ppt/notesSlides/notesSlide34.xml><?xml version="1.0" encoding="utf-8"?>
-<p:notes xmlns:a="http://schemas.openxmlformats.org/drawingml/2006/main" xmlns:r="http://schemas.openxmlformats.org/officeDocument/2006/relationships" xmlns:p="http://schemas.openxmlformats.org/presentationml/2006/main">
+<p:notes xmlns:a="http://schemas.openxmlformats.org/drawingml/2006/main" xmlns:p="http://schemas.openxmlformats.org/presentationml/2006/main" xmlns:r="http://schemas.openxmlformats.org/officeDocument/2006/relationships">
   <p:cSld>
     <p:spTree>
       <p:nvGrpSpPr>
@@ -2932,7 +3064,7 @@
         <p:nvSpPr>
           <p:cNvPr id="2" name="Slide Image Placeholder 1"/>
           <p:cNvSpPr>
-            <a:spLocks noGrp="1" noRot="1" noChangeAspect="1"/>
+            <a:spLocks noGrp="1"/>
           </p:cNvSpPr>
           <p:nvPr>
             <p:ph type="sldImg" idx="2"/>
@@ -2947,7 +3079,7 @@
             <a:spLocks noGrp="1"/>
           </p:cNvSpPr>
           <p:nvPr>
-            <p:ph type="body" sz="quarter" idx="3"/>
+            <p:ph type="body" idx="3" sz="quarter"/>
           </p:nvPr>
         </p:nvSpPr>
         <p:spPr/>
@@ -2979,7 +3111,7 @@
             <a:spLocks noGrp="1"/>
           </p:cNvSpPr>
           <p:nvPr>
-            <p:ph type="sldNum" sz="quarter" idx="5"/>
+            <p:ph type="sldNum" idx="5" sz="quarter"/>
           </p:nvPr>
         </p:nvSpPr>
         <p:spPr/>
@@ -2993,7 +3125,7 @@
 </file>
 
 <file path=ppt/notesSlides/notesSlide35.xml><?xml version="1.0" encoding="utf-8"?>
-<p:notes xmlns:a="http://schemas.openxmlformats.org/drawingml/2006/main" xmlns:r="http://schemas.openxmlformats.org/officeDocument/2006/relationships" xmlns:p="http://schemas.openxmlformats.org/presentationml/2006/main">
+<p:notes xmlns:a="http://schemas.openxmlformats.org/drawingml/2006/main" xmlns:p="http://schemas.openxmlformats.org/presentationml/2006/main" xmlns:r="http://schemas.openxmlformats.org/officeDocument/2006/relationships">
   <p:cSld>
     <p:spTree>
       <p:nvGrpSpPr>
@@ -3013,7 +3145,7 @@
         <p:nvSpPr>
           <p:cNvPr id="2" name="Slide Image Placeholder 1"/>
           <p:cNvSpPr>
-            <a:spLocks noGrp="1" noRot="1" noChangeAspect="1"/>
+            <a:spLocks noGrp="1"/>
           </p:cNvSpPr>
           <p:nvPr>
             <p:ph type="sldImg" idx="2"/>
@@ -3028,7 +3160,7 @@
             <a:spLocks noGrp="1"/>
           </p:cNvSpPr>
           <p:nvPr>
-            <p:ph type="body" sz="quarter" idx="3"/>
+            <p:ph type="body" idx="3" sz="quarter"/>
           </p:nvPr>
         </p:nvSpPr>
         <p:spPr/>
@@ -3076,7 +3208,7 @@
             <a:spLocks noGrp="1"/>
           </p:cNvSpPr>
           <p:nvPr>
-            <p:ph type="sldNum" sz="quarter" idx="5"/>
+            <p:ph type="sldNum" idx="5" sz="quarter"/>
           </p:nvPr>
         </p:nvSpPr>
         <p:spPr/>
@@ -3090,7 +3222,7 @@
 </file>
 
 <file path=ppt/notesSlides/notesSlide36.xml><?xml version="1.0" encoding="utf-8"?>
-<p:notes xmlns:a="http://schemas.openxmlformats.org/drawingml/2006/main" xmlns:r="http://schemas.openxmlformats.org/officeDocument/2006/relationships" xmlns:p="http://schemas.openxmlformats.org/presentationml/2006/main">
+<p:notes xmlns:a="http://schemas.openxmlformats.org/drawingml/2006/main" xmlns:p="http://schemas.openxmlformats.org/presentationml/2006/main" xmlns:r="http://schemas.openxmlformats.org/officeDocument/2006/relationships">
   <p:cSld>
     <p:spTree>
       <p:nvGrpSpPr>
@@ -3110,7 +3242,7 @@
         <p:nvSpPr>
           <p:cNvPr id="2" name="Slide Image Placeholder 1"/>
           <p:cNvSpPr>
-            <a:spLocks noGrp="1" noRot="1" noChangeAspect="1"/>
+            <a:spLocks noGrp="1"/>
           </p:cNvSpPr>
           <p:nvPr>
             <p:ph type="sldImg" idx="2"/>
@@ -3125,7 +3257,7 @@
             <a:spLocks noGrp="1"/>
           </p:cNvSpPr>
           <p:nvPr>
-            <p:ph type="body" sz="quarter" idx="3"/>
+            <p:ph type="body" idx="3" sz="quarter"/>
           </p:nvPr>
         </p:nvSpPr>
         <p:spPr/>
@@ -3173,7 +3305,7 @@
             <a:spLocks noGrp="1"/>
           </p:cNvSpPr>
           <p:nvPr>
-            <p:ph type="sldNum" sz="quarter" idx="5"/>
+            <p:ph type="sldNum" idx="5" sz="quarter"/>
           </p:nvPr>
         </p:nvSpPr>
         <p:spPr/>
@@ -3187,7 +3319,7 @@
 </file>
 
 <file path=ppt/notesSlides/notesSlide37.xml><?xml version="1.0" encoding="utf-8"?>
-<p:notes xmlns:a="http://schemas.openxmlformats.org/drawingml/2006/main" xmlns:r="http://schemas.openxmlformats.org/officeDocument/2006/relationships" xmlns:p="http://schemas.openxmlformats.org/presentationml/2006/main">
+<p:notes xmlns:a="http://schemas.openxmlformats.org/drawingml/2006/main" xmlns:p="http://schemas.openxmlformats.org/presentationml/2006/main" xmlns:r="http://schemas.openxmlformats.org/officeDocument/2006/relationships">
   <p:cSld>
     <p:spTree>
       <p:nvGrpSpPr>
@@ -3207,7 +3339,7 @@
         <p:nvSpPr>
           <p:cNvPr id="2" name="Slide Image Placeholder 1"/>
           <p:cNvSpPr>
-            <a:spLocks noGrp="1" noRot="1" noChangeAspect="1"/>
+            <a:spLocks noGrp="1"/>
           </p:cNvSpPr>
           <p:nvPr>
             <p:ph type="sldImg" idx="2"/>
@@ -3222,7 +3354,7 @@
             <a:spLocks noGrp="1"/>
           </p:cNvSpPr>
           <p:nvPr>
-            <p:ph type="body" sz="quarter" idx="3"/>
+            <p:ph type="body" idx="3" sz="quarter"/>
           </p:nvPr>
         </p:nvSpPr>
         <p:spPr/>
@@ -3270,7 +3402,7 @@
             <a:spLocks noGrp="1"/>
           </p:cNvSpPr>
           <p:nvPr>
-            <p:ph type="sldNum" sz="quarter" idx="5"/>
+            <p:ph type="sldNum" idx="5" sz="quarter"/>
           </p:nvPr>
         </p:nvSpPr>
         <p:spPr/>
@@ -3284,7 +3416,7 @@
 </file>
 
 <file path=ppt/notesSlides/notesSlide38.xml><?xml version="1.0" encoding="utf-8"?>
-<p:notes xmlns:a="http://schemas.openxmlformats.org/drawingml/2006/main" xmlns:r="http://schemas.openxmlformats.org/officeDocument/2006/relationships" xmlns:p="http://schemas.openxmlformats.org/presentationml/2006/main">
+<p:notes xmlns:a="http://schemas.openxmlformats.org/drawingml/2006/main" xmlns:p="http://schemas.openxmlformats.org/presentationml/2006/main" xmlns:r="http://schemas.openxmlformats.org/officeDocument/2006/relationships">
   <p:cSld>
     <p:spTree>
       <p:nvGrpSpPr>
@@ -3304,7 +3436,7 @@
         <p:nvSpPr>
           <p:cNvPr id="2" name="Slide Image Placeholder 1"/>
           <p:cNvSpPr>
-            <a:spLocks noGrp="1" noRot="1" noChangeAspect="1"/>
+            <a:spLocks noGrp="1"/>
           </p:cNvSpPr>
           <p:nvPr>
             <p:ph type="sldImg" idx="2"/>
@@ -3319,7 +3451,7 @@
             <a:spLocks noGrp="1"/>
           </p:cNvSpPr>
           <p:nvPr>
-            <p:ph type="body" sz="quarter" idx="3"/>
+            <p:ph type="body" idx="3" sz="quarter"/>
           </p:nvPr>
         </p:nvSpPr>
         <p:spPr/>
@@ -3351,7 +3483,7 @@
             <a:spLocks noGrp="1"/>
           </p:cNvSpPr>
           <p:nvPr>
-            <p:ph type="sldNum" sz="quarter" idx="5"/>
+            <p:ph type="sldNum" idx="5" sz="quarter"/>
           </p:nvPr>
         </p:nvSpPr>
         <p:spPr/>
@@ -3365,7 +3497,7 @@
 </file>
 
 <file path=ppt/notesSlides/notesSlide39.xml><?xml version="1.0" encoding="utf-8"?>
-<p:notes xmlns:a="http://schemas.openxmlformats.org/drawingml/2006/main" xmlns:r="http://schemas.openxmlformats.org/officeDocument/2006/relationships" xmlns:p="http://schemas.openxmlformats.org/presentationml/2006/main">
+<p:notes xmlns:a="http://schemas.openxmlformats.org/drawingml/2006/main" xmlns:p="http://schemas.openxmlformats.org/presentationml/2006/main" xmlns:r="http://schemas.openxmlformats.org/officeDocument/2006/relationships">
   <p:cSld>
     <p:spTree>
       <p:nvGrpSpPr>
@@ -3385,7 +3517,7 @@
         <p:nvSpPr>
           <p:cNvPr id="2" name="Slide Image Placeholder 1"/>
           <p:cNvSpPr>
-            <a:spLocks noGrp="1" noRot="1" noChangeAspect="1"/>
+            <a:spLocks noGrp="1"/>
           </p:cNvSpPr>
           <p:nvPr>
             <p:ph type="sldImg" idx="2"/>
@@ -3400,7 +3532,7 @@
             <a:spLocks noGrp="1"/>
           </p:cNvSpPr>
           <p:nvPr>
-            <p:ph type="body" sz="quarter" idx="3"/>
+            <p:ph type="body" idx="3" sz="quarter"/>
           </p:nvPr>
         </p:nvSpPr>
         <p:spPr/>
@@ -3440,7 +3572,7 @@
             <a:spLocks noGrp="1"/>
           </p:cNvSpPr>
           <p:nvPr>
-            <p:ph type="sldNum" sz="quarter" idx="5"/>
+            <p:ph type="sldNum" idx="5" sz="quarter"/>
           </p:nvPr>
         </p:nvSpPr>
         <p:spPr/>
@@ -3454,7 +3586,7 @@
 </file>
 
 <file path=ppt/notesSlides/notesSlide4.xml><?xml version="1.0" encoding="utf-8"?>
-<p:notes xmlns:a="http://schemas.openxmlformats.org/drawingml/2006/main" xmlns:r="http://schemas.openxmlformats.org/officeDocument/2006/relationships" xmlns:p="http://schemas.openxmlformats.org/presentationml/2006/main">
+<p:notes xmlns:a="http://schemas.openxmlformats.org/drawingml/2006/main" xmlns:p="http://schemas.openxmlformats.org/presentationml/2006/main" xmlns:r="http://schemas.openxmlformats.org/officeDocument/2006/relationships">
   <p:cSld>
     <p:spTree>
       <p:nvGrpSpPr>
@@ -3474,7 +3606,7 @@
         <p:nvSpPr>
           <p:cNvPr id="2" name="Slide Image Placeholder 1"/>
           <p:cNvSpPr>
-            <a:spLocks noGrp="1" noRot="1" noChangeAspect="1"/>
+            <a:spLocks noGrp="1"/>
           </p:cNvSpPr>
           <p:nvPr>
             <p:ph type="sldImg" idx="2"/>
@@ -3489,7 +3621,7 @@
             <a:spLocks noGrp="1"/>
           </p:cNvSpPr>
           <p:nvPr>
-            <p:ph type="body" sz="quarter" idx="3"/>
+            <p:ph type="body" idx="3" sz="quarter"/>
           </p:nvPr>
         </p:nvSpPr>
         <p:spPr/>
@@ -3529,7 +3661,7 @@
             <a:spLocks noGrp="1"/>
           </p:cNvSpPr>
           <p:nvPr>
-            <p:ph type="sldNum" sz="quarter" idx="5"/>
+            <p:ph type="sldNum" idx="5" sz="quarter"/>
           </p:nvPr>
         </p:nvSpPr>
         <p:spPr/>
@@ -3543,7 +3675,7 @@
 </file>
 
 <file path=ppt/notesSlides/notesSlide40.xml><?xml version="1.0" encoding="utf-8"?>
-<p:notes xmlns:a="http://schemas.openxmlformats.org/drawingml/2006/main" xmlns:r="http://schemas.openxmlformats.org/officeDocument/2006/relationships" xmlns:p="http://schemas.openxmlformats.org/presentationml/2006/main">
+<p:notes xmlns:a="http://schemas.openxmlformats.org/drawingml/2006/main" xmlns:p="http://schemas.openxmlformats.org/presentationml/2006/main" xmlns:r="http://schemas.openxmlformats.org/officeDocument/2006/relationships">
   <p:cSld>
     <p:spTree>
       <p:nvGrpSpPr>
@@ -3563,7 +3695,7 @@
         <p:nvSpPr>
           <p:cNvPr id="2" name="Slide Image Placeholder 1"/>
           <p:cNvSpPr>
-            <a:spLocks noGrp="1" noRot="1" noChangeAspect="1"/>
+            <a:spLocks noGrp="1"/>
           </p:cNvSpPr>
           <p:nvPr>
             <p:ph type="sldImg" idx="2"/>
@@ -3578,7 +3710,7 @@
             <a:spLocks noGrp="1"/>
           </p:cNvSpPr>
           <p:nvPr>
-            <p:ph type="body" sz="quarter" idx="3"/>
+            <p:ph type="body" idx="3" sz="quarter"/>
           </p:nvPr>
         </p:nvSpPr>
         <p:spPr/>
@@ -3618,7 +3750,7 @@
             <a:spLocks noGrp="1"/>
           </p:cNvSpPr>
           <p:nvPr>
-            <p:ph type="sldNum" sz="quarter" idx="5"/>
+            <p:ph type="sldNum" idx="5" sz="quarter"/>
           </p:nvPr>
         </p:nvSpPr>
         <p:spPr/>
@@ -3632,7 +3764,7 @@
 </file>
 
 <file path=ppt/notesSlides/notesSlide41.xml><?xml version="1.0" encoding="utf-8"?>
-<p:notes xmlns:a="http://schemas.openxmlformats.org/drawingml/2006/main" xmlns:r="http://schemas.openxmlformats.org/officeDocument/2006/relationships" xmlns:p="http://schemas.openxmlformats.org/presentationml/2006/main">
+<p:notes xmlns:a="http://schemas.openxmlformats.org/drawingml/2006/main" xmlns:p="http://schemas.openxmlformats.org/presentationml/2006/main" xmlns:r="http://schemas.openxmlformats.org/officeDocument/2006/relationships">
   <p:cSld>
     <p:spTree>
       <p:nvGrpSpPr>
@@ -3652,7 +3784,7 @@
         <p:nvSpPr>
           <p:cNvPr id="2" name="Slide Image Placeholder 1"/>
           <p:cNvSpPr>
-            <a:spLocks noGrp="1" noRot="1" noChangeAspect="1"/>
+            <a:spLocks noGrp="1"/>
           </p:cNvSpPr>
           <p:nvPr>
             <p:ph type="sldImg" idx="2"/>
@@ -3667,7 +3799,7 @@
             <a:spLocks noGrp="1"/>
           </p:cNvSpPr>
           <p:nvPr>
-            <p:ph type="body" sz="quarter" idx="3"/>
+            <p:ph type="body" idx="3" sz="quarter"/>
           </p:nvPr>
         </p:nvSpPr>
         <p:spPr/>
@@ -3715,7 +3847,7 @@
             <a:spLocks noGrp="1"/>
           </p:cNvSpPr>
           <p:nvPr>
-            <p:ph type="sldNum" sz="quarter" idx="5"/>
+            <p:ph type="sldNum" idx="5" sz="quarter"/>
           </p:nvPr>
         </p:nvSpPr>
         <p:spPr/>
@@ -3729,7 +3861,7 @@
 </file>
 
 <file path=ppt/notesSlides/notesSlide42.xml><?xml version="1.0" encoding="utf-8"?>
-<p:notes xmlns:a="http://schemas.openxmlformats.org/drawingml/2006/main" xmlns:r="http://schemas.openxmlformats.org/officeDocument/2006/relationships" xmlns:p="http://schemas.openxmlformats.org/presentationml/2006/main">
+<p:notes xmlns:a="http://schemas.openxmlformats.org/drawingml/2006/main" xmlns:p="http://schemas.openxmlformats.org/presentationml/2006/main" xmlns:r="http://schemas.openxmlformats.org/officeDocument/2006/relationships">
   <p:cSld>
     <p:spTree>
       <p:nvGrpSpPr>
@@ -3749,7 +3881,7 @@
         <p:nvSpPr>
           <p:cNvPr id="2" name="Slide Image Placeholder 1"/>
           <p:cNvSpPr>
-            <a:spLocks noGrp="1" noRot="1" noChangeAspect="1"/>
+            <a:spLocks noGrp="1"/>
           </p:cNvSpPr>
           <p:nvPr>
             <p:ph type="sldImg" idx="2"/>
@@ -3764,7 +3896,7 @@
             <a:spLocks noGrp="1"/>
           </p:cNvSpPr>
           <p:nvPr>
-            <p:ph type="body" sz="quarter" idx="3"/>
+            <p:ph type="body" idx="3" sz="quarter"/>
           </p:nvPr>
         </p:nvSpPr>
         <p:spPr/>
@@ -3804,7 +3936,7 @@
             <a:spLocks noGrp="1"/>
           </p:cNvSpPr>
           <p:nvPr>
-            <p:ph type="sldNum" sz="quarter" idx="5"/>
+            <p:ph type="sldNum" idx="5" sz="quarter"/>
           </p:nvPr>
         </p:nvSpPr>
         <p:spPr/>
@@ -3818,7 +3950,7 @@
 </file>
 
 <file path=ppt/notesSlides/notesSlide43.xml><?xml version="1.0" encoding="utf-8"?>
-<p:notes xmlns:a="http://schemas.openxmlformats.org/drawingml/2006/main" xmlns:r="http://schemas.openxmlformats.org/officeDocument/2006/relationships" xmlns:p="http://schemas.openxmlformats.org/presentationml/2006/main">
+<p:notes xmlns:a="http://schemas.openxmlformats.org/drawingml/2006/main" xmlns:p="http://schemas.openxmlformats.org/presentationml/2006/main" xmlns:r="http://schemas.openxmlformats.org/officeDocument/2006/relationships">
   <p:cSld>
     <p:spTree>
       <p:nvGrpSpPr>
@@ -3838,7 +3970,7 @@
         <p:nvSpPr>
           <p:cNvPr id="2" name="Slide Image Placeholder 1"/>
           <p:cNvSpPr>
-            <a:spLocks noGrp="1" noRot="1" noChangeAspect="1"/>
+            <a:spLocks noGrp="1"/>
           </p:cNvSpPr>
           <p:nvPr>
             <p:ph type="sldImg" idx="2"/>
@@ -3853,7 +3985,7 @@
             <a:spLocks noGrp="1"/>
           </p:cNvSpPr>
           <p:nvPr>
-            <p:ph type="body" sz="quarter" idx="3"/>
+            <p:ph type="body" idx="3" sz="quarter"/>
           </p:nvPr>
         </p:nvSpPr>
         <p:spPr/>
@@ -3885,7 +4017,7 @@
             <a:spLocks noGrp="1"/>
           </p:cNvSpPr>
           <p:nvPr>
-            <p:ph type="sldNum" sz="quarter" idx="5"/>
+            <p:ph type="sldNum" idx="5" sz="quarter"/>
           </p:nvPr>
         </p:nvSpPr>
         <p:spPr/>
@@ -3899,7 +4031,7 @@
 </file>
 
 <file path=ppt/notesSlides/notesSlide44.xml><?xml version="1.0" encoding="utf-8"?>
-<p:notes xmlns:a="http://schemas.openxmlformats.org/drawingml/2006/main" xmlns:r="http://schemas.openxmlformats.org/officeDocument/2006/relationships" xmlns:p="http://schemas.openxmlformats.org/presentationml/2006/main">
+<p:notes xmlns:a="http://schemas.openxmlformats.org/drawingml/2006/main" xmlns:p="http://schemas.openxmlformats.org/presentationml/2006/main" xmlns:r="http://schemas.openxmlformats.org/officeDocument/2006/relationships">
   <p:cSld>
     <p:spTree>
       <p:nvGrpSpPr>
@@ -3919,7 +4051,7 @@
         <p:nvSpPr>
           <p:cNvPr id="2" name="Slide Image Placeholder 1"/>
           <p:cNvSpPr>
-            <a:spLocks noGrp="1" noRot="1" noChangeAspect="1"/>
+            <a:spLocks noGrp="1"/>
           </p:cNvSpPr>
           <p:nvPr>
             <p:ph type="sldImg" idx="2"/>
@@ -3934,7 +4066,7 @@
             <a:spLocks noGrp="1"/>
           </p:cNvSpPr>
           <p:nvPr>
-            <p:ph type="body" sz="quarter" idx="3"/>
+            <p:ph type="body" idx="3" sz="quarter"/>
           </p:nvPr>
         </p:nvSpPr>
         <p:spPr/>
@@ -3974,7 +4106,7 @@
             <a:spLocks noGrp="1"/>
           </p:cNvSpPr>
           <p:nvPr>
-            <p:ph type="sldNum" sz="quarter" idx="5"/>
+            <p:ph type="sldNum" idx="5" sz="quarter"/>
           </p:nvPr>
         </p:nvSpPr>
         <p:spPr/>
@@ -3988,7 +4120,7 @@
 </file>
 
 <file path=ppt/notesSlides/notesSlide45.xml><?xml version="1.0" encoding="utf-8"?>
-<p:notes xmlns:a="http://schemas.openxmlformats.org/drawingml/2006/main" xmlns:r="http://schemas.openxmlformats.org/officeDocument/2006/relationships" xmlns:p="http://schemas.openxmlformats.org/presentationml/2006/main">
+<p:notes xmlns:a="http://schemas.openxmlformats.org/drawingml/2006/main" xmlns:p="http://schemas.openxmlformats.org/presentationml/2006/main" xmlns:r="http://schemas.openxmlformats.org/officeDocument/2006/relationships">
   <p:cSld>
     <p:spTree>
       <p:nvGrpSpPr>
@@ -4008,7 +4140,7 @@
         <p:nvSpPr>
           <p:cNvPr id="2" name="Slide Image Placeholder 1"/>
           <p:cNvSpPr>
-            <a:spLocks noGrp="1" noRot="1" noChangeAspect="1"/>
+            <a:spLocks noGrp="1"/>
           </p:cNvSpPr>
           <p:nvPr>
             <p:ph type="sldImg" idx="2"/>
@@ -4023,7 +4155,7 @@
             <a:spLocks noGrp="1"/>
           </p:cNvSpPr>
           <p:nvPr>
-            <p:ph type="body" sz="quarter" idx="3"/>
+            <p:ph type="body" idx="3" sz="quarter"/>
           </p:nvPr>
         </p:nvSpPr>
         <p:spPr/>
@@ -4071,7 +4203,7 @@
             <a:spLocks noGrp="1"/>
           </p:cNvSpPr>
           <p:nvPr>
-            <p:ph type="sldNum" sz="quarter" idx="5"/>
+            <p:ph type="sldNum" idx="5" sz="quarter"/>
           </p:nvPr>
         </p:nvSpPr>
         <p:spPr/>
@@ -4085,7 +4217,7 @@
 </file>
 
 <file path=ppt/notesSlides/notesSlide46.xml><?xml version="1.0" encoding="utf-8"?>
-<p:notes xmlns:a="http://schemas.openxmlformats.org/drawingml/2006/main" xmlns:r="http://schemas.openxmlformats.org/officeDocument/2006/relationships" xmlns:p="http://schemas.openxmlformats.org/presentationml/2006/main">
+<p:notes xmlns:a="http://schemas.openxmlformats.org/drawingml/2006/main" xmlns:p="http://schemas.openxmlformats.org/presentationml/2006/main" xmlns:r="http://schemas.openxmlformats.org/officeDocument/2006/relationships">
   <p:cSld>
     <p:spTree>
       <p:nvGrpSpPr>
@@ -4105,7 +4237,7 @@
         <p:nvSpPr>
           <p:cNvPr id="2" name="Slide Image Placeholder 1"/>
           <p:cNvSpPr>
-            <a:spLocks noGrp="1" noRot="1" noChangeAspect="1"/>
+            <a:spLocks noGrp="1"/>
           </p:cNvSpPr>
           <p:nvPr>
             <p:ph type="sldImg" idx="2"/>
@@ -4120,7 +4252,7 @@
             <a:spLocks noGrp="1"/>
           </p:cNvSpPr>
           <p:nvPr>
-            <p:ph type="body" sz="quarter" idx="3"/>
+            <p:ph type="body" idx="3" sz="quarter"/>
           </p:nvPr>
         </p:nvSpPr>
         <p:spPr/>
@@ -4168,7 +4300,7 @@
             <a:spLocks noGrp="1"/>
           </p:cNvSpPr>
           <p:nvPr>
-            <p:ph type="sldNum" sz="quarter" idx="5"/>
+            <p:ph type="sldNum" idx="5" sz="quarter"/>
           </p:nvPr>
         </p:nvSpPr>
         <p:spPr/>
@@ -4182,7 +4314,7 @@
 </file>
 
 <file path=ppt/notesSlides/notesSlide47.xml><?xml version="1.0" encoding="utf-8"?>
-<p:notes xmlns:a="http://schemas.openxmlformats.org/drawingml/2006/main" xmlns:r="http://schemas.openxmlformats.org/officeDocument/2006/relationships" xmlns:p="http://schemas.openxmlformats.org/presentationml/2006/main">
+<p:notes xmlns:a="http://schemas.openxmlformats.org/drawingml/2006/main" xmlns:p="http://schemas.openxmlformats.org/presentationml/2006/main" xmlns:r="http://schemas.openxmlformats.org/officeDocument/2006/relationships">
   <p:cSld>
     <p:spTree>
       <p:nvGrpSpPr>
@@ -4202,7 +4334,7 @@
         <p:nvSpPr>
           <p:cNvPr id="2" name="Slide Image Placeholder 1"/>
           <p:cNvSpPr>
-            <a:spLocks noGrp="1" noRot="1" noChangeAspect="1"/>
+            <a:spLocks noGrp="1"/>
           </p:cNvSpPr>
           <p:nvPr>
             <p:ph type="sldImg" idx="2"/>
@@ -4217,7 +4349,7 @@
             <a:spLocks noGrp="1"/>
           </p:cNvSpPr>
           <p:nvPr>
-            <p:ph type="body" sz="quarter" idx="3"/>
+            <p:ph type="body" idx="3" sz="quarter"/>
           </p:nvPr>
         </p:nvSpPr>
         <p:spPr/>
@@ -4265,7 +4397,7 @@
             <a:spLocks noGrp="1"/>
           </p:cNvSpPr>
           <p:nvPr>
-            <p:ph type="sldNum" sz="quarter" idx="5"/>
+            <p:ph type="sldNum" idx="5" sz="quarter"/>
           </p:nvPr>
         </p:nvSpPr>
         <p:spPr/>
@@ -4279,7 +4411,7 @@
 </file>
 
 <file path=ppt/notesSlides/notesSlide48.xml><?xml version="1.0" encoding="utf-8"?>
-<p:notes xmlns:a="http://schemas.openxmlformats.org/drawingml/2006/main" xmlns:r="http://schemas.openxmlformats.org/officeDocument/2006/relationships" xmlns:p="http://schemas.openxmlformats.org/presentationml/2006/main">
+<p:notes xmlns:a="http://schemas.openxmlformats.org/drawingml/2006/main" xmlns:p="http://schemas.openxmlformats.org/presentationml/2006/main" xmlns:r="http://schemas.openxmlformats.org/officeDocument/2006/relationships">
   <p:cSld>
     <p:spTree>
       <p:nvGrpSpPr>
@@ -4299,7 +4431,7 @@
         <p:nvSpPr>
           <p:cNvPr id="2" name="Slide Image Placeholder 1"/>
           <p:cNvSpPr>
-            <a:spLocks noGrp="1" noRot="1" noChangeAspect="1"/>
+            <a:spLocks noGrp="1"/>
           </p:cNvSpPr>
           <p:nvPr>
             <p:ph type="sldImg" idx="2"/>
@@ -4314,7 +4446,7 @@
             <a:spLocks noGrp="1"/>
           </p:cNvSpPr>
           <p:nvPr>
-            <p:ph type="body" sz="quarter" idx="3"/>
+            <p:ph type="body" idx="3" sz="quarter"/>
           </p:nvPr>
         </p:nvSpPr>
         <p:spPr/>
@@ -4354,7 +4486,7 @@
             <a:spLocks noGrp="1"/>
           </p:cNvSpPr>
           <p:nvPr>
-            <p:ph type="sldNum" sz="quarter" idx="5"/>
+            <p:ph type="sldNum" idx="5" sz="quarter"/>
           </p:nvPr>
         </p:nvSpPr>
         <p:spPr/>
@@ -4368,7 +4500,7 @@
 </file>
 
 <file path=ppt/notesSlides/notesSlide5.xml><?xml version="1.0" encoding="utf-8"?>
-<p:notes xmlns:a="http://schemas.openxmlformats.org/drawingml/2006/main" xmlns:r="http://schemas.openxmlformats.org/officeDocument/2006/relationships" xmlns:p="http://schemas.openxmlformats.org/presentationml/2006/main">
+<p:notes xmlns:a="http://schemas.openxmlformats.org/drawingml/2006/main" xmlns:p="http://schemas.openxmlformats.org/presentationml/2006/main" xmlns:r="http://schemas.openxmlformats.org/officeDocument/2006/relationships">
   <p:cSld>
     <p:spTree>
       <p:nvGrpSpPr>
@@ -4388,7 +4520,7 @@
         <p:nvSpPr>
           <p:cNvPr id="2" name="Slide Image Placeholder 1"/>
           <p:cNvSpPr>
-            <a:spLocks noGrp="1" noRot="1" noChangeAspect="1"/>
+            <a:spLocks noGrp="1"/>
           </p:cNvSpPr>
           <p:nvPr>
             <p:ph type="sldImg" idx="2"/>
@@ -4403,7 +4535,7 @@
             <a:spLocks noGrp="1"/>
           </p:cNvSpPr>
           <p:nvPr>
-            <p:ph type="body" sz="quarter" idx="3"/>
+            <p:ph type="body" idx="3" sz="quarter"/>
           </p:nvPr>
         </p:nvSpPr>
         <p:spPr/>
@@ -4412,7 +4544,7 @@
           <a:lstStyle/>
           <a:p>
             <a:r>
-              <a:rPr sz="1200" dirty="0">
+              <a:rPr sz="1200">
                 <a:latin typeface="Calibri"/>
               </a:rPr>
               <a:t>Put the two break times on the whiteboard as well. People relax when they know when the next one is.</a:t>
@@ -4420,7 +4552,7 @@
           </a:p>
           <a:p>
             <a:r>
-              <a:rPr sz="1200" dirty="0">
+              <a:rPr sz="1200">
                 <a:latin typeface="Calibri"/>
               </a:rPr>
               <a:t>The timings are a guide. The IDE install is the one that runs over; if it does, take it out of the Serial Monitor section, not out of the blink activity.</a:t>
@@ -4428,25 +4560,19 @@
           </a:p>
           <a:p>
             <a:r>
-              <a:rPr sz="1200" dirty="0">
+              <a:rPr sz="1200">
                 <a:latin typeface="Calibri"/>
               </a:rPr>
               <a:t>If the whole room is installed and ready early, go straight to the breadboards. Never fill time.</a:t>
             </a:r>
-            <a:endParaRPr lang="en-US" sz="1200" dirty="0">
-              <a:latin typeface="Calibri"/>
-            </a:endParaRPr>
-          </a:p>
-          <a:p>
-            <a:r>
-              <a:rPr lang="en-US" sz="1200" dirty="0">
-                <a:latin typeface="Calibri"/>
-              </a:rPr>
-              <a:t>We take breaks approximately every hour or when appropriate.</a:t>
-            </a:r>
-            <a:endParaRPr sz="1200" dirty="0">
-              <a:latin typeface="Calibri"/>
-            </a:endParaRPr>
+          </a:p>
+          <a:p>
+            <a:r>
+              <a:rPr sz="1200">
+                <a:latin typeface="Calibri"/>
+              </a:rPr>
+              <a:t>Breaks are about every hour, or wherever the work reaches a natural stop. Say so at the start, so nobody is wondering.</a:t>
+            </a:r>
           </a:p>
         </p:txBody>
       </p:sp>
@@ -4457,7 +4583,7 @@
             <a:spLocks noGrp="1"/>
           </p:cNvSpPr>
           <p:nvPr>
-            <p:ph type="sldNum" sz="quarter" idx="5"/>
+            <p:ph type="sldNum" idx="5" sz="quarter"/>
           </p:nvPr>
         </p:nvSpPr>
         <p:spPr/>
@@ -4471,7 +4597,7 @@
 </file>
 
 <file path=ppt/notesSlides/notesSlide6.xml><?xml version="1.0" encoding="utf-8"?>
-<p:notes xmlns:a="http://schemas.openxmlformats.org/drawingml/2006/main" xmlns:r="http://schemas.openxmlformats.org/officeDocument/2006/relationships" xmlns:p="http://schemas.openxmlformats.org/presentationml/2006/main">
+<p:notes xmlns:a="http://schemas.openxmlformats.org/drawingml/2006/main" xmlns:p="http://schemas.openxmlformats.org/presentationml/2006/main" xmlns:r="http://schemas.openxmlformats.org/officeDocument/2006/relationships">
   <p:cSld>
     <p:spTree>
       <p:nvGrpSpPr>
@@ -4491,7 +4617,7 @@
         <p:nvSpPr>
           <p:cNvPr id="2" name="Slide Image Placeholder 1"/>
           <p:cNvSpPr>
-            <a:spLocks noGrp="1" noRot="1" noChangeAspect="1"/>
+            <a:spLocks noGrp="1"/>
           </p:cNvSpPr>
           <p:nvPr>
             <p:ph type="sldImg" idx="2"/>
@@ -4506,7 +4632,7 @@
             <a:spLocks noGrp="1"/>
           </p:cNvSpPr>
           <p:nvPr>
-            <p:ph type="body" sz="quarter" idx="3"/>
+            <p:ph type="body" idx="3" sz="quarter"/>
           </p:nvPr>
         </p:nvSpPr>
         <p:spPr/>
@@ -4515,7 +4641,7 @@
           <a:lstStyle/>
           <a:p>
             <a:r>
-              <a:rPr sz="1200" dirty="0">
+              <a:rPr sz="1200">
                 <a:latin typeface="Calibri"/>
               </a:rPr>
               <a:t>Get the word MECHATRONICS said out loud by somebody other than you.</a:t>
@@ -4523,7 +4649,7 @@
           </a:p>
           <a:p>
             <a:r>
-              <a:rPr sz="1200" dirty="0">
+              <a:rPr sz="1200">
                 <a:latin typeface="Calibri"/>
               </a:rPr>
               <a:t>The figure narrows from all of engineering down to what is on the desk. Walk it inwards with a finger.</a:t>
@@ -4531,7 +4657,7 @@
           </a:p>
           <a:p>
             <a:r>
-              <a:rPr sz="1200" dirty="0">
+              <a:rPr sz="1200">
                 <a:latin typeface="Calibri"/>
               </a:rPr>
               <a:t>Ask for three mechatronic things in the room. Printer, car, washing machine, lift, and the vehicle in front of them all count.</a:t>
@@ -4539,7 +4665,7 @@
           </a:p>
           <a:p>
             <a:r>
-              <a:rPr sz="1200" dirty="0">
+              <a:rPr sz="1200">
                 <a:latin typeface="Calibri"/>
               </a:rPr>
               <a:t>Do not get drawn into a definitions argument. The point is that the three disciplines are one job, not three.</a:t>
@@ -4554,7 +4680,7 @@
             <a:spLocks noGrp="1"/>
           </p:cNvSpPr>
           <p:nvPr>
-            <p:ph type="sldNum" sz="quarter" idx="5"/>
+            <p:ph type="sldNum" idx="5" sz="quarter"/>
           </p:nvPr>
         </p:nvSpPr>
         <p:spPr/>
@@ -4568,7 +4694,7 @@
 </file>
 
 <file path=ppt/notesSlides/notesSlide7.xml><?xml version="1.0" encoding="utf-8"?>
-<p:notes xmlns:a="http://schemas.openxmlformats.org/drawingml/2006/main" xmlns:r="http://schemas.openxmlformats.org/officeDocument/2006/relationships" xmlns:p="http://schemas.openxmlformats.org/presentationml/2006/main">
+<p:notes xmlns:a="http://schemas.openxmlformats.org/drawingml/2006/main" xmlns:p="http://schemas.openxmlformats.org/presentationml/2006/main" xmlns:r="http://schemas.openxmlformats.org/officeDocument/2006/relationships">
   <p:cSld>
     <p:spTree>
       <p:nvGrpSpPr>
@@ -4588,7 +4714,7 @@
         <p:nvSpPr>
           <p:cNvPr id="2" name="Slide Image Placeholder 1"/>
           <p:cNvSpPr>
-            <a:spLocks noGrp="1" noRot="1" noChangeAspect="1"/>
+            <a:spLocks noGrp="1"/>
           </p:cNvSpPr>
           <p:nvPr>
             <p:ph type="sldImg" idx="2"/>
@@ -4603,7 +4729,7 @@
             <a:spLocks noGrp="1"/>
           </p:cNvSpPr>
           <p:nvPr>
-            <p:ph type="body" sz="quarter" idx="3"/>
+            <p:ph type="body" idx="3" sz="quarter"/>
           </p:nvPr>
         </p:nvSpPr>
         <p:spPr/>
@@ -4651,7 +4777,7 @@
             <a:spLocks noGrp="1"/>
           </p:cNvSpPr>
           <p:nvPr>
-            <p:ph type="sldNum" sz="quarter" idx="5"/>
+            <p:ph type="sldNum" idx="5" sz="quarter"/>
           </p:nvPr>
         </p:nvSpPr>
         <p:spPr/>
@@ -4665,7 +4791,7 @@
 </file>
 
 <file path=ppt/notesSlides/notesSlide8.xml><?xml version="1.0" encoding="utf-8"?>
-<p:notes xmlns:a="http://schemas.openxmlformats.org/drawingml/2006/main" xmlns:r="http://schemas.openxmlformats.org/officeDocument/2006/relationships" xmlns:p="http://schemas.openxmlformats.org/presentationml/2006/main">
+<p:notes xmlns:a="http://schemas.openxmlformats.org/drawingml/2006/main" xmlns:p="http://schemas.openxmlformats.org/presentationml/2006/main" xmlns:r="http://schemas.openxmlformats.org/officeDocument/2006/relationships">
   <p:cSld>
     <p:spTree>
       <p:nvGrpSpPr>
@@ -4685,7 +4811,7 @@
         <p:nvSpPr>
           <p:cNvPr id="2" name="Slide Image Placeholder 1"/>
           <p:cNvSpPr>
-            <a:spLocks noGrp="1" noRot="1" noChangeAspect="1"/>
+            <a:spLocks noGrp="1"/>
           </p:cNvSpPr>
           <p:nvPr>
             <p:ph type="sldImg" idx="2"/>
@@ -4700,7 +4826,7 @@
             <a:spLocks noGrp="1"/>
           </p:cNvSpPr>
           <p:nvPr>
-            <p:ph type="body" sz="quarter" idx="3"/>
+            <p:ph type="body" idx="3" sz="quarter"/>
           </p:nvPr>
         </p:nvSpPr>
         <p:spPr/>
@@ -4748,7 +4874,7 @@
             <a:spLocks noGrp="1"/>
           </p:cNvSpPr>
           <p:nvPr>
-            <p:ph type="sldNum" sz="quarter" idx="5"/>
+            <p:ph type="sldNum" idx="5" sz="quarter"/>
           </p:nvPr>
         </p:nvSpPr>
         <p:spPr/>
@@ -4762,7 +4888,7 @@
 </file>
 
 <file path=ppt/notesSlides/notesSlide9.xml><?xml version="1.0" encoding="utf-8"?>
-<p:notes xmlns:a="http://schemas.openxmlformats.org/drawingml/2006/main" xmlns:r="http://schemas.openxmlformats.org/officeDocument/2006/relationships" xmlns:p="http://schemas.openxmlformats.org/presentationml/2006/main">
+<p:notes xmlns:a="http://schemas.openxmlformats.org/drawingml/2006/main" xmlns:p="http://schemas.openxmlformats.org/presentationml/2006/main" xmlns:r="http://schemas.openxmlformats.org/officeDocument/2006/relationships">
   <p:cSld>
     <p:spTree>
       <p:nvGrpSpPr>
@@ -4782,7 +4908,7 @@
         <p:nvSpPr>
           <p:cNvPr id="2" name="Slide Image Placeholder 1"/>
           <p:cNvSpPr>
-            <a:spLocks noGrp="1" noRot="1" noChangeAspect="1"/>
+            <a:spLocks noGrp="1"/>
           </p:cNvSpPr>
           <p:nvPr>
             <p:ph type="sldImg" idx="2"/>
@@ -4797,7 +4923,7 @@
             <a:spLocks noGrp="1"/>
           </p:cNvSpPr>
           <p:nvPr>
-            <p:ph type="body" sz="quarter" idx="3"/>
+            <p:ph type="body" idx="3" sz="quarter"/>
           </p:nvPr>
         </p:nvSpPr>
         <p:spPr/>
@@ -4829,7 +4955,7 @@
             <a:spLocks noGrp="1"/>
           </p:cNvSpPr>
           <p:nvPr>
-            <p:ph type="sldNum" sz="quarter" idx="5"/>
+            <p:ph type="sldNum" idx="5" sz="quarter"/>
           </p:nvPr>
         </p:nvSpPr>
         <p:spPr/>
@@ -4880,9 +5006,10 @@
           <a:lstStyle/>
           <a:p>
             <a:r>
-              <a:rPr lang="en-US"/>
+              <a:rPr lang="en-US" smtClean="0"/>
               <a:t>Click to edit Master title style</a:t>
             </a:r>
+            <a:endParaRPr lang="en-US"/>
           </a:p>
         </p:txBody>
       </p:sp>
@@ -4998,9 +5125,10 @@
           </a:lstStyle>
           <a:p>
             <a:r>
-              <a:rPr lang="en-US"/>
+              <a:rPr lang="en-US" smtClean="0"/>
               <a:t>Click to edit Master subtitle style</a:t>
             </a:r>
+            <a:endParaRPr lang="en-US"/>
           </a:p>
         </p:txBody>
       </p:sp>
@@ -5021,7 +5149,7 @@
           <a:p>
             <a:fld id="{5BCAD085-E8A6-8845-BD4E-CB4CCA059FC4}" type="datetimeFigureOut">
               <a:rPr lang="en-US" smtClean="0"/>
-              <a:t>9/7/2026</a:t>
+              <a:t>1/27/13</a:t>
             </a:fld>
             <a:endParaRPr lang="en-US"/>
           </a:p>
@@ -5115,9 +5243,10 @@
           <a:lstStyle/>
           <a:p>
             <a:r>
-              <a:rPr lang="en-US"/>
+              <a:rPr lang="en-US" smtClean="0"/>
               <a:t>Click to edit Master title style</a:t>
             </a:r>
+            <a:endParaRPr lang="en-US"/>
           </a:p>
         </p:txBody>
       </p:sp>
@@ -5138,37 +5267,38 @@
           <a:p>
             <a:pPr lvl="0"/>
             <a:r>
-              <a:rPr lang="en-US"/>
+              <a:rPr lang="en-US" smtClean="0"/>
               <a:t>Click to edit Master text styles</a:t>
             </a:r>
           </a:p>
           <a:p>
             <a:pPr lvl="1"/>
             <a:r>
-              <a:rPr lang="en-US"/>
+              <a:rPr lang="en-US" smtClean="0"/>
               <a:t>Second level</a:t>
             </a:r>
           </a:p>
           <a:p>
             <a:pPr lvl="2"/>
             <a:r>
-              <a:rPr lang="en-US"/>
+              <a:rPr lang="en-US" smtClean="0"/>
               <a:t>Third level</a:t>
             </a:r>
           </a:p>
           <a:p>
             <a:pPr lvl="3"/>
             <a:r>
-              <a:rPr lang="en-US"/>
+              <a:rPr lang="en-US" smtClean="0"/>
               <a:t>Fourth level</a:t>
             </a:r>
           </a:p>
           <a:p>
             <a:pPr lvl="4"/>
             <a:r>
-              <a:rPr lang="en-US"/>
+              <a:rPr lang="en-US" smtClean="0"/>
               <a:t>Fifth level</a:t>
             </a:r>
+            <a:endParaRPr lang="en-US"/>
           </a:p>
         </p:txBody>
       </p:sp>
@@ -5189,7 +5319,7 @@
           <a:p>
             <a:fld id="{5BCAD085-E8A6-8845-BD4E-CB4CCA059FC4}" type="datetimeFigureOut">
               <a:rPr lang="en-US" smtClean="0"/>
-              <a:t>9/7/2026</a:t>
+              <a:t>1/27/13</a:t>
             </a:fld>
             <a:endParaRPr lang="en-US"/>
           </a:p>
@@ -5288,9 +5418,10 @@
           <a:lstStyle/>
           <a:p>
             <a:r>
-              <a:rPr lang="en-US"/>
+              <a:rPr lang="en-US" smtClean="0"/>
               <a:t>Click to edit Master title style</a:t>
             </a:r>
+            <a:endParaRPr lang="en-US"/>
           </a:p>
         </p:txBody>
       </p:sp>
@@ -5316,37 +5447,38 @@
           <a:p>
             <a:pPr lvl="0"/>
             <a:r>
-              <a:rPr lang="en-US"/>
+              <a:rPr lang="en-US" smtClean="0"/>
               <a:t>Click to edit Master text styles</a:t>
             </a:r>
           </a:p>
           <a:p>
             <a:pPr lvl="1"/>
             <a:r>
-              <a:rPr lang="en-US"/>
+              <a:rPr lang="en-US" smtClean="0"/>
               <a:t>Second level</a:t>
             </a:r>
           </a:p>
           <a:p>
             <a:pPr lvl="2"/>
             <a:r>
-              <a:rPr lang="en-US"/>
+              <a:rPr lang="en-US" smtClean="0"/>
               <a:t>Third level</a:t>
             </a:r>
           </a:p>
           <a:p>
             <a:pPr lvl="3"/>
             <a:r>
-              <a:rPr lang="en-US"/>
+              <a:rPr lang="en-US" smtClean="0"/>
               <a:t>Fourth level</a:t>
             </a:r>
           </a:p>
           <a:p>
             <a:pPr lvl="4"/>
             <a:r>
-              <a:rPr lang="en-US"/>
+              <a:rPr lang="en-US" smtClean="0"/>
               <a:t>Fifth level</a:t>
             </a:r>
+            <a:endParaRPr lang="en-US"/>
           </a:p>
         </p:txBody>
       </p:sp>
@@ -5367,7 +5499,7 @@
           <a:p>
             <a:fld id="{5BCAD085-E8A6-8845-BD4E-CB4CCA059FC4}" type="datetimeFigureOut">
               <a:rPr lang="en-US" smtClean="0"/>
-              <a:t>9/7/2026</a:t>
+              <a:t>1/27/13</a:t>
             </a:fld>
             <a:endParaRPr lang="en-US"/>
           </a:p>
@@ -5461,9 +5593,10 @@
           <a:lstStyle/>
           <a:p>
             <a:r>
-              <a:rPr lang="en-US"/>
+              <a:rPr lang="en-US" smtClean="0"/>
               <a:t>Click to edit Master title style</a:t>
             </a:r>
+            <a:endParaRPr lang="en-US"/>
           </a:p>
         </p:txBody>
       </p:sp>
@@ -5484,37 +5617,38 @@
           <a:p>
             <a:pPr lvl="0"/>
             <a:r>
-              <a:rPr lang="en-US"/>
+              <a:rPr lang="en-US" smtClean="0"/>
               <a:t>Click to edit Master text styles</a:t>
             </a:r>
           </a:p>
           <a:p>
             <a:pPr lvl="1"/>
             <a:r>
-              <a:rPr lang="en-US"/>
+              <a:rPr lang="en-US" smtClean="0"/>
               <a:t>Second level</a:t>
             </a:r>
           </a:p>
           <a:p>
             <a:pPr lvl="2"/>
             <a:r>
-              <a:rPr lang="en-US"/>
+              <a:rPr lang="en-US" smtClean="0"/>
               <a:t>Third level</a:t>
             </a:r>
           </a:p>
           <a:p>
             <a:pPr lvl="3"/>
             <a:r>
-              <a:rPr lang="en-US"/>
+              <a:rPr lang="en-US" smtClean="0"/>
               <a:t>Fourth level</a:t>
             </a:r>
           </a:p>
           <a:p>
             <a:pPr lvl="4"/>
             <a:r>
-              <a:rPr lang="en-US"/>
+              <a:rPr lang="en-US" smtClean="0"/>
               <a:t>Fifth level</a:t>
             </a:r>
+            <a:endParaRPr lang="en-US"/>
           </a:p>
         </p:txBody>
       </p:sp>
@@ -5535,7 +5669,7 @@
           <a:p>
             <a:fld id="{5BCAD085-E8A6-8845-BD4E-CB4CCA059FC4}" type="datetimeFigureOut">
               <a:rPr lang="en-US" smtClean="0"/>
-              <a:t>9/7/2026</a:t>
+              <a:t>1/27/13</a:t>
             </a:fld>
             <a:endParaRPr lang="en-US"/>
           </a:p>
@@ -5638,9 +5772,10 @@
           </a:lstStyle>
           <a:p>
             <a:r>
-              <a:rPr lang="en-US"/>
+              <a:rPr lang="en-US" smtClean="0"/>
               <a:t>Click to edit Master title style</a:t>
             </a:r>
+            <a:endParaRPr lang="en-US"/>
           </a:p>
         </p:txBody>
       </p:sp>
@@ -5757,7 +5892,7 @@
           <a:p>
             <a:pPr lvl="0"/>
             <a:r>
-              <a:rPr lang="en-US"/>
+              <a:rPr lang="en-US" smtClean="0"/>
               <a:t>Click to edit Master text styles</a:t>
             </a:r>
           </a:p>
@@ -5780,7 +5915,7 @@
           <a:p>
             <a:fld id="{5BCAD085-E8A6-8845-BD4E-CB4CCA059FC4}" type="datetimeFigureOut">
               <a:rPr lang="en-US" smtClean="0"/>
-              <a:t>9/7/2026</a:t>
+              <a:t>1/27/13</a:t>
             </a:fld>
             <a:endParaRPr lang="en-US"/>
           </a:p>
@@ -5874,9 +6009,10 @@
           <a:lstStyle/>
           <a:p>
             <a:r>
-              <a:rPr lang="en-US"/>
+              <a:rPr lang="en-US" smtClean="0"/>
               <a:t>Click to edit Master title style</a:t>
             </a:r>
+            <a:endParaRPr lang="en-US"/>
           </a:p>
         </p:txBody>
       </p:sp>
@@ -5930,37 +6066,38 @@
           <a:p>
             <a:pPr lvl="0"/>
             <a:r>
-              <a:rPr lang="en-US"/>
+              <a:rPr lang="en-US" smtClean="0"/>
               <a:t>Click to edit Master text styles</a:t>
             </a:r>
           </a:p>
           <a:p>
             <a:pPr lvl="1"/>
             <a:r>
-              <a:rPr lang="en-US"/>
+              <a:rPr lang="en-US" smtClean="0"/>
               <a:t>Second level</a:t>
             </a:r>
           </a:p>
           <a:p>
             <a:pPr lvl="2"/>
             <a:r>
-              <a:rPr lang="en-US"/>
+              <a:rPr lang="en-US" smtClean="0"/>
               <a:t>Third level</a:t>
             </a:r>
           </a:p>
           <a:p>
             <a:pPr lvl="3"/>
             <a:r>
-              <a:rPr lang="en-US"/>
+              <a:rPr lang="en-US" smtClean="0"/>
               <a:t>Fourth level</a:t>
             </a:r>
           </a:p>
           <a:p>
             <a:pPr lvl="4"/>
             <a:r>
-              <a:rPr lang="en-US"/>
+              <a:rPr lang="en-US" smtClean="0"/>
               <a:t>Fifth level</a:t>
             </a:r>
+            <a:endParaRPr lang="en-US"/>
           </a:p>
         </p:txBody>
       </p:sp>
@@ -6014,37 +6151,38 @@
           <a:p>
             <a:pPr lvl="0"/>
             <a:r>
-              <a:rPr lang="en-US"/>
+              <a:rPr lang="en-US" smtClean="0"/>
               <a:t>Click to edit Master text styles</a:t>
             </a:r>
           </a:p>
           <a:p>
             <a:pPr lvl="1"/>
             <a:r>
-              <a:rPr lang="en-US"/>
+              <a:rPr lang="en-US" smtClean="0"/>
               <a:t>Second level</a:t>
             </a:r>
           </a:p>
           <a:p>
             <a:pPr lvl="2"/>
             <a:r>
-              <a:rPr lang="en-US"/>
+              <a:rPr lang="en-US" smtClean="0"/>
               <a:t>Third level</a:t>
             </a:r>
           </a:p>
           <a:p>
             <a:pPr lvl="3"/>
             <a:r>
-              <a:rPr lang="en-US"/>
+              <a:rPr lang="en-US" smtClean="0"/>
               <a:t>Fourth level</a:t>
             </a:r>
           </a:p>
           <a:p>
             <a:pPr lvl="4"/>
             <a:r>
-              <a:rPr lang="en-US"/>
+              <a:rPr lang="en-US" smtClean="0"/>
               <a:t>Fifth level</a:t>
             </a:r>
+            <a:endParaRPr lang="en-US"/>
           </a:p>
         </p:txBody>
       </p:sp>
@@ -6065,7 +6203,7 @@
           <a:p>
             <a:fld id="{5BCAD085-E8A6-8845-BD4E-CB4CCA059FC4}" type="datetimeFigureOut">
               <a:rPr lang="en-US" smtClean="0"/>
-              <a:t>9/7/2026</a:t>
+              <a:t>1/27/13</a:t>
             </a:fld>
             <a:endParaRPr lang="en-US"/>
           </a:p>
@@ -6163,9 +6301,10 @@
           </a:lstStyle>
           <a:p>
             <a:r>
-              <a:rPr lang="en-US"/>
+              <a:rPr lang="en-US" smtClean="0"/>
               <a:t>Click to edit Master title style</a:t>
             </a:r>
+            <a:endParaRPr lang="en-US"/>
           </a:p>
         </p:txBody>
       </p:sp>
@@ -6228,7 +6367,7 @@
           <a:p>
             <a:pPr lvl="0"/>
             <a:r>
-              <a:rPr lang="en-US"/>
+              <a:rPr lang="en-US" smtClean="0"/>
               <a:t>Click to edit Master text styles</a:t>
             </a:r>
           </a:p>
@@ -6284,37 +6423,38 @@
           <a:p>
             <a:pPr lvl="0"/>
             <a:r>
-              <a:rPr lang="en-US"/>
+              <a:rPr lang="en-US" smtClean="0"/>
               <a:t>Click to edit Master text styles</a:t>
             </a:r>
           </a:p>
           <a:p>
             <a:pPr lvl="1"/>
             <a:r>
-              <a:rPr lang="en-US"/>
+              <a:rPr lang="en-US" smtClean="0"/>
               <a:t>Second level</a:t>
             </a:r>
           </a:p>
           <a:p>
             <a:pPr lvl="2"/>
             <a:r>
-              <a:rPr lang="en-US"/>
+              <a:rPr lang="en-US" smtClean="0"/>
               <a:t>Third level</a:t>
             </a:r>
           </a:p>
           <a:p>
             <a:pPr lvl="3"/>
             <a:r>
-              <a:rPr lang="en-US"/>
+              <a:rPr lang="en-US" smtClean="0"/>
               <a:t>Fourth level</a:t>
             </a:r>
           </a:p>
           <a:p>
             <a:pPr lvl="4"/>
             <a:r>
-              <a:rPr lang="en-US"/>
+              <a:rPr lang="en-US" smtClean="0"/>
               <a:t>Fifth level</a:t>
             </a:r>
+            <a:endParaRPr lang="en-US"/>
           </a:p>
         </p:txBody>
       </p:sp>
@@ -6377,7 +6517,7 @@
           <a:p>
             <a:pPr lvl="0"/>
             <a:r>
-              <a:rPr lang="en-US"/>
+              <a:rPr lang="en-US" smtClean="0"/>
               <a:t>Click to edit Master text styles</a:t>
             </a:r>
           </a:p>
@@ -6433,37 +6573,38 @@
           <a:p>
             <a:pPr lvl="0"/>
             <a:r>
-              <a:rPr lang="en-US"/>
+              <a:rPr lang="en-US" smtClean="0"/>
               <a:t>Click to edit Master text styles</a:t>
             </a:r>
           </a:p>
           <a:p>
             <a:pPr lvl="1"/>
             <a:r>
-              <a:rPr lang="en-US"/>
+              <a:rPr lang="en-US" smtClean="0"/>
               <a:t>Second level</a:t>
             </a:r>
           </a:p>
           <a:p>
             <a:pPr lvl="2"/>
             <a:r>
-              <a:rPr lang="en-US"/>
+              <a:rPr lang="en-US" smtClean="0"/>
               <a:t>Third level</a:t>
             </a:r>
           </a:p>
           <a:p>
             <a:pPr lvl="3"/>
             <a:r>
-              <a:rPr lang="en-US"/>
+              <a:rPr lang="en-US" smtClean="0"/>
               <a:t>Fourth level</a:t>
             </a:r>
           </a:p>
           <a:p>
             <a:pPr lvl="4"/>
             <a:r>
-              <a:rPr lang="en-US"/>
+              <a:rPr lang="en-US" smtClean="0"/>
               <a:t>Fifth level</a:t>
             </a:r>
+            <a:endParaRPr lang="en-US"/>
           </a:p>
         </p:txBody>
       </p:sp>
@@ -6484,7 +6625,7 @@
           <a:p>
             <a:fld id="{5BCAD085-E8A6-8845-BD4E-CB4CCA059FC4}" type="datetimeFigureOut">
               <a:rPr lang="en-US" smtClean="0"/>
-              <a:t>9/7/2026</a:t>
+              <a:t>1/27/13</a:t>
             </a:fld>
             <a:endParaRPr lang="en-US"/>
           </a:p>
@@ -6578,9 +6719,10 @@
           <a:lstStyle/>
           <a:p>
             <a:r>
-              <a:rPr lang="en-US"/>
+              <a:rPr lang="en-US" smtClean="0"/>
               <a:t>Click to edit Master title style</a:t>
             </a:r>
+            <a:endParaRPr lang="en-US"/>
           </a:p>
         </p:txBody>
       </p:sp>
@@ -6601,7 +6743,7 @@
           <a:p>
             <a:fld id="{5BCAD085-E8A6-8845-BD4E-CB4CCA059FC4}" type="datetimeFigureOut">
               <a:rPr lang="en-US" smtClean="0"/>
-              <a:t>9/7/2026</a:t>
+              <a:t>1/27/13</a:t>
             </a:fld>
             <a:endParaRPr lang="en-US"/>
           </a:p>
@@ -6696,7 +6838,7 @@
           <a:p>
             <a:fld id="{5BCAD085-E8A6-8845-BD4E-CB4CCA059FC4}" type="datetimeFigureOut">
               <a:rPr lang="en-US" smtClean="0"/>
-              <a:t>9/7/2026</a:t>
+              <a:t>1/27/13</a:t>
             </a:fld>
             <a:endParaRPr lang="en-US"/>
           </a:p>
@@ -6799,9 +6941,10 @@
           </a:lstStyle>
           <a:p>
             <a:r>
-              <a:rPr lang="en-US"/>
+              <a:rPr lang="en-US" smtClean="0"/>
               <a:t>Click to edit Master title style</a:t>
             </a:r>
+            <a:endParaRPr lang="en-US"/>
           </a:p>
         </p:txBody>
       </p:sp>
@@ -6855,37 +6998,38 @@
           <a:p>
             <a:pPr lvl="0"/>
             <a:r>
-              <a:rPr lang="en-US"/>
+              <a:rPr lang="en-US" smtClean="0"/>
               <a:t>Click to edit Master text styles</a:t>
             </a:r>
           </a:p>
           <a:p>
             <a:pPr lvl="1"/>
             <a:r>
-              <a:rPr lang="en-US"/>
+              <a:rPr lang="en-US" smtClean="0"/>
               <a:t>Second level</a:t>
             </a:r>
           </a:p>
           <a:p>
             <a:pPr lvl="2"/>
             <a:r>
-              <a:rPr lang="en-US"/>
+              <a:rPr lang="en-US" smtClean="0"/>
               <a:t>Third level</a:t>
             </a:r>
           </a:p>
           <a:p>
             <a:pPr lvl="3"/>
             <a:r>
-              <a:rPr lang="en-US"/>
+              <a:rPr lang="en-US" smtClean="0"/>
               <a:t>Fourth level</a:t>
             </a:r>
           </a:p>
           <a:p>
             <a:pPr lvl="4"/>
             <a:r>
-              <a:rPr lang="en-US"/>
+              <a:rPr lang="en-US" smtClean="0"/>
               <a:t>Fifth level</a:t>
             </a:r>
+            <a:endParaRPr lang="en-US"/>
           </a:p>
         </p:txBody>
       </p:sp>
@@ -6948,7 +7092,7 @@
           <a:p>
             <a:pPr lvl="0"/>
             <a:r>
-              <a:rPr lang="en-US"/>
+              <a:rPr lang="en-US" smtClean="0"/>
               <a:t>Click to edit Master text styles</a:t>
             </a:r>
           </a:p>
@@ -6971,7 +7115,7 @@
           <a:p>
             <a:fld id="{5BCAD085-E8A6-8845-BD4E-CB4CCA059FC4}" type="datetimeFigureOut">
               <a:rPr lang="en-US" smtClean="0"/>
-              <a:t>9/7/2026</a:t>
+              <a:t>1/27/13</a:t>
             </a:fld>
             <a:endParaRPr lang="en-US"/>
           </a:p>
@@ -7074,9 +7218,10 @@
           </a:lstStyle>
           <a:p>
             <a:r>
-              <a:rPr lang="en-US"/>
+              <a:rPr lang="en-US" smtClean="0"/>
               <a:t>Click to edit Master title style</a:t>
             </a:r>
+            <a:endParaRPr lang="en-US"/>
           </a:p>
         </p:txBody>
       </p:sp>
@@ -7200,7 +7345,7 @@
           <a:p>
             <a:pPr lvl="0"/>
             <a:r>
-              <a:rPr lang="en-US"/>
+              <a:rPr lang="en-US" smtClean="0"/>
               <a:t>Click to edit Master text styles</a:t>
             </a:r>
           </a:p>
@@ -7223,7 +7368,7 @@
           <a:p>
             <a:fld id="{5BCAD085-E8A6-8845-BD4E-CB4CCA059FC4}" type="datetimeFigureOut">
               <a:rPr lang="en-US" smtClean="0"/>
-              <a:t>9/7/2026</a:t>
+              <a:t>1/27/13</a:t>
             </a:fld>
             <a:endParaRPr lang="en-US"/>
           </a:p>
@@ -7332,9 +7477,10 @@
           <a:lstStyle/>
           <a:p>
             <a:r>
-              <a:rPr lang="en-US"/>
+              <a:rPr lang="en-US" smtClean="0"/>
               <a:t>Click to edit Master title style</a:t>
             </a:r>
+            <a:endParaRPr lang="en-US"/>
           </a:p>
         </p:txBody>
       </p:sp>
@@ -7365,37 +7511,38 @@
           <a:p>
             <a:pPr lvl="0"/>
             <a:r>
-              <a:rPr lang="en-US"/>
+              <a:rPr lang="en-US" smtClean="0"/>
               <a:t>Click to edit Master text styles</a:t>
             </a:r>
           </a:p>
           <a:p>
             <a:pPr lvl="1"/>
             <a:r>
-              <a:rPr lang="en-US"/>
+              <a:rPr lang="en-US" smtClean="0"/>
               <a:t>Second level</a:t>
             </a:r>
           </a:p>
           <a:p>
             <a:pPr lvl="2"/>
             <a:r>
-              <a:rPr lang="en-US"/>
+              <a:rPr lang="en-US" smtClean="0"/>
               <a:t>Third level</a:t>
             </a:r>
           </a:p>
           <a:p>
             <a:pPr lvl="3"/>
             <a:r>
-              <a:rPr lang="en-US"/>
+              <a:rPr lang="en-US" smtClean="0"/>
               <a:t>Fourth level</a:t>
             </a:r>
           </a:p>
           <a:p>
             <a:pPr lvl="4"/>
             <a:r>
-              <a:rPr lang="en-US"/>
+              <a:rPr lang="en-US" smtClean="0"/>
               <a:t>Fifth level</a:t>
             </a:r>
+            <a:endParaRPr lang="en-US"/>
           </a:p>
         </p:txBody>
       </p:sp>
@@ -7434,7 +7581,7 @@
           <a:p>
             <a:fld id="{5BCAD085-E8A6-8845-BD4E-CB4CCA059FC4}" type="datetimeFigureOut">
               <a:rPr lang="en-US" smtClean="0"/>
-              <a:t>9/7/2026</a:t>
+              <a:t>1/27/13</a:t>
             </a:fld>
             <a:endParaRPr lang="en-US"/>
           </a:p>
@@ -7793,7 +7940,7 @@
 </file>
 
 <file path=ppt/slides/slide1.xml><?xml version="1.0" encoding="utf-8"?>
-<p:sld xmlns:a="http://schemas.openxmlformats.org/drawingml/2006/main" xmlns:r="http://schemas.openxmlformats.org/officeDocument/2006/relationships" xmlns:p="http://schemas.openxmlformats.org/presentationml/2006/main">
+<p:sld xmlns:a="http://schemas.openxmlformats.org/drawingml/2006/main" xmlns:p="http://schemas.openxmlformats.org/presentationml/2006/main" xmlns:r="http://schemas.openxmlformats.org/officeDocument/2006/relationships">
   <p:cSld>
     <p:spTree>
       <p:nvGrpSpPr>
@@ -7801,14 +7948,7 @@
         <p:cNvGrpSpPr/>
         <p:nvPr/>
       </p:nvGrpSpPr>
-      <p:grpSpPr>
-        <a:xfrm>
-          <a:off x="0" y="0"/>
-          <a:ext cx="0" cy="0"/>
-          <a:chOff x="0" y="0"/>
-          <a:chExt cx="0" cy="0"/>
-        </a:xfrm>
-      </p:grpSpPr>
+      <p:grpSpPr/>
       <p:sp>
         <p:nvSpPr>
           <p:cNvPr id="2" name="Rectangle 1"/>
@@ -7850,7 +7990,6 @@
           <a:lstStyle/>
           <a:p>
             <a:pPr algn="ctr"/>
-            <a:endParaRPr/>
           </a:p>
         </p:txBody>
       </p:sp>
@@ -7863,7 +8002,7 @@
           <p:nvPr/>
         </p:nvPicPr>
         <p:blipFill>
-          <a:blip r:embed="rId3"/>
+          <a:blip r:embed="rId2"/>
           <a:stretch>
             <a:fillRect/>
           </a:stretch>
@@ -8108,12 +8247,6 @@
                 <a:latin typeface="Calibri"/>
               </a:defRPr>
             </a:pPr>
-            <a:endParaRPr sz="1200" b="0">
-              <a:solidFill>
-                <a:srgbClr val="666666"/>
-              </a:solidFill>
-              <a:latin typeface="Calibri"/>
-            </a:endParaRPr>
           </a:p>
           <a:p>
             <a:pPr algn="l">
@@ -8255,12 +8388,6 @@
                 <a:latin typeface="Calibri"/>
               </a:defRPr>
             </a:pPr>
-            <a:endParaRPr sz="1200" b="0">
-              <a:solidFill>
-                <a:srgbClr val="666666"/>
-              </a:solidFill>
-              <a:latin typeface="Calibri"/>
-            </a:endParaRPr>
           </a:p>
           <a:p>
             <a:pPr algn="l">
@@ -8298,7 +8425,7 @@
           <p:nvPr/>
         </p:nvPicPr>
         <p:blipFill>
-          <a:blip r:embed="rId4"/>
+          <a:blip r:embed="rId3"/>
           <a:stretch>
             <a:fillRect/>
           </a:stretch>
@@ -8370,7 +8497,7 @@
 </file>
 
 <file path=ppt/slides/slide10.xml><?xml version="1.0" encoding="utf-8"?>
-<p:sld xmlns:a="http://schemas.openxmlformats.org/drawingml/2006/main" xmlns:r="http://schemas.openxmlformats.org/officeDocument/2006/relationships" xmlns:p="http://schemas.openxmlformats.org/presentationml/2006/main">
+<p:sld xmlns:a="http://schemas.openxmlformats.org/drawingml/2006/main" xmlns:p="http://schemas.openxmlformats.org/presentationml/2006/main" xmlns:r="http://schemas.openxmlformats.org/officeDocument/2006/relationships">
   <p:cSld>
     <p:spTree>
       <p:nvGrpSpPr>
@@ -8378,14 +8505,7 @@
         <p:cNvGrpSpPr/>
         <p:nvPr/>
       </p:nvGrpSpPr>
-      <p:grpSpPr>
-        <a:xfrm>
-          <a:off x="0" y="0"/>
-          <a:ext cx="0" cy="0"/>
-          <a:chOff x="0" y="0"/>
-          <a:chExt cx="0" cy="0"/>
-        </a:xfrm>
-      </p:grpSpPr>
+      <p:grpSpPr/>
       <p:sp>
         <p:nvSpPr>
           <p:cNvPr id="2" name="Title 1"/>
@@ -8473,7 +8593,6 @@
           <a:lstStyle/>
           <a:p>
             <a:pPr algn="ctr"/>
-            <a:endParaRPr/>
           </a:p>
         </p:txBody>
       </p:sp>
@@ -8582,7 +8701,7 @@
           <p:nvPr/>
         </p:nvPicPr>
         <p:blipFill>
-          <a:blip r:embed="rId3"/>
+          <a:blip r:embed="rId2"/>
           <a:stretch>
             <a:fillRect/>
           </a:stretch>
@@ -8654,7 +8773,7 @@
 </file>
 
 <file path=ppt/slides/slide11.xml><?xml version="1.0" encoding="utf-8"?>
-<p:sld xmlns:a="http://schemas.openxmlformats.org/drawingml/2006/main" xmlns:r="http://schemas.openxmlformats.org/officeDocument/2006/relationships" xmlns:p="http://schemas.openxmlformats.org/presentationml/2006/main">
+<p:sld xmlns:a="http://schemas.openxmlformats.org/drawingml/2006/main" xmlns:p="http://schemas.openxmlformats.org/presentationml/2006/main" xmlns:r="http://schemas.openxmlformats.org/officeDocument/2006/relationships">
   <p:cSld>
     <p:spTree>
       <p:nvGrpSpPr>
@@ -8662,14 +8781,7 @@
         <p:cNvGrpSpPr/>
         <p:nvPr/>
       </p:nvGrpSpPr>
-      <p:grpSpPr>
-        <a:xfrm>
-          <a:off x="0" y="0"/>
-          <a:ext cx="0" cy="0"/>
-          <a:chOff x="0" y="0"/>
-          <a:chExt cx="0" cy="0"/>
-        </a:xfrm>
-      </p:grpSpPr>
+      <p:grpSpPr/>
       <p:sp>
         <p:nvSpPr>
           <p:cNvPr id="2" name="Title 1"/>
@@ -8757,7 +8869,6 @@
           <a:lstStyle/>
           <a:p>
             <a:pPr algn="ctr"/>
-            <a:endParaRPr/>
           </a:p>
         </p:txBody>
       </p:sp>
@@ -8914,7 +9025,7 @@
           <p:nvPr/>
         </p:nvPicPr>
         <p:blipFill>
-          <a:blip r:embed="rId3"/>
+          <a:blip r:embed="rId2"/>
           <a:stretch>
             <a:fillRect/>
           </a:stretch>
@@ -8986,7 +9097,7 @@
 </file>
 
 <file path=ppt/slides/slide12.xml><?xml version="1.0" encoding="utf-8"?>
-<p:sld xmlns:a="http://schemas.openxmlformats.org/drawingml/2006/main" xmlns:r="http://schemas.openxmlformats.org/officeDocument/2006/relationships" xmlns:p="http://schemas.openxmlformats.org/presentationml/2006/main">
+<p:sld xmlns:a="http://schemas.openxmlformats.org/drawingml/2006/main" xmlns:p="http://schemas.openxmlformats.org/presentationml/2006/main" xmlns:r="http://schemas.openxmlformats.org/officeDocument/2006/relationships">
   <p:cSld>
     <p:spTree>
       <p:nvGrpSpPr>
@@ -8994,14 +9105,7 @@
         <p:cNvGrpSpPr/>
         <p:nvPr/>
       </p:nvGrpSpPr>
-      <p:grpSpPr>
-        <a:xfrm>
-          <a:off x="0" y="0"/>
-          <a:ext cx="0" cy="0"/>
-          <a:chOff x="0" y="0"/>
-          <a:chExt cx="0" cy="0"/>
-        </a:xfrm>
-      </p:grpSpPr>
+      <p:grpSpPr/>
       <p:sp>
         <p:nvSpPr>
           <p:cNvPr id="2" name="Title 1"/>
@@ -9089,7 +9193,6 @@
           <a:lstStyle/>
           <a:p>
             <a:pPr algn="ctr"/>
-            <a:endParaRPr/>
           </a:p>
         </p:txBody>
       </p:sp>
@@ -9198,7 +9301,7 @@
           <p:nvPr/>
         </p:nvPicPr>
         <p:blipFill>
-          <a:blip r:embed="rId3"/>
+          <a:blip r:embed="rId2"/>
           <a:stretch>
             <a:fillRect/>
           </a:stretch>
@@ -9270,7 +9373,7 @@
 </file>
 
 <file path=ppt/slides/slide13.xml><?xml version="1.0" encoding="utf-8"?>
-<p:sld xmlns:a="http://schemas.openxmlformats.org/drawingml/2006/main" xmlns:r="http://schemas.openxmlformats.org/officeDocument/2006/relationships" xmlns:p="http://schemas.openxmlformats.org/presentationml/2006/main">
+<p:sld xmlns:a="http://schemas.openxmlformats.org/drawingml/2006/main" xmlns:p="http://schemas.openxmlformats.org/presentationml/2006/main" xmlns:r="http://schemas.openxmlformats.org/officeDocument/2006/relationships">
   <p:cSld>
     <p:spTree>
       <p:nvGrpSpPr>
@@ -9278,14 +9381,7 @@
         <p:cNvGrpSpPr/>
         <p:nvPr/>
       </p:nvGrpSpPr>
-      <p:grpSpPr>
-        <a:xfrm>
-          <a:off x="0" y="0"/>
-          <a:ext cx="0" cy="0"/>
-          <a:chOff x="0" y="0"/>
-          <a:chExt cx="0" cy="0"/>
-        </a:xfrm>
-      </p:grpSpPr>
+      <p:grpSpPr/>
       <p:sp>
         <p:nvSpPr>
           <p:cNvPr id="2" name="Title 1"/>
@@ -9373,7 +9469,6 @@
           <a:lstStyle/>
           <a:p>
             <a:pPr algn="ctr"/>
-            <a:endParaRPr/>
           </a:p>
         </p:txBody>
       </p:sp>
@@ -9530,7 +9625,7 @@
           <p:nvPr/>
         </p:nvPicPr>
         <p:blipFill>
-          <a:blip r:embed="rId3"/>
+          <a:blip r:embed="rId2"/>
           <a:stretch>
             <a:fillRect/>
           </a:stretch>
@@ -9585,7 +9680,7 @@
           </a:fontRef>
         </p:style>
         <p:txBody>
-          <a:bodyPr wrap="square" lIns="164592" tIns="109728" rIns="164592" bIns="109728" rtlCol="0" anchor="ctr"/>
+          <a:bodyPr rtlCol="0" anchor="ctr" wrap="square" lIns="164592" rIns="164592" tIns="109728" bIns="109728"/>
           <a:lstStyle/>
           <a:p>
             <a:pPr algn="ctr">
@@ -9769,7 +9864,7 @@
 </file>
 
 <file path=ppt/slides/slide14.xml><?xml version="1.0" encoding="utf-8"?>
-<p:sld xmlns:a="http://schemas.openxmlformats.org/drawingml/2006/main" xmlns:r="http://schemas.openxmlformats.org/officeDocument/2006/relationships" xmlns:p="http://schemas.openxmlformats.org/presentationml/2006/main">
+<p:sld xmlns:a="http://schemas.openxmlformats.org/drawingml/2006/main" xmlns:p="http://schemas.openxmlformats.org/presentationml/2006/main" xmlns:r="http://schemas.openxmlformats.org/officeDocument/2006/relationships">
   <p:cSld>
     <p:spTree>
       <p:nvGrpSpPr>
@@ -9777,14 +9872,7 @@
         <p:cNvGrpSpPr/>
         <p:nvPr/>
       </p:nvGrpSpPr>
-      <p:grpSpPr>
-        <a:xfrm>
-          <a:off x="0" y="0"/>
-          <a:ext cx="0" cy="0"/>
-          <a:chOff x="0" y="0"/>
-          <a:chExt cx="0" cy="0"/>
-        </a:xfrm>
-      </p:grpSpPr>
+      <p:grpSpPr/>
       <p:sp>
         <p:nvSpPr>
           <p:cNvPr id="2" name="Title 1"/>
@@ -9872,7 +9960,6 @@
           <a:lstStyle/>
           <a:p>
             <a:pPr algn="ctr"/>
-            <a:endParaRPr/>
           </a:p>
         </p:txBody>
       </p:sp>
@@ -10355,7 +10442,7 @@
           </a:fontRef>
         </p:style>
         <p:txBody>
-          <a:bodyPr wrap="square" lIns="164592" tIns="73152" rIns="164592" bIns="73152" rtlCol="0" anchor="ctr"/>
+          <a:bodyPr rtlCol="0" anchor="ctr" wrap="square" lIns="164592" rIns="164592" tIns="73152" bIns="73152"/>
           <a:lstStyle/>
           <a:p>
             <a:pPr algn="l"/>
@@ -10389,7 +10476,7 @@
 </file>
 
 <file path=ppt/slides/slide15.xml><?xml version="1.0" encoding="utf-8"?>
-<p:sld xmlns:a="http://schemas.openxmlformats.org/drawingml/2006/main" xmlns:r="http://schemas.openxmlformats.org/officeDocument/2006/relationships" xmlns:p="http://schemas.openxmlformats.org/presentationml/2006/main">
+<p:sld xmlns:a="http://schemas.openxmlformats.org/drawingml/2006/main" xmlns:p="http://schemas.openxmlformats.org/presentationml/2006/main" xmlns:r="http://schemas.openxmlformats.org/officeDocument/2006/relationships">
   <p:cSld>
     <p:spTree>
       <p:nvGrpSpPr>
@@ -10397,14 +10484,7 @@
         <p:cNvGrpSpPr/>
         <p:nvPr/>
       </p:nvGrpSpPr>
-      <p:grpSpPr>
-        <a:xfrm>
-          <a:off x="0" y="0"/>
-          <a:ext cx="0" cy="0"/>
-          <a:chOff x="0" y="0"/>
-          <a:chExt cx="0" cy="0"/>
-        </a:xfrm>
-      </p:grpSpPr>
+      <p:grpSpPr/>
       <p:sp>
         <p:nvSpPr>
           <p:cNvPr id="2" name="Title 1"/>
@@ -10492,7 +10572,6 @@
           <a:lstStyle/>
           <a:p>
             <a:pPr algn="ctr"/>
-            <a:endParaRPr/>
           </a:p>
         </p:txBody>
       </p:sp>
@@ -10649,7 +10728,7 @@
           <p:nvPr/>
         </p:nvPicPr>
         <p:blipFill>
-          <a:blip r:embed="rId3"/>
+          <a:blip r:embed="rId2"/>
           <a:stretch>
             <a:fillRect/>
           </a:stretch>
@@ -10752,7 +10831,7 @@
           </a:fontRef>
         </p:style>
         <p:txBody>
-          <a:bodyPr wrap="square" lIns="164592" tIns="109728" rIns="164592" bIns="109728" rtlCol="0" anchor="ctr"/>
+          <a:bodyPr rtlCol="0" anchor="ctr" wrap="square" lIns="164592" rIns="164592" tIns="109728" bIns="109728"/>
           <a:lstStyle/>
           <a:p>
             <a:pPr algn="ctr">
@@ -10888,7 +10967,7 @@
 </file>
 
 <file path=ppt/slides/slide16.xml><?xml version="1.0" encoding="utf-8"?>
-<p:sld xmlns:a="http://schemas.openxmlformats.org/drawingml/2006/main" xmlns:r="http://schemas.openxmlformats.org/officeDocument/2006/relationships" xmlns:p="http://schemas.openxmlformats.org/presentationml/2006/main">
+<p:sld xmlns:a="http://schemas.openxmlformats.org/drawingml/2006/main" xmlns:p="http://schemas.openxmlformats.org/presentationml/2006/main" xmlns:r="http://schemas.openxmlformats.org/officeDocument/2006/relationships">
   <p:cSld>
     <p:spTree>
       <p:nvGrpSpPr>
@@ -10896,14 +10975,7 @@
         <p:cNvGrpSpPr/>
         <p:nvPr/>
       </p:nvGrpSpPr>
-      <p:grpSpPr>
-        <a:xfrm>
-          <a:off x="0" y="0"/>
-          <a:ext cx="0" cy="0"/>
-          <a:chOff x="0" y="0"/>
-          <a:chExt cx="0" cy="0"/>
-        </a:xfrm>
-      </p:grpSpPr>
+      <p:grpSpPr/>
       <p:sp>
         <p:nvSpPr>
           <p:cNvPr id="2" name="Title 1"/>
@@ -10991,7 +11063,6 @@
           <a:lstStyle/>
           <a:p>
             <a:pPr algn="ctr"/>
-            <a:endParaRPr/>
           </a:p>
         </p:txBody>
       </p:sp>
@@ -11499,7 +11570,7 @@
           </a:fontRef>
         </p:style>
         <p:txBody>
-          <a:bodyPr wrap="square" lIns="164592" tIns="73152" rIns="164592" bIns="73152" rtlCol="0" anchor="ctr"/>
+          <a:bodyPr rtlCol="0" anchor="ctr" wrap="square" lIns="164592" rIns="164592" tIns="73152" bIns="73152"/>
           <a:lstStyle/>
           <a:p>
             <a:pPr algn="l"/>
@@ -11533,7 +11604,7 @@
 </file>
 
 <file path=ppt/slides/slide17.xml><?xml version="1.0" encoding="utf-8"?>
-<p:sld xmlns:a="http://schemas.openxmlformats.org/drawingml/2006/main" xmlns:r="http://schemas.openxmlformats.org/officeDocument/2006/relationships" xmlns:p="http://schemas.openxmlformats.org/presentationml/2006/main">
+<p:sld xmlns:a="http://schemas.openxmlformats.org/drawingml/2006/main" xmlns:p="http://schemas.openxmlformats.org/presentationml/2006/main" xmlns:r="http://schemas.openxmlformats.org/officeDocument/2006/relationships">
   <p:cSld>
     <p:spTree>
       <p:nvGrpSpPr>
@@ -11541,14 +11612,7 @@
         <p:cNvGrpSpPr/>
         <p:nvPr/>
       </p:nvGrpSpPr>
-      <p:grpSpPr>
-        <a:xfrm>
-          <a:off x="0" y="0"/>
-          <a:ext cx="0" cy="0"/>
-          <a:chOff x="0" y="0"/>
-          <a:chExt cx="0" cy="0"/>
-        </a:xfrm>
-      </p:grpSpPr>
+      <p:grpSpPr/>
       <p:sp>
         <p:nvSpPr>
           <p:cNvPr id="2" name="Title 1"/>
@@ -11636,7 +11700,6 @@
           <a:lstStyle/>
           <a:p>
             <a:pPr algn="ctr"/>
-            <a:endParaRPr/>
           </a:p>
         </p:txBody>
       </p:sp>
@@ -11777,7 +11840,7 @@
           </a:fontRef>
         </p:style>
         <p:txBody>
-          <a:bodyPr wrap="square" lIns="45720" tIns="18288" rIns="45720" bIns="18288" rtlCol="0" anchor="ctr"/>
+          <a:bodyPr rtlCol="0" anchor="ctr" wrap="square" lIns="45720" rIns="45720" tIns="18288" bIns="18288"/>
           <a:lstStyle/>
           <a:p>
             <a:pPr algn="ctr">
@@ -11895,7 +11958,7 @@
           </a:fontRef>
         </p:style>
         <p:txBody>
-          <a:bodyPr wrap="square" lIns="45720" tIns="18288" rIns="45720" bIns="18288" rtlCol="0" anchor="ctr"/>
+          <a:bodyPr rtlCol="0" anchor="ctr" wrap="square" lIns="45720" rIns="45720" tIns="18288" bIns="18288"/>
           <a:lstStyle/>
           <a:p>
             <a:pPr algn="ctr">
@@ -12013,7 +12076,7 @@
           </a:fontRef>
         </p:style>
         <p:txBody>
-          <a:bodyPr wrap="square" lIns="45720" tIns="18288" rIns="45720" bIns="18288" rtlCol="0" anchor="ctr"/>
+          <a:bodyPr rtlCol="0" anchor="ctr" wrap="square" lIns="45720" rIns="45720" tIns="18288" bIns="18288"/>
           <a:lstStyle/>
           <a:p>
             <a:pPr algn="ctr">
@@ -12205,7 +12268,7 @@
           </a:fontRef>
         </p:style>
         <p:txBody>
-          <a:bodyPr wrap="square" lIns="45720" tIns="18288" rIns="45720" bIns="18288" rtlCol="0" anchor="ctr"/>
+          <a:bodyPr rtlCol="0" anchor="ctr" wrap="square" lIns="45720" rIns="45720" tIns="18288" bIns="18288"/>
           <a:lstStyle/>
           <a:p>
             <a:pPr algn="ctr">
@@ -12385,7 +12448,7 @@
           </a:fontRef>
         </p:style>
         <p:txBody>
-          <a:bodyPr wrap="square" lIns="45720" tIns="18288" rIns="45720" bIns="18288" rtlCol="0" anchor="ctr"/>
+          <a:bodyPr rtlCol="0" anchor="ctr" wrap="square" lIns="45720" rIns="45720" tIns="18288" bIns="18288"/>
           <a:lstStyle/>
           <a:p>
             <a:pPr algn="ctr">
@@ -12565,7 +12628,7 @@
           </a:fontRef>
         </p:style>
         <p:txBody>
-          <a:bodyPr wrap="square" lIns="45720" tIns="18288" rIns="45720" bIns="18288" rtlCol="0" anchor="ctr"/>
+          <a:bodyPr rtlCol="0" anchor="ctr" wrap="square" lIns="45720" rIns="45720" tIns="18288" bIns="18288"/>
           <a:lstStyle/>
           <a:p>
             <a:pPr algn="ctr">
@@ -12745,7 +12808,7 @@
           </a:fontRef>
         </p:style>
         <p:txBody>
-          <a:bodyPr wrap="square" lIns="164592" tIns="73152" rIns="164592" bIns="73152" rtlCol="0" anchor="ctr"/>
+          <a:bodyPr rtlCol="0" anchor="ctr" wrap="square" lIns="164592" rIns="164592" tIns="73152" bIns="73152"/>
           <a:lstStyle/>
           <a:p>
             <a:pPr algn="l"/>
@@ -12779,7 +12842,7 @@
 </file>
 
 <file path=ppt/slides/slide18.xml><?xml version="1.0" encoding="utf-8"?>
-<p:sld xmlns:a="http://schemas.openxmlformats.org/drawingml/2006/main" xmlns:r="http://schemas.openxmlformats.org/officeDocument/2006/relationships" xmlns:p="http://schemas.openxmlformats.org/presentationml/2006/main">
+<p:sld xmlns:a="http://schemas.openxmlformats.org/drawingml/2006/main" xmlns:p="http://schemas.openxmlformats.org/presentationml/2006/main" xmlns:r="http://schemas.openxmlformats.org/officeDocument/2006/relationships">
   <p:cSld>
     <p:spTree>
       <p:nvGrpSpPr>
@@ -12787,14 +12850,7 @@
         <p:cNvGrpSpPr/>
         <p:nvPr/>
       </p:nvGrpSpPr>
-      <p:grpSpPr>
-        <a:xfrm>
-          <a:off x="0" y="0"/>
-          <a:ext cx="0" cy="0"/>
-          <a:chOff x="0" y="0"/>
-          <a:chExt cx="0" cy="0"/>
-        </a:xfrm>
-      </p:grpSpPr>
+      <p:grpSpPr/>
       <p:sp>
         <p:nvSpPr>
           <p:cNvPr id="2" name="Title 1"/>
@@ -12882,7 +12938,6 @@
           <a:lstStyle/>
           <a:p>
             <a:pPr algn="ctr"/>
-            <a:endParaRPr/>
           </a:p>
         </p:txBody>
       </p:sp>
@@ -13021,7 +13076,7 @@
           </a:fontRef>
         </p:style>
         <p:txBody>
-          <a:bodyPr wrap="square" lIns="45720" tIns="18288" rIns="45720" bIns="18288" rtlCol="0" anchor="ctr"/>
+          <a:bodyPr rtlCol="0" anchor="ctr" wrap="square" lIns="45720" rIns="45720" tIns="18288" bIns="18288"/>
           <a:lstStyle/>
           <a:p>
             <a:pPr algn="ctr">
@@ -13569,7 +13624,7 @@
           </a:fontRef>
         </p:style>
         <p:txBody>
-          <a:bodyPr wrap="square" lIns="45720" tIns="18288" rIns="45720" bIns="18288" rtlCol="0" anchor="ctr"/>
+          <a:bodyPr rtlCol="0" anchor="ctr" wrap="square" lIns="45720" rIns="45720" tIns="18288" bIns="18288"/>
           <a:lstStyle/>
           <a:p>
             <a:pPr algn="ctr">
@@ -14021,7 +14076,7 @@
           </a:fontRef>
         </p:style>
         <p:txBody>
-          <a:bodyPr wrap="square" lIns="45720" tIns="18288" rIns="45720" bIns="18288" rtlCol="0" anchor="ctr"/>
+          <a:bodyPr rtlCol="0" anchor="ctr" wrap="square" lIns="45720" rIns="45720" tIns="18288" bIns="18288"/>
           <a:lstStyle/>
           <a:p>
             <a:pPr algn="ctr">
@@ -14539,7 +14594,7 @@
 </file>
 
 <file path=ppt/slides/slide19.xml><?xml version="1.0" encoding="utf-8"?>
-<p:sld xmlns:a="http://schemas.openxmlformats.org/drawingml/2006/main" xmlns:r="http://schemas.openxmlformats.org/officeDocument/2006/relationships" xmlns:p="http://schemas.openxmlformats.org/presentationml/2006/main">
+<p:sld xmlns:a="http://schemas.openxmlformats.org/drawingml/2006/main" xmlns:p="http://schemas.openxmlformats.org/presentationml/2006/main" xmlns:r="http://schemas.openxmlformats.org/officeDocument/2006/relationships">
   <p:cSld>
     <p:spTree>
       <p:nvGrpSpPr>
@@ -14547,14 +14602,7 @@
         <p:cNvGrpSpPr/>
         <p:nvPr/>
       </p:nvGrpSpPr>
-      <p:grpSpPr>
-        <a:xfrm>
-          <a:off x="0" y="0"/>
-          <a:ext cx="0" cy="0"/>
-          <a:chOff x="0" y="0"/>
-          <a:chExt cx="0" cy="0"/>
-        </a:xfrm>
-      </p:grpSpPr>
+      <p:grpSpPr/>
       <p:sp>
         <p:nvSpPr>
           <p:cNvPr id="2" name="Title 1"/>
@@ -14642,7 +14690,6 @@
           <a:lstStyle/>
           <a:p>
             <a:pPr algn="ctr"/>
-            <a:endParaRPr/>
           </a:p>
         </p:txBody>
       </p:sp>
@@ -14782,7 +14829,7 @@
           </a:fontRef>
         </p:style>
         <p:txBody>
-          <a:bodyPr wrap="square" lIns="164592" tIns="109728" rIns="164592" bIns="109728" rtlCol="0" anchor="ctr"/>
+          <a:bodyPr rtlCol="0" anchor="ctr" wrap="square" lIns="164592" rIns="164592" tIns="109728" bIns="109728"/>
           <a:lstStyle/>
           <a:p>
             <a:pPr algn="ctr">
@@ -14918,7 +14965,7 @@
 </file>
 
 <file path=ppt/slides/slide2.xml><?xml version="1.0" encoding="utf-8"?>
-<p:sld xmlns:a="http://schemas.openxmlformats.org/drawingml/2006/main" xmlns:r="http://schemas.openxmlformats.org/officeDocument/2006/relationships" xmlns:p="http://schemas.openxmlformats.org/presentationml/2006/main">
+<p:sld xmlns:a="http://schemas.openxmlformats.org/drawingml/2006/main" xmlns:p="http://schemas.openxmlformats.org/presentationml/2006/main" xmlns:r="http://schemas.openxmlformats.org/officeDocument/2006/relationships">
   <p:cSld>
     <p:spTree>
       <p:nvGrpSpPr>
@@ -14926,14 +14973,7 @@
         <p:cNvGrpSpPr/>
         <p:nvPr/>
       </p:nvGrpSpPr>
-      <p:grpSpPr>
-        <a:xfrm>
-          <a:off x="0" y="0"/>
-          <a:ext cx="0" cy="0"/>
-          <a:chOff x="0" y="0"/>
-          <a:chExt cx="0" cy="0"/>
-        </a:xfrm>
-      </p:grpSpPr>
+      <p:grpSpPr/>
       <p:sp>
         <p:nvSpPr>
           <p:cNvPr id="2" name="Title 1"/>
@@ -15021,7 +15061,6 @@
           <a:lstStyle/>
           <a:p>
             <a:pPr algn="ctr"/>
-            <a:endParaRPr/>
           </a:p>
         </p:txBody>
       </p:sp>
@@ -15376,7 +15415,7 @@
 </file>
 
 <file path=ppt/slides/slide20.xml><?xml version="1.0" encoding="utf-8"?>
-<p:sld xmlns:a="http://schemas.openxmlformats.org/drawingml/2006/main" xmlns:r="http://schemas.openxmlformats.org/officeDocument/2006/relationships" xmlns:p="http://schemas.openxmlformats.org/presentationml/2006/main">
+<p:sld xmlns:a="http://schemas.openxmlformats.org/drawingml/2006/main" xmlns:p="http://schemas.openxmlformats.org/presentationml/2006/main" xmlns:r="http://schemas.openxmlformats.org/officeDocument/2006/relationships">
   <p:cSld>
     <p:spTree>
       <p:nvGrpSpPr>
@@ -15384,14 +15423,7 @@
         <p:cNvGrpSpPr/>
         <p:nvPr/>
       </p:nvGrpSpPr>
-      <p:grpSpPr>
-        <a:xfrm>
-          <a:off x="0" y="0"/>
-          <a:ext cx="0" cy="0"/>
-          <a:chOff x="0" y="0"/>
-          <a:chExt cx="0" cy="0"/>
-        </a:xfrm>
-      </p:grpSpPr>
+      <p:grpSpPr/>
       <p:sp>
         <p:nvSpPr>
           <p:cNvPr id="2" name="Title 1"/>
@@ -15479,7 +15511,6 @@
           <a:lstStyle/>
           <a:p>
             <a:pPr algn="ctr"/>
-            <a:endParaRPr/>
           </a:p>
         </p:txBody>
       </p:sp>
@@ -15955,7 +15986,7 @@
 </file>
 
 <file path=ppt/slides/slide21.xml><?xml version="1.0" encoding="utf-8"?>
-<p:sld xmlns:a="http://schemas.openxmlformats.org/drawingml/2006/main" xmlns:r="http://schemas.openxmlformats.org/officeDocument/2006/relationships" xmlns:p="http://schemas.openxmlformats.org/presentationml/2006/main">
+<p:sld xmlns:a="http://schemas.openxmlformats.org/drawingml/2006/main" xmlns:p="http://schemas.openxmlformats.org/presentationml/2006/main" xmlns:r="http://schemas.openxmlformats.org/officeDocument/2006/relationships">
   <p:cSld>
     <p:spTree>
       <p:nvGrpSpPr>
@@ -15963,14 +15994,7 @@
         <p:cNvGrpSpPr/>
         <p:nvPr/>
       </p:nvGrpSpPr>
-      <p:grpSpPr>
-        <a:xfrm>
-          <a:off x="0" y="0"/>
-          <a:ext cx="0" cy="0"/>
-          <a:chOff x="0" y="0"/>
-          <a:chExt cx="0" cy="0"/>
-        </a:xfrm>
-      </p:grpSpPr>
+      <p:grpSpPr/>
       <p:sp>
         <p:nvSpPr>
           <p:cNvPr id="2" name="Title 1"/>
@@ -16058,7 +16082,6 @@
           <a:lstStyle/>
           <a:p>
             <a:pPr algn="ctr"/>
-            <a:endParaRPr/>
           </a:p>
         </p:txBody>
       </p:sp>
@@ -16215,7 +16238,7 @@
           <p:nvPr/>
         </p:nvPicPr>
         <p:blipFill>
-          <a:blip r:embed="rId3"/>
+          <a:blip r:embed="rId2"/>
           <a:stretch>
             <a:fillRect/>
           </a:stretch>
@@ -16239,7 +16262,7 @@
           <p:nvPr/>
         </p:nvPicPr>
         <p:blipFill>
-          <a:blip r:embed="rId4"/>
+          <a:blip r:embed="rId3"/>
           <a:stretch>
             <a:fillRect/>
           </a:stretch>
@@ -16391,7 +16414,7 @@
           </a:fontRef>
         </p:style>
         <p:txBody>
-          <a:bodyPr wrap="square" lIns="164592" tIns="73152" rIns="164592" bIns="73152" rtlCol="0" anchor="ctr"/>
+          <a:bodyPr rtlCol="0" anchor="ctr" wrap="square" lIns="164592" rIns="164592" tIns="73152" bIns="73152"/>
           <a:lstStyle/>
           <a:p>
             <a:pPr algn="l"/>
@@ -16425,7 +16448,7 @@
 </file>
 
 <file path=ppt/slides/slide22.xml><?xml version="1.0" encoding="utf-8"?>
-<p:sld xmlns:a="http://schemas.openxmlformats.org/drawingml/2006/main" xmlns:r="http://schemas.openxmlformats.org/officeDocument/2006/relationships" xmlns:p="http://schemas.openxmlformats.org/presentationml/2006/main">
+<p:sld xmlns:a="http://schemas.openxmlformats.org/drawingml/2006/main" xmlns:p="http://schemas.openxmlformats.org/presentationml/2006/main" xmlns:r="http://schemas.openxmlformats.org/officeDocument/2006/relationships">
   <p:cSld>
     <p:spTree>
       <p:nvGrpSpPr>
@@ -16433,14 +16456,7 @@
         <p:cNvGrpSpPr/>
         <p:nvPr/>
       </p:nvGrpSpPr>
-      <p:grpSpPr>
-        <a:xfrm>
-          <a:off x="0" y="0"/>
-          <a:ext cx="0" cy="0"/>
-          <a:chOff x="0" y="0"/>
-          <a:chExt cx="0" cy="0"/>
-        </a:xfrm>
-      </p:grpSpPr>
+      <p:grpSpPr/>
       <p:sp>
         <p:nvSpPr>
           <p:cNvPr id="2" name="TextBox 1"/>
@@ -16578,7 +16594,6 @@
           <a:lstStyle/>
           <a:p>
             <a:pPr algn="ctr"/>
-            <a:endParaRPr/>
           </a:p>
         </p:txBody>
       </p:sp>
@@ -16719,7 +16734,7 @@
           </a:fontRef>
         </p:style>
         <p:txBody>
-          <a:bodyPr wrap="square" lIns="73152" rIns="73152" rtlCol="0" anchor="ctr"/>
+          <a:bodyPr rtlCol="0" anchor="ctr" wrap="square" lIns="73152" rIns="73152"/>
           <a:lstStyle/>
           <a:p>
             <a:pPr algn="ctr">
@@ -16837,7 +16852,7 @@
           </a:fontRef>
         </p:style>
         <p:txBody>
-          <a:bodyPr wrap="square" lIns="73152" rIns="73152" rtlCol="0" anchor="ctr"/>
+          <a:bodyPr rtlCol="0" anchor="ctr" wrap="square" lIns="73152" rIns="73152"/>
           <a:lstStyle/>
           <a:p>
             <a:pPr algn="ctr">
@@ -16955,7 +16970,7 @@
           </a:fontRef>
         </p:style>
         <p:txBody>
-          <a:bodyPr wrap="square" lIns="73152" rIns="73152" rtlCol="0" anchor="ctr"/>
+          <a:bodyPr rtlCol="0" anchor="ctr" wrap="square" lIns="73152" rIns="73152"/>
           <a:lstStyle/>
           <a:p>
             <a:pPr algn="ctr">
@@ -17025,7 +17040,7 @@
           </a:fontRef>
         </p:style>
         <p:txBody>
-          <a:bodyPr wrap="square" lIns="73152" rIns="73152" rtlCol="0" anchor="ctr"/>
+          <a:bodyPr rtlCol="0" anchor="ctr" wrap="square" lIns="73152" rIns="73152"/>
           <a:lstStyle/>
           <a:p>
             <a:pPr algn="ctr">
@@ -17095,7 +17110,7 @@
           </a:fontRef>
         </p:style>
         <p:txBody>
-          <a:bodyPr wrap="square" lIns="73152" rIns="73152" rtlCol="0" anchor="ctr"/>
+          <a:bodyPr rtlCol="0" anchor="ctr" wrap="square" lIns="73152" rIns="73152"/>
           <a:lstStyle/>
           <a:p>
             <a:pPr algn="ctr">
@@ -17133,7 +17148,7 @@
 </file>
 
 <file path=ppt/slides/slide23.xml><?xml version="1.0" encoding="utf-8"?>
-<p:sld xmlns:a="http://schemas.openxmlformats.org/drawingml/2006/main" xmlns:r="http://schemas.openxmlformats.org/officeDocument/2006/relationships" xmlns:p="http://schemas.openxmlformats.org/presentationml/2006/main">
+<p:sld xmlns:a="http://schemas.openxmlformats.org/drawingml/2006/main" xmlns:p="http://schemas.openxmlformats.org/presentationml/2006/main" xmlns:r="http://schemas.openxmlformats.org/officeDocument/2006/relationships">
   <p:cSld>
     <p:spTree>
       <p:nvGrpSpPr>
@@ -17141,14 +17156,7 @@
         <p:cNvGrpSpPr/>
         <p:nvPr/>
       </p:nvGrpSpPr>
-      <p:grpSpPr>
-        <a:xfrm>
-          <a:off x="0" y="0"/>
-          <a:ext cx="0" cy="0"/>
-          <a:chOff x="0" y="0"/>
-          <a:chExt cx="0" cy="0"/>
-        </a:xfrm>
-      </p:grpSpPr>
+      <p:grpSpPr/>
       <p:sp>
         <p:nvSpPr>
           <p:cNvPr id="2" name="Title 1"/>
@@ -17236,7 +17244,6 @@
           <a:lstStyle/>
           <a:p>
             <a:pPr algn="ctr"/>
-            <a:endParaRPr/>
           </a:p>
         </p:txBody>
       </p:sp>
@@ -17472,12 +17479,6 @@
                 <a:latin typeface="Calibri"/>
               </a:defRPr>
             </a:pPr>
-            <a:endParaRPr sz="2100" b="0">
-              <a:solidFill>
-                <a:srgbClr val="222222"/>
-              </a:solidFill>
-              <a:latin typeface="Calibri"/>
-            </a:endParaRPr>
           </a:p>
           <a:p>
             <a:pPr algn="l">
@@ -17572,7 +17573,7 @@
           </a:fontRef>
         </p:style>
         <p:txBody>
-          <a:bodyPr wrap="square" lIns="164592" tIns="73152" rIns="164592" bIns="73152" rtlCol="0" anchor="ctr"/>
+          <a:bodyPr rtlCol="0" anchor="ctr" wrap="square" lIns="164592" rIns="164592" tIns="73152" bIns="73152"/>
           <a:lstStyle/>
           <a:p>
             <a:pPr algn="l"/>
@@ -17606,7 +17607,7 @@
 </file>
 
 <file path=ppt/slides/slide24.xml><?xml version="1.0" encoding="utf-8"?>
-<p:sld xmlns:a="http://schemas.openxmlformats.org/drawingml/2006/main" xmlns:r="http://schemas.openxmlformats.org/officeDocument/2006/relationships" xmlns:p="http://schemas.openxmlformats.org/presentationml/2006/main">
+<p:sld xmlns:a="http://schemas.openxmlformats.org/drawingml/2006/main" xmlns:p="http://schemas.openxmlformats.org/presentationml/2006/main" xmlns:r="http://schemas.openxmlformats.org/officeDocument/2006/relationships">
   <p:cSld>
     <p:spTree>
       <p:nvGrpSpPr>
@@ -17614,14 +17615,7 @@
         <p:cNvGrpSpPr/>
         <p:nvPr/>
       </p:nvGrpSpPr>
-      <p:grpSpPr>
-        <a:xfrm>
-          <a:off x="0" y="0"/>
-          <a:ext cx="0" cy="0"/>
-          <a:chOff x="0" y="0"/>
-          <a:chExt cx="0" cy="0"/>
-        </a:xfrm>
-      </p:grpSpPr>
+      <p:grpSpPr/>
       <p:sp>
         <p:nvSpPr>
           <p:cNvPr id="2" name="Title 1"/>
@@ -17657,7 +17651,7 @@
               </a:defRPr>
             </a:pPr>
             <a:r>
-              <a:rPr sz="2800" b="1" dirty="0">
+              <a:rPr sz="2800" b="1">
                 <a:solidFill>
                   <a:srgbClr val="1F3A5F"/>
                 </a:solidFill>
@@ -17709,7 +17703,6 @@
           <a:lstStyle/>
           <a:p>
             <a:pPr algn="ctr"/>
-            <a:endParaRPr/>
           </a:p>
         </p:txBody>
       </p:sp>
@@ -17818,7 +17811,7 @@
         <p:spPr>
           <a:xfrm>
             <a:off x="502920" y="1188720"/>
-            <a:ext cx="7688056" cy="3986784"/>
+            <a:ext cx="7240622" cy="3986784"/>
           </a:xfrm>
           <a:prstGeom prst="rect">
             <a:avLst/>
@@ -17902,7 +17895,7 @@
                 </a:solidFill>
                 <a:latin typeface="Calibri"/>
               </a:rPr>
-              <a:t>2.  Paste this into "Additional boards manager URLs", one line, no spaces:</a:t>
+              <a:t>2.  Paste this into "Additional boards manager URLs":</a:t>
             </a:r>
           </a:p>
           <a:p>
@@ -18027,7 +18020,7 @@
                 </a:solidFill>
                 <a:latin typeface="Calibri"/>
               </a:rPr>
-              <a:t>5.  Choose version 3.0.7 - NOT the latest - and click Install.</a:t>
+              <a:t>5.  Choose version 3.0.7, NOT the latest. Install.</a:t>
             </a:r>
           </a:p>
           <a:p>
@@ -18066,15 +18059,15 @@
           <p:nvPr/>
         </p:nvPicPr>
         <p:blipFill>
-          <a:blip r:embed="rId3"/>
+          <a:blip r:embed="rId2"/>
           <a:stretch>
             <a:fillRect/>
           </a:stretch>
         </p:blipFill>
         <p:spPr>
           <a:xfrm>
-            <a:off x="7497355" y="1415740"/>
-            <a:ext cx="4571827" cy="2830179"/>
+            <a:off x="8109302" y="1726708"/>
+            <a:ext cx="3579473" cy="2215864"/>
           </a:xfrm>
           <a:prstGeom prst="rect">
             <a:avLst/>
@@ -18089,8 +18082,8 @@
         </p:nvSpPr>
         <p:spPr>
           <a:xfrm>
-            <a:off x="8475027" y="4364791"/>
-            <a:ext cx="3132039" cy="553998"/>
+            <a:off x="8109302" y="3997436"/>
+            <a:ext cx="3579473" cy="566928"/>
           </a:xfrm>
           <a:prstGeom prst="rect">
             <a:avLst/>
@@ -18108,7 +18101,7 @@
                 <a:spcPct val="100000"/>
               </a:lnSpc>
               <a:spcAft>
-                <a:spcPts val="600"/>
+                <a:spcPts val="200"/>
               </a:spcAft>
               <a:defRPr sz="1800" b="0">
                 <a:solidFill>
@@ -18118,31 +18111,13 @@
               </a:defRPr>
             </a:pPr>
             <a:r>
-              <a:rPr lang="en-US" sz="1800" b="0">
+              <a:rPr sz="1800" b="0">
                 <a:solidFill>
                   <a:srgbClr val="666666"/>
                 </a:solidFill>
                 <a:latin typeface="Calibri"/>
               </a:rPr>
-              <a:t>Additional board manager URLs</a:t>
-            </a:r>
-            <a:r>
-              <a:rPr sz="1800" b="0">
-                <a:solidFill>
-                  <a:srgbClr val="666666"/>
-                </a:solidFill>
-                <a:latin typeface="Calibri"/>
-              </a:rPr>
-              <a:t> </a:t>
-            </a:r>
-            <a:r>
-              <a:rPr sz="1800" b="0" dirty="0">
-                <a:solidFill>
-                  <a:srgbClr val="666666"/>
-                </a:solidFill>
-                <a:latin typeface="Calibri"/>
-              </a:rPr>
-              <a:t>is the bottom row</a:t>
+              <a:t>"Additional board manager URLs" is the bottom row</a:t>
             </a:r>
           </a:p>
         </p:txBody>
@@ -18188,7 +18163,7 @@
           </a:fontRef>
         </p:style>
         <p:txBody>
-          <a:bodyPr wrap="square" lIns="164592" tIns="73152" rIns="164592" bIns="73152" rtlCol="0" anchor="ctr"/>
+          <a:bodyPr rtlCol="0" anchor="ctr" wrap="square" lIns="164592" rIns="164592" tIns="73152" bIns="73152"/>
           <a:lstStyle/>
           <a:p>
             <a:pPr algn="l"/>
@@ -18222,7 +18197,7 @@
 </file>
 
 <file path=ppt/slides/slide25.xml><?xml version="1.0" encoding="utf-8"?>
-<p:sld xmlns:a="http://schemas.openxmlformats.org/drawingml/2006/main" xmlns:r="http://schemas.openxmlformats.org/officeDocument/2006/relationships" xmlns:p="http://schemas.openxmlformats.org/presentationml/2006/main">
+<p:sld xmlns:a="http://schemas.openxmlformats.org/drawingml/2006/main" xmlns:p="http://schemas.openxmlformats.org/presentationml/2006/main" xmlns:r="http://schemas.openxmlformats.org/officeDocument/2006/relationships">
   <p:cSld>
     <p:spTree>
       <p:nvGrpSpPr>
@@ -18230,14 +18205,7 @@
         <p:cNvGrpSpPr/>
         <p:nvPr/>
       </p:nvGrpSpPr>
-      <p:grpSpPr>
-        <a:xfrm>
-          <a:off x="0" y="0"/>
-          <a:ext cx="0" cy="0"/>
-          <a:chOff x="0" y="0"/>
-          <a:chExt cx="0" cy="0"/>
-        </a:xfrm>
-      </p:grpSpPr>
+      <p:grpSpPr/>
       <p:sp>
         <p:nvSpPr>
           <p:cNvPr id="2" name="Title 1"/>
@@ -18325,7 +18293,6 @@
           <a:lstStyle/>
           <a:p>
             <a:pPr algn="ctr"/>
-            <a:endParaRPr/>
           </a:p>
         </p:txBody>
       </p:sp>
@@ -18511,12 +18478,6 @@
                 <a:latin typeface="Calibri"/>
               </a:defRPr>
             </a:pPr>
-            <a:endParaRPr sz="2100" b="0">
-              <a:solidFill>
-                <a:srgbClr val="222222"/>
-              </a:solidFill>
-              <a:latin typeface="Calibri"/>
-            </a:endParaRPr>
           </a:p>
           <a:p>
             <a:pPr algn="l">
@@ -18608,12 +18569,6 @@
                 <a:latin typeface="Calibri"/>
               </a:defRPr>
             </a:pPr>
-            <a:endParaRPr sz="2100" b="0">
-              <a:solidFill>
-                <a:srgbClr val="222222"/>
-              </a:solidFill>
-              <a:latin typeface="Calibri"/>
-            </a:endParaRPr>
           </a:p>
           <a:p>
             <a:pPr algn="l">
@@ -18683,7 +18638,7 @@
           </a:fontRef>
         </p:style>
         <p:txBody>
-          <a:bodyPr wrap="square" lIns="164592" tIns="73152" rIns="164592" bIns="73152" rtlCol="0" anchor="ctr"/>
+          <a:bodyPr rtlCol="0" anchor="ctr" wrap="square" lIns="164592" rIns="164592" tIns="73152" bIns="73152"/>
           <a:lstStyle/>
           <a:p>
             <a:pPr algn="l"/>
@@ -18717,7 +18672,7 @@
 </file>
 
 <file path=ppt/slides/slide26.xml><?xml version="1.0" encoding="utf-8"?>
-<p:sld xmlns:a="http://schemas.openxmlformats.org/drawingml/2006/main" xmlns:r="http://schemas.openxmlformats.org/officeDocument/2006/relationships" xmlns:p="http://schemas.openxmlformats.org/presentationml/2006/main">
+<p:sld xmlns:a="http://schemas.openxmlformats.org/drawingml/2006/main" xmlns:p="http://schemas.openxmlformats.org/presentationml/2006/main" xmlns:r="http://schemas.openxmlformats.org/officeDocument/2006/relationships">
   <p:cSld>
     <p:spTree>
       <p:nvGrpSpPr>
@@ -18725,14 +18680,7 @@
         <p:cNvGrpSpPr/>
         <p:nvPr/>
       </p:nvGrpSpPr>
-      <p:grpSpPr>
-        <a:xfrm>
-          <a:off x="0" y="0"/>
-          <a:ext cx="0" cy="0"/>
-          <a:chOff x="0" y="0"/>
-          <a:chExt cx="0" cy="0"/>
-        </a:xfrm>
-      </p:grpSpPr>
+      <p:grpSpPr/>
       <p:sp>
         <p:nvSpPr>
           <p:cNvPr id="2" name="Title 1"/>
@@ -18820,7 +18768,6 @@
           <a:lstStyle/>
           <a:p>
             <a:pPr algn="ctr"/>
-            <a:endParaRPr/>
           </a:p>
         </p:txBody>
       </p:sp>
@@ -18981,12 +18928,6 @@
                 <a:latin typeface="Calibri"/>
               </a:defRPr>
             </a:pPr>
-            <a:endParaRPr sz="2700" b="0">
-              <a:solidFill>
-                <a:srgbClr val="222222"/>
-              </a:solidFill>
-              <a:latin typeface="Calibri"/>
-            </a:endParaRPr>
           </a:p>
           <a:p>
             <a:pPr algn="l">
@@ -19053,12 +18994,6 @@
                 <a:latin typeface="Calibri"/>
               </a:defRPr>
             </a:pPr>
-            <a:endParaRPr sz="2700" b="0">
-              <a:solidFill>
-                <a:srgbClr val="222222"/>
-              </a:solidFill>
-              <a:latin typeface="Calibri"/>
-            </a:endParaRPr>
           </a:p>
           <a:p>
             <a:pPr algn="l">
@@ -19128,7 +19063,7 @@
           </a:fontRef>
         </p:style>
         <p:txBody>
-          <a:bodyPr wrap="square" lIns="164592" tIns="73152" rIns="164592" bIns="73152" rtlCol="0" anchor="ctr"/>
+          <a:bodyPr rtlCol="0" anchor="ctr" wrap="square" lIns="164592" rIns="164592" tIns="73152" bIns="73152"/>
           <a:lstStyle/>
           <a:p>
             <a:pPr algn="l"/>
@@ -19162,7 +19097,7 @@
 </file>
 
 <file path=ppt/slides/slide27.xml><?xml version="1.0" encoding="utf-8"?>
-<p:sld xmlns:a="http://schemas.openxmlformats.org/drawingml/2006/main" xmlns:r="http://schemas.openxmlformats.org/officeDocument/2006/relationships" xmlns:p="http://schemas.openxmlformats.org/presentationml/2006/main">
+<p:sld xmlns:a="http://schemas.openxmlformats.org/drawingml/2006/main" xmlns:p="http://schemas.openxmlformats.org/presentationml/2006/main" xmlns:r="http://schemas.openxmlformats.org/officeDocument/2006/relationships">
   <p:cSld>
     <p:spTree>
       <p:nvGrpSpPr>
@@ -19170,14 +19105,7 @@
         <p:cNvGrpSpPr/>
         <p:nvPr/>
       </p:nvGrpSpPr>
-      <p:grpSpPr>
-        <a:xfrm>
-          <a:off x="0" y="0"/>
-          <a:ext cx="0" cy="0"/>
-          <a:chOff x="0" y="0"/>
-          <a:chExt cx="0" cy="0"/>
-        </a:xfrm>
-      </p:grpSpPr>
+      <p:grpSpPr/>
       <p:sp>
         <p:nvSpPr>
           <p:cNvPr id="2" name="Title 1"/>
@@ -19265,7 +19193,6 @@
           <a:lstStyle/>
           <a:p>
             <a:pPr algn="ctr"/>
-            <a:endParaRPr/>
           </a:p>
         </p:txBody>
       </p:sp>
@@ -19432,27 +19359,9 @@
                 <a:tableStyleId>{5C22544A-7EE6-4342-B048-85BDC9FD1C3A}</a:tableStyleId>
               </a:tblPr>
               <a:tblGrid>
-                <a:gridCol w="1118585">
-                  <a:extLst>
-                    <a:ext uri="{9D8B030D-6E8A-4147-A177-3AD203B41FA5}">
-                      <a16:colId xmlns:a16="http://schemas.microsoft.com/office/drawing/2014/main" val="20000"/>
-                    </a:ext>
-                  </a:extLst>
-                </a:gridCol>
-                <a:gridCol w="4026907">
-                  <a:extLst>
-                    <a:ext uri="{9D8B030D-6E8A-4147-A177-3AD203B41FA5}">
-                      <a16:colId xmlns:a16="http://schemas.microsoft.com/office/drawing/2014/main" val="20001"/>
-                    </a:ext>
-                  </a:extLst>
-                </a:gridCol>
-                <a:gridCol w="6040361">
-                  <a:extLst>
-                    <a:ext uri="{9D8B030D-6E8A-4147-A177-3AD203B41FA5}">
-                      <a16:colId xmlns:a16="http://schemas.microsoft.com/office/drawing/2014/main" val="20002"/>
-                    </a:ext>
-                  </a:extLst>
-                </a:gridCol>
+                <a:gridCol w="1118585"/>
+                <a:gridCol w="4026907"/>
+                <a:gridCol w="6040361"/>
               </a:tblGrid>
               <a:tr h="393700">
                 <a:tc>
@@ -19521,11 +19430,6 @@
                     </a:solidFill>
                   </a:tcPr>
                 </a:tc>
-                <a:extLst>
-                  <a:ext uri="{0D108BD9-81ED-4DB2-BD59-A6C34878D82A}">
-                    <a16:rowId xmlns:a16="http://schemas.microsoft.com/office/drawing/2014/main" val="10000"/>
-                  </a:ext>
-                </a:extLst>
               </a:tr>
               <a:tr h="393700">
                 <a:tc>
@@ -19594,11 +19498,6 @@
                     </a:solidFill>
                   </a:tcPr>
                 </a:tc>
-                <a:extLst>
-                  <a:ext uri="{0D108BD9-81ED-4DB2-BD59-A6C34878D82A}">
-                    <a16:rowId xmlns:a16="http://schemas.microsoft.com/office/drawing/2014/main" val="10001"/>
-                  </a:ext>
-                </a:extLst>
               </a:tr>
               <a:tr h="393700">
                 <a:tc>
@@ -19667,11 +19566,6 @@
                     </a:solidFill>
                   </a:tcPr>
                 </a:tc>
-                <a:extLst>
-                  <a:ext uri="{0D108BD9-81ED-4DB2-BD59-A6C34878D82A}">
-                    <a16:rowId xmlns:a16="http://schemas.microsoft.com/office/drawing/2014/main" val="10002"/>
-                  </a:ext>
-                </a:extLst>
               </a:tr>
               <a:tr h="393700">
                 <a:tc>
@@ -19740,11 +19634,6 @@
                     </a:solidFill>
                   </a:tcPr>
                 </a:tc>
-                <a:extLst>
-                  <a:ext uri="{0D108BD9-81ED-4DB2-BD59-A6C34878D82A}">
-                    <a16:rowId xmlns:a16="http://schemas.microsoft.com/office/drawing/2014/main" val="10003"/>
-                  </a:ext>
-                </a:extLst>
               </a:tr>
               <a:tr h="393700">
                 <a:tc>
@@ -19813,11 +19702,6 @@
                     </a:solidFill>
                   </a:tcPr>
                 </a:tc>
-                <a:extLst>
-                  <a:ext uri="{0D108BD9-81ED-4DB2-BD59-A6C34878D82A}">
-                    <a16:rowId xmlns:a16="http://schemas.microsoft.com/office/drawing/2014/main" val="10004"/>
-                  </a:ext>
-                </a:extLst>
               </a:tr>
               <a:tr h="393700">
                 <a:tc>
@@ -19886,11 +19770,6 @@
                     </a:solidFill>
                   </a:tcPr>
                 </a:tc>
-                <a:extLst>
-                  <a:ext uri="{0D108BD9-81ED-4DB2-BD59-A6C34878D82A}">
-                    <a16:rowId xmlns:a16="http://schemas.microsoft.com/office/drawing/2014/main" val="10005"/>
-                  </a:ext>
-                </a:extLst>
               </a:tr>
               <a:tr h="393700">
                 <a:tc>
@@ -19959,11 +19838,6 @@
                     </a:solidFill>
                   </a:tcPr>
                 </a:tc>
-                <a:extLst>
-                  <a:ext uri="{0D108BD9-81ED-4DB2-BD59-A6C34878D82A}">
-                    <a16:rowId xmlns:a16="http://schemas.microsoft.com/office/drawing/2014/main" val="10006"/>
-                  </a:ext>
-                </a:extLst>
               </a:tr>
               <a:tr h="393700">
                 <a:tc>
@@ -20032,11 +19906,6 @@
                     </a:solidFill>
                   </a:tcPr>
                 </a:tc>
-                <a:extLst>
-                  <a:ext uri="{0D108BD9-81ED-4DB2-BD59-A6C34878D82A}">
-                    <a16:rowId xmlns:a16="http://schemas.microsoft.com/office/drawing/2014/main" val="10007"/>
-                  </a:ext>
-                </a:extLst>
               </a:tr>
             </a:tbl>
           </a:graphicData>
@@ -20083,7 +19952,7 @@
           </a:fontRef>
         </p:style>
         <p:txBody>
-          <a:bodyPr wrap="square" lIns="164592" tIns="73152" rIns="164592" bIns="73152" rtlCol="0" anchor="ctr"/>
+          <a:bodyPr rtlCol="0" anchor="ctr" wrap="square" lIns="164592" rIns="164592" tIns="73152" bIns="73152"/>
           <a:lstStyle/>
           <a:p>
             <a:pPr algn="l"/>
@@ -20117,7 +19986,7 @@
 </file>
 
 <file path=ppt/slides/slide28.xml><?xml version="1.0" encoding="utf-8"?>
-<p:sld xmlns:a="http://schemas.openxmlformats.org/drawingml/2006/main" xmlns:r="http://schemas.openxmlformats.org/officeDocument/2006/relationships" xmlns:p="http://schemas.openxmlformats.org/presentationml/2006/main">
+<p:sld xmlns:a="http://schemas.openxmlformats.org/drawingml/2006/main" xmlns:p="http://schemas.openxmlformats.org/presentationml/2006/main" xmlns:r="http://schemas.openxmlformats.org/officeDocument/2006/relationships">
   <p:cSld>
     <p:spTree>
       <p:nvGrpSpPr>
@@ -20125,14 +19994,7 @@
         <p:cNvGrpSpPr/>
         <p:nvPr/>
       </p:nvGrpSpPr>
-      <p:grpSpPr>
-        <a:xfrm>
-          <a:off x="0" y="0"/>
-          <a:ext cx="0" cy="0"/>
-          <a:chOff x="0" y="0"/>
-          <a:chExt cx="0" cy="0"/>
-        </a:xfrm>
-      </p:grpSpPr>
+      <p:grpSpPr/>
       <p:sp>
         <p:nvSpPr>
           <p:cNvPr id="2" name="Title 1"/>
@@ -20220,7 +20082,6 @@
           <a:lstStyle/>
           <a:p>
             <a:pPr algn="ctr"/>
-            <a:endParaRPr/>
           </a:p>
         </p:txBody>
       </p:sp>
@@ -20429,12 +20290,6 @@
                 <a:latin typeface="Calibri"/>
               </a:defRPr>
             </a:pPr>
-            <a:endParaRPr sz="1900" b="0">
-              <a:solidFill>
-                <a:srgbClr val="222222"/>
-              </a:solidFill>
-              <a:latin typeface="Calibri"/>
-            </a:endParaRPr>
           </a:p>
           <a:p>
             <a:pPr algn="l">
@@ -20551,12 +20406,6 @@
                 <a:latin typeface="Calibri"/>
               </a:defRPr>
             </a:pPr>
-            <a:endParaRPr sz="1900" b="0">
-              <a:solidFill>
-                <a:srgbClr val="222222"/>
-              </a:solidFill>
-              <a:latin typeface="Calibri"/>
-            </a:endParaRPr>
           </a:p>
           <a:p>
             <a:pPr algn="l">
@@ -20651,7 +20500,7 @@
           </a:fontRef>
         </p:style>
         <p:txBody>
-          <a:bodyPr wrap="square" lIns="164592" tIns="73152" rIns="164592" bIns="73152" rtlCol="0" anchor="ctr"/>
+          <a:bodyPr rtlCol="0" anchor="ctr" wrap="square" lIns="164592" rIns="164592" tIns="73152" bIns="73152"/>
           <a:lstStyle/>
           <a:p>
             <a:pPr algn="l"/>
@@ -20685,7 +20534,7 @@
 </file>
 
 <file path=ppt/slides/slide29.xml><?xml version="1.0" encoding="utf-8"?>
-<p:sld xmlns:a="http://schemas.openxmlformats.org/drawingml/2006/main" xmlns:r="http://schemas.openxmlformats.org/officeDocument/2006/relationships" xmlns:p="http://schemas.openxmlformats.org/presentationml/2006/main">
+<p:sld xmlns:a="http://schemas.openxmlformats.org/drawingml/2006/main" xmlns:p="http://schemas.openxmlformats.org/presentationml/2006/main" xmlns:r="http://schemas.openxmlformats.org/officeDocument/2006/relationships">
   <p:cSld>
     <p:spTree>
       <p:nvGrpSpPr>
@@ -20693,14 +20542,7 @@
         <p:cNvGrpSpPr/>
         <p:nvPr/>
       </p:nvGrpSpPr>
-      <p:grpSpPr>
-        <a:xfrm>
-          <a:off x="0" y="0"/>
-          <a:ext cx="0" cy="0"/>
-          <a:chOff x="0" y="0"/>
-          <a:chExt cx="0" cy="0"/>
-        </a:xfrm>
-      </p:grpSpPr>
+      <p:grpSpPr/>
       <p:sp>
         <p:nvSpPr>
           <p:cNvPr id="2" name="TextBox 1"/>
@@ -20838,7 +20680,6 @@
           <a:lstStyle/>
           <a:p>
             <a:pPr algn="ctr"/>
-            <a:endParaRPr/>
           </a:p>
         </p:txBody>
       </p:sp>
@@ -20979,7 +20820,7 @@
           </a:fontRef>
         </p:style>
         <p:txBody>
-          <a:bodyPr wrap="square" lIns="73152" rIns="73152" rtlCol="0" anchor="ctr"/>
+          <a:bodyPr rtlCol="0" anchor="ctr" wrap="square" lIns="73152" rIns="73152"/>
           <a:lstStyle/>
           <a:p>
             <a:pPr algn="ctr">
@@ -21097,7 +20938,7 @@
           </a:fontRef>
         </p:style>
         <p:txBody>
-          <a:bodyPr wrap="square" lIns="73152" rIns="73152" rtlCol="0" anchor="ctr"/>
+          <a:bodyPr rtlCol="0" anchor="ctr" wrap="square" lIns="73152" rIns="73152"/>
           <a:lstStyle/>
           <a:p>
             <a:pPr algn="ctr">
@@ -21215,7 +21056,7 @@
           </a:fontRef>
         </p:style>
         <p:txBody>
-          <a:bodyPr wrap="square" lIns="73152" rIns="73152" rtlCol="0" anchor="ctr"/>
+          <a:bodyPr rtlCol="0" anchor="ctr" wrap="square" lIns="73152" rIns="73152"/>
           <a:lstStyle/>
           <a:p>
             <a:pPr algn="ctr">
@@ -21333,7 +21174,7 @@
           </a:fontRef>
         </p:style>
         <p:txBody>
-          <a:bodyPr wrap="square" lIns="73152" rIns="73152" rtlCol="0" anchor="ctr"/>
+          <a:bodyPr rtlCol="0" anchor="ctr" wrap="square" lIns="73152" rIns="73152"/>
           <a:lstStyle/>
           <a:p>
             <a:pPr algn="ctr">
@@ -21403,7 +21244,7 @@
           </a:fontRef>
         </p:style>
         <p:txBody>
-          <a:bodyPr wrap="square" lIns="73152" rIns="73152" rtlCol="0" anchor="ctr"/>
+          <a:bodyPr rtlCol="0" anchor="ctr" wrap="square" lIns="73152" rIns="73152"/>
           <a:lstStyle/>
           <a:p>
             <a:pPr algn="ctr">
@@ -21441,7 +21282,7 @@
 </file>
 
 <file path=ppt/slides/slide3.xml><?xml version="1.0" encoding="utf-8"?>
-<p:sld xmlns:a="http://schemas.openxmlformats.org/drawingml/2006/main" xmlns:r="http://schemas.openxmlformats.org/officeDocument/2006/relationships" xmlns:p="http://schemas.openxmlformats.org/presentationml/2006/main">
+<p:sld xmlns:a="http://schemas.openxmlformats.org/drawingml/2006/main" xmlns:p="http://schemas.openxmlformats.org/presentationml/2006/main" xmlns:r="http://schemas.openxmlformats.org/officeDocument/2006/relationships">
   <p:cSld>
     <p:spTree>
       <p:nvGrpSpPr>
@@ -21449,14 +21290,7 @@
         <p:cNvGrpSpPr/>
         <p:nvPr/>
       </p:nvGrpSpPr>
-      <p:grpSpPr>
-        <a:xfrm>
-          <a:off x="0" y="0"/>
-          <a:ext cx="0" cy="0"/>
-          <a:chOff x="0" y="0"/>
-          <a:chExt cx="0" cy="0"/>
-        </a:xfrm>
-      </p:grpSpPr>
+      <p:grpSpPr/>
       <p:sp>
         <p:nvSpPr>
           <p:cNvPr id="2" name="Title 1"/>
@@ -21544,7 +21378,6 @@
           <a:lstStyle/>
           <a:p>
             <a:pPr algn="ctr"/>
-            <a:endParaRPr/>
           </a:p>
         </p:txBody>
       </p:sp>
@@ -21833,7 +21666,7 @@
           </a:fontRef>
         </p:style>
         <p:txBody>
-          <a:bodyPr wrap="square" lIns="164592" tIns="73152" rIns="164592" bIns="73152" rtlCol="0" anchor="ctr"/>
+          <a:bodyPr rtlCol="0" anchor="ctr" wrap="square" lIns="164592" rIns="164592" tIns="73152" bIns="73152"/>
           <a:lstStyle/>
           <a:p>
             <a:pPr algn="l"/>
@@ -21867,7 +21700,7 @@
 </file>
 
 <file path=ppt/slides/slide30.xml><?xml version="1.0" encoding="utf-8"?>
-<p:sld xmlns:a="http://schemas.openxmlformats.org/drawingml/2006/main" xmlns:r="http://schemas.openxmlformats.org/officeDocument/2006/relationships" xmlns:p="http://schemas.openxmlformats.org/presentationml/2006/main">
+<p:sld xmlns:a="http://schemas.openxmlformats.org/drawingml/2006/main" xmlns:p="http://schemas.openxmlformats.org/presentationml/2006/main" xmlns:r="http://schemas.openxmlformats.org/officeDocument/2006/relationships">
   <p:cSld>
     <p:spTree>
       <p:nvGrpSpPr>
@@ -21875,14 +21708,7 @@
         <p:cNvGrpSpPr/>
         <p:nvPr/>
       </p:nvGrpSpPr>
-      <p:grpSpPr>
-        <a:xfrm>
-          <a:off x="0" y="0"/>
-          <a:ext cx="0" cy="0"/>
-          <a:chOff x="0" y="0"/>
-          <a:chExt cx="0" cy="0"/>
-        </a:xfrm>
-      </p:grpSpPr>
+      <p:grpSpPr/>
       <p:sp>
         <p:nvSpPr>
           <p:cNvPr id="2" name="Title 1"/>
@@ -21970,7 +21796,6 @@
           <a:lstStyle/>
           <a:p>
             <a:pPr algn="ctr"/>
-            <a:endParaRPr/>
           </a:p>
         </p:txBody>
       </p:sp>
@@ -22111,7 +21936,7 @@
           </a:fontRef>
         </p:style>
         <p:txBody>
-          <a:bodyPr wrap="square" lIns="45720" tIns="18288" rIns="45720" bIns="18288" rtlCol="0" anchor="ctr"/>
+          <a:bodyPr rtlCol="0" anchor="ctr" wrap="square" lIns="45720" rIns="45720" tIns="18288" bIns="18288"/>
           <a:lstStyle/>
           <a:p>
             <a:pPr algn="ctr">
@@ -22252,7 +22077,7 @@
           </a:fontRef>
         </p:style>
         <p:txBody>
-          <a:bodyPr wrap="square" lIns="45720" tIns="18288" rIns="45720" bIns="18288" rtlCol="0" anchor="t"/>
+          <a:bodyPr rtlCol="0" anchor="t" wrap="square" lIns="45720" rIns="45720" tIns="18288" bIns="18288"/>
           <a:lstStyle/>
           <a:p>
             <a:pPr algn="l">
@@ -22384,7 +22209,7 @@
           </a:fontRef>
         </p:style>
         <p:txBody>
-          <a:bodyPr wrap="square" lIns="45720" tIns="18288" rIns="45720" bIns="18288" rtlCol="0" anchor="ctr"/>
+          <a:bodyPr rtlCol="0" anchor="ctr" wrap="square" lIns="45720" rIns="45720" tIns="18288" bIns="18288"/>
           <a:lstStyle/>
           <a:p>
             <a:pPr algn="ctr">
@@ -22525,7 +22350,7 @@
           </a:fontRef>
         </p:style>
         <p:txBody>
-          <a:bodyPr wrap="square" lIns="45720" tIns="18288" rIns="45720" bIns="18288" rtlCol="0" anchor="t"/>
+          <a:bodyPr rtlCol="0" anchor="t" wrap="square" lIns="45720" rIns="45720" tIns="18288" bIns="18288"/>
           <a:lstStyle/>
           <a:p>
             <a:pPr algn="l">
@@ -22682,7 +22507,7 @@
           </a:fontRef>
         </p:style>
         <p:txBody>
-          <a:bodyPr wrap="square" lIns="45720" tIns="18288" rIns="45720" bIns="18288" rtlCol="0" anchor="ctr"/>
+          <a:bodyPr rtlCol="0" anchor="ctr" wrap="square" lIns="45720" rIns="45720" tIns="18288" bIns="18288"/>
           <a:lstStyle/>
           <a:p>
             <a:pPr algn="ctr">
@@ -22823,7 +22648,7 @@
           </a:fontRef>
         </p:style>
         <p:txBody>
-          <a:bodyPr wrap="square" lIns="45720" tIns="18288" rIns="45720" bIns="18288" rtlCol="0" anchor="t"/>
+          <a:bodyPr rtlCol="0" anchor="t" wrap="square" lIns="45720" rIns="45720" tIns="18288" bIns="18288"/>
           <a:lstStyle/>
           <a:p>
             <a:pPr algn="l">
@@ -23016,7 +22841,7 @@
           </a:fontRef>
         </p:style>
         <p:txBody>
-          <a:bodyPr wrap="square" lIns="164592" tIns="73152" rIns="164592" bIns="73152" rtlCol="0" anchor="ctr"/>
+          <a:bodyPr rtlCol="0" anchor="ctr" wrap="square" lIns="164592" rIns="164592" tIns="73152" bIns="73152"/>
           <a:lstStyle/>
           <a:p>
             <a:pPr algn="l"/>
@@ -23050,7 +22875,7 @@
 </file>
 
 <file path=ppt/slides/slide31.xml><?xml version="1.0" encoding="utf-8"?>
-<p:sld xmlns:a="http://schemas.openxmlformats.org/drawingml/2006/main" xmlns:r="http://schemas.openxmlformats.org/officeDocument/2006/relationships" xmlns:p="http://schemas.openxmlformats.org/presentationml/2006/main">
+<p:sld xmlns:a="http://schemas.openxmlformats.org/drawingml/2006/main" xmlns:p="http://schemas.openxmlformats.org/presentationml/2006/main" xmlns:r="http://schemas.openxmlformats.org/officeDocument/2006/relationships">
   <p:cSld>
     <p:spTree>
       <p:nvGrpSpPr>
@@ -23058,14 +22883,7 @@
         <p:cNvGrpSpPr/>
         <p:nvPr/>
       </p:nvGrpSpPr>
-      <p:grpSpPr>
-        <a:xfrm>
-          <a:off x="0" y="0"/>
-          <a:ext cx="0" cy="0"/>
-          <a:chOff x="0" y="0"/>
-          <a:chExt cx="0" cy="0"/>
-        </a:xfrm>
-      </p:grpSpPr>
+      <p:grpSpPr/>
       <p:sp>
         <p:nvSpPr>
           <p:cNvPr id="2" name="Title 1"/>
@@ -23153,7 +22971,6 @@
           <a:lstStyle/>
           <a:p>
             <a:pPr algn="ctr"/>
-            <a:endParaRPr/>
           </a:p>
         </p:txBody>
       </p:sp>
@@ -23362,12 +23179,6 @@
                 <a:latin typeface="Calibri"/>
               </a:defRPr>
             </a:pPr>
-            <a:endParaRPr sz="2000" b="0">
-              <a:solidFill>
-                <a:srgbClr val="222222"/>
-              </a:solidFill>
-              <a:latin typeface="Calibri"/>
-            </a:endParaRPr>
           </a:p>
           <a:p>
             <a:pPr algn="l">
@@ -23409,12 +23220,6 @@
                 <a:latin typeface="Calibri"/>
               </a:defRPr>
             </a:pPr>
-            <a:endParaRPr sz="2000" b="0">
-              <a:solidFill>
-                <a:srgbClr val="222222"/>
-              </a:solidFill>
-              <a:latin typeface="Calibri"/>
-            </a:endParaRPr>
           </a:p>
           <a:p>
             <a:pPr algn="l">
@@ -23552,7 +23357,7 @@
 </file>
 
 <file path=ppt/slides/slide32.xml><?xml version="1.0" encoding="utf-8"?>
-<p:sld xmlns:a="http://schemas.openxmlformats.org/drawingml/2006/main" xmlns:r="http://schemas.openxmlformats.org/officeDocument/2006/relationships" xmlns:p="http://schemas.openxmlformats.org/presentationml/2006/main">
+<p:sld xmlns:a="http://schemas.openxmlformats.org/drawingml/2006/main" xmlns:p="http://schemas.openxmlformats.org/presentationml/2006/main" xmlns:r="http://schemas.openxmlformats.org/officeDocument/2006/relationships">
   <p:cSld>
     <p:spTree>
       <p:nvGrpSpPr>
@@ -23560,14 +23365,7 @@
         <p:cNvGrpSpPr/>
         <p:nvPr/>
       </p:nvGrpSpPr>
-      <p:grpSpPr>
-        <a:xfrm>
-          <a:off x="0" y="0"/>
-          <a:ext cx="0" cy="0"/>
-          <a:chOff x="0" y="0"/>
-          <a:chExt cx="0" cy="0"/>
-        </a:xfrm>
-      </p:grpSpPr>
+      <p:grpSpPr/>
       <p:sp>
         <p:nvSpPr>
           <p:cNvPr id="2" name="Title 1"/>
@@ -23655,7 +23453,6 @@
           <a:lstStyle/>
           <a:p>
             <a:pPr algn="ctr"/>
-            <a:endParaRPr/>
           </a:p>
         </p:txBody>
       </p:sp>
@@ -23812,7 +23609,7 @@
           <p:nvPr/>
         </p:nvPicPr>
         <p:blipFill>
-          <a:blip r:embed="rId3"/>
+          <a:blip r:embed="rId2"/>
           <a:stretch>
             <a:fillRect/>
           </a:stretch>
@@ -23836,7 +23633,7 @@
           <p:nvPr/>
         </p:nvPicPr>
         <p:blipFill>
-          <a:blip r:embed="rId4"/>
+          <a:blip r:embed="rId3"/>
           <a:stretch>
             <a:fillRect/>
           </a:stretch>
@@ -23988,7 +23785,7 @@
           </a:fontRef>
         </p:style>
         <p:txBody>
-          <a:bodyPr wrap="square" lIns="164592" tIns="73152" rIns="164592" bIns="73152" rtlCol="0" anchor="ctr"/>
+          <a:bodyPr rtlCol="0" anchor="ctr" wrap="square" lIns="164592" rIns="164592" tIns="73152" bIns="73152"/>
           <a:lstStyle/>
           <a:p>
             <a:pPr algn="l"/>
@@ -24022,7 +23819,7 @@
 </file>
 
 <file path=ppt/slides/slide33.xml><?xml version="1.0" encoding="utf-8"?>
-<p:sld xmlns:a="http://schemas.openxmlformats.org/drawingml/2006/main" xmlns:r="http://schemas.openxmlformats.org/officeDocument/2006/relationships" xmlns:p="http://schemas.openxmlformats.org/presentationml/2006/main">
+<p:sld xmlns:a="http://schemas.openxmlformats.org/drawingml/2006/main" xmlns:p="http://schemas.openxmlformats.org/presentationml/2006/main" xmlns:r="http://schemas.openxmlformats.org/officeDocument/2006/relationships">
   <p:cSld>
     <p:spTree>
       <p:nvGrpSpPr>
@@ -24030,14 +23827,7 @@
         <p:cNvGrpSpPr/>
         <p:nvPr/>
       </p:nvGrpSpPr>
-      <p:grpSpPr>
-        <a:xfrm>
-          <a:off x="0" y="0"/>
-          <a:ext cx="0" cy="0"/>
-          <a:chOff x="0" y="0"/>
-          <a:chExt cx="0" cy="0"/>
-        </a:xfrm>
-      </p:grpSpPr>
+      <p:grpSpPr/>
       <p:sp>
         <p:nvSpPr>
           <p:cNvPr id="2" name="Title 1"/>
@@ -24125,7 +23915,6 @@
           <a:lstStyle/>
           <a:p>
             <a:pPr algn="ctr"/>
-            <a:endParaRPr/>
           </a:p>
         </p:txBody>
       </p:sp>
@@ -24650,9 +24439,7 @@
         <p:txBody>
           <a:bodyPr rtlCol="0" anchor="ctr"/>
           <a:lstStyle/>
-          <a:p>
-            <a:endParaRPr/>
-          </a:p>
+          <a:p/>
         </p:txBody>
       </p:sp>
       <p:cxnSp>
@@ -25349,7 +25136,7 @@
           </a:fontRef>
         </p:style>
         <p:txBody>
-          <a:bodyPr wrap="square" lIns="45720" tIns="18288" rIns="45720" bIns="18288" rtlCol="0" anchor="ctr"/>
+          <a:bodyPr rtlCol="0" anchor="ctr" wrap="square" lIns="45720" rIns="45720" tIns="18288" bIns="18288"/>
           <a:lstStyle/>
           <a:p>
             <a:pPr algn="l">
@@ -25391,12 +25178,6 @@
                 <a:latin typeface="Consolas"/>
               </a:defRPr>
             </a:pPr>
-            <a:endParaRPr sz="1400" b="0">
-              <a:solidFill>
-                <a:srgbClr val="222222"/>
-              </a:solidFill>
-              <a:latin typeface="Consolas"/>
-            </a:endParaRPr>
           </a:p>
           <a:p>
             <a:pPr algn="l">
@@ -25511,12 +25292,6 @@
                 <a:latin typeface="Calibri"/>
               </a:defRPr>
             </a:pPr>
-            <a:endParaRPr sz="1800" b="0">
-              <a:solidFill>
-                <a:srgbClr val="222222"/>
-              </a:solidFill>
-              <a:latin typeface="Calibri"/>
-            </a:endParaRPr>
           </a:p>
           <a:p>
             <a:pPr algn="l">
@@ -25558,12 +25333,6 @@
                 <a:latin typeface="Calibri"/>
               </a:defRPr>
             </a:pPr>
-            <a:endParaRPr sz="1800" b="0">
-              <a:solidFill>
-                <a:srgbClr val="222222"/>
-              </a:solidFill>
-              <a:latin typeface="Calibri"/>
-            </a:endParaRPr>
           </a:p>
           <a:p>
             <a:pPr algn="l">
@@ -25633,7 +25402,7 @@
           </a:fontRef>
         </p:style>
         <p:txBody>
-          <a:bodyPr wrap="square" lIns="164592" tIns="73152" rIns="164592" bIns="73152" rtlCol="0" anchor="ctr"/>
+          <a:bodyPr rtlCol="0" anchor="ctr" wrap="square" lIns="164592" rIns="164592" tIns="73152" bIns="73152"/>
           <a:lstStyle/>
           <a:p>
             <a:pPr algn="l"/>
@@ -25667,7 +25436,7 @@
 </file>
 
 <file path=ppt/slides/slide34.xml><?xml version="1.0" encoding="utf-8"?>
-<p:sld xmlns:a="http://schemas.openxmlformats.org/drawingml/2006/main" xmlns:r="http://schemas.openxmlformats.org/officeDocument/2006/relationships" xmlns:p="http://schemas.openxmlformats.org/presentationml/2006/main">
+<p:sld xmlns:a="http://schemas.openxmlformats.org/drawingml/2006/main" xmlns:p="http://schemas.openxmlformats.org/presentationml/2006/main" xmlns:r="http://schemas.openxmlformats.org/officeDocument/2006/relationships">
   <p:cSld>
     <p:spTree>
       <p:nvGrpSpPr>
@@ -25675,14 +25444,7 @@
         <p:cNvGrpSpPr/>
         <p:nvPr/>
       </p:nvGrpSpPr>
-      <p:grpSpPr>
-        <a:xfrm>
-          <a:off x="0" y="0"/>
-          <a:ext cx="0" cy="0"/>
-          <a:chOff x="0" y="0"/>
-          <a:chExt cx="0" cy="0"/>
-        </a:xfrm>
-      </p:grpSpPr>
+      <p:grpSpPr/>
       <p:sp>
         <p:nvSpPr>
           <p:cNvPr id="2" name="Title 1"/>
@@ -25770,7 +25532,6 @@
           <a:lstStyle/>
           <a:p>
             <a:pPr algn="ctr"/>
-            <a:endParaRPr/>
           </a:p>
         </p:txBody>
       </p:sp>
@@ -25927,7 +25688,7 @@
           <p:nvPr/>
         </p:nvPicPr>
         <p:blipFill>
-          <a:blip r:embed="rId3"/>
+          <a:blip r:embed="rId2"/>
           <a:stretch>
             <a:fillRect/>
           </a:stretch>
@@ -25951,7 +25712,7 @@
           <p:nvPr/>
         </p:nvPicPr>
         <p:blipFill>
-          <a:blip r:embed="rId4"/>
+          <a:blip r:embed="rId3"/>
           <a:stretch>
             <a:fillRect/>
           </a:stretch>
@@ -26103,7 +25864,7 @@
           </a:fontRef>
         </p:style>
         <p:txBody>
-          <a:bodyPr wrap="square" lIns="164592" tIns="73152" rIns="164592" bIns="73152" rtlCol="0" anchor="ctr"/>
+          <a:bodyPr rtlCol="0" anchor="ctr" wrap="square" lIns="164592" rIns="164592" tIns="73152" bIns="73152"/>
           <a:lstStyle/>
           <a:p>
             <a:pPr algn="l"/>
@@ -26137,7 +25898,7 @@
 </file>
 
 <file path=ppt/slides/slide35.xml><?xml version="1.0" encoding="utf-8"?>
-<p:sld xmlns:a="http://schemas.openxmlformats.org/drawingml/2006/main" xmlns:r="http://schemas.openxmlformats.org/officeDocument/2006/relationships" xmlns:p="http://schemas.openxmlformats.org/presentationml/2006/main">
+<p:sld xmlns:a="http://schemas.openxmlformats.org/drawingml/2006/main" xmlns:p="http://schemas.openxmlformats.org/presentationml/2006/main" xmlns:r="http://schemas.openxmlformats.org/officeDocument/2006/relationships">
   <p:cSld>
     <p:spTree>
       <p:nvGrpSpPr>
@@ -26145,14 +25906,7 @@
         <p:cNvGrpSpPr/>
         <p:nvPr/>
       </p:nvGrpSpPr>
-      <p:grpSpPr>
-        <a:xfrm>
-          <a:off x="0" y="0"/>
-          <a:ext cx="0" cy="0"/>
-          <a:chOff x="0" y="0"/>
-          <a:chExt cx="0" cy="0"/>
-        </a:xfrm>
-      </p:grpSpPr>
+      <p:grpSpPr/>
       <p:sp>
         <p:nvSpPr>
           <p:cNvPr id="2" name="Title 1"/>
@@ -26240,7 +25994,6 @@
           <a:lstStyle/>
           <a:p>
             <a:pPr algn="ctr"/>
-            <a:endParaRPr/>
           </a:p>
         </p:txBody>
       </p:sp>
@@ -26401,12 +26154,6 @@
                 <a:latin typeface="Calibri"/>
               </a:defRPr>
             </a:pPr>
-            <a:endParaRPr sz="2000" b="0">
-              <a:solidFill>
-                <a:srgbClr val="222222"/>
-              </a:solidFill>
-              <a:latin typeface="Calibri"/>
-            </a:endParaRPr>
           </a:p>
           <a:p>
             <a:pPr algn="l">
@@ -26498,12 +26245,6 @@
                 <a:latin typeface="Calibri"/>
               </a:defRPr>
             </a:pPr>
-            <a:endParaRPr sz="2000" b="0">
-              <a:solidFill>
-                <a:srgbClr val="222222"/>
-              </a:solidFill>
-              <a:latin typeface="Calibri"/>
-            </a:endParaRPr>
           </a:p>
           <a:p>
             <a:pPr algn="l">
@@ -26572,7 +26313,7 @@
           </a:fontRef>
         </p:style>
         <p:txBody>
-          <a:bodyPr wrap="square" lIns="164592" tIns="109728" rIns="164592" bIns="109728" rtlCol="0" anchor="ctr"/>
+          <a:bodyPr rtlCol="0" anchor="ctr" wrap="square" lIns="164592" rIns="164592" tIns="109728" bIns="109728"/>
           <a:lstStyle/>
           <a:p>
             <a:pPr algn="ctr">
@@ -26740,7 +26481,7 @@
           </a:fontRef>
         </p:style>
         <p:txBody>
-          <a:bodyPr wrap="square" lIns="164592" tIns="73152" rIns="164592" bIns="73152" rtlCol="0" anchor="ctr"/>
+          <a:bodyPr rtlCol="0" anchor="ctr" wrap="square" lIns="164592" rIns="164592" tIns="73152" bIns="73152"/>
           <a:lstStyle/>
           <a:p>
             <a:pPr algn="l"/>
@@ -26774,7 +26515,7 @@
 </file>
 
 <file path=ppt/slides/slide36.xml><?xml version="1.0" encoding="utf-8"?>
-<p:sld xmlns:a="http://schemas.openxmlformats.org/drawingml/2006/main" xmlns:r="http://schemas.openxmlformats.org/officeDocument/2006/relationships" xmlns:p="http://schemas.openxmlformats.org/presentationml/2006/main">
+<p:sld xmlns:a="http://schemas.openxmlformats.org/drawingml/2006/main" xmlns:p="http://schemas.openxmlformats.org/presentationml/2006/main" xmlns:r="http://schemas.openxmlformats.org/officeDocument/2006/relationships">
   <p:cSld>
     <p:spTree>
       <p:nvGrpSpPr>
@@ -26782,14 +26523,7 @@
         <p:cNvGrpSpPr/>
         <p:nvPr/>
       </p:nvGrpSpPr>
-      <p:grpSpPr>
-        <a:xfrm>
-          <a:off x="0" y="0"/>
-          <a:ext cx="0" cy="0"/>
-          <a:chOff x="0" y="0"/>
-          <a:chExt cx="0" cy="0"/>
-        </a:xfrm>
-      </p:grpSpPr>
+      <p:grpSpPr/>
       <p:sp>
         <p:nvSpPr>
           <p:cNvPr id="2" name="Title 1"/>
@@ -26877,7 +26611,6 @@
           <a:lstStyle/>
           <a:p>
             <a:pPr algn="ctr"/>
-            <a:endParaRPr/>
           </a:p>
         </p:txBody>
       </p:sp>
@@ -27066,7 +26799,7 @@
           </a:fontRef>
         </p:style>
         <p:txBody>
-          <a:bodyPr wrap="square" lIns="146304" tIns="91440" bIns="73152" rtlCol="0" anchor="t"/>
+          <a:bodyPr rtlCol="0" anchor="t" wrap="square" lIns="146304" tIns="91440" bIns="73152"/>
           <a:lstStyle/>
           <a:p>
             <a:pPr algn="l">
@@ -27510,7 +27243,7 @@
 </file>
 
 <file path=ppt/slides/slide37.xml><?xml version="1.0" encoding="utf-8"?>
-<p:sld xmlns:a="http://schemas.openxmlformats.org/drawingml/2006/main" xmlns:r="http://schemas.openxmlformats.org/officeDocument/2006/relationships" xmlns:p="http://schemas.openxmlformats.org/presentationml/2006/main">
+<p:sld xmlns:a="http://schemas.openxmlformats.org/drawingml/2006/main" xmlns:p="http://schemas.openxmlformats.org/presentationml/2006/main" xmlns:r="http://schemas.openxmlformats.org/officeDocument/2006/relationships">
   <p:cSld>
     <p:spTree>
       <p:nvGrpSpPr>
@@ -27518,14 +27251,7 @@
         <p:cNvGrpSpPr/>
         <p:nvPr/>
       </p:nvGrpSpPr>
-      <p:grpSpPr>
-        <a:xfrm>
-          <a:off x="0" y="0"/>
-          <a:ext cx="0" cy="0"/>
-          <a:chOff x="0" y="0"/>
-          <a:chExt cx="0" cy="0"/>
-        </a:xfrm>
-      </p:grpSpPr>
+      <p:grpSpPr/>
       <p:sp>
         <p:nvSpPr>
           <p:cNvPr id="2" name="Title 1"/>
@@ -27613,7 +27339,6 @@
           <a:lstStyle/>
           <a:p>
             <a:pPr algn="ctr"/>
-            <a:endParaRPr/>
           </a:p>
         </p:txBody>
       </p:sp>
@@ -27752,7 +27477,7 @@
           </a:fontRef>
         </p:style>
         <p:txBody>
-          <a:bodyPr wrap="square" lIns="182880" rtlCol="0" anchor="ctr"/>
+          <a:bodyPr rtlCol="0" anchor="ctr" wrap="square" lIns="182880"/>
           <a:lstStyle/>
           <a:p>
             <a:pPr algn="l"/>
@@ -27922,12 +27647,6 @@
                 <a:latin typeface="Calibri"/>
               </a:defRPr>
             </a:pPr>
-            <a:endParaRPr sz="1900" b="0">
-              <a:solidFill>
-                <a:srgbClr val="222222"/>
-              </a:solidFill>
-              <a:latin typeface="Calibri"/>
-            </a:endParaRPr>
           </a:p>
           <a:p>
             <a:pPr algn="l">
@@ -28282,7 +28001,7 @@
 </file>
 
 <file path=ppt/slides/slide38.xml><?xml version="1.0" encoding="utf-8"?>
-<p:sld xmlns:a="http://schemas.openxmlformats.org/drawingml/2006/main" xmlns:r="http://schemas.openxmlformats.org/officeDocument/2006/relationships" xmlns:p="http://schemas.openxmlformats.org/presentationml/2006/main">
+<p:sld xmlns:a="http://schemas.openxmlformats.org/drawingml/2006/main" xmlns:p="http://schemas.openxmlformats.org/presentationml/2006/main" xmlns:r="http://schemas.openxmlformats.org/officeDocument/2006/relationships">
   <p:cSld>
     <p:spTree>
       <p:nvGrpSpPr>
@@ -28290,14 +28009,7 @@
         <p:cNvGrpSpPr/>
         <p:nvPr/>
       </p:nvGrpSpPr>
-      <p:grpSpPr>
-        <a:xfrm>
-          <a:off x="0" y="0"/>
-          <a:ext cx="0" cy="0"/>
-          <a:chOff x="0" y="0"/>
-          <a:chExt cx="0" cy="0"/>
-        </a:xfrm>
-      </p:grpSpPr>
+      <p:grpSpPr/>
       <p:sp>
         <p:nvSpPr>
           <p:cNvPr id="2" name="TextBox 1"/>
@@ -28435,7 +28147,6 @@
           <a:lstStyle/>
           <a:p>
             <a:pPr algn="ctr"/>
-            <a:endParaRPr/>
           </a:p>
         </p:txBody>
       </p:sp>
@@ -28576,7 +28287,7 @@
           </a:fontRef>
         </p:style>
         <p:txBody>
-          <a:bodyPr wrap="square" lIns="73152" rIns="73152" rtlCol="0" anchor="ctr"/>
+          <a:bodyPr rtlCol="0" anchor="ctr" wrap="square" lIns="73152" rIns="73152"/>
           <a:lstStyle/>
           <a:p>
             <a:pPr algn="ctr">
@@ -28694,7 +28405,7 @@
           </a:fontRef>
         </p:style>
         <p:txBody>
-          <a:bodyPr wrap="square" lIns="73152" rIns="73152" rtlCol="0" anchor="ctr"/>
+          <a:bodyPr rtlCol="0" anchor="ctr" wrap="square" lIns="73152" rIns="73152"/>
           <a:lstStyle/>
           <a:p>
             <a:pPr algn="ctr">
@@ -28812,7 +28523,7 @@
           </a:fontRef>
         </p:style>
         <p:txBody>
-          <a:bodyPr wrap="square" lIns="73152" rIns="73152" rtlCol="0" anchor="ctr"/>
+          <a:bodyPr rtlCol="0" anchor="ctr" wrap="square" lIns="73152" rIns="73152"/>
           <a:lstStyle/>
           <a:p>
             <a:pPr algn="ctr">
@@ -28930,7 +28641,7 @@
           </a:fontRef>
         </p:style>
         <p:txBody>
-          <a:bodyPr wrap="square" lIns="73152" rIns="73152" rtlCol="0" anchor="ctr"/>
+          <a:bodyPr rtlCol="0" anchor="ctr" wrap="square" lIns="73152" rIns="73152"/>
           <a:lstStyle/>
           <a:p>
             <a:pPr algn="ctr">
@@ -29048,7 +28759,7 @@
           </a:fontRef>
         </p:style>
         <p:txBody>
-          <a:bodyPr wrap="square" lIns="73152" rIns="73152" rtlCol="0" anchor="ctr"/>
+          <a:bodyPr rtlCol="0" anchor="ctr" wrap="square" lIns="73152" rIns="73152"/>
           <a:lstStyle/>
           <a:p>
             <a:pPr algn="ctr">
@@ -29086,7 +28797,7 @@
 </file>
 
 <file path=ppt/slides/slide39.xml><?xml version="1.0" encoding="utf-8"?>
-<p:sld xmlns:a="http://schemas.openxmlformats.org/drawingml/2006/main" xmlns:r="http://schemas.openxmlformats.org/officeDocument/2006/relationships" xmlns:p="http://schemas.openxmlformats.org/presentationml/2006/main">
+<p:sld xmlns:a="http://schemas.openxmlformats.org/drawingml/2006/main" xmlns:p="http://schemas.openxmlformats.org/presentationml/2006/main" xmlns:r="http://schemas.openxmlformats.org/officeDocument/2006/relationships">
   <p:cSld>
     <p:spTree>
       <p:nvGrpSpPr>
@@ -29094,14 +28805,7 @@
         <p:cNvGrpSpPr/>
         <p:nvPr/>
       </p:nvGrpSpPr>
-      <p:grpSpPr>
-        <a:xfrm>
-          <a:off x="0" y="0"/>
-          <a:ext cx="0" cy="0"/>
-          <a:chOff x="0" y="0"/>
-          <a:chExt cx="0" cy="0"/>
-        </a:xfrm>
-      </p:grpSpPr>
+      <p:grpSpPr/>
       <p:sp>
         <p:nvSpPr>
           <p:cNvPr id="2" name="Title 1"/>
@@ -29189,7 +28893,6 @@
           <a:lstStyle/>
           <a:p>
             <a:pPr algn="ctr"/>
-            <a:endParaRPr/>
           </a:p>
         </p:txBody>
       </p:sp>
@@ -29425,12 +29128,6 @@
                 <a:latin typeface="Calibri"/>
               </a:defRPr>
             </a:pPr>
-            <a:endParaRPr sz="1800" b="0">
-              <a:solidFill>
-                <a:srgbClr val="222222"/>
-              </a:solidFill>
-              <a:latin typeface="Calibri"/>
-            </a:endParaRPr>
           </a:p>
           <a:p>
             <a:pPr algn="l">
@@ -29497,12 +29194,6 @@
                 <a:latin typeface="Calibri"/>
               </a:defRPr>
             </a:pPr>
-            <a:endParaRPr sz="1800" b="0">
-              <a:solidFill>
-                <a:srgbClr val="222222"/>
-              </a:solidFill>
-              <a:latin typeface="Calibri"/>
-            </a:endParaRPr>
           </a:p>
           <a:p>
             <a:pPr algn="l">
@@ -29572,7 +29263,7 @@
           </a:fontRef>
         </p:style>
         <p:txBody>
-          <a:bodyPr wrap="square" lIns="164592" tIns="73152" rIns="164592" bIns="73152" rtlCol="0" anchor="ctr"/>
+          <a:bodyPr rtlCol="0" anchor="ctr" wrap="square" lIns="164592" rIns="164592" tIns="73152" bIns="73152"/>
           <a:lstStyle/>
           <a:p>
             <a:pPr algn="l"/>
@@ -29606,7 +29297,7 @@
 </file>
 
 <file path=ppt/slides/slide4.xml><?xml version="1.0" encoding="utf-8"?>
-<p:sld xmlns:a="http://schemas.openxmlformats.org/drawingml/2006/main" xmlns:r="http://schemas.openxmlformats.org/officeDocument/2006/relationships" xmlns:p="http://schemas.openxmlformats.org/presentationml/2006/main">
+<p:sld xmlns:a="http://schemas.openxmlformats.org/drawingml/2006/main" xmlns:p="http://schemas.openxmlformats.org/presentationml/2006/main" xmlns:r="http://schemas.openxmlformats.org/officeDocument/2006/relationships">
   <p:cSld>
     <p:spTree>
       <p:nvGrpSpPr>
@@ -29614,14 +29305,7 @@
         <p:cNvGrpSpPr/>
         <p:nvPr/>
       </p:nvGrpSpPr>
-      <p:grpSpPr>
-        <a:xfrm>
-          <a:off x="0" y="0"/>
-          <a:ext cx="0" cy="0"/>
-          <a:chOff x="0" y="0"/>
-          <a:chExt cx="0" cy="0"/>
-        </a:xfrm>
-      </p:grpSpPr>
+      <p:grpSpPr/>
       <p:sp>
         <p:nvSpPr>
           <p:cNvPr id="2" name="Title 1"/>
@@ -29709,7 +29393,6 @@
           <a:lstStyle/>
           <a:p>
             <a:pPr algn="ctr"/>
-            <a:endParaRPr/>
           </a:p>
         </p:txBody>
       </p:sp>
@@ -29828,27 +29511,9 @@
                 <a:tableStyleId>{5C22544A-7EE6-4342-B048-85BDC9FD1C3A}</a:tableStyleId>
               </a:tblPr>
               <a:tblGrid>
-                <a:gridCol w="1092200">
-                  <a:extLst>
-                    <a:ext uri="{9D8B030D-6E8A-4147-A177-3AD203B41FA5}">
-                      <a16:colId xmlns:a16="http://schemas.microsoft.com/office/drawing/2014/main" val="20000"/>
-                    </a:ext>
-                  </a:extLst>
-                </a:gridCol>
-                <a:gridCol w="4056220">
-                  <a:extLst>
-                    <a:ext uri="{9D8B030D-6E8A-4147-A177-3AD203B41FA5}">
-                      <a16:colId xmlns:a16="http://schemas.microsoft.com/office/drawing/2014/main" val="20001"/>
-                    </a:ext>
-                  </a:extLst>
-                </a:gridCol>
-                <a:gridCol w="6037434">
-                  <a:extLst>
-                    <a:ext uri="{9D8B030D-6E8A-4147-A177-3AD203B41FA5}">
-                      <a16:colId xmlns:a16="http://schemas.microsoft.com/office/drawing/2014/main" val="20002"/>
-                    </a:ext>
-                  </a:extLst>
-                </a:gridCol>
+                <a:gridCol w="1092200"/>
+                <a:gridCol w="4056220"/>
+                <a:gridCol w="6037434"/>
               </a:tblGrid>
               <a:tr h="647700">
                 <a:tc>
@@ -29917,11 +29582,6 @@
                     </a:solidFill>
                   </a:tcPr>
                 </a:tc>
-                <a:extLst>
-                  <a:ext uri="{0D108BD9-81ED-4DB2-BD59-A6C34878D82A}">
-                    <a16:rowId xmlns:a16="http://schemas.microsoft.com/office/drawing/2014/main" val="10000"/>
-                  </a:ext>
-                </a:extLst>
               </a:tr>
               <a:tr h="647700">
                 <a:tc>
@@ -29990,11 +29650,6 @@
                     </a:solidFill>
                   </a:tcPr>
                 </a:tc>
-                <a:extLst>
-                  <a:ext uri="{0D108BD9-81ED-4DB2-BD59-A6C34878D82A}">
-                    <a16:rowId xmlns:a16="http://schemas.microsoft.com/office/drawing/2014/main" val="10001"/>
-                  </a:ext>
-                </a:extLst>
               </a:tr>
               <a:tr h="647700">
                 <a:tc>
@@ -30063,11 +29718,6 @@
                     </a:solidFill>
                   </a:tcPr>
                 </a:tc>
-                <a:extLst>
-                  <a:ext uri="{0D108BD9-81ED-4DB2-BD59-A6C34878D82A}">
-                    <a16:rowId xmlns:a16="http://schemas.microsoft.com/office/drawing/2014/main" val="10002"/>
-                  </a:ext>
-                </a:extLst>
               </a:tr>
               <a:tr h="647700">
                 <a:tc>
@@ -30136,11 +29786,6 @@
                     </a:solidFill>
                   </a:tcPr>
                 </a:tc>
-                <a:extLst>
-                  <a:ext uri="{0D108BD9-81ED-4DB2-BD59-A6C34878D82A}">
-                    <a16:rowId xmlns:a16="http://schemas.microsoft.com/office/drawing/2014/main" val="10003"/>
-                  </a:ext>
-                </a:extLst>
               </a:tr>
               <a:tr h="647700">
                 <a:tc>
@@ -30209,11 +29854,6 @@
                     </a:solidFill>
                   </a:tcPr>
                 </a:tc>
-                <a:extLst>
-                  <a:ext uri="{0D108BD9-81ED-4DB2-BD59-A6C34878D82A}">
-                    <a16:rowId xmlns:a16="http://schemas.microsoft.com/office/drawing/2014/main" val="10004"/>
-                  </a:ext>
-                </a:extLst>
               </a:tr>
               <a:tr h="647700">
                 <a:tc>
@@ -30282,11 +29922,6 @@
                     </a:solidFill>
                   </a:tcPr>
                 </a:tc>
-                <a:extLst>
-                  <a:ext uri="{0D108BD9-81ED-4DB2-BD59-A6C34878D82A}">
-                    <a16:rowId xmlns:a16="http://schemas.microsoft.com/office/drawing/2014/main" val="10005"/>
-                  </a:ext>
-                </a:extLst>
               </a:tr>
             </a:tbl>
           </a:graphicData>
@@ -30333,7 +29968,7 @@
           </a:fontRef>
         </p:style>
         <p:txBody>
-          <a:bodyPr wrap="square" lIns="164592" tIns="73152" rIns="164592" bIns="73152" rtlCol="0" anchor="ctr"/>
+          <a:bodyPr rtlCol="0" anchor="ctr" wrap="square" lIns="164592" rIns="164592" tIns="73152" bIns="73152"/>
           <a:lstStyle/>
           <a:p>
             <a:pPr algn="l"/>
@@ -30367,7 +30002,7 @@
 </file>
 
 <file path=ppt/slides/slide40.xml><?xml version="1.0" encoding="utf-8"?>
-<p:sld xmlns:a="http://schemas.openxmlformats.org/drawingml/2006/main" xmlns:r="http://schemas.openxmlformats.org/officeDocument/2006/relationships" xmlns:p="http://schemas.openxmlformats.org/presentationml/2006/main">
+<p:sld xmlns:a="http://schemas.openxmlformats.org/drawingml/2006/main" xmlns:p="http://schemas.openxmlformats.org/presentationml/2006/main" xmlns:r="http://schemas.openxmlformats.org/officeDocument/2006/relationships">
   <p:cSld>
     <p:spTree>
       <p:nvGrpSpPr>
@@ -30375,14 +30010,7 @@
         <p:cNvGrpSpPr/>
         <p:nvPr/>
       </p:nvGrpSpPr>
-      <p:grpSpPr>
-        <a:xfrm>
-          <a:off x="0" y="0"/>
-          <a:ext cx="0" cy="0"/>
-          <a:chOff x="0" y="0"/>
-          <a:chExt cx="0" cy="0"/>
-        </a:xfrm>
-      </p:grpSpPr>
+      <p:grpSpPr/>
       <p:sp>
         <p:nvSpPr>
           <p:cNvPr id="2" name="Title 1"/>
@@ -30470,7 +30098,6 @@
           <a:lstStyle/>
           <a:p>
             <a:pPr algn="ctr"/>
-            <a:endParaRPr/>
           </a:p>
         </p:txBody>
       </p:sp>
@@ -30589,34 +30216,10 @@
                 <a:tableStyleId>{5C22544A-7EE6-4342-B048-85BDC9FD1C3A}</a:tableStyleId>
               </a:tblPr>
               <a:tblGrid>
-                <a:gridCol w="1864309">
-                  <a:extLst>
-                    <a:ext uri="{9D8B030D-6E8A-4147-A177-3AD203B41FA5}">
-                      <a16:colId xmlns:a16="http://schemas.microsoft.com/office/drawing/2014/main" val="20000"/>
-                    </a:ext>
-                  </a:extLst>
-                </a:gridCol>
-                <a:gridCol w="3107181">
-                  <a:extLst>
-                    <a:ext uri="{9D8B030D-6E8A-4147-A177-3AD203B41FA5}">
-                      <a16:colId xmlns:a16="http://schemas.microsoft.com/office/drawing/2014/main" val="20001"/>
-                    </a:ext>
-                  </a:extLst>
-                </a:gridCol>
-                <a:gridCol w="3107181">
-                  <a:extLst>
-                    <a:ext uri="{9D8B030D-6E8A-4147-A177-3AD203B41FA5}">
-                      <a16:colId xmlns:a16="http://schemas.microsoft.com/office/drawing/2014/main" val="20002"/>
-                    </a:ext>
-                  </a:extLst>
-                </a:gridCol>
-                <a:gridCol w="3107181">
-                  <a:extLst>
-                    <a:ext uri="{9D8B030D-6E8A-4147-A177-3AD203B41FA5}">
-                      <a16:colId xmlns:a16="http://schemas.microsoft.com/office/drawing/2014/main" val="20003"/>
-                    </a:ext>
-                  </a:extLst>
-                </a:gridCol>
+                <a:gridCol w="1864309"/>
+                <a:gridCol w="3107181"/>
+                <a:gridCol w="3107181"/>
+                <a:gridCol w="3107181"/>
               </a:tblGrid>
               <a:tr h="645054">
                 <a:tc>
@@ -30707,11 +30310,6 @@
                     </a:solidFill>
                   </a:tcPr>
                 </a:tc>
-                <a:extLst>
-                  <a:ext uri="{0D108BD9-81ED-4DB2-BD59-A6C34878D82A}">
-                    <a16:rowId xmlns:a16="http://schemas.microsoft.com/office/drawing/2014/main" val="10000"/>
-                  </a:ext>
-                </a:extLst>
               </a:tr>
               <a:tr h="645054">
                 <a:tc>
@@ -30802,11 +30400,6 @@
                     </a:solidFill>
                   </a:tcPr>
                 </a:tc>
-                <a:extLst>
-                  <a:ext uri="{0D108BD9-81ED-4DB2-BD59-A6C34878D82A}">
-                    <a16:rowId xmlns:a16="http://schemas.microsoft.com/office/drawing/2014/main" val="10001"/>
-                  </a:ext>
-                </a:extLst>
               </a:tr>
               <a:tr h="645054">
                 <a:tc>
@@ -30897,11 +30490,6 @@
                     </a:solidFill>
                   </a:tcPr>
                 </a:tc>
-                <a:extLst>
-                  <a:ext uri="{0D108BD9-81ED-4DB2-BD59-A6C34878D82A}">
-                    <a16:rowId xmlns:a16="http://schemas.microsoft.com/office/drawing/2014/main" val="10002"/>
-                  </a:ext>
-                </a:extLst>
               </a:tr>
               <a:tr h="645054">
                 <a:tc>
@@ -30992,11 +30580,6 @@
                     </a:solidFill>
                   </a:tcPr>
                 </a:tc>
-                <a:extLst>
-                  <a:ext uri="{0D108BD9-81ED-4DB2-BD59-A6C34878D82A}">
-                    <a16:rowId xmlns:a16="http://schemas.microsoft.com/office/drawing/2014/main" val="10003"/>
-                  </a:ext>
-                </a:extLst>
               </a:tr>
               <a:tr h="645054">
                 <a:tc>
@@ -31087,11 +30670,6 @@
                     </a:solidFill>
                   </a:tcPr>
                 </a:tc>
-                <a:extLst>
-                  <a:ext uri="{0D108BD9-81ED-4DB2-BD59-A6C34878D82A}">
-                    <a16:rowId xmlns:a16="http://schemas.microsoft.com/office/drawing/2014/main" val="10004"/>
-                  </a:ext>
-                </a:extLst>
               </a:tr>
               <a:tr h="645055">
                 <a:tc>
@@ -31182,11 +30760,6 @@
                     </a:solidFill>
                   </a:tcPr>
                 </a:tc>
-                <a:extLst>
-                  <a:ext uri="{0D108BD9-81ED-4DB2-BD59-A6C34878D82A}">
-                    <a16:rowId xmlns:a16="http://schemas.microsoft.com/office/drawing/2014/main" val="10005"/>
-                  </a:ext>
-                </a:extLst>
               </a:tr>
             </a:tbl>
           </a:graphicData>
@@ -31233,7 +30806,7 @@
           </a:fontRef>
         </p:style>
         <p:txBody>
-          <a:bodyPr wrap="square" lIns="164592" tIns="73152" rIns="164592" bIns="73152" rtlCol="0" anchor="ctr"/>
+          <a:bodyPr rtlCol="0" anchor="ctr" wrap="square" lIns="164592" rIns="164592" tIns="73152" bIns="73152"/>
           <a:lstStyle/>
           <a:p>
             <a:pPr algn="l"/>
@@ -31267,7 +30840,7 @@
 </file>
 
 <file path=ppt/slides/slide41.xml><?xml version="1.0" encoding="utf-8"?>
-<p:sld xmlns:a="http://schemas.openxmlformats.org/drawingml/2006/main" xmlns:r="http://schemas.openxmlformats.org/officeDocument/2006/relationships" xmlns:p="http://schemas.openxmlformats.org/presentationml/2006/main">
+<p:sld xmlns:a="http://schemas.openxmlformats.org/drawingml/2006/main" xmlns:p="http://schemas.openxmlformats.org/presentationml/2006/main" xmlns:r="http://schemas.openxmlformats.org/officeDocument/2006/relationships">
   <p:cSld>
     <p:spTree>
       <p:nvGrpSpPr>
@@ -31275,14 +30848,7 @@
         <p:cNvGrpSpPr/>
         <p:nvPr/>
       </p:nvGrpSpPr>
-      <p:grpSpPr>
-        <a:xfrm>
-          <a:off x="0" y="0"/>
-          <a:ext cx="0" cy="0"/>
-          <a:chOff x="0" y="0"/>
-          <a:chExt cx="0" cy="0"/>
-        </a:xfrm>
-      </p:grpSpPr>
+      <p:grpSpPr/>
       <p:sp>
         <p:nvSpPr>
           <p:cNvPr id="2" name="Title 1"/>
@@ -31370,7 +30936,6 @@
           <a:lstStyle/>
           <a:p>
             <a:pPr algn="ctr"/>
-            <a:endParaRPr/>
           </a:p>
         </p:txBody>
       </p:sp>
@@ -31559,7 +31124,7 @@
           </a:fontRef>
         </p:style>
         <p:txBody>
-          <a:bodyPr wrap="square" lIns="146304" tIns="91440" bIns="73152" rtlCol="0" anchor="t"/>
+          <a:bodyPr rtlCol="0" anchor="t" wrap="square" lIns="146304" tIns="91440" bIns="73152"/>
           <a:lstStyle/>
           <a:p>
             <a:pPr algn="l">
@@ -31896,7 +31461,7 @@
 </file>
 
 <file path=ppt/slides/slide42.xml><?xml version="1.0" encoding="utf-8"?>
-<p:sld xmlns:a="http://schemas.openxmlformats.org/drawingml/2006/main" xmlns:r="http://schemas.openxmlformats.org/officeDocument/2006/relationships" xmlns:p="http://schemas.openxmlformats.org/presentationml/2006/main">
+<p:sld xmlns:a="http://schemas.openxmlformats.org/drawingml/2006/main" xmlns:p="http://schemas.openxmlformats.org/presentationml/2006/main" xmlns:r="http://schemas.openxmlformats.org/officeDocument/2006/relationships">
   <p:cSld>
     <p:spTree>
       <p:nvGrpSpPr>
@@ -31904,14 +31469,7 @@
         <p:cNvGrpSpPr/>
         <p:nvPr/>
       </p:nvGrpSpPr>
-      <p:grpSpPr>
-        <a:xfrm>
-          <a:off x="0" y="0"/>
-          <a:ext cx="0" cy="0"/>
-          <a:chOff x="0" y="0"/>
-          <a:chExt cx="0" cy="0"/>
-        </a:xfrm>
-      </p:grpSpPr>
+      <p:grpSpPr/>
       <p:sp>
         <p:nvSpPr>
           <p:cNvPr id="2" name="Title 1"/>
@@ -31999,7 +31557,6 @@
           <a:lstStyle/>
           <a:p>
             <a:pPr algn="ctr"/>
-            <a:endParaRPr/>
           </a:p>
         </p:txBody>
       </p:sp>
@@ -32138,7 +31695,7 @@
           </a:fontRef>
         </p:style>
         <p:txBody>
-          <a:bodyPr wrap="square" lIns="182880" rtlCol="0" anchor="ctr"/>
+          <a:bodyPr rtlCol="0" anchor="ctr" wrap="square" lIns="182880"/>
           <a:lstStyle/>
           <a:p>
             <a:pPr algn="l"/>
@@ -32571,7 +32128,7 @@
 </file>
 
 <file path=ppt/slides/slide43.xml><?xml version="1.0" encoding="utf-8"?>
-<p:sld xmlns:a="http://schemas.openxmlformats.org/drawingml/2006/main" xmlns:r="http://schemas.openxmlformats.org/officeDocument/2006/relationships" xmlns:p="http://schemas.openxmlformats.org/presentationml/2006/main">
+<p:sld xmlns:a="http://schemas.openxmlformats.org/drawingml/2006/main" xmlns:p="http://schemas.openxmlformats.org/presentationml/2006/main" xmlns:r="http://schemas.openxmlformats.org/officeDocument/2006/relationships">
   <p:cSld>
     <p:spTree>
       <p:nvGrpSpPr>
@@ -32579,14 +32136,7 @@
         <p:cNvGrpSpPr/>
         <p:nvPr/>
       </p:nvGrpSpPr>
-      <p:grpSpPr>
-        <a:xfrm>
-          <a:off x="0" y="0"/>
-          <a:ext cx="0" cy="0"/>
-          <a:chOff x="0" y="0"/>
-          <a:chExt cx="0" cy="0"/>
-        </a:xfrm>
-      </p:grpSpPr>
+      <p:grpSpPr/>
       <p:sp>
         <p:nvSpPr>
           <p:cNvPr id="2" name="TextBox 1"/>
@@ -32724,7 +32274,6 @@
           <a:lstStyle/>
           <a:p>
             <a:pPr algn="ctr"/>
-            <a:endParaRPr/>
           </a:p>
         </p:txBody>
       </p:sp>
@@ -32865,7 +32414,7 @@
           </a:fontRef>
         </p:style>
         <p:txBody>
-          <a:bodyPr wrap="square" lIns="73152" rIns="73152" rtlCol="0" anchor="ctr"/>
+          <a:bodyPr rtlCol="0" anchor="ctr" wrap="square" lIns="73152" rIns="73152"/>
           <a:lstStyle/>
           <a:p>
             <a:pPr algn="ctr">
@@ -32983,7 +32532,7 @@
           </a:fontRef>
         </p:style>
         <p:txBody>
-          <a:bodyPr wrap="square" lIns="73152" rIns="73152" rtlCol="0" anchor="ctr"/>
+          <a:bodyPr rtlCol="0" anchor="ctr" wrap="square" lIns="73152" rIns="73152"/>
           <a:lstStyle/>
           <a:p>
             <a:pPr algn="ctr">
@@ -33101,7 +32650,7 @@
           </a:fontRef>
         </p:style>
         <p:txBody>
-          <a:bodyPr wrap="square" lIns="73152" rIns="73152" rtlCol="0" anchor="ctr"/>
+          <a:bodyPr rtlCol="0" anchor="ctr" wrap="square" lIns="73152" rIns="73152"/>
           <a:lstStyle/>
           <a:p>
             <a:pPr algn="ctr">
@@ -33219,7 +32768,7 @@
           </a:fontRef>
         </p:style>
         <p:txBody>
-          <a:bodyPr wrap="square" lIns="73152" rIns="73152" rtlCol="0" anchor="ctr"/>
+          <a:bodyPr rtlCol="0" anchor="ctr" wrap="square" lIns="73152" rIns="73152"/>
           <a:lstStyle/>
           <a:p>
             <a:pPr algn="ctr">
@@ -33337,7 +32886,7 @@
           </a:fontRef>
         </p:style>
         <p:txBody>
-          <a:bodyPr wrap="square" lIns="73152" rIns="73152" rtlCol="0" anchor="ctr"/>
+          <a:bodyPr rtlCol="0" anchor="ctr" wrap="square" lIns="73152" rIns="73152"/>
           <a:lstStyle/>
           <a:p>
             <a:pPr algn="ctr">
@@ -33423,7 +32972,7 @@
 </file>
 
 <file path=ppt/slides/slide44.xml><?xml version="1.0" encoding="utf-8"?>
-<p:sld xmlns:a="http://schemas.openxmlformats.org/drawingml/2006/main" xmlns:r="http://schemas.openxmlformats.org/officeDocument/2006/relationships" xmlns:p="http://schemas.openxmlformats.org/presentationml/2006/main">
+<p:sld xmlns:a="http://schemas.openxmlformats.org/drawingml/2006/main" xmlns:p="http://schemas.openxmlformats.org/presentationml/2006/main" xmlns:r="http://schemas.openxmlformats.org/officeDocument/2006/relationships">
   <p:cSld>
     <p:spTree>
       <p:nvGrpSpPr>
@@ -33431,14 +32980,7 @@
         <p:cNvGrpSpPr/>
         <p:nvPr/>
       </p:nvGrpSpPr>
-      <p:grpSpPr>
-        <a:xfrm>
-          <a:off x="0" y="0"/>
-          <a:ext cx="0" cy="0"/>
-          <a:chOff x="0" y="0"/>
-          <a:chExt cx="0" cy="0"/>
-        </a:xfrm>
-      </p:grpSpPr>
+      <p:grpSpPr/>
       <p:sp>
         <p:nvSpPr>
           <p:cNvPr id="2" name="Title 1"/>
@@ -33526,7 +33068,6 @@
           <a:lstStyle/>
           <a:p>
             <a:pPr algn="ctr"/>
-            <a:endParaRPr/>
           </a:p>
         </p:txBody>
       </p:sp>
@@ -33787,12 +33328,6 @@
                 <a:latin typeface="Calibri"/>
               </a:defRPr>
             </a:pPr>
-            <a:endParaRPr sz="2000" b="0">
-              <a:solidFill>
-                <a:srgbClr val="222222"/>
-              </a:solidFill>
-              <a:latin typeface="Calibri"/>
-            </a:endParaRPr>
           </a:p>
           <a:p>
             <a:pPr algn="l">
@@ -33862,7 +33397,7 @@
           </a:fontRef>
         </p:style>
         <p:txBody>
-          <a:bodyPr wrap="square" lIns="164592" tIns="73152" rIns="164592" bIns="73152" rtlCol="0" anchor="ctr"/>
+          <a:bodyPr rtlCol="0" anchor="ctr" wrap="square" lIns="164592" rIns="164592" tIns="73152" bIns="73152"/>
           <a:lstStyle/>
           <a:p>
             <a:pPr algn="l"/>
@@ -33896,7 +33431,7 @@
 </file>
 
 <file path=ppt/slides/slide45.xml><?xml version="1.0" encoding="utf-8"?>
-<p:sld xmlns:a="http://schemas.openxmlformats.org/drawingml/2006/main" xmlns:r="http://schemas.openxmlformats.org/officeDocument/2006/relationships" xmlns:p="http://schemas.openxmlformats.org/presentationml/2006/main">
+<p:sld xmlns:a="http://schemas.openxmlformats.org/drawingml/2006/main" xmlns:p="http://schemas.openxmlformats.org/presentationml/2006/main" xmlns:r="http://schemas.openxmlformats.org/officeDocument/2006/relationships">
   <p:cSld>
     <p:spTree>
       <p:nvGrpSpPr>
@@ -33904,14 +33439,7 @@
         <p:cNvGrpSpPr/>
         <p:nvPr/>
       </p:nvGrpSpPr>
-      <p:grpSpPr>
-        <a:xfrm>
-          <a:off x="0" y="0"/>
-          <a:ext cx="0" cy="0"/>
-          <a:chOff x="0" y="0"/>
-          <a:chExt cx="0" cy="0"/>
-        </a:xfrm>
-      </p:grpSpPr>
+      <p:grpSpPr/>
       <p:sp>
         <p:nvSpPr>
           <p:cNvPr id="2" name="Title 1"/>
@@ -33999,7 +33527,6 @@
           <a:lstStyle/>
           <a:p>
             <a:pPr algn="ctr"/>
-            <a:endParaRPr/>
           </a:p>
         </p:txBody>
       </p:sp>
@@ -34188,7 +33715,7 @@
           </a:fontRef>
         </p:style>
         <p:txBody>
-          <a:bodyPr wrap="square" lIns="146304" tIns="91440" bIns="73152" rtlCol="0" anchor="t"/>
+          <a:bodyPr rtlCol="0" anchor="t" wrap="square" lIns="146304" tIns="91440" bIns="73152"/>
           <a:lstStyle/>
           <a:p>
             <a:pPr algn="l">
@@ -34811,7 +34338,7 @@
 </file>
 
 <file path=ppt/slides/slide46.xml><?xml version="1.0" encoding="utf-8"?>
-<p:sld xmlns:a="http://schemas.openxmlformats.org/drawingml/2006/main" xmlns:r="http://schemas.openxmlformats.org/officeDocument/2006/relationships" xmlns:p="http://schemas.openxmlformats.org/presentationml/2006/main">
+<p:sld xmlns:a="http://schemas.openxmlformats.org/drawingml/2006/main" xmlns:p="http://schemas.openxmlformats.org/presentationml/2006/main" xmlns:r="http://schemas.openxmlformats.org/officeDocument/2006/relationships">
   <p:cSld>
     <p:spTree>
       <p:nvGrpSpPr>
@@ -34819,14 +34346,7 @@
         <p:cNvGrpSpPr/>
         <p:nvPr/>
       </p:nvGrpSpPr>
-      <p:grpSpPr>
-        <a:xfrm>
-          <a:off x="0" y="0"/>
-          <a:ext cx="0" cy="0"/>
-          <a:chOff x="0" y="0"/>
-          <a:chExt cx="0" cy="0"/>
-        </a:xfrm>
-      </p:grpSpPr>
+      <p:grpSpPr/>
       <p:sp>
         <p:nvSpPr>
           <p:cNvPr id="2" name="Title 1"/>
@@ -34914,7 +34434,6 @@
           <a:lstStyle/>
           <a:p>
             <a:pPr algn="ctr"/>
-            <a:endParaRPr/>
           </a:p>
         </p:txBody>
       </p:sp>
@@ -35053,7 +34572,7 @@
           </a:fontRef>
         </p:style>
         <p:txBody>
-          <a:bodyPr wrap="square" lIns="182880" rtlCol="0" anchor="ctr"/>
+          <a:bodyPr rtlCol="0" anchor="ctr" wrap="square" lIns="182880"/>
           <a:lstStyle/>
           <a:p>
             <a:pPr algn="l"/>
@@ -35461,7 +34980,7 @@
 </file>
 
 <file path=ppt/slides/slide47.xml><?xml version="1.0" encoding="utf-8"?>
-<p:sld xmlns:a="http://schemas.openxmlformats.org/drawingml/2006/main" xmlns:r="http://schemas.openxmlformats.org/officeDocument/2006/relationships" xmlns:p="http://schemas.openxmlformats.org/presentationml/2006/main">
+<p:sld xmlns:a="http://schemas.openxmlformats.org/drawingml/2006/main" xmlns:p="http://schemas.openxmlformats.org/presentationml/2006/main" xmlns:r="http://schemas.openxmlformats.org/officeDocument/2006/relationships">
   <p:cSld>
     <p:spTree>
       <p:nvGrpSpPr>
@@ -35469,14 +34988,7 @@
         <p:cNvGrpSpPr/>
         <p:nvPr/>
       </p:nvGrpSpPr>
-      <p:grpSpPr>
-        <a:xfrm>
-          <a:off x="0" y="0"/>
-          <a:ext cx="0" cy="0"/>
-          <a:chOff x="0" y="0"/>
-          <a:chExt cx="0" cy="0"/>
-        </a:xfrm>
-      </p:grpSpPr>
+      <p:grpSpPr/>
       <p:sp>
         <p:nvSpPr>
           <p:cNvPr id="2" name="Title 1"/>
@@ -35564,7 +35076,6 @@
           <a:lstStyle/>
           <a:p>
             <a:pPr algn="ctr"/>
-            <a:endParaRPr/>
           </a:p>
         </p:txBody>
       </p:sp>
@@ -35903,7 +35414,7 @@
           </a:fontRef>
         </p:style>
         <p:txBody>
-          <a:bodyPr wrap="square" lIns="164592" tIns="73152" rIns="164592" bIns="73152" rtlCol="0" anchor="ctr"/>
+          <a:bodyPr rtlCol="0" anchor="ctr" wrap="square" lIns="164592" rIns="164592" tIns="73152" bIns="73152"/>
           <a:lstStyle/>
           <a:p>
             <a:pPr algn="l"/>
@@ -35937,7 +35448,7 @@
 </file>
 
 <file path=ppt/slides/slide48.xml><?xml version="1.0" encoding="utf-8"?>
-<p:sld xmlns:a="http://schemas.openxmlformats.org/drawingml/2006/main" xmlns:r="http://schemas.openxmlformats.org/officeDocument/2006/relationships" xmlns:p="http://schemas.openxmlformats.org/presentationml/2006/main">
+<p:sld xmlns:a="http://schemas.openxmlformats.org/drawingml/2006/main" xmlns:p="http://schemas.openxmlformats.org/presentationml/2006/main" xmlns:r="http://schemas.openxmlformats.org/officeDocument/2006/relationships">
   <p:cSld>
     <p:spTree>
       <p:nvGrpSpPr>
@@ -35945,14 +35456,7 @@
         <p:cNvGrpSpPr/>
         <p:nvPr/>
       </p:nvGrpSpPr>
-      <p:grpSpPr>
-        <a:xfrm>
-          <a:off x="0" y="0"/>
-          <a:ext cx="0" cy="0"/>
-          <a:chOff x="0" y="0"/>
-          <a:chExt cx="0" cy="0"/>
-        </a:xfrm>
-      </p:grpSpPr>
+      <p:grpSpPr/>
       <p:sp>
         <p:nvSpPr>
           <p:cNvPr id="2" name="Title 1"/>
@@ -36040,7 +35544,6 @@
           <a:lstStyle/>
           <a:p>
             <a:pPr algn="ctr"/>
-            <a:endParaRPr/>
           </a:p>
         </p:txBody>
       </p:sp>
@@ -36370,7 +35873,7 @@
 </file>
 
 <file path=ppt/slides/slide5.xml><?xml version="1.0" encoding="utf-8"?>
-<p:sld xmlns:a="http://schemas.openxmlformats.org/drawingml/2006/main" xmlns:r="http://schemas.openxmlformats.org/officeDocument/2006/relationships" xmlns:p="http://schemas.openxmlformats.org/presentationml/2006/main">
+<p:sld xmlns:a="http://schemas.openxmlformats.org/drawingml/2006/main" xmlns:p="http://schemas.openxmlformats.org/presentationml/2006/main" xmlns:r="http://schemas.openxmlformats.org/officeDocument/2006/relationships">
   <p:cSld>
     <p:spTree>
       <p:nvGrpSpPr>
@@ -36378,14 +35881,7 @@
         <p:cNvGrpSpPr/>
         <p:nvPr/>
       </p:nvGrpSpPr>
-      <p:grpSpPr>
-        <a:xfrm>
-          <a:off x="0" y="0"/>
-          <a:ext cx="0" cy="0"/>
-          <a:chOff x="0" y="0"/>
-          <a:chExt cx="0" cy="0"/>
-        </a:xfrm>
-      </p:grpSpPr>
+      <p:grpSpPr/>
       <p:sp>
         <p:nvSpPr>
           <p:cNvPr id="2" name="Title 1"/>
@@ -36473,7 +35969,6 @@
           <a:lstStyle/>
           <a:p>
             <a:pPr algn="ctr"/>
-            <a:endParaRPr/>
           </a:p>
         </p:txBody>
       </p:sp>
@@ -36592,20 +36087,8 @@
                 <a:tableStyleId>{5C22544A-7EE6-4342-B048-85BDC9FD1C3A}</a:tableStyleId>
               </a:tblPr>
               <a:tblGrid>
-                <a:gridCol w="1118585">
-                  <a:extLst>
-                    <a:ext uri="{9D8B030D-6E8A-4147-A177-3AD203B41FA5}">
-                      <a16:colId xmlns:a16="http://schemas.microsoft.com/office/drawing/2014/main" val="20000"/>
-                    </a:ext>
-                  </a:extLst>
-                </a:gridCol>
-                <a:gridCol w="10067269">
-                  <a:extLst>
-                    <a:ext uri="{9D8B030D-6E8A-4147-A177-3AD203B41FA5}">
-                      <a16:colId xmlns:a16="http://schemas.microsoft.com/office/drawing/2014/main" val="20001"/>
-                    </a:ext>
-                  </a:extLst>
-                </a:gridCol>
+                <a:gridCol w="1118585"/>
+                <a:gridCol w="10067269"/>
               </a:tblGrid>
               <a:tr h="488950">
                 <a:tc>
@@ -36652,11 +36135,6 @@
                     </a:solidFill>
                   </a:tcPr>
                 </a:tc>
-                <a:extLst>
-                  <a:ext uri="{0D108BD9-81ED-4DB2-BD59-A6C34878D82A}">
-                    <a16:rowId xmlns:a16="http://schemas.microsoft.com/office/drawing/2014/main" val="10000"/>
-                  </a:ext>
-                </a:extLst>
               </a:tr>
               <a:tr h="488950">
                 <a:tc>
@@ -36703,11 +36181,6 @@
                     </a:solidFill>
                   </a:tcPr>
                 </a:tc>
-                <a:extLst>
-                  <a:ext uri="{0D108BD9-81ED-4DB2-BD59-A6C34878D82A}">
-                    <a16:rowId xmlns:a16="http://schemas.microsoft.com/office/drawing/2014/main" val="10001"/>
-                  </a:ext>
-                </a:extLst>
               </a:tr>
               <a:tr h="488950">
                 <a:tc>
@@ -36754,11 +36227,6 @@
                     </a:solidFill>
                   </a:tcPr>
                 </a:tc>
-                <a:extLst>
-                  <a:ext uri="{0D108BD9-81ED-4DB2-BD59-A6C34878D82A}">
-                    <a16:rowId xmlns:a16="http://schemas.microsoft.com/office/drawing/2014/main" val="10002"/>
-                  </a:ext>
-                </a:extLst>
               </a:tr>
               <a:tr h="488950">
                 <a:tc>
@@ -36805,11 +36273,6 @@
                     </a:solidFill>
                   </a:tcPr>
                 </a:tc>
-                <a:extLst>
-                  <a:ext uri="{0D108BD9-81ED-4DB2-BD59-A6C34878D82A}">
-                    <a16:rowId xmlns:a16="http://schemas.microsoft.com/office/drawing/2014/main" val="10003"/>
-                  </a:ext>
-                </a:extLst>
               </a:tr>
               <a:tr h="488950">
                 <a:tc>
@@ -36856,11 +36319,6 @@
                     </a:solidFill>
                   </a:tcPr>
                 </a:tc>
-                <a:extLst>
-                  <a:ext uri="{0D108BD9-81ED-4DB2-BD59-A6C34878D82A}">
-                    <a16:rowId xmlns:a16="http://schemas.microsoft.com/office/drawing/2014/main" val="10004"/>
-                  </a:ext>
-                </a:extLst>
               </a:tr>
               <a:tr h="488950">
                 <a:tc>
@@ -36907,11 +36365,6 @@
                     </a:solidFill>
                   </a:tcPr>
                 </a:tc>
-                <a:extLst>
-                  <a:ext uri="{0D108BD9-81ED-4DB2-BD59-A6C34878D82A}">
-                    <a16:rowId xmlns:a16="http://schemas.microsoft.com/office/drawing/2014/main" val="10005"/>
-                  </a:ext>
-                </a:extLst>
               </a:tr>
               <a:tr h="488950">
                 <a:tc>
@@ -36958,11 +36411,6 @@
                     </a:solidFill>
                   </a:tcPr>
                 </a:tc>
-                <a:extLst>
-                  <a:ext uri="{0D108BD9-81ED-4DB2-BD59-A6C34878D82A}">
-                    <a16:rowId xmlns:a16="http://schemas.microsoft.com/office/drawing/2014/main" val="10006"/>
-                  </a:ext>
-                </a:extLst>
               </a:tr>
               <a:tr h="488950">
                 <a:tc>
@@ -37009,11 +36457,6 @@
                     </a:solidFill>
                   </a:tcPr>
                 </a:tc>
-                <a:extLst>
-                  <a:ext uri="{0D108BD9-81ED-4DB2-BD59-A6C34878D82A}">
-                    <a16:rowId xmlns:a16="http://schemas.microsoft.com/office/drawing/2014/main" val="10007"/>
-                  </a:ext>
-                </a:extLst>
               </a:tr>
               <a:tr h="488950">
                 <a:tc>
@@ -37060,11 +36503,6 @@
                     </a:solidFill>
                   </a:tcPr>
                 </a:tc>
-                <a:extLst>
-                  <a:ext uri="{0D108BD9-81ED-4DB2-BD59-A6C34878D82A}">
-                    <a16:rowId xmlns:a16="http://schemas.microsoft.com/office/drawing/2014/main" val="10008"/>
-                  </a:ext>
-                </a:extLst>
               </a:tr>
               <a:tr h="488950">
                 <a:tc>
@@ -37111,11 +36549,6 @@
                     </a:solidFill>
                   </a:tcPr>
                 </a:tc>
-                <a:extLst>
-                  <a:ext uri="{0D108BD9-81ED-4DB2-BD59-A6C34878D82A}">
-                    <a16:rowId xmlns:a16="http://schemas.microsoft.com/office/drawing/2014/main" val="10009"/>
-                  </a:ext>
-                </a:extLst>
               </a:tr>
             </a:tbl>
           </a:graphicData>
@@ -37130,7 +36563,7 @@
 </file>
 
 <file path=ppt/slides/slide6.xml><?xml version="1.0" encoding="utf-8"?>
-<p:sld xmlns:a="http://schemas.openxmlformats.org/drawingml/2006/main" xmlns:r="http://schemas.openxmlformats.org/officeDocument/2006/relationships" xmlns:p="http://schemas.openxmlformats.org/presentationml/2006/main">
+<p:sld xmlns:a="http://schemas.openxmlformats.org/drawingml/2006/main" xmlns:p="http://schemas.openxmlformats.org/presentationml/2006/main" xmlns:r="http://schemas.openxmlformats.org/officeDocument/2006/relationships">
   <p:cSld>
     <p:spTree>
       <p:nvGrpSpPr>
@@ -37138,14 +36571,7 @@
         <p:cNvGrpSpPr/>
         <p:nvPr/>
       </p:nvGrpSpPr>
-      <p:grpSpPr>
-        <a:xfrm>
-          <a:off x="0" y="0"/>
-          <a:ext cx="0" cy="0"/>
-          <a:chOff x="0" y="0"/>
-          <a:chExt cx="0" cy="0"/>
-        </a:xfrm>
-      </p:grpSpPr>
+      <p:grpSpPr/>
       <p:sp>
         <p:nvSpPr>
           <p:cNvPr id="2" name="Title 1"/>
@@ -37233,7 +36659,6 @@
           <a:lstStyle/>
           <a:p>
             <a:pPr algn="ctr"/>
-            <a:endParaRPr/>
           </a:p>
         </p:txBody>
       </p:sp>
@@ -37465,7 +36890,7 @@
           <p:nvPr/>
         </p:nvPicPr>
         <p:blipFill>
-          <a:blip r:embed="rId3"/>
+          <a:blip r:embed="rId2"/>
           <a:stretch>
             <a:fillRect/>
           </a:stretch>
@@ -37537,7 +36962,7 @@
 </file>
 
 <file path=ppt/slides/slide7.xml><?xml version="1.0" encoding="utf-8"?>
-<p:sld xmlns:a="http://schemas.openxmlformats.org/drawingml/2006/main" xmlns:r="http://schemas.openxmlformats.org/officeDocument/2006/relationships" xmlns:p="http://schemas.openxmlformats.org/presentationml/2006/main">
+<p:sld xmlns:a="http://schemas.openxmlformats.org/drawingml/2006/main" xmlns:p="http://schemas.openxmlformats.org/presentationml/2006/main" xmlns:r="http://schemas.openxmlformats.org/officeDocument/2006/relationships">
   <p:cSld>
     <p:spTree>
       <p:nvGrpSpPr>
@@ -37545,14 +36970,7 @@
         <p:cNvGrpSpPr/>
         <p:nvPr/>
       </p:nvGrpSpPr>
-      <p:grpSpPr>
-        <a:xfrm>
-          <a:off x="0" y="0"/>
-          <a:ext cx="0" cy="0"/>
-          <a:chOff x="0" y="0"/>
-          <a:chExt cx="0" cy="0"/>
-        </a:xfrm>
-      </p:grpSpPr>
+      <p:grpSpPr/>
       <p:sp>
         <p:nvSpPr>
           <p:cNvPr id="2" name="Title 1"/>
@@ -37640,7 +37058,6 @@
           <a:lstStyle/>
           <a:p>
             <a:pPr algn="ctr"/>
-            <a:endParaRPr/>
           </a:p>
         </p:txBody>
       </p:sp>
@@ -38248,7 +37665,7 @@
           </a:fontRef>
         </p:style>
         <p:txBody>
-          <a:bodyPr wrap="square" lIns="164592" tIns="73152" rIns="164592" bIns="73152" rtlCol="0" anchor="ctr"/>
+          <a:bodyPr rtlCol="0" anchor="ctr" wrap="square" lIns="164592" rIns="164592" tIns="73152" bIns="73152"/>
           <a:lstStyle/>
           <a:p>
             <a:pPr algn="l"/>
@@ -38282,7 +37699,7 @@
 </file>
 
 <file path=ppt/slides/slide8.xml><?xml version="1.0" encoding="utf-8"?>
-<p:sld xmlns:a="http://schemas.openxmlformats.org/drawingml/2006/main" xmlns:r="http://schemas.openxmlformats.org/officeDocument/2006/relationships" xmlns:p="http://schemas.openxmlformats.org/presentationml/2006/main">
+<p:sld xmlns:a="http://schemas.openxmlformats.org/drawingml/2006/main" xmlns:p="http://schemas.openxmlformats.org/presentationml/2006/main" xmlns:r="http://schemas.openxmlformats.org/officeDocument/2006/relationships">
   <p:cSld>
     <p:spTree>
       <p:nvGrpSpPr>
@@ -38290,14 +37707,7 @@
         <p:cNvGrpSpPr/>
         <p:nvPr/>
       </p:nvGrpSpPr>
-      <p:grpSpPr>
-        <a:xfrm>
-          <a:off x="0" y="0"/>
-          <a:ext cx="0" cy="0"/>
-          <a:chOff x="0" y="0"/>
-          <a:chExt cx="0" cy="0"/>
-        </a:xfrm>
-      </p:grpSpPr>
+      <p:grpSpPr/>
       <p:sp>
         <p:nvSpPr>
           <p:cNvPr id="2" name="Title 1"/>
@@ -38385,7 +37795,6 @@
           <a:lstStyle/>
           <a:p>
             <a:pPr algn="ctr"/>
-            <a:endParaRPr/>
           </a:p>
         </p:txBody>
       </p:sp>
@@ -38542,7 +37951,7 @@
           <p:nvPr/>
         </p:nvPicPr>
         <p:blipFill>
-          <a:blip r:embed="rId3"/>
+          <a:blip r:embed="rId2"/>
           <a:stretch>
             <a:fillRect/>
           </a:stretch>
@@ -38566,7 +37975,7 @@
           <p:nvPr/>
         </p:nvPicPr>
         <p:blipFill>
-          <a:blip r:embed="rId4"/>
+          <a:blip r:embed="rId3"/>
           <a:stretch>
             <a:fillRect/>
           </a:stretch>
@@ -38686,7 +38095,7 @@
 </file>
 
 <file path=ppt/slides/slide9.xml><?xml version="1.0" encoding="utf-8"?>
-<p:sld xmlns:a="http://schemas.openxmlformats.org/drawingml/2006/main" xmlns:r="http://schemas.openxmlformats.org/officeDocument/2006/relationships" xmlns:p="http://schemas.openxmlformats.org/presentationml/2006/main">
+<p:sld xmlns:a="http://schemas.openxmlformats.org/drawingml/2006/main" xmlns:p="http://schemas.openxmlformats.org/presentationml/2006/main" xmlns:r="http://schemas.openxmlformats.org/officeDocument/2006/relationships">
   <p:cSld>
     <p:spTree>
       <p:nvGrpSpPr>
@@ -38694,14 +38103,7 @@
         <p:cNvGrpSpPr/>
         <p:nvPr/>
       </p:nvGrpSpPr>
-      <p:grpSpPr>
-        <a:xfrm>
-          <a:off x="0" y="0"/>
-          <a:ext cx="0" cy="0"/>
-          <a:chOff x="0" y="0"/>
-          <a:chExt cx="0" cy="0"/>
-        </a:xfrm>
-      </p:grpSpPr>
+      <p:grpSpPr/>
       <p:sp>
         <p:nvSpPr>
           <p:cNvPr id="2" name="Title 1"/>
@@ -38789,7 +38191,6 @@
           <a:lstStyle/>
           <a:p>
             <a:pPr algn="ctr"/>
-            <a:endParaRPr/>
           </a:p>
         </p:txBody>
       </p:sp>
@@ -39007,7 +38408,7 @@
                 </a:solidFill>
                 <a:latin typeface="Calibri"/>
               </a:rPr>
-              <a:t>Four servo outputs on the top plate.</a:t>
+              <a:t>Four servo outputs on the control board.</a:t>
             </a:r>
           </a:p>
           <a:p>
@@ -39103,7 +38504,7 @@
           </a:fontRef>
         </p:style>
         <p:txBody>
-          <a:bodyPr wrap="square" lIns="164592" tIns="73152" rIns="164592" bIns="73152" rtlCol="0" anchor="ctr"/>
+          <a:bodyPr rtlCol="0" anchor="ctr" wrap="square" lIns="164592" rIns="164592" tIns="73152" bIns="73152"/>
           <a:lstStyle/>
           <a:p>
             <a:pPr algn="l"/>
@@ -39467,44 +38868,44 @@
         <a:sysClr val="window" lastClr="FFFFFF"/>
       </a:lt1>
       <a:dk2>
-        <a:srgbClr val="0E2841"/>
+        <a:srgbClr val="1F497D"/>
       </a:dk2>
       <a:lt2>
-        <a:srgbClr val="E8E8E8"/>
+        <a:srgbClr val="EEECE1"/>
       </a:lt2>
       <a:accent1>
-        <a:srgbClr val="156082"/>
+        <a:srgbClr val="4F81BD"/>
       </a:accent1>
       <a:accent2>
-        <a:srgbClr val="E97132"/>
+        <a:srgbClr val="C0504D"/>
       </a:accent2>
       <a:accent3>
-        <a:srgbClr val="196B24"/>
+        <a:srgbClr val="9BBB59"/>
       </a:accent3>
       <a:accent4>
-        <a:srgbClr val="0F9ED5"/>
+        <a:srgbClr val="8064A2"/>
       </a:accent4>
       <a:accent5>
-        <a:srgbClr val="A02B93"/>
+        <a:srgbClr val="4BACC6"/>
       </a:accent5>
       <a:accent6>
-        <a:srgbClr val="4EA72E"/>
+        <a:srgbClr val="F79646"/>
       </a:accent6>
       <a:hlink>
-        <a:srgbClr val="467886"/>
+        <a:srgbClr val="0000FF"/>
       </a:hlink>
       <a:folHlink>
-        <a:srgbClr val="96607D"/>
+        <a:srgbClr val="800080"/>
       </a:folHlink>
     </a:clrScheme>
     <a:fontScheme name="Office">
       <a:majorFont>
-        <a:latin typeface="Aptos Display" panose="02110004020202020204"/>
+        <a:latin typeface="Calibri"/>
         <a:ea typeface=""/>
         <a:cs typeface=""/>
-        <a:font script="Jpan" typeface="游ゴシック Light"/>
+        <a:font script="Jpan" typeface="ＭＳ Ｐゴシック"/>
         <a:font script="Hang" typeface="맑은 고딕"/>
-        <a:font script="Hans" typeface="等线 Light"/>
+        <a:font script="Hans" typeface="宋体"/>
         <a:font script="Hant" typeface="新細明體"/>
         <a:font script="Arab" typeface="Times New Roman"/>
         <a:font script="Hebr" typeface="Times New Roman"/>
@@ -39532,31 +38933,14 @@
         <a:font script="Viet" typeface="Times New Roman"/>
         <a:font script="Uigh" typeface="Microsoft Uighur"/>
         <a:font script="Geor" typeface="Sylfaen"/>
-        <a:font script="Armn" typeface="Arial"/>
-        <a:font script="Bugi" typeface="Leelawadee UI"/>
-        <a:font script="Bopo" typeface="Microsoft JhengHei"/>
-        <a:font script="Java" typeface="Javanese Text"/>
-        <a:font script="Lisu" typeface="Segoe UI"/>
-        <a:font script="Mymr" typeface="Myanmar Text"/>
-        <a:font script="Nkoo" typeface="Ebrima"/>
-        <a:font script="Olck" typeface="Nirmala UI"/>
-        <a:font script="Osma" typeface="Ebrima"/>
-        <a:font script="Phag" typeface="Phagspa"/>
-        <a:font script="Syrn" typeface="Estrangelo Edessa"/>
-        <a:font script="Syrj" typeface="Estrangelo Edessa"/>
-        <a:font script="Syre" typeface="Estrangelo Edessa"/>
-        <a:font script="Sora" typeface="Nirmala UI"/>
-        <a:font script="Tale" typeface="Microsoft Tai Le"/>
-        <a:font script="Talu" typeface="Microsoft New Tai Lue"/>
-        <a:font script="Tfng" typeface="Ebrima"/>
       </a:majorFont>
       <a:minorFont>
-        <a:latin typeface="Aptos" panose="02110004020202020204"/>
+        <a:latin typeface="Calibri"/>
         <a:ea typeface=""/>
         <a:cs typeface=""/>
-        <a:font script="Jpan" typeface="游ゴシック"/>
+        <a:font script="Jpan" typeface="ＭＳ Ｐゴシック"/>
         <a:font script="Hang" typeface="맑은 고딕"/>
-        <a:font script="Hans" typeface="等线"/>
+        <a:font script="Hans" typeface="宋体"/>
         <a:font script="Hant" typeface="新細明體"/>
         <a:font script="Arab" typeface="Arial"/>
         <a:font script="Hebr" typeface="Arial"/>
@@ -39584,23 +38968,6 @@
         <a:font script="Viet" typeface="Arial"/>
         <a:font script="Uigh" typeface="Microsoft Uighur"/>
         <a:font script="Geor" typeface="Sylfaen"/>
-        <a:font script="Armn" typeface="Arial"/>
-        <a:font script="Bugi" typeface="Leelawadee UI"/>
-        <a:font script="Bopo" typeface="Microsoft JhengHei"/>
-        <a:font script="Java" typeface="Javanese Text"/>
-        <a:font script="Lisu" typeface="Segoe UI"/>
-        <a:font script="Mymr" typeface="Myanmar Text"/>
-        <a:font script="Nkoo" typeface="Ebrima"/>
-        <a:font script="Olck" typeface="Nirmala UI"/>
-        <a:font script="Osma" typeface="Ebrima"/>
-        <a:font script="Phag" typeface="Phagspa"/>
-        <a:font script="Syrn" typeface="Estrangelo Edessa"/>
-        <a:font script="Syrj" typeface="Estrangelo Edessa"/>
-        <a:font script="Syre" typeface="Estrangelo Edessa"/>
-        <a:font script="Sora" typeface="Nirmala UI"/>
-        <a:font script="Tale" typeface="Microsoft Tai Le"/>
-        <a:font script="Talu" typeface="Microsoft New Tai Lue"/>
-        <a:font script="Tfng" typeface="Ebrima"/>
       </a:minorFont>
     </a:fontScheme>
     <a:fmtScheme name="Office">
@@ -39612,136 +38979,180 @@
           <a:gsLst>
             <a:gs pos="0">
               <a:schemeClr val="phClr">
-                <a:lumMod val="110000"/>
-                <a:satMod val="105000"/>
-                <a:tint val="67000"/>
+                <a:tint val="50000"/>
+                <a:satMod val="300000"/>
               </a:schemeClr>
             </a:gs>
-            <a:gs pos="50000">
+            <a:gs pos="35000">
               <a:schemeClr val="phClr">
-                <a:lumMod val="105000"/>
-                <a:satMod val="103000"/>
-                <a:tint val="73000"/>
+                <a:tint val="37000"/>
+                <a:satMod val="300000"/>
               </a:schemeClr>
             </a:gs>
             <a:gs pos="100000">
               <a:schemeClr val="phClr">
-                <a:lumMod val="105000"/>
-                <a:satMod val="109000"/>
-                <a:tint val="81000"/>
+                <a:tint val="15000"/>
+                <a:satMod val="350000"/>
               </a:schemeClr>
             </a:gs>
           </a:gsLst>
-          <a:lin ang="5400000" scaled="0"/>
+          <a:lin ang="16200000" scaled="1"/>
         </a:gradFill>
         <a:gradFill rotWithShape="1">
           <a:gsLst>
             <a:gs pos="0">
               <a:schemeClr val="phClr">
-                <a:satMod val="103000"/>
-                <a:lumMod val="102000"/>
-                <a:tint val="94000"/>
-              </a:schemeClr>
-            </a:gs>
-            <a:gs pos="50000">
-              <a:schemeClr val="phClr">
-                <a:satMod val="110000"/>
-                <a:lumMod val="100000"/>
+                <a:tint val="100000"/>
                 <a:shade val="100000"/>
+                <a:satMod val="130000"/>
               </a:schemeClr>
             </a:gs>
             <a:gs pos="100000">
               <a:schemeClr val="phClr">
-                <a:lumMod val="99000"/>
-                <a:satMod val="120000"/>
-                <a:shade val="78000"/>
+                <a:tint val="50000"/>
+                <a:shade val="100000"/>
+                <a:satMod val="350000"/>
               </a:schemeClr>
             </a:gs>
           </a:gsLst>
-          <a:lin ang="5400000" scaled="0"/>
+          <a:lin ang="16200000" scaled="0"/>
         </a:gradFill>
       </a:fillStyleLst>
       <a:lnStyleLst>
-        <a:ln w="12700" cap="flat" cmpd="sng" algn="ctr">
+        <a:ln w="9525" cap="flat" cmpd="sng" algn="ctr">
           <a:solidFill>
-            <a:schemeClr val="phClr"/>
+            <a:schemeClr val="phClr">
+              <a:shade val="95000"/>
+              <a:satMod val="105000"/>
+            </a:schemeClr>
           </a:solidFill>
           <a:prstDash val="solid"/>
-          <a:miter lim="800000"/>
-        </a:ln>
-        <a:ln w="19050" cap="flat" cmpd="sng" algn="ctr">
-          <a:solidFill>
-            <a:schemeClr val="phClr"/>
-          </a:solidFill>
-          <a:prstDash val="solid"/>
-          <a:miter lim="800000"/>
         </a:ln>
         <a:ln w="25400" cap="flat" cmpd="sng" algn="ctr">
           <a:solidFill>
             <a:schemeClr val="phClr"/>
           </a:solidFill>
           <a:prstDash val="solid"/>
-          <a:miter lim="800000"/>
+        </a:ln>
+        <a:ln w="38100" cap="flat" cmpd="sng" algn="ctr">
+          <a:solidFill>
+            <a:schemeClr val="phClr"/>
+          </a:solidFill>
+          <a:prstDash val="solid"/>
         </a:ln>
       </a:lnStyleLst>
       <a:effectStyleLst>
         <a:effectStyle>
-          <a:effectLst/>
-        </a:effectStyle>
-        <a:effectStyle>
-          <a:effectLst/>
+          <a:effectLst>
+            <a:outerShdw blurRad="40000" dist="20000" dir="5400000" rotWithShape="0">
+              <a:srgbClr val="000000">
+                <a:alpha val="38000"/>
+              </a:srgbClr>
+            </a:outerShdw>
+          </a:effectLst>
         </a:effectStyle>
         <a:effectStyle>
           <a:effectLst>
-            <a:outerShdw blurRad="57150" dist="19050" dir="5400000" algn="ctr" rotWithShape="0">
+            <a:outerShdw blurRad="40000" dist="23000" dir="5400000" rotWithShape="0">
               <a:srgbClr val="000000">
-                <a:alpha val="63000"/>
+                <a:alpha val="35000"/>
               </a:srgbClr>
             </a:outerShdw>
           </a:effectLst>
+        </a:effectStyle>
+        <a:effectStyle>
+          <a:effectLst>
+            <a:outerShdw blurRad="40000" dist="23000" dir="5400000" rotWithShape="0">
+              <a:srgbClr val="000000">
+                <a:alpha val="35000"/>
+              </a:srgbClr>
+            </a:outerShdw>
+          </a:effectLst>
+          <a:scene3d>
+            <a:camera prst="orthographicFront">
+              <a:rot lat="0" lon="0" rev="0"/>
+            </a:camera>
+            <a:lightRig rig="threePt" dir="t">
+              <a:rot lat="0" lon="0" rev="1200000"/>
+            </a:lightRig>
+          </a:scene3d>
+          <a:sp3d>
+            <a:bevelT w="63500" h="25400"/>
+          </a:sp3d>
         </a:effectStyle>
       </a:effectStyleLst>
       <a:bgFillStyleLst>
         <a:solidFill>
           <a:schemeClr val="phClr"/>
         </a:solidFill>
-        <a:solidFill>
-          <a:schemeClr val="phClr">
-            <a:tint val="95000"/>
-            <a:satMod val="170000"/>
-          </a:schemeClr>
-        </a:solidFill>
         <a:gradFill rotWithShape="1">
           <a:gsLst>
             <a:gs pos="0">
               <a:schemeClr val="phClr">
-                <a:tint val="93000"/>
-                <a:satMod val="150000"/>
-                <a:shade val="98000"/>
-                <a:lumMod val="102000"/>
+                <a:tint val="40000"/>
+                <a:satMod val="350000"/>
               </a:schemeClr>
             </a:gs>
-            <a:gs pos="50000">
+            <a:gs pos="40000">
               <a:schemeClr val="phClr">
-                <a:tint val="98000"/>
-                <a:satMod val="130000"/>
-                <a:shade val="90000"/>
-                <a:lumMod val="103000"/>
+                <a:tint val="45000"/>
+                <a:shade val="99000"/>
+                <a:satMod val="350000"/>
               </a:schemeClr>
             </a:gs>
             <a:gs pos="100000">
               <a:schemeClr val="phClr">
-                <a:shade val="63000"/>
-                <a:satMod val="120000"/>
+                <a:shade val="20000"/>
+                <a:satMod val="255000"/>
               </a:schemeClr>
             </a:gs>
           </a:gsLst>
-          <a:lin ang="5400000" scaled="0"/>
+          <a:path path="circle">
+            <a:fillToRect l="50000" t="-80000" r="50000" b="180000"/>
+          </a:path>
+        </a:gradFill>
+        <a:gradFill rotWithShape="1">
+          <a:gsLst>
+            <a:gs pos="0">
+              <a:schemeClr val="phClr">
+                <a:tint val="80000"/>
+                <a:satMod val="300000"/>
+              </a:schemeClr>
+            </a:gs>
+            <a:gs pos="100000">
+              <a:schemeClr val="phClr">
+                <a:shade val="30000"/>
+                <a:satMod val="200000"/>
+              </a:schemeClr>
+            </a:gs>
+          </a:gsLst>
+          <a:path path="circle">
+            <a:fillToRect l="50000" t="50000" r="50000" b="50000"/>
+          </a:path>
         </a:gradFill>
       </a:bgFillStyleLst>
     </a:fmtScheme>
   </a:themeElements>
   <a:objectDefaults>
+    <a:spDef>
+      <a:spPr/>
+      <a:bodyPr/>
+      <a:lstStyle/>
+      <a:style>
+        <a:lnRef idx="1">
+          <a:schemeClr val="accent1"/>
+        </a:lnRef>
+        <a:fillRef idx="3">
+          <a:schemeClr val="accent1"/>
+        </a:fillRef>
+        <a:effectRef idx="2">
+          <a:schemeClr val="accent1"/>
+        </a:effectRef>
+        <a:fontRef idx="minor">
+          <a:schemeClr val="lt1"/>
+        </a:fontRef>
+      </a:style>
+    </a:spDef>
     <a:lnDef>
       <a:spPr/>
       <a:bodyPr/>
@@ -39763,10 +39174,5 @@
     </a:lnDef>
   </a:objectDefaults>
   <a:extraClrSchemeLst/>
-  <a:extLst>
-    <a:ext uri="{05A4C25C-085E-4340-85A3-A5531E510DB2}">
-      <thm15:themeFamily xmlns:thm15="http://schemas.microsoft.com/office/thememl/2012/main" name="Office Theme" id="{2E142A2C-CD16-42D6-873A-C26D2A0506FA}" vid="{1BDDFF52-6CD6-40A5-AB3C-68EB2F1E4D0A}"/>
-    </a:ext>
-  </a:extLst>
 </a:theme>
 </file>
--- a/ground-vehicle/docs/courses/beginner-ps3/l1_introduction.pptx
+++ b/ground-vehicle/docs/courses/beginner-ps3/l1_introduction.pptx
@@ -1118,7 +1118,7 @@
               <a:rPr sz="1200">
                 <a:latin typeface="Calibri"/>
               </a:rPr>
-              <a:t>The placeholder is a photograph we still owe this deck. Until it arrives, demonstrate it instead.</a:t>
+              <a:t>The photograph is the vehicle sitting on its back. What it shows is why it works: the wheels stand proud of the frame on both faces, so there is no wrong way up.</a:t>
             </a:r>
           </a:p>
         </p:txBody>
@@ -3196,7 +3196,7 @@
               <a:rPr sz="1200">
                 <a:latin typeface="Calibri"/>
               </a:rPr>
-              <a:t>The photograph here is still to be taken. Until it arrives, wire one up on the desk and hold it where people can see.</a:t>
+              <a:t>Walk the photograph with them: red into pin 2 on the dev module, yellow into a GND socket on the expansion header. Two wires, and the breadboard is running off the vehicle.</a:t>
             </a:r>
           </a:p>
         </p:txBody>
@@ -9618,7 +9618,7 @@
       </p:sp>
       <p:pic>
         <p:nvPicPr>
-          <p:cNvPr id="7" name="Picture 6" descr="vehicle-gen3-top.jpg"/>
+          <p:cNvPr id="7" name="Picture 6" descr="vehicle-gen1-and-gen2.jpg"/>
           <p:cNvPicPr>
             <a:picLocks noChangeAspect="1"/>
           </p:cNvPicPr>
@@ -9632,6 +9632,30 @@
         </p:blipFill>
         <p:spPr>
           <a:xfrm>
+            <a:off x="502920" y="2421051"/>
+            <a:ext cx="5410047" cy="2454809"/>
+          </a:xfrm>
+          <a:prstGeom prst="rect">
+            <a:avLst/>
+          </a:prstGeom>
+        </p:spPr>
+      </p:pic>
+      <p:pic>
+        <p:nvPicPr>
+          <p:cNvPr id="8" name="Picture 7" descr="vehicle-gen3-top.jpg"/>
+          <p:cNvPicPr>
+            <a:picLocks noChangeAspect="1"/>
+          </p:cNvPicPr>
+          <p:nvPr/>
+        </p:nvPicPr>
+        <p:blipFill>
+          <a:blip r:embed="rId3"/>
+          <a:stretch>
+            <a:fillRect/>
+          </a:stretch>
+        </p:blipFill>
+        <p:spPr>
+          <a:xfrm>
             <a:off x="6533158" y="1810512"/>
             <a:ext cx="4901184" cy="3675888"/>
           </a:xfrm>
@@ -9640,125 +9664,6 @@
           </a:prstGeom>
         </p:spPr>
       </p:pic>
-      <p:sp>
-        <p:nvSpPr>
-          <p:cNvPr id="8" name="Rectangle 7"/>
-          <p:cNvSpPr/>
-          <p:nvPr/>
-        </p:nvSpPr>
-        <p:spPr>
-          <a:xfrm>
-            <a:off x="502920" y="1810512"/>
-            <a:ext cx="5410047" cy="3675888"/>
-          </a:xfrm>
-          <a:prstGeom prst="rect">
-            <a:avLst/>
-          </a:prstGeom>
-          <a:solidFill>
-            <a:srgbClr val="EEF3F8"/>
-          </a:solidFill>
-          <a:ln w="19050">
-            <a:solidFill>
-              <a:srgbClr val="0E7C86"/>
-            </a:solidFill>
-            <a:prstDash val="dash"/>
-          </a:ln>
-          <a:effectLst/>
-        </p:spPr>
-        <p:style>
-          <a:lnRef idx="1">
-            <a:schemeClr val="accent1"/>
-          </a:lnRef>
-          <a:fillRef idx="3">
-            <a:schemeClr val="accent1"/>
-          </a:fillRef>
-          <a:effectRef idx="2">
-            <a:schemeClr val="accent1"/>
-          </a:effectRef>
-          <a:fontRef idx="minor">
-            <a:schemeClr val="lt1"/>
-          </a:fontRef>
-        </p:style>
-        <p:txBody>
-          <a:bodyPr rtlCol="0" anchor="ctr" wrap="square" lIns="164592" rIns="164592" tIns="109728" bIns="109728"/>
-          <a:lstStyle/>
-          <a:p>
-            <a:pPr algn="ctr">
-              <a:lnSpc>
-                <a:spcPct val="100000"/>
-              </a:lnSpc>
-              <a:spcAft>
-                <a:spcPts val="700"/>
-              </a:spcAft>
-              <a:defRPr sz="1600" b="0">
-                <a:solidFill>
-                  <a:srgbClr val="0E7C86"/>
-                </a:solidFill>
-                <a:latin typeface="Calibri"/>
-              </a:defRPr>
-            </a:pPr>
-            <a:r>
-              <a:rPr sz="1600" b="1">
-                <a:solidFill>
-                  <a:srgbClr val="666666"/>
-                </a:solidFill>
-                <a:latin typeface="Calibri"/>
-              </a:rPr>
-              <a:t>PLACEHOLDER</a:t>
-            </a:r>
-          </a:p>
-          <a:p>
-            <a:pPr algn="ctr">
-              <a:lnSpc>
-                <a:spcPct val="100000"/>
-              </a:lnSpc>
-              <a:spcAft>
-                <a:spcPts val="700"/>
-              </a:spcAft>
-              <a:defRPr sz="1600" b="0">
-                <a:solidFill>
-                  <a:srgbClr val="0E7C86"/>
-                </a:solidFill>
-                <a:latin typeface="Calibri"/>
-              </a:defRPr>
-            </a:pPr>
-            <a:r>
-              <a:rPr sz="1600" b="0">
-                <a:solidFill>
-                  <a:srgbClr val="0E7C86"/>
-                </a:solidFill>
-                <a:latin typeface="Calibri"/>
-              </a:rPr>
-              <a:t>PHOTO: Gen 1 and Gen 2 together</a:t>
-            </a:r>
-          </a:p>
-          <a:p>
-            <a:pPr algn="ctr">
-              <a:lnSpc>
-                <a:spcPct val="100000"/>
-              </a:lnSpc>
-              <a:spcAft>
-                <a:spcPts val="700"/>
-              </a:spcAft>
-              <a:defRPr sz="1600" b="0">
-                <a:solidFill>
-                  <a:srgbClr val="0E7C86"/>
-                </a:solidFill>
-                <a:latin typeface="Calibri"/>
-              </a:defRPr>
-            </a:pPr>
-            <a:r>
-              <a:rPr sz="1600" b="0">
-                <a:solidFill>
-                  <a:srgbClr val="0E7C86"/>
-                </a:solidFill>
-                <a:latin typeface="Calibri"/>
-              </a:rPr>
-              <a:t>Gen 1 beside a Gen 2, same angle, so the change in the frame and the electronics is obvious.</a:t>
-            </a:r>
-          </a:p>
-        </p:txBody>
-      </p:sp>
       <p:sp>
         <p:nvSpPr>
           <p:cNvPr id="9" name="TextBox 8"/>
@@ -10743,9 +10648,33 @@
           </a:prstGeom>
         </p:spPr>
       </p:pic>
-      <p:sp>
-        <p:nvSpPr>
-          <p:cNvPr id="8" name="TextBox 7"/>
+      <p:pic>
+        <p:nvPicPr>
+          <p:cNvPr id="8" name="Picture 7" descr="vehicle-gen3-upside-down.jpg"/>
+          <p:cNvPicPr>
+            <a:picLocks noChangeAspect="1"/>
+          </p:cNvPicPr>
+          <p:nvPr/>
+        </p:nvPicPr>
+        <p:blipFill>
+          <a:blip r:embed="rId3"/>
+          <a:stretch>
+            <a:fillRect/>
+          </a:stretch>
+        </p:blipFill>
+        <p:spPr>
+          <a:xfrm>
+            <a:off x="6402886" y="1810512"/>
+            <a:ext cx="5161728" cy="3675888"/>
+          </a:xfrm>
+          <a:prstGeom prst="rect">
+            <a:avLst/>
+          </a:prstGeom>
+        </p:spPr>
+      </p:pic>
+      <p:sp>
+        <p:nvSpPr>
+          <p:cNvPr id="9" name="TextBox 8"/>
           <p:cNvSpPr txBox="1"/>
           <p:nvPr/>
         </p:nvSpPr>
@@ -10793,125 +10722,6 @@
       </p:sp>
       <p:sp>
         <p:nvSpPr>
-          <p:cNvPr id="9" name="Rectangle 8"/>
-          <p:cNvSpPr/>
-          <p:nvPr/>
-        </p:nvSpPr>
-        <p:spPr>
-          <a:xfrm>
-            <a:off x="6278727" y="1810512"/>
-            <a:ext cx="5410047" cy="3675888"/>
-          </a:xfrm>
-          <a:prstGeom prst="rect">
-            <a:avLst/>
-          </a:prstGeom>
-          <a:solidFill>
-            <a:srgbClr val="EEF3F8"/>
-          </a:solidFill>
-          <a:ln w="19050">
-            <a:solidFill>
-              <a:srgbClr val="0E7C86"/>
-            </a:solidFill>
-            <a:prstDash val="dash"/>
-          </a:ln>
-          <a:effectLst/>
-        </p:spPr>
-        <p:style>
-          <a:lnRef idx="1">
-            <a:schemeClr val="accent1"/>
-          </a:lnRef>
-          <a:fillRef idx="3">
-            <a:schemeClr val="accent1"/>
-          </a:fillRef>
-          <a:effectRef idx="2">
-            <a:schemeClr val="accent1"/>
-          </a:effectRef>
-          <a:fontRef idx="minor">
-            <a:schemeClr val="lt1"/>
-          </a:fontRef>
-        </p:style>
-        <p:txBody>
-          <a:bodyPr rtlCol="0" anchor="ctr" wrap="square" lIns="164592" rIns="164592" tIns="109728" bIns="109728"/>
-          <a:lstStyle/>
-          <a:p>
-            <a:pPr algn="ctr">
-              <a:lnSpc>
-                <a:spcPct val="100000"/>
-              </a:lnSpc>
-              <a:spcAft>
-                <a:spcPts val="700"/>
-              </a:spcAft>
-              <a:defRPr sz="1600" b="0">
-                <a:solidFill>
-                  <a:srgbClr val="0E7C86"/>
-                </a:solidFill>
-                <a:latin typeface="Calibri"/>
-              </a:defRPr>
-            </a:pPr>
-            <a:r>
-              <a:rPr sz="1600" b="1">
-                <a:solidFill>
-                  <a:srgbClr val="666666"/>
-                </a:solidFill>
-                <a:latin typeface="Calibri"/>
-              </a:rPr>
-              <a:t>PLACEHOLDER</a:t>
-            </a:r>
-          </a:p>
-          <a:p>
-            <a:pPr algn="ctr">
-              <a:lnSpc>
-                <a:spcPct val="100000"/>
-              </a:lnSpc>
-              <a:spcAft>
-                <a:spcPts val="700"/>
-              </a:spcAft>
-              <a:defRPr sz="1600" b="0">
-                <a:solidFill>
-                  <a:srgbClr val="0E7C86"/>
-                </a:solidFill>
-                <a:latin typeface="Calibri"/>
-              </a:defRPr>
-            </a:pPr>
-            <a:r>
-              <a:rPr sz="1600" b="0">
-                <a:solidFill>
-                  <a:srgbClr val="0E7C86"/>
-                </a:solidFill>
-                <a:latin typeface="Calibri"/>
-              </a:rPr>
-              <a:t>PHOTO: a Gen 3 driving upside down</a:t>
-            </a:r>
-          </a:p>
-          <a:p>
-            <a:pPr algn="ctr">
-              <a:lnSpc>
-                <a:spcPct val="100000"/>
-              </a:lnSpc>
-              <a:spcAft>
-                <a:spcPts val="700"/>
-              </a:spcAft>
-              <a:defRPr sz="1600" b="0">
-                <a:solidFill>
-                  <a:srgbClr val="0E7C86"/>
-                </a:solidFill>
-                <a:latin typeface="Calibri"/>
-              </a:defRPr>
-            </a:pPr>
-            <a:r>
-              <a:rPr sz="1600" b="0">
-                <a:solidFill>
-                  <a:srgbClr val="0E7C86"/>
-                </a:solidFill>
-                <a:latin typeface="Calibri"/>
-              </a:rPr>
-              <a:t>Wheels are at the vehicle's vertical center, so it runs either way up. Taken from floor level, mid-drive.</a:t>
-            </a:r>
-          </a:p>
-        </p:txBody>
-      </p:sp>
-      <p:sp>
-        <p:nvSpPr>
           <p:cNvPr id="10" name="TextBox 9"/>
           <p:cNvSpPr txBox="1"/>
           <p:nvPr/>
@@ -10937,7 +10747,7 @@
                 <a:spcPct val="100000"/>
               </a:lnSpc>
               <a:spcAft>
-                <a:spcPts val="600"/>
+                <a:spcPts val="200"/>
               </a:spcAft>
               <a:defRPr sz="1800" b="0">
                 <a:solidFill>
@@ -10953,7 +10763,7 @@
                 </a:solidFill>
                 <a:latin typeface="Calibri"/>
               </a:rPr>
-              <a:t>Flip it over and it keeps going</a:t>
+              <a:t>Flip it over and it keeps going  -  the wheels reach past the frame on both sides</a:t>
             </a:r>
           </a:p>
         </p:txBody>
@@ -14789,125 +14599,30 @@
           </a:p>
         </p:txBody>
       </p:sp>
-      <p:sp>
-        <p:nvSpPr>
-          <p:cNvPr id="6" name="Rectangle 5"/>
-          <p:cNvSpPr/>
-          <p:nvPr/>
-        </p:nvSpPr>
-        <p:spPr>
-          <a:xfrm>
-            <a:off x="502920" y="1188720"/>
-            <a:ext cx="11185855" cy="4343400"/>
+      <p:pic>
+        <p:nvPicPr>
+          <p:cNvPr id="6" name="Picture 5" descr="control-board-schematic.jpg"/>
+          <p:cNvPicPr>
+            <a:picLocks noChangeAspect="1"/>
+          </p:cNvPicPr>
+          <p:nvPr/>
+        </p:nvPicPr>
+        <p:blipFill>
+          <a:blip r:embed="rId2"/>
+          <a:stretch>
+            <a:fillRect/>
+          </a:stretch>
+        </p:blipFill>
+        <p:spPr>
+          <a:xfrm>
+            <a:off x="2782646" y="1188720"/>
+            <a:ext cx="6626403" cy="4343400"/>
           </a:xfrm>
           <a:prstGeom prst="rect">
             <a:avLst/>
           </a:prstGeom>
-          <a:solidFill>
-            <a:srgbClr val="EEF3F8"/>
-          </a:solidFill>
-          <a:ln w="19050">
-            <a:solidFill>
-              <a:srgbClr val="0E7C86"/>
-            </a:solidFill>
-            <a:prstDash val="dash"/>
-          </a:ln>
-          <a:effectLst/>
-        </p:spPr>
-        <p:style>
-          <a:lnRef idx="1">
-            <a:schemeClr val="accent1"/>
-          </a:lnRef>
-          <a:fillRef idx="3">
-            <a:schemeClr val="accent1"/>
-          </a:fillRef>
-          <a:effectRef idx="2">
-            <a:schemeClr val="accent1"/>
-          </a:effectRef>
-          <a:fontRef idx="minor">
-            <a:schemeClr val="lt1"/>
-          </a:fontRef>
-        </p:style>
-        <p:txBody>
-          <a:bodyPr rtlCol="0" anchor="ctr" wrap="square" lIns="164592" rIns="164592" tIns="109728" bIns="109728"/>
-          <a:lstStyle/>
-          <a:p>
-            <a:pPr algn="ctr">
-              <a:lnSpc>
-                <a:spcPct val="100000"/>
-              </a:lnSpc>
-              <a:spcAft>
-                <a:spcPts val="700"/>
-              </a:spcAft>
-              <a:defRPr sz="1600" b="0">
-                <a:solidFill>
-                  <a:srgbClr val="0E7C86"/>
-                </a:solidFill>
-                <a:latin typeface="Calibri"/>
-              </a:defRPr>
-            </a:pPr>
-            <a:r>
-              <a:rPr sz="1600" b="1">
-                <a:solidFill>
-                  <a:srgbClr val="666666"/>
-                </a:solidFill>
-                <a:latin typeface="Calibri"/>
-              </a:rPr>
-              <a:t>PLACEHOLDER</a:t>
-            </a:r>
-          </a:p>
-          <a:p>
-            <a:pPr algn="ctr">
-              <a:lnSpc>
-                <a:spcPct val="100000"/>
-              </a:lnSpc>
-              <a:spcAft>
-                <a:spcPts val="700"/>
-              </a:spcAft>
-              <a:defRPr sz="1600" b="0">
-                <a:solidFill>
-                  <a:srgbClr val="0E7C86"/>
-                </a:solidFill>
-                <a:latin typeface="Calibri"/>
-              </a:defRPr>
-            </a:pPr>
-            <a:r>
-              <a:rPr sz="1600" b="0">
-                <a:solidFill>
-                  <a:srgbClr val="0E7C86"/>
-                </a:solidFill>
-                <a:latin typeface="Calibri"/>
-              </a:rPr>
-              <a:t>SCHEMATIC: Gen 3 control board</a:t>
-            </a:r>
-          </a:p>
-          <a:p>
-            <a:pPr algn="ctr">
-              <a:lnSpc>
-                <a:spcPct val="100000"/>
-              </a:lnSpc>
-              <a:spcAft>
-                <a:spcPts val="700"/>
-              </a:spcAft>
-              <a:defRPr sz="1600" b="0">
-                <a:solidFill>
-                  <a:srgbClr val="0E7C86"/>
-                </a:solidFill>
-                <a:latin typeface="Calibri"/>
-              </a:defRPr>
-            </a:pPr>
-            <a:r>
-              <a:rPr sz="1600" b="0">
-                <a:solidFill>
-                  <a:srgbClr val="0E7C86"/>
-                </a:solidFill>
-                <a:latin typeface="Calibri"/>
-              </a:rPr>
-              <a:t>The full circuit diagram, exported as an image. A reference page - nobody is asked to read it today.</a:t>
-            </a:r>
-          </a:p>
-        </p:txBody>
-      </p:sp>
+        </p:spPr>
+      </p:pic>
       <p:sp>
         <p:nvSpPr>
           <p:cNvPr id="7" name="TextBox 6"/>
@@ -26273,125 +25988,30 @@
           </a:p>
         </p:txBody>
       </p:sp>
-      <p:sp>
-        <p:nvSpPr>
-          <p:cNvPr id="7" name="Rectangle 6"/>
-          <p:cNvSpPr/>
-          <p:nvPr/>
-        </p:nvSpPr>
-        <p:spPr>
-          <a:xfrm>
-            <a:off x="6766999" y="1188720"/>
-            <a:ext cx="4921776" cy="3291840"/>
+      <p:pic>
+        <p:nvPicPr>
+          <p:cNvPr id="7" name="Picture 6" descr="breadboard-powered-from-vehicle.jpg"/>
+          <p:cNvPicPr>
+            <a:picLocks noChangeAspect="1"/>
+          </p:cNvPicPr>
+          <p:nvPr/>
+        </p:nvPicPr>
+        <p:blipFill>
+          <a:blip r:embed="rId2"/>
+          <a:stretch>
+            <a:fillRect/>
+          </a:stretch>
+        </p:blipFill>
+        <p:spPr>
+          <a:xfrm>
+            <a:off x="7509551" y="1188720"/>
+            <a:ext cx="3436671" cy="3291840"/>
           </a:xfrm>
           <a:prstGeom prst="rect">
             <a:avLst/>
           </a:prstGeom>
-          <a:solidFill>
-            <a:srgbClr val="EEF3F8"/>
-          </a:solidFill>
-          <a:ln w="19050">
-            <a:solidFill>
-              <a:srgbClr val="0E7C86"/>
-            </a:solidFill>
-            <a:prstDash val="dash"/>
-          </a:ln>
-          <a:effectLst/>
-        </p:spPr>
-        <p:style>
-          <a:lnRef idx="1">
-            <a:schemeClr val="accent1"/>
-          </a:lnRef>
-          <a:fillRef idx="3">
-            <a:schemeClr val="accent1"/>
-          </a:fillRef>
-          <a:effectRef idx="2">
-            <a:schemeClr val="accent1"/>
-          </a:effectRef>
-          <a:fontRef idx="minor">
-            <a:schemeClr val="lt1"/>
-          </a:fontRef>
-        </p:style>
-        <p:txBody>
-          <a:bodyPr rtlCol="0" anchor="ctr" wrap="square" lIns="164592" rIns="164592" tIns="109728" bIns="109728"/>
-          <a:lstStyle/>
-          <a:p>
-            <a:pPr algn="ctr">
-              <a:lnSpc>
-                <a:spcPct val="100000"/>
-              </a:lnSpc>
-              <a:spcAft>
-                <a:spcPts val="700"/>
-              </a:spcAft>
-              <a:defRPr sz="1600" b="0">
-                <a:solidFill>
-                  <a:srgbClr val="0E7C86"/>
-                </a:solidFill>
-                <a:latin typeface="Calibri"/>
-              </a:defRPr>
-            </a:pPr>
-            <a:r>
-              <a:rPr sz="1600" b="1">
-                <a:solidFill>
-                  <a:srgbClr val="666666"/>
-                </a:solidFill>
-                <a:latin typeface="Calibri"/>
-              </a:rPr>
-              <a:t>PLACEHOLDER</a:t>
-            </a:r>
-          </a:p>
-          <a:p>
-            <a:pPr algn="ctr">
-              <a:lnSpc>
-                <a:spcPct val="100000"/>
-              </a:lnSpc>
-              <a:spcAft>
-                <a:spcPts val="700"/>
-              </a:spcAft>
-              <a:defRPr sz="1600" b="0">
-                <a:solidFill>
-                  <a:srgbClr val="0E7C86"/>
-                </a:solidFill>
-                <a:latin typeface="Calibri"/>
-              </a:defRPr>
-            </a:pPr>
-            <a:r>
-              <a:rPr sz="1600" b="0">
-                <a:solidFill>
-                  <a:srgbClr val="0E7C86"/>
-                </a:solidFill>
-                <a:latin typeface="Calibri"/>
-              </a:rPr>
-              <a:t>PHOTO: our own breadboard wired to GPIO 2 and GND</a:t>
-            </a:r>
-          </a:p>
-          <a:p>
-            <a:pPr algn="ctr">
-              <a:lnSpc>
-                <a:spcPct val="100000"/>
-              </a:lnSpc>
-              <a:spcAft>
-                <a:spcPts val="700"/>
-              </a:spcAft>
-              <a:defRPr sz="1600" b="0">
-                <a:solidFill>
-                  <a:srgbClr val="0E7C86"/>
-                </a:solidFill>
-                <a:latin typeface="Calibri"/>
-              </a:defRPr>
-            </a:pPr>
-            <a:r>
-              <a:rPr sz="1600" b="0">
-                <a:solidFill>
-                  <a:srgbClr val="0E7C86"/>
-                </a:solidFill>
-                <a:latin typeface="Calibri"/>
-              </a:rPr>
-              <a:t>Same circuit as the previous slide, powered from the vehicle through the top-plate cutout, LED lit.</a:t>
-            </a:r>
-          </a:p>
-        </p:txBody>
-      </p:sp>
+        </p:spPr>
+      </p:pic>
       <p:sp>
         <p:nvSpPr>
           <p:cNvPr id="8" name="TextBox 7"/>
@@ -26400,8 +26020,8 @@
         </p:nvSpPr>
         <p:spPr>
           <a:xfrm>
-            <a:off x="6766999" y="4535424"/>
-            <a:ext cx="4921776" cy="566928"/>
+            <a:off x="7509551" y="4535424"/>
+            <a:ext cx="3436671" cy="566928"/>
           </a:xfrm>
           <a:prstGeom prst="rect">
             <a:avLst/>
